--- a/paper/figs/fig1_pipeline.pptx
+++ b/paper/figs/fig1_pipeline.pptx
@@ -3096,8 +3096,8 @@
         </p:nvSpPr>
         <p:spPr>
           <a:xfrm>
-            <a:off x="228600" y="201168"/>
-            <a:ext cx="310896" cy="310896"/>
+            <a:off x="228600" y="182880"/>
+            <a:ext cx="365760" cy="365760"/>
           </a:xfrm>
           <a:prstGeom prst="ellipse">
             <a:avLst/>
@@ -3116,7 +3116,7 @@
           <a:p>
             <a:pPr algn="ctr"/>
             <a:r>
-              <a:rPr sz="1300" b="1" i="0">
+              <a:rPr sz="1500" b="1" i="0">
                 <a:solidFill>
                   <a:srgbClr val="FFFFFF"/>
                 </a:solidFill>
@@ -3135,8 +3135,8 @@
         </p:nvSpPr>
         <p:spPr>
           <a:xfrm>
-            <a:off x="612647" y="219456"/>
-            <a:ext cx="2926080" cy="310896"/>
+            <a:off x="612647" y="201168"/>
+            <a:ext cx="2926080" cy="347472"/>
           </a:xfrm>
           <a:prstGeom prst="rect">
             <a:avLst/>
@@ -3151,7 +3151,7 @@
           <a:p>
             <a:pPr algn="l"/>
             <a:r>
-              <a:rPr sz="1400" b="1" i="0">
+              <a:rPr sz="1600" b="1" i="0">
                 <a:solidFill>
                   <a:srgbClr val="1F1F1E"/>
                 </a:solidFill>
@@ -3170,8 +3170,8 @@
         </p:nvSpPr>
         <p:spPr>
           <a:xfrm>
-            <a:off x="3291840" y="201168"/>
-            <a:ext cx="310896" cy="310896"/>
+            <a:off x="3291840" y="182880"/>
+            <a:ext cx="365760" cy="365760"/>
           </a:xfrm>
           <a:prstGeom prst="ellipse">
             <a:avLst/>
@@ -3190,7 +3190,7 @@
           <a:p>
             <a:pPr algn="ctr"/>
             <a:r>
-              <a:rPr sz="1300" b="1" i="0">
+              <a:rPr sz="1500" b="1" i="0">
                 <a:solidFill>
                   <a:srgbClr val="FFFFFF"/>
                 </a:solidFill>
@@ -3209,8 +3209,8 @@
         </p:nvSpPr>
         <p:spPr>
           <a:xfrm>
-            <a:off x="3675888" y="219456"/>
-            <a:ext cx="2926080" cy="310896"/>
+            <a:off x="3675888" y="201168"/>
+            <a:ext cx="2926080" cy="347472"/>
           </a:xfrm>
           <a:prstGeom prst="rect">
             <a:avLst/>
@@ -3225,7 +3225,7 @@
           <a:p>
             <a:pPr algn="l"/>
             <a:r>
-              <a:rPr sz="1400" b="1" i="0">
+              <a:rPr sz="1600" b="1" i="0">
                 <a:solidFill>
                   <a:srgbClr val="1F1F1E"/>
                 </a:solidFill>
@@ -3244,8 +3244,8 @@
         </p:nvSpPr>
         <p:spPr>
           <a:xfrm>
-            <a:off x="6309360" y="201168"/>
-            <a:ext cx="310896" cy="310896"/>
+            <a:off x="6309360" y="182880"/>
+            <a:ext cx="365760" cy="365760"/>
           </a:xfrm>
           <a:prstGeom prst="ellipse">
             <a:avLst/>
@@ -3264,7 +3264,7 @@
           <a:p>
             <a:pPr algn="ctr"/>
             <a:r>
-              <a:rPr sz="1300" b="1" i="0">
+              <a:rPr sz="1500" b="1" i="0">
                 <a:solidFill>
                   <a:srgbClr val="FFFFFF"/>
                 </a:solidFill>
@@ -3283,8 +3283,8 @@
         </p:nvSpPr>
         <p:spPr>
           <a:xfrm>
-            <a:off x="6693408" y="219456"/>
-            <a:ext cx="2926080" cy="310896"/>
+            <a:off x="6693408" y="201168"/>
+            <a:ext cx="2926080" cy="347472"/>
           </a:xfrm>
           <a:prstGeom prst="rect">
             <a:avLst/>
@@ -3299,7 +3299,7 @@
           <a:p>
             <a:pPr algn="l"/>
             <a:r>
-              <a:rPr sz="1400" b="1" i="0">
+              <a:rPr sz="1600" b="1" i="0">
                 <a:solidFill>
                   <a:srgbClr val="1F1F1E"/>
                 </a:solidFill>
@@ -3318,8 +3318,8 @@
         </p:nvSpPr>
         <p:spPr>
           <a:xfrm>
-            <a:off x="9281160" y="201168"/>
-            <a:ext cx="310896" cy="310896"/>
+            <a:off x="9281160" y="182880"/>
+            <a:ext cx="365760" cy="365760"/>
           </a:xfrm>
           <a:prstGeom prst="ellipse">
             <a:avLst/>
@@ -3338,7 +3338,7 @@
           <a:p>
             <a:pPr algn="ctr"/>
             <a:r>
-              <a:rPr sz="1300" b="1" i="0">
+              <a:rPr sz="1500" b="1" i="0">
                 <a:solidFill>
                   <a:srgbClr val="FFFFFF"/>
                 </a:solidFill>
@@ -3357,8 +3357,8 @@
         </p:nvSpPr>
         <p:spPr>
           <a:xfrm>
-            <a:off x="9665208" y="219456"/>
-            <a:ext cx="2926080" cy="310896"/>
+            <a:off x="9665208" y="201168"/>
+            <a:ext cx="2926080" cy="347472"/>
           </a:xfrm>
           <a:prstGeom prst="rect">
             <a:avLst/>
@@ -3373,7 +3373,7 @@
           <a:p>
             <a:pPr algn="l"/>
             <a:r>
-              <a:rPr sz="1400" b="1" i="0">
+              <a:rPr sz="1600" b="1" i="0">
                 <a:solidFill>
                   <a:srgbClr val="1F1F1E"/>
                 </a:solidFill>
@@ -3392,8 +3392,8 @@
         </p:nvSpPr>
         <p:spPr>
           <a:xfrm>
-            <a:off x="228600" y="2487168"/>
-            <a:ext cx="1298448" cy="877824"/>
+            <a:off x="274320" y="2103120"/>
+            <a:ext cx="1481328" cy="1234440"/>
           </a:xfrm>
           <a:prstGeom prst="roundRect">
             <a:avLst>
@@ -3403,7 +3403,7 @@
           <a:solidFill>
             <a:srgbClr val="F7F6F2"/>
           </a:solidFill>
-          <a:ln w="12700">
+          <a:ln w="15240">
             <a:solidFill>
               <a:srgbClr val="8C8C8C"/>
             </a:solidFill>
@@ -3426,8 +3426,8 @@
         </p:nvSpPr>
         <p:spPr>
           <a:xfrm>
-            <a:off x="310896" y="2569464"/>
-            <a:ext cx="1298448" cy="877824"/>
+            <a:off x="374904" y="2203703"/>
+            <a:ext cx="1481328" cy="1234440"/>
           </a:xfrm>
           <a:prstGeom prst="roundRect">
             <a:avLst>
@@ -3437,7 +3437,7 @@
           <a:solidFill>
             <a:srgbClr val="F7F6F2"/>
           </a:solidFill>
-          <a:ln w="12700">
+          <a:ln w="15240">
             <a:solidFill>
               <a:srgbClr val="8C8C8C"/>
             </a:solidFill>
@@ -3460,8 +3460,8 @@
         </p:nvSpPr>
         <p:spPr>
           <a:xfrm>
-            <a:off x="393192" y="2651760"/>
-            <a:ext cx="1298448" cy="877824"/>
+            <a:off x="475488" y="2304288"/>
+            <a:ext cx="1481328" cy="1234440"/>
           </a:xfrm>
           <a:prstGeom prst="roundRect">
             <a:avLst>
@@ -3471,7 +3471,7 @@
           <a:solidFill>
             <a:srgbClr val="F7F6F2"/>
           </a:solidFill>
-          <a:ln w="12700">
+          <a:ln w="15240">
             <a:solidFill>
               <a:srgbClr val="8C8C8C"/>
             </a:solidFill>
@@ -3494,8 +3494,8 @@
         </p:nvSpPr>
         <p:spPr>
           <a:xfrm>
-            <a:off x="256032" y="2194560"/>
-            <a:ext cx="1554480" cy="256032"/>
+            <a:off x="274320" y="1755648"/>
+            <a:ext cx="1828800" cy="292608"/>
           </a:xfrm>
           <a:prstGeom prst="rect">
             <a:avLst/>
@@ -3508,9 +3508,9 @@
           </a:bodyPr>
           <a:lstStyle/>
           <a:p>
-            <a:pPr algn="ctr"/>
-            <a:r>
-              <a:rPr sz="950" b="0" i="1">
+            <a:pPr algn="l"/>
+            <a:r>
+              <a:rPr sz="1200" b="0" i="1">
                 <a:solidFill>
                   <a:srgbClr val="6B6A63"/>
                 </a:solidFill>
@@ -3529,8 +3529,8 @@
         </p:nvSpPr>
         <p:spPr>
           <a:xfrm>
-            <a:off x="402336" y="2761488"/>
-            <a:ext cx="1170432" cy="548640"/>
+            <a:off x="502920" y="2487168"/>
+            <a:ext cx="1371600" cy="731520"/>
           </a:xfrm>
           <a:prstGeom prst="rect">
             <a:avLst/>
@@ -3545,7 +3545,7 @@
           <a:p>
             <a:pPr algn="l"/>
             <a:r>
-              <a:rPr sz="750" b="0" i="0">
+              <a:rPr sz="900" b="0" i="0">
                 <a:solidFill>
                   <a:srgbClr val="1F1F1E"/>
                 </a:solidFill>
@@ -3557,7 +3557,7 @@
           <a:p>
             <a:pPr algn="l"/>
             <a:r>
-              <a:rPr sz="750" b="0" i="0">
+              <a:rPr sz="900" b="0" i="0">
                 <a:solidFill>
                   <a:srgbClr val="1F1F1E"/>
                 </a:solidFill>
@@ -3576,8 +3576,8 @@
         </p:nvSpPr>
         <p:spPr>
           <a:xfrm>
-            <a:off x="1188720" y="3218688"/>
-            <a:ext cx="365760" cy="256032"/>
+            <a:off x="1389888" y="3127248"/>
+            <a:ext cx="457200" cy="310896"/>
           </a:xfrm>
           <a:prstGeom prst="rect">
             <a:avLst/>
@@ -3592,7 +3592,7 @@
           <a:p>
             <a:pPr algn="ctr"/>
             <a:r>
-              <a:rPr sz="1100" b="1" i="0">
+              <a:rPr sz="1300" b="1" i="0">
                 <a:solidFill>
                   <a:srgbClr val="6B6A63"/>
                 </a:solidFill>
@@ -3611,8 +3611,8 @@
         </p:nvSpPr>
         <p:spPr>
           <a:xfrm>
-            <a:off x="1719072" y="2734056"/>
-            <a:ext cx="786384" cy="566928"/>
+            <a:off x="1956816" y="2596896"/>
+            <a:ext cx="713232" cy="658368"/>
           </a:xfrm>
           <a:prstGeom prst="rightArrow">
             <a:avLst>
@@ -3634,7 +3634,7 @@
           <a:p>
             <a:pPr algn="ctr"/>
             <a:r>
-              <a:rPr sz="750" b="1" i="0">
+              <a:rPr sz="900" b="1" i="0">
                 <a:solidFill>
                   <a:srgbClr val="FFFFFF"/>
                 </a:solidFill>
@@ -3646,7 +3646,7 @@
           <a:p>
             <a:pPr algn="ctr"/>
             <a:r>
-              <a:rPr sz="750" b="1" i="0">
+              <a:rPr sz="900" b="1" i="0">
                 <a:solidFill>
                   <a:srgbClr val="FFFFFF"/>
                 </a:solidFill>
@@ -3665,8 +3665,8 @@
         </p:nvSpPr>
         <p:spPr>
           <a:xfrm>
-            <a:off x="2560320" y="2212848"/>
-            <a:ext cx="1444752" cy="1627632"/>
+            <a:off x="2724912" y="1691640"/>
+            <a:ext cx="1517904" cy="2331720"/>
           </a:xfrm>
           <a:prstGeom prst="roundRect">
             <a:avLst>
@@ -3676,7 +3676,7 @@
           <a:solidFill>
             <a:srgbClr val="FFFFFF"/>
           </a:solidFill>
-          <a:ln w="13970">
+          <a:ln w="15240">
             <a:solidFill>
               <a:srgbClr val="8C8C8C"/>
             </a:solidFill>
@@ -3699,8 +3699,8 @@
         </p:nvSpPr>
         <p:spPr>
           <a:xfrm>
-            <a:off x="2670048" y="2395728"/>
-            <a:ext cx="237744" cy="310896"/>
+            <a:off x="2834640" y="1920240"/>
+            <a:ext cx="274320" cy="402336"/>
           </a:xfrm>
           <a:prstGeom prst="roundRect">
             <a:avLst>
@@ -3710,7 +3710,7 @@
           <a:solidFill>
             <a:srgbClr val="F7F6F2"/>
           </a:solidFill>
-          <a:ln w="10160">
+          <a:ln w="11430">
             <a:solidFill>
               <a:srgbClr val="8C8C8C"/>
             </a:solidFill>
@@ -3733,8 +3733,8 @@
         </p:nvSpPr>
         <p:spPr>
           <a:xfrm>
-            <a:off x="2999232" y="2441448"/>
-            <a:ext cx="219456" cy="219456"/>
+            <a:off x="3200400" y="1984248"/>
+            <a:ext cx="237744" cy="237744"/>
           </a:xfrm>
           <a:prstGeom prst="roundRect">
             <a:avLst>
@@ -3767,8 +3767,8 @@
         </p:nvSpPr>
         <p:spPr>
           <a:xfrm>
-            <a:off x="3246120" y="2441448"/>
-            <a:ext cx="219456" cy="219456"/>
+            <a:off x="3456432" y="1984248"/>
+            <a:ext cx="237744" cy="237744"/>
           </a:xfrm>
           <a:prstGeom prst="roundRect">
             <a:avLst>
@@ -3801,8 +3801,8 @@
         </p:nvSpPr>
         <p:spPr>
           <a:xfrm>
-            <a:off x="3493008" y="2441448"/>
-            <a:ext cx="219456" cy="219456"/>
+            <a:off x="3712464" y="1984248"/>
+            <a:ext cx="237744" cy="237744"/>
           </a:xfrm>
           <a:prstGeom prst="roundRect">
             <a:avLst>
@@ -3835,8 +3835,8 @@
         </p:nvSpPr>
         <p:spPr>
           <a:xfrm>
-            <a:off x="3739896" y="2441448"/>
-            <a:ext cx="219456" cy="219456"/>
+            <a:off x="3968496" y="1984248"/>
+            <a:ext cx="237744" cy="237744"/>
           </a:xfrm>
           <a:prstGeom prst="roundRect">
             <a:avLst>
@@ -3869,8 +3869,8 @@
         </p:nvSpPr>
         <p:spPr>
           <a:xfrm>
-            <a:off x="2670048" y="2852928"/>
-            <a:ext cx="237744" cy="310896"/>
+            <a:off x="2834640" y="2578608"/>
+            <a:ext cx="274320" cy="402336"/>
           </a:xfrm>
           <a:prstGeom prst="roundRect">
             <a:avLst>
@@ -3880,7 +3880,7 @@
           <a:solidFill>
             <a:srgbClr val="F7F6F2"/>
           </a:solidFill>
-          <a:ln w="10160">
+          <a:ln w="11430">
             <a:solidFill>
               <a:srgbClr val="8C8C8C"/>
             </a:solidFill>
@@ -3903,8 +3903,8 @@
         </p:nvSpPr>
         <p:spPr>
           <a:xfrm>
-            <a:off x="2999232" y="2898648"/>
-            <a:ext cx="219456" cy="219456"/>
+            <a:off x="3200400" y="2642616"/>
+            <a:ext cx="237744" cy="237744"/>
           </a:xfrm>
           <a:prstGeom prst="roundRect">
             <a:avLst>
@@ -3937,8 +3937,8 @@
         </p:nvSpPr>
         <p:spPr>
           <a:xfrm>
-            <a:off x="3246120" y="2898648"/>
-            <a:ext cx="219456" cy="219456"/>
+            <a:off x="3456432" y="2642616"/>
+            <a:ext cx="237744" cy="237744"/>
           </a:xfrm>
           <a:prstGeom prst="roundRect">
             <a:avLst>
@@ -3971,8 +3971,8 @@
         </p:nvSpPr>
         <p:spPr>
           <a:xfrm>
-            <a:off x="3493008" y="2898648"/>
-            <a:ext cx="219456" cy="219456"/>
+            <a:off x="3712464" y="2642616"/>
+            <a:ext cx="237744" cy="237744"/>
           </a:xfrm>
           <a:prstGeom prst="roundRect">
             <a:avLst>
@@ -4005,8 +4005,8 @@
         </p:nvSpPr>
         <p:spPr>
           <a:xfrm>
-            <a:off x="3739896" y="2898648"/>
-            <a:ext cx="219456" cy="219456"/>
+            <a:off x="3968496" y="2642616"/>
+            <a:ext cx="237744" cy="237744"/>
           </a:xfrm>
           <a:prstGeom prst="roundRect">
             <a:avLst>
@@ -4039,8 +4039,8 @@
         </p:nvSpPr>
         <p:spPr>
           <a:xfrm>
-            <a:off x="2670048" y="3310128"/>
-            <a:ext cx="237744" cy="310896"/>
+            <a:off x="2834640" y="3236976"/>
+            <a:ext cx="274320" cy="402336"/>
           </a:xfrm>
           <a:prstGeom prst="roundRect">
             <a:avLst>
@@ -4050,7 +4050,7 @@
           <a:solidFill>
             <a:srgbClr val="F7F6F2"/>
           </a:solidFill>
-          <a:ln w="10160">
+          <a:ln w="11430">
             <a:solidFill>
               <a:srgbClr val="8C8C8C"/>
             </a:solidFill>
@@ -4073,8 +4073,8 @@
         </p:nvSpPr>
         <p:spPr>
           <a:xfrm>
-            <a:off x="2999232" y="3355848"/>
-            <a:ext cx="219456" cy="219456"/>
+            <a:off x="3200400" y="3300984"/>
+            <a:ext cx="237744" cy="237744"/>
           </a:xfrm>
           <a:prstGeom prst="roundRect">
             <a:avLst>
@@ -4107,8 +4107,8 @@
         </p:nvSpPr>
         <p:spPr>
           <a:xfrm>
-            <a:off x="3246120" y="3355848"/>
-            <a:ext cx="219456" cy="219456"/>
+            <a:off x="3456432" y="3300984"/>
+            <a:ext cx="237744" cy="237744"/>
           </a:xfrm>
           <a:prstGeom prst="roundRect">
             <a:avLst>
@@ -4141,8 +4141,8 @@
         </p:nvSpPr>
         <p:spPr>
           <a:xfrm>
-            <a:off x="3493008" y="3355848"/>
-            <a:ext cx="219456" cy="219456"/>
+            <a:off x="3712464" y="3300984"/>
+            <a:ext cx="237744" cy="237744"/>
           </a:xfrm>
           <a:prstGeom prst="roundRect">
             <a:avLst>
@@ -4175,8 +4175,8 @@
         </p:nvSpPr>
         <p:spPr>
           <a:xfrm>
-            <a:off x="3739896" y="3355848"/>
-            <a:ext cx="219456" cy="219456"/>
+            <a:off x="3968496" y="3300984"/>
+            <a:ext cx="237744" cy="237744"/>
           </a:xfrm>
           <a:prstGeom prst="roundRect">
             <a:avLst>
@@ -4209,8 +4209,8 @@
         </p:nvSpPr>
         <p:spPr>
           <a:xfrm>
-            <a:off x="2487168" y="3913632"/>
-            <a:ext cx="1600200" cy="457200"/>
+            <a:off x="2633472" y="4114800"/>
+            <a:ext cx="1737360" cy="310896"/>
           </a:xfrm>
           <a:prstGeom prst="rect">
             <a:avLst/>
@@ -4225,13 +4225,13 @@
           <a:p>
             <a:pPr algn="ctr"/>
             <a:r>
-              <a:rPr sz="900" b="1" i="0">
+              <a:rPr sz="1100" b="1" i="0">
                 <a:solidFill>
                   <a:srgbClr val="4C72B0"/>
                 </a:solidFill>
                 <a:latin typeface="Times New Roman"/>
               </a:rPr>
-              <a:t>needed skills light up (blue)</a:t>
+              <a:t>needed skills light up</a:t>
             </a:r>
           </a:p>
         </p:txBody>
@@ -4244,8 +4244,8 @@
         </p:nvSpPr>
         <p:spPr>
           <a:xfrm>
-            <a:off x="4059936" y="2734056"/>
-            <a:ext cx="731520" cy="566928"/>
+            <a:off x="4297680" y="2596896"/>
+            <a:ext cx="658368" cy="658368"/>
           </a:xfrm>
           <a:prstGeom prst="rightArrow">
             <a:avLst>
@@ -4267,7 +4267,7 @@
           <a:p>
             <a:pPr algn="ctr"/>
             <a:r>
-              <a:rPr sz="750" b="1" i="0">
+              <a:rPr sz="900" b="1" i="0">
                 <a:solidFill>
                   <a:srgbClr val="FFFFFF"/>
                 </a:solidFill>
@@ -4279,13 +4279,13 @@
           <a:p>
             <a:pPr algn="ctr"/>
             <a:r>
-              <a:rPr sz="750" b="1" i="0">
+              <a:rPr sz="900" b="1" i="0">
                 <a:solidFill>
                   <a:srgbClr val="FFFFFF"/>
                 </a:solidFill>
                 <a:latin typeface="Times New Roman"/>
               </a:rPr>
-              <a:t>dictionary</a:t>
+              <a:t>coding</a:t>
             </a:r>
           </a:p>
         </p:txBody>
@@ -4298,8 +4298,8 @@
         </p:nvSpPr>
         <p:spPr>
           <a:xfrm>
-            <a:off x="4846320" y="1901952"/>
-            <a:ext cx="1719072" cy="2048256"/>
+            <a:off x="5010912" y="1463040"/>
+            <a:ext cx="1810512" cy="2697480"/>
           </a:xfrm>
           <a:prstGeom prst="roundRect">
             <a:avLst>
@@ -4309,7 +4309,7 @@
           <a:solidFill>
             <a:srgbClr val="FFFFFF"/>
           </a:solidFill>
-          <a:ln w="13970">
+          <a:ln w="15240">
             <a:solidFill>
               <a:srgbClr val="8C8C8C"/>
             </a:solidFill>
@@ -4332,8 +4332,8 @@
         </p:nvSpPr>
         <p:spPr>
           <a:xfrm>
-            <a:off x="5001768" y="2084831"/>
-            <a:ext cx="237744" cy="237744"/>
+            <a:off x="5166360" y="1700784"/>
+            <a:ext cx="274320" cy="274320"/>
           </a:xfrm>
           <a:prstGeom prst="roundRect">
             <a:avLst>
@@ -4366,8 +4366,8 @@
         </p:nvSpPr>
         <p:spPr>
           <a:xfrm>
-            <a:off x="4960620" y="2043684"/>
-            <a:ext cx="320040" cy="320040"/>
+            <a:off x="5120640" y="1655064"/>
+            <a:ext cx="365760" cy="365760"/>
           </a:xfrm>
           <a:prstGeom prst="roundRect">
             <a:avLst>
@@ -4375,7 +4375,7 @@
             </a:avLst>
           </a:prstGeom>
           <a:noFill/>
-          <a:ln w="15240">
+          <a:ln w="16510">
             <a:solidFill>
               <a:srgbClr val="4C72B0"/>
             </a:solidFill>
@@ -4399,8 +4399,8 @@
         </p:nvSpPr>
         <p:spPr>
           <a:xfrm>
-            <a:off x="5294376" y="2084831"/>
-            <a:ext cx="237744" cy="237744"/>
+            <a:off x="5477256" y="1700784"/>
+            <a:ext cx="274320" cy="274320"/>
           </a:xfrm>
           <a:prstGeom prst="roundRect">
             <a:avLst>
@@ -4433,8 +4433,8 @@
         </p:nvSpPr>
         <p:spPr>
           <a:xfrm>
-            <a:off x="5586983" y="2084831"/>
-            <a:ext cx="237744" cy="237744"/>
+            <a:off x="5788152" y="1700784"/>
+            <a:ext cx="274320" cy="274320"/>
           </a:xfrm>
           <a:prstGeom prst="roundRect">
             <a:avLst>
@@ -4467,8 +4467,8 @@
         </p:nvSpPr>
         <p:spPr>
           <a:xfrm>
-            <a:off x="5879592" y="2084831"/>
-            <a:ext cx="237744" cy="237744"/>
+            <a:off x="6099048" y="1700784"/>
+            <a:ext cx="274320" cy="274320"/>
           </a:xfrm>
           <a:prstGeom prst="roundRect">
             <a:avLst>
@@ -4501,8 +4501,8 @@
         </p:nvSpPr>
         <p:spPr>
           <a:xfrm>
-            <a:off x="6172200" y="2084831"/>
-            <a:ext cx="237744" cy="237744"/>
+            <a:off x="6409944" y="1700784"/>
+            <a:ext cx="274320" cy="274320"/>
           </a:xfrm>
           <a:prstGeom prst="roundRect">
             <a:avLst>
@@ -4535,8 +4535,8 @@
         </p:nvSpPr>
         <p:spPr>
           <a:xfrm>
-            <a:off x="6131052" y="2043684"/>
-            <a:ext cx="320040" cy="320040"/>
+            <a:off x="6364224" y="1655064"/>
+            <a:ext cx="365760" cy="365760"/>
           </a:xfrm>
           <a:prstGeom prst="roundRect">
             <a:avLst>
@@ -4544,7 +4544,7 @@
             </a:avLst>
           </a:prstGeom>
           <a:noFill/>
-          <a:ln w="15240">
+          <a:ln w="16510">
             <a:solidFill>
               <a:srgbClr val="4C72B0"/>
             </a:solidFill>
@@ -4568,8 +4568,8 @@
         </p:nvSpPr>
         <p:spPr>
           <a:xfrm>
-            <a:off x="5001768" y="2633472"/>
-            <a:ext cx="237744" cy="237744"/>
+            <a:off x="5166360" y="2478024"/>
+            <a:ext cx="274320" cy="274320"/>
           </a:xfrm>
           <a:prstGeom prst="roundRect">
             <a:avLst>
@@ -4602,8 +4602,8 @@
         </p:nvSpPr>
         <p:spPr>
           <a:xfrm>
-            <a:off x="5294376" y="2633472"/>
-            <a:ext cx="237744" cy="237744"/>
+            <a:off x="5477256" y="2478024"/>
+            <a:ext cx="274320" cy="274320"/>
           </a:xfrm>
           <a:prstGeom prst="roundRect">
             <a:avLst>
@@ -4636,8 +4636,8 @@
         </p:nvSpPr>
         <p:spPr>
           <a:xfrm>
-            <a:off x="5253228" y="2592324"/>
-            <a:ext cx="320040" cy="320040"/>
+            <a:off x="5431536" y="2432304"/>
+            <a:ext cx="365760" cy="365760"/>
           </a:xfrm>
           <a:prstGeom prst="roundRect">
             <a:avLst>
@@ -4645,7 +4645,7 @@
             </a:avLst>
           </a:prstGeom>
           <a:noFill/>
-          <a:ln w="15240">
+          <a:ln w="16510">
             <a:solidFill>
               <a:srgbClr val="4C72B0"/>
             </a:solidFill>
@@ -4669,8 +4669,8 @@
         </p:nvSpPr>
         <p:spPr>
           <a:xfrm>
-            <a:off x="5586983" y="2633472"/>
-            <a:ext cx="237744" cy="237744"/>
+            <a:off x="5788152" y="2478024"/>
+            <a:ext cx="274320" cy="274320"/>
           </a:xfrm>
           <a:prstGeom prst="roundRect">
             <a:avLst>
@@ -4703,8 +4703,8 @@
         </p:nvSpPr>
         <p:spPr>
           <a:xfrm>
-            <a:off x="5879592" y="2633472"/>
-            <a:ext cx="237744" cy="237744"/>
+            <a:off x="6099048" y="2478024"/>
+            <a:ext cx="274320" cy="274320"/>
           </a:xfrm>
           <a:prstGeom prst="roundRect">
             <a:avLst>
@@ -4737,8 +4737,8 @@
         </p:nvSpPr>
         <p:spPr>
           <a:xfrm>
-            <a:off x="6172200" y="2633472"/>
-            <a:ext cx="237744" cy="237744"/>
+            <a:off x="6409944" y="2478024"/>
+            <a:ext cx="274320" cy="274320"/>
           </a:xfrm>
           <a:prstGeom prst="roundRect">
             <a:avLst>
@@ -4771,8 +4771,8 @@
         </p:nvSpPr>
         <p:spPr>
           <a:xfrm>
-            <a:off x="5001768" y="3182111"/>
-            <a:ext cx="237744" cy="237744"/>
+            <a:off x="5166360" y="3255264"/>
+            <a:ext cx="274320" cy="274320"/>
           </a:xfrm>
           <a:prstGeom prst="roundRect">
             <a:avLst>
@@ -4805,8 +4805,8 @@
         </p:nvSpPr>
         <p:spPr>
           <a:xfrm>
-            <a:off x="5294376" y="3182111"/>
-            <a:ext cx="237744" cy="237744"/>
+            <a:off x="5477256" y="3255264"/>
+            <a:ext cx="274320" cy="274320"/>
           </a:xfrm>
           <a:prstGeom prst="roundRect">
             <a:avLst>
@@ -4839,8 +4839,8 @@
         </p:nvSpPr>
         <p:spPr>
           <a:xfrm>
-            <a:off x="5586983" y="3182111"/>
-            <a:ext cx="237744" cy="237744"/>
+            <a:off x="5788152" y="3255264"/>
+            <a:ext cx="274320" cy="274320"/>
           </a:xfrm>
           <a:prstGeom prst="roundRect">
             <a:avLst>
@@ -4873,8 +4873,8 @@
         </p:nvSpPr>
         <p:spPr>
           <a:xfrm>
-            <a:off x="5545836" y="3140963"/>
-            <a:ext cx="320040" cy="320040"/>
+            <a:off x="5742432" y="3209544"/>
+            <a:ext cx="365760" cy="365760"/>
           </a:xfrm>
           <a:prstGeom prst="roundRect">
             <a:avLst>
@@ -4882,7 +4882,7 @@
             </a:avLst>
           </a:prstGeom>
           <a:noFill/>
-          <a:ln w="15240">
+          <a:ln w="16510">
             <a:solidFill>
               <a:srgbClr val="4C72B0"/>
             </a:solidFill>
@@ -4906,8 +4906,8 @@
         </p:nvSpPr>
         <p:spPr>
           <a:xfrm>
-            <a:off x="5879592" y="3182111"/>
-            <a:ext cx="237744" cy="237744"/>
+            <a:off x="6099048" y="3255264"/>
+            <a:ext cx="274320" cy="274320"/>
           </a:xfrm>
           <a:prstGeom prst="roundRect">
             <a:avLst>
@@ -4940,8 +4940,8 @@
         </p:nvSpPr>
         <p:spPr>
           <a:xfrm>
-            <a:off x="6172200" y="3182111"/>
-            <a:ext cx="237744" cy="237744"/>
+            <a:off x="6409944" y="3255264"/>
+            <a:ext cx="274320" cy="274320"/>
           </a:xfrm>
           <a:prstGeom prst="roundRect">
             <a:avLst>
@@ -4974,8 +4974,8 @@
         </p:nvSpPr>
         <p:spPr>
           <a:xfrm>
-            <a:off x="6131052" y="3140963"/>
-            <a:ext cx="320040" cy="320040"/>
+            <a:off x="6364224" y="3209544"/>
+            <a:ext cx="365760" cy="365760"/>
           </a:xfrm>
           <a:prstGeom prst="roundRect">
             <a:avLst>
@@ -4983,7 +4983,7 @@
             </a:avLst>
           </a:prstGeom>
           <a:noFill/>
-          <a:ln w="15240">
+          <a:ln w="16510">
             <a:solidFill>
               <a:srgbClr val="4C72B0"/>
             </a:solidFill>
@@ -5007,8 +5007,8 @@
         </p:nvSpPr>
         <p:spPr>
           <a:xfrm>
-            <a:off x="4846320" y="1645920"/>
-            <a:ext cx="1188720" cy="256032"/>
+            <a:off x="5010912" y="1115568"/>
+            <a:ext cx="1463040" cy="274320"/>
           </a:xfrm>
           <a:prstGeom prst="rect">
             <a:avLst/>
@@ -5023,7 +5023,7 @@
           <a:p>
             <a:pPr algn="l"/>
             <a:r>
-              <a:rPr sz="950" b="0" i="0">
+              <a:rPr sz="1100" b="0" i="0">
                 <a:solidFill>
                   <a:srgbClr val="6B6A63"/>
                 </a:solidFill>
@@ -5042,8 +5042,8 @@
         </p:nvSpPr>
         <p:spPr>
           <a:xfrm>
-            <a:off x="6144768" y="1810512"/>
-            <a:ext cx="1371600" cy="237744"/>
+            <a:off x="6309360" y="1481328"/>
+            <a:ext cx="1371600" cy="256032"/>
           </a:xfrm>
           <a:prstGeom prst="rect">
             <a:avLst/>
@@ -5058,7 +5058,7 @@
           <a:p>
             <a:pPr algn="l"/>
             <a:r>
-              <a:rPr sz="800" b="1" i="0">
+              <a:rPr sz="950" b="1" i="0">
                 <a:solidFill>
                   <a:srgbClr val="1F1F1E"/>
                 </a:solidFill>
@@ -5077,8 +5077,8 @@
         </p:nvSpPr>
         <p:spPr>
           <a:xfrm>
-            <a:off x="4681728" y="4059936"/>
-            <a:ext cx="2048256" cy="475488"/>
+            <a:off x="4846320" y="4279392"/>
+            <a:ext cx="2139696" cy="566928"/>
           </a:xfrm>
           <a:prstGeom prst="roundRect">
             <a:avLst>
@@ -5088,7 +5088,7 @@
           <a:solidFill>
             <a:srgbClr val="EEF2F9"/>
           </a:solidFill>
-          <a:ln w="16510">
+          <a:ln w="17780">
             <a:solidFill>
               <a:srgbClr val="4C72B0"/>
             </a:solidFill>
@@ -5101,7 +5101,7 @@
           <a:p>
             <a:pPr algn="ctr"/>
             <a:r>
-              <a:rPr sz="850" b="1" i="0">
+              <a:rPr sz="1000" b="1" i="0">
                 <a:solidFill>
                   <a:srgbClr val="4C72B0"/>
                 </a:solidFill>
@@ -5113,7 +5113,7 @@
           <a:p>
             <a:pPr algn="ctr"/>
             <a:r>
-              <a:rPr sz="850" b="1" i="0">
+              <a:rPr sz="1000" b="1" i="0">
                 <a:solidFill>
                   <a:srgbClr val="4C72B0"/>
                 </a:solidFill>
@@ -5132,8 +5132,8 @@
         </p:nvSpPr>
         <p:spPr>
           <a:xfrm>
-            <a:off x="6620256" y="2734056"/>
-            <a:ext cx="713232" cy="566928"/>
+            <a:off x="6876288" y="2596896"/>
+            <a:ext cx="640080" cy="658368"/>
           </a:xfrm>
           <a:prstGeom prst="rightArrow">
             <a:avLst>
@@ -5155,7 +5155,7 @@
           <a:p>
             <a:pPr algn="ctr"/>
             <a:r>
-              <a:rPr sz="750" b="1" i="0">
+              <a:rPr sz="900" b="1" i="0">
                 <a:solidFill>
                   <a:srgbClr val="FFFFFF"/>
                 </a:solidFill>
@@ -5167,7 +5167,7 @@
           <a:p>
             <a:pPr algn="ctr"/>
             <a:r>
-              <a:rPr sz="750" b="1" i="0">
+              <a:rPr sz="900" b="1" i="0">
                 <a:solidFill>
                   <a:srgbClr val="FFFFFF"/>
                 </a:solidFill>
@@ -5186,8 +5186,8 @@
         </p:nvSpPr>
         <p:spPr>
           <a:xfrm>
-            <a:off x="7562088" y="987551"/>
-            <a:ext cx="822960" cy="621792"/>
+            <a:off x="7731252" y="822960"/>
+            <a:ext cx="960120" cy="731520"/>
           </a:xfrm>
           <a:prstGeom prst="roundRect">
             <a:avLst>
@@ -5220,7 +5220,7 @@
         </p:nvSpPr>
         <p:spPr>
           <a:xfrm>
-            <a:off x="7962595" y="859535"/>
+            <a:off x="8200339" y="694944"/>
             <a:ext cx="21945" cy="128016"/>
           </a:xfrm>
           <a:prstGeom prst="rect">
@@ -5250,7 +5250,7 @@
         </p:nvSpPr>
         <p:spPr>
           <a:xfrm>
-            <a:off x="7927848" y="768095"/>
+            <a:off x="8165592" y="603504"/>
             <a:ext cx="91440" cy="91440"/>
           </a:xfrm>
           <a:prstGeom prst="ellipse">
@@ -5280,7 +5280,7 @@
         </p:nvSpPr>
         <p:spPr>
           <a:xfrm>
-            <a:off x="7784287" y="1195120"/>
+            <a:off x="7997342" y="1074420"/>
             <a:ext cx="82296" cy="82296"/>
           </a:xfrm>
           <a:prstGeom prst="ellipse">
@@ -5310,7 +5310,7 @@
         </p:nvSpPr>
         <p:spPr>
           <a:xfrm>
-            <a:off x="8080552" y="1195120"/>
+            <a:off x="8342985" y="1074420"/>
             <a:ext cx="82296" cy="82296"/>
           </a:xfrm>
           <a:prstGeom prst="ellipse">
@@ -5340,8 +5340,8 @@
         </p:nvSpPr>
         <p:spPr>
           <a:xfrm>
-            <a:off x="7858353" y="1373063"/>
-            <a:ext cx="230428" cy="27432"/>
+            <a:off x="8076895" y="1276502"/>
+            <a:ext cx="268833" cy="27432"/>
           </a:xfrm>
           <a:prstGeom prst="roundRect">
             <a:avLst>
@@ -5372,8 +5372,8 @@
         </p:nvSpPr>
         <p:spPr>
           <a:xfrm>
-            <a:off x="7242048" y="1645920"/>
-            <a:ext cx="1463040" cy="256032"/>
+            <a:off x="7411212" y="1591056"/>
+            <a:ext cx="1600200" cy="256032"/>
           </a:xfrm>
           <a:prstGeom prst="rect">
             <a:avLst/>
@@ -5388,7 +5388,7 @@
           <a:p>
             <a:pPr algn="ctr"/>
             <a:r>
-              <a:rPr sz="900" b="1" i="0">
+              <a:rPr sz="1050" b="1" i="0">
                 <a:solidFill>
                   <a:srgbClr val="1F1F1E"/>
                 </a:solidFill>
@@ -5407,8 +5407,8 @@
         </p:nvSpPr>
         <p:spPr>
           <a:xfrm>
-            <a:off x="7909560" y="1810512"/>
-            <a:ext cx="128016" cy="384048"/>
+            <a:off x="8147304" y="1810512"/>
+            <a:ext cx="146304" cy="365760"/>
           </a:xfrm>
           <a:prstGeom prst="downArrow">
             <a:avLst/>
@@ -5437,8 +5437,8 @@
         </p:nvSpPr>
         <p:spPr>
           <a:xfrm>
-            <a:off x="8083296" y="1874519"/>
-            <a:ext cx="914400" cy="237744"/>
+            <a:off x="8339327" y="1865376"/>
+            <a:ext cx="914400" cy="256032"/>
           </a:xfrm>
           <a:prstGeom prst="rect">
             <a:avLst/>
@@ -5453,7 +5453,7 @@
           <a:p>
             <a:pPr algn="l"/>
             <a:r>
-              <a:rPr sz="850" b="0" i="0">
+              <a:rPr sz="1000" b="0" i="0">
                 <a:solidFill>
                   <a:srgbClr val="6B6A63"/>
                 </a:solidFill>
@@ -5472,8 +5472,8 @@
         </p:nvSpPr>
         <p:spPr>
           <a:xfrm>
-            <a:off x="7388352" y="2267712"/>
-            <a:ext cx="1152144" cy="438912"/>
+            <a:off x="7571231" y="2286000"/>
+            <a:ext cx="1298448" cy="566928"/>
           </a:xfrm>
           <a:prstGeom prst="roundRect">
             <a:avLst>
@@ -5483,7 +5483,7 @@
           <a:solidFill>
             <a:srgbClr val="F7F6F2"/>
           </a:solidFill>
-          <a:ln w="15240">
+          <a:ln w="16510">
             <a:solidFill>
               <a:srgbClr val="4C72B0"/>
             </a:solidFill>
@@ -5506,8 +5506,8 @@
         </p:nvSpPr>
         <p:spPr>
           <a:xfrm>
-            <a:off x="7488936" y="2377440"/>
-            <a:ext cx="219456" cy="219456"/>
+            <a:off x="7699248" y="2432304"/>
+            <a:ext cx="274320" cy="274320"/>
           </a:xfrm>
           <a:prstGeom prst="roundRect">
             <a:avLst>
@@ -5540,8 +5540,8 @@
         </p:nvSpPr>
         <p:spPr>
           <a:xfrm>
-            <a:off x="7744967" y="2377440"/>
-            <a:ext cx="219456" cy="219456"/>
+            <a:off x="8001000" y="2432304"/>
+            <a:ext cx="274320" cy="274320"/>
           </a:xfrm>
           <a:prstGeom prst="roundRect">
             <a:avLst>
@@ -5574,8 +5574,8 @@
         </p:nvSpPr>
         <p:spPr>
           <a:xfrm>
-            <a:off x="8001000" y="2377440"/>
-            <a:ext cx="219456" cy="219456"/>
+            <a:off x="8302752" y="2432304"/>
+            <a:ext cx="274320" cy="274320"/>
           </a:xfrm>
           <a:prstGeom prst="roundRect">
             <a:avLst>
@@ -5608,8 +5608,8 @@
         </p:nvSpPr>
         <p:spPr>
           <a:xfrm>
-            <a:off x="7388352" y="2816352"/>
-            <a:ext cx="1152144" cy="438912"/>
+            <a:off x="7571231" y="2999232"/>
+            <a:ext cx="1298448" cy="566928"/>
           </a:xfrm>
           <a:prstGeom prst="roundRect">
             <a:avLst>
@@ -5619,7 +5619,7 @@
           <a:solidFill>
             <a:srgbClr val="F7F6F2"/>
           </a:solidFill>
-          <a:ln w="15240">
+          <a:ln w="16510">
             <a:solidFill>
               <a:srgbClr val="4C72B0"/>
             </a:solidFill>
@@ -5642,8 +5642,8 @@
         </p:nvSpPr>
         <p:spPr>
           <a:xfrm>
-            <a:off x="7488936" y="2926080"/>
-            <a:ext cx="219456" cy="219456"/>
+            <a:off x="7699248" y="3145536"/>
+            <a:ext cx="274320" cy="274320"/>
           </a:xfrm>
           <a:prstGeom prst="roundRect">
             <a:avLst>
@@ -5676,8 +5676,8 @@
         </p:nvSpPr>
         <p:spPr>
           <a:xfrm>
-            <a:off x="7744967" y="2926080"/>
-            <a:ext cx="219456" cy="219456"/>
+            <a:off x="8001000" y="3145536"/>
+            <a:ext cx="274320" cy="274320"/>
           </a:xfrm>
           <a:prstGeom prst="roundRect">
             <a:avLst>
@@ -5710,8 +5710,8 @@
         </p:nvSpPr>
         <p:spPr>
           <a:xfrm>
-            <a:off x="8001000" y="2926080"/>
-            <a:ext cx="219456" cy="219456"/>
+            <a:off x="8302752" y="3145536"/>
+            <a:ext cx="274320" cy="274320"/>
           </a:xfrm>
           <a:prstGeom prst="roundRect">
             <a:avLst>
@@ -5744,8 +5744,8 @@
         </p:nvSpPr>
         <p:spPr>
           <a:xfrm>
-            <a:off x="7388352" y="3364991"/>
-            <a:ext cx="1152144" cy="438912"/>
+            <a:off x="7571231" y="3712464"/>
+            <a:ext cx="1298448" cy="566928"/>
           </a:xfrm>
           <a:prstGeom prst="roundRect">
             <a:avLst>
@@ -5755,7 +5755,7 @@
           <a:solidFill>
             <a:srgbClr val="E8E6E1"/>
           </a:solidFill>
-          <a:ln w="15240">
+          <a:ln w="16510">
             <a:solidFill>
               <a:srgbClr val="8C8C8C"/>
             </a:solidFill>
@@ -5778,8 +5778,8 @@
         </p:nvSpPr>
         <p:spPr>
           <a:xfrm>
-            <a:off x="7488936" y="3474720"/>
-            <a:ext cx="219456" cy="219456"/>
+            <a:off x="7699248" y="3858768"/>
+            <a:ext cx="274320" cy="274320"/>
           </a:xfrm>
           <a:prstGeom prst="roundRect">
             <a:avLst>
@@ -5812,8 +5812,8 @@
         </p:nvSpPr>
         <p:spPr>
           <a:xfrm>
-            <a:off x="7744967" y="3474720"/>
-            <a:ext cx="219456" cy="219456"/>
+            <a:off x="8001000" y="3858768"/>
+            <a:ext cx="274320" cy="274320"/>
           </a:xfrm>
           <a:prstGeom prst="roundRect">
             <a:avLst>
@@ -5846,8 +5846,8 @@
         </p:nvSpPr>
         <p:spPr>
           <a:xfrm>
-            <a:off x="8001000" y="3474720"/>
-            <a:ext cx="219456" cy="219456"/>
+            <a:off x="8302752" y="3858768"/>
+            <a:ext cx="274320" cy="274320"/>
           </a:xfrm>
           <a:prstGeom prst="roundRect">
             <a:avLst>
@@ -5880,13 +5880,13 @@
         </p:nvCxnSpPr>
         <p:spPr>
           <a:xfrm flipV="1">
-            <a:off x="7315200" y="3328415"/>
-            <a:ext cx="1298448" cy="512064"/>
+            <a:off x="7498079" y="3657600"/>
+            <a:ext cx="1463041" cy="676656"/>
           </a:xfrm>
           <a:prstGeom prst="line">
             <a:avLst/>
           </a:prstGeom>
-          <a:ln w="25400">
+          <a:ln w="27940">
             <a:solidFill>
               <a:srgbClr val="C44E52"/>
             </a:solidFill>
@@ -5902,8 +5902,8 @@
         </p:nvSpPr>
         <p:spPr>
           <a:xfrm>
-            <a:off x="7114032" y="3950208"/>
-            <a:ext cx="1737360" cy="457200"/>
+            <a:off x="7333488" y="4498848"/>
+            <a:ext cx="1828800" cy="548640"/>
           </a:xfrm>
           <a:prstGeom prst="rect">
             <a:avLst/>
@@ -5918,7 +5918,7 @@
           <a:p>
             <a:pPr algn="ctr"/>
             <a:r>
-              <a:rPr sz="800" b="1" i="0">
+              <a:rPr sz="950" b="1" i="0">
                 <a:solidFill>
                   <a:srgbClr val="C44E52"/>
                 </a:solidFill>
@@ -5930,7 +5930,7 @@
           <a:p>
             <a:pPr algn="ctr"/>
             <a:r>
-              <a:rPr sz="800" b="1" i="0">
+              <a:rPr sz="950" b="1" i="0">
                 <a:solidFill>
                   <a:srgbClr val="C44E52"/>
                 </a:solidFill>
@@ -5949,8 +5949,8 @@
         </p:nvSpPr>
         <p:spPr>
           <a:xfrm>
-            <a:off x="8631936" y="2734056"/>
-            <a:ext cx="676656" cy="566928"/>
+            <a:off x="8979408" y="2596896"/>
+            <a:ext cx="603504" cy="658368"/>
           </a:xfrm>
           <a:prstGeom prst="rightArrow">
             <a:avLst>
@@ -5972,7 +5972,7 @@
           <a:p>
             <a:pPr algn="ctr"/>
             <a:r>
-              <a:rPr sz="750" b="1" i="0">
+              <a:rPr sz="900" b="1" i="0">
                 <a:solidFill>
                   <a:srgbClr val="FFFFFF"/>
                 </a:solidFill>
@@ -5984,7 +5984,7 @@
           <a:p>
             <a:pPr algn="ctr"/>
             <a:r>
-              <a:rPr sz="750" b="1" i="0">
+              <a:rPr sz="900" b="1" i="0">
                 <a:solidFill>
                   <a:srgbClr val="FFFFFF"/>
                 </a:solidFill>
@@ -6003,8 +6003,8 @@
         </p:nvSpPr>
         <p:spPr>
           <a:xfrm>
-            <a:off x="9290303" y="2551176"/>
-            <a:ext cx="841248" cy="658368"/>
+            <a:off x="9610344" y="2167128"/>
+            <a:ext cx="932688" cy="749808"/>
           </a:xfrm>
           <a:prstGeom prst="roundRect">
             <a:avLst>
@@ -6037,7 +6037,7 @@
         </p:nvSpPr>
         <p:spPr>
           <a:xfrm>
-            <a:off x="9699955" y="2423160"/>
+            <a:off x="10065715" y="2039112"/>
             <a:ext cx="21945" cy="128016"/>
           </a:xfrm>
           <a:prstGeom prst="rect">
@@ -6067,7 +6067,7 @@
         </p:nvSpPr>
         <p:spPr>
           <a:xfrm>
-            <a:off x="9665207" y="2331720"/>
+            <a:off x="10030967" y="1947672"/>
             <a:ext cx="91440" cy="91440"/>
           </a:xfrm>
           <a:prstGeom prst="ellipse">
@@ -6097,7 +6097,7 @@
         </p:nvSpPr>
         <p:spPr>
           <a:xfrm>
-            <a:off x="9518355" y="2773375"/>
+            <a:off x="9867656" y="2425903"/>
             <a:ext cx="82296" cy="82296"/>
           </a:xfrm>
           <a:prstGeom prst="ellipse">
@@ -6127,7 +6127,7 @@
         </p:nvSpPr>
         <p:spPr>
           <a:xfrm>
-            <a:off x="9821204" y="2773375"/>
+            <a:off x="10203423" y="2425903"/>
             <a:ext cx="82296" cy="82296"/>
           </a:xfrm>
           <a:prstGeom prst="ellipse">
@@ -6157,8 +6157,8 @@
         </p:nvSpPr>
         <p:spPr>
           <a:xfrm>
-            <a:off x="9593153" y="2959364"/>
-            <a:ext cx="235549" cy="27432"/>
+            <a:off x="9946111" y="2632008"/>
+            <a:ext cx="261152" cy="27432"/>
           </a:xfrm>
           <a:prstGeom prst="roundRect">
             <a:avLst>
@@ -6189,8 +6189,8 @@
         </p:nvSpPr>
         <p:spPr>
           <a:xfrm>
-            <a:off x="8970263" y="3246120"/>
-            <a:ext cx="1481328" cy="256032"/>
+            <a:off x="9290304" y="2953512"/>
+            <a:ext cx="1572768" cy="256032"/>
           </a:xfrm>
           <a:prstGeom prst="rect">
             <a:avLst/>
@@ -6205,7 +6205,7 @@
           <a:p>
             <a:pPr algn="ctr"/>
             <a:r>
-              <a:rPr sz="900" b="1" i="0">
+              <a:rPr sz="1050" b="1" i="0">
                 <a:solidFill>
                   <a:srgbClr val="1F1F1E"/>
                 </a:solidFill>
@@ -6224,8 +6224,8 @@
         </p:nvSpPr>
         <p:spPr>
           <a:xfrm>
-            <a:off x="9272016" y="3749039"/>
-            <a:ext cx="868680" cy="182880"/>
+            <a:off x="9582912" y="4041648"/>
+            <a:ext cx="969264" cy="219456"/>
           </a:xfrm>
           <a:prstGeom prst="roundRect">
             <a:avLst>
@@ -6235,7 +6235,7 @@
           <a:solidFill>
             <a:srgbClr val="FFFFFF"/>
           </a:solidFill>
-          <a:ln w="12700">
+          <a:ln w="13970">
             <a:solidFill>
               <a:srgbClr val="8C8C8C"/>
             </a:solidFill>
@@ -6258,8 +6258,8 @@
         </p:nvSpPr>
         <p:spPr>
           <a:xfrm>
-            <a:off x="9299448" y="3776472"/>
-            <a:ext cx="731520" cy="128016"/>
+            <a:off x="9610344" y="4069080"/>
+            <a:ext cx="822960" cy="164592"/>
           </a:xfrm>
           <a:prstGeom prst="roundRect">
             <a:avLst>
@@ -6290,8 +6290,8 @@
         </p:nvSpPr>
         <p:spPr>
           <a:xfrm>
-            <a:off x="10158984" y="3712463"/>
-            <a:ext cx="237744" cy="237744"/>
+            <a:off x="10570464" y="3986784"/>
+            <a:ext cx="274320" cy="274320"/>
           </a:xfrm>
           <a:prstGeom prst="ellipse">
             <a:avLst/>
@@ -6299,7 +6299,7 @@
           <a:solidFill>
             <a:srgbClr val="55A868"/>
           </a:solidFill>
-          <a:ln w="15240">
+          <a:ln w="16510">
             <a:solidFill>
               <a:srgbClr val="FFFFFF"/>
             </a:solidFill>
@@ -6312,7 +6312,7 @@
           <a:p>
             <a:pPr algn="ctr"/>
             <a:r>
-              <a:rPr sz="900" b="1" i="0">
+              <a:rPr sz="1000" b="1" i="0">
                 <a:solidFill>
                   <a:srgbClr val="FFFFFF"/>
                 </a:solidFill>
@@ -6331,8 +6331,8 @@
         </p:nvSpPr>
         <p:spPr>
           <a:xfrm>
-            <a:off x="9052560" y="4005072"/>
-            <a:ext cx="1463040" cy="237744"/>
+            <a:off x="9400032" y="4334256"/>
+            <a:ext cx="1554480" cy="256032"/>
           </a:xfrm>
           <a:prstGeom prst="rect">
             <a:avLst/>
@@ -6347,7 +6347,7 @@
           <a:p>
             <a:pPr algn="ctr"/>
             <a:r>
-              <a:rPr sz="800" b="0" i="0">
+              <a:rPr sz="950" b="0" i="0">
                 <a:solidFill>
                   <a:srgbClr val="6B6A63"/>
                 </a:solidFill>
@@ -6366,8 +6366,8 @@
         </p:nvSpPr>
         <p:spPr>
           <a:xfrm>
-            <a:off x="10277856" y="2734056"/>
-            <a:ext cx="566928" cy="566928"/>
+            <a:off x="10661904" y="2596896"/>
+            <a:ext cx="530352" cy="658368"/>
           </a:xfrm>
           <a:prstGeom prst="rightArrow">
             <a:avLst>
@@ -6389,7 +6389,7 @@
           <a:p>
             <a:pPr algn="ctr"/>
             <a:r>
-              <a:rPr sz="750" b="1" i="0">
+              <a:rPr sz="900" b="1" i="0">
                 <a:solidFill>
                   <a:srgbClr val="FFFFFF"/>
                 </a:solidFill>
@@ -6408,8 +6408,8 @@
         </p:nvSpPr>
         <p:spPr>
           <a:xfrm>
-            <a:off x="10917936" y="2212848"/>
-            <a:ext cx="182880" cy="1609344"/>
+            <a:off x="11247120" y="1920240"/>
+            <a:ext cx="201168" cy="2240280"/>
           </a:xfrm>
           <a:prstGeom prst="roundRect">
             <a:avLst>
@@ -6419,7 +6419,7 @@
           <a:solidFill>
             <a:srgbClr val="DFE5EF"/>
           </a:solidFill>
-          <a:ln w="13970">
+          <a:ln w="15240">
             <a:solidFill>
               <a:srgbClr val="4C72B0"/>
             </a:solidFill>
@@ -6442,8 +6442,8 @@
         </p:nvSpPr>
         <p:spPr>
           <a:xfrm>
-            <a:off x="11576304" y="2212848"/>
-            <a:ext cx="182880" cy="1609344"/>
+            <a:off x="11923776" y="1920240"/>
+            <a:ext cx="201168" cy="2240280"/>
           </a:xfrm>
           <a:prstGeom prst="roundRect">
             <a:avLst>
@@ -6453,7 +6453,7 @@
           <a:solidFill>
             <a:srgbClr val="DFE5EF"/>
           </a:solidFill>
-          <a:ln w="13970">
+          <a:ln w="15240">
             <a:solidFill>
               <a:srgbClr val="4C72B0"/>
             </a:solidFill>
@@ -6476,8 +6476,8 @@
         </p:nvSpPr>
         <p:spPr>
           <a:xfrm>
-            <a:off x="10853928" y="1993392"/>
-            <a:ext cx="969264" cy="256032"/>
+            <a:off x="11183112" y="1664208"/>
+            <a:ext cx="1005840" cy="274320"/>
           </a:xfrm>
           <a:prstGeom prst="roundRect">
             <a:avLst>
@@ -6487,7 +6487,7 @@
           <a:solidFill>
             <a:srgbClr val="DFE5EF"/>
           </a:solidFill>
-          <a:ln w="13970">
+          <a:ln w="15240">
             <a:solidFill>
               <a:srgbClr val="4C72B0"/>
             </a:solidFill>
@@ -6510,8 +6510,8 @@
         </p:nvSpPr>
         <p:spPr>
           <a:xfrm>
-            <a:off x="10991088" y="1828800"/>
-            <a:ext cx="384048" cy="384048"/>
+            <a:off x="11338560" y="1481328"/>
+            <a:ext cx="420624" cy="420624"/>
           </a:xfrm>
           <a:prstGeom prst="ellipse">
             <a:avLst/>
@@ -6519,7 +6519,7 @@
           <a:solidFill>
             <a:srgbClr val="55A868"/>
           </a:solidFill>
-          <a:ln w="17780">
+          <a:ln w="19050">
             <a:solidFill>
               <a:srgbClr val="FFFFFF"/>
             </a:solidFill>
@@ -6532,7 +6532,7 @@
           <a:p>
             <a:pPr algn="ctr"/>
             <a:r>
-              <a:rPr sz="850" b="1" i="0">
+              <a:rPr sz="950" b="1" i="0">
                 <a:solidFill>
                   <a:srgbClr val="FFFFFF"/>
                 </a:solidFill>
@@ -6551,8 +6551,8 @@
         </p:nvSpPr>
         <p:spPr>
           <a:xfrm>
-            <a:off x="10442448" y="1335024"/>
-            <a:ext cx="1737360" cy="457200"/>
+            <a:off x="10561320" y="987552"/>
+            <a:ext cx="1737360" cy="502920"/>
           </a:xfrm>
           <a:prstGeom prst="rect">
             <a:avLst/>
@@ -6567,7 +6567,7 @@
           <a:p>
             <a:pPr algn="ctr"/>
             <a:r>
-              <a:rPr sz="800" b="0" i="0">
+              <a:rPr sz="950" b="0" i="0">
                 <a:solidFill>
                   <a:srgbClr val="6B6A63"/>
                 </a:solidFill>
@@ -6579,7 +6579,7 @@
           <a:p>
             <a:pPr algn="ctr"/>
             <a:r>
-              <a:rPr sz="800" b="0" i="0">
+              <a:rPr sz="950" b="0" i="0">
                 <a:solidFill>
                   <a:srgbClr val="6B6A63"/>
                 </a:solidFill>
@@ -6598,13 +6598,13 @@
         </p:nvCxnSpPr>
         <p:spPr>
           <a:xfrm flipV="1">
-            <a:off x="11247120" y="2359152"/>
-            <a:ext cx="384048" cy="429768"/>
+            <a:off x="11356848" y="2286000"/>
+            <a:ext cx="393192" cy="411480"/>
           </a:xfrm>
           <a:prstGeom prst="line">
             <a:avLst/>
           </a:prstGeom>
-          <a:ln w="33020">
+          <a:ln w="35560">
             <a:solidFill>
               <a:srgbClr val="4C72B0"/>
             </a:solidFill>
@@ -6621,13 +6621,13 @@
         </p:nvCxnSpPr>
         <p:spPr>
           <a:xfrm>
-            <a:off x="11247120" y="3429000"/>
-            <a:ext cx="384048" cy="484632"/>
+            <a:off x="11356848" y="3383280"/>
+            <a:ext cx="393192" cy="475488"/>
           </a:xfrm>
           <a:prstGeom prst="line">
             <a:avLst/>
           </a:prstGeom>
-          <a:ln w="33020">
+          <a:ln w="35560">
             <a:solidFill>
               <a:srgbClr val="DD8452"/>
             </a:solidFill>
@@ -6644,8 +6644,8 @@
         </p:nvSpPr>
         <p:spPr>
           <a:xfrm>
-            <a:off x="11521440" y="1810512"/>
-            <a:ext cx="640080" cy="530352"/>
+            <a:off x="11475720" y="1810512"/>
+            <a:ext cx="694944" cy="603504"/>
           </a:xfrm>
           <a:prstGeom prst="roundRect">
             <a:avLst>
@@ -6655,7 +6655,7 @@
           <a:solidFill>
             <a:srgbClr val="EEF2F9"/>
           </a:solidFill>
-          <a:ln w="17780">
+          <a:ln w="19050">
             <a:solidFill>
               <a:srgbClr val="4C72B0"/>
             </a:solidFill>
@@ -6668,7 +6668,7 @@
           <a:p>
             <a:pPr algn="ctr"/>
             <a:r>
-              <a:rPr sz="800" b="1" i="0">
+              <a:rPr sz="900" b="1" i="0">
                 <a:solidFill>
                   <a:srgbClr val="4C72B0"/>
                 </a:solidFill>
@@ -6680,7 +6680,7 @@
           <a:p>
             <a:pPr algn="ctr"/>
             <a:r>
-              <a:rPr sz="800" b="1" i="0">
+              <a:rPr sz="900" b="1" i="0">
                 <a:solidFill>
                   <a:srgbClr val="4C72B0"/>
                 </a:solidFill>
@@ -6699,8 +6699,8 @@
         </p:nvSpPr>
         <p:spPr>
           <a:xfrm>
-            <a:off x="11521440" y="3858768"/>
-            <a:ext cx="640080" cy="530352"/>
+            <a:off x="11475720" y="3913632"/>
+            <a:ext cx="694944" cy="603504"/>
           </a:xfrm>
           <a:prstGeom prst="roundRect">
             <a:avLst>
@@ -6710,7 +6710,7 @@
           <a:solidFill>
             <a:srgbClr val="FDF0E7"/>
           </a:solidFill>
-          <a:ln w="17780">
+          <a:ln w="19050">
             <a:solidFill>
               <a:srgbClr val="DD8452"/>
             </a:solidFill>
@@ -6723,7 +6723,7 @@
           <a:p>
             <a:pPr algn="ctr"/>
             <a:r>
-              <a:rPr sz="800" b="1" i="0">
+              <a:rPr sz="900" b="1" i="0">
                 <a:solidFill>
                   <a:srgbClr val="DD8452"/>
                 </a:solidFill>
@@ -6735,7 +6735,7 @@
           <a:p>
             <a:pPr algn="ctr"/>
             <a:r>
-              <a:rPr sz="800" b="1" i="0">
+              <a:rPr sz="900" b="1" i="0">
                 <a:solidFill>
                   <a:srgbClr val="DD8452"/>
                 </a:solidFill>
@@ -6754,8 +6754,8 @@
         </p:nvSpPr>
         <p:spPr>
           <a:xfrm>
-            <a:off x="10332720" y="4553712"/>
-            <a:ext cx="1828800" cy="603504"/>
+            <a:off x="9464040" y="4956048"/>
+            <a:ext cx="2606040" cy="777240"/>
           </a:xfrm>
           <a:prstGeom prst="roundRect">
             <a:avLst>
@@ -6765,7 +6765,7 @@
           <a:solidFill>
             <a:srgbClr val="FFFFFF"/>
           </a:solidFill>
-          <a:ln w="19050">
+          <a:ln w="20320">
             <a:solidFill>
               <a:srgbClr val="55A868"/>
             </a:solidFill>
@@ -6778,7 +6778,7 @@
           <a:p>
             <a:pPr algn="ctr"/>
             <a:r>
-              <a:rPr sz="800" b="0" i="0">
+              <a:rPr sz="1050" b="0" i="0">
                 <a:solidFill>
                   <a:srgbClr val="1F1F1E"/>
                 </a:solidFill>
@@ -6790,7 +6790,7 @@
           <a:p>
             <a:pPr algn="ctr"/>
             <a:r>
-              <a:rPr sz="800" b="0" i="0">
+              <a:rPr sz="1050" b="0" i="0">
                 <a:solidFill>
                   <a:srgbClr val="1F1F1E"/>
                 </a:solidFill>
@@ -6809,8 +6809,8 @@
         </p:nvSpPr>
         <p:spPr>
           <a:xfrm>
-            <a:off x="1152144" y="5166360"/>
-            <a:ext cx="1920240" cy="457200"/>
+            <a:off x="182879" y="5349240"/>
+            <a:ext cx="1965960" cy="685800"/>
           </a:xfrm>
           <a:prstGeom prst="rect">
             <a:avLst/>
@@ -6825,25 +6825,37 @@
           <a:p>
             <a:pPr algn="ctr"/>
             <a:r>
-              <a:rPr sz="800" b="0" i="0">
+              <a:rPr sz="950" b="0" i="0">
                 <a:solidFill>
                   <a:srgbClr val="6B6A63"/>
                 </a:solidFill>
                 <a:latin typeface="Times New Roman"/>
               </a:rPr>
-              <a:t>one backward pass at the student's</a:t>
-            </a:r>
-          </a:p>
-          <a:p>
-            <a:pPr algn="ctr"/>
-            <a:r>
-              <a:rPr sz="800" b="0" i="0">
+              <a:t>one backward pass at the</a:t>
+            </a:r>
+          </a:p>
+          <a:p>
+            <a:pPr algn="ctr"/>
+            <a:r>
+              <a:rPr sz="950" b="0" i="0">
                 <a:solidFill>
                   <a:srgbClr val="6B6A63"/>
                 </a:solidFill>
                 <a:latin typeface="Times New Roman"/>
               </a:rPr>
-              <a:t>init reads each query's missing skills</a:t>
+              <a:t>student's init reads each</a:t>
+            </a:r>
+          </a:p>
+          <a:p>
+            <a:pPr algn="ctr"/>
+            <a:r>
+              <a:rPr sz="950" b="0" i="0">
+                <a:solidFill>
+                  <a:srgbClr val="6B6A63"/>
+                </a:solidFill>
+                <a:latin typeface="Times New Roman"/>
+              </a:rPr>
+              <a:t>query's missing skills</a:t>
             </a:r>
           </a:p>
         </p:txBody>
@@ -6856,8 +6868,8 @@
         </p:nvSpPr>
         <p:spPr>
           <a:xfrm>
-            <a:off x="3465576" y="5166360"/>
-            <a:ext cx="1920240" cy="457200"/>
+            <a:off x="2514600" y="5349240"/>
+            <a:ext cx="1965960" cy="685800"/>
           </a:xfrm>
           <a:prstGeom prst="rect">
             <a:avLst/>
@@ -6872,25 +6884,37 @@
           <a:p>
             <a:pPr algn="ctr"/>
             <a:r>
-              <a:rPr sz="800" b="0" i="0">
+              <a:rPr sz="950" b="0" i="0">
                 <a:solidFill>
                   <a:srgbClr val="6B6A63"/>
                 </a:solidFill>
                 <a:latin typeface="Times New Roman"/>
               </a:rPr>
-              <a:t>a sparse dictionary over many teacher</a:t>
-            </a:r>
-          </a:p>
-          <a:p>
-            <a:pPr algn="ctr"/>
-            <a:r>
-              <a:rPr sz="800" b="0" i="0">
+              <a:t>a sparse dictionary over</a:t>
+            </a:r>
+          </a:p>
+          <a:p>
+            <a:pPr algn="ctr"/>
+            <a:r>
+              <a:rPr sz="950" b="0" i="0">
                 <a:solidFill>
                   <a:srgbClr val="6B6A63"/>
                 </a:solidFill>
                 <a:latin typeface="Times New Roman"/>
               </a:rPr>
-              <a:t>traces factors gradients into atoms</a:t>
+              <a:t>many teacher traces factors</a:t>
+            </a:r>
+          </a:p>
+          <a:p>
+            <a:pPr algn="ctr"/>
+            <a:r>
+              <a:rPr sz="950" b="0" i="0">
+                <a:solidFill>
+                  <a:srgbClr val="6B6A63"/>
+                </a:solidFill>
+                <a:latin typeface="Times New Roman"/>
+              </a:rPr>
+              <a:t>gradients into skill atoms</a:t>
             </a:r>
           </a:p>
         </p:txBody>
@@ -6903,8 +6927,8 @@
         </p:nvSpPr>
         <p:spPr>
           <a:xfrm>
-            <a:off x="6016752" y="5166360"/>
-            <a:ext cx="1920240" cy="457200"/>
+            <a:off x="4937760" y="5349240"/>
+            <a:ext cx="1965960" cy="685800"/>
           </a:xfrm>
           <a:prstGeom prst="rect">
             <a:avLst/>
@@ -6919,25 +6943,37 @@
           <a:p>
             <a:pPr algn="ctr"/>
             <a:r>
-              <a:rPr sz="800" b="0" i="0">
+              <a:rPr sz="950" b="0" i="0">
                 <a:solidFill>
                   <a:srgbClr val="6B6A63"/>
                 </a:solidFill>
                 <a:latin typeface="Times New Roman"/>
               </a:rPr>
-              <a:t>traces are scored by the atoms they</a:t>
-            </a:r>
-          </a:p>
-          <a:p>
-            <a:pPr algn="ctr"/>
-            <a:r>
-              <a:rPr sz="800" b="0" i="0">
+              <a:t>the atoms the k queries</a:t>
+            </a:r>
+          </a:p>
+          <a:p>
+            <a:pPr algn="ctr"/>
+            <a:r>
+              <a:rPr sz="950" b="0" i="0">
                 <a:solidFill>
                   <a:srgbClr val="6B6A63"/>
                 </a:solidFill>
                 <a:latin typeface="Times New Roman"/>
               </a:rPr>
-              <a:t>supply; the budget is filled from the top</a:t>
+              <a:t>activate form the task</a:t>
+            </a:r>
+          </a:p>
+          <a:p>
+            <a:pPr algn="ctr"/>
+            <a:r>
+              <a:rPr sz="950" b="0" i="0">
+                <a:solidFill>
+                  <a:srgbClr val="6B6A63"/>
+                </a:solidFill>
+                <a:latin typeface="Times New Roman"/>
+              </a:rPr>
+              <a:t>specification</a:t>
             </a:r>
           </a:p>
         </p:txBody>
@@ -6950,8 +6986,8 @@
         </p:nvSpPr>
         <p:spPr>
           <a:xfrm>
-            <a:off x="8010144" y="5166360"/>
-            <a:ext cx="1920240" cy="457200"/>
+            <a:off x="7406640" y="5349240"/>
+            <a:ext cx="1965960" cy="685800"/>
           </a:xfrm>
           <a:prstGeom prst="rect">
             <a:avLst/>
@@ -6966,19 +7002,43 @@
           <a:p>
             <a:pPr algn="ctr"/>
             <a:r>
-              <a:rPr sz="800" b="0" i="0">
+              <a:rPr sz="950" b="0" i="0">
                 <a:solidFill>
                   <a:srgbClr val="6B6A63"/>
                 </a:solidFill>
                 <a:latin typeface="Times New Roman"/>
               </a:rPr>
-              <a:t>training stops once the remaining</a:t>
-            </a:r>
-          </a:p>
-          <a:p>
-            <a:pPr algn="ctr"/>
-            <a:r>
-              <a:rPr sz="800" b="0" i="0">
+              <a:t>traces are scored by the atoms</a:t>
+            </a:r>
+          </a:p>
+          <a:p>
+            <a:pPr algn="ctr"/>
+            <a:r>
+              <a:rPr sz="950" b="0" i="0">
+                <a:solidFill>
+                  <a:srgbClr val="6B6A63"/>
+                </a:solidFill>
+                <a:latin typeface="Times New Roman"/>
+              </a:rPr>
+              <a:t>they supply; the budget is filled</a:t>
+            </a:r>
+          </a:p>
+          <a:p>
+            <a:pPr algn="ctr"/>
+            <a:r>
+              <a:rPr sz="950" b="0" i="0">
+                <a:solidFill>
+                  <a:srgbClr val="6B6A63"/>
+                </a:solidFill>
+                <a:latin typeface="Times New Roman"/>
+              </a:rPr>
+              <a:t>from the top; stop once the</a:t>
+            </a:r>
+          </a:p>
+          <a:p>
+            <a:pPr algn="ctr"/>
+            <a:r>
+              <a:rPr sz="950" b="0" i="0">
                 <a:solidFill>
                   <a:srgbClr val="6B6A63"/>
                 </a:solidFill>
@@ -6991,48 +7051,33 @@
       </p:sp>
       <p:sp>
         <p:nvSpPr>
-          <p:cNvPr id="110" name="TextBox 109"/>
-          <p:cNvSpPr txBox="1"/>
-          <p:nvPr/>
-        </p:nvSpPr>
-        <p:spPr>
-          <a:xfrm>
-            <a:off x="9601200" y="5166360"/>
-            <a:ext cx="1920240" cy="457200"/>
-          </a:xfrm>
-          <a:prstGeom prst="rect">
-            <a:avLst/>
-          </a:prstGeom>
-          <a:noFill/>
-        </p:spPr>
-        <p:txBody>
-          <a:bodyPr wrap="square" lIns="0" rIns="0" tIns="0" bIns="0">
-            <a:spAutoFit/>
-          </a:bodyPr>
-          <a:lstStyle/>
-          <a:p>
-            <a:pPr algn="ctr"/>
-            <a:r>
-              <a:rPr sz="800" b="0" i="0">
-                <a:solidFill>
-                  <a:srgbClr val="6B6A63"/>
-                </a:solidFill>
-                <a:latin typeface="Times New Roman"/>
-              </a:rPr>
-              <a:t>a calibrated gate routes requests;</a:t>
-            </a:r>
-          </a:p>
-          <a:p>
-            <a:pPr algn="ctr"/>
-            <a:r>
-              <a:rPr sz="800" b="0" i="0">
-                <a:solidFill>
-                  <a:srgbClr val="6B6A63"/>
-                </a:solidFill>
-                <a:latin typeface="Times New Roman"/>
-              </a:rPr>
-              <a:t>both sides carry certificates</a:t>
-            </a:r>
+          <p:cNvPr id="110" name="Rounded Rectangle 109"/>
+          <p:cNvSpPr/>
+          <p:nvPr/>
+        </p:nvSpPr>
+        <p:spPr>
+          <a:xfrm>
+            <a:off x="3063240" y="6199632"/>
+            <a:ext cx="6766560" cy="457200"/>
+          </a:xfrm>
+          <a:prstGeom prst="roundRect">
+            <a:avLst>
+              <a:gd name="adj" fmla="val 50000"/>
+            </a:avLst>
+          </a:prstGeom>
+          <a:solidFill>
+            <a:srgbClr val="F7F6F2"/>
+          </a:solidFill>
+          <a:ln>
+            <a:noFill/>
+          </a:ln>
+          <a:effectLst/>
+        </p:spPr>
+        <p:txBody>
+          <a:bodyPr rtlCol="0" anchor="ctr"/>
+          <a:lstStyle/>
+          <a:p>
+            <a:pPr algn="ctr"/>
           </a:p>
         </p:txBody>
       </p:sp>
@@ -7044,8 +7089,8 @@
         </p:nvSpPr>
         <p:spPr>
           <a:xfrm>
-            <a:off x="411480" y="6291072"/>
-            <a:ext cx="219456" cy="219456"/>
+            <a:off x="3291840" y="6309360"/>
+            <a:ext cx="237744" cy="237744"/>
           </a:xfrm>
           <a:prstGeom prst="roundRect">
             <a:avLst>
@@ -7078,8 +7123,8 @@
         </p:nvSpPr>
         <p:spPr>
           <a:xfrm>
-            <a:off x="704088" y="6281928"/>
-            <a:ext cx="1554480" cy="256032"/>
+            <a:off x="3621024" y="6309360"/>
+            <a:ext cx="1600200" cy="274320"/>
           </a:xfrm>
           <a:prstGeom prst="rect">
             <a:avLst/>
@@ -7094,7 +7139,7 @@
           <a:p>
             <a:pPr algn="l"/>
             <a:r>
-              <a:rPr sz="950" b="0" i="0">
+              <a:rPr sz="1100" b="0" i="0">
                 <a:solidFill>
                   <a:srgbClr val="1F1F1E"/>
                 </a:solidFill>
@@ -7113,8 +7158,8 @@
         </p:nvSpPr>
         <p:spPr>
           <a:xfrm>
-            <a:off x="2221992" y="6291072"/>
-            <a:ext cx="219456" cy="219456"/>
+            <a:off x="5394960" y="6309360"/>
+            <a:ext cx="237744" cy="237744"/>
           </a:xfrm>
           <a:prstGeom prst="roundRect">
             <a:avLst>
@@ -7147,8 +7192,8 @@
         </p:nvSpPr>
         <p:spPr>
           <a:xfrm>
-            <a:off x="2514600" y="6281928"/>
-            <a:ext cx="1554480" cy="256032"/>
+            <a:off x="5724144" y="6309360"/>
+            <a:ext cx="1554480" cy="274320"/>
           </a:xfrm>
           <a:prstGeom prst="rect">
             <a:avLst/>
@@ -7163,7 +7208,7 @@
           <a:p>
             <a:pPr algn="l"/>
             <a:r>
-              <a:rPr sz="950" b="0" i="0">
+              <a:rPr sz="1100" b="0" i="0">
                 <a:solidFill>
                   <a:srgbClr val="1F1F1E"/>
                 </a:solidFill>
@@ -7182,8 +7227,8 @@
         </p:nvSpPr>
         <p:spPr>
           <a:xfrm>
-            <a:off x="3959352" y="6291072"/>
-            <a:ext cx="219456" cy="219456"/>
+            <a:off x="7452360" y="6309360"/>
+            <a:ext cx="237744" cy="237744"/>
           </a:xfrm>
           <a:prstGeom prst="roundRect">
             <a:avLst>
@@ -7216,8 +7261,8 @@
         </p:nvSpPr>
         <p:spPr>
           <a:xfrm>
-            <a:off x="4251960" y="6281928"/>
-            <a:ext cx="1097280" cy="256032"/>
+            <a:off x="7781544" y="6309360"/>
+            <a:ext cx="1097280" cy="274320"/>
           </a:xfrm>
           <a:prstGeom prst="rect">
             <a:avLst/>
@@ -7232,7 +7277,7 @@
           <a:p>
             <a:pPr algn="l"/>
             <a:r>
-              <a:rPr sz="950" b="0" i="0">
+              <a:rPr sz="1100" b="0" i="0">
                 <a:solidFill>
                   <a:srgbClr val="1F1F1E"/>
                 </a:solidFill>

--- a/paper/figs/fig1_pipeline.pptx
+++ b/paper/figs/fig1_pipeline.pptx
@@ -3392,8 +3392,8 @@
         </p:nvSpPr>
         <p:spPr>
           <a:xfrm>
-            <a:off x="274320" y="2103120"/>
-            <a:ext cx="1481328" cy="1234440"/>
+            <a:off x="475488" y="2304288"/>
+            <a:ext cx="1572768" cy="1280160"/>
           </a:xfrm>
           <a:prstGeom prst="roundRect">
             <a:avLst>
@@ -3427,7 +3427,7 @@
         <p:spPr>
           <a:xfrm>
             <a:off x="374904" y="2203703"/>
-            <a:ext cx="1481328" cy="1234440"/>
+            <a:ext cx="1572768" cy="1280160"/>
           </a:xfrm>
           <a:prstGeom prst="roundRect">
             <a:avLst>
@@ -3460,8 +3460,8 @@
         </p:nvSpPr>
         <p:spPr>
           <a:xfrm>
-            <a:off x="475488" y="2304288"/>
-            <a:ext cx="1481328" cy="1234440"/>
+            <a:off x="274320" y="2103120"/>
+            <a:ext cx="1572768" cy="1280160"/>
           </a:xfrm>
           <a:prstGeom prst="roundRect">
             <a:avLst>
@@ -3529,8 +3529,8 @@
         </p:nvSpPr>
         <p:spPr>
           <a:xfrm>
-            <a:off x="502920" y="2487168"/>
-            <a:ext cx="1371600" cy="731520"/>
+            <a:off x="603504" y="2542032"/>
+            <a:ext cx="1481328" cy="822960"/>
           </a:xfrm>
           <a:prstGeom prst="rect">
             <a:avLst/>
@@ -3545,7 +3545,7 @@
           <a:p>
             <a:pPr algn="l"/>
             <a:r>
-              <a:rPr sz="900" b="0" i="0">
+              <a:rPr sz="950" b="0" i="0">
                 <a:solidFill>
                   <a:srgbClr val="1F1F1E"/>
                 </a:solidFill>
@@ -3557,13 +3557,25 @@
           <a:p>
             <a:pPr algn="l"/>
             <a:r>
-              <a:rPr sz="900" b="0" i="0">
+              <a:rPr sz="950" b="0" i="0">
                 <a:solidFill>
                   <a:srgbClr val="1F1F1E"/>
                 </a:solidFill>
                 <a:latin typeface="Times New Roman"/>
               </a:rPr>
-              <a:t>per club?"</a:t>
+              <a:t>does each club</a:t>
+            </a:r>
+          </a:p>
+          <a:p>
+            <a:pPr algn="l"/>
+            <a:r>
+              <a:rPr sz="950" b="0" i="0">
+                <a:solidFill>
+                  <a:srgbClr val="1F1F1E"/>
+                </a:solidFill>
+                <a:latin typeface="Times New Roman"/>
+              </a:rPr>
+              <a:t>have?"</a:t>
             </a:r>
           </a:p>
         </p:txBody>
@@ -3576,7 +3588,7 @@
         </p:nvSpPr>
         <p:spPr>
           <a:xfrm>
-            <a:off x="1389888" y="3127248"/>
+            <a:off x="1572768" y="3218688"/>
             <a:ext cx="457200" cy="310896"/>
           </a:xfrm>
           <a:prstGeom prst="rect">
@@ -3611,7 +3623,7 @@
         </p:nvSpPr>
         <p:spPr>
           <a:xfrm>
-            <a:off x="1956816" y="2596896"/>
+            <a:off x="1993392" y="2596896"/>
             <a:ext cx="713232" cy="658368"/>
           </a:xfrm>
           <a:prstGeom prst="rightArrow">
@@ -3634,7 +3646,7 @@
           <a:p>
             <a:pPr algn="ctr"/>
             <a:r>
-              <a:rPr sz="900" b="1" i="0">
+              <a:rPr sz="800" b="1" i="0">
                 <a:solidFill>
                   <a:srgbClr val="FFFFFF"/>
                 </a:solidFill>
@@ -3646,7 +3658,7 @@
           <a:p>
             <a:pPr algn="ctr"/>
             <a:r>
-              <a:rPr sz="900" b="1" i="0">
+              <a:rPr sz="800" b="1" i="0">
                 <a:solidFill>
                   <a:srgbClr val="FFFFFF"/>
                 </a:solidFill>
@@ -3665,8 +3677,8 @@
         </p:nvSpPr>
         <p:spPr>
           <a:xfrm>
-            <a:off x="2724912" y="1691640"/>
-            <a:ext cx="1517904" cy="2331720"/>
+            <a:off x="2743200" y="1691640"/>
+            <a:ext cx="1591056" cy="2331720"/>
           </a:xfrm>
           <a:prstGeom prst="roundRect">
             <a:avLst>
@@ -3693,13 +3705,48 @@
       </p:sp>
       <p:sp>
         <p:nvSpPr>
-          <p:cNvPr id="18" name="Rounded Rectangle 17"/>
+          <p:cNvPr id="18" name="TextBox 17"/>
+          <p:cNvSpPr txBox="1"/>
+          <p:nvPr/>
+        </p:nvSpPr>
+        <p:spPr>
+          <a:xfrm>
+            <a:off x="2743200" y="1371600"/>
+            <a:ext cx="1591056" cy="274320"/>
+          </a:xfrm>
+          <a:prstGeom prst="rect">
+            <a:avLst/>
+          </a:prstGeom>
+          <a:noFill/>
+        </p:spPr>
+        <p:txBody>
+          <a:bodyPr wrap="square" lIns="0" rIns="0" tIns="0" bIns="0">
+            <a:spAutoFit/>
+          </a:bodyPr>
+          <a:lstStyle/>
+          <a:p>
+            <a:pPr algn="ctr"/>
+            <a:r>
+              <a:rPr sz="1000" b="0" i="0">
+                <a:solidFill>
+                  <a:srgbClr val="6B6A63"/>
+                </a:solidFill>
+                <a:latin typeface="Times New Roman"/>
+              </a:rPr>
+              <a:t>each query needs:</a:t>
+            </a:r>
+          </a:p>
+        </p:txBody>
+      </p:sp>
+      <p:sp>
+        <p:nvSpPr>
+          <p:cNvPr id="19" name="Rounded Rectangle 18"/>
           <p:cNvSpPr/>
           <p:nvPr/>
         </p:nvSpPr>
         <p:spPr>
           <a:xfrm>
-            <a:off x="2834640" y="1920240"/>
+            <a:off x="2852928" y="1938528"/>
             <a:ext cx="274320" cy="402336"/>
           </a:xfrm>
           <a:prstGeom prst="roundRect">
@@ -3727,18 +3774,18 @@
       </p:sp>
       <p:sp>
         <p:nvSpPr>
-          <p:cNvPr id="19" name="Rounded Rectangle 18"/>
+          <p:cNvPr id="20" name="Rounded Rectangle 19"/>
           <p:cNvSpPr/>
           <p:nvPr/>
         </p:nvSpPr>
         <p:spPr>
           <a:xfrm>
-            <a:off x="3200400" y="1984248"/>
-            <a:ext cx="237744" cy="237744"/>
+            <a:off x="3200400" y="2011680"/>
+            <a:ext cx="512064" cy="246888"/>
           </a:xfrm>
           <a:prstGeom prst="roundRect">
             <a:avLst>
-              <a:gd name="adj" fmla="val 30000"/>
+              <a:gd name="adj" fmla="val 45000"/>
             </a:avLst>
           </a:prstGeom>
           <a:solidFill>
@@ -3752,27 +3799,36 @@
           <a:effectLst/>
         </p:spPr>
         <p:txBody>
-          <a:bodyPr rtlCol="0" anchor="ctr"/>
-          <a:lstStyle/>
-          <a:p>
-            <a:pPr algn="ctr"/>
-          </a:p>
-        </p:txBody>
-      </p:sp>
-      <p:sp>
-        <p:nvSpPr>
-          <p:cNvPr id="20" name="Rounded Rectangle 19"/>
+          <a:bodyPr rtlCol="0" anchor="ctr" lIns="9000" rIns="9000" tIns="4500" bIns="4500" wrap="square"/>
+          <a:lstStyle/>
+          <a:p>
+            <a:pPr algn="ctr"/>
+            <a:r>
+              <a:rPr sz="750" b="1" i="0">
+                <a:solidFill>
+                  <a:srgbClr val="FFFFFF"/>
+                </a:solidFill>
+                <a:latin typeface="Times New Roman"/>
+              </a:rPr>
+              <a:t>JOIN</a:t>
+            </a:r>
+          </a:p>
+        </p:txBody>
+      </p:sp>
+      <p:sp>
+        <p:nvSpPr>
+          <p:cNvPr id="21" name="Rounded Rectangle 20"/>
           <p:cNvSpPr/>
           <p:nvPr/>
         </p:nvSpPr>
         <p:spPr>
           <a:xfrm>
-            <a:off x="3456432" y="1984248"/>
-            <a:ext cx="237744" cy="237744"/>
+            <a:off x="3749039" y="2011680"/>
+            <a:ext cx="512064" cy="246888"/>
           </a:xfrm>
           <a:prstGeom prst="roundRect">
             <a:avLst>
-              <a:gd name="adj" fmla="val 30000"/>
+              <a:gd name="adj" fmla="val 45000"/>
             </a:avLst>
           </a:prstGeom>
           <a:solidFill>
@@ -3786,31 +3842,74 @@
           <a:effectLst/>
         </p:spPr>
         <p:txBody>
-          <a:bodyPr rtlCol="0" anchor="ctr"/>
-          <a:lstStyle/>
-          <a:p>
-            <a:pPr algn="ctr"/>
-          </a:p>
-        </p:txBody>
-      </p:sp>
-      <p:sp>
-        <p:nvSpPr>
-          <p:cNvPr id="21" name="Rounded Rectangle 20"/>
+          <a:bodyPr rtlCol="0" anchor="ctr" lIns="9000" rIns="9000" tIns="4500" bIns="4500" wrap="square"/>
+          <a:lstStyle/>
+          <a:p>
+            <a:pPr algn="ctr"/>
+            <a:r>
+              <a:rPr sz="750" b="1" i="0">
+                <a:solidFill>
+                  <a:srgbClr val="FFFFFF"/>
+                </a:solidFill>
+                <a:latin typeface="Times New Roman"/>
+              </a:rPr>
+              <a:t>COUNT</a:t>
+            </a:r>
+          </a:p>
+        </p:txBody>
+      </p:sp>
+      <p:sp>
+        <p:nvSpPr>
+          <p:cNvPr id="22" name="Rounded Rectangle 21"/>
           <p:cNvSpPr/>
           <p:nvPr/>
         </p:nvSpPr>
         <p:spPr>
           <a:xfrm>
-            <a:off x="3712464" y="1984248"/>
-            <a:ext cx="237744" cy="237744"/>
+            <a:off x="2852928" y="2615184"/>
+            <a:ext cx="274320" cy="402336"/>
           </a:xfrm>
           <a:prstGeom prst="roundRect">
             <a:avLst>
-              <a:gd name="adj" fmla="val 30000"/>
+              <a:gd name="adj" fmla="val 25000"/>
             </a:avLst>
           </a:prstGeom>
           <a:solidFill>
-            <a:srgbClr val="E8E6E1"/>
+            <a:srgbClr val="F7F6F2"/>
+          </a:solidFill>
+          <a:ln w="11430">
+            <a:solidFill>
+              <a:srgbClr val="8C8C8C"/>
+            </a:solidFill>
+          </a:ln>
+          <a:effectLst/>
+        </p:spPr>
+        <p:txBody>
+          <a:bodyPr rtlCol="0" anchor="ctr"/>
+          <a:lstStyle/>
+          <a:p>
+            <a:pPr algn="ctr"/>
+          </a:p>
+        </p:txBody>
+      </p:sp>
+      <p:sp>
+        <p:nvSpPr>
+          <p:cNvPr id="23" name="Rounded Rectangle 22"/>
+          <p:cNvSpPr/>
+          <p:nvPr/>
+        </p:nvSpPr>
+        <p:spPr>
+          <a:xfrm>
+            <a:off x="3200400" y="2688336"/>
+            <a:ext cx="658368" cy="246888"/>
+          </a:xfrm>
+          <a:prstGeom prst="roundRect">
+            <a:avLst>
+              <a:gd name="adj" fmla="val 45000"/>
+            </a:avLst>
+          </a:prstGeom>
+          <a:solidFill>
+            <a:srgbClr val="7BA7D7"/>
           </a:solidFill>
           <a:ln w="9525">
             <a:solidFill>
@@ -3820,31 +3919,74 @@
           <a:effectLst/>
         </p:spPr>
         <p:txBody>
-          <a:bodyPr rtlCol="0" anchor="ctr"/>
-          <a:lstStyle/>
-          <a:p>
-            <a:pPr algn="ctr"/>
-          </a:p>
-        </p:txBody>
-      </p:sp>
-      <p:sp>
-        <p:nvSpPr>
-          <p:cNvPr id="22" name="Rounded Rectangle 21"/>
+          <a:bodyPr rtlCol="0" anchor="ctr" lIns="9000" rIns="9000" tIns="4500" bIns="4500" wrap="square"/>
+          <a:lstStyle/>
+          <a:p>
+            <a:pPr algn="ctr"/>
+            <a:r>
+              <a:rPr sz="750" b="1" i="0">
+                <a:solidFill>
+                  <a:srgbClr val="FFFFFF"/>
+                </a:solidFill>
+                <a:latin typeface="Times New Roman"/>
+              </a:rPr>
+              <a:t>GROUP BY</a:t>
+            </a:r>
+          </a:p>
+        </p:txBody>
+      </p:sp>
+      <p:sp>
+        <p:nvSpPr>
+          <p:cNvPr id="24" name="Rounded Rectangle 23"/>
           <p:cNvSpPr/>
           <p:nvPr/>
         </p:nvSpPr>
         <p:spPr>
           <a:xfrm>
-            <a:off x="3968496" y="1984248"/>
-            <a:ext cx="237744" cy="237744"/>
+            <a:off x="2852928" y="3291840"/>
+            <a:ext cx="274320" cy="402336"/>
           </a:xfrm>
           <a:prstGeom prst="roundRect">
             <a:avLst>
-              <a:gd name="adj" fmla="val 30000"/>
+              <a:gd name="adj" fmla="val 25000"/>
             </a:avLst>
           </a:prstGeom>
           <a:solidFill>
-            <a:srgbClr val="E8E6E1"/>
+            <a:srgbClr val="F7F6F2"/>
+          </a:solidFill>
+          <a:ln w="11430">
+            <a:solidFill>
+              <a:srgbClr val="8C8C8C"/>
+            </a:solidFill>
+          </a:ln>
+          <a:effectLst/>
+        </p:spPr>
+        <p:txBody>
+          <a:bodyPr rtlCol="0" anchor="ctr"/>
+          <a:lstStyle/>
+          <a:p>
+            <a:pPr algn="ctr"/>
+          </a:p>
+        </p:txBody>
+      </p:sp>
+      <p:sp>
+        <p:nvSpPr>
+          <p:cNvPr id="25" name="Rounded Rectangle 24"/>
+          <p:cNvSpPr/>
+          <p:nvPr/>
+        </p:nvSpPr>
+        <p:spPr>
+          <a:xfrm>
+            <a:off x="3200400" y="3364992"/>
+            <a:ext cx="512064" cy="246888"/>
+          </a:xfrm>
+          <a:prstGeom prst="roundRect">
+            <a:avLst>
+              <a:gd name="adj" fmla="val 45000"/>
+            </a:avLst>
+          </a:prstGeom>
+          <a:solidFill>
+            <a:srgbClr val="4C72B0"/>
           </a:solidFill>
           <a:ln w="9525">
             <a:solidFill>
@@ -3854,65 +3996,40 @@
           <a:effectLst/>
         </p:spPr>
         <p:txBody>
-          <a:bodyPr rtlCol="0" anchor="ctr"/>
-          <a:lstStyle/>
-          <a:p>
-            <a:pPr algn="ctr"/>
-          </a:p>
-        </p:txBody>
-      </p:sp>
-      <p:sp>
-        <p:nvSpPr>
-          <p:cNvPr id="23" name="Rounded Rectangle 22"/>
+          <a:bodyPr rtlCol="0" anchor="ctr" lIns="9000" rIns="9000" tIns="4500" bIns="4500" wrap="square"/>
+          <a:lstStyle/>
+          <a:p>
+            <a:pPr algn="ctr"/>
+            <a:r>
+              <a:rPr sz="750" b="1" i="0">
+                <a:solidFill>
+                  <a:srgbClr val="FFFFFF"/>
+                </a:solidFill>
+                <a:latin typeface="Times New Roman"/>
+              </a:rPr>
+              <a:t>JOIN</a:t>
+            </a:r>
+          </a:p>
+        </p:txBody>
+      </p:sp>
+      <p:sp>
+        <p:nvSpPr>
+          <p:cNvPr id="26" name="Rounded Rectangle 25"/>
           <p:cNvSpPr/>
           <p:nvPr/>
         </p:nvSpPr>
         <p:spPr>
           <a:xfrm>
-            <a:off x="2834640" y="2578608"/>
-            <a:ext cx="274320" cy="402336"/>
+            <a:off x="3749039" y="3364992"/>
+            <a:ext cx="512064" cy="246888"/>
           </a:xfrm>
           <a:prstGeom prst="roundRect">
             <a:avLst>
-              <a:gd name="adj" fmla="val 25000"/>
+              <a:gd name="adj" fmla="val 45000"/>
             </a:avLst>
           </a:prstGeom>
           <a:solidFill>
-            <a:srgbClr val="F7F6F2"/>
-          </a:solidFill>
-          <a:ln w="11430">
-            <a:solidFill>
-              <a:srgbClr val="8C8C8C"/>
-            </a:solidFill>
-          </a:ln>
-          <a:effectLst/>
-        </p:spPr>
-        <p:txBody>
-          <a:bodyPr rtlCol="0" anchor="ctr"/>
-          <a:lstStyle/>
-          <a:p>
-            <a:pPr algn="ctr"/>
-          </a:p>
-        </p:txBody>
-      </p:sp>
-      <p:sp>
-        <p:nvSpPr>
-          <p:cNvPr id="24" name="Rounded Rectangle 23"/>
-          <p:cNvSpPr/>
-          <p:nvPr/>
-        </p:nvSpPr>
-        <p:spPr>
-          <a:xfrm>
-            <a:off x="3200400" y="2642616"/>
-            <a:ext cx="237744" cy="237744"/>
-          </a:xfrm>
-          <a:prstGeom prst="roundRect">
-            <a:avLst>
-              <a:gd name="adj" fmla="val 30000"/>
-            </a:avLst>
-          </a:prstGeom>
-          <a:solidFill>
-            <a:srgbClr val="4C72B0"/>
+            <a:srgbClr val="5F9EA0"/>
           </a:solidFill>
           <a:ln w="9525">
             <a:solidFill>
@@ -3922,31 +4039,198 @@
           <a:effectLst/>
         </p:spPr>
         <p:txBody>
-          <a:bodyPr rtlCol="0" anchor="ctr"/>
-          <a:lstStyle/>
-          <a:p>
-            <a:pPr algn="ctr"/>
-          </a:p>
-        </p:txBody>
-      </p:sp>
-      <p:sp>
-        <p:nvSpPr>
-          <p:cNvPr id="25" name="Rounded Rectangle 24"/>
+          <a:bodyPr rtlCol="0" anchor="ctr" lIns="9000" rIns="9000" tIns="4500" bIns="4500" wrap="square"/>
+          <a:lstStyle/>
+          <a:p>
+            <a:pPr algn="ctr"/>
+            <a:r>
+              <a:rPr sz="750" b="1" i="0">
+                <a:solidFill>
+                  <a:srgbClr val="FFFFFF"/>
+                </a:solidFill>
+                <a:latin typeface="Times New Roman"/>
+              </a:rPr>
+              <a:t>FILTER</a:t>
+            </a:r>
+          </a:p>
+        </p:txBody>
+      </p:sp>
+      <p:sp>
+        <p:nvSpPr>
+          <p:cNvPr id="27" name="TextBox 26"/>
+          <p:cNvSpPr txBox="1"/>
+          <p:nvPr/>
+        </p:nvSpPr>
+        <p:spPr>
+          <a:xfrm>
+            <a:off x="2670048" y="4114800"/>
+            <a:ext cx="1737360" cy="310896"/>
+          </a:xfrm>
+          <a:prstGeom prst="rect">
+            <a:avLst/>
+          </a:prstGeom>
+          <a:noFill/>
+        </p:spPr>
+        <p:txBody>
+          <a:bodyPr wrap="square" lIns="0" rIns="0" tIns="0" bIns="0">
+            <a:spAutoFit/>
+          </a:bodyPr>
+          <a:lstStyle/>
+          <a:p>
+            <a:pPr algn="ctr"/>
+            <a:r>
+              <a:rPr sz="1050" b="1" i="0">
+                <a:solidFill>
+                  <a:srgbClr val="4C72B0"/>
+                </a:solidFill>
+                <a:latin typeface="Times New Roman"/>
+              </a:rPr>
+              <a:t>the gradient names them</a:t>
+            </a:r>
+          </a:p>
+        </p:txBody>
+      </p:sp>
+      <p:sp>
+        <p:nvSpPr>
+          <p:cNvPr id="28" name="Right Arrow 27"/>
           <p:cNvSpPr/>
           <p:nvPr/>
         </p:nvSpPr>
         <p:spPr>
           <a:xfrm>
-            <a:off x="3456432" y="2642616"/>
-            <a:ext cx="237744" cy="237744"/>
+            <a:off x="4407408" y="2596896"/>
+            <a:ext cx="640080" cy="658368"/>
+          </a:xfrm>
+          <a:prstGeom prst="rightArrow">
+            <a:avLst>
+              <a:gd name="adj1" fmla="val 62000"/>
+              <a:gd name="adj2" fmla="val 42000"/>
+            </a:avLst>
+          </a:prstGeom>
+          <a:solidFill>
+            <a:srgbClr val="8C8C8C"/>
+          </a:solidFill>
+          <a:ln>
+            <a:noFill/>
+          </a:ln>
+          <a:effectLst/>
+        </p:spPr>
+        <p:txBody>
+          <a:bodyPr rtlCol="0" anchor="ctr" lIns="9000" rIns="9000" tIns="4500" bIns="4500" wrap="square"/>
+          <a:lstStyle/>
+          <a:p>
+            <a:pPr algn="ctr"/>
+            <a:r>
+              <a:rPr sz="900" b="1" i="0">
+                <a:solidFill>
+                  <a:srgbClr val="FFFFFF"/>
+                </a:solidFill>
+                <a:latin typeface="Times New Roman"/>
+              </a:rPr>
+              <a:t>sparse</a:t>
+            </a:r>
+          </a:p>
+          <a:p>
+            <a:pPr algn="ctr"/>
+            <a:r>
+              <a:rPr sz="900" b="1" i="0">
+                <a:solidFill>
+                  <a:srgbClr val="FFFFFF"/>
+                </a:solidFill>
+                <a:latin typeface="Times New Roman"/>
+              </a:rPr>
+              <a:t>coding</a:t>
+            </a:r>
+          </a:p>
+        </p:txBody>
+      </p:sp>
+      <p:sp>
+        <p:nvSpPr>
+          <p:cNvPr id="29" name="Rounded Rectangle 28"/>
+          <p:cNvSpPr/>
+          <p:nvPr/>
+        </p:nvSpPr>
+        <p:spPr>
+          <a:xfrm>
+            <a:off x="5102352" y="1463040"/>
+            <a:ext cx="1920240" cy="2697480"/>
           </a:xfrm>
           <a:prstGeom prst="roundRect">
             <a:avLst>
-              <a:gd name="adj" fmla="val 30000"/>
+              <a:gd name="adj" fmla="val 25000"/>
             </a:avLst>
           </a:prstGeom>
           <a:solidFill>
-            <a:srgbClr val="E8E6E1"/>
+            <a:srgbClr val="FFFFFF"/>
+          </a:solidFill>
+          <a:ln w="15240">
+            <a:solidFill>
+              <a:srgbClr val="8C8C8C"/>
+            </a:solidFill>
+          </a:ln>
+          <a:effectLst/>
+        </p:spPr>
+        <p:txBody>
+          <a:bodyPr rtlCol="0" anchor="ctr"/>
+          <a:lstStyle/>
+          <a:p>
+            <a:pPr algn="ctr"/>
+          </a:p>
+        </p:txBody>
+      </p:sp>
+      <p:sp>
+        <p:nvSpPr>
+          <p:cNvPr id="30" name="TextBox 29"/>
+          <p:cNvSpPr txBox="1"/>
+          <p:nvPr/>
+        </p:nvSpPr>
+        <p:spPr>
+          <a:xfrm>
+            <a:off x="5102352" y="1115568"/>
+            <a:ext cx="1920240" cy="274320"/>
+          </a:xfrm>
+          <a:prstGeom prst="rect">
+            <a:avLst/>
+          </a:prstGeom>
+          <a:noFill/>
+        </p:spPr>
+        <p:txBody>
+          <a:bodyPr wrap="square" lIns="0" rIns="0" tIns="0" bIns="0">
+            <a:spAutoFit/>
+          </a:bodyPr>
+          <a:lstStyle/>
+          <a:p>
+            <a:pPr algn="ctr"/>
+            <a:r>
+              <a:rPr sz="1100" b="0" i="0">
+                <a:solidFill>
+                  <a:srgbClr val="6B6A63"/>
+                </a:solidFill>
+                <a:latin typeface="Times New Roman"/>
+              </a:rPr>
+              <a:t>skill atom library</a:t>
+            </a:r>
+          </a:p>
+        </p:txBody>
+      </p:sp>
+      <p:sp>
+        <p:nvSpPr>
+          <p:cNvPr id="31" name="Rounded Rectangle 30"/>
+          <p:cNvSpPr/>
+          <p:nvPr/>
+        </p:nvSpPr>
+        <p:spPr>
+          <a:xfrm>
+            <a:off x="5266944" y="1700784"/>
+            <a:ext cx="749808" cy="310896"/>
+          </a:xfrm>
+          <a:prstGeom prst="roundRect">
+            <a:avLst>
+              <a:gd name="adj" fmla="val 45000"/>
+            </a:avLst>
+          </a:prstGeom>
+          <a:solidFill>
+            <a:srgbClr val="4C72B0"/>
           </a:solidFill>
           <a:ln w="9525">
             <a:solidFill>
@@ -3956,422 +4240,36 @@
           <a:effectLst/>
         </p:spPr>
         <p:txBody>
-          <a:bodyPr rtlCol="0" anchor="ctr"/>
-          <a:lstStyle/>
-          <a:p>
-            <a:pPr algn="ctr"/>
-          </a:p>
-        </p:txBody>
-      </p:sp>
-      <p:sp>
-        <p:nvSpPr>
-          <p:cNvPr id="26" name="Rounded Rectangle 25"/>
+          <a:bodyPr rtlCol="0" anchor="ctr" lIns="9000" rIns="9000" tIns="4500" bIns="4500" wrap="square"/>
+          <a:lstStyle/>
+          <a:p>
+            <a:pPr algn="ctr"/>
+            <a:r>
+              <a:rPr sz="800" b="1" i="0">
+                <a:solidFill>
+                  <a:srgbClr val="FFFFFF"/>
+                </a:solidFill>
+                <a:latin typeface="Times New Roman"/>
+              </a:rPr>
+              <a:t>JOIN</a:t>
+            </a:r>
+          </a:p>
+        </p:txBody>
+      </p:sp>
+      <p:sp>
+        <p:nvSpPr>
+          <p:cNvPr id="32" name="Rounded Rectangle 31"/>
           <p:cNvSpPr/>
           <p:nvPr/>
         </p:nvSpPr>
         <p:spPr>
           <a:xfrm>
-            <a:off x="3712464" y="2642616"/>
-            <a:ext cx="237744" cy="237744"/>
+            <a:off x="5221224" y="1655064"/>
+            <a:ext cx="841248" cy="402336"/>
           </a:xfrm>
           <a:prstGeom prst="roundRect">
             <a:avLst>
-              <a:gd name="adj" fmla="val 30000"/>
-            </a:avLst>
-          </a:prstGeom>
-          <a:solidFill>
-            <a:srgbClr val="7BA7D7"/>
-          </a:solidFill>
-          <a:ln w="9525">
-            <a:solidFill>
-              <a:srgbClr val="FFFFFF"/>
-            </a:solidFill>
-          </a:ln>
-          <a:effectLst/>
-        </p:spPr>
-        <p:txBody>
-          <a:bodyPr rtlCol="0" anchor="ctr"/>
-          <a:lstStyle/>
-          <a:p>
-            <a:pPr algn="ctr"/>
-          </a:p>
-        </p:txBody>
-      </p:sp>
-      <p:sp>
-        <p:nvSpPr>
-          <p:cNvPr id="27" name="Rounded Rectangle 26"/>
-          <p:cNvSpPr/>
-          <p:nvPr/>
-        </p:nvSpPr>
-        <p:spPr>
-          <a:xfrm>
-            <a:off x="3968496" y="2642616"/>
-            <a:ext cx="237744" cy="237744"/>
-          </a:xfrm>
-          <a:prstGeom prst="roundRect">
-            <a:avLst>
-              <a:gd name="adj" fmla="val 30000"/>
-            </a:avLst>
-          </a:prstGeom>
-          <a:solidFill>
-            <a:srgbClr val="E8E6E1"/>
-          </a:solidFill>
-          <a:ln w="9525">
-            <a:solidFill>
-              <a:srgbClr val="FFFFFF"/>
-            </a:solidFill>
-          </a:ln>
-          <a:effectLst/>
-        </p:spPr>
-        <p:txBody>
-          <a:bodyPr rtlCol="0" anchor="ctr"/>
-          <a:lstStyle/>
-          <a:p>
-            <a:pPr algn="ctr"/>
-          </a:p>
-        </p:txBody>
-      </p:sp>
-      <p:sp>
-        <p:nvSpPr>
-          <p:cNvPr id="28" name="Rounded Rectangle 27"/>
-          <p:cNvSpPr/>
-          <p:nvPr/>
-        </p:nvSpPr>
-        <p:spPr>
-          <a:xfrm>
-            <a:off x="2834640" y="3236976"/>
-            <a:ext cx="274320" cy="402336"/>
-          </a:xfrm>
-          <a:prstGeom prst="roundRect">
-            <a:avLst>
-              <a:gd name="adj" fmla="val 25000"/>
-            </a:avLst>
-          </a:prstGeom>
-          <a:solidFill>
-            <a:srgbClr val="F7F6F2"/>
-          </a:solidFill>
-          <a:ln w="11430">
-            <a:solidFill>
-              <a:srgbClr val="8C8C8C"/>
-            </a:solidFill>
-          </a:ln>
-          <a:effectLst/>
-        </p:spPr>
-        <p:txBody>
-          <a:bodyPr rtlCol="0" anchor="ctr"/>
-          <a:lstStyle/>
-          <a:p>
-            <a:pPr algn="ctr"/>
-          </a:p>
-        </p:txBody>
-      </p:sp>
-      <p:sp>
-        <p:nvSpPr>
-          <p:cNvPr id="29" name="Rounded Rectangle 28"/>
-          <p:cNvSpPr/>
-          <p:nvPr/>
-        </p:nvSpPr>
-        <p:spPr>
-          <a:xfrm>
-            <a:off x="3200400" y="3300984"/>
-            <a:ext cx="237744" cy="237744"/>
-          </a:xfrm>
-          <a:prstGeom prst="roundRect">
-            <a:avLst>
-              <a:gd name="adj" fmla="val 30000"/>
-            </a:avLst>
-          </a:prstGeom>
-          <a:solidFill>
-            <a:srgbClr val="E8E6E1"/>
-          </a:solidFill>
-          <a:ln w="9525">
-            <a:solidFill>
-              <a:srgbClr val="FFFFFF"/>
-            </a:solidFill>
-          </a:ln>
-          <a:effectLst/>
-        </p:spPr>
-        <p:txBody>
-          <a:bodyPr rtlCol="0" anchor="ctr"/>
-          <a:lstStyle/>
-          <a:p>
-            <a:pPr algn="ctr"/>
-          </a:p>
-        </p:txBody>
-      </p:sp>
-      <p:sp>
-        <p:nvSpPr>
-          <p:cNvPr id="30" name="Rounded Rectangle 29"/>
-          <p:cNvSpPr/>
-          <p:nvPr/>
-        </p:nvSpPr>
-        <p:spPr>
-          <a:xfrm>
-            <a:off x="3456432" y="3300984"/>
-            <a:ext cx="237744" cy="237744"/>
-          </a:xfrm>
-          <a:prstGeom prst="roundRect">
-            <a:avLst>
-              <a:gd name="adj" fmla="val 30000"/>
-            </a:avLst>
-          </a:prstGeom>
-          <a:solidFill>
-            <a:srgbClr val="5F9EA0"/>
-          </a:solidFill>
-          <a:ln w="9525">
-            <a:solidFill>
-              <a:srgbClr val="FFFFFF"/>
-            </a:solidFill>
-          </a:ln>
-          <a:effectLst/>
-        </p:spPr>
-        <p:txBody>
-          <a:bodyPr rtlCol="0" anchor="ctr"/>
-          <a:lstStyle/>
-          <a:p>
-            <a:pPr algn="ctr"/>
-          </a:p>
-        </p:txBody>
-      </p:sp>
-      <p:sp>
-        <p:nvSpPr>
-          <p:cNvPr id="31" name="Rounded Rectangle 30"/>
-          <p:cNvSpPr/>
-          <p:nvPr/>
-        </p:nvSpPr>
-        <p:spPr>
-          <a:xfrm>
-            <a:off x="3712464" y="3300984"/>
-            <a:ext cx="237744" cy="237744"/>
-          </a:xfrm>
-          <a:prstGeom prst="roundRect">
-            <a:avLst>
-              <a:gd name="adj" fmla="val 30000"/>
-            </a:avLst>
-          </a:prstGeom>
-          <a:solidFill>
-            <a:srgbClr val="7BA7D7"/>
-          </a:solidFill>
-          <a:ln w="9525">
-            <a:solidFill>
-              <a:srgbClr val="FFFFFF"/>
-            </a:solidFill>
-          </a:ln>
-          <a:effectLst/>
-        </p:spPr>
-        <p:txBody>
-          <a:bodyPr rtlCol="0" anchor="ctr"/>
-          <a:lstStyle/>
-          <a:p>
-            <a:pPr algn="ctr"/>
-          </a:p>
-        </p:txBody>
-      </p:sp>
-      <p:sp>
-        <p:nvSpPr>
-          <p:cNvPr id="32" name="Rounded Rectangle 31"/>
-          <p:cNvSpPr/>
-          <p:nvPr/>
-        </p:nvSpPr>
-        <p:spPr>
-          <a:xfrm>
-            <a:off x="3968496" y="3300984"/>
-            <a:ext cx="237744" cy="237744"/>
-          </a:xfrm>
-          <a:prstGeom prst="roundRect">
-            <a:avLst>
-              <a:gd name="adj" fmla="val 30000"/>
-            </a:avLst>
-          </a:prstGeom>
-          <a:solidFill>
-            <a:srgbClr val="E8E6E1"/>
-          </a:solidFill>
-          <a:ln w="9525">
-            <a:solidFill>
-              <a:srgbClr val="FFFFFF"/>
-            </a:solidFill>
-          </a:ln>
-          <a:effectLst/>
-        </p:spPr>
-        <p:txBody>
-          <a:bodyPr rtlCol="0" anchor="ctr"/>
-          <a:lstStyle/>
-          <a:p>
-            <a:pPr algn="ctr"/>
-          </a:p>
-        </p:txBody>
-      </p:sp>
-      <p:sp>
-        <p:nvSpPr>
-          <p:cNvPr id="33" name="TextBox 32"/>
-          <p:cNvSpPr txBox="1"/>
-          <p:nvPr/>
-        </p:nvSpPr>
-        <p:spPr>
-          <a:xfrm>
-            <a:off x="2633472" y="4114800"/>
-            <a:ext cx="1737360" cy="310896"/>
-          </a:xfrm>
-          <a:prstGeom prst="rect">
-            <a:avLst/>
-          </a:prstGeom>
-          <a:noFill/>
-        </p:spPr>
-        <p:txBody>
-          <a:bodyPr wrap="square" lIns="0" rIns="0" tIns="0" bIns="0">
-            <a:spAutoFit/>
-          </a:bodyPr>
-          <a:lstStyle/>
-          <a:p>
-            <a:pPr algn="ctr"/>
-            <a:r>
-              <a:rPr sz="1100" b="1" i="0">
-                <a:solidFill>
-                  <a:srgbClr val="4C72B0"/>
-                </a:solidFill>
-                <a:latin typeface="Times New Roman"/>
-              </a:rPr>
-              <a:t>needed skills light up</a:t>
-            </a:r>
-          </a:p>
-        </p:txBody>
-      </p:sp>
-      <p:sp>
-        <p:nvSpPr>
-          <p:cNvPr id="34" name="Right Arrow 33"/>
-          <p:cNvSpPr/>
-          <p:nvPr/>
-        </p:nvSpPr>
-        <p:spPr>
-          <a:xfrm>
-            <a:off x="4297680" y="2596896"/>
-            <a:ext cx="658368" cy="658368"/>
-          </a:xfrm>
-          <a:prstGeom prst="rightArrow">
-            <a:avLst>
-              <a:gd name="adj1" fmla="val 62000"/>
-              <a:gd name="adj2" fmla="val 42000"/>
-            </a:avLst>
-          </a:prstGeom>
-          <a:solidFill>
-            <a:srgbClr val="8C8C8C"/>
-          </a:solidFill>
-          <a:ln>
-            <a:noFill/>
-          </a:ln>
-          <a:effectLst/>
-        </p:spPr>
-        <p:txBody>
-          <a:bodyPr rtlCol="0" anchor="ctr" lIns="9000" rIns="9000" tIns="4500" bIns="4500" wrap="square"/>
-          <a:lstStyle/>
-          <a:p>
-            <a:pPr algn="ctr"/>
-            <a:r>
-              <a:rPr sz="900" b="1" i="0">
-                <a:solidFill>
-                  <a:srgbClr val="FFFFFF"/>
-                </a:solidFill>
-                <a:latin typeface="Times New Roman"/>
-              </a:rPr>
-              <a:t>sparse</a:t>
-            </a:r>
-          </a:p>
-          <a:p>
-            <a:pPr algn="ctr"/>
-            <a:r>
-              <a:rPr sz="900" b="1" i="0">
-                <a:solidFill>
-                  <a:srgbClr val="FFFFFF"/>
-                </a:solidFill>
-                <a:latin typeface="Times New Roman"/>
-              </a:rPr>
-              <a:t>coding</a:t>
-            </a:r>
-          </a:p>
-        </p:txBody>
-      </p:sp>
-      <p:sp>
-        <p:nvSpPr>
-          <p:cNvPr id="35" name="Rounded Rectangle 34"/>
-          <p:cNvSpPr/>
-          <p:nvPr/>
-        </p:nvSpPr>
-        <p:spPr>
-          <a:xfrm>
-            <a:off x="5010912" y="1463040"/>
-            <a:ext cx="1810512" cy="2697480"/>
-          </a:xfrm>
-          <a:prstGeom prst="roundRect">
-            <a:avLst>
-              <a:gd name="adj" fmla="val 25000"/>
-            </a:avLst>
-          </a:prstGeom>
-          <a:solidFill>
-            <a:srgbClr val="FFFFFF"/>
-          </a:solidFill>
-          <a:ln w="15240">
-            <a:solidFill>
-              <a:srgbClr val="8C8C8C"/>
-            </a:solidFill>
-          </a:ln>
-          <a:effectLst/>
-        </p:spPr>
-        <p:txBody>
-          <a:bodyPr rtlCol="0" anchor="ctr"/>
-          <a:lstStyle/>
-          <a:p>
-            <a:pPr algn="ctr"/>
-          </a:p>
-        </p:txBody>
-      </p:sp>
-      <p:sp>
-        <p:nvSpPr>
-          <p:cNvPr id="36" name="Rounded Rectangle 35"/>
-          <p:cNvSpPr/>
-          <p:nvPr/>
-        </p:nvSpPr>
-        <p:spPr>
-          <a:xfrm>
-            <a:off x="5166360" y="1700784"/>
-            <a:ext cx="274320" cy="274320"/>
-          </a:xfrm>
-          <a:prstGeom prst="roundRect">
-            <a:avLst>
-              <a:gd name="adj" fmla="val 30000"/>
-            </a:avLst>
-          </a:prstGeom>
-          <a:solidFill>
-            <a:srgbClr val="4C72B0"/>
-          </a:solidFill>
-          <a:ln w="9525">
-            <a:solidFill>
-              <a:srgbClr val="FFFFFF"/>
-            </a:solidFill>
-          </a:ln>
-          <a:effectLst/>
-        </p:spPr>
-        <p:txBody>
-          <a:bodyPr rtlCol="0" anchor="ctr"/>
-          <a:lstStyle/>
-          <a:p>
-            <a:pPr algn="ctr"/>
-          </a:p>
-        </p:txBody>
-      </p:sp>
-      <p:sp>
-        <p:nvSpPr>
-          <p:cNvPr id="37" name="Rounded Rectangle 36"/>
-          <p:cNvSpPr/>
-          <p:nvPr/>
-        </p:nvSpPr>
-        <p:spPr>
-          <a:xfrm>
-            <a:off x="5120640" y="1655064"/>
-            <a:ext cx="365760" cy="365760"/>
-          </a:xfrm>
-          <a:prstGeom prst="roundRect">
-            <a:avLst>
-              <a:gd name="adj" fmla="val 25000"/>
+              <a:gd name="adj" fmla="val 40000"/>
             </a:avLst>
           </a:prstGeom>
           <a:noFill/>
@@ -4393,22 +4291,22 @@
       </p:sp>
       <p:sp>
         <p:nvSpPr>
-          <p:cNvPr id="38" name="Rounded Rectangle 37"/>
+          <p:cNvPr id="33" name="Rounded Rectangle 32"/>
           <p:cNvSpPr/>
           <p:nvPr/>
         </p:nvSpPr>
         <p:spPr>
           <a:xfrm>
-            <a:off x="5477256" y="1700784"/>
-            <a:ext cx="274320" cy="274320"/>
+            <a:off x="6108192" y="1700784"/>
+            <a:ext cx="749808" cy="310896"/>
           </a:xfrm>
           <a:prstGeom prst="roundRect">
             <a:avLst>
-              <a:gd name="adj" fmla="val 30000"/>
+              <a:gd name="adj" fmla="val 45000"/>
             </a:avLst>
           </a:prstGeom>
           <a:solidFill>
-            <a:srgbClr val="E8E6E1"/>
+            <a:srgbClr val="7BA7D7"/>
           </a:solidFill>
           <a:ln w="9525">
             <a:solidFill>
@@ -4418,129 +4316,36 @@
           <a:effectLst/>
         </p:spPr>
         <p:txBody>
-          <a:bodyPr rtlCol="0" anchor="ctr"/>
-          <a:lstStyle/>
-          <a:p>
-            <a:pPr algn="ctr"/>
-          </a:p>
-        </p:txBody>
-      </p:sp>
-      <p:sp>
-        <p:nvSpPr>
-          <p:cNvPr id="39" name="Rounded Rectangle 38"/>
+          <a:bodyPr rtlCol="0" anchor="ctr" lIns="9000" rIns="9000" tIns="4500" bIns="4500" wrap="square"/>
+          <a:lstStyle/>
+          <a:p>
+            <a:pPr algn="ctr"/>
+            <a:r>
+              <a:rPr sz="800" b="1" i="0">
+                <a:solidFill>
+                  <a:srgbClr val="FFFFFF"/>
+                </a:solidFill>
+                <a:latin typeface="Times New Roman"/>
+              </a:rPr>
+              <a:t>GROUP BY</a:t>
+            </a:r>
+          </a:p>
+        </p:txBody>
+      </p:sp>
+      <p:sp>
+        <p:nvSpPr>
+          <p:cNvPr id="34" name="Rounded Rectangle 33"/>
           <p:cNvSpPr/>
           <p:nvPr/>
         </p:nvSpPr>
         <p:spPr>
           <a:xfrm>
-            <a:off x="5788152" y="1700784"/>
-            <a:ext cx="274320" cy="274320"/>
+            <a:off x="6062472" y="1655064"/>
+            <a:ext cx="841248" cy="402336"/>
           </a:xfrm>
           <a:prstGeom prst="roundRect">
             <a:avLst>
-              <a:gd name="adj" fmla="val 30000"/>
-            </a:avLst>
-          </a:prstGeom>
-          <a:solidFill>
-            <a:srgbClr val="DD8452"/>
-          </a:solidFill>
-          <a:ln w="9525">
-            <a:solidFill>
-              <a:srgbClr val="FFFFFF"/>
-            </a:solidFill>
-          </a:ln>
-          <a:effectLst/>
-        </p:spPr>
-        <p:txBody>
-          <a:bodyPr rtlCol="0" anchor="ctr"/>
-          <a:lstStyle/>
-          <a:p>
-            <a:pPr algn="ctr"/>
-          </a:p>
-        </p:txBody>
-      </p:sp>
-      <p:sp>
-        <p:nvSpPr>
-          <p:cNvPr id="40" name="Rounded Rectangle 39"/>
-          <p:cNvSpPr/>
-          <p:nvPr/>
-        </p:nvSpPr>
-        <p:spPr>
-          <a:xfrm>
-            <a:off x="6099048" y="1700784"/>
-            <a:ext cx="274320" cy="274320"/>
-          </a:xfrm>
-          <a:prstGeom prst="roundRect">
-            <a:avLst>
-              <a:gd name="adj" fmla="val 30000"/>
-            </a:avLst>
-          </a:prstGeom>
-          <a:solidFill>
-            <a:srgbClr val="E8E6E1"/>
-          </a:solidFill>
-          <a:ln w="9525">
-            <a:solidFill>
-              <a:srgbClr val="FFFFFF"/>
-            </a:solidFill>
-          </a:ln>
-          <a:effectLst/>
-        </p:spPr>
-        <p:txBody>
-          <a:bodyPr rtlCol="0" anchor="ctr"/>
-          <a:lstStyle/>
-          <a:p>
-            <a:pPr algn="ctr"/>
-          </a:p>
-        </p:txBody>
-      </p:sp>
-      <p:sp>
-        <p:nvSpPr>
-          <p:cNvPr id="41" name="Rounded Rectangle 40"/>
-          <p:cNvSpPr/>
-          <p:nvPr/>
-        </p:nvSpPr>
-        <p:spPr>
-          <a:xfrm>
-            <a:off x="6409944" y="1700784"/>
-            <a:ext cx="274320" cy="274320"/>
-          </a:xfrm>
-          <a:prstGeom prst="roundRect">
-            <a:avLst>
-              <a:gd name="adj" fmla="val 30000"/>
-            </a:avLst>
-          </a:prstGeom>
-          <a:solidFill>
-            <a:srgbClr val="5F9EA0"/>
-          </a:solidFill>
-          <a:ln w="9525">
-            <a:solidFill>
-              <a:srgbClr val="FFFFFF"/>
-            </a:solidFill>
-          </a:ln>
-          <a:effectLst/>
-        </p:spPr>
-        <p:txBody>
-          <a:bodyPr rtlCol="0" anchor="ctr"/>
-          <a:lstStyle/>
-          <a:p>
-            <a:pPr algn="ctr"/>
-          </a:p>
-        </p:txBody>
-      </p:sp>
-      <p:sp>
-        <p:nvSpPr>
-          <p:cNvPr id="42" name="Rounded Rectangle 41"/>
-          <p:cNvSpPr/>
-          <p:nvPr/>
-        </p:nvSpPr>
-        <p:spPr>
-          <a:xfrm>
-            <a:off x="6364224" y="1655064"/>
-            <a:ext cx="365760" cy="365760"/>
-          </a:xfrm>
-          <a:prstGeom prst="roundRect">
-            <a:avLst>
-              <a:gd name="adj" fmla="val 25000"/>
+              <a:gd name="adj" fmla="val 40000"/>
             </a:avLst>
           </a:prstGeom>
           <a:noFill/>
@@ -4562,22 +4367,22 @@
       </p:sp>
       <p:sp>
         <p:nvSpPr>
-          <p:cNvPr id="43" name="Rounded Rectangle 42"/>
+          <p:cNvPr id="35" name="Rounded Rectangle 34"/>
           <p:cNvSpPr/>
           <p:nvPr/>
         </p:nvSpPr>
         <p:spPr>
           <a:xfrm>
-            <a:off x="5166360" y="2478024"/>
-            <a:ext cx="274320" cy="274320"/>
+            <a:off x="5266944" y="2203704"/>
+            <a:ext cx="749808" cy="310896"/>
           </a:xfrm>
           <a:prstGeom prst="roundRect">
             <a:avLst>
-              <a:gd name="adj" fmla="val 30000"/>
+              <a:gd name="adj" fmla="val 45000"/>
             </a:avLst>
           </a:prstGeom>
           <a:solidFill>
-            <a:srgbClr val="E8E6E1"/>
+            <a:srgbClr val="5F9EA0"/>
           </a:solidFill>
           <a:ln w="9525">
             <a:solidFill>
@@ -4587,61 +4392,36 @@
           <a:effectLst/>
         </p:spPr>
         <p:txBody>
-          <a:bodyPr rtlCol="0" anchor="ctr"/>
-          <a:lstStyle/>
-          <a:p>
-            <a:pPr algn="ctr"/>
-          </a:p>
-        </p:txBody>
-      </p:sp>
-      <p:sp>
-        <p:nvSpPr>
-          <p:cNvPr id="44" name="Rounded Rectangle 43"/>
+          <a:bodyPr rtlCol="0" anchor="ctr" lIns="9000" rIns="9000" tIns="4500" bIns="4500" wrap="square"/>
+          <a:lstStyle/>
+          <a:p>
+            <a:pPr algn="ctr"/>
+            <a:r>
+              <a:rPr sz="800" b="1" i="0">
+                <a:solidFill>
+                  <a:srgbClr val="FFFFFF"/>
+                </a:solidFill>
+                <a:latin typeface="Times New Roman"/>
+              </a:rPr>
+              <a:t>FILTER</a:t>
+            </a:r>
+          </a:p>
+        </p:txBody>
+      </p:sp>
+      <p:sp>
+        <p:nvSpPr>
+          <p:cNvPr id="36" name="Rounded Rectangle 35"/>
           <p:cNvSpPr/>
           <p:nvPr/>
         </p:nvSpPr>
         <p:spPr>
           <a:xfrm>
-            <a:off x="5477256" y="2478024"/>
-            <a:ext cx="274320" cy="274320"/>
+            <a:off x="5221224" y="2157984"/>
+            <a:ext cx="841248" cy="402336"/>
           </a:xfrm>
           <a:prstGeom prst="roundRect">
             <a:avLst>
-              <a:gd name="adj" fmla="val 30000"/>
-            </a:avLst>
-          </a:prstGeom>
-          <a:solidFill>
-            <a:srgbClr val="7BA7D7"/>
-          </a:solidFill>
-          <a:ln w="9525">
-            <a:solidFill>
-              <a:srgbClr val="FFFFFF"/>
-            </a:solidFill>
-          </a:ln>
-          <a:effectLst/>
-        </p:spPr>
-        <p:txBody>
-          <a:bodyPr rtlCol="0" anchor="ctr"/>
-          <a:lstStyle/>
-          <a:p>
-            <a:pPr algn="ctr"/>
-          </a:p>
-        </p:txBody>
-      </p:sp>
-      <p:sp>
-        <p:nvSpPr>
-          <p:cNvPr id="45" name="Rounded Rectangle 44"/>
-          <p:cNvSpPr/>
-          <p:nvPr/>
-        </p:nvSpPr>
-        <p:spPr>
-          <a:xfrm>
-            <a:off x="5431536" y="2432304"/>
-            <a:ext cx="365760" cy="365760"/>
-          </a:xfrm>
-          <a:prstGeom prst="roundRect">
-            <a:avLst>
-              <a:gd name="adj" fmla="val 25000"/>
+              <a:gd name="adj" fmla="val 40000"/>
             </a:avLst>
           </a:prstGeom>
           <a:noFill/>
@@ -4663,22 +4443,22 @@
       </p:sp>
       <p:sp>
         <p:nvSpPr>
-          <p:cNvPr id="46" name="Rounded Rectangle 45"/>
+          <p:cNvPr id="37" name="Rounded Rectangle 36"/>
           <p:cNvSpPr/>
           <p:nvPr/>
         </p:nvSpPr>
         <p:spPr>
           <a:xfrm>
-            <a:off x="5788152" y="2478024"/>
-            <a:ext cx="274320" cy="274320"/>
+            <a:off x="6108192" y="2203704"/>
+            <a:ext cx="749808" cy="310896"/>
           </a:xfrm>
           <a:prstGeom prst="roundRect">
             <a:avLst>
-              <a:gd name="adj" fmla="val 30000"/>
+              <a:gd name="adj" fmla="val 45000"/>
             </a:avLst>
           </a:prstGeom>
           <a:solidFill>
-            <a:srgbClr val="E8E6E1"/>
+            <a:srgbClr val="5F9EA0"/>
           </a:solidFill>
           <a:ln w="9525">
             <a:solidFill>
@@ -4688,197 +4468,36 @@
           <a:effectLst/>
         </p:spPr>
         <p:txBody>
-          <a:bodyPr rtlCol="0" anchor="ctr"/>
-          <a:lstStyle/>
-          <a:p>
-            <a:pPr algn="ctr"/>
-          </a:p>
-        </p:txBody>
-      </p:sp>
-      <p:sp>
-        <p:nvSpPr>
-          <p:cNvPr id="47" name="Rounded Rectangle 46"/>
+          <a:bodyPr rtlCol="0" anchor="ctr" lIns="9000" rIns="9000" tIns="4500" bIns="4500" wrap="square"/>
+          <a:lstStyle/>
+          <a:p>
+            <a:pPr algn="ctr"/>
+            <a:r>
+              <a:rPr sz="800" b="1" i="0">
+                <a:solidFill>
+                  <a:srgbClr val="FFFFFF"/>
+                </a:solidFill>
+                <a:latin typeface="Times New Roman"/>
+              </a:rPr>
+              <a:t>COUNT</a:t>
+            </a:r>
+          </a:p>
+        </p:txBody>
+      </p:sp>
+      <p:sp>
+        <p:nvSpPr>
+          <p:cNvPr id="38" name="Rounded Rectangle 37"/>
           <p:cNvSpPr/>
           <p:nvPr/>
         </p:nvSpPr>
         <p:spPr>
           <a:xfrm>
-            <a:off x="6099048" y="2478024"/>
-            <a:ext cx="274320" cy="274320"/>
+            <a:off x="6062472" y="2157984"/>
+            <a:ext cx="841248" cy="402336"/>
           </a:xfrm>
           <a:prstGeom prst="roundRect">
             <a:avLst>
-              <a:gd name="adj" fmla="val 30000"/>
-            </a:avLst>
-          </a:prstGeom>
-          <a:solidFill>
-            <a:srgbClr val="C44E52"/>
-          </a:solidFill>
-          <a:ln w="9525">
-            <a:solidFill>
-              <a:srgbClr val="FFFFFF"/>
-            </a:solidFill>
-          </a:ln>
-          <a:effectLst/>
-        </p:spPr>
-        <p:txBody>
-          <a:bodyPr rtlCol="0" anchor="ctr"/>
-          <a:lstStyle/>
-          <a:p>
-            <a:pPr algn="ctr"/>
-          </a:p>
-        </p:txBody>
-      </p:sp>
-      <p:sp>
-        <p:nvSpPr>
-          <p:cNvPr id="48" name="Rounded Rectangle 47"/>
-          <p:cNvSpPr/>
-          <p:nvPr/>
-        </p:nvSpPr>
-        <p:spPr>
-          <a:xfrm>
-            <a:off x="6409944" y="2478024"/>
-            <a:ext cx="274320" cy="274320"/>
-          </a:xfrm>
-          <a:prstGeom prst="roundRect">
-            <a:avLst>
-              <a:gd name="adj" fmla="val 30000"/>
-            </a:avLst>
-          </a:prstGeom>
-          <a:solidFill>
-            <a:srgbClr val="E8E6E1"/>
-          </a:solidFill>
-          <a:ln w="9525">
-            <a:solidFill>
-              <a:srgbClr val="FFFFFF"/>
-            </a:solidFill>
-          </a:ln>
-          <a:effectLst/>
-        </p:spPr>
-        <p:txBody>
-          <a:bodyPr rtlCol="0" anchor="ctr"/>
-          <a:lstStyle/>
-          <a:p>
-            <a:pPr algn="ctr"/>
-          </a:p>
-        </p:txBody>
-      </p:sp>
-      <p:sp>
-        <p:nvSpPr>
-          <p:cNvPr id="49" name="Rounded Rectangle 48"/>
-          <p:cNvSpPr/>
-          <p:nvPr/>
-        </p:nvSpPr>
-        <p:spPr>
-          <a:xfrm>
-            <a:off x="5166360" y="3255264"/>
-            <a:ext cx="274320" cy="274320"/>
-          </a:xfrm>
-          <a:prstGeom prst="roundRect">
-            <a:avLst>
-              <a:gd name="adj" fmla="val 30000"/>
-            </a:avLst>
-          </a:prstGeom>
-          <a:solidFill>
-            <a:srgbClr val="DD8452"/>
-          </a:solidFill>
-          <a:ln w="9525">
-            <a:solidFill>
-              <a:srgbClr val="FFFFFF"/>
-            </a:solidFill>
-          </a:ln>
-          <a:effectLst/>
-        </p:spPr>
-        <p:txBody>
-          <a:bodyPr rtlCol="0" anchor="ctr"/>
-          <a:lstStyle/>
-          <a:p>
-            <a:pPr algn="ctr"/>
-          </a:p>
-        </p:txBody>
-      </p:sp>
-      <p:sp>
-        <p:nvSpPr>
-          <p:cNvPr id="50" name="Rounded Rectangle 49"/>
-          <p:cNvSpPr/>
-          <p:nvPr/>
-        </p:nvSpPr>
-        <p:spPr>
-          <a:xfrm>
-            <a:off x="5477256" y="3255264"/>
-            <a:ext cx="274320" cy="274320"/>
-          </a:xfrm>
-          <a:prstGeom prst="roundRect">
-            <a:avLst>
-              <a:gd name="adj" fmla="val 30000"/>
-            </a:avLst>
-          </a:prstGeom>
-          <a:solidFill>
-            <a:srgbClr val="E8E6E1"/>
-          </a:solidFill>
-          <a:ln w="9525">
-            <a:solidFill>
-              <a:srgbClr val="FFFFFF"/>
-            </a:solidFill>
-          </a:ln>
-          <a:effectLst/>
-        </p:spPr>
-        <p:txBody>
-          <a:bodyPr rtlCol="0" anchor="ctr"/>
-          <a:lstStyle/>
-          <a:p>
-            <a:pPr algn="ctr"/>
-          </a:p>
-        </p:txBody>
-      </p:sp>
-      <p:sp>
-        <p:nvSpPr>
-          <p:cNvPr id="51" name="Rounded Rectangle 50"/>
-          <p:cNvSpPr/>
-          <p:nvPr/>
-        </p:nvSpPr>
-        <p:spPr>
-          <a:xfrm>
-            <a:off x="5788152" y="3255264"/>
-            <a:ext cx="274320" cy="274320"/>
-          </a:xfrm>
-          <a:prstGeom prst="roundRect">
-            <a:avLst>
-              <a:gd name="adj" fmla="val 30000"/>
-            </a:avLst>
-          </a:prstGeom>
-          <a:solidFill>
-            <a:srgbClr val="4C72B0"/>
-          </a:solidFill>
-          <a:ln w="9525">
-            <a:solidFill>
-              <a:srgbClr val="FFFFFF"/>
-            </a:solidFill>
-          </a:ln>
-          <a:effectLst/>
-        </p:spPr>
-        <p:txBody>
-          <a:bodyPr rtlCol="0" anchor="ctr"/>
-          <a:lstStyle/>
-          <a:p>
-            <a:pPr algn="ctr"/>
-          </a:p>
-        </p:txBody>
-      </p:sp>
-      <p:sp>
-        <p:nvSpPr>
-          <p:cNvPr id="52" name="Rounded Rectangle 51"/>
-          <p:cNvSpPr/>
-          <p:nvPr/>
-        </p:nvSpPr>
-        <p:spPr>
-          <a:xfrm>
-            <a:off x="5742432" y="3209544"/>
-            <a:ext cx="365760" cy="365760"/>
-          </a:xfrm>
-          <a:prstGeom prst="roundRect">
-            <a:avLst>
-              <a:gd name="adj" fmla="val 25000"/>
+              <a:gd name="adj" fmla="val 40000"/>
             </a:avLst>
           </a:prstGeom>
           <a:noFill/>
@@ -4900,22 +4519,22 @@
       </p:sp>
       <p:sp>
         <p:nvSpPr>
-          <p:cNvPr id="53" name="Rounded Rectangle 52"/>
+          <p:cNvPr id="39" name="Rounded Rectangle 38"/>
           <p:cNvSpPr/>
           <p:nvPr/>
         </p:nvSpPr>
         <p:spPr>
           <a:xfrm>
-            <a:off x="6099048" y="3255264"/>
-            <a:ext cx="274320" cy="274320"/>
+            <a:off x="5266944" y="2706624"/>
+            <a:ext cx="749808" cy="310896"/>
           </a:xfrm>
           <a:prstGeom prst="roundRect">
             <a:avLst>
-              <a:gd name="adj" fmla="val 30000"/>
+              <a:gd name="adj" fmla="val 45000"/>
             </a:avLst>
           </a:prstGeom>
           <a:solidFill>
-            <a:srgbClr val="E8E6E1"/>
+            <a:srgbClr val="7BA7D7"/>
           </a:solidFill>
           <a:ln w="9525">
             <a:solidFill>
@@ -4925,61 +4544,36 @@
           <a:effectLst/>
         </p:spPr>
         <p:txBody>
-          <a:bodyPr rtlCol="0" anchor="ctr"/>
-          <a:lstStyle/>
-          <a:p>
-            <a:pPr algn="ctr"/>
-          </a:p>
-        </p:txBody>
-      </p:sp>
-      <p:sp>
-        <p:nvSpPr>
-          <p:cNvPr id="54" name="Rounded Rectangle 53"/>
+          <a:bodyPr rtlCol="0" anchor="ctr" lIns="9000" rIns="9000" tIns="4500" bIns="4500" wrap="square"/>
+          <a:lstStyle/>
+          <a:p>
+            <a:pPr algn="ctr"/>
+            <a:r>
+              <a:rPr sz="800" b="1" i="0">
+                <a:solidFill>
+                  <a:srgbClr val="FFFFFF"/>
+                </a:solidFill>
+                <a:latin typeface="Times New Roman"/>
+              </a:rPr>
+              <a:t>SORT</a:t>
+            </a:r>
+          </a:p>
+        </p:txBody>
+      </p:sp>
+      <p:sp>
+        <p:nvSpPr>
+          <p:cNvPr id="40" name="Rounded Rectangle 39"/>
           <p:cNvSpPr/>
           <p:nvPr/>
         </p:nvSpPr>
         <p:spPr>
           <a:xfrm>
-            <a:off x="6409944" y="3255264"/>
-            <a:ext cx="274320" cy="274320"/>
+            <a:off x="5221224" y="2660904"/>
+            <a:ext cx="841248" cy="402336"/>
           </a:xfrm>
           <a:prstGeom prst="roundRect">
             <a:avLst>
-              <a:gd name="adj" fmla="val 30000"/>
-            </a:avLst>
-          </a:prstGeom>
-          <a:solidFill>
-            <a:srgbClr val="5F9EA0"/>
-          </a:solidFill>
-          <a:ln w="9525">
-            <a:solidFill>
-              <a:srgbClr val="FFFFFF"/>
-            </a:solidFill>
-          </a:ln>
-          <a:effectLst/>
-        </p:spPr>
-        <p:txBody>
-          <a:bodyPr rtlCol="0" anchor="ctr"/>
-          <a:lstStyle/>
-          <a:p>
-            <a:pPr algn="ctr"/>
-          </a:p>
-        </p:txBody>
-      </p:sp>
-      <p:sp>
-        <p:nvSpPr>
-          <p:cNvPr id="55" name="Rounded Rectangle 54"/>
-          <p:cNvSpPr/>
-          <p:nvPr/>
-        </p:nvSpPr>
-        <p:spPr>
-          <a:xfrm>
-            <a:off x="6364224" y="3209544"/>
-            <a:ext cx="365760" cy="365760"/>
-          </a:xfrm>
-          <a:prstGeom prst="roundRect">
-            <a:avLst>
-              <a:gd name="adj" fmla="val 25000"/>
+              <a:gd name="adj" fmla="val 40000"/>
             </a:avLst>
           </a:prstGeom>
           <a:noFill/>
@@ -5001,84 +4595,186 @@
       </p:sp>
       <p:sp>
         <p:nvSpPr>
-          <p:cNvPr id="56" name="TextBox 55"/>
-          <p:cNvSpPr txBox="1"/>
-          <p:nvPr/>
-        </p:nvSpPr>
-        <p:spPr>
-          <a:xfrm>
-            <a:off x="5010912" y="1115568"/>
-            <a:ext cx="1463040" cy="274320"/>
-          </a:xfrm>
-          <a:prstGeom prst="rect">
-            <a:avLst/>
-          </a:prstGeom>
-          <a:noFill/>
-        </p:spPr>
-        <p:txBody>
-          <a:bodyPr wrap="square" lIns="0" rIns="0" tIns="0" bIns="0">
-            <a:spAutoFit/>
-          </a:bodyPr>
-          <a:lstStyle/>
-          <a:p>
-            <a:pPr algn="l"/>
-            <a:r>
-              <a:rPr sz="1100" b="0" i="0">
+          <p:cNvPr id="41" name="Rounded Rectangle 40"/>
+          <p:cNvSpPr/>
+          <p:nvPr/>
+        </p:nvSpPr>
+        <p:spPr>
+          <a:xfrm>
+            <a:off x="6108192" y="2706624"/>
+            <a:ext cx="749808" cy="310896"/>
+          </a:xfrm>
+          <a:prstGeom prst="roundRect">
+            <a:avLst>
+              <a:gd name="adj" fmla="val 45000"/>
+            </a:avLst>
+          </a:prstGeom>
+          <a:solidFill>
+            <a:srgbClr val="DD8452"/>
+          </a:solidFill>
+          <a:ln w="9525">
+            <a:solidFill>
+              <a:srgbClr val="FFFFFF"/>
+            </a:solidFill>
+          </a:ln>
+          <a:effectLst/>
+        </p:spPr>
+        <p:txBody>
+          <a:bodyPr rtlCol="0" anchor="ctr" lIns="9000" rIns="9000" tIns="4500" bIns="4500" wrap="square"/>
+          <a:lstStyle/>
+          <a:p>
+            <a:pPr algn="ctr"/>
+            <a:r>
+              <a:rPr sz="800" b="1" i="0">
+                <a:solidFill>
+                  <a:srgbClr val="FFFFFF"/>
+                </a:solidFill>
+                <a:latin typeface="Times New Roman"/>
+              </a:rPr>
+              <a:t>PLOT</a:t>
+            </a:r>
+          </a:p>
+        </p:txBody>
+      </p:sp>
+      <p:sp>
+        <p:nvSpPr>
+          <p:cNvPr id="42" name="Rounded Rectangle 41"/>
+          <p:cNvSpPr/>
+          <p:nvPr/>
+        </p:nvSpPr>
+        <p:spPr>
+          <a:xfrm>
+            <a:off x="5266944" y="3209544"/>
+            <a:ext cx="749808" cy="310896"/>
+          </a:xfrm>
+          <a:prstGeom prst="roundRect">
+            <a:avLst>
+              <a:gd name="adj" fmla="val 45000"/>
+            </a:avLst>
+          </a:prstGeom>
+          <a:solidFill>
+            <a:srgbClr val="DD8452"/>
+          </a:solidFill>
+          <a:ln w="9525">
+            <a:solidFill>
+              <a:srgbClr val="FFFFFF"/>
+            </a:solidFill>
+          </a:ln>
+          <a:effectLst/>
+        </p:spPr>
+        <p:txBody>
+          <a:bodyPr rtlCol="0" anchor="ctr" lIns="9000" rIns="9000" tIns="4500" bIns="4500" wrap="square"/>
+          <a:lstStyle/>
+          <a:p>
+            <a:pPr algn="ctr"/>
+            <a:r>
+              <a:rPr sz="800" b="1" i="0">
+                <a:solidFill>
+                  <a:srgbClr val="FFFFFF"/>
+                </a:solidFill>
+                <a:latin typeface="Times New Roman"/>
+              </a:rPr>
+              <a:t>REGEX</a:t>
+            </a:r>
+          </a:p>
+        </p:txBody>
+      </p:sp>
+      <p:sp>
+        <p:nvSpPr>
+          <p:cNvPr id="43" name="Rounded Rectangle 42"/>
+          <p:cNvSpPr/>
+          <p:nvPr/>
+        </p:nvSpPr>
+        <p:spPr>
+          <a:xfrm>
+            <a:off x="6108192" y="3209544"/>
+            <a:ext cx="749808" cy="310896"/>
+          </a:xfrm>
+          <a:prstGeom prst="roundRect">
+            <a:avLst>
+              <a:gd name="adj" fmla="val 45000"/>
+            </a:avLst>
+          </a:prstGeom>
+          <a:solidFill>
+            <a:srgbClr val="C44E52"/>
+          </a:solidFill>
+          <a:ln w="9525">
+            <a:solidFill>
+              <a:srgbClr val="FFFFFF"/>
+            </a:solidFill>
+          </a:ln>
+          <a:effectLst/>
+        </p:spPr>
+        <p:txBody>
+          <a:bodyPr rtlCol="0" anchor="ctr" lIns="9000" rIns="9000" tIns="4500" bIns="4500" wrap="square"/>
+          <a:lstStyle/>
+          <a:p>
+            <a:pPr algn="ctr"/>
+            <a:r>
+              <a:rPr sz="800" b="1" i="0">
+                <a:solidFill>
+                  <a:srgbClr val="FFFFFF"/>
+                </a:solidFill>
+                <a:latin typeface="Times New Roman"/>
+              </a:rPr>
+              <a:t>RECURSION</a:t>
+            </a:r>
+          </a:p>
+        </p:txBody>
+      </p:sp>
+      <p:sp>
+        <p:nvSpPr>
+          <p:cNvPr id="44" name="Rounded Rectangle 43"/>
+          <p:cNvSpPr/>
+          <p:nvPr/>
+        </p:nvSpPr>
+        <p:spPr>
+          <a:xfrm>
+            <a:off x="5266944" y="3712464"/>
+            <a:ext cx="749808" cy="310896"/>
+          </a:xfrm>
+          <a:prstGeom prst="roundRect">
+            <a:avLst>
+              <a:gd name="adj" fmla="val 45000"/>
+            </a:avLst>
+          </a:prstGeom>
+          <a:solidFill>
+            <a:srgbClr val="E8E6E1"/>
+          </a:solidFill>
+          <a:ln w="9525">
+            <a:solidFill>
+              <a:srgbClr val="FFFFFF"/>
+            </a:solidFill>
+          </a:ln>
+          <a:effectLst/>
+        </p:spPr>
+        <p:txBody>
+          <a:bodyPr rtlCol="0" anchor="ctr" lIns="9000" rIns="9000" tIns="4500" bIns="4500" wrap="square"/>
+          <a:lstStyle/>
+          <a:p>
+            <a:pPr algn="ctr"/>
+            <a:r>
+              <a:rPr sz="800" b="1" i="0">
                 <a:solidFill>
                   <a:srgbClr val="6B6A63"/>
                 </a:solidFill>
                 <a:latin typeface="Times New Roman"/>
               </a:rPr>
-              <a:t>skill atom library</a:t>
-            </a:r>
-          </a:p>
-        </p:txBody>
-      </p:sp>
-      <p:sp>
-        <p:nvSpPr>
-          <p:cNvPr id="57" name="TextBox 56"/>
-          <p:cNvSpPr txBox="1"/>
-          <p:nvPr/>
-        </p:nvSpPr>
-        <p:spPr>
-          <a:xfrm>
-            <a:off x="6309360" y="1481328"/>
-            <a:ext cx="1371600" cy="256032"/>
-          </a:xfrm>
-          <a:prstGeom prst="rect">
-            <a:avLst/>
-          </a:prstGeom>
-          <a:noFill/>
-        </p:spPr>
-        <p:txBody>
-          <a:bodyPr wrap="square" lIns="0" rIns="0" tIns="0" bIns="0">
-            <a:spAutoFit/>
-          </a:bodyPr>
-          <a:lstStyle/>
-          <a:p>
-            <a:pPr algn="l"/>
-            <a:r>
-              <a:rPr sz="950" b="1" i="0">
-                <a:solidFill>
-                  <a:srgbClr val="1F1F1E"/>
-                </a:solidFill>
-                <a:latin typeface="Times New Roman"/>
-              </a:rPr>
-              <a:t>▸ fires on JOIN</a:t>
-            </a:r>
-          </a:p>
-        </p:txBody>
-      </p:sp>
-      <p:sp>
-        <p:nvSpPr>
-          <p:cNvPr id="58" name="Rounded Rectangle 57"/>
+              <a:t>…</a:t>
+            </a:r>
+          </a:p>
+        </p:txBody>
+      </p:sp>
+      <p:sp>
+        <p:nvSpPr>
+          <p:cNvPr id="45" name="Rounded Rectangle 44"/>
           <p:cNvSpPr/>
           <p:nvPr/>
         </p:nvSpPr>
         <p:spPr>
           <a:xfrm>
-            <a:off x="4846320" y="4279392"/>
-            <a:ext cx="2139696" cy="566928"/>
+            <a:off x="4956048" y="4279392"/>
+            <a:ext cx="2212848" cy="566928"/>
           </a:xfrm>
           <a:prstGeom prst="roundRect">
             <a:avLst>
@@ -5126,14 +4822,14 @@
       </p:sp>
       <p:sp>
         <p:nvSpPr>
-          <p:cNvPr id="59" name="Right Arrow 58"/>
+          <p:cNvPr id="46" name="Right Arrow 45"/>
           <p:cNvSpPr/>
           <p:nvPr/>
         </p:nvSpPr>
         <p:spPr>
           <a:xfrm>
-            <a:off x="6876288" y="2596896"/>
-            <a:ext cx="640080" cy="658368"/>
+            <a:off x="7114032" y="2596896"/>
+            <a:ext cx="585216" cy="658368"/>
           </a:xfrm>
           <a:prstGeom prst="rightArrow">
             <a:avLst>
@@ -5180,13 +4876,13 @@
       </p:sp>
       <p:sp>
         <p:nvSpPr>
-          <p:cNvPr id="60" name="Rounded Rectangle 59"/>
+          <p:cNvPr id="47" name="Rounded Rectangle 46"/>
           <p:cNvSpPr/>
           <p:nvPr/>
         </p:nvSpPr>
         <p:spPr>
           <a:xfrm>
-            <a:off x="7731252" y="822960"/>
+            <a:off x="7895844" y="822960"/>
             <a:ext cx="960120" cy="731520"/>
           </a:xfrm>
           <a:prstGeom prst="roundRect">
@@ -5214,13 +4910,13 @@
       </p:sp>
       <p:sp>
         <p:nvSpPr>
-          <p:cNvPr id="61" name="Rectangle 60"/>
+          <p:cNvPr id="48" name="Rectangle 47"/>
           <p:cNvSpPr/>
           <p:nvPr/>
         </p:nvSpPr>
         <p:spPr>
           <a:xfrm>
-            <a:off x="8200339" y="694944"/>
+            <a:off x="8364931" y="694944"/>
             <a:ext cx="21945" cy="128016"/>
           </a:xfrm>
           <a:prstGeom prst="rect">
@@ -5244,13 +4940,13 @@
       </p:sp>
       <p:sp>
         <p:nvSpPr>
-          <p:cNvPr id="62" name="Oval 61"/>
+          <p:cNvPr id="49" name="Oval 48"/>
           <p:cNvSpPr/>
           <p:nvPr/>
         </p:nvSpPr>
         <p:spPr>
           <a:xfrm>
-            <a:off x="8165592" y="603504"/>
+            <a:off x="8330183" y="603504"/>
             <a:ext cx="91440" cy="91440"/>
           </a:xfrm>
           <a:prstGeom prst="ellipse">
@@ -5274,13 +4970,13 @@
       </p:sp>
       <p:sp>
         <p:nvSpPr>
-          <p:cNvPr id="63" name="Oval 62"/>
+          <p:cNvPr id="50" name="Oval 49"/>
           <p:cNvSpPr/>
           <p:nvPr/>
         </p:nvSpPr>
         <p:spPr>
           <a:xfrm>
-            <a:off x="7997342" y="1074420"/>
+            <a:off x="8161934" y="1074420"/>
             <a:ext cx="82296" cy="82296"/>
           </a:xfrm>
           <a:prstGeom prst="ellipse">
@@ -5304,13 +5000,13 @@
       </p:sp>
       <p:sp>
         <p:nvSpPr>
-          <p:cNvPr id="64" name="Oval 63"/>
+          <p:cNvPr id="51" name="Oval 50"/>
           <p:cNvSpPr/>
           <p:nvPr/>
         </p:nvSpPr>
         <p:spPr>
           <a:xfrm>
-            <a:off x="8342985" y="1074420"/>
+            <a:off x="8507577" y="1074420"/>
             <a:ext cx="82296" cy="82296"/>
           </a:xfrm>
           <a:prstGeom prst="ellipse">
@@ -5334,13 +5030,13 @@
       </p:sp>
       <p:sp>
         <p:nvSpPr>
-          <p:cNvPr id="65" name="Rounded Rectangle 64"/>
+          <p:cNvPr id="52" name="Rounded Rectangle 51"/>
           <p:cNvSpPr/>
           <p:nvPr/>
         </p:nvSpPr>
         <p:spPr>
           <a:xfrm>
-            <a:off x="8076895" y="1276502"/>
+            <a:off x="8241487" y="1276502"/>
             <a:ext cx="268833" cy="27432"/>
           </a:xfrm>
           <a:prstGeom prst="roundRect">
@@ -5366,13 +5062,13 @@
       </p:sp>
       <p:sp>
         <p:nvSpPr>
-          <p:cNvPr id="66" name="TextBox 65"/>
+          <p:cNvPr id="53" name="TextBox 52"/>
           <p:cNvSpPr txBox="1"/>
           <p:nvPr/>
         </p:nvSpPr>
         <p:spPr>
           <a:xfrm>
-            <a:off x="7411212" y="1591056"/>
+            <a:off x="7575804" y="1591056"/>
             <a:ext cx="1600200" cy="256032"/>
           </a:xfrm>
           <a:prstGeom prst="rect">
@@ -5401,14 +5097,14 @@
       </p:sp>
       <p:sp>
         <p:nvSpPr>
-          <p:cNvPr id="67" name="Down Arrow 66"/>
+          <p:cNvPr id="54" name="Down Arrow 53"/>
           <p:cNvSpPr/>
           <p:nvPr/>
         </p:nvSpPr>
         <p:spPr>
           <a:xfrm>
-            <a:off x="8147304" y="1810512"/>
-            <a:ext cx="146304" cy="365760"/>
+            <a:off x="8311896" y="1810512"/>
+            <a:ext cx="146304" cy="329184"/>
           </a:xfrm>
           <a:prstGeom prst="downArrow">
             <a:avLst/>
@@ -5431,13 +5127,13 @@
       </p:sp>
       <p:sp>
         <p:nvSpPr>
-          <p:cNvPr id="68" name="TextBox 67"/>
+          <p:cNvPr id="55" name="TextBox 54"/>
           <p:cNvSpPr txBox="1"/>
           <p:nvPr/>
         </p:nvSpPr>
         <p:spPr>
           <a:xfrm>
-            <a:off x="8339327" y="1865376"/>
+            <a:off x="8503920" y="1828800"/>
             <a:ext cx="914400" cy="256032"/>
           </a:xfrm>
           <a:prstGeom prst="rect">
@@ -5466,14 +5162,14 @@
       </p:sp>
       <p:sp>
         <p:nvSpPr>
-          <p:cNvPr id="69" name="Rounded Rectangle 68"/>
+          <p:cNvPr id="56" name="Rounded Rectangle 55"/>
           <p:cNvSpPr/>
           <p:nvPr/>
         </p:nvSpPr>
         <p:spPr>
           <a:xfrm>
-            <a:off x="7571231" y="2286000"/>
-            <a:ext cx="1298448" cy="566928"/>
+            <a:off x="7754112" y="2212848"/>
+            <a:ext cx="1481328" cy="658368"/>
           </a:xfrm>
           <a:prstGeom prst="roundRect">
             <a:avLst>
@@ -5500,18 +5196,65 @@
       </p:sp>
       <p:sp>
         <p:nvSpPr>
-          <p:cNvPr id="70" name="Rounded Rectangle 69"/>
+          <p:cNvPr id="57" name="TextBox 56"/>
+          <p:cNvSpPr txBox="1"/>
+          <p:nvPr/>
+        </p:nvSpPr>
+        <p:spPr>
+          <a:xfrm>
+            <a:off x="7845552" y="2267712"/>
+            <a:ext cx="1371600" cy="384048"/>
+          </a:xfrm>
+          <a:prstGeom prst="rect">
+            <a:avLst/>
+          </a:prstGeom>
+          <a:noFill/>
+        </p:spPr>
+        <p:txBody>
+          <a:bodyPr wrap="square" lIns="0" rIns="0" tIns="0" bIns="0">
+            <a:spAutoFit/>
+          </a:bodyPr>
+          <a:lstStyle/>
+          <a:p>
+            <a:pPr algn="l"/>
+            <a:r>
+              <a:rPr sz="700" b="0" i="0">
+                <a:solidFill>
+                  <a:srgbClr val="1F1F1E"/>
+                </a:solidFill>
+                <a:latin typeface="Consolas"/>
+              </a:rPr>
+              <a:t>SELECT c, COUNT(*)</a:t>
+            </a:r>
+          </a:p>
+          <a:p>
+            <a:pPr algn="l"/>
+            <a:r>
+              <a:rPr sz="700" b="0" i="0">
+                <a:solidFill>
+                  <a:srgbClr val="1F1F1E"/>
+                </a:solidFill>
+                <a:latin typeface="Consolas"/>
+              </a:rPr>
+              <a:t>  FROM a JOIN b …</a:t>
+            </a:r>
+          </a:p>
+        </p:txBody>
+      </p:sp>
+      <p:sp>
+        <p:nvSpPr>
+          <p:cNvPr id="58" name="Rounded Rectangle 57"/>
           <p:cNvSpPr/>
           <p:nvPr/>
         </p:nvSpPr>
         <p:spPr>
           <a:xfrm>
-            <a:off x="7699248" y="2432304"/>
-            <a:ext cx="274320" cy="274320"/>
+            <a:off x="7845552" y="2633472"/>
+            <a:ext cx="603504" cy="201168"/>
           </a:xfrm>
           <a:prstGeom prst="roundRect">
             <a:avLst>
-              <a:gd name="adj" fmla="val 30000"/>
+              <a:gd name="adj" fmla="val 45000"/>
             </a:avLst>
           </a:prstGeom>
           <a:solidFill>
@@ -5525,31 +5268,121 @@
           <a:effectLst/>
         </p:spPr>
         <p:txBody>
-          <a:bodyPr rtlCol="0" anchor="ctr"/>
-          <a:lstStyle/>
-          <a:p>
-            <a:pPr algn="ctr"/>
-          </a:p>
-        </p:txBody>
-      </p:sp>
-      <p:sp>
-        <p:nvSpPr>
-          <p:cNvPr id="71" name="Rounded Rectangle 70"/>
+          <a:bodyPr rtlCol="0" anchor="ctr" lIns="9000" rIns="9000" tIns="4500" bIns="4500" wrap="square"/>
+          <a:lstStyle/>
+          <a:p>
+            <a:pPr algn="ctr"/>
+            <a:r>
+              <a:rPr sz="650" b="1" i="0">
+                <a:solidFill>
+                  <a:srgbClr val="FFFFFF"/>
+                </a:solidFill>
+                <a:latin typeface="Times New Roman"/>
+              </a:rPr>
+              <a:t>JOIN</a:t>
+            </a:r>
+          </a:p>
+        </p:txBody>
+      </p:sp>
+      <p:sp>
+        <p:nvSpPr>
+          <p:cNvPr id="59" name="Rounded Rectangle 58"/>
           <p:cNvSpPr/>
           <p:nvPr/>
         </p:nvSpPr>
         <p:spPr>
           <a:xfrm>
-            <a:off x="8001000" y="2432304"/>
-            <a:ext cx="274320" cy="274320"/>
+            <a:off x="7754112" y="2999232"/>
+            <a:ext cx="1481328" cy="658368"/>
           </a:xfrm>
           <a:prstGeom prst="roundRect">
             <a:avLst>
-              <a:gd name="adj" fmla="val 30000"/>
+              <a:gd name="adj" fmla="val 25000"/>
             </a:avLst>
           </a:prstGeom>
           <a:solidFill>
-            <a:srgbClr val="5F9EA0"/>
+            <a:srgbClr val="F7F6F2"/>
+          </a:solidFill>
+          <a:ln w="16510">
+            <a:solidFill>
+              <a:srgbClr val="4C72B0"/>
+            </a:solidFill>
+          </a:ln>
+          <a:effectLst/>
+        </p:spPr>
+        <p:txBody>
+          <a:bodyPr rtlCol="0" anchor="ctr"/>
+          <a:lstStyle/>
+          <a:p>
+            <a:pPr algn="ctr"/>
+          </a:p>
+        </p:txBody>
+      </p:sp>
+      <p:sp>
+        <p:nvSpPr>
+          <p:cNvPr id="60" name="TextBox 59"/>
+          <p:cNvSpPr txBox="1"/>
+          <p:nvPr/>
+        </p:nvSpPr>
+        <p:spPr>
+          <a:xfrm>
+            <a:off x="7845552" y="3054096"/>
+            <a:ext cx="1371600" cy="384048"/>
+          </a:xfrm>
+          <a:prstGeom prst="rect">
+            <a:avLst/>
+          </a:prstGeom>
+          <a:noFill/>
+        </p:spPr>
+        <p:txBody>
+          <a:bodyPr wrap="square" lIns="0" rIns="0" tIns="0" bIns="0">
+            <a:spAutoFit/>
+          </a:bodyPr>
+          <a:lstStyle/>
+          <a:p>
+            <a:pPr algn="l"/>
+            <a:r>
+              <a:rPr sz="700" b="0" i="0">
+                <a:solidFill>
+                  <a:srgbClr val="1F1F1E"/>
+                </a:solidFill>
+                <a:latin typeface="Consolas"/>
+              </a:rPr>
+              <a:t>df.groupby('city')</a:t>
+            </a:r>
+          </a:p>
+          <a:p>
+            <a:pPr algn="l"/>
+            <a:r>
+              <a:rPr sz="700" b="0" i="0">
+                <a:solidFill>
+                  <a:srgbClr val="1F1F1E"/>
+                </a:solidFill>
+                <a:latin typeface="Consolas"/>
+              </a:rPr>
+              <a:t>  .dues.sum()</a:t>
+            </a:r>
+          </a:p>
+        </p:txBody>
+      </p:sp>
+      <p:sp>
+        <p:nvSpPr>
+          <p:cNvPr id="61" name="Rounded Rectangle 60"/>
+          <p:cNvSpPr/>
+          <p:nvPr/>
+        </p:nvSpPr>
+        <p:spPr>
+          <a:xfrm>
+            <a:off x="7845552" y="3419856"/>
+            <a:ext cx="603504" cy="201168"/>
+          </a:xfrm>
+          <a:prstGeom prst="roundRect">
+            <a:avLst>
+              <a:gd name="adj" fmla="val 45000"/>
+            </a:avLst>
+          </a:prstGeom>
+          <a:solidFill>
+            <a:srgbClr val="7BA7D7"/>
           </a:solidFill>
           <a:ln w="9525">
             <a:solidFill>
@@ -5559,31 +5392,109 @@
           <a:effectLst/>
         </p:spPr>
         <p:txBody>
-          <a:bodyPr rtlCol="0" anchor="ctr"/>
-          <a:lstStyle/>
-          <a:p>
-            <a:pPr algn="ctr"/>
-          </a:p>
-        </p:txBody>
-      </p:sp>
-      <p:sp>
-        <p:nvSpPr>
-          <p:cNvPr id="72" name="Rounded Rectangle 71"/>
+          <a:bodyPr rtlCol="0" anchor="ctr" lIns="9000" rIns="9000" tIns="4500" bIns="4500" wrap="square"/>
+          <a:lstStyle/>
+          <a:p>
+            <a:pPr algn="ctr"/>
+            <a:r>
+              <a:rPr sz="650" b="1" i="0">
+                <a:solidFill>
+                  <a:srgbClr val="FFFFFF"/>
+                </a:solidFill>
+                <a:latin typeface="Times New Roman"/>
+              </a:rPr>
+              <a:t>GROUP BY</a:t>
+            </a:r>
+          </a:p>
+        </p:txBody>
+      </p:sp>
+      <p:sp>
+        <p:nvSpPr>
+          <p:cNvPr id="62" name="Rounded Rectangle 61"/>
           <p:cNvSpPr/>
           <p:nvPr/>
         </p:nvSpPr>
         <p:spPr>
           <a:xfrm>
-            <a:off x="8302752" y="2432304"/>
-            <a:ext cx="274320" cy="274320"/>
+            <a:off x="7754112" y="3785615"/>
+            <a:ext cx="1481328" cy="658368"/>
           </a:xfrm>
           <a:prstGeom prst="roundRect">
             <a:avLst>
-              <a:gd name="adj" fmla="val 30000"/>
+              <a:gd name="adj" fmla="val 25000"/>
             </a:avLst>
           </a:prstGeom>
           <a:solidFill>
             <a:srgbClr val="E8E6E1"/>
+          </a:solidFill>
+          <a:ln w="16510">
+            <a:solidFill>
+              <a:srgbClr val="8C8C8C"/>
+            </a:solidFill>
+          </a:ln>
+          <a:effectLst/>
+        </p:spPr>
+        <p:txBody>
+          <a:bodyPr rtlCol="0" anchor="ctr"/>
+          <a:lstStyle/>
+          <a:p>
+            <a:pPr algn="ctr"/>
+          </a:p>
+        </p:txBody>
+      </p:sp>
+      <p:sp>
+        <p:nvSpPr>
+          <p:cNvPr id="63" name="TextBox 62"/>
+          <p:cNvSpPr txBox="1"/>
+          <p:nvPr/>
+        </p:nvSpPr>
+        <p:spPr>
+          <a:xfrm>
+            <a:off x="7845552" y="3840479"/>
+            <a:ext cx="1371600" cy="384048"/>
+          </a:xfrm>
+          <a:prstGeom prst="rect">
+            <a:avLst/>
+          </a:prstGeom>
+          <a:noFill/>
+        </p:spPr>
+        <p:txBody>
+          <a:bodyPr wrap="square" lIns="0" rIns="0" tIns="0" bIns="0">
+            <a:spAutoFit/>
+          </a:bodyPr>
+          <a:lstStyle/>
+          <a:p>
+            <a:pPr algn="l"/>
+            <a:r>
+              <a:rPr sz="700" b="0" i="0">
+                <a:solidFill>
+                  <a:srgbClr val="1F1F1E"/>
+                </a:solidFill>
+                <a:latin typeface="Consolas"/>
+              </a:rPr>
+              <a:t>plt.plot(revenue)</a:t>
+            </a:r>
+          </a:p>
+        </p:txBody>
+      </p:sp>
+      <p:sp>
+        <p:nvSpPr>
+          <p:cNvPr id="64" name="Rounded Rectangle 63"/>
+          <p:cNvSpPr/>
+          <p:nvPr/>
+        </p:nvSpPr>
+        <p:spPr>
+          <a:xfrm>
+            <a:off x="7845552" y="4206240"/>
+            <a:ext cx="603504" cy="201168"/>
+          </a:xfrm>
+          <a:prstGeom prst="roundRect">
+            <a:avLst>
+              <a:gd name="adj" fmla="val 45000"/>
+            </a:avLst>
+          </a:prstGeom>
+          <a:solidFill>
+            <a:srgbClr val="DD8452"/>
           </a:solidFill>
           <a:ln w="9525">
             <a:solidFill>
@@ -5593,23 +5504,155 @@
           <a:effectLst/>
         </p:spPr>
         <p:txBody>
-          <a:bodyPr rtlCol="0" anchor="ctr"/>
-          <a:lstStyle/>
-          <a:p>
-            <a:pPr algn="ctr"/>
-          </a:p>
-        </p:txBody>
-      </p:sp>
-      <p:sp>
-        <p:nvSpPr>
-          <p:cNvPr id="73" name="Rounded Rectangle 72"/>
+          <a:bodyPr rtlCol="0" anchor="ctr" lIns="9000" rIns="9000" tIns="4500" bIns="4500" wrap="square"/>
+          <a:lstStyle/>
+          <a:p>
+            <a:pPr algn="ctr"/>
+            <a:r>
+              <a:rPr sz="650" b="1" i="0">
+                <a:solidFill>
+                  <a:srgbClr val="FFFFFF"/>
+                </a:solidFill>
+                <a:latin typeface="Times New Roman"/>
+              </a:rPr>
+              <a:t>PLOT</a:t>
+            </a:r>
+          </a:p>
+        </p:txBody>
+      </p:sp>
+      <p:cxnSp>
+        <p:nvCxnSpPr>
+          <p:cNvPr id="65" name="Connector 64"/>
+          <p:cNvCxnSpPr/>
+          <p:nvPr/>
+        </p:nvCxnSpPr>
+        <p:spPr>
+          <a:xfrm flipV="1">
+            <a:off x="7699248" y="3730752"/>
+            <a:ext cx="1609344" cy="768096"/>
+          </a:xfrm>
+          <a:prstGeom prst="line">
+            <a:avLst/>
+          </a:prstGeom>
+          <a:ln w="27940">
+            <a:solidFill>
+              <a:srgbClr val="C44E52"/>
+            </a:solidFill>
+          </a:ln>
+          <a:effectLst/>
+        </p:spPr>
+      </p:cxnSp>
+      <p:sp>
+        <p:nvSpPr>
+          <p:cNvPr id="66" name="TextBox 65"/>
+          <p:cNvSpPr txBox="1"/>
+          <p:nvPr/>
+        </p:nvSpPr>
+        <p:spPr>
+          <a:xfrm>
+            <a:off x="7589520" y="4590288"/>
+            <a:ext cx="1828800" cy="548640"/>
+          </a:xfrm>
+          <a:prstGeom prst="rect">
+            <a:avLst/>
+          </a:prstGeom>
+          <a:noFill/>
+        </p:spPr>
+        <p:txBody>
+          <a:bodyPr wrap="square" lIns="0" rIns="0" tIns="0" bIns="0">
+            <a:spAutoFit/>
+          </a:bodyPr>
+          <a:lstStyle/>
+          <a:p>
+            <a:pPr algn="ctr"/>
+            <a:r>
+              <a:rPr sz="950" b="1" i="0">
+                <a:solidFill>
+                  <a:srgbClr val="C44E52"/>
+                </a:solidFill>
+                <a:latin typeface="Times New Roman"/>
+              </a:rPr>
+              <a:t>rejected: supplies PLOT,</a:t>
+            </a:r>
+          </a:p>
+          <a:p>
+            <a:pPr algn="ctr"/>
+            <a:r>
+              <a:rPr sz="950" b="1" i="0">
+                <a:solidFill>
+                  <a:srgbClr val="C44E52"/>
+                </a:solidFill>
+                <a:latin typeface="Times New Roman"/>
+              </a:rPr>
+              <a:t>not in the spec (λ)</a:t>
+            </a:r>
+          </a:p>
+        </p:txBody>
+      </p:sp>
+      <p:sp>
+        <p:nvSpPr>
+          <p:cNvPr id="67" name="Right Arrow 66"/>
           <p:cNvSpPr/>
           <p:nvPr/>
         </p:nvSpPr>
         <p:spPr>
           <a:xfrm>
-            <a:off x="7571231" y="2999232"/>
-            <a:ext cx="1298448" cy="566928"/>
+            <a:off x="9345168" y="2596896"/>
+            <a:ext cx="548640" cy="658368"/>
+          </a:xfrm>
+          <a:prstGeom prst="rightArrow">
+            <a:avLst>
+              <a:gd name="adj1" fmla="val 62000"/>
+              <a:gd name="adj2" fmla="val 42000"/>
+            </a:avLst>
+          </a:prstGeom>
+          <a:solidFill>
+            <a:srgbClr val="8C8C8C"/>
+          </a:solidFill>
+          <a:ln>
+            <a:noFill/>
+          </a:ln>
+          <a:effectLst/>
+        </p:spPr>
+        <p:txBody>
+          <a:bodyPr rtlCol="0" anchor="ctr" lIns="9000" rIns="9000" tIns="4500" bIns="4500" wrap="square"/>
+          <a:lstStyle/>
+          <a:p>
+            <a:pPr algn="ctr"/>
+            <a:r>
+              <a:rPr sz="900" b="1" i="0">
+                <a:solidFill>
+                  <a:srgbClr val="FFFFFF"/>
+                </a:solidFill>
+                <a:latin typeface="Times New Roman"/>
+              </a:rPr>
+              <a:t>train,</a:t>
+            </a:r>
+          </a:p>
+          <a:p>
+            <a:pPr algn="ctr"/>
+            <a:r>
+              <a:rPr sz="900" b="1" i="0">
+                <a:solidFill>
+                  <a:srgbClr val="FFFFFF"/>
+                </a:solidFill>
+                <a:latin typeface="Times New Roman"/>
+              </a:rPr>
+              <a:t>stop early</a:t>
+            </a:r>
+          </a:p>
+        </p:txBody>
+      </p:sp>
+      <p:sp>
+        <p:nvSpPr>
+          <p:cNvPr id="68" name="Rounded Rectangle 67"/>
+          <p:cNvSpPr/>
+          <p:nvPr/>
+        </p:nvSpPr>
+        <p:spPr>
+          <a:xfrm>
+            <a:off x="9884664" y="1773936"/>
+            <a:ext cx="932688" cy="749808"/>
           </a:xfrm>
           <a:prstGeom prst="roundRect">
             <a:avLst>
@@ -5617,9 +5660,9 @@
             </a:avLst>
           </a:prstGeom>
           <a:solidFill>
-            <a:srgbClr val="F7F6F2"/>
-          </a:solidFill>
-          <a:ln w="16510">
+            <a:srgbClr val="EEF2F9"/>
+          </a:solidFill>
+          <a:ln w="20320">
             <a:solidFill>
               <a:srgbClr val="4C72B0"/>
             </a:solidFill>
@@ -5636,18 +5679,1235 @@
       </p:sp>
       <p:sp>
         <p:nvSpPr>
-          <p:cNvPr id="74" name="Rounded Rectangle 73"/>
+          <p:cNvPr id="69" name="Rectangle 68"/>
           <p:cNvSpPr/>
           <p:nvPr/>
         </p:nvSpPr>
         <p:spPr>
           <a:xfrm>
-            <a:off x="7699248" y="3145536"/>
-            <a:ext cx="274320" cy="274320"/>
+            <a:off x="10340035" y="1645920"/>
+            <a:ext cx="21945" cy="128016"/>
+          </a:xfrm>
+          <a:prstGeom prst="rect">
+            <a:avLst/>
+          </a:prstGeom>
+          <a:solidFill>
+            <a:srgbClr val="4C72B0"/>
+          </a:solidFill>
+          <a:ln>
+            <a:noFill/>
+          </a:ln>
+          <a:effectLst/>
+        </p:spPr>
+        <p:txBody>
+          <a:bodyPr rtlCol="0" anchor="ctr"/>
+          <a:lstStyle/>
+          <a:p>
+            <a:pPr algn="ctr"/>
+          </a:p>
+        </p:txBody>
+      </p:sp>
+      <p:sp>
+        <p:nvSpPr>
+          <p:cNvPr id="70" name="Oval 69"/>
+          <p:cNvSpPr/>
+          <p:nvPr/>
+        </p:nvSpPr>
+        <p:spPr>
+          <a:xfrm>
+            <a:off x="10305288" y="1554480"/>
+            <a:ext cx="91440" cy="91440"/>
+          </a:xfrm>
+          <a:prstGeom prst="ellipse">
+            <a:avLst/>
+          </a:prstGeom>
+          <a:solidFill>
+            <a:srgbClr val="4C72B0"/>
+          </a:solidFill>
+          <a:ln>
+            <a:noFill/>
+          </a:ln>
+          <a:effectLst/>
+        </p:spPr>
+        <p:txBody>
+          <a:bodyPr rtlCol="0" anchor="ctr"/>
+          <a:lstStyle/>
+          <a:p>
+            <a:pPr algn="ctr"/>
+          </a:p>
+        </p:txBody>
+      </p:sp>
+      <p:sp>
+        <p:nvSpPr>
+          <p:cNvPr id="71" name="Oval 70"/>
+          <p:cNvSpPr/>
+          <p:nvPr/>
+        </p:nvSpPr>
+        <p:spPr>
+          <a:xfrm>
+            <a:off x="10141976" y="2032711"/>
+            <a:ext cx="82296" cy="82296"/>
+          </a:xfrm>
+          <a:prstGeom prst="ellipse">
+            <a:avLst/>
+          </a:prstGeom>
+          <a:solidFill>
+            <a:srgbClr val="4C72B0"/>
+          </a:solidFill>
+          <a:ln>
+            <a:noFill/>
+          </a:ln>
+          <a:effectLst/>
+        </p:spPr>
+        <p:txBody>
+          <a:bodyPr rtlCol="0" anchor="ctr"/>
+          <a:lstStyle/>
+          <a:p>
+            <a:pPr algn="ctr"/>
+          </a:p>
+        </p:txBody>
+      </p:sp>
+      <p:sp>
+        <p:nvSpPr>
+          <p:cNvPr id="72" name="Oval 71"/>
+          <p:cNvSpPr/>
+          <p:nvPr/>
+        </p:nvSpPr>
+        <p:spPr>
+          <a:xfrm>
+            <a:off x="10477743" y="2032711"/>
+            <a:ext cx="82296" cy="82296"/>
+          </a:xfrm>
+          <a:prstGeom prst="ellipse">
+            <a:avLst/>
+          </a:prstGeom>
+          <a:solidFill>
+            <a:srgbClr val="4C72B0"/>
+          </a:solidFill>
+          <a:ln>
+            <a:noFill/>
+          </a:ln>
+          <a:effectLst/>
+        </p:spPr>
+        <p:txBody>
+          <a:bodyPr rtlCol="0" anchor="ctr"/>
+          <a:lstStyle/>
+          <a:p>
+            <a:pPr algn="ctr"/>
+          </a:p>
+        </p:txBody>
+      </p:sp>
+      <p:sp>
+        <p:nvSpPr>
+          <p:cNvPr id="73" name="Rounded Rectangle 72"/>
+          <p:cNvSpPr/>
+          <p:nvPr/>
+        </p:nvSpPr>
+        <p:spPr>
+          <a:xfrm>
+            <a:off x="10220431" y="2238816"/>
+            <a:ext cx="261152" cy="27432"/>
+          </a:xfrm>
+          <a:prstGeom prst="roundRect">
+            <a:avLst>
+              <a:gd name="adj" fmla="val 50000"/>
+            </a:avLst>
+          </a:prstGeom>
+          <a:solidFill>
+            <a:srgbClr val="4C72B0"/>
+          </a:solidFill>
+          <a:ln>
+            <a:noFill/>
+          </a:ln>
+          <a:effectLst/>
+        </p:spPr>
+        <p:txBody>
+          <a:bodyPr rtlCol="0" anchor="ctr"/>
+          <a:lstStyle/>
+          <a:p>
+            <a:pPr algn="ctr"/>
+          </a:p>
+        </p:txBody>
+      </p:sp>
+      <p:sp>
+        <p:nvSpPr>
+          <p:cNvPr id="74" name="TextBox 73"/>
+          <p:cNvSpPr txBox="1"/>
+          <p:nvPr/>
+        </p:nvSpPr>
+        <p:spPr>
+          <a:xfrm>
+            <a:off x="9564624" y="2560320"/>
+            <a:ext cx="1572768" cy="256032"/>
+          </a:xfrm>
+          <a:prstGeom prst="rect">
+            <a:avLst/>
+          </a:prstGeom>
+          <a:noFill/>
+        </p:spPr>
+        <p:txBody>
+          <a:bodyPr wrap="square" lIns="0" rIns="0" tIns="0" bIns="0">
+            <a:spAutoFit/>
+          </a:bodyPr>
+          <a:lstStyle/>
+          <a:p>
+            <a:pPr algn="ctr"/>
+            <a:r>
+              <a:rPr sz="1050" b="1" i="0">
+                <a:solidFill>
+                  <a:srgbClr val="1F1F1E"/>
+                </a:solidFill>
+                <a:latin typeface="Times New Roman"/>
+              </a:rPr>
+              <a:t>Student LLM</a:t>
+            </a:r>
+          </a:p>
+        </p:txBody>
+      </p:sp>
+      <p:sp>
+        <p:nvSpPr>
+          <p:cNvPr id="75" name="Rounded Rectangle 74"/>
+          <p:cNvSpPr/>
+          <p:nvPr/>
+        </p:nvSpPr>
+        <p:spPr>
+          <a:xfrm>
+            <a:off x="9893808" y="3246120"/>
+            <a:ext cx="969264" cy="219456"/>
+          </a:xfrm>
+          <a:prstGeom prst="roundRect">
+            <a:avLst>
+              <a:gd name="adj" fmla="val 25000"/>
+            </a:avLst>
+          </a:prstGeom>
+          <a:solidFill>
+            <a:srgbClr val="FFFFFF"/>
+          </a:solidFill>
+          <a:ln w="13970">
+            <a:solidFill>
+              <a:srgbClr val="8C8C8C"/>
+            </a:solidFill>
+          </a:ln>
+          <a:effectLst/>
+        </p:spPr>
+        <p:txBody>
+          <a:bodyPr rtlCol="0" anchor="ctr"/>
+          <a:lstStyle/>
+          <a:p>
+            <a:pPr algn="ctr"/>
+          </a:p>
+        </p:txBody>
+      </p:sp>
+      <p:sp>
+        <p:nvSpPr>
+          <p:cNvPr id="76" name="Rounded Rectangle 75"/>
+          <p:cNvSpPr/>
+          <p:nvPr/>
+        </p:nvSpPr>
+        <p:spPr>
+          <a:xfrm>
+            <a:off x="9921240" y="3273552"/>
+            <a:ext cx="822960" cy="164592"/>
           </a:xfrm>
           <a:prstGeom prst="roundRect">
             <a:avLst>
               <a:gd name="adj" fmla="val 30000"/>
+            </a:avLst>
+          </a:prstGeom>
+          <a:solidFill>
+            <a:srgbClr val="4C72B0"/>
+          </a:solidFill>
+          <a:ln>
+            <a:noFill/>
+          </a:ln>
+          <a:effectLst/>
+        </p:spPr>
+        <p:txBody>
+          <a:bodyPr rtlCol="0" anchor="ctr"/>
+          <a:lstStyle/>
+          <a:p>
+            <a:pPr algn="ctr"/>
+          </a:p>
+        </p:txBody>
+      </p:sp>
+      <p:sp>
+        <p:nvSpPr>
+          <p:cNvPr id="77" name="Oval 76"/>
+          <p:cNvSpPr/>
+          <p:nvPr/>
+        </p:nvSpPr>
+        <p:spPr>
+          <a:xfrm>
+            <a:off x="10881360" y="3191256"/>
+            <a:ext cx="274320" cy="274320"/>
+          </a:xfrm>
+          <a:prstGeom prst="ellipse">
+            <a:avLst/>
+          </a:prstGeom>
+          <a:solidFill>
+            <a:srgbClr val="55A868"/>
+          </a:solidFill>
+          <a:ln w="16510">
+            <a:solidFill>
+              <a:srgbClr val="FFFFFF"/>
+            </a:solidFill>
+          </a:ln>
+          <a:effectLst/>
+        </p:spPr>
+        <p:txBody>
+          <a:bodyPr rtlCol="0" anchor="ctr" lIns="9000" rIns="9000" tIns="4500" bIns="4500" wrap="square"/>
+          <a:lstStyle/>
+          <a:p>
+            <a:pPr algn="ctr"/>
+            <a:r>
+              <a:rPr sz="1000" b="1" i="0">
+                <a:solidFill>
+                  <a:srgbClr val="FFFFFF"/>
+                </a:solidFill>
+                <a:latin typeface="Times New Roman"/>
+              </a:rPr>
+              <a:t>✓</a:t>
+            </a:r>
+          </a:p>
+        </p:txBody>
+      </p:sp>
+      <p:sp>
+        <p:nvSpPr>
+          <p:cNvPr id="78" name="TextBox 77"/>
+          <p:cNvSpPr txBox="1"/>
+          <p:nvPr/>
+        </p:nvSpPr>
+        <p:spPr>
+          <a:xfrm>
+            <a:off x="9710928" y="3529584"/>
+            <a:ext cx="1554480" cy="256032"/>
+          </a:xfrm>
+          <a:prstGeom prst="rect">
+            <a:avLst/>
+          </a:prstGeom>
+          <a:noFill/>
+        </p:spPr>
+        <p:txBody>
+          <a:bodyPr wrap="square" lIns="0" rIns="0" tIns="0" bIns="0">
+            <a:spAutoFit/>
+          </a:bodyPr>
+          <a:lstStyle/>
+          <a:p>
+            <a:pPr algn="ctr"/>
+            <a:r>
+              <a:rPr sz="950" b="0" i="0">
+                <a:solidFill>
+                  <a:srgbClr val="6B6A63"/>
+                </a:solidFill>
+                <a:latin typeface="Times New Roman"/>
+              </a:rPr>
+              <a:t>demand absorbed</a:t>
+            </a:r>
+          </a:p>
+        </p:txBody>
+      </p:sp>
+      <p:sp>
+        <p:nvSpPr>
+          <p:cNvPr id="79" name="TextBox 78"/>
+          <p:cNvSpPr txBox="1"/>
+          <p:nvPr/>
+        </p:nvSpPr>
+        <p:spPr>
+          <a:xfrm>
+            <a:off x="9601200" y="3950208"/>
+            <a:ext cx="1417320" cy="274320"/>
+          </a:xfrm>
+          <a:prstGeom prst="rect">
+            <a:avLst/>
+          </a:prstGeom>
+          <a:noFill/>
+        </p:spPr>
+        <p:txBody>
+          <a:bodyPr wrap="square" lIns="0" rIns="0" tIns="0" bIns="0">
+            <a:spAutoFit/>
+          </a:bodyPr>
+          <a:lstStyle/>
+          <a:p>
+            <a:pPr algn="ctr"/>
+            <a:r>
+              <a:rPr sz="1000" b="0" i="0">
+                <a:solidFill>
+                  <a:srgbClr val="6B6A63"/>
+                </a:solidFill>
+                <a:latin typeface="Times New Roman"/>
+              </a:rPr>
+              <a:t>live requests:</a:t>
+            </a:r>
+          </a:p>
+        </p:txBody>
+      </p:sp>
+      <p:sp>
+        <p:nvSpPr>
+          <p:cNvPr id="80" name="Rounded Rectangle 79"/>
+          <p:cNvSpPr/>
+          <p:nvPr/>
+        </p:nvSpPr>
+        <p:spPr>
+          <a:xfrm>
+            <a:off x="9601200" y="4224528"/>
+            <a:ext cx="1298448" cy="475488"/>
+          </a:xfrm>
+          <a:prstGeom prst="roundRect">
+            <a:avLst>
+              <a:gd name="adj" fmla="val 25000"/>
+            </a:avLst>
+          </a:prstGeom>
+          <a:solidFill>
+            <a:srgbClr val="EEF2F9"/>
+          </a:solidFill>
+          <a:ln w="15240">
+            <a:solidFill>
+              <a:srgbClr val="4C72B0"/>
+            </a:solidFill>
+          </a:ln>
+          <a:effectLst/>
+        </p:spPr>
+        <p:txBody>
+          <a:bodyPr rtlCol="0" anchor="ctr"/>
+          <a:lstStyle/>
+          <a:p>
+            <a:pPr algn="ctr"/>
+          </a:p>
+        </p:txBody>
+      </p:sp>
+      <p:sp>
+        <p:nvSpPr>
+          <p:cNvPr id="81" name="TextBox 80"/>
+          <p:cNvSpPr txBox="1"/>
+          <p:nvPr/>
+        </p:nvSpPr>
+        <p:spPr>
+          <a:xfrm>
+            <a:off x="9674352" y="4279392"/>
+            <a:ext cx="1188720" cy="384048"/>
+          </a:xfrm>
+          <a:prstGeom prst="rect">
+            <a:avLst/>
+          </a:prstGeom>
+          <a:noFill/>
+        </p:spPr>
+        <p:txBody>
+          <a:bodyPr wrap="square" lIns="0" rIns="0" tIns="0" bIns="0">
+            <a:spAutoFit/>
+          </a:bodyPr>
+          <a:lstStyle/>
+          <a:p>
+            <a:pPr algn="l"/>
+            <a:r>
+              <a:rPr sz="750" b="0" i="0">
+                <a:solidFill>
+                  <a:srgbClr val="4C72B0"/>
+                </a:solidFill>
+                <a:latin typeface="Consolas"/>
+              </a:rPr>
+              <a:t>"Avg dues</a:t>
+            </a:r>
+          </a:p>
+          <a:p>
+            <a:pPr algn="l"/>
+            <a:r>
+              <a:rPr sz="750" b="0" i="0">
+                <a:solidFill>
+                  <a:srgbClr val="4C72B0"/>
+                </a:solidFill>
+                <a:latin typeface="Consolas"/>
+              </a:rPr>
+              <a:t> per club?"</a:t>
+            </a:r>
+          </a:p>
+        </p:txBody>
+      </p:sp>
+      <p:sp>
+        <p:nvSpPr>
+          <p:cNvPr id="82" name="Rounded Rectangle 81"/>
+          <p:cNvSpPr/>
+          <p:nvPr/>
+        </p:nvSpPr>
+        <p:spPr>
+          <a:xfrm>
+            <a:off x="9601200" y="4791456"/>
+            <a:ext cx="1298448" cy="475488"/>
+          </a:xfrm>
+          <a:prstGeom prst="roundRect">
+            <a:avLst>
+              <a:gd name="adj" fmla="val 25000"/>
+            </a:avLst>
+          </a:prstGeom>
+          <a:solidFill>
+            <a:srgbClr val="FDF0E7"/>
+          </a:solidFill>
+          <a:ln w="15240">
+            <a:solidFill>
+              <a:srgbClr val="DD8452"/>
+            </a:solidFill>
+          </a:ln>
+          <a:effectLst/>
+        </p:spPr>
+        <p:txBody>
+          <a:bodyPr rtlCol="0" anchor="ctr"/>
+          <a:lstStyle/>
+          <a:p>
+            <a:pPr algn="ctr"/>
+          </a:p>
+        </p:txBody>
+      </p:sp>
+      <p:sp>
+        <p:nvSpPr>
+          <p:cNvPr id="83" name="TextBox 82"/>
+          <p:cNvSpPr txBox="1"/>
+          <p:nvPr/>
+        </p:nvSpPr>
+        <p:spPr>
+          <a:xfrm>
+            <a:off x="9674352" y="4846320"/>
+            <a:ext cx="1188720" cy="384048"/>
+          </a:xfrm>
+          <a:prstGeom prst="rect">
+            <a:avLst/>
+          </a:prstGeom>
+          <a:noFill/>
+        </p:spPr>
+        <p:txBody>
+          <a:bodyPr wrap="square" lIns="0" rIns="0" tIns="0" bIns="0">
+            <a:spAutoFit/>
+          </a:bodyPr>
+          <a:lstStyle/>
+          <a:p>
+            <a:pPr algn="l"/>
+            <a:r>
+              <a:rPr sz="750" b="0" i="0">
+                <a:solidFill>
+                  <a:srgbClr val="DD8452"/>
+                </a:solidFill>
+                <a:latin typeface="Consolas"/>
+              </a:rPr>
+              <a:t>"Plot a bar</a:t>
+            </a:r>
+          </a:p>
+          <a:p>
+            <a:pPr algn="l"/>
+            <a:r>
+              <a:rPr sz="750" b="0" i="0">
+                <a:solidFill>
+                  <a:srgbClr val="DD8452"/>
+                </a:solidFill>
+                <a:latin typeface="Consolas"/>
+              </a:rPr>
+              <a:t> chart"</a:t>
+            </a:r>
+          </a:p>
+        </p:txBody>
+      </p:sp>
+      <p:sp>
+        <p:nvSpPr>
+          <p:cNvPr id="84" name="Rounded Rectangle 83"/>
+          <p:cNvSpPr/>
+          <p:nvPr/>
+        </p:nvSpPr>
+        <p:spPr>
+          <a:xfrm>
+            <a:off x="11356848" y="3749039"/>
+            <a:ext cx="182880" cy="1783080"/>
+          </a:xfrm>
+          <a:prstGeom prst="roundRect">
+            <a:avLst>
+              <a:gd name="adj" fmla="val 25000"/>
+            </a:avLst>
+          </a:prstGeom>
+          <a:solidFill>
+            <a:srgbClr val="DFE5EF"/>
+          </a:solidFill>
+          <a:ln w="15240">
+            <a:solidFill>
+              <a:srgbClr val="4C72B0"/>
+            </a:solidFill>
+          </a:ln>
+          <a:effectLst/>
+        </p:spPr>
+        <p:txBody>
+          <a:bodyPr rtlCol="0" anchor="ctr"/>
+          <a:lstStyle/>
+          <a:p>
+            <a:pPr algn="ctr"/>
+          </a:p>
+        </p:txBody>
+      </p:sp>
+      <p:sp>
+        <p:nvSpPr>
+          <p:cNvPr id="85" name="Rounded Rectangle 84"/>
+          <p:cNvSpPr/>
+          <p:nvPr/>
+        </p:nvSpPr>
+        <p:spPr>
+          <a:xfrm>
+            <a:off x="11978640" y="3749039"/>
+            <a:ext cx="182880" cy="1783080"/>
+          </a:xfrm>
+          <a:prstGeom prst="roundRect">
+            <a:avLst>
+              <a:gd name="adj" fmla="val 25000"/>
+            </a:avLst>
+          </a:prstGeom>
+          <a:solidFill>
+            <a:srgbClr val="DFE5EF"/>
+          </a:solidFill>
+          <a:ln w="15240">
+            <a:solidFill>
+              <a:srgbClr val="4C72B0"/>
+            </a:solidFill>
+          </a:ln>
+          <a:effectLst/>
+        </p:spPr>
+        <p:txBody>
+          <a:bodyPr rtlCol="0" anchor="ctr"/>
+          <a:lstStyle/>
+          <a:p>
+            <a:pPr algn="ctr"/>
+          </a:p>
+        </p:txBody>
+      </p:sp>
+      <p:sp>
+        <p:nvSpPr>
+          <p:cNvPr id="86" name="Rounded Rectangle 85"/>
+          <p:cNvSpPr/>
+          <p:nvPr/>
+        </p:nvSpPr>
+        <p:spPr>
+          <a:xfrm>
+            <a:off x="11292840" y="3511296"/>
+            <a:ext cx="932688" cy="256032"/>
+          </a:xfrm>
+          <a:prstGeom prst="roundRect">
+            <a:avLst>
+              <a:gd name="adj" fmla="val 25000"/>
+            </a:avLst>
+          </a:prstGeom>
+          <a:solidFill>
+            <a:srgbClr val="DFE5EF"/>
+          </a:solidFill>
+          <a:ln w="15240">
+            <a:solidFill>
+              <a:srgbClr val="4C72B0"/>
+            </a:solidFill>
+          </a:ln>
+          <a:effectLst/>
+        </p:spPr>
+        <p:txBody>
+          <a:bodyPr rtlCol="0" anchor="ctr"/>
+          <a:lstStyle/>
+          <a:p>
+            <a:pPr algn="ctr"/>
+          </a:p>
+        </p:txBody>
+      </p:sp>
+      <p:sp>
+        <p:nvSpPr>
+          <p:cNvPr id="87" name="Oval 86"/>
+          <p:cNvSpPr/>
+          <p:nvPr/>
+        </p:nvSpPr>
+        <p:spPr>
+          <a:xfrm>
+            <a:off x="11430000" y="3310128"/>
+            <a:ext cx="402336" cy="402336"/>
+          </a:xfrm>
+          <a:prstGeom prst="ellipse">
+            <a:avLst/>
+          </a:prstGeom>
+          <a:solidFill>
+            <a:srgbClr val="55A868"/>
+          </a:solidFill>
+          <a:ln w="19050">
+            <a:solidFill>
+              <a:srgbClr val="FFFFFF"/>
+            </a:solidFill>
+          </a:ln>
+          <a:effectLst/>
+        </p:spPr>
+        <p:txBody>
+          <a:bodyPr rtlCol="0" anchor="ctr" lIns="9000" rIns="9000" tIns="4500" bIns="4500" wrap="square"/>
+          <a:lstStyle/>
+          <a:p>
+            <a:pPr algn="ctr"/>
+            <a:r>
+              <a:rPr sz="900" b="1" i="0">
+                <a:solidFill>
+                  <a:srgbClr val="FFFFFF"/>
+                </a:solidFill>
+                <a:latin typeface="Times New Roman"/>
+              </a:rPr>
+              <a:t>90%</a:t>
+            </a:r>
+          </a:p>
+        </p:txBody>
+      </p:sp>
+      <p:sp>
+        <p:nvSpPr>
+          <p:cNvPr id="88" name="TextBox 87"/>
+          <p:cNvSpPr txBox="1"/>
+          <p:nvPr/>
+        </p:nvSpPr>
+        <p:spPr>
+          <a:xfrm>
+            <a:off x="11064240" y="2999232"/>
+            <a:ext cx="1143000" cy="292608"/>
+          </a:xfrm>
+          <a:prstGeom prst="rect">
+            <a:avLst/>
+          </a:prstGeom>
+          <a:noFill/>
+        </p:spPr>
+        <p:txBody>
+          <a:bodyPr wrap="square" lIns="0" rIns="0" tIns="0" bIns="0">
+            <a:spAutoFit/>
+          </a:bodyPr>
+          <a:lstStyle/>
+          <a:p>
+            <a:pPr algn="ctr"/>
+            <a:r>
+              <a:rPr sz="900" b="0" i="0">
+                <a:solidFill>
+                  <a:srgbClr val="6B6A63"/>
+                </a:solidFill>
+                <a:latin typeface="Times New Roman"/>
+              </a:rPr>
+              <a:t>conformal gate</a:t>
+            </a:r>
+          </a:p>
+        </p:txBody>
+      </p:sp>
+      <p:cxnSp>
+        <p:nvCxnSpPr>
+          <p:cNvPr id="89" name="Connector 88"/>
+          <p:cNvCxnSpPr/>
+          <p:nvPr/>
+        </p:nvCxnSpPr>
+        <p:spPr>
+          <a:xfrm>
+            <a:off x="10936224" y="4462272"/>
+            <a:ext cx="402336" cy="0"/>
+          </a:xfrm>
+          <a:prstGeom prst="line">
+            <a:avLst/>
+          </a:prstGeom>
+          <a:ln w="33020">
+            <a:solidFill>
+              <a:srgbClr val="4C72B0"/>
+            </a:solidFill>
+            <a:tailEnd type="triangle" w="med" len="med"/>
+          </a:ln>
+          <a:effectLst/>
+        </p:spPr>
+      </p:cxnSp>
+      <p:cxnSp>
+        <p:nvCxnSpPr>
+          <p:cNvPr id="90" name="Connector 89"/>
+          <p:cNvCxnSpPr/>
+          <p:nvPr/>
+        </p:nvCxnSpPr>
+        <p:spPr>
+          <a:xfrm>
+            <a:off x="10936224" y="5029200"/>
+            <a:ext cx="402336" cy="256032"/>
+          </a:xfrm>
+          <a:prstGeom prst="line">
+            <a:avLst/>
+          </a:prstGeom>
+          <a:ln w="33020">
+            <a:solidFill>
+              <a:srgbClr val="DD8452"/>
+            </a:solidFill>
+            <a:tailEnd type="triangle" w="med" len="med"/>
+          </a:ln>
+          <a:effectLst/>
+        </p:spPr>
+      </p:cxnSp>
+      <p:sp>
+        <p:nvSpPr>
+          <p:cNvPr id="91" name="Rounded Rectangle 90"/>
+          <p:cNvSpPr/>
+          <p:nvPr/>
+        </p:nvSpPr>
+        <p:spPr>
+          <a:xfrm>
+            <a:off x="11265408" y="3931920"/>
+            <a:ext cx="896112" cy="457200"/>
+          </a:xfrm>
+          <a:prstGeom prst="roundRect">
+            <a:avLst>
+              <a:gd name="adj" fmla="val 25000"/>
+            </a:avLst>
+          </a:prstGeom>
+          <a:solidFill>
+            <a:srgbClr val="EEF2F9"/>
+          </a:solidFill>
+          <a:ln w="17780">
+            <a:solidFill>
+              <a:srgbClr val="4C72B0"/>
+            </a:solidFill>
+          </a:ln>
+          <a:effectLst/>
+        </p:spPr>
+        <p:txBody>
+          <a:bodyPr rtlCol="0" anchor="ctr" lIns="9000" rIns="9000" tIns="4500" bIns="4500" wrap="square"/>
+          <a:lstStyle/>
+          <a:p>
+            <a:pPr algn="ctr"/>
+            <a:r>
+              <a:rPr sz="850" b="1" i="0">
+                <a:solidFill>
+                  <a:srgbClr val="4C72B0"/>
+                </a:solidFill>
+                <a:latin typeface="Times New Roman"/>
+              </a:rPr>
+              <a:t>→ Student</a:t>
+            </a:r>
+          </a:p>
+        </p:txBody>
+      </p:sp>
+      <p:sp>
+        <p:nvSpPr>
+          <p:cNvPr id="92" name="Rounded Rectangle 91"/>
+          <p:cNvSpPr/>
+          <p:nvPr/>
+        </p:nvSpPr>
+        <p:spPr>
+          <a:xfrm>
+            <a:off x="11265408" y="5349240"/>
+            <a:ext cx="896112" cy="457200"/>
+          </a:xfrm>
+          <a:prstGeom prst="roundRect">
+            <a:avLst>
+              <a:gd name="adj" fmla="val 25000"/>
+            </a:avLst>
+          </a:prstGeom>
+          <a:solidFill>
+            <a:srgbClr val="FDF0E7"/>
+          </a:solidFill>
+          <a:ln w="17780">
+            <a:solidFill>
+              <a:srgbClr val="DD8452"/>
+            </a:solidFill>
+          </a:ln>
+          <a:effectLst/>
+        </p:spPr>
+        <p:txBody>
+          <a:bodyPr rtlCol="0" anchor="ctr" lIns="9000" rIns="9000" tIns="4500" bIns="4500" wrap="square"/>
+          <a:lstStyle/>
+          <a:p>
+            <a:pPr algn="ctr"/>
+            <a:r>
+              <a:rPr sz="850" b="1" i="0">
+                <a:solidFill>
+                  <a:srgbClr val="DD8452"/>
+                </a:solidFill>
+                <a:latin typeface="Times New Roman"/>
+              </a:rPr>
+              <a:t>refuse</a:t>
+            </a:r>
+          </a:p>
+        </p:txBody>
+      </p:sp>
+      <p:sp>
+        <p:nvSpPr>
+          <p:cNvPr id="93" name="Rounded Rectangle 92"/>
+          <p:cNvSpPr/>
+          <p:nvPr/>
+        </p:nvSpPr>
+        <p:spPr>
+          <a:xfrm>
+            <a:off x="10954512" y="1417320"/>
+            <a:ext cx="1188720" cy="1188720"/>
+          </a:xfrm>
+          <a:prstGeom prst="roundRect">
+            <a:avLst>
+              <a:gd name="adj" fmla="val 25000"/>
+            </a:avLst>
+          </a:prstGeom>
+          <a:solidFill>
+            <a:srgbClr val="FFFFFF"/>
+          </a:solidFill>
+          <a:ln w="20320">
+            <a:solidFill>
+              <a:srgbClr val="55A868"/>
+            </a:solidFill>
+          </a:ln>
+          <a:effectLst/>
+        </p:spPr>
+        <p:txBody>
+          <a:bodyPr rtlCol="0" anchor="ctr" lIns="9000" rIns="9000" tIns="4500" bIns="4500" wrap="square"/>
+          <a:lstStyle/>
+          <a:p>
+            <a:pPr algn="ctr"/>
+            <a:r>
+              <a:rPr sz="850" b="0" i="0">
+                <a:solidFill>
+                  <a:srgbClr val="1F1F1E"/>
+                </a:solidFill>
+                <a:latin typeface="Times New Roman"/>
+              </a:rPr>
+              <a:t>Certified:</a:t>
+            </a:r>
+          </a:p>
+          <a:p>
+            <a:pPr algn="ctr"/>
+            <a:r>
+              <a:rPr sz="850" b="0" i="0">
+                <a:solidFill>
+                  <a:srgbClr val="1F1F1E"/>
+                </a:solidFill>
+                <a:latin typeface="Times New Roman"/>
+              </a:rPr>
+              <a:t>in-task</a:t>
+            </a:r>
+          </a:p>
+          <a:p>
+            <a:pPr algn="ctr"/>
+            <a:r>
+              <a:rPr sz="850" b="0" i="0">
+                <a:solidFill>
+                  <a:srgbClr val="1F1F1E"/>
+                </a:solidFill>
+                <a:latin typeface="Times New Roman"/>
+              </a:rPr>
+              <a:t>≥ 0.93</a:t>
+            </a:r>
+          </a:p>
+          <a:p>
+            <a:pPr algn="ctr"/>
+            <a:r>
+              <a:rPr sz="850" b="0" i="0">
+                <a:solidFill>
+                  <a:srgbClr val="1F1F1E"/>
+                </a:solidFill>
+                <a:latin typeface="Times New Roman"/>
+              </a:rPr>
+              <a:t>off-task</a:t>
+            </a:r>
+          </a:p>
+          <a:p>
+            <a:pPr algn="ctr"/>
+            <a:r>
+              <a:rPr sz="850" b="0" i="0">
+                <a:solidFill>
+                  <a:srgbClr val="1F1F1E"/>
+                </a:solidFill>
+                <a:latin typeface="Times New Roman"/>
+              </a:rPr>
+              <a:t>≤ 0.25</a:t>
+            </a:r>
+          </a:p>
+        </p:txBody>
+      </p:sp>
+      <p:cxnSp>
+        <p:nvCxnSpPr>
+          <p:cNvPr id="94" name="Connector 93"/>
+          <p:cNvCxnSpPr/>
+          <p:nvPr/>
+        </p:nvCxnSpPr>
+        <p:spPr>
+          <a:xfrm flipV="1">
+            <a:off x="10835640" y="2011680"/>
+            <a:ext cx="137160" cy="137160"/>
+          </a:xfrm>
+          <a:prstGeom prst="line">
+            <a:avLst/>
+          </a:prstGeom>
+          <a:ln w="20320">
+            <a:solidFill>
+              <a:srgbClr val="55A868"/>
+            </a:solidFill>
+          </a:ln>
+          <a:effectLst/>
+        </p:spPr>
+      </p:cxnSp>
+      <p:sp>
+        <p:nvSpPr>
+          <p:cNvPr id="95" name="TextBox 94"/>
+          <p:cNvSpPr txBox="1"/>
+          <p:nvPr/>
+        </p:nvSpPr>
+        <p:spPr>
+          <a:xfrm>
+            <a:off x="182879" y="5349240"/>
+            <a:ext cx="1965960" cy="685800"/>
+          </a:xfrm>
+          <a:prstGeom prst="rect">
+            <a:avLst/>
+          </a:prstGeom>
+          <a:noFill/>
+        </p:spPr>
+        <p:txBody>
+          <a:bodyPr wrap="square" lIns="0" rIns="0" tIns="0" bIns="0">
+            <a:spAutoFit/>
+          </a:bodyPr>
+          <a:lstStyle/>
+          <a:p>
+            <a:pPr algn="ctr"/>
+            <a:r>
+              <a:rPr sz="950" b="0" i="0">
+                <a:solidFill>
+                  <a:srgbClr val="6B6A63"/>
+                </a:solidFill>
+                <a:latin typeface="Times New Roman"/>
+              </a:rPr>
+              <a:t>one backward pass at the</a:t>
+            </a:r>
+          </a:p>
+          <a:p>
+            <a:pPr algn="ctr"/>
+            <a:r>
+              <a:rPr sz="950" b="0" i="0">
+                <a:solidFill>
+                  <a:srgbClr val="6B6A63"/>
+                </a:solidFill>
+                <a:latin typeface="Times New Roman"/>
+              </a:rPr>
+              <a:t>student's init reads each</a:t>
+            </a:r>
+          </a:p>
+          <a:p>
+            <a:pPr algn="ctr"/>
+            <a:r>
+              <a:rPr sz="950" b="0" i="0">
+                <a:solidFill>
+                  <a:srgbClr val="6B6A63"/>
+                </a:solidFill>
+                <a:latin typeface="Times New Roman"/>
+              </a:rPr>
+              <a:t>query's missing skills</a:t>
+            </a:r>
+          </a:p>
+        </p:txBody>
+      </p:sp>
+      <p:sp>
+        <p:nvSpPr>
+          <p:cNvPr id="96" name="TextBox 95"/>
+          <p:cNvSpPr txBox="1"/>
+          <p:nvPr/>
+        </p:nvSpPr>
+        <p:spPr>
+          <a:xfrm>
+            <a:off x="2560320" y="5349240"/>
+            <a:ext cx="1965960" cy="685800"/>
+          </a:xfrm>
+          <a:prstGeom prst="rect">
+            <a:avLst/>
+          </a:prstGeom>
+          <a:noFill/>
+        </p:spPr>
+        <p:txBody>
+          <a:bodyPr wrap="square" lIns="0" rIns="0" tIns="0" bIns="0">
+            <a:spAutoFit/>
+          </a:bodyPr>
+          <a:lstStyle/>
+          <a:p>
+            <a:pPr algn="ctr"/>
+            <a:r>
+              <a:rPr sz="950" b="0" i="0">
+                <a:solidFill>
+                  <a:srgbClr val="6B6A63"/>
+                </a:solidFill>
+                <a:latin typeface="Times New Roman"/>
+              </a:rPr>
+              <a:t>a sparse dictionary over</a:t>
+            </a:r>
+          </a:p>
+          <a:p>
+            <a:pPr algn="ctr"/>
+            <a:r>
+              <a:rPr sz="950" b="0" i="0">
+                <a:solidFill>
+                  <a:srgbClr val="6B6A63"/>
+                </a:solidFill>
+                <a:latin typeface="Times New Roman"/>
+              </a:rPr>
+              <a:t>many teacher traces factors</a:t>
+            </a:r>
+          </a:p>
+          <a:p>
+            <a:pPr algn="ctr"/>
+            <a:r>
+              <a:rPr sz="950" b="0" i="0">
+                <a:solidFill>
+                  <a:srgbClr val="6B6A63"/>
+                </a:solidFill>
+                <a:latin typeface="Times New Roman"/>
+              </a:rPr>
+              <a:t>gradients into named atoms</a:t>
+            </a:r>
+          </a:p>
+        </p:txBody>
+      </p:sp>
+      <p:sp>
+        <p:nvSpPr>
+          <p:cNvPr id="97" name="TextBox 96"/>
+          <p:cNvSpPr txBox="1"/>
+          <p:nvPr/>
+        </p:nvSpPr>
+        <p:spPr>
+          <a:xfrm>
+            <a:off x="5074920" y="5349240"/>
+            <a:ext cx="1965960" cy="685800"/>
+          </a:xfrm>
+          <a:prstGeom prst="rect">
+            <a:avLst/>
+          </a:prstGeom>
+          <a:noFill/>
+        </p:spPr>
+        <p:txBody>
+          <a:bodyPr wrap="square" lIns="0" rIns="0" tIns="0" bIns="0">
+            <a:spAutoFit/>
+          </a:bodyPr>
+          <a:lstStyle/>
+          <a:p>
+            <a:pPr algn="ctr"/>
+            <a:r>
+              <a:rPr sz="950" b="0" i="0">
+                <a:solidFill>
+                  <a:srgbClr val="6B6A63"/>
+                </a:solidFill>
+                <a:latin typeface="Times New Roman"/>
+              </a:rPr>
+              <a:t>the atoms the k queries</a:t>
+            </a:r>
+          </a:p>
+          <a:p>
+            <a:pPr algn="ctr"/>
+            <a:r>
+              <a:rPr sz="950" b="0" i="0">
+                <a:solidFill>
+                  <a:srgbClr val="6B6A63"/>
+                </a:solidFill>
+                <a:latin typeface="Times New Roman"/>
+              </a:rPr>
+              <a:t>activate form the task</a:t>
+            </a:r>
+          </a:p>
+          <a:p>
+            <a:pPr algn="ctr"/>
+            <a:r>
+              <a:rPr sz="950" b="0" i="0">
+                <a:solidFill>
+                  <a:srgbClr val="6B6A63"/>
+                </a:solidFill>
+                <a:latin typeface="Times New Roman"/>
+              </a:rPr>
+              <a:t>specification</a:t>
+            </a:r>
+          </a:p>
+        </p:txBody>
+      </p:sp>
+      <p:sp>
+        <p:nvSpPr>
+          <p:cNvPr id="98" name="TextBox 97"/>
+          <p:cNvSpPr txBox="1"/>
+          <p:nvPr/>
+        </p:nvSpPr>
+        <p:spPr>
+          <a:xfrm>
+            <a:off x="7543800" y="5349240"/>
+            <a:ext cx="1965960" cy="685800"/>
+          </a:xfrm>
+          <a:prstGeom prst="rect">
+            <a:avLst/>
+          </a:prstGeom>
+          <a:noFill/>
+        </p:spPr>
+        <p:txBody>
+          <a:bodyPr wrap="square" lIns="0" rIns="0" tIns="0" bIns="0">
+            <a:spAutoFit/>
+          </a:bodyPr>
+          <a:lstStyle/>
+          <a:p>
+            <a:pPr algn="ctr"/>
+            <a:r>
+              <a:rPr sz="950" b="0" i="0">
+                <a:solidFill>
+                  <a:srgbClr val="6B6A63"/>
+                </a:solidFill>
+                <a:latin typeface="Times New Roman"/>
+              </a:rPr>
+              <a:t>traces are scored by the atoms</a:t>
+            </a:r>
+          </a:p>
+          <a:p>
+            <a:pPr algn="ctr"/>
+            <a:r>
+              <a:rPr sz="950" b="0" i="0">
+                <a:solidFill>
+                  <a:srgbClr val="6B6A63"/>
+                </a:solidFill>
+                <a:latin typeface="Times New Roman"/>
+              </a:rPr>
+              <a:t>they supply; budget filled from</a:t>
+            </a:r>
+          </a:p>
+          <a:p>
+            <a:pPr algn="ctr"/>
+            <a:r>
+              <a:rPr sz="950" b="0" i="0">
+                <a:solidFill>
+                  <a:srgbClr val="6B6A63"/>
+                </a:solidFill>
+                <a:latin typeface="Times New Roman"/>
+              </a:rPr>
+              <a:t>the top; stop once absorbed</a:t>
+            </a:r>
+          </a:p>
+        </p:txBody>
+      </p:sp>
+      <p:sp>
+        <p:nvSpPr>
+          <p:cNvPr id="99" name="Rounded Rectangle 98"/>
+          <p:cNvSpPr/>
+          <p:nvPr/>
+        </p:nvSpPr>
+        <p:spPr>
+          <a:xfrm>
+            <a:off x="2423160" y="6199632"/>
+            <a:ext cx="7498079" cy="457200"/>
+          </a:xfrm>
+          <a:prstGeom prst="roundRect">
+            <a:avLst>
+              <a:gd name="adj" fmla="val 50000"/>
+            </a:avLst>
+          </a:prstGeom>
+          <a:solidFill>
+            <a:srgbClr val="F7F6F2"/>
+          </a:solidFill>
+          <a:ln>
+            <a:noFill/>
+          </a:ln>
+          <a:effectLst/>
+        </p:spPr>
+        <p:txBody>
+          <a:bodyPr rtlCol="0" anchor="ctr"/>
+          <a:lstStyle/>
+          <a:p>
+            <a:pPr algn="ctr"/>
+          </a:p>
+        </p:txBody>
+      </p:sp>
+      <p:sp>
+        <p:nvSpPr>
+          <p:cNvPr id="100" name="Rounded Rectangle 99"/>
+          <p:cNvSpPr/>
+          <p:nvPr/>
+        </p:nvSpPr>
+        <p:spPr>
+          <a:xfrm>
+            <a:off x="2651760" y="6309360"/>
+            <a:ext cx="457200" cy="237744"/>
+          </a:xfrm>
+          <a:prstGeom prst="roundRect">
+            <a:avLst>
+              <a:gd name="adj" fmla="val 45000"/>
             </a:avLst>
           </a:prstGeom>
           <a:solidFill>
@@ -5661,31 +6921,75 @@
           <a:effectLst/>
         </p:spPr>
         <p:txBody>
-          <a:bodyPr rtlCol="0" anchor="ctr"/>
-          <a:lstStyle/>
-          <a:p>
-            <a:pPr algn="ctr"/>
-          </a:p>
-        </p:txBody>
-      </p:sp>
-      <p:sp>
-        <p:nvSpPr>
-          <p:cNvPr id="75" name="Rounded Rectangle 74"/>
+          <a:bodyPr rtlCol="0" anchor="ctr" lIns="9000" rIns="9000" tIns="4500" bIns="4500" wrap="square"/>
+          <a:lstStyle/>
+          <a:p>
+            <a:pPr algn="ctr"/>
+            <a:r>
+              <a:rPr sz="700" b="1" i="0">
+                <a:solidFill>
+                  <a:srgbClr val="FFFFFF"/>
+                </a:solidFill>
+                <a:latin typeface="Times New Roman"/>
+              </a:rPr>
+              <a:t>JOIN</a:t>
+            </a:r>
+          </a:p>
+        </p:txBody>
+      </p:sp>
+      <p:sp>
+        <p:nvSpPr>
+          <p:cNvPr id="101" name="TextBox 100"/>
+          <p:cNvSpPr txBox="1"/>
+          <p:nvPr/>
+        </p:nvSpPr>
+        <p:spPr>
+          <a:xfrm>
+            <a:off x="3200400" y="6309360"/>
+            <a:ext cx="1737360" cy="274320"/>
+          </a:xfrm>
+          <a:prstGeom prst="rect">
+            <a:avLst/>
+          </a:prstGeom>
+          <a:noFill/>
+        </p:spPr>
+        <p:txBody>
+          <a:bodyPr wrap="square" lIns="0" rIns="0" tIns="0" bIns="0">
+            <a:spAutoFit/>
+          </a:bodyPr>
+          <a:lstStyle/>
+          <a:p>
+            <a:pPr algn="l"/>
+            <a:r>
+              <a:rPr sz="1100" b="0" i="0">
+                <a:solidFill>
+                  <a:srgbClr val="1F1F1E"/>
+                </a:solidFill>
+                <a:latin typeface="Times New Roman"/>
+              </a:rPr>
+              <a:t>= skill the task needs</a:t>
+            </a:r>
+          </a:p>
+        </p:txBody>
+      </p:sp>
+      <p:sp>
+        <p:nvSpPr>
+          <p:cNvPr id="102" name="Rounded Rectangle 101"/>
           <p:cNvSpPr/>
           <p:nvPr/>
         </p:nvSpPr>
         <p:spPr>
           <a:xfrm>
-            <a:off x="8001000" y="3145536"/>
-            <a:ext cx="274320" cy="274320"/>
+            <a:off x="4983479" y="6309360"/>
+            <a:ext cx="457200" cy="237744"/>
           </a:xfrm>
           <a:prstGeom prst="roundRect">
             <a:avLst>
-              <a:gd name="adj" fmla="val 30000"/>
+              <a:gd name="adj" fmla="val 45000"/>
             </a:avLst>
           </a:prstGeom>
           <a:solidFill>
-            <a:srgbClr val="7BA7D7"/>
+            <a:srgbClr val="DD8452"/>
           </a:solidFill>
           <a:ln w="9525">
             <a:solidFill>
@@ -5695,31 +6999,75 @@
           <a:effectLst/>
         </p:spPr>
         <p:txBody>
-          <a:bodyPr rtlCol="0" anchor="ctr"/>
-          <a:lstStyle/>
-          <a:p>
-            <a:pPr algn="ctr"/>
-          </a:p>
-        </p:txBody>
-      </p:sp>
-      <p:sp>
-        <p:nvSpPr>
-          <p:cNvPr id="76" name="Rounded Rectangle 75"/>
+          <a:bodyPr rtlCol="0" anchor="ctr" lIns="9000" rIns="9000" tIns="4500" bIns="4500" wrap="square"/>
+          <a:lstStyle/>
+          <a:p>
+            <a:pPr algn="ctr"/>
+            <a:r>
+              <a:rPr sz="700" b="1" i="0">
+                <a:solidFill>
+                  <a:srgbClr val="FFFFFF"/>
+                </a:solidFill>
+                <a:latin typeface="Times New Roman"/>
+              </a:rPr>
+              <a:t>PLOT</a:t>
+            </a:r>
+          </a:p>
+        </p:txBody>
+      </p:sp>
+      <p:sp>
+        <p:nvSpPr>
+          <p:cNvPr id="103" name="TextBox 102"/>
+          <p:cNvSpPr txBox="1"/>
+          <p:nvPr/>
+        </p:nvSpPr>
+        <p:spPr>
+          <a:xfrm>
+            <a:off x="5532120" y="6309360"/>
+            <a:ext cx="1828800" cy="274320"/>
+          </a:xfrm>
+          <a:prstGeom prst="rect">
+            <a:avLst/>
+          </a:prstGeom>
+          <a:noFill/>
+        </p:spPr>
+        <p:txBody>
+          <a:bodyPr wrap="square" lIns="0" rIns="0" tIns="0" bIns="0">
+            <a:spAutoFit/>
+          </a:bodyPr>
+          <a:lstStyle/>
+          <a:p>
+            <a:pPr algn="l"/>
+            <a:r>
+              <a:rPr sz="1100" b="0" i="0">
+                <a:solidFill>
+                  <a:srgbClr val="1F1F1E"/>
+                </a:solidFill>
+                <a:latin typeface="Times New Roman"/>
+              </a:rPr>
+              <a:t>= out-of-scope skill</a:t>
+            </a:r>
+          </a:p>
+        </p:txBody>
+      </p:sp>
+      <p:sp>
+        <p:nvSpPr>
+          <p:cNvPr id="104" name="Rounded Rectangle 103"/>
           <p:cNvSpPr/>
           <p:nvPr/>
         </p:nvSpPr>
         <p:spPr>
           <a:xfrm>
-            <a:off x="8302752" y="3145536"/>
-            <a:ext cx="274320" cy="274320"/>
+            <a:off x="7269479" y="6309360"/>
+            <a:ext cx="457200" cy="237744"/>
           </a:xfrm>
           <a:prstGeom prst="roundRect">
             <a:avLst>
-              <a:gd name="adj" fmla="val 30000"/>
+              <a:gd name="adj" fmla="val 45000"/>
             </a:avLst>
           </a:prstGeom>
           <a:solidFill>
-            <a:srgbClr val="5F9EA0"/>
+            <a:srgbClr val="E8E6E1"/>
           </a:solidFill>
           <a:ln w="9525">
             <a:solidFill>
@@ -5729,181 +7077,32 @@
           <a:effectLst/>
         </p:spPr>
         <p:txBody>
-          <a:bodyPr rtlCol="0" anchor="ctr"/>
-          <a:lstStyle/>
-          <a:p>
-            <a:pPr algn="ctr"/>
-          </a:p>
-        </p:txBody>
-      </p:sp>
-      <p:sp>
-        <p:nvSpPr>
-          <p:cNvPr id="77" name="Rounded Rectangle 76"/>
-          <p:cNvSpPr/>
-          <p:nvPr/>
-        </p:nvSpPr>
-        <p:spPr>
-          <a:xfrm>
-            <a:off x="7571231" y="3712464"/>
-            <a:ext cx="1298448" cy="566928"/>
-          </a:xfrm>
-          <a:prstGeom prst="roundRect">
-            <a:avLst>
-              <a:gd name="adj" fmla="val 25000"/>
-            </a:avLst>
-          </a:prstGeom>
-          <a:solidFill>
-            <a:srgbClr val="E8E6E1"/>
-          </a:solidFill>
-          <a:ln w="16510">
-            <a:solidFill>
-              <a:srgbClr val="8C8C8C"/>
-            </a:solidFill>
-          </a:ln>
-          <a:effectLst/>
-        </p:spPr>
-        <p:txBody>
-          <a:bodyPr rtlCol="0" anchor="ctr"/>
-          <a:lstStyle/>
-          <a:p>
-            <a:pPr algn="ctr"/>
-          </a:p>
-        </p:txBody>
-      </p:sp>
-      <p:sp>
-        <p:nvSpPr>
-          <p:cNvPr id="78" name="Rounded Rectangle 77"/>
-          <p:cNvSpPr/>
-          <p:nvPr/>
-        </p:nvSpPr>
-        <p:spPr>
-          <a:xfrm>
-            <a:off x="7699248" y="3858768"/>
-            <a:ext cx="274320" cy="274320"/>
-          </a:xfrm>
-          <a:prstGeom prst="roundRect">
-            <a:avLst>
-              <a:gd name="adj" fmla="val 30000"/>
-            </a:avLst>
-          </a:prstGeom>
-          <a:solidFill>
-            <a:srgbClr val="DD8452"/>
-          </a:solidFill>
-          <a:ln w="9525">
-            <a:solidFill>
-              <a:srgbClr val="FFFFFF"/>
-            </a:solidFill>
-          </a:ln>
-          <a:effectLst/>
-        </p:spPr>
-        <p:txBody>
-          <a:bodyPr rtlCol="0" anchor="ctr"/>
-          <a:lstStyle/>
-          <a:p>
-            <a:pPr algn="ctr"/>
-          </a:p>
-        </p:txBody>
-      </p:sp>
-      <p:sp>
-        <p:nvSpPr>
-          <p:cNvPr id="79" name="Rounded Rectangle 78"/>
-          <p:cNvSpPr/>
-          <p:nvPr/>
-        </p:nvSpPr>
-        <p:spPr>
-          <a:xfrm>
-            <a:off x="8001000" y="3858768"/>
-            <a:ext cx="274320" cy="274320"/>
-          </a:xfrm>
-          <a:prstGeom prst="roundRect">
-            <a:avLst>
-              <a:gd name="adj" fmla="val 30000"/>
-            </a:avLst>
-          </a:prstGeom>
-          <a:solidFill>
-            <a:srgbClr val="4C72B0"/>
-          </a:solidFill>
-          <a:ln w="9525">
-            <a:solidFill>
-              <a:srgbClr val="FFFFFF"/>
-            </a:solidFill>
-          </a:ln>
-          <a:effectLst/>
-        </p:spPr>
-        <p:txBody>
-          <a:bodyPr rtlCol="0" anchor="ctr"/>
-          <a:lstStyle/>
-          <a:p>
-            <a:pPr algn="ctr"/>
-          </a:p>
-        </p:txBody>
-      </p:sp>
-      <p:sp>
-        <p:nvSpPr>
-          <p:cNvPr id="80" name="Rounded Rectangle 79"/>
-          <p:cNvSpPr/>
-          <p:nvPr/>
-        </p:nvSpPr>
-        <p:spPr>
-          <a:xfrm>
-            <a:off x="8302752" y="3858768"/>
-            <a:ext cx="274320" cy="274320"/>
-          </a:xfrm>
-          <a:prstGeom prst="roundRect">
-            <a:avLst>
-              <a:gd name="adj" fmla="val 30000"/>
-            </a:avLst>
-          </a:prstGeom>
-          <a:solidFill>
-            <a:srgbClr val="E8E6E1"/>
-          </a:solidFill>
-          <a:ln w="9525">
-            <a:solidFill>
-              <a:srgbClr val="FFFFFF"/>
-            </a:solidFill>
-          </a:ln>
-          <a:effectLst/>
-        </p:spPr>
-        <p:txBody>
-          <a:bodyPr rtlCol="0" anchor="ctr"/>
-          <a:lstStyle/>
-          <a:p>
-            <a:pPr algn="ctr"/>
-          </a:p>
-        </p:txBody>
-      </p:sp>
-      <p:cxnSp>
-        <p:nvCxnSpPr>
-          <p:cNvPr id="81" name="Connector 80"/>
-          <p:cNvCxnSpPr/>
-          <p:nvPr/>
-        </p:nvCxnSpPr>
-        <p:spPr>
-          <a:xfrm flipV="1">
-            <a:off x="7498079" y="3657600"/>
-            <a:ext cx="1463041" cy="676656"/>
-          </a:xfrm>
-          <a:prstGeom prst="line">
-            <a:avLst/>
-          </a:prstGeom>
-          <a:ln w="27940">
-            <a:solidFill>
-              <a:srgbClr val="C44E52"/>
-            </a:solidFill>
-          </a:ln>
-          <a:effectLst/>
-        </p:spPr>
-      </p:cxnSp>
-      <p:sp>
-        <p:nvSpPr>
-          <p:cNvPr id="82" name="TextBox 81"/>
+          <a:bodyPr rtlCol="0" anchor="ctr" lIns="9000" rIns="9000" tIns="4500" bIns="4500" wrap="square"/>
+          <a:lstStyle/>
+          <a:p>
+            <a:pPr algn="ctr"/>
+            <a:r>
+              <a:rPr sz="700" b="1" i="0">
+                <a:solidFill>
+                  <a:srgbClr val="6B6A63"/>
+                </a:solidFill>
+                <a:latin typeface="Times New Roman"/>
+              </a:rPr>
+              <a:t>…</a:t>
+            </a:r>
+          </a:p>
+        </p:txBody>
+      </p:sp>
+      <p:sp>
+        <p:nvSpPr>
+          <p:cNvPr id="105" name="TextBox 104"/>
           <p:cNvSpPr txBox="1"/>
           <p:nvPr/>
         </p:nvSpPr>
         <p:spPr>
           <a:xfrm>
-            <a:off x="7333488" y="4498848"/>
-            <a:ext cx="1828800" cy="548640"/>
+            <a:off x="7818120" y="6309360"/>
+            <a:ext cx="1463040" cy="274320"/>
           </a:xfrm>
           <a:prstGeom prst="rect">
             <a:avLst/>
@@ -5916,1374 +7115,15 @@
           </a:bodyPr>
           <a:lstStyle/>
           <a:p>
-            <a:pPr algn="ctr"/>
-            <a:r>
-              <a:rPr sz="950" b="1" i="0">
-                <a:solidFill>
-                  <a:srgbClr val="C44E52"/>
-                </a:solidFill>
-                <a:latin typeface="Times New Roman"/>
-              </a:rPr>
-              <a:t>rejected: carries orange</a:t>
-            </a:r>
-          </a:p>
-          <a:p>
-            <a:pPr algn="ctr"/>
-            <a:r>
-              <a:rPr sz="950" b="1" i="0">
-                <a:solidFill>
-                  <a:srgbClr val="C44E52"/>
-                </a:solidFill>
-                <a:latin typeface="Times New Roman"/>
-              </a:rPr>
-              <a:t>(λ penalizes off-scope)</a:t>
-            </a:r>
-          </a:p>
-        </p:txBody>
-      </p:sp>
-      <p:sp>
-        <p:nvSpPr>
-          <p:cNvPr id="83" name="Right Arrow 82"/>
-          <p:cNvSpPr/>
-          <p:nvPr/>
-        </p:nvSpPr>
-        <p:spPr>
-          <a:xfrm>
-            <a:off x="8979408" y="2596896"/>
-            <a:ext cx="603504" cy="658368"/>
-          </a:xfrm>
-          <a:prstGeom prst="rightArrow">
-            <a:avLst>
-              <a:gd name="adj1" fmla="val 62000"/>
-              <a:gd name="adj2" fmla="val 42000"/>
-            </a:avLst>
-          </a:prstGeom>
-          <a:solidFill>
-            <a:srgbClr val="8C8C8C"/>
-          </a:solidFill>
-          <a:ln>
-            <a:noFill/>
-          </a:ln>
-          <a:effectLst/>
-        </p:spPr>
-        <p:txBody>
-          <a:bodyPr rtlCol="0" anchor="ctr" lIns="9000" rIns="9000" tIns="4500" bIns="4500" wrap="square"/>
-          <a:lstStyle/>
-          <a:p>
-            <a:pPr algn="ctr"/>
-            <a:r>
-              <a:rPr sz="900" b="1" i="0">
-                <a:solidFill>
-                  <a:srgbClr val="FFFFFF"/>
-                </a:solidFill>
-                <a:latin typeface="Times New Roman"/>
-              </a:rPr>
-              <a:t>train,</a:t>
-            </a:r>
-          </a:p>
-          <a:p>
-            <a:pPr algn="ctr"/>
-            <a:r>
-              <a:rPr sz="900" b="1" i="0">
-                <a:solidFill>
-                  <a:srgbClr val="FFFFFF"/>
-                </a:solidFill>
-                <a:latin typeface="Times New Roman"/>
-              </a:rPr>
-              <a:t>stop early</a:t>
-            </a:r>
-          </a:p>
-        </p:txBody>
-      </p:sp>
-      <p:sp>
-        <p:nvSpPr>
-          <p:cNvPr id="84" name="Rounded Rectangle 83"/>
-          <p:cNvSpPr/>
-          <p:nvPr/>
-        </p:nvSpPr>
-        <p:spPr>
-          <a:xfrm>
-            <a:off x="9610344" y="2167128"/>
-            <a:ext cx="932688" cy="749808"/>
-          </a:xfrm>
-          <a:prstGeom prst="roundRect">
-            <a:avLst>
-              <a:gd name="adj" fmla="val 25000"/>
-            </a:avLst>
-          </a:prstGeom>
-          <a:solidFill>
-            <a:srgbClr val="EEF2F9"/>
-          </a:solidFill>
-          <a:ln w="20320">
-            <a:solidFill>
-              <a:srgbClr val="4C72B0"/>
-            </a:solidFill>
-          </a:ln>
-          <a:effectLst/>
-        </p:spPr>
-        <p:txBody>
-          <a:bodyPr rtlCol="0" anchor="ctr"/>
-          <a:lstStyle/>
-          <a:p>
-            <a:pPr algn="ctr"/>
-          </a:p>
-        </p:txBody>
-      </p:sp>
-      <p:sp>
-        <p:nvSpPr>
-          <p:cNvPr id="85" name="Rectangle 84"/>
-          <p:cNvSpPr/>
-          <p:nvPr/>
-        </p:nvSpPr>
-        <p:spPr>
-          <a:xfrm>
-            <a:off x="10065715" y="2039112"/>
-            <a:ext cx="21945" cy="128016"/>
-          </a:xfrm>
-          <a:prstGeom prst="rect">
-            <a:avLst/>
-          </a:prstGeom>
-          <a:solidFill>
-            <a:srgbClr val="4C72B0"/>
-          </a:solidFill>
-          <a:ln>
-            <a:noFill/>
-          </a:ln>
-          <a:effectLst/>
-        </p:spPr>
-        <p:txBody>
-          <a:bodyPr rtlCol="0" anchor="ctr"/>
-          <a:lstStyle/>
-          <a:p>
-            <a:pPr algn="ctr"/>
-          </a:p>
-        </p:txBody>
-      </p:sp>
-      <p:sp>
-        <p:nvSpPr>
-          <p:cNvPr id="86" name="Oval 85"/>
-          <p:cNvSpPr/>
-          <p:nvPr/>
-        </p:nvSpPr>
-        <p:spPr>
-          <a:xfrm>
-            <a:off x="10030967" y="1947672"/>
-            <a:ext cx="91440" cy="91440"/>
-          </a:xfrm>
-          <a:prstGeom prst="ellipse">
-            <a:avLst/>
-          </a:prstGeom>
-          <a:solidFill>
-            <a:srgbClr val="4C72B0"/>
-          </a:solidFill>
-          <a:ln>
-            <a:noFill/>
-          </a:ln>
-          <a:effectLst/>
-        </p:spPr>
-        <p:txBody>
-          <a:bodyPr rtlCol="0" anchor="ctr"/>
-          <a:lstStyle/>
-          <a:p>
-            <a:pPr algn="ctr"/>
-          </a:p>
-        </p:txBody>
-      </p:sp>
-      <p:sp>
-        <p:nvSpPr>
-          <p:cNvPr id="87" name="Oval 86"/>
-          <p:cNvSpPr/>
-          <p:nvPr/>
-        </p:nvSpPr>
-        <p:spPr>
-          <a:xfrm>
-            <a:off x="9867656" y="2425903"/>
-            <a:ext cx="82296" cy="82296"/>
-          </a:xfrm>
-          <a:prstGeom prst="ellipse">
-            <a:avLst/>
-          </a:prstGeom>
-          <a:solidFill>
-            <a:srgbClr val="4C72B0"/>
-          </a:solidFill>
-          <a:ln>
-            <a:noFill/>
-          </a:ln>
-          <a:effectLst/>
-        </p:spPr>
-        <p:txBody>
-          <a:bodyPr rtlCol="0" anchor="ctr"/>
-          <a:lstStyle/>
-          <a:p>
-            <a:pPr algn="ctr"/>
-          </a:p>
-        </p:txBody>
-      </p:sp>
-      <p:sp>
-        <p:nvSpPr>
-          <p:cNvPr id="88" name="Oval 87"/>
-          <p:cNvSpPr/>
-          <p:nvPr/>
-        </p:nvSpPr>
-        <p:spPr>
-          <a:xfrm>
-            <a:off x="10203423" y="2425903"/>
-            <a:ext cx="82296" cy="82296"/>
-          </a:xfrm>
-          <a:prstGeom prst="ellipse">
-            <a:avLst/>
-          </a:prstGeom>
-          <a:solidFill>
-            <a:srgbClr val="4C72B0"/>
-          </a:solidFill>
-          <a:ln>
-            <a:noFill/>
-          </a:ln>
-          <a:effectLst/>
-        </p:spPr>
-        <p:txBody>
-          <a:bodyPr rtlCol="0" anchor="ctr"/>
-          <a:lstStyle/>
-          <a:p>
-            <a:pPr algn="ctr"/>
-          </a:p>
-        </p:txBody>
-      </p:sp>
-      <p:sp>
-        <p:nvSpPr>
-          <p:cNvPr id="89" name="Rounded Rectangle 88"/>
-          <p:cNvSpPr/>
-          <p:nvPr/>
-        </p:nvSpPr>
-        <p:spPr>
-          <a:xfrm>
-            <a:off x="9946111" y="2632008"/>
-            <a:ext cx="261152" cy="27432"/>
-          </a:xfrm>
-          <a:prstGeom prst="roundRect">
-            <a:avLst>
-              <a:gd name="adj" fmla="val 50000"/>
-            </a:avLst>
-          </a:prstGeom>
-          <a:solidFill>
-            <a:srgbClr val="4C72B0"/>
-          </a:solidFill>
-          <a:ln>
-            <a:noFill/>
-          </a:ln>
-          <a:effectLst/>
-        </p:spPr>
-        <p:txBody>
-          <a:bodyPr rtlCol="0" anchor="ctr"/>
-          <a:lstStyle/>
-          <a:p>
-            <a:pPr algn="ctr"/>
-          </a:p>
-        </p:txBody>
-      </p:sp>
-      <p:sp>
-        <p:nvSpPr>
-          <p:cNvPr id="90" name="TextBox 89"/>
-          <p:cNvSpPr txBox="1"/>
-          <p:nvPr/>
-        </p:nvSpPr>
-        <p:spPr>
-          <a:xfrm>
-            <a:off x="9290304" y="2953512"/>
-            <a:ext cx="1572768" cy="256032"/>
-          </a:xfrm>
-          <a:prstGeom prst="rect">
-            <a:avLst/>
-          </a:prstGeom>
-          <a:noFill/>
-        </p:spPr>
-        <p:txBody>
-          <a:bodyPr wrap="square" lIns="0" rIns="0" tIns="0" bIns="0">
-            <a:spAutoFit/>
-          </a:bodyPr>
-          <a:lstStyle/>
-          <a:p>
-            <a:pPr algn="ctr"/>
-            <a:r>
-              <a:rPr sz="1050" b="1" i="0">
+            <a:pPr algn="l"/>
+            <a:r>
+              <a:rPr sz="1100" b="0" i="0">
                 <a:solidFill>
                   <a:srgbClr val="1F1F1E"/>
                 </a:solidFill>
                 <a:latin typeface="Times New Roman"/>
               </a:rPr>
-              <a:t>Student LLM</a:t>
-            </a:r>
-          </a:p>
-        </p:txBody>
-      </p:sp>
-      <p:sp>
-        <p:nvSpPr>
-          <p:cNvPr id="91" name="Rounded Rectangle 90"/>
-          <p:cNvSpPr/>
-          <p:nvPr/>
-        </p:nvSpPr>
-        <p:spPr>
-          <a:xfrm>
-            <a:off x="9582912" y="4041648"/>
-            <a:ext cx="969264" cy="219456"/>
-          </a:xfrm>
-          <a:prstGeom prst="roundRect">
-            <a:avLst>
-              <a:gd name="adj" fmla="val 25000"/>
-            </a:avLst>
-          </a:prstGeom>
-          <a:solidFill>
-            <a:srgbClr val="FFFFFF"/>
-          </a:solidFill>
-          <a:ln w="13970">
-            <a:solidFill>
-              <a:srgbClr val="8C8C8C"/>
-            </a:solidFill>
-          </a:ln>
-          <a:effectLst/>
-        </p:spPr>
-        <p:txBody>
-          <a:bodyPr rtlCol="0" anchor="ctr"/>
-          <a:lstStyle/>
-          <a:p>
-            <a:pPr algn="ctr"/>
-          </a:p>
-        </p:txBody>
-      </p:sp>
-      <p:sp>
-        <p:nvSpPr>
-          <p:cNvPr id="92" name="Rounded Rectangle 91"/>
-          <p:cNvSpPr/>
-          <p:nvPr/>
-        </p:nvSpPr>
-        <p:spPr>
-          <a:xfrm>
-            <a:off x="9610344" y="4069080"/>
-            <a:ext cx="822960" cy="164592"/>
-          </a:xfrm>
-          <a:prstGeom prst="roundRect">
-            <a:avLst>
-              <a:gd name="adj" fmla="val 30000"/>
-            </a:avLst>
-          </a:prstGeom>
-          <a:solidFill>
-            <a:srgbClr val="4C72B0"/>
-          </a:solidFill>
-          <a:ln>
-            <a:noFill/>
-          </a:ln>
-          <a:effectLst/>
-        </p:spPr>
-        <p:txBody>
-          <a:bodyPr rtlCol="0" anchor="ctr"/>
-          <a:lstStyle/>
-          <a:p>
-            <a:pPr algn="ctr"/>
-          </a:p>
-        </p:txBody>
-      </p:sp>
-      <p:sp>
-        <p:nvSpPr>
-          <p:cNvPr id="93" name="Oval 92"/>
-          <p:cNvSpPr/>
-          <p:nvPr/>
-        </p:nvSpPr>
-        <p:spPr>
-          <a:xfrm>
-            <a:off x="10570464" y="3986784"/>
-            <a:ext cx="274320" cy="274320"/>
-          </a:xfrm>
-          <a:prstGeom prst="ellipse">
-            <a:avLst/>
-          </a:prstGeom>
-          <a:solidFill>
-            <a:srgbClr val="55A868"/>
-          </a:solidFill>
-          <a:ln w="16510">
-            <a:solidFill>
-              <a:srgbClr val="FFFFFF"/>
-            </a:solidFill>
-          </a:ln>
-          <a:effectLst/>
-        </p:spPr>
-        <p:txBody>
-          <a:bodyPr rtlCol="0" anchor="ctr" lIns="9000" rIns="9000" tIns="4500" bIns="4500" wrap="square"/>
-          <a:lstStyle/>
-          <a:p>
-            <a:pPr algn="ctr"/>
-            <a:r>
-              <a:rPr sz="1000" b="1" i="0">
-                <a:solidFill>
-                  <a:srgbClr val="FFFFFF"/>
-                </a:solidFill>
-                <a:latin typeface="Times New Roman"/>
-              </a:rPr>
-              <a:t>✓</a:t>
-            </a:r>
-          </a:p>
-        </p:txBody>
-      </p:sp>
-      <p:sp>
-        <p:nvSpPr>
-          <p:cNvPr id="94" name="TextBox 93"/>
-          <p:cNvSpPr txBox="1"/>
-          <p:nvPr/>
-        </p:nvSpPr>
-        <p:spPr>
-          <a:xfrm>
-            <a:off x="9400032" y="4334256"/>
-            <a:ext cx="1554480" cy="256032"/>
-          </a:xfrm>
-          <a:prstGeom prst="rect">
-            <a:avLst/>
-          </a:prstGeom>
-          <a:noFill/>
-        </p:spPr>
-        <p:txBody>
-          <a:bodyPr wrap="square" lIns="0" rIns="0" tIns="0" bIns="0">
-            <a:spAutoFit/>
-          </a:bodyPr>
-          <a:lstStyle/>
-          <a:p>
-            <a:pPr algn="ctr"/>
-            <a:r>
-              <a:rPr sz="950" b="0" i="0">
-                <a:solidFill>
-                  <a:srgbClr val="6B6A63"/>
-                </a:solidFill>
-                <a:latin typeface="Times New Roman"/>
-              </a:rPr>
-              <a:t>demand absorbed</a:t>
-            </a:r>
-          </a:p>
-        </p:txBody>
-      </p:sp>
-      <p:sp>
-        <p:nvSpPr>
-          <p:cNvPr id="95" name="Right Arrow 94"/>
-          <p:cNvSpPr/>
-          <p:nvPr/>
-        </p:nvSpPr>
-        <p:spPr>
-          <a:xfrm>
-            <a:off x="10661904" y="2596896"/>
-            <a:ext cx="530352" cy="658368"/>
-          </a:xfrm>
-          <a:prstGeom prst="rightArrow">
-            <a:avLst>
-              <a:gd name="adj1" fmla="val 62000"/>
-              <a:gd name="adj2" fmla="val 42000"/>
-            </a:avLst>
-          </a:prstGeom>
-          <a:solidFill>
-            <a:srgbClr val="8C8C8C"/>
-          </a:solidFill>
-          <a:ln>
-            <a:noFill/>
-          </a:ln>
-          <a:effectLst/>
-        </p:spPr>
-        <p:txBody>
-          <a:bodyPr rtlCol="0" anchor="ctr" lIns="9000" rIns="9000" tIns="4500" bIns="4500" wrap="square"/>
-          <a:lstStyle/>
-          <a:p>
-            <a:pPr algn="ctr"/>
-            <a:r>
-              <a:rPr sz="900" b="1" i="0">
-                <a:solidFill>
-                  <a:srgbClr val="FFFFFF"/>
-                </a:solidFill>
-                <a:latin typeface="Times New Roman"/>
-              </a:rPr>
-              <a:t>deploy</a:t>
-            </a:r>
-          </a:p>
-        </p:txBody>
-      </p:sp>
-      <p:sp>
-        <p:nvSpPr>
-          <p:cNvPr id="96" name="Rounded Rectangle 95"/>
-          <p:cNvSpPr/>
-          <p:nvPr/>
-        </p:nvSpPr>
-        <p:spPr>
-          <a:xfrm>
-            <a:off x="11247120" y="1920240"/>
-            <a:ext cx="201168" cy="2240280"/>
-          </a:xfrm>
-          <a:prstGeom prst="roundRect">
-            <a:avLst>
-              <a:gd name="adj" fmla="val 25000"/>
-            </a:avLst>
-          </a:prstGeom>
-          <a:solidFill>
-            <a:srgbClr val="DFE5EF"/>
-          </a:solidFill>
-          <a:ln w="15240">
-            <a:solidFill>
-              <a:srgbClr val="4C72B0"/>
-            </a:solidFill>
-          </a:ln>
-          <a:effectLst/>
-        </p:spPr>
-        <p:txBody>
-          <a:bodyPr rtlCol="0" anchor="ctr"/>
-          <a:lstStyle/>
-          <a:p>
-            <a:pPr algn="ctr"/>
-          </a:p>
-        </p:txBody>
-      </p:sp>
-      <p:sp>
-        <p:nvSpPr>
-          <p:cNvPr id="97" name="Rounded Rectangle 96"/>
-          <p:cNvSpPr/>
-          <p:nvPr/>
-        </p:nvSpPr>
-        <p:spPr>
-          <a:xfrm>
-            <a:off x="11923776" y="1920240"/>
-            <a:ext cx="201168" cy="2240280"/>
-          </a:xfrm>
-          <a:prstGeom prst="roundRect">
-            <a:avLst>
-              <a:gd name="adj" fmla="val 25000"/>
-            </a:avLst>
-          </a:prstGeom>
-          <a:solidFill>
-            <a:srgbClr val="DFE5EF"/>
-          </a:solidFill>
-          <a:ln w="15240">
-            <a:solidFill>
-              <a:srgbClr val="4C72B0"/>
-            </a:solidFill>
-          </a:ln>
-          <a:effectLst/>
-        </p:spPr>
-        <p:txBody>
-          <a:bodyPr rtlCol="0" anchor="ctr"/>
-          <a:lstStyle/>
-          <a:p>
-            <a:pPr algn="ctr"/>
-          </a:p>
-        </p:txBody>
-      </p:sp>
-      <p:sp>
-        <p:nvSpPr>
-          <p:cNvPr id="98" name="Rounded Rectangle 97"/>
-          <p:cNvSpPr/>
-          <p:nvPr/>
-        </p:nvSpPr>
-        <p:spPr>
-          <a:xfrm>
-            <a:off x="11183112" y="1664208"/>
-            <a:ext cx="1005840" cy="274320"/>
-          </a:xfrm>
-          <a:prstGeom prst="roundRect">
-            <a:avLst>
-              <a:gd name="adj" fmla="val 25000"/>
-            </a:avLst>
-          </a:prstGeom>
-          <a:solidFill>
-            <a:srgbClr val="DFE5EF"/>
-          </a:solidFill>
-          <a:ln w="15240">
-            <a:solidFill>
-              <a:srgbClr val="4C72B0"/>
-            </a:solidFill>
-          </a:ln>
-          <a:effectLst/>
-        </p:spPr>
-        <p:txBody>
-          <a:bodyPr rtlCol="0" anchor="ctr"/>
-          <a:lstStyle/>
-          <a:p>
-            <a:pPr algn="ctr"/>
-          </a:p>
-        </p:txBody>
-      </p:sp>
-      <p:sp>
-        <p:nvSpPr>
-          <p:cNvPr id="99" name="Oval 98"/>
-          <p:cNvSpPr/>
-          <p:nvPr/>
-        </p:nvSpPr>
-        <p:spPr>
-          <a:xfrm>
-            <a:off x="11338560" y="1481328"/>
-            <a:ext cx="420624" cy="420624"/>
-          </a:xfrm>
-          <a:prstGeom prst="ellipse">
-            <a:avLst/>
-          </a:prstGeom>
-          <a:solidFill>
-            <a:srgbClr val="55A868"/>
-          </a:solidFill>
-          <a:ln w="19050">
-            <a:solidFill>
-              <a:srgbClr val="FFFFFF"/>
-            </a:solidFill>
-          </a:ln>
-          <a:effectLst/>
-        </p:spPr>
-        <p:txBody>
-          <a:bodyPr rtlCol="0" anchor="ctr" lIns="9000" rIns="9000" tIns="4500" bIns="4500" wrap="square"/>
-          <a:lstStyle/>
-          <a:p>
-            <a:pPr algn="ctr"/>
-            <a:r>
-              <a:rPr sz="950" b="1" i="0">
-                <a:solidFill>
-                  <a:srgbClr val="FFFFFF"/>
-                </a:solidFill>
-                <a:latin typeface="Times New Roman"/>
-              </a:rPr>
-              <a:t>90%</a:t>
-            </a:r>
-          </a:p>
-        </p:txBody>
-      </p:sp>
-      <p:sp>
-        <p:nvSpPr>
-          <p:cNvPr id="100" name="TextBox 99"/>
-          <p:cNvSpPr txBox="1"/>
-          <p:nvPr/>
-        </p:nvSpPr>
-        <p:spPr>
-          <a:xfrm>
-            <a:off x="10561320" y="987552"/>
-            <a:ext cx="1737360" cy="502920"/>
-          </a:xfrm>
-          <a:prstGeom prst="rect">
-            <a:avLst/>
-          </a:prstGeom>
-          <a:noFill/>
-        </p:spPr>
-        <p:txBody>
-          <a:bodyPr wrap="square" lIns="0" rIns="0" tIns="0" bIns="0">
-            <a:spAutoFit/>
-          </a:bodyPr>
-          <a:lstStyle/>
-          <a:p>
-            <a:pPr algn="ctr"/>
-            <a:r>
-              <a:rPr sz="950" b="0" i="0">
-                <a:solidFill>
-                  <a:srgbClr val="6B6A63"/>
-                </a:solidFill>
-                <a:latin typeface="Times New Roman"/>
-              </a:rPr>
-              <a:t>conformal gate: coverage</a:t>
-            </a:r>
-          </a:p>
-          <a:p>
-            <a:pPr algn="ctr"/>
-            <a:r>
-              <a:rPr sz="950" b="0" i="0">
-                <a:solidFill>
-                  <a:srgbClr val="6B6A63"/>
-                </a:solidFill>
-                <a:latin typeface="Times New Roman"/>
-              </a:rPr>
-              <a:t>guaranteed, not tuned</a:t>
-            </a:r>
-          </a:p>
-        </p:txBody>
-      </p:sp>
-      <p:cxnSp>
-        <p:nvCxnSpPr>
-          <p:cNvPr id="101" name="Connector 100"/>
-          <p:cNvCxnSpPr/>
-          <p:nvPr/>
-        </p:nvCxnSpPr>
-        <p:spPr>
-          <a:xfrm flipV="1">
-            <a:off x="11356848" y="2286000"/>
-            <a:ext cx="393192" cy="411480"/>
-          </a:xfrm>
-          <a:prstGeom prst="line">
-            <a:avLst/>
-          </a:prstGeom>
-          <a:ln w="35560">
-            <a:solidFill>
-              <a:srgbClr val="4C72B0"/>
-            </a:solidFill>
-            <a:tailEnd type="triangle" w="med" len="med"/>
-          </a:ln>
-          <a:effectLst/>
-        </p:spPr>
-      </p:cxnSp>
-      <p:cxnSp>
-        <p:nvCxnSpPr>
-          <p:cNvPr id="102" name="Connector 101"/>
-          <p:cNvCxnSpPr/>
-          <p:nvPr/>
-        </p:nvCxnSpPr>
-        <p:spPr>
-          <a:xfrm>
-            <a:off x="11356848" y="3383280"/>
-            <a:ext cx="393192" cy="475488"/>
-          </a:xfrm>
-          <a:prstGeom prst="line">
-            <a:avLst/>
-          </a:prstGeom>
-          <a:ln w="35560">
-            <a:solidFill>
-              <a:srgbClr val="DD8452"/>
-            </a:solidFill>
-            <a:tailEnd type="triangle" w="med" len="med"/>
-          </a:ln>
-          <a:effectLst/>
-        </p:spPr>
-      </p:cxnSp>
-      <p:sp>
-        <p:nvSpPr>
-          <p:cNvPr id="103" name="Rounded Rectangle 102"/>
-          <p:cNvSpPr/>
-          <p:nvPr/>
-        </p:nvSpPr>
-        <p:spPr>
-          <a:xfrm>
-            <a:off x="11475720" y="1810512"/>
-            <a:ext cx="694944" cy="603504"/>
-          </a:xfrm>
-          <a:prstGeom prst="roundRect">
-            <a:avLst>
-              <a:gd name="adj" fmla="val 25000"/>
-            </a:avLst>
-          </a:prstGeom>
-          <a:solidFill>
-            <a:srgbClr val="EEF2F9"/>
-          </a:solidFill>
-          <a:ln w="19050">
-            <a:solidFill>
-              <a:srgbClr val="4C72B0"/>
-            </a:solidFill>
-          </a:ln>
-          <a:effectLst/>
-        </p:spPr>
-        <p:txBody>
-          <a:bodyPr rtlCol="0" anchor="ctr" lIns="9000" rIns="9000" tIns="4500" bIns="4500" wrap="square"/>
-          <a:lstStyle/>
-          <a:p>
-            <a:pPr algn="ctr"/>
-            <a:r>
-              <a:rPr sz="900" b="1" i="0">
-                <a:solidFill>
-                  <a:srgbClr val="4C72B0"/>
-                </a:solidFill>
-                <a:latin typeface="Times New Roman"/>
-              </a:rPr>
-              <a:t>in-spec →</a:t>
-            </a:r>
-          </a:p>
-          <a:p>
-            <a:pPr algn="ctr"/>
-            <a:r>
-              <a:rPr sz="900" b="1" i="0">
-                <a:solidFill>
-                  <a:srgbClr val="4C72B0"/>
-                </a:solidFill>
-                <a:latin typeface="Times New Roman"/>
-              </a:rPr>
-              <a:t>Student</a:t>
-            </a:r>
-          </a:p>
-        </p:txBody>
-      </p:sp>
-      <p:sp>
-        <p:nvSpPr>
-          <p:cNvPr id="104" name="Rounded Rectangle 103"/>
-          <p:cNvSpPr/>
-          <p:nvPr/>
-        </p:nvSpPr>
-        <p:spPr>
-          <a:xfrm>
-            <a:off x="11475720" y="3913632"/>
-            <a:ext cx="694944" cy="603504"/>
-          </a:xfrm>
-          <a:prstGeom prst="roundRect">
-            <a:avLst>
-              <a:gd name="adj" fmla="val 25000"/>
-            </a:avLst>
-          </a:prstGeom>
-          <a:solidFill>
-            <a:srgbClr val="FDF0E7"/>
-          </a:solidFill>
-          <a:ln w="19050">
-            <a:solidFill>
-              <a:srgbClr val="DD8452"/>
-            </a:solidFill>
-          </a:ln>
-          <a:effectLst/>
-        </p:spPr>
-        <p:txBody>
-          <a:bodyPr rtlCol="0" anchor="ctr" lIns="9000" rIns="9000" tIns="4500" bIns="4500" wrap="square"/>
-          <a:lstStyle/>
-          <a:p>
-            <a:pPr algn="ctr"/>
-            <a:r>
-              <a:rPr sz="900" b="1" i="0">
-                <a:solidFill>
-                  <a:srgbClr val="DD8452"/>
-                </a:solidFill>
-                <a:latin typeface="Times New Roman"/>
-              </a:rPr>
-              <a:t>refuse /</a:t>
-            </a:r>
-          </a:p>
-          <a:p>
-            <a:pPr algn="ctr"/>
-            <a:r>
-              <a:rPr sz="900" b="1" i="0">
-                <a:solidFill>
-                  <a:srgbClr val="DD8452"/>
-                </a:solidFill>
-                <a:latin typeface="Times New Roman"/>
-              </a:rPr>
-              <a:t>escalate</a:t>
-            </a:r>
-          </a:p>
-        </p:txBody>
-      </p:sp>
-      <p:sp>
-        <p:nvSpPr>
-          <p:cNvPr id="105" name="Rounded Rectangle 104"/>
-          <p:cNvSpPr/>
-          <p:nvPr/>
-        </p:nvSpPr>
-        <p:spPr>
-          <a:xfrm>
-            <a:off x="9464040" y="4956048"/>
-            <a:ext cx="2606040" cy="777240"/>
-          </a:xfrm>
-          <a:prstGeom prst="roundRect">
-            <a:avLst>
-              <a:gd name="adj" fmla="val 25000"/>
-            </a:avLst>
-          </a:prstGeom>
-          <a:solidFill>
-            <a:srgbClr val="FFFFFF"/>
-          </a:solidFill>
-          <a:ln w="20320">
-            <a:solidFill>
-              <a:srgbClr val="55A868"/>
-            </a:solidFill>
-          </a:ln>
-          <a:effectLst/>
-        </p:spPr>
-        <p:txBody>
-          <a:bodyPr rtlCol="0" anchor="ctr" lIns="9000" rIns="9000" tIns="4500" bIns="4500" wrap="square"/>
-          <a:lstStyle/>
-          <a:p>
-            <a:pPr algn="ctr"/>
-            <a:r>
-              <a:rPr sz="1050" b="0" i="0">
-                <a:solidFill>
-                  <a:srgbClr val="1F1F1E"/>
-                </a:solidFill>
-                <a:latin typeface="Times New Roman"/>
-              </a:rPr>
-              <a:t>Certified, both sides:</a:t>
-            </a:r>
-          </a:p>
-          <a:p>
-            <a:pPr algn="ctr"/>
-            <a:r>
-              <a:rPr sz="1050" b="0" i="0">
-                <a:solidFill>
-                  <a:srgbClr val="1F1F1E"/>
-                </a:solidFill>
-                <a:latin typeface="Times New Roman"/>
-              </a:rPr>
-              <a:t>in-task ≥ 0.93, off-task ≤ 0.25</a:t>
-            </a:r>
-          </a:p>
-        </p:txBody>
-      </p:sp>
-      <p:sp>
-        <p:nvSpPr>
-          <p:cNvPr id="106" name="TextBox 105"/>
-          <p:cNvSpPr txBox="1"/>
-          <p:nvPr/>
-        </p:nvSpPr>
-        <p:spPr>
-          <a:xfrm>
-            <a:off x="182879" y="5349240"/>
-            <a:ext cx="1965960" cy="685800"/>
-          </a:xfrm>
-          <a:prstGeom prst="rect">
-            <a:avLst/>
-          </a:prstGeom>
-          <a:noFill/>
-        </p:spPr>
-        <p:txBody>
-          <a:bodyPr wrap="square" lIns="0" rIns="0" tIns="0" bIns="0">
-            <a:spAutoFit/>
-          </a:bodyPr>
-          <a:lstStyle/>
-          <a:p>
-            <a:pPr algn="ctr"/>
-            <a:r>
-              <a:rPr sz="950" b="0" i="0">
-                <a:solidFill>
-                  <a:srgbClr val="6B6A63"/>
-                </a:solidFill>
-                <a:latin typeface="Times New Roman"/>
-              </a:rPr>
-              <a:t>one backward pass at the</a:t>
-            </a:r>
-          </a:p>
-          <a:p>
-            <a:pPr algn="ctr"/>
-            <a:r>
-              <a:rPr sz="950" b="0" i="0">
-                <a:solidFill>
-                  <a:srgbClr val="6B6A63"/>
-                </a:solidFill>
-                <a:latin typeface="Times New Roman"/>
-              </a:rPr>
-              <a:t>student's init reads each</a:t>
-            </a:r>
-          </a:p>
-          <a:p>
-            <a:pPr algn="ctr"/>
-            <a:r>
-              <a:rPr sz="950" b="0" i="0">
-                <a:solidFill>
-                  <a:srgbClr val="6B6A63"/>
-                </a:solidFill>
-                <a:latin typeface="Times New Roman"/>
-              </a:rPr>
-              <a:t>query's missing skills</a:t>
-            </a:r>
-          </a:p>
-        </p:txBody>
-      </p:sp>
-      <p:sp>
-        <p:nvSpPr>
-          <p:cNvPr id="107" name="TextBox 106"/>
-          <p:cNvSpPr txBox="1"/>
-          <p:nvPr/>
-        </p:nvSpPr>
-        <p:spPr>
-          <a:xfrm>
-            <a:off x="2514600" y="5349240"/>
-            <a:ext cx="1965960" cy="685800"/>
-          </a:xfrm>
-          <a:prstGeom prst="rect">
-            <a:avLst/>
-          </a:prstGeom>
-          <a:noFill/>
-        </p:spPr>
-        <p:txBody>
-          <a:bodyPr wrap="square" lIns="0" rIns="0" tIns="0" bIns="0">
-            <a:spAutoFit/>
-          </a:bodyPr>
-          <a:lstStyle/>
-          <a:p>
-            <a:pPr algn="ctr"/>
-            <a:r>
-              <a:rPr sz="950" b="0" i="0">
-                <a:solidFill>
-                  <a:srgbClr val="6B6A63"/>
-                </a:solidFill>
-                <a:latin typeface="Times New Roman"/>
-              </a:rPr>
-              <a:t>a sparse dictionary over</a:t>
-            </a:r>
-          </a:p>
-          <a:p>
-            <a:pPr algn="ctr"/>
-            <a:r>
-              <a:rPr sz="950" b="0" i="0">
-                <a:solidFill>
-                  <a:srgbClr val="6B6A63"/>
-                </a:solidFill>
-                <a:latin typeface="Times New Roman"/>
-              </a:rPr>
-              <a:t>many teacher traces factors</a:t>
-            </a:r>
-          </a:p>
-          <a:p>
-            <a:pPr algn="ctr"/>
-            <a:r>
-              <a:rPr sz="950" b="0" i="0">
-                <a:solidFill>
-                  <a:srgbClr val="6B6A63"/>
-                </a:solidFill>
-                <a:latin typeface="Times New Roman"/>
-              </a:rPr>
-              <a:t>gradients into skill atoms</a:t>
-            </a:r>
-          </a:p>
-        </p:txBody>
-      </p:sp>
-      <p:sp>
-        <p:nvSpPr>
-          <p:cNvPr id="108" name="TextBox 107"/>
-          <p:cNvSpPr txBox="1"/>
-          <p:nvPr/>
-        </p:nvSpPr>
-        <p:spPr>
-          <a:xfrm>
-            <a:off x="4937760" y="5349240"/>
-            <a:ext cx="1965960" cy="685800"/>
-          </a:xfrm>
-          <a:prstGeom prst="rect">
-            <a:avLst/>
-          </a:prstGeom>
-          <a:noFill/>
-        </p:spPr>
-        <p:txBody>
-          <a:bodyPr wrap="square" lIns="0" rIns="0" tIns="0" bIns="0">
-            <a:spAutoFit/>
-          </a:bodyPr>
-          <a:lstStyle/>
-          <a:p>
-            <a:pPr algn="ctr"/>
-            <a:r>
-              <a:rPr sz="950" b="0" i="0">
-                <a:solidFill>
-                  <a:srgbClr val="6B6A63"/>
-                </a:solidFill>
-                <a:latin typeface="Times New Roman"/>
-              </a:rPr>
-              <a:t>the atoms the k queries</a:t>
-            </a:r>
-          </a:p>
-          <a:p>
-            <a:pPr algn="ctr"/>
-            <a:r>
-              <a:rPr sz="950" b="0" i="0">
-                <a:solidFill>
-                  <a:srgbClr val="6B6A63"/>
-                </a:solidFill>
-                <a:latin typeface="Times New Roman"/>
-              </a:rPr>
-              <a:t>activate form the task</a:t>
-            </a:r>
-          </a:p>
-          <a:p>
-            <a:pPr algn="ctr"/>
-            <a:r>
-              <a:rPr sz="950" b="0" i="0">
-                <a:solidFill>
-                  <a:srgbClr val="6B6A63"/>
-                </a:solidFill>
-                <a:latin typeface="Times New Roman"/>
-              </a:rPr>
-              <a:t>specification</a:t>
-            </a:r>
-          </a:p>
-        </p:txBody>
-      </p:sp>
-      <p:sp>
-        <p:nvSpPr>
-          <p:cNvPr id="109" name="TextBox 108"/>
-          <p:cNvSpPr txBox="1"/>
-          <p:nvPr/>
-        </p:nvSpPr>
-        <p:spPr>
-          <a:xfrm>
-            <a:off x="7406640" y="5349240"/>
-            <a:ext cx="1965960" cy="685800"/>
-          </a:xfrm>
-          <a:prstGeom prst="rect">
-            <a:avLst/>
-          </a:prstGeom>
-          <a:noFill/>
-        </p:spPr>
-        <p:txBody>
-          <a:bodyPr wrap="square" lIns="0" rIns="0" tIns="0" bIns="0">
-            <a:spAutoFit/>
-          </a:bodyPr>
-          <a:lstStyle/>
-          <a:p>
-            <a:pPr algn="ctr"/>
-            <a:r>
-              <a:rPr sz="950" b="0" i="0">
-                <a:solidFill>
-                  <a:srgbClr val="6B6A63"/>
-                </a:solidFill>
-                <a:latin typeface="Times New Roman"/>
-              </a:rPr>
-              <a:t>traces are scored by the atoms</a:t>
-            </a:r>
-          </a:p>
-          <a:p>
-            <a:pPr algn="ctr"/>
-            <a:r>
-              <a:rPr sz="950" b="0" i="0">
-                <a:solidFill>
-                  <a:srgbClr val="6B6A63"/>
-                </a:solidFill>
-                <a:latin typeface="Times New Roman"/>
-              </a:rPr>
-              <a:t>they supply; the budget is filled</a:t>
-            </a:r>
-          </a:p>
-          <a:p>
-            <a:pPr algn="ctr"/>
-            <a:r>
-              <a:rPr sz="950" b="0" i="0">
-                <a:solidFill>
-                  <a:srgbClr val="6B6A63"/>
-                </a:solidFill>
-                <a:latin typeface="Times New Roman"/>
-              </a:rPr>
-              <a:t>from the top; stop once the</a:t>
-            </a:r>
-          </a:p>
-          <a:p>
-            <a:pPr algn="ctr"/>
-            <a:r>
-              <a:rPr sz="950" b="0" i="0">
-                <a:solidFill>
-                  <a:srgbClr val="6B6A63"/>
-                </a:solidFill>
-                <a:latin typeface="Times New Roman"/>
-              </a:rPr>
-              <a:t>in-spec demand is absorbed</a:t>
-            </a:r>
-          </a:p>
-        </p:txBody>
-      </p:sp>
-      <p:sp>
-        <p:nvSpPr>
-          <p:cNvPr id="110" name="Rounded Rectangle 109"/>
-          <p:cNvSpPr/>
-          <p:nvPr/>
-        </p:nvSpPr>
-        <p:spPr>
-          <a:xfrm>
-            <a:off x="3063240" y="6199632"/>
-            <a:ext cx="6766560" cy="457200"/>
-          </a:xfrm>
-          <a:prstGeom prst="roundRect">
-            <a:avLst>
-              <a:gd name="adj" fmla="val 50000"/>
-            </a:avLst>
-          </a:prstGeom>
-          <a:solidFill>
-            <a:srgbClr val="F7F6F2"/>
-          </a:solidFill>
-          <a:ln>
-            <a:noFill/>
-          </a:ln>
-          <a:effectLst/>
-        </p:spPr>
-        <p:txBody>
-          <a:bodyPr rtlCol="0" anchor="ctr"/>
-          <a:lstStyle/>
-          <a:p>
-            <a:pPr algn="ctr"/>
-          </a:p>
-        </p:txBody>
-      </p:sp>
-      <p:sp>
-        <p:nvSpPr>
-          <p:cNvPr id="111" name="Rounded Rectangle 110"/>
-          <p:cNvSpPr/>
-          <p:nvPr/>
-        </p:nvSpPr>
-        <p:spPr>
-          <a:xfrm>
-            <a:off x="3291840" y="6309360"/>
-            <a:ext cx="237744" cy="237744"/>
-          </a:xfrm>
-          <a:prstGeom prst="roundRect">
-            <a:avLst>
-              <a:gd name="adj" fmla="val 30000"/>
-            </a:avLst>
-          </a:prstGeom>
-          <a:solidFill>
-            <a:srgbClr val="4C72B0"/>
-          </a:solidFill>
-          <a:ln w="9525">
-            <a:solidFill>
-              <a:srgbClr val="FFFFFF"/>
-            </a:solidFill>
-          </a:ln>
-          <a:effectLst/>
-        </p:spPr>
-        <p:txBody>
-          <a:bodyPr rtlCol="0" anchor="ctr"/>
-          <a:lstStyle/>
-          <a:p>
-            <a:pPr algn="ctr"/>
-          </a:p>
-        </p:txBody>
-      </p:sp>
-      <p:sp>
-        <p:nvSpPr>
-          <p:cNvPr id="112" name="TextBox 111"/>
-          <p:cNvSpPr txBox="1"/>
-          <p:nvPr/>
-        </p:nvSpPr>
-        <p:spPr>
-          <a:xfrm>
-            <a:off x="3621024" y="6309360"/>
-            <a:ext cx="1600200" cy="274320"/>
-          </a:xfrm>
-          <a:prstGeom prst="rect">
-            <a:avLst/>
-          </a:prstGeom>
-          <a:noFill/>
-        </p:spPr>
-        <p:txBody>
-          <a:bodyPr wrap="square" lIns="0" rIns="0" tIns="0" bIns="0">
-            <a:spAutoFit/>
-          </a:bodyPr>
-          <a:lstStyle/>
-          <a:p>
-            <a:pPr algn="l"/>
-            <a:r>
-              <a:rPr sz="1100" b="0" i="0">
-                <a:solidFill>
-                  <a:srgbClr val="1F1F1E"/>
-                </a:solidFill>
-                <a:latin typeface="Times New Roman"/>
-              </a:rPr>
-              <a:t>skill the task needs</a:t>
-            </a:r>
-          </a:p>
-        </p:txBody>
-      </p:sp>
-      <p:sp>
-        <p:nvSpPr>
-          <p:cNvPr id="113" name="Rounded Rectangle 112"/>
-          <p:cNvSpPr/>
-          <p:nvPr/>
-        </p:nvSpPr>
-        <p:spPr>
-          <a:xfrm>
-            <a:off x="5394960" y="6309360"/>
-            <a:ext cx="237744" cy="237744"/>
-          </a:xfrm>
-          <a:prstGeom prst="roundRect">
-            <a:avLst>
-              <a:gd name="adj" fmla="val 30000"/>
-            </a:avLst>
-          </a:prstGeom>
-          <a:solidFill>
-            <a:srgbClr val="DD8452"/>
-          </a:solidFill>
-          <a:ln w="9525">
-            <a:solidFill>
-              <a:srgbClr val="FFFFFF"/>
-            </a:solidFill>
-          </a:ln>
-          <a:effectLst/>
-        </p:spPr>
-        <p:txBody>
-          <a:bodyPr rtlCol="0" anchor="ctr"/>
-          <a:lstStyle/>
-          <a:p>
-            <a:pPr algn="ctr"/>
-          </a:p>
-        </p:txBody>
-      </p:sp>
-      <p:sp>
-        <p:nvSpPr>
-          <p:cNvPr id="114" name="TextBox 113"/>
-          <p:cNvSpPr txBox="1"/>
-          <p:nvPr/>
-        </p:nvSpPr>
-        <p:spPr>
-          <a:xfrm>
-            <a:off x="5724144" y="6309360"/>
-            <a:ext cx="1554480" cy="274320"/>
-          </a:xfrm>
-          <a:prstGeom prst="rect">
-            <a:avLst/>
-          </a:prstGeom>
-          <a:noFill/>
-        </p:spPr>
-        <p:txBody>
-          <a:bodyPr wrap="square" lIns="0" rIns="0" tIns="0" bIns="0">
-            <a:spAutoFit/>
-          </a:bodyPr>
-          <a:lstStyle/>
-          <a:p>
-            <a:pPr algn="l"/>
-            <a:r>
-              <a:rPr sz="1100" b="0" i="0">
-                <a:solidFill>
-                  <a:srgbClr val="1F1F1E"/>
-                </a:solidFill>
-                <a:latin typeface="Times New Roman"/>
-              </a:rPr>
-              <a:t>out-of-scope skill</a:t>
-            </a:r>
-          </a:p>
-        </p:txBody>
-      </p:sp>
-      <p:sp>
-        <p:nvSpPr>
-          <p:cNvPr id="115" name="Rounded Rectangle 114"/>
-          <p:cNvSpPr/>
-          <p:nvPr/>
-        </p:nvSpPr>
-        <p:spPr>
-          <a:xfrm>
-            <a:off x="7452360" y="6309360"/>
-            <a:ext cx="237744" cy="237744"/>
-          </a:xfrm>
-          <a:prstGeom prst="roundRect">
-            <a:avLst>
-              <a:gd name="adj" fmla="val 30000"/>
-            </a:avLst>
-          </a:prstGeom>
-          <a:solidFill>
-            <a:srgbClr val="E8E6E1"/>
-          </a:solidFill>
-          <a:ln w="9525">
-            <a:solidFill>
-              <a:srgbClr val="FFFFFF"/>
-            </a:solidFill>
-          </a:ln>
-          <a:effectLst/>
-        </p:spPr>
-        <p:txBody>
-          <a:bodyPr rtlCol="0" anchor="ctr"/>
-          <a:lstStyle/>
-          <a:p>
-            <a:pPr algn="ctr"/>
-          </a:p>
-        </p:txBody>
-      </p:sp>
-      <p:sp>
-        <p:nvSpPr>
-          <p:cNvPr id="116" name="TextBox 115"/>
-          <p:cNvSpPr txBox="1"/>
-          <p:nvPr/>
-        </p:nvSpPr>
-        <p:spPr>
-          <a:xfrm>
-            <a:off x="7781544" y="6309360"/>
-            <a:ext cx="1097280" cy="274320"/>
-          </a:xfrm>
-          <a:prstGeom prst="rect">
-            <a:avLst/>
-          </a:prstGeom>
-          <a:noFill/>
-        </p:spPr>
-        <p:txBody>
-          <a:bodyPr wrap="square" lIns="0" rIns="0" tIns="0" bIns="0">
-            <a:spAutoFit/>
-          </a:bodyPr>
-          <a:lstStyle/>
-          <a:p>
-            <a:pPr algn="l"/>
-            <a:r>
-              <a:rPr sz="1100" b="0" i="0">
-                <a:solidFill>
-                  <a:srgbClr val="1F1F1E"/>
-                </a:solidFill>
-                <a:latin typeface="Times New Roman"/>
-              </a:rPr>
-              <a:t>inactive</a:t>
+              <a:t>= other atoms</a:t>
             </a:r>
           </a:p>
         </p:txBody>

--- a/paper/figs/fig1_pipeline.pptx
+++ b/paper/figs/fig1_pipeline.pptx
@@ -3090,17 +3090,53 @@
       <p:grpSpPr/>
       <p:sp>
         <p:nvSpPr>
-          <p:cNvPr id="2" name="Oval 1"/>
-          <p:cNvSpPr/>
-          <p:nvPr/>
-        </p:nvSpPr>
-        <p:spPr>
-          <a:xfrm>
-            <a:off x="228600" y="182880"/>
-            <a:ext cx="365760" cy="365760"/>
-          </a:xfrm>
-          <a:prstGeom prst="ellipse">
-            <a:avLst/>
+          <p:cNvPr id="2" name="Rounded Rectangle 1"/>
+          <p:cNvSpPr/>
+          <p:nvPr/>
+        </p:nvSpPr>
+        <p:spPr>
+          <a:xfrm>
+            <a:off x="137160" y="384048"/>
+            <a:ext cx="2788920" cy="5577840"/>
+          </a:xfrm>
+          <a:prstGeom prst="roundRect">
+            <a:avLst>
+              <a:gd name="adj" fmla="val 6000"/>
+            </a:avLst>
+          </a:prstGeom>
+          <a:solidFill>
+            <a:srgbClr val="FCFBF9"/>
+          </a:solidFill>
+          <a:ln w="17780">
+            <a:solidFill>
+              <a:srgbClr val="8C8C8C"/>
+            </a:solidFill>
+          </a:ln>
+          <a:effectLst/>
+        </p:spPr>
+        <p:txBody>
+          <a:bodyPr rtlCol="0" anchor="ctr"/>
+          <a:lstStyle/>
+          <a:p>
+            <a:pPr algn="ctr"/>
+          </a:p>
+        </p:txBody>
+      </p:sp>
+      <p:sp>
+        <p:nvSpPr>
+          <p:cNvPr id="3" name="Rounded Rectangle 2"/>
+          <p:cNvSpPr/>
+          <p:nvPr/>
+        </p:nvSpPr>
+        <p:spPr>
+          <a:xfrm>
+            <a:off x="265176" y="512064"/>
+            <a:ext cx="2532887" cy="475488"/>
+          </a:xfrm>
+          <a:prstGeom prst="roundRect">
+            <a:avLst>
+              <a:gd name="adj" fmla="val 30000"/>
+            </a:avLst>
           </a:prstGeom>
           <a:solidFill>
             <a:srgbClr val="1F1F1E"/>
@@ -3116,65 +3152,141 @@
           <a:p>
             <a:pPr algn="ctr"/>
             <a:r>
-              <a:rPr sz="1500" b="1" i="0">
+              <a:rPr sz="1300" b="1" i="0">
                 <a:solidFill>
                   <a:srgbClr val="FFFFFF"/>
                 </a:solidFill>
                 <a:latin typeface="Times New Roman"/>
               </a:rPr>
-              <a:t>1</a:t>
-            </a:r>
-          </a:p>
-        </p:txBody>
-      </p:sp>
-      <p:sp>
-        <p:nvSpPr>
-          <p:cNvPr id="3" name="TextBox 2"/>
-          <p:cNvSpPr txBox="1"/>
-          <p:nvPr/>
-        </p:nvSpPr>
-        <p:spPr>
-          <a:xfrm>
-            <a:off x="612647" y="201168"/>
-            <a:ext cx="2926080" cy="347472"/>
-          </a:xfrm>
-          <a:prstGeom prst="rect">
-            <a:avLst/>
-          </a:prstGeom>
-          <a:noFill/>
-        </p:spPr>
-        <p:txBody>
-          <a:bodyPr wrap="square" lIns="0" rIns="0" tIns="0" bIns="0">
-            <a:spAutoFit/>
-          </a:bodyPr>
-          <a:lstStyle/>
-          <a:p>
-            <a:pPr algn="l"/>
-            <a:r>
-              <a:rPr sz="1600" b="1" i="0">
-                <a:solidFill>
-                  <a:srgbClr val="1F1F1E"/>
+              <a:t>1 · What must a student learn?</a:t>
+            </a:r>
+          </a:p>
+        </p:txBody>
+      </p:sp>
+      <p:sp>
+        <p:nvSpPr>
+          <p:cNvPr id="4" name="Rounded Rectangle 3"/>
+          <p:cNvSpPr/>
+          <p:nvPr/>
+        </p:nvSpPr>
+        <p:spPr>
+          <a:xfrm>
+            <a:off x="3127248" y="384048"/>
+            <a:ext cx="2788920" cy="5577840"/>
+          </a:xfrm>
+          <a:prstGeom prst="roundRect">
+            <a:avLst>
+              <a:gd name="adj" fmla="val 6000"/>
+            </a:avLst>
+          </a:prstGeom>
+          <a:solidFill>
+            <a:srgbClr val="FCFBF9"/>
+          </a:solidFill>
+          <a:ln w="17780">
+            <a:solidFill>
+              <a:srgbClr val="8C8C8C"/>
+            </a:solidFill>
+          </a:ln>
+          <a:effectLst/>
+        </p:spPr>
+        <p:txBody>
+          <a:bodyPr rtlCol="0" anchor="ctr"/>
+          <a:lstStyle/>
+          <a:p>
+            <a:pPr algn="ctr"/>
+          </a:p>
+        </p:txBody>
+      </p:sp>
+      <p:sp>
+        <p:nvSpPr>
+          <p:cNvPr id="5" name="Rounded Rectangle 4"/>
+          <p:cNvSpPr/>
+          <p:nvPr/>
+        </p:nvSpPr>
+        <p:spPr>
+          <a:xfrm>
+            <a:off x="3255264" y="512064"/>
+            <a:ext cx="2532887" cy="475488"/>
+          </a:xfrm>
+          <a:prstGeom prst="roundRect">
+            <a:avLst>
+              <a:gd name="adj" fmla="val 30000"/>
+            </a:avLst>
+          </a:prstGeom>
+          <a:solidFill>
+            <a:srgbClr val="1F1F1E"/>
+          </a:solidFill>
+          <a:ln>
+            <a:noFill/>
+          </a:ln>
+          <a:effectLst/>
+        </p:spPr>
+        <p:txBody>
+          <a:bodyPr rtlCol="0" anchor="ctr" lIns="9000" rIns="9000" tIns="4500" bIns="4500" wrap="square"/>
+          <a:lstStyle/>
+          <a:p>
+            <a:pPr algn="ctr"/>
+            <a:r>
+              <a:rPr sz="1300" b="1" i="0">
+                <a:solidFill>
+                  <a:srgbClr val="FFFFFF"/>
                 </a:solidFill>
                 <a:latin typeface="Times New Roman"/>
               </a:rPr>
-              <a:t>What must a student learn?</a:t>
-            </a:r>
-          </a:p>
-        </p:txBody>
-      </p:sp>
-      <p:sp>
-        <p:nvSpPr>
-          <p:cNvPr id="4" name="Oval 3"/>
-          <p:cNvSpPr/>
-          <p:nvPr/>
-        </p:nvSpPr>
-        <p:spPr>
-          <a:xfrm>
-            <a:off x="3291840" y="182880"/>
-            <a:ext cx="365760" cy="365760"/>
-          </a:xfrm>
-          <a:prstGeom prst="ellipse">
-            <a:avLst/>
+              <a:t>2 · A library of skill atoms</a:t>
+            </a:r>
+          </a:p>
+        </p:txBody>
+      </p:sp>
+      <p:sp>
+        <p:nvSpPr>
+          <p:cNvPr id="6" name="Rounded Rectangle 5"/>
+          <p:cNvSpPr/>
+          <p:nvPr/>
+        </p:nvSpPr>
+        <p:spPr>
+          <a:xfrm>
+            <a:off x="6117336" y="384048"/>
+            <a:ext cx="3017520" cy="5577840"/>
+          </a:xfrm>
+          <a:prstGeom prst="roundRect">
+            <a:avLst>
+              <a:gd name="adj" fmla="val 6000"/>
+            </a:avLst>
+          </a:prstGeom>
+          <a:solidFill>
+            <a:srgbClr val="FCFBF9"/>
+          </a:solidFill>
+          <a:ln w="17780">
+            <a:solidFill>
+              <a:srgbClr val="8C8C8C"/>
+            </a:solidFill>
+          </a:ln>
+          <a:effectLst/>
+        </p:spPr>
+        <p:txBody>
+          <a:bodyPr rtlCol="0" anchor="ctr"/>
+          <a:lstStyle/>
+          <a:p>
+            <a:pPr algn="ctr"/>
+          </a:p>
+        </p:txBody>
+      </p:sp>
+      <p:sp>
+        <p:nvSpPr>
+          <p:cNvPr id="7" name="Rounded Rectangle 6"/>
+          <p:cNvSpPr/>
+          <p:nvPr/>
+        </p:nvSpPr>
+        <p:spPr>
+          <a:xfrm>
+            <a:off x="6245352" y="512064"/>
+            <a:ext cx="2761487" cy="475488"/>
+          </a:xfrm>
+          <a:prstGeom prst="roundRect">
+            <a:avLst>
+              <a:gd name="adj" fmla="val 30000"/>
+            </a:avLst>
           </a:prstGeom>
           <a:solidFill>
             <a:srgbClr val="1F1F1E"/>
@@ -3190,68 +3302,111 @@
           <a:p>
             <a:pPr algn="ctr"/>
             <a:r>
-              <a:rPr sz="1500" b="1" i="0">
+              <a:rPr sz="1300" b="1" i="0">
                 <a:solidFill>
                   <a:srgbClr val="FFFFFF"/>
                 </a:solidFill>
                 <a:latin typeface="Times New Roman"/>
               </a:rPr>
-              <a:t>2</a:t>
-            </a:r>
-          </a:p>
-        </p:txBody>
-      </p:sp>
-      <p:sp>
-        <p:nvSpPr>
-          <p:cNvPr id="5" name="TextBox 4"/>
-          <p:cNvSpPr txBox="1"/>
-          <p:nvPr/>
-        </p:nvSpPr>
-        <p:spPr>
-          <a:xfrm>
-            <a:off x="3675888" y="201168"/>
-            <a:ext cx="2926080" cy="347472"/>
-          </a:xfrm>
-          <a:prstGeom prst="rect">
-            <a:avLst/>
-          </a:prstGeom>
-          <a:noFill/>
-        </p:spPr>
-        <p:txBody>
-          <a:bodyPr wrap="square" lIns="0" rIns="0" tIns="0" bIns="0">
-            <a:spAutoFit/>
-          </a:bodyPr>
-          <a:lstStyle/>
-          <a:p>
-            <a:pPr algn="l"/>
-            <a:r>
-              <a:rPr sz="1600" b="1" i="0">
-                <a:solidFill>
-                  <a:srgbClr val="1F1F1E"/>
+              <a:t>3 · Distill exactly to spec</a:t>
+            </a:r>
+          </a:p>
+        </p:txBody>
+      </p:sp>
+      <p:sp>
+        <p:nvSpPr>
+          <p:cNvPr id="8" name="Rounded Rectangle 7"/>
+          <p:cNvSpPr/>
+          <p:nvPr/>
+        </p:nvSpPr>
+        <p:spPr>
+          <a:xfrm>
+            <a:off x="9336024" y="384048"/>
+            <a:ext cx="2715768" cy="5577840"/>
+          </a:xfrm>
+          <a:prstGeom prst="roundRect">
+            <a:avLst>
+              <a:gd name="adj" fmla="val 6000"/>
+            </a:avLst>
+          </a:prstGeom>
+          <a:solidFill>
+            <a:srgbClr val="FCFBF9"/>
+          </a:solidFill>
+          <a:ln w="17780">
+            <a:solidFill>
+              <a:srgbClr val="8C8C8C"/>
+            </a:solidFill>
+          </a:ln>
+          <a:effectLst/>
+        </p:spPr>
+        <p:txBody>
+          <a:bodyPr rtlCol="0" anchor="ctr"/>
+          <a:lstStyle/>
+          <a:p>
+            <a:pPr algn="ctr"/>
+          </a:p>
+        </p:txBody>
+      </p:sp>
+      <p:sp>
+        <p:nvSpPr>
+          <p:cNvPr id="9" name="Rounded Rectangle 8"/>
+          <p:cNvSpPr/>
+          <p:nvPr/>
+        </p:nvSpPr>
+        <p:spPr>
+          <a:xfrm>
+            <a:off x="9464040" y="512064"/>
+            <a:ext cx="2459736" cy="475488"/>
+          </a:xfrm>
+          <a:prstGeom prst="roundRect">
+            <a:avLst>
+              <a:gd name="adj" fmla="val 30000"/>
+            </a:avLst>
+          </a:prstGeom>
+          <a:solidFill>
+            <a:srgbClr val="1F1F1E"/>
+          </a:solidFill>
+          <a:ln>
+            <a:noFill/>
+          </a:ln>
+          <a:effectLst/>
+        </p:spPr>
+        <p:txBody>
+          <a:bodyPr rtlCol="0" anchor="ctr" lIns="9000" rIns="9000" tIns="4500" bIns="4500" wrap="square"/>
+          <a:lstStyle/>
+          <a:p>
+            <a:pPr algn="ctr"/>
+            <a:r>
+              <a:rPr sz="1300" b="1" i="0">
+                <a:solidFill>
+                  <a:srgbClr val="FFFFFF"/>
                 </a:solidFill>
                 <a:latin typeface="Times New Roman"/>
               </a:rPr>
-              <a:t>A library of skill atoms</a:t>
-            </a:r>
-          </a:p>
-        </p:txBody>
-      </p:sp>
-      <p:sp>
-        <p:nvSpPr>
-          <p:cNvPr id="6" name="Oval 5"/>
-          <p:cNvSpPr/>
-          <p:nvPr/>
-        </p:nvSpPr>
-        <p:spPr>
-          <a:xfrm>
-            <a:off x="6309360" y="182880"/>
-            <a:ext cx="365760" cy="365760"/>
-          </a:xfrm>
-          <a:prstGeom prst="ellipse">
-            <a:avLst/>
-          </a:prstGeom>
-          <a:solidFill>
-            <a:srgbClr val="1F1F1E"/>
+              <a:t>4 · Certified deployment</a:t>
+            </a:r>
+          </a:p>
+        </p:txBody>
+      </p:sp>
+      <p:sp>
+        <p:nvSpPr>
+          <p:cNvPr id="10" name="Right Arrow 9"/>
+          <p:cNvSpPr/>
+          <p:nvPr/>
+        </p:nvSpPr>
+        <p:spPr>
+          <a:xfrm>
+            <a:off x="2889504" y="2999232"/>
+            <a:ext cx="292608" cy="502920"/>
+          </a:xfrm>
+          <a:prstGeom prst="rightArrow">
+            <a:avLst>
+              <a:gd name="adj1" fmla="val 55000"/>
+              <a:gd name="adj2" fmla="val 55000"/>
+            </a:avLst>
+          </a:prstGeom>
+          <a:solidFill>
+            <a:srgbClr val="8C8C8C"/>
           </a:solidFill>
           <a:ln>
             <a:noFill/>
@@ -3259,73 +3414,32 @@
           <a:effectLst/>
         </p:spPr>
         <p:txBody>
-          <a:bodyPr rtlCol="0" anchor="ctr" lIns="9000" rIns="9000" tIns="4500" bIns="4500" wrap="square"/>
-          <a:lstStyle/>
-          <a:p>
-            <a:pPr algn="ctr"/>
-            <a:r>
-              <a:rPr sz="1500" b="1" i="0">
-                <a:solidFill>
-                  <a:srgbClr val="FFFFFF"/>
-                </a:solidFill>
-                <a:latin typeface="Times New Roman"/>
-              </a:rPr>
-              <a:t>3</a:t>
-            </a:r>
-          </a:p>
-        </p:txBody>
-      </p:sp>
-      <p:sp>
-        <p:nvSpPr>
-          <p:cNvPr id="7" name="TextBox 6"/>
-          <p:cNvSpPr txBox="1"/>
-          <p:nvPr/>
-        </p:nvSpPr>
-        <p:spPr>
-          <a:xfrm>
-            <a:off x="6693408" y="201168"/>
-            <a:ext cx="2926080" cy="347472"/>
-          </a:xfrm>
-          <a:prstGeom prst="rect">
-            <a:avLst/>
-          </a:prstGeom>
-          <a:noFill/>
-        </p:spPr>
-        <p:txBody>
-          <a:bodyPr wrap="square" lIns="0" rIns="0" tIns="0" bIns="0">
-            <a:spAutoFit/>
-          </a:bodyPr>
-          <a:lstStyle/>
-          <a:p>
-            <a:pPr algn="l"/>
-            <a:r>
-              <a:rPr sz="1600" b="1" i="0">
-                <a:solidFill>
-                  <a:srgbClr val="1F1F1E"/>
-                </a:solidFill>
-                <a:latin typeface="Times New Roman"/>
-              </a:rPr>
-              <a:t>Distill exactly to spec</a:t>
-            </a:r>
-          </a:p>
-        </p:txBody>
-      </p:sp>
-      <p:sp>
-        <p:nvSpPr>
-          <p:cNvPr id="8" name="Oval 7"/>
-          <p:cNvSpPr/>
-          <p:nvPr/>
-        </p:nvSpPr>
-        <p:spPr>
-          <a:xfrm>
-            <a:off x="9281160" y="182880"/>
-            <a:ext cx="365760" cy="365760"/>
-          </a:xfrm>
-          <a:prstGeom prst="ellipse">
-            <a:avLst/>
-          </a:prstGeom>
-          <a:solidFill>
-            <a:srgbClr val="1F1F1E"/>
+          <a:bodyPr rtlCol="0" anchor="ctr"/>
+          <a:lstStyle/>
+          <a:p>
+            <a:pPr algn="ctr"/>
+          </a:p>
+        </p:txBody>
+      </p:sp>
+      <p:sp>
+        <p:nvSpPr>
+          <p:cNvPr id="11" name="Right Arrow 10"/>
+          <p:cNvSpPr/>
+          <p:nvPr/>
+        </p:nvSpPr>
+        <p:spPr>
+          <a:xfrm>
+            <a:off x="5879592" y="2999232"/>
+            <a:ext cx="292608" cy="502920"/>
+          </a:xfrm>
+          <a:prstGeom prst="rightArrow">
+            <a:avLst>
+              <a:gd name="adj1" fmla="val 55000"/>
+              <a:gd name="adj2" fmla="val 55000"/>
+            </a:avLst>
+          </a:prstGeom>
+          <a:solidFill>
+            <a:srgbClr val="8C8C8C"/>
           </a:solidFill>
           <a:ln>
             <a:noFill/>
@@ -3333,67 +3447,56 @@
           <a:effectLst/>
         </p:spPr>
         <p:txBody>
-          <a:bodyPr rtlCol="0" anchor="ctr" lIns="9000" rIns="9000" tIns="4500" bIns="4500" wrap="square"/>
-          <a:lstStyle/>
-          <a:p>
-            <a:pPr algn="ctr"/>
-            <a:r>
-              <a:rPr sz="1500" b="1" i="0">
-                <a:solidFill>
-                  <a:srgbClr val="FFFFFF"/>
-                </a:solidFill>
-                <a:latin typeface="Times New Roman"/>
-              </a:rPr>
-              <a:t>4</a:t>
-            </a:r>
-          </a:p>
-        </p:txBody>
-      </p:sp>
-      <p:sp>
-        <p:nvSpPr>
-          <p:cNvPr id="9" name="TextBox 8"/>
-          <p:cNvSpPr txBox="1"/>
-          <p:nvPr/>
-        </p:nvSpPr>
-        <p:spPr>
-          <a:xfrm>
-            <a:off x="9665208" y="201168"/>
-            <a:ext cx="2926080" cy="347472"/>
-          </a:xfrm>
-          <a:prstGeom prst="rect">
-            <a:avLst/>
-          </a:prstGeom>
-          <a:noFill/>
-        </p:spPr>
-        <p:txBody>
-          <a:bodyPr wrap="square" lIns="0" rIns="0" tIns="0" bIns="0">
-            <a:spAutoFit/>
-          </a:bodyPr>
-          <a:lstStyle/>
-          <a:p>
-            <a:pPr algn="l"/>
-            <a:r>
-              <a:rPr sz="1600" b="1" i="0">
-                <a:solidFill>
-                  <a:srgbClr val="1F1F1E"/>
-                </a:solidFill>
-                <a:latin typeface="Times New Roman"/>
-              </a:rPr>
-              <a:t>Certified deployment</a:t>
-            </a:r>
-          </a:p>
-        </p:txBody>
-      </p:sp>
-      <p:sp>
-        <p:nvSpPr>
-          <p:cNvPr id="10" name="Rounded Rectangle 9"/>
-          <p:cNvSpPr/>
-          <p:nvPr/>
-        </p:nvSpPr>
-        <p:spPr>
-          <a:xfrm>
-            <a:off x="475488" y="2304288"/>
-            <a:ext cx="1572768" cy="1280160"/>
+          <a:bodyPr rtlCol="0" anchor="ctr"/>
+          <a:lstStyle/>
+          <a:p>
+            <a:pPr algn="ctr"/>
+          </a:p>
+        </p:txBody>
+      </p:sp>
+      <p:sp>
+        <p:nvSpPr>
+          <p:cNvPr id="12" name="Right Arrow 11"/>
+          <p:cNvSpPr/>
+          <p:nvPr/>
+        </p:nvSpPr>
+        <p:spPr>
+          <a:xfrm>
+            <a:off x="9098280" y="2999232"/>
+            <a:ext cx="292608" cy="502920"/>
+          </a:xfrm>
+          <a:prstGeom prst="rightArrow">
+            <a:avLst>
+              <a:gd name="adj1" fmla="val 55000"/>
+              <a:gd name="adj2" fmla="val 55000"/>
+            </a:avLst>
+          </a:prstGeom>
+          <a:solidFill>
+            <a:srgbClr val="8C8C8C"/>
+          </a:solidFill>
+          <a:ln>
+            <a:noFill/>
+          </a:ln>
+          <a:effectLst/>
+        </p:spPr>
+        <p:txBody>
+          <a:bodyPr rtlCol="0" anchor="ctr"/>
+          <a:lstStyle/>
+          <a:p>
+            <a:pPr algn="ctr"/>
+          </a:p>
+        </p:txBody>
+      </p:sp>
+      <p:sp>
+        <p:nvSpPr>
+          <p:cNvPr id="13" name="Rounded Rectangle 12"/>
+          <p:cNvSpPr/>
+          <p:nvPr/>
+        </p:nvSpPr>
+        <p:spPr>
+          <a:xfrm>
+            <a:off x="603503" y="1453896"/>
+            <a:ext cx="1783080" cy="1298448"/>
           </a:xfrm>
           <a:prstGeom prst="roundRect">
             <a:avLst>
@@ -3420,14 +3523,14 @@
       </p:sp>
       <p:sp>
         <p:nvSpPr>
-          <p:cNvPr id="11" name="Rounded Rectangle 10"/>
-          <p:cNvSpPr/>
-          <p:nvPr/>
-        </p:nvSpPr>
-        <p:spPr>
-          <a:xfrm>
-            <a:off x="374904" y="2203703"/>
-            <a:ext cx="1572768" cy="1280160"/>
+          <p:cNvPr id="14" name="Rounded Rectangle 13"/>
+          <p:cNvSpPr/>
+          <p:nvPr/>
+        </p:nvSpPr>
+        <p:spPr>
+          <a:xfrm>
+            <a:off x="493776" y="1344168"/>
+            <a:ext cx="1783080" cy="1298448"/>
           </a:xfrm>
           <a:prstGeom prst="roundRect">
             <a:avLst>
@@ -3454,14 +3557,14 @@
       </p:sp>
       <p:sp>
         <p:nvSpPr>
-          <p:cNvPr id="12" name="Rounded Rectangle 11"/>
-          <p:cNvSpPr/>
-          <p:nvPr/>
-        </p:nvSpPr>
-        <p:spPr>
-          <a:xfrm>
-            <a:off x="274320" y="2103120"/>
-            <a:ext cx="1572768" cy="1280160"/>
+          <p:cNvPr id="15" name="Rounded Rectangle 14"/>
+          <p:cNvSpPr/>
+          <p:nvPr/>
+        </p:nvSpPr>
+        <p:spPr>
+          <a:xfrm>
+            <a:off x="384048" y="1234440"/>
+            <a:ext cx="1783080" cy="1298448"/>
           </a:xfrm>
           <a:prstGeom prst="roundRect">
             <a:avLst>
@@ -3488,14 +3591,14 @@
       </p:sp>
       <p:sp>
         <p:nvSpPr>
-          <p:cNvPr id="13" name="TextBox 12"/>
+          <p:cNvPr id="16" name="TextBox 15"/>
           <p:cNvSpPr txBox="1"/>
           <p:nvPr/>
         </p:nvSpPr>
         <p:spPr>
           <a:xfrm>
-            <a:off x="274320" y="1755648"/>
-            <a:ext cx="1828800" cy="292608"/>
+            <a:off x="731520" y="1463040"/>
+            <a:ext cx="1737360" cy="822960"/>
           </a:xfrm>
           <a:prstGeom prst="rect">
             <a:avLst/>
@@ -3510,7 +3613,101 @@
           <a:p>
             <a:pPr algn="l"/>
             <a:r>
-              <a:rPr sz="1200" b="0" i="1">
+              <a:rPr sz="950" b="0" i="0">
+                <a:solidFill>
+                  <a:srgbClr val="1F1F1E"/>
+                </a:solidFill>
+                <a:latin typeface="Times New Roman"/>
+              </a:rPr>
+              <a:t>"How many members</a:t>
+            </a:r>
+          </a:p>
+          <a:p>
+            <a:pPr algn="l"/>
+            <a:r>
+              <a:rPr sz="950" b="0" i="0">
+                <a:solidFill>
+                  <a:srgbClr val="1F1F1E"/>
+                </a:solidFill>
+                <a:latin typeface="Times New Roman"/>
+              </a:rPr>
+              <a:t>does each club</a:t>
+            </a:r>
+          </a:p>
+          <a:p>
+            <a:pPr algn="l"/>
+            <a:r>
+              <a:rPr sz="950" b="0" i="0">
+                <a:solidFill>
+                  <a:srgbClr val="1F1F1E"/>
+                </a:solidFill>
+                <a:latin typeface="Times New Roman"/>
+              </a:rPr>
+              <a:t>have?"</a:t>
+            </a:r>
+          </a:p>
+        </p:txBody>
+      </p:sp>
+      <p:sp>
+        <p:nvSpPr>
+          <p:cNvPr id="17" name="TextBox 16"/>
+          <p:cNvSpPr txBox="1"/>
+          <p:nvPr/>
+        </p:nvSpPr>
+        <p:spPr>
+          <a:xfrm>
+            <a:off x="2103120" y="2331720"/>
+            <a:ext cx="457200" cy="274320"/>
+          </a:xfrm>
+          <a:prstGeom prst="rect">
+            <a:avLst/>
+          </a:prstGeom>
+          <a:noFill/>
+        </p:spPr>
+        <p:txBody>
+          <a:bodyPr wrap="square" lIns="0" rIns="0" tIns="0" bIns="0">
+            <a:spAutoFit/>
+          </a:bodyPr>
+          <a:lstStyle/>
+          <a:p>
+            <a:pPr algn="ctr"/>
+            <a:r>
+              <a:rPr sz="1300" b="1" i="0">
+                <a:solidFill>
+                  <a:srgbClr val="6B6A63"/>
+                </a:solidFill>
+                <a:latin typeface="Times New Roman"/>
+              </a:rPr>
+              <a:t>×k</a:t>
+            </a:r>
+          </a:p>
+        </p:txBody>
+      </p:sp>
+      <p:sp>
+        <p:nvSpPr>
+          <p:cNvPr id="18" name="TextBox 17"/>
+          <p:cNvSpPr txBox="1"/>
+          <p:nvPr/>
+        </p:nvSpPr>
+        <p:spPr>
+          <a:xfrm>
+            <a:off x="365760" y="1005840"/>
+            <a:ext cx="2011680" cy="256032"/>
+          </a:xfrm>
+          <a:prstGeom prst="rect">
+            <a:avLst/>
+          </a:prstGeom>
+          <a:noFill/>
+        </p:spPr>
+        <p:txBody>
+          <a:bodyPr wrap="square" lIns="0" rIns="0" tIns="0" bIns="0">
+            <a:spAutoFit/>
+          </a:bodyPr>
+          <a:lstStyle/>
+          <a:p>
+            <a:pPr algn="l"/>
+            <a:r>
+              <a:rPr sz="1050" b="0" i="1">
                 <a:solidFill>
                   <a:srgbClr val="6B6A63"/>
                 </a:solidFill>
@@ -3523,14 +3720,44 @@
       </p:sp>
       <p:sp>
         <p:nvSpPr>
-          <p:cNvPr id="14" name="TextBox 13"/>
+          <p:cNvPr id="19" name="Down Arrow 18"/>
+          <p:cNvSpPr/>
+          <p:nvPr/>
+        </p:nvSpPr>
+        <p:spPr>
+          <a:xfrm>
+            <a:off x="1298448" y="2834640"/>
+            <a:ext cx="164592" cy="384048"/>
+          </a:xfrm>
+          <a:prstGeom prst="downArrow">
+            <a:avLst/>
+          </a:prstGeom>
+          <a:solidFill>
+            <a:srgbClr val="4C72B0"/>
+          </a:solidFill>
+          <a:ln>
+            <a:noFill/>
+          </a:ln>
+          <a:effectLst/>
+        </p:spPr>
+        <p:txBody>
+          <a:bodyPr rtlCol="0" anchor="ctr"/>
+          <a:lstStyle/>
+          <a:p>
+            <a:pPr algn="ctr"/>
+          </a:p>
+        </p:txBody>
+      </p:sp>
+      <p:sp>
+        <p:nvSpPr>
+          <p:cNvPr id="20" name="TextBox 19"/>
           <p:cNvSpPr txBox="1"/>
           <p:nvPr/>
         </p:nvSpPr>
         <p:spPr>
           <a:xfrm>
-            <a:off x="603504" y="2542032"/>
-            <a:ext cx="1481328" cy="822960"/>
+            <a:off x="1536192" y="2889504"/>
+            <a:ext cx="1371600" cy="274320"/>
           </a:xfrm>
           <a:prstGeom prst="rect">
             <a:avLst/>
@@ -3545,51 +3772,27 @@
           <a:p>
             <a:pPr algn="l"/>
             <a:r>
-              <a:rPr sz="950" b="0" i="0">
-                <a:solidFill>
-                  <a:srgbClr val="1F1F1E"/>
+              <a:rPr sz="950" b="1" i="0">
+                <a:solidFill>
+                  <a:srgbClr val="4C72B0"/>
                 </a:solidFill>
                 <a:latin typeface="Times New Roman"/>
               </a:rPr>
-              <a:t>"How many members</a:t>
-            </a:r>
-          </a:p>
-          <a:p>
-            <a:pPr algn="l"/>
-            <a:r>
-              <a:rPr sz="950" b="0" i="0">
-                <a:solidFill>
-                  <a:srgbClr val="1F1F1E"/>
-                </a:solidFill>
-                <a:latin typeface="Times New Roman"/>
-              </a:rPr>
-              <a:t>does each club</a:t>
-            </a:r>
-          </a:p>
-          <a:p>
-            <a:pPr algn="l"/>
-            <a:r>
-              <a:rPr sz="950" b="0" i="0">
-                <a:solidFill>
-                  <a:srgbClr val="1F1F1E"/>
-                </a:solidFill>
-                <a:latin typeface="Times New Roman"/>
-              </a:rPr>
-              <a:t>have?"</a:t>
-            </a:r>
-          </a:p>
-        </p:txBody>
-      </p:sp>
-      <p:sp>
-        <p:nvSpPr>
-          <p:cNvPr id="15" name="TextBox 14"/>
+              <a:t>one backward pass</a:t>
+            </a:r>
+          </a:p>
+        </p:txBody>
+      </p:sp>
+      <p:sp>
+        <p:nvSpPr>
+          <p:cNvPr id="21" name="TextBox 20"/>
           <p:cNvSpPr txBox="1"/>
           <p:nvPr/>
         </p:nvSpPr>
         <p:spPr>
           <a:xfrm>
-            <a:off x="1572768" y="3218688"/>
-            <a:ext cx="457200" cy="310896"/>
+            <a:off x="365760" y="3310128"/>
+            <a:ext cx="2194560" cy="274320"/>
           </a:xfrm>
           <a:prstGeom prst="rect">
             <a:avLst/>
@@ -3602,83 +3805,29 @@
           </a:bodyPr>
           <a:lstStyle/>
           <a:p>
-            <a:pPr algn="ctr"/>
-            <a:r>
-              <a:rPr sz="1300" b="1" i="0">
+            <a:pPr algn="l"/>
+            <a:r>
+              <a:rPr sz="1000" b="0" i="0">
                 <a:solidFill>
                   <a:srgbClr val="6B6A63"/>
                 </a:solidFill>
                 <a:latin typeface="Times New Roman"/>
               </a:rPr>
-              <a:t>×k</a:t>
-            </a:r>
-          </a:p>
-        </p:txBody>
-      </p:sp>
-      <p:sp>
-        <p:nvSpPr>
-          <p:cNvPr id="16" name="Right Arrow 15"/>
-          <p:cNvSpPr/>
-          <p:nvPr/>
-        </p:nvSpPr>
-        <p:spPr>
-          <a:xfrm>
-            <a:off x="1993392" y="2596896"/>
-            <a:ext cx="713232" cy="658368"/>
-          </a:xfrm>
-          <a:prstGeom prst="rightArrow">
-            <a:avLst>
-              <a:gd name="adj1" fmla="val 62000"/>
-              <a:gd name="adj2" fmla="val 42000"/>
-            </a:avLst>
-          </a:prstGeom>
-          <a:solidFill>
-            <a:srgbClr val="8C8C8C"/>
-          </a:solidFill>
-          <a:ln>
-            <a:noFill/>
-          </a:ln>
-          <a:effectLst/>
-        </p:spPr>
-        <p:txBody>
-          <a:bodyPr rtlCol="0" anchor="ctr" lIns="9000" rIns="9000" tIns="4500" bIns="4500" wrap="square"/>
-          <a:lstStyle/>
-          <a:p>
-            <a:pPr algn="ctr"/>
-            <a:r>
-              <a:rPr sz="800" b="1" i="0">
-                <a:solidFill>
-                  <a:srgbClr val="FFFFFF"/>
-                </a:solidFill>
-                <a:latin typeface="Times New Roman"/>
-              </a:rPr>
-              <a:t>backward</a:t>
-            </a:r>
-          </a:p>
-          <a:p>
-            <a:pPr algn="ctr"/>
-            <a:r>
-              <a:rPr sz="800" b="1" i="0">
-                <a:solidFill>
-                  <a:srgbClr val="FFFFFF"/>
-                </a:solidFill>
-                <a:latin typeface="Times New Roman"/>
-              </a:rPr>
-              <a:t>pass</a:t>
-            </a:r>
-          </a:p>
-        </p:txBody>
-      </p:sp>
-      <p:sp>
-        <p:nvSpPr>
-          <p:cNvPr id="17" name="Rounded Rectangle 16"/>
-          <p:cNvSpPr/>
-          <p:nvPr/>
-        </p:nvSpPr>
-        <p:spPr>
-          <a:xfrm>
-            <a:off x="2743200" y="1691640"/>
-            <a:ext cx="1591056" cy="2331720"/>
+              <a:t>it reads what each query is missing:</a:t>
+            </a:r>
+          </a:p>
+        </p:txBody>
+      </p:sp>
+      <p:sp>
+        <p:nvSpPr>
+          <p:cNvPr id="22" name="Rounded Rectangle 21"/>
+          <p:cNvSpPr/>
+          <p:nvPr/>
+        </p:nvSpPr>
+        <p:spPr>
+          <a:xfrm>
+            <a:off x="438912" y="3639312"/>
+            <a:ext cx="274320" cy="384048"/>
           </a:xfrm>
           <a:prstGeom prst="roundRect">
             <a:avLst>
@@ -3686,9 +3835,9 @@
             </a:avLst>
           </a:prstGeom>
           <a:solidFill>
-            <a:srgbClr val="FFFFFF"/>
-          </a:solidFill>
-          <a:ln w="15240">
+            <a:srgbClr val="F7F6F2"/>
+          </a:solidFill>
+          <a:ln w="11430">
             <a:solidFill>
               <a:srgbClr val="8C8C8C"/>
             </a:solidFill>
@@ -3705,49 +3854,100 @@
       </p:sp>
       <p:sp>
         <p:nvSpPr>
-          <p:cNvPr id="18" name="TextBox 17"/>
-          <p:cNvSpPr txBox="1"/>
-          <p:nvPr/>
-        </p:nvSpPr>
-        <p:spPr>
-          <a:xfrm>
-            <a:off x="2743200" y="1371600"/>
-            <a:ext cx="1591056" cy="274320"/>
-          </a:xfrm>
-          <a:prstGeom prst="rect">
-            <a:avLst/>
-          </a:prstGeom>
-          <a:noFill/>
-        </p:spPr>
-        <p:txBody>
-          <a:bodyPr wrap="square" lIns="0" rIns="0" tIns="0" bIns="0">
-            <a:spAutoFit/>
-          </a:bodyPr>
-          <a:lstStyle/>
-          <a:p>
-            <a:pPr algn="ctr"/>
-            <a:r>
-              <a:rPr sz="1000" b="0" i="0">
-                <a:solidFill>
-                  <a:srgbClr val="6B6A63"/>
+          <p:cNvPr id="23" name="Rounded Rectangle 22"/>
+          <p:cNvSpPr/>
+          <p:nvPr/>
+        </p:nvSpPr>
+        <p:spPr>
+          <a:xfrm>
+            <a:off x="822960" y="3694176"/>
+            <a:ext cx="566928" cy="256032"/>
+          </a:xfrm>
+          <a:prstGeom prst="roundRect">
+            <a:avLst>
+              <a:gd name="adj" fmla="val 45000"/>
+            </a:avLst>
+          </a:prstGeom>
+          <a:solidFill>
+            <a:srgbClr val="4C72B0"/>
+          </a:solidFill>
+          <a:ln w="9525">
+            <a:solidFill>
+              <a:srgbClr val="FFFFFF"/>
+            </a:solidFill>
+          </a:ln>
+          <a:effectLst/>
+        </p:spPr>
+        <p:txBody>
+          <a:bodyPr rtlCol="0" anchor="ctr" lIns="9000" rIns="9000" tIns="4500" bIns="4500" wrap="square"/>
+          <a:lstStyle/>
+          <a:p>
+            <a:pPr algn="ctr"/>
+            <a:r>
+              <a:rPr sz="800" b="1" i="0">
+                <a:solidFill>
+                  <a:srgbClr val="FFFFFF"/>
                 </a:solidFill>
                 <a:latin typeface="Times New Roman"/>
               </a:rPr>
-              <a:t>each query needs:</a:t>
-            </a:r>
-          </a:p>
-        </p:txBody>
-      </p:sp>
-      <p:sp>
-        <p:nvSpPr>
-          <p:cNvPr id="19" name="Rounded Rectangle 18"/>
-          <p:cNvSpPr/>
-          <p:nvPr/>
-        </p:nvSpPr>
-        <p:spPr>
-          <a:xfrm>
-            <a:off x="2852928" y="1938528"/>
-            <a:ext cx="274320" cy="402336"/>
+              <a:t>JOIN</a:t>
+            </a:r>
+          </a:p>
+        </p:txBody>
+      </p:sp>
+      <p:sp>
+        <p:nvSpPr>
+          <p:cNvPr id="24" name="Rounded Rectangle 23"/>
+          <p:cNvSpPr/>
+          <p:nvPr/>
+        </p:nvSpPr>
+        <p:spPr>
+          <a:xfrm>
+            <a:off x="1609344" y="3694176"/>
+            <a:ext cx="566928" cy="256032"/>
+          </a:xfrm>
+          <a:prstGeom prst="roundRect">
+            <a:avLst>
+              <a:gd name="adj" fmla="val 45000"/>
+            </a:avLst>
+          </a:prstGeom>
+          <a:solidFill>
+            <a:srgbClr val="5F9EA0"/>
+          </a:solidFill>
+          <a:ln w="9525">
+            <a:solidFill>
+              <a:srgbClr val="FFFFFF"/>
+            </a:solidFill>
+          </a:ln>
+          <a:effectLst/>
+        </p:spPr>
+        <p:txBody>
+          <a:bodyPr rtlCol="0" anchor="ctr" lIns="9000" rIns="9000" tIns="4500" bIns="4500" wrap="square"/>
+          <a:lstStyle/>
+          <a:p>
+            <a:pPr algn="ctr"/>
+            <a:r>
+              <a:rPr sz="800" b="1" i="0">
+                <a:solidFill>
+                  <a:srgbClr val="FFFFFF"/>
+                </a:solidFill>
+                <a:latin typeface="Times New Roman"/>
+              </a:rPr>
+              <a:t>COUNT</a:t>
+            </a:r>
+          </a:p>
+        </p:txBody>
+      </p:sp>
+      <p:sp>
+        <p:nvSpPr>
+          <p:cNvPr id="25" name="Rounded Rectangle 24"/>
+          <p:cNvSpPr/>
+          <p:nvPr/>
+        </p:nvSpPr>
+        <p:spPr>
+          <a:xfrm>
+            <a:off x="438912" y="4206240"/>
+            <a:ext cx="274320" cy="384048"/>
           </a:xfrm>
           <a:prstGeom prst="roundRect">
             <a:avLst>
@@ -3774,14 +3974,14 @@
       </p:sp>
       <p:sp>
         <p:nvSpPr>
-          <p:cNvPr id="20" name="Rounded Rectangle 19"/>
-          <p:cNvSpPr/>
-          <p:nvPr/>
-        </p:nvSpPr>
-        <p:spPr>
-          <a:xfrm>
-            <a:off x="3200400" y="2011680"/>
-            <a:ext cx="512064" cy="246888"/>
+          <p:cNvPr id="26" name="Rounded Rectangle 25"/>
+          <p:cNvSpPr/>
+          <p:nvPr/>
+        </p:nvSpPr>
+        <p:spPr>
+          <a:xfrm>
+            <a:off x="822960" y="4261103"/>
+            <a:ext cx="731520" cy="256032"/>
           </a:xfrm>
           <a:prstGeom prst="roundRect">
             <a:avLst>
@@ -3789,7 +3989,7 @@
             </a:avLst>
           </a:prstGeom>
           <a:solidFill>
-            <a:srgbClr val="4C72B0"/>
+            <a:srgbClr val="7BA7D7"/>
           </a:solidFill>
           <a:ln w="9525">
             <a:solidFill>
@@ -3804,27 +4004,61 @@
           <a:p>
             <a:pPr algn="ctr"/>
             <a:r>
-              <a:rPr sz="750" b="1" i="0">
+              <a:rPr sz="800" b="1" i="0">
                 <a:solidFill>
                   <a:srgbClr val="FFFFFF"/>
                 </a:solidFill>
                 <a:latin typeface="Times New Roman"/>
               </a:rPr>
-              <a:t>JOIN</a:t>
-            </a:r>
-          </a:p>
-        </p:txBody>
-      </p:sp>
-      <p:sp>
-        <p:nvSpPr>
-          <p:cNvPr id="21" name="Rounded Rectangle 20"/>
-          <p:cNvSpPr/>
-          <p:nvPr/>
-        </p:nvSpPr>
-        <p:spPr>
-          <a:xfrm>
-            <a:off x="3749039" y="2011680"/>
-            <a:ext cx="512064" cy="246888"/>
+              <a:t>GROUP BY</a:t>
+            </a:r>
+          </a:p>
+        </p:txBody>
+      </p:sp>
+      <p:sp>
+        <p:nvSpPr>
+          <p:cNvPr id="27" name="Rounded Rectangle 26"/>
+          <p:cNvSpPr/>
+          <p:nvPr/>
+        </p:nvSpPr>
+        <p:spPr>
+          <a:xfrm>
+            <a:off x="438912" y="4773168"/>
+            <a:ext cx="274320" cy="384048"/>
+          </a:xfrm>
+          <a:prstGeom prst="roundRect">
+            <a:avLst>
+              <a:gd name="adj" fmla="val 25000"/>
+            </a:avLst>
+          </a:prstGeom>
+          <a:solidFill>
+            <a:srgbClr val="F7F6F2"/>
+          </a:solidFill>
+          <a:ln w="11430">
+            <a:solidFill>
+              <a:srgbClr val="8C8C8C"/>
+            </a:solidFill>
+          </a:ln>
+          <a:effectLst/>
+        </p:spPr>
+        <p:txBody>
+          <a:bodyPr rtlCol="0" anchor="ctr"/>
+          <a:lstStyle/>
+          <a:p>
+            <a:pPr algn="ctr"/>
+          </a:p>
+        </p:txBody>
+      </p:sp>
+      <p:sp>
+        <p:nvSpPr>
+          <p:cNvPr id="28" name="Rounded Rectangle 27"/>
+          <p:cNvSpPr/>
+          <p:nvPr/>
+        </p:nvSpPr>
+        <p:spPr>
+          <a:xfrm>
+            <a:off x="822960" y="4828031"/>
+            <a:ext cx="566928" cy="256032"/>
           </a:xfrm>
           <a:prstGeom prst="roundRect">
             <a:avLst>
@@ -3832,7 +4066,7 @@
             </a:avLst>
           </a:prstGeom>
           <a:solidFill>
-            <a:srgbClr val="5F9EA0"/>
+            <a:srgbClr val="4C72B0"/>
           </a:solidFill>
           <a:ln w="9525">
             <a:solidFill>
@@ -3847,61 +4081,27 @@
           <a:p>
             <a:pPr algn="ctr"/>
             <a:r>
-              <a:rPr sz="750" b="1" i="0">
+              <a:rPr sz="800" b="1" i="0">
                 <a:solidFill>
                   <a:srgbClr val="FFFFFF"/>
                 </a:solidFill>
                 <a:latin typeface="Times New Roman"/>
               </a:rPr>
-              <a:t>COUNT</a:t>
-            </a:r>
-          </a:p>
-        </p:txBody>
-      </p:sp>
-      <p:sp>
-        <p:nvSpPr>
-          <p:cNvPr id="22" name="Rounded Rectangle 21"/>
-          <p:cNvSpPr/>
-          <p:nvPr/>
-        </p:nvSpPr>
-        <p:spPr>
-          <a:xfrm>
-            <a:off x="2852928" y="2615184"/>
-            <a:ext cx="274320" cy="402336"/>
-          </a:xfrm>
-          <a:prstGeom prst="roundRect">
-            <a:avLst>
-              <a:gd name="adj" fmla="val 25000"/>
-            </a:avLst>
-          </a:prstGeom>
-          <a:solidFill>
-            <a:srgbClr val="F7F6F2"/>
-          </a:solidFill>
-          <a:ln w="11430">
-            <a:solidFill>
-              <a:srgbClr val="8C8C8C"/>
-            </a:solidFill>
-          </a:ln>
-          <a:effectLst/>
-        </p:spPr>
-        <p:txBody>
-          <a:bodyPr rtlCol="0" anchor="ctr"/>
-          <a:lstStyle/>
-          <a:p>
-            <a:pPr algn="ctr"/>
-          </a:p>
-        </p:txBody>
-      </p:sp>
-      <p:sp>
-        <p:nvSpPr>
-          <p:cNvPr id="23" name="Rounded Rectangle 22"/>
-          <p:cNvSpPr/>
-          <p:nvPr/>
-        </p:nvSpPr>
-        <p:spPr>
-          <a:xfrm>
-            <a:off x="3200400" y="2688336"/>
-            <a:ext cx="658368" cy="246888"/>
+              <a:t>JOIN</a:t>
+            </a:r>
+          </a:p>
+        </p:txBody>
+      </p:sp>
+      <p:sp>
+        <p:nvSpPr>
+          <p:cNvPr id="29" name="Rounded Rectangle 28"/>
+          <p:cNvSpPr/>
+          <p:nvPr/>
+        </p:nvSpPr>
+        <p:spPr>
+          <a:xfrm>
+            <a:off x="1609344" y="4828031"/>
+            <a:ext cx="731520" cy="256032"/>
           </a:xfrm>
           <a:prstGeom prst="roundRect">
             <a:avLst>
@@ -3909,7 +4109,7 @@
             </a:avLst>
           </a:prstGeom>
           <a:solidFill>
-            <a:srgbClr val="7BA7D7"/>
+            <a:srgbClr val="5F9EA0"/>
           </a:solidFill>
           <a:ln w="9525">
             <a:solidFill>
@@ -3924,61 +4124,62 @@
           <a:p>
             <a:pPr algn="ctr"/>
             <a:r>
-              <a:rPr sz="750" b="1" i="0">
+              <a:rPr sz="800" b="1" i="0">
                 <a:solidFill>
                   <a:srgbClr val="FFFFFF"/>
                 </a:solidFill>
                 <a:latin typeface="Times New Roman"/>
               </a:rPr>
-              <a:t>GROUP BY</a:t>
-            </a:r>
-          </a:p>
-        </p:txBody>
-      </p:sp>
-      <p:sp>
-        <p:nvSpPr>
-          <p:cNvPr id="24" name="Rounded Rectangle 23"/>
-          <p:cNvSpPr/>
-          <p:nvPr/>
-        </p:nvSpPr>
-        <p:spPr>
-          <a:xfrm>
-            <a:off x="2852928" y="3291840"/>
-            <a:ext cx="274320" cy="402336"/>
-          </a:xfrm>
-          <a:prstGeom prst="roundRect">
-            <a:avLst>
-              <a:gd name="adj" fmla="val 25000"/>
-            </a:avLst>
-          </a:prstGeom>
-          <a:solidFill>
-            <a:srgbClr val="F7F6F2"/>
-          </a:solidFill>
-          <a:ln w="11430">
-            <a:solidFill>
-              <a:srgbClr val="8C8C8C"/>
-            </a:solidFill>
-          </a:ln>
-          <a:effectLst/>
-        </p:spPr>
-        <p:txBody>
-          <a:bodyPr rtlCol="0" anchor="ctr"/>
-          <a:lstStyle/>
-          <a:p>
-            <a:pPr algn="ctr"/>
-          </a:p>
-        </p:txBody>
-      </p:sp>
-      <p:sp>
-        <p:nvSpPr>
-          <p:cNvPr id="25" name="Rounded Rectangle 24"/>
-          <p:cNvSpPr/>
-          <p:nvPr/>
-        </p:nvSpPr>
-        <p:spPr>
-          <a:xfrm>
-            <a:off x="3200400" y="3364992"/>
-            <a:ext cx="512064" cy="246888"/>
+              <a:t>FILTER</a:t>
+            </a:r>
+          </a:p>
+        </p:txBody>
+      </p:sp>
+      <p:sp>
+        <p:nvSpPr>
+          <p:cNvPr id="30" name="TextBox 29"/>
+          <p:cNvSpPr txBox="1"/>
+          <p:nvPr/>
+        </p:nvSpPr>
+        <p:spPr>
+          <a:xfrm>
+            <a:off x="320040" y="5440680"/>
+            <a:ext cx="2468880" cy="310896"/>
+          </a:xfrm>
+          <a:prstGeom prst="rect">
+            <a:avLst/>
+          </a:prstGeom>
+          <a:noFill/>
+        </p:spPr>
+        <p:txBody>
+          <a:bodyPr wrap="square" lIns="0" rIns="0" tIns="0" bIns="0">
+            <a:spAutoFit/>
+          </a:bodyPr>
+          <a:lstStyle/>
+          <a:p>
+            <a:pPr algn="ctr"/>
+            <a:r>
+              <a:rPr sz="1000" b="1" i="0">
+                <a:solidFill>
+                  <a:srgbClr val="4C72B0"/>
+                </a:solidFill>
+                <a:latin typeface="Times New Roman"/>
+              </a:rPr>
+              <a:t>the gradient names the missing skills</a:t>
+            </a:r>
+          </a:p>
+        </p:txBody>
+      </p:sp>
+      <p:sp>
+        <p:nvSpPr>
+          <p:cNvPr id="31" name="Rounded Rectangle 30"/>
+          <p:cNvSpPr/>
+          <p:nvPr/>
+        </p:nvSpPr>
+        <p:spPr>
+          <a:xfrm>
+            <a:off x="3310128" y="1783080"/>
+            <a:ext cx="786384" cy="310896"/>
           </a:xfrm>
           <a:prstGeom prst="roundRect">
             <a:avLst>
@@ -4001,7 +4202,7 @@
           <a:p>
             <a:pPr algn="ctr"/>
             <a:r>
-              <a:rPr sz="750" b="1" i="0">
+              <a:rPr sz="800" b="1" i="0">
                 <a:solidFill>
                   <a:srgbClr val="FFFFFF"/>
                 </a:solidFill>
@@ -4014,258 +4215,14 @@
       </p:sp>
       <p:sp>
         <p:nvSpPr>
-          <p:cNvPr id="26" name="Rounded Rectangle 25"/>
-          <p:cNvSpPr/>
-          <p:nvPr/>
-        </p:nvSpPr>
-        <p:spPr>
-          <a:xfrm>
-            <a:off x="3749039" y="3364992"/>
-            <a:ext cx="512064" cy="246888"/>
-          </a:xfrm>
-          <a:prstGeom prst="roundRect">
-            <a:avLst>
-              <a:gd name="adj" fmla="val 45000"/>
-            </a:avLst>
-          </a:prstGeom>
-          <a:solidFill>
-            <a:srgbClr val="5F9EA0"/>
-          </a:solidFill>
-          <a:ln w="9525">
-            <a:solidFill>
-              <a:srgbClr val="FFFFFF"/>
-            </a:solidFill>
-          </a:ln>
-          <a:effectLst/>
-        </p:spPr>
-        <p:txBody>
-          <a:bodyPr rtlCol="0" anchor="ctr" lIns="9000" rIns="9000" tIns="4500" bIns="4500" wrap="square"/>
-          <a:lstStyle/>
-          <a:p>
-            <a:pPr algn="ctr"/>
-            <a:r>
-              <a:rPr sz="750" b="1" i="0">
-                <a:solidFill>
-                  <a:srgbClr val="FFFFFF"/>
-                </a:solidFill>
-                <a:latin typeface="Times New Roman"/>
-              </a:rPr>
-              <a:t>FILTER</a:t>
-            </a:r>
-          </a:p>
-        </p:txBody>
-      </p:sp>
-      <p:sp>
-        <p:nvSpPr>
-          <p:cNvPr id="27" name="TextBox 26"/>
-          <p:cNvSpPr txBox="1"/>
-          <p:nvPr/>
-        </p:nvSpPr>
-        <p:spPr>
-          <a:xfrm>
-            <a:off x="2670048" y="4114800"/>
-            <a:ext cx="1737360" cy="310896"/>
-          </a:xfrm>
-          <a:prstGeom prst="rect">
-            <a:avLst/>
-          </a:prstGeom>
-          <a:noFill/>
-        </p:spPr>
-        <p:txBody>
-          <a:bodyPr wrap="square" lIns="0" rIns="0" tIns="0" bIns="0">
-            <a:spAutoFit/>
-          </a:bodyPr>
-          <a:lstStyle/>
-          <a:p>
-            <a:pPr algn="ctr"/>
-            <a:r>
-              <a:rPr sz="1050" b="1" i="0">
-                <a:solidFill>
-                  <a:srgbClr val="4C72B0"/>
-                </a:solidFill>
-                <a:latin typeface="Times New Roman"/>
-              </a:rPr>
-              <a:t>the gradient names them</a:t>
-            </a:r>
-          </a:p>
-        </p:txBody>
-      </p:sp>
-      <p:sp>
-        <p:nvSpPr>
-          <p:cNvPr id="28" name="Right Arrow 27"/>
-          <p:cNvSpPr/>
-          <p:nvPr/>
-        </p:nvSpPr>
-        <p:spPr>
-          <a:xfrm>
-            <a:off x="4407408" y="2596896"/>
-            <a:ext cx="640080" cy="658368"/>
-          </a:xfrm>
-          <a:prstGeom prst="rightArrow">
-            <a:avLst>
-              <a:gd name="adj1" fmla="val 62000"/>
-              <a:gd name="adj2" fmla="val 42000"/>
-            </a:avLst>
-          </a:prstGeom>
-          <a:solidFill>
-            <a:srgbClr val="8C8C8C"/>
-          </a:solidFill>
-          <a:ln>
-            <a:noFill/>
-          </a:ln>
-          <a:effectLst/>
-        </p:spPr>
-        <p:txBody>
-          <a:bodyPr rtlCol="0" anchor="ctr" lIns="9000" rIns="9000" tIns="4500" bIns="4500" wrap="square"/>
-          <a:lstStyle/>
-          <a:p>
-            <a:pPr algn="ctr"/>
-            <a:r>
-              <a:rPr sz="900" b="1" i="0">
-                <a:solidFill>
-                  <a:srgbClr val="FFFFFF"/>
-                </a:solidFill>
-                <a:latin typeface="Times New Roman"/>
-              </a:rPr>
-              <a:t>sparse</a:t>
-            </a:r>
-          </a:p>
-          <a:p>
-            <a:pPr algn="ctr"/>
-            <a:r>
-              <a:rPr sz="900" b="1" i="0">
-                <a:solidFill>
-                  <a:srgbClr val="FFFFFF"/>
-                </a:solidFill>
-                <a:latin typeface="Times New Roman"/>
-              </a:rPr>
-              <a:t>coding</a:t>
-            </a:r>
-          </a:p>
-        </p:txBody>
-      </p:sp>
-      <p:sp>
-        <p:nvSpPr>
-          <p:cNvPr id="29" name="Rounded Rectangle 28"/>
-          <p:cNvSpPr/>
-          <p:nvPr/>
-        </p:nvSpPr>
-        <p:spPr>
-          <a:xfrm>
-            <a:off x="5102352" y="1463040"/>
-            <a:ext cx="1920240" cy="2697480"/>
-          </a:xfrm>
-          <a:prstGeom prst="roundRect">
-            <a:avLst>
-              <a:gd name="adj" fmla="val 25000"/>
-            </a:avLst>
-          </a:prstGeom>
-          <a:solidFill>
-            <a:srgbClr val="FFFFFF"/>
-          </a:solidFill>
-          <a:ln w="15240">
-            <a:solidFill>
-              <a:srgbClr val="8C8C8C"/>
-            </a:solidFill>
-          </a:ln>
-          <a:effectLst/>
-        </p:spPr>
-        <p:txBody>
-          <a:bodyPr rtlCol="0" anchor="ctr"/>
-          <a:lstStyle/>
-          <a:p>
-            <a:pPr algn="ctr"/>
-          </a:p>
-        </p:txBody>
-      </p:sp>
-      <p:sp>
-        <p:nvSpPr>
-          <p:cNvPr id="30" name="TextBox 29"/>
-          <p:cNvSpPr txBox="1"/>
-          <p:nvPr/>
-        </p:nvSpPr>
-        <p:spPr>
-          <a:xfrm>
-            <a:off x="5102352" y="1115568"/>
-            <a:ext cx="1920240" cy="274320"/>
-          </a:xfrm>
-          <a:prstGeom prst="rect">
-            <a:avLst/>
-          </a:prstGeom>
-          <a:noFill/>
-        </p:spPr>
-        <p:txBody>
-          <a:bodyPr wrap="square" lIns="0" rIns="0" tIns="0" bIns="0">
-            <a:spAutoFit/>
-          </a:bodyPr>
-          <a:lstStyle/>
-          <a:p>
-            <a:pPr algn="ctr"/>
-            <a:r>
-              <a:rPr sz="1100" b="0" i="0">
-                <a:solidFill>
-                  <a:srgbClr val="6B6A63"/>
-                </a:solidFill>
-                <a:latin typeface="Times New Roman"/>
-              </a:rPr>
-              <a:t>skill atom library</a:t>
-            </a:r>
-          </a:p>
-        </p:txBody>
-      </p:sp>
-      <p:sp>
-        <p:nvSpPr>
-          <p:cNvPr id="31" name="Rounded Rectangle 30"/>
-          <p:cNvSpPr/>
-          <p:nvPr/>
-        </p:nvSpPr>
-        <p:spPr>
-          <a:xfrm>
-            <a:off x="5266944" y="1700784"/>
-            <a:ext cx="749808" cy="310896"/>
-          </a:xfrm>
-          <a:prstGeom prst="roundRect">
-            <a:avLst>
-              <a:gd name="adj" fmla="val 45000"/>
-            </a:avLst>
-          </a:prstGeom>
-          <a:solidFill>
-            <a:srgbClr val="4C72B0"/>
-          </a:solidFill>
-          <a:ln w="9525">
-            <a:solidFill>
-              <a:srgbClr val="FFFFFF"/>
-            </a:solidFill>
-          </a:ln>
-          <a:effectLst/>
-        </p:spPr>
-        <p:txBody>
-          <a:bodyPr rtlCol="0" anchor="ctr" lIns="9000" rIns="9000" tIns="4500" bIns="4500" wrap="square"/>
-          <a:lstStyle/>
-          <a:p>
-            <a:pPr algn="ctr"/>
-            <a:r>
-              <a:rPr sz="800" b="1" i="0">
-                <a:solidFill>
-                  <a:srgbClr val="FFFFFF"/>
-                </a:solidFill>
-                <a:latin typeface="Times New Roman"/>
-              </a:rPr>
-              <a:t>JOIN</a:t>
-            </a:r>
-          </a:p>
-        </p:txBody>
-      </p:sp>
-      <p:sp>
-        <p:nvSpPr>
           <p:cNvPr id="32" name="Rounded Rectangle 31"/>
           <p:cNvSpPr/>
           <p:nvPr/>
         </p:nvSpPr>
         <p:spPr>
           <a:xfrm>
-            <a:off x="5221224" y="1655064"/>
-            <a:ext cx="841248" cy="402336"/>
+            <a:off x="3264408" y="1737360"/>
+            <a:ext cx="877824" cy="402336"/>
           </a:xfrm>
           <a:prstGeom prst="roundRect">
             <a:avLst>
@@ -4297,8 +4254,8 @@
         </p:nvSpPr>
         <p:spPr>
           <a:xfrm>
-            <a:off x="6108192" y="1700784"/>
-            <a:ext cx="749808" cy="310896"/>
+            <a:off x="4169664" y="1783080"/>
+            <a:ext cx="786384" cy="310896"/>
           </a:xfrm>
           <a:prstGeom prst="roundRect">
             <a:avLst>
@@ -4340,8 +4297,8 @@
         </p:nvSpPr>
         <p:spPr>
           <a:xfrm>
-            <a:off x="6062472" y="1655064"/>
-            <a:ext cx="841248" cy="402336"/>
+            <a:off x="4123944" y="1737360"/>
+            <a:ext cx="877824" cy="402336"/>
           </a:xfrm>
           <a:prstGeom prst="roundRect">
             <a:avLst>
@@ -4373,8 +4330,8 @@
         </p:nvSpPr>
         <p:spPr>
           <a:xfrm>
-            <a:off x="5266944" y="2203704"/>
-            <a:ext cx="749808" cy="310896"/>
+            <a:off x="5029200" y="1783080"/>
+            <a:ext cx="786384" cy="310896"/>
           </a:xfrm>
           <a:prstGeom prst="roundRect">
             <a:avLst>
@@ -4416,8 +4373,8 @@
         </p:nvSpPr>
         <p:spPr>
           <a:xfrm>
-            <a:off x="5221224" y="2157984"/>
-            <a:ext cx="841248" cy="402336"/>
+            <a:off x="4983480" y="1737360"/>
+            <a:ext cx="877824" cy="402336"/>
           </a:xfrm>
           <a:prstGeom prst="roundRect">
             <a:avLst>
@@ -4441,16 +4398,38 @@
           </a:p>
         </p:txBody>
       </p:sp>
-      <p:sp>
-        <p:nvSpPr>
-          <p:cNvPr id="37" name="Rounded Rectangle 36"/>
-          <p:cNvSpPr/>
-          <p:nvPr/>
-        </p:nvSpPr>
-        <p:spPr>
-          <a:xfrm>
-            <a:off x="6108192" y="2203704"/>
-            <a:ext cx="749808" cy="310896"/>
+      <p:cxnSp>
+        <p:nvCxnSpPr>
+          <p:cNvPr id="37" name="Connector 36"/>
+          <p:cNvCxnSpPr/>
+          <p:nvPr/>
+        </p:nvCxnSpPr>
+        <p:spPr>
+          <a:xfrm>
+            <a:off x="3255264" y="2148840"/>
+            <a:ext cx="2523744" cy="0"/>
+          </a:xfrm>
+          <a:prstGeom prst="line">
+            <a:avLst/>
+          </a:prstGeom>
+          <a:ln w="20320">
+            <a:solidFill>
+              <a:srgbClr val="8C8C8C"/>
+            </a:solidFill>
+          </a:ln>
+          <a:effectLst/>
+        </p:spPr>
+      </p:cxnSp>
+      <p:sp>
+        <p:nvSpPr>
+          <p:cNvPr id="38" name="Rounded Rectangle 37"/>
+          <p:cNvSpPr/>
+          <p:nvPr/>
+        </p:nvSpPr>
+        <p:spPr>
+          <a:xfrm>
+            <a:off x="3310128" y="2496312"/>
+            <a:ext cx="786384" cy="310896"/>
           </a:xfrm>
           <a:prstGeom prst="roundRect">
             <a:avLst>
@@ -4486,14 +4465,14 @@
       </p:sp>
       <p:sp>
         <p:nvSpPr>
-          <p:cNvPr id="38" name="Rounded Rectangle 37"/>
-          <p:cNvSpPr/>
-          <p:nvPr/>
-        </p:nvSpPr>
-        <p:spPr>
-          <a:xfrm>
-            <a:off x="6062472" y="2157984"/>
-            <a:ext cx="841248" cy="402336"/>
+          <p:cNvPr id="39" name="Rounded Rectangle 38"/>
+          <p:cNvSpPr/>
+          <p:nvPr/>
+        </p:nvSpPr>
+        <p:spPr>
+          <a:xfrm>
+            <a:off x="3264408" y="2450592"/>
+            <a:ext cx="877824" cy="402336"/>
           </a:xfrm>
           <a:prstGeom prst="roundRect">
             <a:avLst>
@@ -4519,14 +4498,14 @@
       </p:sp>
       <p:sp>
         <p:nvSpPr>
-          <p:cNvPr id="39" name="Rounded Rectangle 38"/>
-          <p:cNvSpPr/>
-          <p:nvPr/>
-        </p:nvSpPr>
-        <p:spPr>
-          <a:xfrm>
-            <a:off x="5266944" y="2706624"/>
-            <a:ext cx="749808" cy="310896"/>
+          <p:cNvPr id="40" name="Rounded Rectangle 39"/>
+          <p:cNvSpPr/>
+          <p:nvPr/>
+        </p:nvSpPr>
+        <p:spPr>
+          <a:xfrm>
+            <a:off x="4169664" y="2496312"/>
+            <a:ext cx="786384" cy="310896"/>
           </a:xfrm>
           <a:prstGeom prst="roundRect">
             <a:avLst>
@@ -4562,14 +4541,14 @@
       </p:sp>
       <p:sp>
         <p:nvSpPr>
-          <p:cNvPr id="40" name="Rounded Rectangle 39"/>
-          <p:cNvSpPr/>
-          <p:nvPr/>
-        </p:nvSpPr>
-        <p:spPr>
-          <a:xfrm>
-            <a:off x="5221224" y="2660904"/>
-            <a:ext cx="841248" cy="402336"/>
+          <p:cNvPr id="41" name="Rounded Rectangle 40"/>
+          <p:cNvSpPr/>
+          <p:nvPr/>
+        </p:nvSpPr>
+        <p:spPr>
+          <a:xfrm>
+            <a:off x="4123944" y="2450592"/>
+            <a:ext cx="877824" cy="402336"/>
           </a:xfrm>
           <a:prstGeom prst="roundRect">
             <a:avLst>
@@ -4595,14 +4574,14 @@
       </p:sp>
       <p:sp>
         <p:nvSpPr>
-          <p:cNvPr id="41" name="Rounded Rectangle 40"/>
-          <p:cNvSpPr/>
-          <p:nvPr/>
-        </p:nvSpPr>
-        <p:spPr>
-          <a:xfrm>
-            <a:off x="6108192" y="2706624"/>
-            <a:ext cx="749808" cy="310896"/>
+          <p:cNvPr id="42" name="Rounded Rectangle 41"/>
+          <p:cNvSpPr/>
+          <p:nvPr/>
+        </p:nvSpPr>
+        <p:spPr>
+          <a:xfrm>
+            <a:off x="5029200" y="2496312"/>
+            <a:ext cx="786384" cy="310896"/>
           </a:xfrm>
           <a:prstGeom prst="roundRect">
             <a:avLst>
@@ -4610,7 +4589,7 @@
             </a:avLst>
           </a:prstGeom>
           <a:solidFill>
-            <a:srgbClr val="DD8452"/>
+            <a:srgbClr val="E8E6E1"/>
           </a:solidFill>
           <a:ln w="9525">
             <a:solidFill>
@@ -4627,25 +4606,47 @@
             <a:r>
               <a:rPr sz="800" b="1" i="0">
                 <a:solidFill>
-                  <a:srgbClr val="FFFFFF"/>
+                  <a:srgbClr val="6B6A63"/>
                 </a:solidFill>
                 <a:latin typeface="Times New Roman"/>
               </a:rPr>
-              <a:t>PLOT</a:t>
-            </a:r>
-          </a:p>
-        </p:txBody>
-      </p:sp>
-      <p:sp>
-        <p:nvSpPr>
-          <p:cNvPr id="42" name="Rounded Rectangle 41"/>
-          <p:cNvSpPr/>
-          <p:nvPr/>
-        </p:nvSpPr>
-        <p:spPr>
-          <a:xfrm>
-            <a:off x="5266944" y="3209544"/>
-            <a:ext cx="749808" cy="310896"/>
+              <a:t>…</a:t>
+            </a:r>
+          </a:p>
+        </p:txBody>
+      </p:sp>
+      <p:cxnSp>
+        <p:nvCxnSpPr>
+          <p:cNvPr id="43" name="Connector 42"/>
+          <p:cNvCxnSpPr/>
+          <p:nvPr/>
+        </p:nvCxnSpPr>
+        <p:spPr>
+          <a:xfrm>
+            <a:off x="3255264" y="2862072"/>
+            <a:ext cx="2523744" cy="0"/>
+          </a:xfrm>
+          <a:prstGeom prst="line">
+            <a:avLst/>
+          </a:prstGeom>
+          <a:ln w="20320">
+            <a:solidFill>
+              <a:srgbClr val="8C8C8C"/>
+            </a:solidFill>
+          </a:ln>
+          <a:effectLst/>
+        </p:spPr>
+      </p:cxnSp>
+      <p:sp>
+        <p:nvSpPr>
+          <p:cNvPr id="44" name="Rounded Rectangle 43"/>
+          <p:cNvSpPr/>
+          <p:nvPr/>
+        </p:nvSpPr>
+        <p:spPr>
+          <a:xfrm>
+            <a:off x="3310128" y="3209544"/>
+            <a:ext cx="786384" cy="310896"/>
           </a:xfrm>
           <a:prstGeom prst="roundRect">
             <a:avLst>
@@ -4674,21 +4675,21 @@
                 </a:solidFill>
                 <a:latin typeface="Times New Roman"/>
               </a:rPr>
-              <a:t>REGEX</a:t>
-            </a:r>
-          </a:p>
-        </p:txBody>
-      </p:sp>
-      <p:sp>
-        <p:nvSpPr>
-          <p:cNvPr id="43" name="Rounded Rectangle 42"/>
-          <p:cNvSpPr/>
-          <p:nvPr/>
-        </p:nvSpPr>
-        <p:spPr>
-          <a:xfrm>
-            <a:off x="6108192" y="3209544"/>
-            <a:ext cx="749808" cy="310896"/>
+              <a:t>PLOT</a:t>
+            </a:r>
+          </a:p>
+        </p:txBody>
+      </p:sp>
+      <p:sp>
+        <p:nvSpPr>
+          <p:cNvPr id="45" name="Rounded Rectangle 44"/>
+          <p:cNvSpPr/>
+          <p:nvPr/>
+        </p:nvSpPr>
+        <p:spPr>
+          <a:xfrm>
+            <a:off x="4169664" y="3209544"/>
+            <a:ext cx="786384" cy="310896"/>
           </a:xfrm>
           <a:prstGeom prst="roundRect">
             <a:avLst>
@@ -4696,7 +4697,7 @@
             </a:avLst>
           </a:prstGeom>
           <a:solidFill>
-            <a:srgbClr val="C44E52"/>
+            <a:srgbClr val="DD8452"/>
           </a:solidFill>
           <a:ln w="9525">
             <a:solidFill>
@@ -4717,21 +4718,21 @@
                 </a:solidFill>
                 <a:latin typeface="Times New Roman"/>
               </a:rPr>
-              <a:t>RECURSION</a:t>
-            </a:r>
-          </a:p>
-        </p:txBody>
-      </p:sp>
-      <p:sp>
-        <p:nvSpPr>
-          <p:cNvPr id="44" name="Rounded Rectangle 43"/>
-          <p:cNvSpPr/>
-          <p:nvPr/>
-        </p:nvSpPr>
-        <p:spPr>
-          <a:xfrm>
-            <a:off x="5266944" y="3712464"/>
-            <a:ext cx="749808" cy="310896"/>
+              <a:t>REGEX</a:t>
+            </a:r>
+          </a:p>
+        </p:txBody>
+      </p:sp>
+      <p:sp>
+        <p:nvSpPr>
+          <p:cNvPr id="46" name="Rounded Rectangle 45"/>
+          <p:cNvSpPr/>
+          <p:nvPr/>
+        </p:nvSpPr>
+        <p:spPr>
+          <a:xfrm>
+            <a:off x="5029200" y="3209544"/>
+            <a:ext cx="786384" cy="310896"/>
           </a:xfrm>
           <a:prstGeom prst="roundRect">
             <a:avLst>
@@ -4739,7 +4740,7 @@
             </a:avLst>
           </a:prstGeom>
           <a:solidFill>
-            <a:srgbClr val="E8E6E1"/>
+            <a:srgbClr val="C44E52"/>
           </a:solidFill>
           <a:ln w="9525">
             <a:solidFill>
@@ -4756,25 +4757,303 @@
             <a:r>
               <a:rPr sz="800" b="1" i="0">
                 <a:solidFill>
-                  <a:srgbClr val="6B6A63"/>
+                  <a:srgbClr val="FFFFFF"/>
                 </a:solidFill>
                 <a:latin typeface="Times New Roman"/>
               </a:rPr>
-              <a:t>…</a:t>
-            </a:r>
-          </a:p>
-        </p:txBody>
-      </p:sp>
-      <p:sp>
-        <p:nvSpPr>
-          <p:cNvPr id="45" name="Rounded Rectangle 44"/>
-          <p:cNvSpPr/>
-          <p:nvPr/>
-        </p:nvSpPr>
-        <p:spPr>
-          <a:xfrm>
-            <a:off x="4956048" y="4279392"/>
-            <a:ext cx="2212848" cy="566928"/>
+              <a:t>RECURSION</a:t>
+            </a:r>
+          </a:p>
+        </p:txBody>
+      </p:sp>
+      <p:cxnSp>
+        <p:nvCxnSpPr>
+          <p:cNvPr id="47" name="Connector 46"/>
+          <p:cNvCxnSpPr/>
+          <p:nvPr/>
+        </p:nvCxnSpPr>
+        <p:spPr>
+          <a:xfrm>
+            <a:off x="3255264" y="3575303"/>
+            <a:ext cx="2523744" cy="0"/>
+          </a:xfrm>
+          <a:prstGeom prst="line">
+            <a:avLst/>
+          </a:prstGeom>
+          <a:ln w="20320">
+            <a:solidFill>
+              <a:srgbClr val="8C8C8C"/>
+            </a:solidFill>
+          </a:ln>
+          <a:effectLst/>
+        </p:spPr>
+      </p:cxnSp>
+      <p:sp>
+        <p:nvSpPr>
+          <p:cNvPr id="48" name="TextBox 47"/>
+          <p:cNvSpPr txBox="1"/>
+          <p:nvPr/>
+        </p:nvSpPr>
+        <p:spPr>
+          <a:xfrm>
+            <a:off x="3255264" y="1170432"/>
+            <a:ext cx="2560320" cy="457200"/>
+          </a:xfrm>
+          <a:prstGeom prst="rect">
+            <a:avLst/>
+          </a:prstGeom>
+          <a:noFill/>
+        </p:spPr>
+        <p:txBody>
+          <a:bodyPr wrap="square" lIns="0" rIns="0" tIns="0" bIns="0">
+            <a:spAutoFit/>
+          </a:bodyPr>
+          <a:lstStyle/>
+          <a:p>
+            <a:pPr algn="ctr"/>
+            <a:r>
+              <a:rPr sz="950" b="0" i="0">
+                <a:solidFill>
+                  <a:srgbClr val="6B6A63"/>
+                </a:solidFill>
+                <a:latin typeface="Times New Roman"/>
+              </a:rPr>
+              <a:t>a sparse dictionary over many traces</a:t>
+            </a:r>
+          </a:p>
+          <a:p>
+            <a:pPr algn="ctr"/>
+            <a:r>
+              <a:rPr sz="950" b="0" i="0">
+                <a:solidFill>
+                  <a:srgbClr val="6B6A63"/>
+                </a:solidFill>
+                <a:latin typeface="Times New Roman"/>
+              </a:rPr>
+              <a:t>stocks the shelves with named atoms</a:t>
+            </a:r>
+          </a:p>
+        </p:txBody>
+      </p:sp>
+      <p:sp>
+        <p:nvSpPr>
+          <p:cNvPr id="49" name="Rounded Rectangle 48"/>
+          <p:cNvSpPr/>
+          <p:nvPr/>
+        </p:nvSpPr>
+        <p:spPr>
+          <a:xfrm>
+            <a:off x="3383280" y="4041648"/>
+            <a:ext cx="2286000" cy="1572768"/>
+          </a:xfrm>
+          <a:prstGeom prst="roundRect">
+            <a:avLst>
+              <a:gd name="adj" fmla="val 10000"/>
+            </a:avLst>
+          </a:prstGeom>
+          <a:solidFill>
+            <a:srgbClr val="FFFFFF"/>
+          </a:solidFill>
+          <a:ln w="20320">
+            <a:solidFill>
+              <a:srgbClr val="4C72B0"/>
+            </a:solidFill>
+          </a:ln>
+          <a:effectLst/>
+        </p:spPr>
+        <p:txBody>
+          <a:bodyPr rtlCol="0" anchor="ctr"/>
+          <a:lstStyle/>
+          <a:p>
+            <a:pPr algn="ctr"/>
+          </a:p>
+        </p:txBody>
+      </p:sp>
+      <p:sp>
+        <p:nvSpPr>
+          <p:cNvPr id="50" name="TextBox 49"/>
+          <p:cNvSpPr txBox="1"/>
+          <p:nvPr/>
+        </p:nvSpPr>
+        <p:spPr>
+          <a:xfrm>
+            <a:off x="3493008" y="4151376"/>
+            <a:ext cx="2103120" cy="292608"/>
+          </a:xfrm>
+          <a:prstGeom prst="rect">
+            <a:avLst/>
+          </a:prstGeom>
+          <a:noFill/>
+        </p:spPr>
+        <p:txBody>
+          <a:bodyPr wrap="square" lIns="0" rIns="0" tIns="0" bIns="0">
+            <a:spAutoFit/>
+          </a:bodyPr>
+          <a:lstStyle/>
+          <a:p>
+            <a:pPr algn="l"/>
+            <a:r>
+              <a:rPr sz="1100" b="1" i="0">
+                <a:solidFill>
+                  <a:srgbClr val="4C72B0"/>
+                </a:solidFill>
+                <a:latin typeface="Times New Roman"/>
+              </a:rPr>
+              <a:t>Task Specification</a:t>
+            </a:r>
+          </a:p>
+        </p:txBody>
+      </p:sp>
+      <p:sp>
+        <p:nvSpPr>
+          <p:cNvPr id="51" name="TextBox 50"/>
+          <p:cNvSpPr txBox="1"/>
+          <p:nvPr/>
+        </p:nvSpPr>
+        <p:spPr>
+          <a:xfrm>
+            <a:off x="3602736" y="4498848"/>
+            <a:ext cx="2011680" cy="292608"/>
+          </a:xfrm>
+          <a:prstGeom prst="rect">
+            <a:avLst/>
+          </a:prstGeom>
+          <a:noFill/>
+        </p:spPr>
+        <p:txBody>
+          <a:bodyPr wrap="square" lIns="0" rIns="0" tIns="0" bIns="0">
+            <a:spAutoFit/>
+          </a:bodyPr>
+          <a:lstStyle/>
+          <a:p>
+            <a:pPr algn="l"/>
+            <a:r>
+              <a:rPr sz="1000" b="1" i="0">
+                <a:solidFill>
+                  <a:srgbClr val="4C72B0"/>
+                </a:solidFill>
+                <a:latin typeface="Times New Roman"/>
+              </a:rPr>
+              <a:t>✓ JOIN    ✓ GROUP BY</a:t>
+            </a:r>
+          </a:p>
+        </p:txBody>
+      </p:sp>
+      <p:sp>
+        <p:nvSpPr>
+          <p:cNvPr id="52" name="TextBox 51"/>
+          <p:cNvSpPr txBox="1"/>
+          <p:nvPr/>
+        </p:nvSpPr>
+        <p:spPr>
+          <a:xfrm>
+            <a:off x="3602736" y="4791456"/>
+            <a:ext cx="2011680" cy="292608"/>
+          </a:xfrm>
+          <a:prstGeom prst="rect">
+            <a:avLst/>
+          </a:prstGeom>
+          <a:noFill/>
+        </p:spPr>
+        <p:txBody>
+          <a:bodyPr wrap="square" lIns="0" rIns="0" tIns="0" bIns="0">
+            <a:spAutoFit/>
+          </a:bodyPr>
+          <a:lstStyle/>
+          <a:p>
+            <a:pPr algn="l"/>
+            <a:r>
+              <a:rPr sz="1000" b="1" i="0">
+                <a:solidFill>
+                  <a:srgbClr val="4C72B0"/>
+                </a:solidFill>
+                <a:latin typeface="Times New Roman"/>
+              </a:rPr>
+              <a:t>✓ FILTER  ✓ COUNT  ✓ SORT</a:t>
+            </a:r>
+          </a:p>
+        </p:txBody>
+      </p:sp>
+      <p:sp>
+        <p:nvSpPr>
+          <p:cNvPr id="53" name="TextBox 52"/>
+          <p:cNvSpPr txBox="1"/>
+          <p:nvPr/>
+        </p:nvSpPr>
+        <p:spPr>
+          <a:xfrm>
+            <a:off x="3602736" y="5084064"/>
+            <a:ext cx="2011680" cy="292608"/>
+          </a:xfrm>
+          <a:prstGeom prst="rect">
+            <a:avLst/>
+          </a:prstGeom>
+          <a:noFill/>
+        </p:spPr>
+        <p:txBody>
+          <a:bodyPr wrap="square" lIns="0" rIns="0" tIns="0" bIns="0">
+            <a:spAutoFit/>
+          </a:bodyPr>
+          <a:lstStyle/>
+          <a:p>
+            <a:pPr algn="l"/>
+            <a:r>
+              <a:rPr sz="1000" b="1" i="0">
+                <a:solidFill>
+                  <a:srgbClr val="C44E52"/>
+                </a:solidFill>
+                <a:latin typeface="Times New Roman"/>
+              </a:rPr>
+              <a:t>✗ PLOT   ✗ REGEX</a:t>
+            </a:r>
+          </a:p>
+        </p:txBody>
+      </p:sp>
+      <p:sp>
+        <p:nvSpPr>
+          <p:cNvPr id="54" name="TextBox 53"/>
+          <p:cNvSpPr txBox="1"/>
+          <p:nvPr/>
+        </p:nvSpPr>
+        <p:spPr>
+          <a:xfrm>
+            <a:off x="3493008" y="5394960"/>
+            <a:ext cx="2103120" cy="274320"/>
+          </a:xfrm>
+          <a:prstGeom prst="rect">
+            <a:avLst/>
+          </a:prstGeom>
+          <a:noFill/>
+        </p:spPr>
+        <p:txBody>
+          <a:bodyPr wrap="square" lIns="0" rIns="0" tIns="0" bIns="0">
+            <a:spAutoFit/>
+          </a:bodyPr>
+          <a:lstStyle/>
+          <a:p>
+            <a:pPr algn="l"/>
+            <a:r>
+              <a:rPr sz="850" b="0" i="0">
+                <a:solidFill>
+                  <a:srgbClr val="6B6A63"/>
+                </a:solidFill>
+                <a:latin typeface="Times New Roman"/>
+              </a:rPr>
+              <a:t>= what the k queries need, no more</a:t>
+            </a:r>
+          </a:p>
+        </p:txBody>
+      </p:sp>
+      <p:sp>
+        <p:nvSpPr>
+          <p:cNvPr id="55" name="Rounded Rectangle 54"/>
+          <p:cNvSpPr/>
+          <p:nvPr/>
+        </p:nvSpPr>
+        <p:spPr>
+          <a:xfrm>
+            <a:off x="6510528" y="1225295"/>
+            <a:ext cx="914400" cy="694944"/>
           </a:xfrm>
           <a:prstGeom prst="roundRect">
             <a:avLst>
@@ -4784,7 +5063,7 @@
           <a:solidFill>
             <a:srgbClr val="EEF2F9"/>
           </a:solidFill>
-          <a:ln w="17780">
+          <a:ln w="20320">
             <a:solidFill>
               <a:srgbClr val="4C72B0"/>
             </a:solidFill>
@@ -4792,98 +5071,275 @@
           <a:effectLst/>
         </p:spPr>
         <p:txBody>
-          <a:bodyPr rtlCol="0" anchor="ctr" lIns="9000" rIns="9000" tIns="4500" bIns="4500" wrap="square"/>
+          <a:bodyPr rtlCol="0" anchor="ctr"/>
+          <a:lstStyle/>
+          <a:p>
+            <a:pPr algn="ctr"/>
+          </a:p>
+        </p:txBody>
+      </p:sp>
+      <p:sp>
+        <p:nvSpPr>
+          <p:cNvPr id="56" name="Rectangle 55"/>
+          <p:cNvSpPr/>
+          <p:nvPr/>
+        </p:nvSpPr>
+        <p:spPr>
+          <a:xfrm>
+            <a:off x="6956755" y="1097279"/>
+            <a:ext cx="21945" cy="128016"/>
+          </a:xfrm>
+          <a:prstGeom prst="rect">
+            <a:avLst/>
+          </a:prstGeom>
+          <a:solidFill>
+            <a:srgbClr val="4C72B0"/>
+          </a:solidFill>
+          <a:ln>
+            <a:noFill/>
+          </a:ln>
+          <a:effectLst/>
+        </p:spPr>
+        <p:txBody>
+          <a:bodyPr rtlCol="0" anchor="ctr"/>
+          <a:lstStyle/>
+          <a:p>
+            <a:pPr algn="ctr"/>
+          </a:p>
+        </p:txBody>
+      </p:sp>
+      <p:sp>
+        <p:nvSpPr>
+          <p:cNvPr id="57" name="Oval 56"/>
+          <p:cNvSpPr/>
+          <p:nvPr/>
+        </p:nvSpPr>
+        <p:spPr>
+          <a:xfrm>
+            <a:off x="6922008" y="1005839"/>
+            <a:ext cx="91440" cy="91440"/>
+          </a:xfrm>
+          <a:prstGeom prst="ellipse">
+            <a:avLst/>
+          </a:prstGeom>
+          <a:solidFill>
+            <a:srgbClr val="4C72B0"/>
+          </a:solidFill>
+          <a:ln>
+            <a:noFill/>
+          </a:ln>
+          <a:effectLst/>
+        </p:spPr>
+        <p:txBody>
+          <a:bodyPr rtlCol="0" anchor="ctr"/>
+          <a:lstStyle/>
+          <a:p>
+            <a:pPr algn="ctr"/>
+          </a:p>
+        </p:txBody>
+      </p:sp>
+      <p:sp>
+        <p:nvSpPr>
+          <p:cNvPr id="58" name="Oval 57"/>
+          <p:cNvSpPr/>
+          <p:nvPr/>
+        </p:nvSpPr>
+        <p:spPr>
+          <a:xfrm>
+            <a:off x="6761988" y="1462125"/>
+            <a:ext cx="82296" cy="82296"/>
+          </a:xfrm>
+          <a:prstGeom prst="ellipse">
+            <a:avLst/>
+          </a:prstGeom>
+          <a:solidFill>
+            <a:srgbClr val="4C72B0"/>
+          </a:solidFill>
+          <a:ln>
+            <a:noFill/>
+          </a:ln>
+          <a:effectLst/>
+        </p:spPr>
+        <p:txBody>
+          <a:bodyPr rtlCol="0" anchor="ctr"/>
+          <a:lstStyle/>
+          <a:p>
+            <a:pPr algn="ctr"/>
+          </a:p>
+        </p:txBody>
+      </p:sp>
+      <p:sp>
+        <p:nvSpPr>
+          <p:cNvPr id="59" name="Oval 58"/>
+          <p:cNvSpPr/>
+          <p:nvPr/>
+        </p:nvSpPr>
+        <p:spPr>
+          <a:xfrm>
+            <a:off x="7091172" y="1462125"/>
+            <a:ext cx="82296" cy="82296"/>
+          </a:xfrm>
+          <a:prstGeom prst="ellipse">
+            <a:avLst/>
+          </a:prstGeom>
+          <a:solidFill>
+            <a:srgbClr val="4C72B0"/>
+          </a:solidFill>
+          <a:ln>
+            <a:noFill/>
+          </a:ln>
+          <a:effectLst/>
+        </p:spPr>
+        <p:txBody>
+          <a:bodyPr rtlCol="0" anchor="ctr"/>
+          <a:lstStyle/>
+          <a:p>
+            <a:pPr algn="ctr"/>
+          </a:p>
+        </p:txBody>
+      </p:sp>
+      <p:sp>
+        <p:nvSpPr>
+          <p:cNvPr id="60" name="Rounded Rectangle 59"/>
+          <p:cNvSpPr/>
+          <p:nvPr/>
+        </p:nvSpPr>
+        <p:spPr>
+          <a:xfrm>
+            <a:off x="6839712" y="1656161"/>
+            <a:ext cx="256032" cy="27432"/>
+          </a:xfrm>
+          <a:prstGeom prst="roundRect">
+            <a:avLst>
+              <a:gd name="adj" fmla="val 50000"/>
+            </a:avLst>
+          </a:prstGeom>
+          <a:solidFill>
+            <a:srgbClr val="4C72B0"/>
+          </a:solidFill>
+          <a:ln>
+            <a:noFill/>
+          </a:ln>
+          <a:effectLst/>
+        </p:spPr>
+        <p:txBody>
+          <a:bodyPr rtlCol="0" anchor="ctr"/>
+          <a:lstStyle/>
+          <a:p>
+            <a:pPr algn="ctr"/>
+          </a:p>
+        </p:txBody>
+      </p:sp>
+      <p:sp>
+        <p:nvSpPr>
+          <p:cNvPr id="61" name="TextBox 60"/>
+          <p:cNvSpPr txBox="1"/>
+          <p:nvPr/>
+        </p:nvSpPr>
+        <p:spPr>
+          <a:xfrm>
+            <a:off x="6190488" y="1956816"/>
+            <a:ext cx="1554480" cy="256032"/>
+          </a:xfrm>
+          <a:prstGeom prst="rect">
+            <a:avLst/>
+          </a:prstGeom>
+          <a:noFill/>
+        </p:spPr>
+        <p:txBody>
+          <a:bodyPr wrap="square" lIns="0" rIns="0" tIns="0" bIns="0">
+            <a:spAutoFit/>
+          </a:bodyPr>
           <a:lstStyle/>
           <a:p>
             <a:pPr algn="ctr"/>
             <a:r>
               <a:rPr sz="1000" b="1" i="0">
                 <a:solidFill>
-                  <a:srgbClr val="4C72B0"/>
+                  <a:srgbClr val="1F1F1E"/>
                 </a:solidFill>
                 <a:latin typeface="Times New Roman"/>
               </a:rPr>
-              <a:t>specification = the atoms</a:t>
-            </a:r>
-          </a:p>
-          <a:p>
-            <a:pPr algn="ctr"/>
-            <a:r>
-              <a:rPr sz="1000" b="1" i="0">
-                <a:solidFill>
-                  <a:srgbClr val="4C72B0"/>
+              <a:t>Teacher LLM</a:t>
+            </a:r>
+          </a:p>
+        </p:txBody>
+      </p:sp>
+      <p:sp>
+        <p:nvSpPr>
+          <p:cNvPr id="62" name="Down Arrow 61"/>
+          <p:cNvSpPr/>
+          <p:nvPr/>
+        </p:nvSpPr>
+        <p:spPr>
+          <a:xfrm>
+            <a:off x="6903720" y="2157984"/>
+            <a:ext cx="146304" cy="310896"/>
+          </a:xfrm>
+          <a:prstGeom prst="downArrow">
+            <a:avLst/>
+          </a:prstGeom>
+          <a:solidFill>
+            <a:srgbClr val="8C8C8C"/>
+          </a:solidFill>
+          <a:ln>
+            <a:noFill/>
+          </a:ln>
+          <a:effectLst/>
+        </p:spPr>
+        <p:txBody>
+          <a:bodyPr rtlCol="0" anchor="ctr"/>
+          <a:lstStyle/>
+          <a:p>
+            <a:pPr algn="ctr"/>
+          </a:p>
+        </p:txBody>
+      </p:sp>
+      <p:sp>
+        <p:nvSpPr>
+          <p:cNvPr id="63" name="TextBox 62"/>
+          <p:cNvSpPr txBox="1"/>
+          <p:nvPr/>
+        </p:nvSpPr>
+        <p:spPr>
+          <a:xfrm>
+            <a:off x="7095744" y="2176272"/>
+            <a:ext cx="914400" cy="256032"/>
+          </a:xfrm>
+          <a:prstGeom prst="rect">
+            <a:avLst/>
+          </a:prstGeom>
+          <a:noFill/>
+        </p:spPr>
+        <p:txBody>
+          <a:bodyPr wrap="square" lIns="0" rIns="0" tIns="0" bIns="0">
+            <a:spAutoFit/>
+          </a:bodyPr>
+          <a:lstStyle/>
+          <a:p>
+            <a:pPr algn="l"/>
+            <a:r>
+              <a:rPr sz="950" b="0" i="0">
+                <a:solidFill>
+                  <a:srgbClr val="6B6A63"/>
                 </a:solidFill>
                 <a:latin typeface="Times New Roman"/>
               </a:rPr>
-              <a:t>your k queries need</a:t>
-            </a:r>
-          </a:p>
-        </p:txBody>
-      </p:sp>
-      <p:sp>
-        <p:nvSpPr>
-          <p:cNvPr id="46" name="Right Arrow 45"/>
-          <p:cNvSpPr/>
-          <p:nvPr/>
-        </p:nvSpPr>
-        <p:spPr>
-          <a:xfrm>
-            <a:off x="7114032" y="2596896"/>
-            <a:ext cx="585216" cy="658368"/>
-          </a:xfrm>
-          <a:prstGeom prst="rightArrow">
-            <a:avLst>
-              <a:gd name="adj1" fmla="val 62000"/>
-              <a:gd name="adj2" fmla="val 42000"/>
-            </a:avLst>
-          </a:prstGeom>
-          <a:solidFill>
-            <a:srgbClr val="8C8C8C"/>
-          </a:solidFill>
-          <a:ln>
-            <a:noFill/>
-          </a:ln>
-          <a:effectLst/>
-        </p:spPr>
-        <p:txBody>
-          <a:bodyPr rtlCol="0" anchor="ctr" lIns="9000" rIns="9000" tIns="4500" bIns="4500" wrap="square"/>
-          <a:lstStyle/>
-          <a:p>
-            <a:pPr algn="ctr"/>
-            <a:r>
-              <a:rPr sz="900" b="1" i="0">
-                <a:solidFill>
-                  <a:srgbClr val="FFFFFF"/>
-                </a:solidFill>
-                <a:latin typeface="Times New Roman"/>
-              </a:rPr>
-              <a:t>score by</a:t>
-            </a:r>
-          </a:p>
-          <a:p>
-            <a:pPr algn="ctr"/>
-            <a:r>
-              <a:rPr sz="900" b="1" i="0">
-                <a:solidFill>
-                  <a:srgbClr val="FFFFFF"/>
-                </a:solidFill>
-                <a:latin typeface="Times New Roman"/>
-              </a:rPr>
-              <a:t>supply</a:t>
-            </a:r>
-          </a:p>
-        </p:txBody>
-      </p:sp>
-      <p:sp>
-        <p:nvSpPr>
-          <p:cNvPr id="47" name="Rounded Rectangle 46"/>
-          <p:cNvSpPr/>
-          <p:nvPr/>
-        </p:nvSpPr>
-        <p:spPr>
-          <a:xfrm>
-            <a:off x="7895844" y="822960"/>
-            <a:ext cx="960120" cy="731520"/>
+              <a:t>traces</a:t>
+            </a:r>
+          </a:p>
+        </p:txBody>
+      </p:sp>
+      <p:sp>
+        <p:nvSpPr>
+          <p:cNvPr id="64" name="Rounded Rectangle 63"/>
+          <p:cNvSpPr/>
+          <p:nvPr/>
+        </p:nvSpPr>
+        <p:spPr>
+          <a:xfrm>
+            <a:off x="6309360" y="2395728"/>
+            <a:ext cx="1481328" cy="713232"/>
           </a:xfrm>
           <a:prstGeom prst="roundRect">
             <a:avLst>
@@ -4891,6 +5347,625 @@
             </a:avLst>
           </a:prstGeom>
           <a:solidFill>
+            <a:srgbClr val="F7F6F2"/>
+          </a:solidFill>
+          <a:ln w="16510">
+            <a:solidFill>
+              <a:srgbClr val="4C72B0"/>
+            </a:solidFill>
+          </a:ln>
+          <a:effectLst/>
+        </p:spPr>
+        <p:txBody>
+          <a:bodyPr rtlCol="0" anchor="ctr"/>
+          <a:lstStyle/>
+          <a:p>
+            <a:pPr algn="ctr"/>
+          </a:p>
+        </p:txBody>
+      </p:sp>
+      <p:sp>
+        <p:nvSpPr>
+          <p:cNvPr id="65" name="TextBox 64"/>
+          <p:cNvSpPr txBox="1"/>
+          <p:nvPr/>
+        </p:nvSpPr>
+        <p:spPr>
+          <a:xfrm>
+            <a:off x="6400800" y="2450592"/>
+            <a:ext cx="1371600" cy="384048"/>
+          </a:xfrm>
+          <a:prstGeom prst="rect">
+            <a:avLst/>
+          </a:prstGeom>
+          <a:noFill/>
+        </p:spPr>
+        <p:txBody>
+          <a:bodyPr wrap="square" lIns="0" rIns="0" tIns="0" bIns="0">
+            <a:spAutoFit/>
+          </a:bodyPr>
+          <a:lstStyle/>
+          <a:p>
+            <a:pPr algn="l"/>
+            <a:r>
+              <a:rPr sz="700" b="0" i="0">
+                <a:solidFill>
+                  <a:srgbClr val="1F1F1E"/>
+                </a:solidFill>
+                <a:latin typeface="Consolas"/>
+              </a:rPr>
+              <a:t>SELECT c, COUNT(*)</a:t>
+            </a:r>
+          </a:p>
+          <a:p>
+            <a:pPr algn="l"/>
+            <a:r>
+              <a:rPr sz="700" b="0" i="0">
+                <a:solidFill>
+                  <a:srgbClr val="1F1F1E"/>
+                </a:solidFill>
+                <a:latin typeface="Consolas"/>
+              </a:rPr>
+              <a:t> FROM a JOIN b …</a:t>
+            </a:r>
+          </a:p>
+        </p:txBody>
+      </p:sp>
+      <p:sp>
+        <p:nvSpPr>
+          <p:cNvPr id="66" name="Rounded Rectangle 65"/>
+          <p:cNvSpPr/>
+          <p:nvPr/>
+        </p:nvSpPr>
+        <p:spPr>
+          <a:xfrm>
+            <a:off x="6400800" y="2834640"/>
+            <a:ext cx="731520" cy="201168"/>
+          </a:xfrm>
+          <a:prstGeom prst="roundRect">
+            <a:avLst>
+              <a:gd name="adj" fmla="val 45000"/>
+            </a:avLst>
+          </a:prstGeom>
+          <a:solidFill>
+            <a:srgbClr val="4C72B0"/>
+          </a:solidFill>
+          <a:ln w="9525">
+            <a:solidFill>
+              <a:srgbClr val="FFFFFF"/>
+            </a:solidFill>
+          </a:ln>
+          <a:effectLst/>
+        </p:spPr>
+        <p:txBody>
+          <a:bodyPr rtlCol="0" anchor="ctr" lIns="9000" rIns="9000" tIns="4500" bIns="4500" wrap="square"/>
+          <a:lstStyle/>
+          <a:p>
+            <a:pPr algn="ctr"/>
+            <a:r>
+              <a:rPr sz="650" b="1" i="0">
+                <a:solidFill>
+                  <a:srgbClr val="FFFFFF"/>
+                </a:solidFill>
+                <a:latin typeface="Times New Roman"/>
+              </a:rPr>
+              <a:t>JOIN</a:t>
+            </a:r>
+          </a:p>
+        </p:txBody>
+      </p:sp>
+      <p:cxnSp>
+        <p:nvCxnSpPr>
+          <p:cNvPr id="67" name="Connector 66"/>
+          <p:cNvCxnSpPr/>
+          <p:nvPr/>
+        </p:nvCxnSpPr>
+        <p:spPr>
+          <a:xfrm>
+            <a:off x="7827264" y="2724912"/>
+            <a:ext cx="384048" cy="384048"/>
+          </a:xfrm>
+          <a:prstGeom prst="line">
+            <a:avLst/>
+          </a:prstGeom>
+          <a:ln w="27940">
+            <a:solidFill>
+              <a:srgbClr val="4C72B0"/>
+            </a:solidFill>
+            <a:tailEnd type="triangle" w="med" len="med"/>
+          </a:ln>
+          <a:effectLst/>
+        </p:spPr>
+      </p:cxnSp>
+      <p:sp>
+        <p:nvSpPr>
+          <p:cNvPr id="68" name="Rounded Rectangle 67"/>
+          <p:cNvSpPr/>
+          <p:nvPr/>
+        </p:nvSpPr>
+        <p:spPr>
+          <a:xfrm>
+            <a:off x="6309360" y="3182112"/>
+            <a:ext cx="1481328" cy="713232"/>
+          </a:xfrm>
+          <a:prstGeom prst="roundRect">
+            <a:avLst>
+              <a:gd name="adj" fmla="val 25000"/>
+            </a:avLst>
+          </a:prstGeom>
+          <a:solidFill>
+            <a:srgbClr val="F7F6F2"/>
+          </a:solidFill>
+          <a:ln w="16510">
+            <a:solidFill>
+              <a:srgbClr val="4C72B0"/>
+            </a:solidFill>
+          </a:ln>
+          <a:effectLst/>
+        </p:spPr>
+        <p:txBody>
+          <a:bodyPr rtlCol="0" anchor="ctr"/>
+          <a:lstStyle/>
+          <a:p>
+            <a:pPr algn="ctr"/>
+          </a:p>
+        </p:txBody>
+      </p:sp>
+      <p:sp>
+        <p:nvSpPr>
+          <p:cNvPr id="69" name="TextBox 68"/>
+          <p:cNvSpPr txBox="1"/>
+          <p:nvPr/>
+        </p:nvSpPr>
+        <p:spPr>
+          <a:xfrm>
+            <a:off x="6400800" y="3236976"/>
+            <a:ext cx="1371600" cy="384048"/>
+          </a:xfrm>
+          <a:prstGeom prst="rect">
+            <a:avLst/>
+          </a:prstGeom>
+          <a:noFill/>
+        </p:spPr>
+        <p:txBody>
+          <a:bodyPr wrap="square" lIns="0" rIns="0" tIns="0" bIns="0">
+            <a:spAutoFit/>
+          </a:bodyPr>
+          <a:lstStyle/>
+          <a:p>
+            <a:pPr algn="l"/>
+            <a:r>
+              <a:rPr sz="700" b="0" i="0">
+                <a:solidFill>
+                  <a:srgbClr val="1F1F1E"/>
+                </a:solidFill>
+                <a:latin typeface="Consolas"/>
+              </a:rPr>
+              <a:t>df.groupby('city')</a:t>
+            </a:r>
+          </a:p>
+          <a:p>
+            <a:pPr algn="l"/>
+            <a:r>
+              <a:rPr sz="700" b="0" i="0">
+                <a:solidFill>
+                  <a:srgbClr val="1F1F1E"/>
+                </a:solidFill>
+                <a:latin typeface="Consolas"/>
+              </a:rPr>
+              <a:t> .dues.sum()</a:t>
+            </a:r>
+          </a:p>
+        </p:txBody>
+      </p:sp>
+      <p:sp>
+        <p:nvSpPr>
+          <p:cNvPr id="70" name="Rounded Rectangle 69"/>
+          <p:cNvSpPr/>
+          <p:nvPr/>
+        </p:nvSpPr>
+        <p:spPr>
+          <a:xfrm>
+            <a:off x="6400800" y="3621024"/>
+            <a:ext cx="731520" cy="201168"/>
+          </a:xfrm>
+          <a:prstGeom prst="roundRect">
+            <a:avLst>
+              <a:gd name="adj" fmla="val 45000"/>
+            </a:avLst>
+          </a:prstGeom>
+          <a:solidFill>
+            <a:srgbClr val="7BA7D7"/>
+          </a:solidFill>
+          <a:ln w="9525">
+            <a:solidFill>
+              <a:srgbClr val="FFFFFF"/>
+            </a:solidFill>
+          </a:ln>
+          <a:effectLst/>
+        </p:spPr>
+        <p:txBody>
+          <a:bodyPr rtlCol="0" anchor="ctr" lIns="9000" rIns="9000" tIns="4500" bIns="4500" wrap="square"/>
+          <a:lstStyle/>
+          <a:p>
+            <a:pPr algn="ctr"/>
+            <a:r>
+              <a:rPr sz="650" b="1" i="0">
+                <a:solidFill>
+                  <a:srgbClr val="FFFFFF"/>
+                </a:solidFill>
+                <a:latin typeface="Times New Roman"/>
+              </a:rPr>
+              <a:t>GROUP BY</a:t>
+            </a:r>
+          </a:p>
+        </p:txBody>
+      </p:sp>
+      <p:cxnSp>
+        <p:nvCxnSpPr>
+          <p:cNvPr id="71" name="Connector 70"/>
+          <p:cNvCxnSpPr/>
+          <p:nvPr/>
+        </p:nvCxnSpPr>
+        <p:spPr>
+          <a:xfrm flipV="1">
+            <a:off x="7827264" y="3218688"/>
+            <a:ext cx="384048" cy="292608"/>
+          </a:xfrm>
+          <a:prstGeom prst="line">
+            <a:avLst/>
+          </a:prstGeom>
+          <a:ln w="27940">
+            <a:solidFill>
+              <a:srgbClr val="4C72B0"/>
+            </a:solidFill>
+            <a:tailEnd type="triangle" w="med" len="med"/>
+          </a:ln>
+          <a:effectLst/>
+        </p:spPr>
+      </p:cxnSp>
+      <p:sp>
+        <p:nvSpPr>
+          <p:cNvPr id="72" name="Rounded Rectangle 71"/>
+          <p:cNvSpPr/>
+          <p:nvPr/>
+        </p:nvSpPr>
+        <p:spPr>
+          <a:xfrm>
+            <a:off x="6309360" y="3968496"/>
+            <a:ext cx="1481328" cy="713232"/>
+          </a:xfrm>
+          <a:prstGeom prst="roundRect">
+            <a:avLst>
+              <a:gd name="adj" fmla="val 25000"/>
+            </a:avLst>
+          </a:prstGeom>
+          <a:solidFill>
+            <a:srgbClr val="E8E6E1"/>
+          </a:solidFill>
+          <a:ln w="16510">
+            <a:solidFill>
+              <a:srgbClr val="8C8C8C"/>
+            </a:solidFill>
+          </a:ln>
+          <a:effectLst/>
+        </p:spPr>
+        <p:txBody>
+          <a:bodyPr rtlCol="0" anchor="ctr"/>
+          <a:lstStyle/>
+          <a:p>
+            <a:pPr algn="ctr"/>
+          </a:p>
+        </p:txBody>
+      </p:sp>
+      <p:sp>
+        <p:nvSpPr>
+          <p:cNvPr id="73" name="TextBox 72"/>
+          <p:cNvSpPr txBox="1"/>
+          <p:nvPr/>
+        </p:nvSpPr>
+        <p:spPr>
+          <a:xfrm>
+            <a:off x="6400800" y="4023359"/>
+            <a:ext cx="1371600" cy="384048"/>
+          </a:xfrm>
+          <a:prstGeom prst="rect">
+            <a:avLst/>
+          </a:prstGeom>
+          <a:noFill/>
+        </p:spPr>
+        <p:txBody>
+          <a:bodyPr wrap="square" lIns="0" rIns="0" tIns="0" bIns="0">
+            <a:spAutoFit/>
+          </a:bodyPr>
+          <a:lstStyle/>
+          <a:p>
+            <a:pPr algn="l"/>
+            <a:r>
+              <a:rPr sz="700" b="0" i="0">
+                <a:solidFill>
+                  <a:srgbClr val="1F1F1E"/>
+                </a:solidFill>
+                <a:latin typeface="Consolas"/>
+              </a:rPr>
+              <a:t>plt.plot(revenue)</a:t>
+            </a:r>
+          </a:p>
+        </p:txBody>
+      </p:sp>
+      <p:sp>
+        <p:nvSpPr>
+          <p:cNvPr id="74" name="Rounded Rectangle 73"/>
+          <p:cNvSpPr/>
+          <p:nvPr/>
+        </p:nvSpPr>
+        <p:spPr>
+          <a:xfrm>
+            <a:off x="6400800" y="4407408"/>
+            <a:ext cx="731520" cy="201168"/>
+          </a:xfrm>
+          <a:prstGeom prst="roundRect">
+            <a:avLst>
+              <a:gd name="adj" fmla="val 45000"/>
+            </a:avLst>
+          </a:prstGeom>
+          <a:solidFill>
+            <a:srgbClr val="DD8452"/>
+          </a:solidFill>
+          <a:ln w="9525">
+            <a:solidFill>
+              <a:srgbClr val="FFFFFF"/>
+            </a:solidFill>
+          </a:ln>
+          <a:effectLst/>
+        </p:spPr>
+        <p:txBody>
+          <a:bodyPr rtlCol="0" anchor="ctr" lIns="9000" rIns="9000" tIns="4500" bIns="4500" wrap="square"/>
+          <a:lstStyle/>
+          <a:p>
+            <a:pPr algn="ctr"/>
+            <a:r>
+              <a:rPr sz="650" b="1" i="0">
+                <a:solidFill>
+                  <a:srgbClr val="FFFFFF"/>
+                </a:solidFill>
+                <a:latin typeface="Times New Roman"/>
+              </a:rPr>
+              <a:t>PLOT</a:t>
+            </a:r>
+          </a:p>
+        </p:txBody>
+      </p:sp>
+      <p:cxnSp>
+        <p:nvCxnSpPr>
+          <p:cNvPr id="75" name="Connector 74"/>
+          <p:cNvCxnSpPr/>
+          <p:nvPr/>
+        </p:nvCxnSpPr>
+        <p:spPr>
+          <a:xfrm flipV="1">
+            <a:off x="6254496" y="3913632"/>
+            <a:ext cx="1664208" cy="822960"/>
+          </a:xfrm>
+          <a:prstGeom prst="line">
+            <a:avLst/>
+          </a:prstGeom>
+          <a:ln w="27940">
+            <a:solidFill>
+              <a:srgbClr val="C44E52"/>
+            </a:solidFill>
+          </a:ln>
+          <a:effectLst/>
+        </p:spPr>
+      </p:cxnSp>
+      <p:sp>
+        <p:nvSpPr>
+          <p:cNvPr id="76" name="TextBox 75"/>
+          <p:cNvSpPr txBox="1"/>
+          <p:nvPr/>
+        </p:nvSpPr>
+        <p:spPr>
+          <a:xfrm>
+            <a:off x="6236208" y="4809744"/>
+            <a:ext cx="1828800" cy="502920"/>
+          </a:xfrm>
+          <a:prstGeom prst="rect">
+            <a:avLst/>
+          </a:prstGeom>
+          <a:noFill/>
+        </p:spPr>
+        <p:txBody>
+          <a:bodyPr wrap="square" lIns="0" rIns="0" tIns="0" bIns="0">
+            <a:spAutoFit/>
+          </a:bodyPr>
+          <a:lstStyle/>
+          <a:p>
+            <a:pPr algn="ctr"/>
+            <a:r>
+              <a:rPr sz="900" b="1" i="0">
+                <a:solidFill>
+                  <a:srgbClr val="C44E52"/>
+                </a:solidFill>
+                <a:latin typeface="Times New Roman"/>
+              </a:rPr>
+              <a:t>rejected: supplies</a:t>
+            </a:r>
+          </a:p>
+          <a:p>
+            <a:pPr algn="ctr"/>
+            <a:r>
+              <a:rPr sz="900" b="1" i="0">
+                <a:solidFill>
+                  <a:srgbClr val="C44E52"/>
+                </a:solidFill>
+                <a:latin typeface="Times New Roman"/>
+              </a:rPr>
+              <a:t>PLOT, off the spec</a:t>
+            </a:r>
+          </a:p>
+        </p:txBody>
+      </p:sp>
+      <p:cxnSp>
+        <p:nvCxnSpPr>
+          <p:cNvPr id="77" name="Connector 76"/>
+          <p:cNvCxnSpPr/>
+          <p:nvPr/>
+        </p:nvCxnSpPr>
+        <p:spPr>
+          <a:xfrm>
+            <a:off x="8156448" y="2423160"/>
+            <a:ext cx="329184" cy="1463040"/>
+          </a:xfrm>
+          <a:prstGeom prst="line">
+            <a:avLst/>
+          </a:prstGeom>
+          <a:ln w="33020">
+            <a:solidFill>
+              <a:srgbClr val="8C8C8C"/>
+            </a:solidFill>
+          </a:ln>
+          <a:effectLst/>
+        </p:spPr>
+      </p:cxnSp>
+      <p:cxnSp>
+        <p:nvCxnSpPr>
+          <p:cNvPr id="78" name="Connector 77"/>
+          <p:cNvCxnSpPr/>
+          <p:nvPr/>
+        </p:nvCxnSpPr>
+        <p:spPr>
+          <a:xfrm flipH="1">
+            <a:off x="8723376" y="2423160"/>
+            <a:ext cx="329184" cy="1463040"/>
+          </a:xfrm>
+          <a:prstGeom prst="line">
+            <a:avLst/>
+          </a:prstGeom>
+          <a:ln w="33020">
+            <a:solidFill>
+              <a:srgbClr val="8C8C8C"/>
+            </a:solidFill>
+          </a:ln>
+          <a:effectLst/>
+        </p:spPr>
+      </p:cxnSp>
+      <p:sp>
+        <p:nvSpPr>
+          <p:cNvPr id="79" name="TextBox 78"/>
+          <p:cNvSpPr txBox="1"/>
+          <p:nvPr/>
+        </p:nvSpPr>
+        <p:spPr>
+          <a:xfrm>
+            <a:off x="8631936" y="2487168"/>
+            <a:ext cx="548640" cy="274320"/>
+          </a:xfrm>
+          <a:prstGeom prst="rect">
+            <a:avLst/>
+          </a:prstGeom>
+          <a:noFill/>
+        </p:spPr>
+        <p:txBody>
+          <a:bodyPr wrap="square" lIns="0" rIns="0" tIns="0" bIns="0">
+            <a:spAutoFit/>
+          </a:bodyPr>
+          <a:lstStyle/>
+          <a:p>
+            <a:pPr algn="ctr"/>
+            <a:r>
+              <a:rPr sz="1400" b="1" i="0">
+                <a:solidFill>
+                  <a:srgbClr val="C44E52"/>
+                </a:solidFill>
+                <a:latin typeface="Times New Roman"/>
+              </a:rPr>
+              <a:t>λ</a:t>
+            </a:r>
+          </a:p>
+        </p:txBody>
+      </p:sp>
+      <p:sp>
+        <p:nvSpPr>
+          <p:cNvPr id="80" name="TextBox 79"/>
+          <p:cNvSpPr txBox="1"/>
+          <p:nvPr/>
+        </p:nvSpPr>
+        <p:spPr>
+          <a:xfrm>
+            <a:off x="8193024" y="2121408"/>
+            <a:ext cx="914400" cy="274320"/>
+          </a:xfrm>
+          <a:prstGeom prst="rect">
+            <a:avLst/>
+          </a:prstGeom>
+          <a:noFill/>
+        </p:spPr>
+        <p:txBody>
+          <a:bodyPr wrap="square" lIns="0" rIns="0" tIns="0" bIns="0">
+            <a:spAutoFit/>
+          </a:bodyPr>
+          <a:lstStyle/>
+          <a:p>
+            <a:pPr algn="ctr"/>
+            <a:r>
+              <a:rPr sz="900" b="0" i="0">
+                <a:solidFill>
+                  <a:srgbClr val="6B6A63"/>
+                </a:solidFill>
+                <a:latin typeface="Times New Roman"/>
+              </a:rPr>
+              <a:t>budget</a:t>
+            </a:r>
+          </a:p>
+        </p:txBody>
+      </p:sp>
+      <p:sp>
+        <p:nvSpPr>
+          <p:cNvPr id="81" name="Down Arrow 80"/>
+          <p:cNvSpPr/>
+          <p:nvPr/>
+        </p:nvSpPr>
+        <p:spPr>
+          <a:xfrm>
+            <a:off x="8522208" y="3913632"/>
+            <a:ext cx="164592" cy="310896"/>
+          </a:xfrm>
+          <a:prstGeom prst="downArrow">
+            <a:avLst/>
+          </a:prstGeom>
+          <a:solidFill>
+            <a:srgbClr val="4C72B0"/>
+          </a:solidFill>
+          <a:ln>
+            <a:noFill/>
+          </a:ln>
+          <a:effectLst/>
+        </p:spPr>
+        <p:txBody>
+          <a:bodyPr rtlCol="0" anchor="ctr"/>
+          <a:lstStyle/>
+          <a:p>
+            <a:pPr algn="ctr"/>
+          </a:p>
+        </p:txBody>
+      </p:sp>
+      <p:sp>
+        <p:nvSpPr>
+          <p:cNvPr id="82" name="Rounded Rectangle 81"/>
+          <p:cNvSpPr/>
+          <p:nvPr/>
+        </p:nvSpPr>
+        <p:spPr>
+          <a:xfrm>
+            <a:off x="8055863" y="4398264"/>
+            <a:ext cx="859536" cy="676656"/>
+          </a:xfrm>
+          <a:prstGeom prst="roundRect">
+            <a:avLst>
+              <a:gd name="adj" fmla="val 25000"/>
+            </a:avLst>
+          </a:prstGeom>
+          <a:solidFill>
             <a:srgbClr val="EEF2F9"/>
           </a:solidFill>
           <a:ln w="20320">
@@ -4910,13 +5985,13 @@
       </p:sp>
       <p:sp>
         <p:nvSpPr>
-          <p:cNvPr id="48" name="Rectangle 47"/>
-          <p:cNvSpPr/>
-          <p:nvPr/>
-        </p:nvSpPr>
-        <p:spPr>
-          <a:xfrm>
-            <a:off x="8364931" y="694944"/>
+          <p:cNvPr id="83" name="Rectangle 82"/>
+          <p:cNvSpPr/>
+          <p:nvPr/>
+        </p:nvSpPr>
+        <p:spPr>
+          <a:xfrm>
+            <a:off x="8474659" y="4270248"/>
             <a:ext cx="21945" cy="128016"/>
           </a:xfrm>
           <a:prstGeom prst="rect">
@@ -4940,13 +6015,13 @@
       </p:sp>
       <p:sp>
         <p:nvSpPr>
-          <p:cNvPr id="49" name="Oval 48"/>
-          <p:cNvSpPr/>
-          <p:nvPr/>
-        </p:nvSpPr>
-        <p:spPr>
-          <a:xfrm>
-            <a:off x="8330183" y="603504"/>
+          <p:cNvPr id="84" name="Oval 83"/>
+          <p:cNvSpPr/>
+          <p:nvPr/>
+        </p:nvSpPr>
+        <p:spPr>
+          <a:xfrm>
+            <a:off x="8439911" y="4178807"/>
             <a:ext cx="91440" cy="91440"/>
           </a:xfrm>
           <a:prstGeom prst="ellipse">
@@ -4970,13 +6045,13 @@
       </p:sp>
       <p:sp>
         <p:nvSpPr>
-          <p:cNvPr id="50" name="Oval 49"/>
-          <p:cNvSpPr/>
-          <p:nvPr/>
-        </p:nvSpPr>
-        <p:spPr>
-          <a:xfrm>
-            <a:off x="8161934" y="1074420"/>
+          <p:cNvPr id="85" name="Oval 84"/>
+          <p:cNvSpPr/>
+          <p:nvPr/>
+        </p:nvSpPr>
+        <p:spPr>
+          <a:xfrm>
+            <a:off x="8289767" y="4627778"/>
             <a:ext cx="82296" cy="82296"/>
           </a:xfrm>
           <a:prstGeom prst="ellipse">
@@ -5000,13 +6075,13 @@
       </p:sp>
       <p:sp>
         <p:nvSpPr>
-          <p:cNvPr id="51" name="Oval 50"/>
-          <p:cNvSpPr/>
-          <p:nvPr/>
-        </p:nvSpPr>
-        <p:spPr>
-          <a:xfrm>
-            <a:off x="8507577" y="1074420"/>
+          <p:cNvPr id="86" name="Oval 85"/>
+          <p:cNvSpPr/>
+          <p:nvPr/>
+        </p:nvSpPr>
+        <p:spPr>
+          <a:xfrm>
+            <a:off x="8599200" y="4627778"/>
             <a:ext cx="82296" cy="82296"/>
           </a:xfrm>
           <a:prstGeom prst="ellipse">
@@ -5030,14 +6105,14 @@
       </p:sp>
       <p:sp>
         <p:nvSpPr>
-          <p:cNvPr id="52" name="Rounded Rectangle 51"/>
-          <p:cNvSpPr/>
-          <p:nvPr/>
-        </p:nvSpPr>
-        <p:spPr>
-          <a:xfrm>
-            <a:off x="8241487" y="1276502"/>
-            <a:ext cx="268833" cy="27432"/>
+          <p:cNvPr id="87" name="Rounded Rectangle 86"/>
+          <p:cNvSpPr/>
+          <p:nvPr/>
+        </p:nvSpPr>
+        <p:spPr>
+          <a:xfrm>
+            <a:off x="8365296" y="4817790"/>
+            <a:ext cx="240670" cy="27432"/>
           </a:xfrm>
           <a:prstGeom prst="roundRect">
             <a:avLst>
@@ -5062,14 +6137,14 @@
       </p:sp>
       <p:sp>
         <p:nvSpPr>
-          <p:cNvPr id="53" name="TextBox 52"/>
+          <p:cNvPr id="88" name="TextBox 87"/>
           <p:cNvSpPr txBox="1"/>
           <p:nvPr/>
         </p:nvSpPr>
         <p:spPr>
           <a:xfrm>
-            <a:off x="7575804" y="1591056"/>
-            <a:ext cx="1600200" cy="256032"/>
+            <a:off x="7735823" y="5111496"/>
+            <a:ext cx="1499616" cy="256032"/>
           </a:xfrm>
           <a:prstGeom prst="rect">
             <a:avLst/>
@@ -5084,92 +6159,27 @@
           <a:p>
             <a:pPr algn="ctr"/>
             <a:r>
-              <a:rPr sz="1050" b="1" i="0">
+              <a:rPr sz="950" b="1" i="0">
                 <a:solidFill>
                   <a:srgbClr val="1F1F1E"/>
                 </a:solidFill>
                 <a:latin typeface="Times New Roman"/>
               </a:rPr>
-              <a:t>Teacher LLM</a:t>
-            </a:r>
-          </a:p>
-        </p:txBody>
-      </p:sp>
-      <p:sp>
-        <p:nvSpPr>
-          <p:cNvPr id="54" name="Down Arrow 53"/>
-          <p:cNvSpPr/>
-          <p:nvPr/>
-        </p:nvSpPr>
-        <p:spPr>
-          <a:xfrm>
-            <a:off x="8311896" y="1810512"/>
-            <a:ext cx="146304" cy="329184"/>
-          </a:xfrm>
-          <a:prstGeom prst="downArrow">
-            <a:avLst/>
-          </a:prstGeom>
-          <a:solidFill>
-            <a:srgbClr val="8C8C8C"/>
-          </a:solidFill>
-          <a:ln>
-            <a:noFill/>
-          </a:ln>
-          <a:effectLst/>
-        </p:spPr>
-        <p:txBody>
-          <a:bodyPr rtlCol="0" anchor="ctr"/>
-          <a:lstStyle/>
-          <a:p>
-            <a:pPr algn="ctr"/>
-          </a:p>
-        </p:txBody>
-      </p:sp>
-      <p:sp>
-        <p:nvSpPr>
-          <p:cNvPr id="55" name="TextBox 54"/>
-          <p:cNvSpPr txBox="1"/>
-          <p:nvPr/>
-        </p:nvSpPr>
-        <p:spPr>
-          <a:xfrm>
-            <a:off x="8503920" y="1828800"/>
-            <a:ext cx="914400" cy="256032"/>
-          </a:xfrm>
-          <a:prstGeom prst="rect">
-            <a:avLst/>
-          </a:prstGeom>
-          <a:noFill/>
-        </p:spPr>
-        <p:txBody>
-          <a:bodyPr wrap="square" lIns="0" rIns="0" tIns="0" bIns="0">
-            <a:spAutoFit/>
-          </a:bodyPr>
-          <a:lstStyle/>
-          <a:p>
-            <a:pPr algn="l"/>
-            <a:r>
-              <a:rPr sz="1000" b="0" i="0">
-                <a:solidFill>
-                  <a:srgbClr val="6B6A63"/>
-                </a:solidFill>
-                <a:latin typeface="Times New Roman"/>
-              </a:rPr>
-              <a:t>traces</a:t>
-            </a:r>
-          </a:p>
-        </p:txBody>
-      </p:sp>
-      <p:sp>
-        <p:nvSpPr>
-          <p:cNvPr id="56" name="Rounded Rectangle 55"/>
-          <p:cNvSpPr/>
-          <p:nvPr/>
-        </p:nvSpPr>
-        <p:spPr>
-          <a:xfrm>
-            <a:off x="7754112" y="2212848"/>
-            <a:ext cx="1481328" cy="658368"/>
+              <a:t>Student LLM</a:t>
+            </a:r>
+          </a:p>
+        </p:txBody>
+      </p:sp>
+      <p:sp>
+        <p:nvSpPr>
+          <p:cNvPr id="89" name="Rounded Rectangle 88"/>
+          <p:cNvSpPr/>
+          <p:nvPr/>
+        </p:nvSpPr>
+        <p:spPr>
+          <a:xfrm>
+            <a:off x="6309360" y="5413248"/>
+            <a:ext cx="914400" cy="201168"/>
           </a:xfrm>
           <a:prstGeom prst="roundRect">
             <a:avLst>
@@ -5177,7 +6187,184 @@
             </a:avLst>
           </a:prstGeom>
           <a:solidFill>
-            <a:srgbClr val="F7F6F2"/>
+            <a:srgbClr val="FFFFFF"/>
+          </a:solidFill>
+          <a:ln w="12700">
+            <a:solidFill>
+              <a:srgbClr val="8C8C8C"/>
+            </a:solidFill>
+          </a:ln>
+          <a:effectLst/>
+        </p:spPr>
+        <p:txBody>
+          <a:bodyPr rtlCol="0" anchor="ctr"/>
+          <a:lstStyle/>
+          <a:p>
+            <a:pPr algn="ctr"/>
+          </a:p>
+        </p:txBody>
+      </p:sp>
+      <p:sp>
+        <p:nvSpPr>
+          <p:cNvPr id="90" name="Rounded Rectangle 89"/>
+          <p:cNvSpPr/>
+          <p:nvPr/>
+        </p:nvSpPr>
+        <p:spPr>
+          <a:xfrm>
+            <a:off x="6336792" y="5440680"/>
+            <a:ext cx="777240" cy="146304"/>
+          </a:xfrm>
+          <a:prstGeom prst="roundRect">
+            <a:avLst>
+              <a:gd name="adj" fmla="val 30000"/>
+            </a:avLst>
+          </a:prstGeom>
+          <a:solidFill>
+            <a:srgbClr val="4C72B0"/>
+          </a:solidFill>
+          <a:ln>
+            <a:noFill/>
+          </a:ln>
+          <a:effectLst/>
+        </p:spPr>
+        <p:txBody>
+          <a:bodyPr rtlCol="0" anchor="ctr"/>
+          <a:lstStyle/>
+          <a:p>
+            <a:pPr algn="ctr"/>
+          </a:p>
+        </p:txBody>
+      </p:sp>
+      <p:sp>
+        <p:nvSpPr>
+          <p:cNvPr id="91" name="Oval 90"/>
+          <p:cNvSpPr/>
+          <p:nvPr/>
+        </p:nvSpPr>
+        <p:spPr>
+          <a:xfrm>
+            <a:off x="7242048" y="5376672"/>
+            <a:ext cx="256032" cy="256032"/>
+          </a:xfrm>
+          <a:prstGeom prst="ellipse">
+            <a:avLst/>
+          </a:prstGeom>
+          <a:solidFill>
+            <a:srgbClr val="55A868"/>
+          </a:solidFill>
+          <a:ln w="15240">
+            <a:solidFill>
+              <a:srgbClr val="FFFFFF"/>
+            </a:solidFill>
+          </a:ln>
+          <a:effectLst/>
+        </p:spPr>
+        <p:txBody>
+          <a:bodyPr rtlCol="0" anchor="ctr" lIns="9000" rIns="9000" tIns="4500" bIns="4500" wrap="square"/>
+          <a:lstStyle/>
+          <a:p>
+            <a:pPr algn="ctr"/>
+            <a:r>
+              <a:rPr sz="900" b="1" i="0">
+                <a:solidFill>
+                  <a:srgbClr val="FFFFFF"/>
+                </a:solidFill>
+                <a:latin typeface="Times New Roman"/>
+              </a:rPr>
+              <a:t>✓</a:t>
+            </a:r>
+          </a:p>
+        </p:txBody>
+      </p:sp>
+      <p:sp>
+        <p:nvSpPr>
+          <p:cNvPr id="92" name="TextBox 91"/>
+          <p:cNvSpPr txBox="1"/>
+          <p:nvPr/>
+        </p:nvSpPr>
+        <p:spPr>
+          <a:xfrm>
+            <a:off x="6217920" y="5669280"/>
+            <a:ext cx="1828800" cy="237744"/>
+          </a:xfrm>
+          <a:prstGeom prst="rect">
+            <a:avLst/>
+          </a:prstGeom>
+          <a:noFill/>
+        </p:spPr>
+        <p:txBody>
+          <a:bodyPr wrap="square" lIns="0" rIns="0" tIns="0" bIns="0">
+            <a:spAutoFit/>
+          </a:bodyPr>
+          <a:lstStyle/>
+          <a:p>
+            <a:pPr algn="l"/>
+            <a:r>
+              <a:rPr sz="850" b="0" i="0">
+                <a:solidFill>
+                  <a:srgbClr val="6B6A63"/>
+                </a:solidFill>
+                <a:latin typeface="Times New Roman"/>
+              </a:rPr>
+              <a:t>train until absorbed, stop</a:t>
+            </a:r>
+          </a:p>
+        </p:txBody>
+      </p:sp>
+      <p:sp>
+        <p:nvSpPr>
+          <p:cNvPr id="93" name="TextBox 92"/>
+          <p:cNvSpPr txBox="1"/>
+          <p:nvPr/>
+        </p:nvSpPr>
+        <p:spPr>
+          <a:xfrm>
+            <a:off x="9509760" y="1115568"/>
+            <a:ext cx="1828800" cy="274320"/>
+          </a:xfrm>
+          <a:prstGeom prst="rect">
+            <a:avLst/>
+          </a:prstGeom>
+          <a:noFill/>
+        </p:spPr>
+        <p:txBody>
+          <a:bodyPr wrap="square" lIns="0" rIns="0" tIns="0" bIns="0">
+            <a:spAutoFit/>
+          </a:bodyPr>
+          <a:lstStyle/>
+          <a:p>
+            <a:pPr algn="l"/>
+            <a:r>
+              <a:rPr sz="1050" b="0" i="1">
+                <a:solidFill>
+                  <a:srgbClr val="6B6A63"/>
+                </a:solidFill>
+                <a:latin typeface="Times New Roman"/>
+              </a:rPr>
+              <a:t>live requests</a:t>
+            </a:r>
+          </a:p>
+        </p:txBody>
+      </p:sp>
+      <p:sp>
+        <p:nvSpPr>
+          <p:cNvPr id="94" name="Rounded Rectangle 93"/>
+          <p:cNvSpPr/>
+          <p:nvPr/>
+        </p:nvSpPr>
+        <p:spPr>
+          <a:xfrm>
+            <a:off x="9546336" y="1417320"/>
+            <a:ext cx="1170432" cy="566928"/>
+          </a:xfrm>
+          <a:prstGeom prst="roundRect">
+            <a:avLst>
+              <a:gd name="adj" fmla="val 25000"/>
+            </a:avLst>
+          </a:prstGeom>
+          <a:solidFill>
+            <a:srgbClr val="EEF2F9"/>
           </a:solidFill>
           <a:ln w="16510">
             <a:solidFill>
@@ -5196,14 +6383,14 @@
       </p:sp>
       <p:sp>
         <p:nvSpPr>
-          <p:cNvPr id="57" name="TextBox 56"/>
+          <p:cNvPr id="95" name="TextBox 94"/>
           <p:cNvSpPr txBox="1"/>
           <p:nvPr/>
         </p:nvSpPr>
         <p:spPr>
           <a:xfrm>
-            <a:off x="7845552" y="2267712"/>
-            <a:ext cx="1371600" cy="384048"/>
+            <a:off x="9619488" y="1481328"/>
+            <a:ext cx="1097280" cy="438912"/>
           </a:xfrm>
           <a:prstGeom prst="rect">
             <a:avLst/>
@@ -5218,39 +6405,696 @@
           <a:p>
             <a:pPr algn="l"/>
             <a:r>
-              <a:rPr sz="700" b="0" i="0">
-                <a:solidFill>
-                  <a:srgbClr val="1F1F1E"/>
+              <a:rPr sz="750" b="0" i="0">
+                <a:solidFill>
+                  <a:srgbClr val="4C72B0"/>
                 </a:solidFill>
                 <a:latin typeface="Consolas"/>
               </a:rPr>
-              <a:t>SELECT c, COUNT(*)</a:t>
+              <a:t>"Avg dues</a:t>
             </a:r>
           </a:p>
           <a:p>
             <a:pPr algn="l"/>
             <a:r>
-              <a:rPr sz="700" b="0" i="0">
-                <a:solidFill>
-                  <a:srgbClr val="1F1F1E"/>
+              <a:rPr sz="750" b="0" i="0">
+                <a:solidFill>
+                  <a:srgbClr val="4C72B0"/>
                 </a:solidFill>
                 <a:latin typeface="Consolas"/>
               </a:rPr>
-              <a:t>  FROM a JOIN b …</a:t>
-            </a:r>
-          </a:p>
-        </p:txBody>
-      </p:sp>
-      <p:sp>
-        <p:nvSpPr>
-          <p:cNvPr id="58" name="Rounded Rectangle 57"/>
-          <p:cNvSpPr/>
-          <p:nvPr/>
-        </p:nvSpPr>
-        <p:spPr>
-          <a:xfrm>
-            <a:off x="7845552" y="2633472"/>
-            <a:ext cx="603504" cy="201168"/>
+              <a:t> per club?"</a:t>
+            </a:r>
+          </a:p>
+        </p:txBody>
+      </p:sp>
+      <p:sp>
+        <p:nvSpPr>
+          <p:cNvPr id="96" name="Rounded Rectangle 95"/>
+          <p:cNvSpPr/>
+          <p:nvPr/>
+        </p:nvSpPr>
+        <p:spPr>
+          <a:xfrm>
+            <a:off x="10808208" y="1417320"/>
+            <a:ext cx="1170432" cy="566928"/>
+          </a:xfrm>
+          <a:prstGeom prst="roundRect">
+            <a:avLst>
+              <a:gd name="adj" fmla="val 25000"/>
+            </a:avLst>
+          </a:prstGeom>
+          <a:solidFill>
+            <a:srgbClr val="FDF0E7"/>
+          </a:solidFill>
+          <a:ln w="16510">
+            <a:solidFill>
+              <a:srgbClr val="DD8452"/>
+            </a:solidFill>
+          </a:ln>
+          <a:effectLst/>
+        </p:spPr>
+        <p:txBody>
+          <a:bodyPr rtlCol="0" anchor="ctr"/>
+          <a:lstStyle/>
+          <a:p>
+            <a:pPr algn="ctr"/>
+          </a:p>
+        </p:txBody>
+      </p:sp>
+      <p:sp>
+        <p:nvSpPr>
+          <p:cNvPr id="97" name="TextBox 96"/>
+          <p:cNvSpPr txBox="1"/>
+          <p:nvPr/>
+        </p:nvSpPr>
+        <p:spPr>
+          <a:xfrm>
+            <a:off x="10881360" y="1481328"/>
+            <a:ext cx="1097280" cy="438912"/>
+          </a:xfrm>
+          <a:prstGeom prst="rect">
+            <a:avLst/>
+          </a:prstGeom>
+          <a:noFill/>
+        </p:spPr>
+        <p:txBody>
+          <a:bodyPr wrap="square" lIns="0" rIns="0" tIns="0" bIns="0">
+            <a:spAutoFit/>
+          </a:bodyPr>
+          <a:lstStyle/>
+          <a:p>
+            <a:pPr algn="l"/>
+            <a:r>
+              <a:rPr sz="750" b="0" i="0">
+                <a:solidFill>
+                  <a:srgbClr val="DD8452"/>
+                </a:solidFill>
+                <a:latin typeface="Consolas"/>
+              </a:rPr>
+              <a:t>"Plot a bar</a:t>
+            </a:r>
+          </a:p>
+          <a:p>
+            <a:pPr algn="l"/>
+            <a:r>
+              <a:rPr sz="750" b="0" i="0">
+                <a:solidFill>
+                  <a:srgbClr val="DD8452"/>
+                </a:solidFill>
+                <a:latin typeface="Consolas"/>
+              </a:rPr>
+              <a:t> chart"</a:t>
+            </a:r>
+          </a:p>
+        </p:txBody>
+      </p:sp>
+      <p:sp>
+        <p:nvSpPr>
+          <p:cNvPr id="98" name="Rounded Rectangle 97"/>
+          <p:cNvSpPr/>
+          <p:nvPr/>
+        </p:nvSpPr>
+        <p:spPr>
+          <a:xfrm>
+            <a:off x="9509760" y="2962656"/>
+            <a:ext cx="530352" cy="292608"/>
+          </a:xfrm>
+          <a:prstGeom prst="roundRect">
+            <a:avLst>
+              <a:gd name="adj" fmla="val 25000"/>
+            </a:avLst>
+          </a:prstGeom>
+          <a:solidFill>
+            <a:srgbClr val="DFE5EF"/>
+          </a:solidFill>
+          <a:ln w="16510">
+            <a:solidFill>
+              <a:srgbClr val="4C72B0"/>
+            </a:solidFill>
+          </a:ln>
+          <a:effectLst/>
+        </p:spPr>
+        <p:txBody>
+          <a:bodyPr rtlCol="0" anchor="ctr"/>
+          <a:lstStyle/>
+          <a:p>
+            <a:pPr algn="ctr"/>
+          </a:p>
+        </p:txBody>
+      </p:sp>
+      <p:sp>
+        <p:nvSpPr>
+          <p:cNvPr id="99" name="Rounded Rectangle 98"/>
+          <p:cNvSpPr/>
+          <p:nvPr/>
+        </p:nvSpPr>
+        <p:spPr>
+          <a:xfrm>
+            <a:off x="10753344" y="2962656"/>
+            <a:ext cx="1261872" cy="292608"/>
+          </a:xfrm>
+          <a:prstGeom prst="roundRect">
+            <a:avLst>
+              <a:gd name="adj" fmla="val 25000"/>
+            </a:avLst>
+          </a:prstGeom>
+          <a:solidFill>
+            <a:srgbClr val="DFE5EF"/>
+          </a:solidFill>
+          <a:ln w="16510">
+            <a:solidFill>
+              <a:srgbClr val="4C72B0"/>
+            </a:solidFill>
+          </a:ln>
+          <a:effectLst/>
+        </p:spPr>
+        <p:txBody>
+          <a:bodyPr rtlCol="0" anchor="ctr"/>
+          <a:lstStyle/>
+          <a:p>
+            <a:pPr algn="ctr"/>
+          </a:p>
+        </p:txBody>
+      </p:sp>
+      <p:sp>
+        <p:nvSpPr>
+          <p:cNvPr id="100" name="Oval 99"/>
+          <p:cNvSpPr/>
+          <p:nvPr/>
+        </p:nvSpPr>
+        <p:spPr>
+          <a:xfrm>
+            <a:off x="10204704" y="2487168"/>
+            <a:ext cx="402336" cy="402336"/>
+          </a:xfrm>
+          <a:prstGeom prst="ellipse">
+            <a:avLst/>
+          </a:prstGeom>
+          <a:solidFill>
+            <a:srgbClr val="55A868"/>
+          </a:solidFill>
+          <a:ln w="19050">
+            <a:solidFill>
+              <a:srgbClr val="FFFFFF"/>
+            </a:solidFill>
+          </a:ln>
+          <a:effectLst/>
+        </p:spPr>
+        <p:txBody>
+          <a:bodyPr rtlCol="0" anchor="ctr" lIns="9000" rIns="9000" tIns="4500" bIns="4500" wrap="square"/>
+          <a:lstStyle/>
+          <a:p>
+            <a:pPr algn="ctr"/>
+            <a:r>
+              <a:rPr sz="900" b="1" i="0">
+                <a:solidFill>
+                  <a:srgbClr val="FFFFFF"/>
+                </a:solidFill>
+                <a:latin typeface="Times New Roman"/>
+              </a:rPr>
+              <a:t>90%</a:t>
+            </a:r>
+          </a:p>
+        </p:txBody>
+      </p:sp>
+      <p:sp>
+        <p:nvSpPr>
+          <p:cNvPr id="101" name="TextBox 100"/>
+          <p:cNvSpPr txBox="1"/>
+          <p:nvPr/>
+        </p:nvSpPr>
+        <p:spPr>
+          <a:xfrm>
+            <a:off x="10515600" y="3328416"/>
+            <a:ext cx="1600200" cy="457200"/>
+          </a:xfrm>
+          <a:prstGeom prst="rect">
+            <a:avLst/>
+          </a:prstGeom>
+          <a:noFill/>
+        </p:spPr>
+        <p:txBody>
+          <a:bodyPr wrap="square" lIns="0" rIns="0" tIns="0" bIns="0">
+            <a:spAutoFit/>
+          </a:bodyPr>
+          <a:lstStyle/>
+          <a:p>
+            <a:pPr algn="l"/>
+            <a:r>
+              <a:rPr sz="850" b="0" i="0">
+                <a:solidFill>
+                  <a:srgbClr val="6B6A63"/>
+                </a:solidFill>
+                <a:latin typeface="Times New Roman"/>
+              </a:rPr>
+              <a:t>conformal gate:</a:t>
+            </a:r>
+          </a:p>
+          <a:p>
+            <a:pPr algn="l"/>
+            <a:r>
+              <a:rPr sz="850" b="0" i="0">
+                <a:solidFill>
+                  <a:srgbClr val="6B6A63"/>
+                </a:solidFill>
+                <a:latin typeface="Times New Roman"/>
+              </a:rPr>
+              <a:t>guaranteed, not tuned</a:t>
+            </a:r>
+          </a:p>
+        </p:txBody>
+      </p:sp>
+      <p:cxnSp>
+        <p:nvCxnSpPr>
+          <p:cNvPr id="102" name="Connector 101"/>
+          <p:cNvCxnSpPr/>
+          <p:nvPr/>
+        </p:nvCxnSpPr>
+        <p:spPr>
+          <a:xfrm>
+            <a:off x="10131552" y="2011680"/>
+            <a:ext cx="0" cy="1691640"/>
+          </a:xfrm>
+          <a:prstGeom prst="line">
+            <a:avLst/>
+          </a:prstGeom>
+          <a:ln w="35560">
+            <a:solidFill>
+              <a:srgbClr val="4C72B0"/>
+            </a:solidFill>
+            <a:tailEnd type="triangle" w="med" len="med"/>
+          </a:ln>
+          <a:effectLst/>
+        </p:spPr>
+      </p:cxnSp>
+      <p:cxnSp>
+        <p:nvCxnSpPr>
+          <p:cNvPr id="103" name="Connector 102"/>
+          <p:cNvCxnSpPr/>
+          <p:nvPr/>
+        </p:nvCxnSpPr>
+        <p:spPr>
+          <a:xfrm>
+            <a:off x="11393424" y="2011680"/>
+            <a:ext cx="0" cy="950976"/>
+          </a:xfrm>
+          <a:prstGeom prst="line">
+            <a:avLst/>
+          </a:prstGeom>
+          <a:ln w="35560">
+            <a:solidFill>
+              <a:srgbClr val="DD8452"/>
+            </a:solidFill>
+            <a:tailEnd type="triangle" w="med" len="med"/>
+          </a:ln>
+          <a:effectLst/>
+        </p:spPr>
+      </p:cxnSp>
+      <p:cxnSp>
+        <p:nvCxnSpPr>
+          <p:cNvPr id="104" name="Connector 103"/>
+          <p:cNvCxnSpPr/>
+          <p:nvPr/>
+        </p:nvCxnSpPr>
+        <p:spPr>
+          <a:xfrm>
+            <a:off x="11393424" y="2999232"/>
+            <a:ext cx="512064" cy="1042416"/>
+          </a:xfrm>
+          <a:prstGeom prst="line">
+            <a:avLst/>
+          </a:prstGeom>
+          <a:ln w="35560">
+            <a:solidFill>
+              <a:srgbClr val="DD8452"/>
+            </a:solidFill>
+            <a:tailEnd type="triangle" w="med" len="med"/>
+          </a:ln>
+          <a:effectLst/>
+        </p:spPr>
+      </p:cxnSp>
+      <p:sp>
+        <p:nvSpPr>
+          <p:cNvPr id="105" name="Rounded Rectangle 104"/>
+          <p:cNvSpPr/>
+          <p:nvPr/>
+        </p:nvSpPr>
+        <p:spPr>
+          <a:xfrm>
+            <a:off x="9701784" y="4005072"/>
+            <a:ext cx="859536" cy="676656"/>
+          </a:xfrm>
+          <a:prstGeom prst="roundRect">
+            <a:avLst>
+              <a:gd name="adj" fmla="val 25000"/>
+            </a:avLst>
+          </a:prstGeom>
+          <a:solidFill>
+            <a:srgbClr val="EEF2F9"/>
+          </a:solidFill>
+          <a:ln w="20320">
+            <a:solidFill>
+              <a:srgbClr val="4C72B0"/>
+            </a:solidFill>
+          </a:ln>
+          <a:effectLst/>
+        </p:spPr>
+        <p:txBody>
+          <a:bodyPr rtlCol="0" anchor="ctr"/>
+          <a:lstStyle/>
+          <a:p>
+            <a:pPr algn="ctr"/>
+          </a:p>
+        </p:txBody>
+      </p:sp>
+      <p:sp>
+        <p:nvSpPr>
+          <p:cNvPr id="106" name="Rectangle 105"/>
+          <p:cNvSpPr/>
+          <p:nvPr/>
+        </p:nvSpPr>
+        <p:spPr>
+          <a:xfrm>
+            <a:off x="10120579" y="3877056"/>
+            <a:ext cx="21945" cy="128016"/>
+          </a:xfrm>
+          <a:prstGeom prst="rect">
+            <a:avLst/>
+          </a:prstGeom>
+          <a:solidFill>
+            <a:srgbClr val="4C72B0"/>
+          </a:solidFill>
+          <a:ln>
+            <a:noFill/>
+          </a:ln>
+          <a:effectLst/>
+        </p:spPr>
+        <p:txBody>
+          <a:bodyPr rtlCol="0" anchor="ctr"/>
+          <a:lstStyle/>
+          <a:p>
+            <a:pPr algn="ctr"/>
+          </a:p>
+        </p:txBody>
+      </p:sp>
+      <p:sp>
+        <p:nvSpPr>
+          <p:cNvPr id="107" name="Oval 106"/>
+          <p:cNvSpPr/>
+          <p:nvPr/>
+        </p:nvSpPr>
+        <p:spPr>
+          <a:xfrm>
+            <a:off x="10085832" y="3785615"/>
+            <a:ext cx="91440" cy="91440"/>
+          </a:xfrm>
+          <a:prstGeom prst="ellipse">
+            <a:avLst/>
+          </a:prstGeom>
+          <a:solidFill>
+            <a:srgbClr val="4C72B0"/>
+          </a:solidFill>
+          <a:ln>
+            <a:noFill/>
+          </a:ln>
+          <a:effectLst/>
+        </p:spPr>
+        <p:txBody>
+          <a:bodyPr rtlCol="0" anchor="ctr"/>
+          <a:lstStyle/>
+          <a:p>
+            <a:pPr algn="ctr"/>
+          </a:p>
+        </p:txBody>
+      </p:sp>
+      <p:sp>
+        <p:nvSpPr>
+          <p:cNvPr id="108" name="Oval 107"/>
+          <p:cNvSpPr/>
+          <p:nvPr/>
+        </p:nvSpPr>
+        <p:spPr>
+          <a:xfrm>
+            <a:off x="9935687" y="4234586"/>
+            <a:ext cx="82296" cy="82296"/>
+          </a:xfrm>
+          <a:prstGeom prst="ellipse">
+            <a:avLst/>
+          </a:prstGeom>
+          <a:solidFill>
+            <a:srgbClr val="4C72B0"/>
+          </a:solidFill>
+          <a:ln>
+            <a:noFill/>
+          </a:ln>
+          <a:effectLst/>
+        </p:spPr>
+        <p:txBody>
+          <a:bodyPr rtlCol="0" anchor="ctr"/>
+          <a:lstStyle/>
+          <a:p>
+            <a:pPr algn="ctr"/>
+          </a:p>
+        </p:txBody>
+      </p:sp>
+      <p:sp>
+        <p:nvSpPr>
+          <p:cNvPr id="109" name="Oval 108"/>
+          <p:cNvSpPr/>
+          <p:nvPr/>
+        </p:nvSpPr>
+        <p:spPr>
+          <a:xfrm>
+            <a:off x="10245120" y="4234586"/>
+            <a:ext cx="82296" cy="82296"/>
+          </a:xfrm>
+          <a:prstGeom prst="ellipse">
+            <a:avLst/>
+          </a:prstGeom>
+          <a:solidFill>
+            <a:srgbClr val="4C72B0"/>
+          </a:solidFill>
+          <a:ln>
+            <a:noFill/>
+          </a:ln>
+          <a:effectLst/>
+        </p:spPr>
+        <p:txBody>
+          <a:bodyPr rtlCol="0" anchor="ctr"/>
+          <a:lstStyle/>
+          <a:p>
+            <a:pPr algn="ctr"/>
+          </a:p>
+        </p:txBody>
+      </p:sp>
+      <p:sp>
+        <p:nvSpPr>
+          <p:cNvPr id="110" name="Rounded Rectangle 109"/>
+          <p:cNvSpPr/>
+          <p:nvPr/>
+        </p:nvSpPr>
+        <p:spPr>
+          <a:xfrm>
+            <a:off x="10011216" y="4424598"/>
+            <a:ext cx="240670" cy="27432"/>
+          </a:xfrm>
+          <a:prstGeom prst="roundRect">
+            <a:avLst>
+              <a:gd name="adj" fmla="val 50000"/>
+            </a:avLst>
+          </a:prstGeom>
+          <a:solidFill>
+            <a:srgbClr val="4C72B0"/>
+          </a:solidFill>
+          <a:ln>
+            <a:noFill/>
+          </a:ln>
+          <a:effectLst/>
+        </p:spPr>
+        <p:txBody>
+          <a:bodyPr rtlCol="0" anchor="ctr"/>
+          <a:lstStyle/>
+          <a:p>
+            <a:pPr algn="ctr"/>
+          </a:p>
+        </p:txBody>
+      </p:sp>
+      <p:sp>
+        <p:nvSpPr>
+          <p:cNvPr id="111" name="TextBox 110"/>
+          <p:cNvSpPr txBox="1"/>
+          <p:nvPr/>
+        </p:nvSpPr>
+        <p:spPr>
+          <a:xfrm>
+            <a:off x="9381744" y="4718304"/>
+            <a:ext cx="1499616" cy="256032"/>
+          </a:xfrm>
+          <a:prstGeom prst="rect">
+            <a:avLst/>
+          </a:prstGeom>
+          <a:noFill/>
+        </p:spPr>
+        <p:txBody>
+          <a:bodyPr wrap="square" lIns="0" rIns="0" tIns="0" bIns="0">
+            <a:spAutoFit/>
+          </a:bodyPr>
+          <a:lstStyle/>
+          <a:p>
+            <a:pPr algn="ctr"/>
+            <a:r>
+              <a:rPr sz="950" b="1" i="0">
+                <a:solidFill>
+                  <a:srgbClr val="1F1F1E"/>
+                </a:solidFill>
+                <a:latin typeface="Times New Roman"/>
+              </a:rPr>
+              <a:t>Student agent</a:t>
+            </a:r>
+          </a:p>
+        </p:txBody>
+      </p:sp>
+      <p:sp>
+        <p:nvSpPr>
+          <p:cNvPr id="112" name="Rounded Rectangle 111"/>
+          <p:cNvSpPr/>
+          <p:nvPr/>
+        </p:nvSpPr>
+        <p:spPr>
+          <a:xfrm>
+            <a:off x="11356848" y="4096512"/>
+            <a:ext cx="658368" cy="457200"/>
+          </a:xfrm>
+          <a:prstGeom prst="roundRect">
+            <a:avLst>
+              <a:gd name="adj" fmla="val 25000"/>
+            </a:avLst>
+          </a:prstGeom>
+          <a:solidFill>
+            <a:srgbClr val="FDF0E7"/>
+          </a:solidFill>
+          <a:ln w="17780">
+            <a:solidFill>
+              <a:srgbClr val="DD8452"/>
+            </a:solidFill>
+          </a:ln>
+          <a:effectLst/>
+        </p:spPr>
+        <p:txBody>
+          <a:bodyPr rtlCol="0" anchor="ctr" lIns="9000" rIns="9000" tIns="4500" bIns="4500" wrap="square"/>
+          <a:lstStyle/>
+          <a:p>
+            <a:pPr algn="ctr"/>
+            <a:r>
+              <a:rPr sz="900" b="1" i="0">
+                <a:solidFill>
+                  <a:srgbClr val="DD8452"/>
+                </a:solidFill>
+                <a:latin typeface="Times New Roman"/>
+              </a:rPr>
+              <a:t>refuse</a:t>
+            </a:r>
+          </a:p>
+        </p:txBody>
+      </p:sp>
+      <p:sp>
+        <p:nvSpPr>
+          <p:cNvPr id="113" name="Rounded Rectangle 112"/>
+          <p:cNvSpPr/>
+          <p:nvPr/>
+        </p:nvSpPr>
+        <p:spPr>
+          <a:xfrm>
+            <a:off x="9528048" y="5212080"/>
+            <a:ext cx="2340864" cy="621792"/>
+          </a:xfrm>
+          <a:prstGeom prst="roundRect">
+            <a:avLst>
+              <a:gd name="adj" fmla="val 25000"/>
+            </a:avLst>
+          </a:prstGeom>
+          <a:solidFill>
+            <a:srgbClr val="FFFFFF"/>
+          </a:solidFill>
+          <a:ln w="20320">
+            <a:solidFill>
+              <a:srgbClr val="55A868"/>
+            </a:solidFill>
+          </a:ln>
+          <a:effectLst/>
+        </p:spPr>
+        <p:txBody>
+          <a:bodyPr rtlCol="0" anchor="ctr" lIns="9000" rIns="9000" tIns="4500" bIns="4500" wrap="square"/>
+          <a:lstStyle/>
+          <a:p>
+            <a:pPr algn="ctr"/>
+            <a:r>
+              <a:rPr sz="950" b="0" i="0">
+                <a:solidFill>
+                  <a:srgbClr val="1F1F1E"/>
+                </a:solidFill>
+                <a:latin typeface="Times New Roman"/>
+              </a:rPr>
+              <a:t>Certified, both sides:</a:t>
+            </a:r>
+          </a:p>
+          <a:p>
+            <a:pPr algn="ctr"/>
+            <a:r>
+              <a:rPr sz="950" b="0" i="0">
+                <a:solidFill>
+                  <a:srgbClr val="1F1F1E"/>
+                </a:solidFill>
+                <a:latin typeface="Times New Roman"/>
+              </a:rPr>
+              <a:t>in-task ≥ 0.93 · off-task ≤ 0.25</a:t>
+            </a:r>
+          </a:p>
+        </p:txBody>
+      </p:sp>
+      <p:sp>
+        <p:nvSpPr>
+          <p:cNvPr id="114" name="Rounded Rectangle 113"/>
+          <p:cNvSpPr/>
+          <p:nvPr/>
+        </p:nvSpPr>
+        <p:spPr>
+          <a:xfrm>
+            <a:off x="2880360" y="6144768"/>
+            <a:ext cx="6949440" cy="502920"/>
+          </a:xfrm>
+          <a:prstGeom prst="roundRect">
+            <a:avLst>
+              <a:gd name="adj" fmla="val 50000"/>
+            </a:avLst>
+          </a:prstGeom>
+          <a:solidFill>
+            <a:srgbClr val="F7F6F2"/>
+          </a:solidFill>
+          <a:ln>
+            <a:noFill/>
+          </a:ln>
+          <a:effectLst/>
+        </p:spPr>
+        <p:txBody>
+          <a:bodyPr rtlCol="0" anchor="ctr"/>
+          <a:lstStyle/>
+          <a:p>
+            <a:pPr algn="ctr"/>
+          </a:p>
+        </p:txBody>
+      </p:sp>
+      <p:sp>
+        <p:nvSpPr>
+          <p:cNvPr id="115" name="Rounded Rectangle 114"/>
+          <p:cNvSpPr/>
+          <p:nvPr/>
+        </p:nvSpPr>
+        <p:spPr>
+          <a:xfrm>
+            <a:off x="3108960" y="6272784"/>
+            <a:ext cx="502920" cy="246888"/>
           </a:xfrm>
           <a:prstGeom prst="roundRect">
             <a:avLst>
@@ -5273,7 +7117,7 @@
           <a:p>
             <a:pPr algn="ctr"/>
             <a:r>
-              <a:rPr sz="650" b="1" i="0">
+              <a:rPr sz="750" b="1" i="0">
                 <a:solidFill>
                   <a:srgbClr val="FFFFFF"/>
                 </a:solidFill>
@@ -5286,48 +7130,14 @@
       </p:sp>
       <p:sp>
         <p:nvSpPr>
-          <p:cNvPr id="59" name="Rounded Rectangle 58"/>
-          <p:cNvSpPr/>
-          <p:nvPr/>
-        </p:nvSpPr>
-        <p:spPr>
-          <a:xfrm>
-            <a:off x="7754112" y="2999232"/>
-            <a:ext cx="1481328" cy="658368"/>
-          </a:xfrm>
-          <a:prstGeom prst="roundRect">
-            <a:avLst>
-              <a:gd name="adj" fmla="val 25000"/>
-            </a:avLst>
-          </a:prstGeom>
-          <a:solidFill>
-            <a:srgbClr val="F7F6F2"/>
-          </a:solidFill>
-          <a:ln w="16510">
-            <a:solidFill>
-              <a:srgbClr val="4C72B0"/>
-            </a:solidFill>
-          </a:ln>
-          <a:effectLst/>
-        </p:spPr>
-        <p:txBody>
-          <a:bodyPr rtlCol="0" anchor="ctr"/>
-          <a:lstStyle/>
-          <a:p>
-            <a:pPr algn="ctr"/>
-          </a:p>
-        </p:txBody>
-      </p:sp>
-      <p:sp>
-        <p:nvSpPr>
-          <p:cNvPr id="60" name="TextBox 59"/>
+          <p:cNvPr id="116" name="TextBox 115"/>
           <p:cNvSpPr txBox="1"/>
           <p:nvPr/>
         </p:nvSpPr>
         <p:spPr>
           <a:xfrm>
-            <a:off x="7845552" y="3054096"/>
-            <a:ext cx="1371600" cy="384048"/>
+            <a:off x="3703320" y="6272784"/>
+            <a:ext cx="1691640" cy="274320"/>
           </a:xfrm>
           <a:prstGeom prst="rect">
             <a:avLst/>
@@ -5342,39 +7152,27 @@
           <a:p>
             <a:pPr algn="l"/>
             <a:r>
-              <a:rPr sz="700" b="0" i="0">
+              <a:rPr sz="1100" b="0" i="0">
                 <a:solidFill>
                   <a:srgbClr val="1F1F1E"/>
                 </a:solidFill>
-                <a:latin typeface="Consolas"/>
+                <a:latin typeface="Times New Roman"/>
               </a:rPr>
-              <a:t>df.groupby('city')</a:t>
-            </a:r>
-          </a:p>
-          <a:p>
-            <a:pPr algn="l"/>
-            <a:r>
-              <a:rPr sz="700" b="0" i="0">
-                <a:solidFill>
-                  <a:srgbClr val="1F1F1E"/>
-                </a:solidFill>
-                <a:latin typeface="Consolas"/>
-              </a:rPr>
-              <a:t>  .dues.sum()</a:t>
-            </a:r>
-          </a:p>
-        </p:txBody>
-      </p:sp>
-      <p:sp>
-        <p:nvSpPr>
-          <p:cNvPr id="61" name="Rounded Rectangle 60"/>
-          <p:cNvSpPr/>
-          <p:nvPr/>
-        </p:nvSpPr>
-        <p:spPr>
-          <a:xfrm>
-            <a:off x="7845552" y="3419856"/>
-            <a:ext cx="603504" cy="201168"/>
+              <a:t>= skill the task needs</a:t>
+            </a:r>
+          </a:p>
+        </p:txBody>
+      </p:sp>
+      <p:sp>
+        <p:nvSpPr>
+          <p:cNvPr id="117" name="Rounded Rectangle 116"/>
+          <p:cNvSpPr/>
+          <p:nvPr/>
+        </p:nvSpPr>
+        <p:spPr>
+          <a:xfrm>
+            <a:off x="5486400" y="6272784"/>
+            <a:ext cx="502920" cy="246888"/>
           </a:xfrm>
           <a:prstGeom prst="roundRect">
             <a:avLst>
@@ -5382,7 +7180,7 @@
             </a:avLst>
           </a:prstGeom>
           <a:solidFill>
-            <a:srgbClr val="7BA7D7"/>
+            <a:srgbClr val="DD8452"/>
           </a:solidFill>
           <a:ln w="9525">
             <a:solidFill>
@@ -5397,61 +7195,27 @@
           <a:p>
             <a:pPr algn="ctr"/>
             <a:r>
-              <a:rPr sz="650" b="1" i="0">
+              <a:rPr sz="750" b="1" i="0">
                 <a:solidFill>
                   <a:srgbClr val="FFFFFF"/>
                 </a:solidFill>
                 <a:latin typeface="Times New Roman"/>
               </a:rPr>
-              <a:t>GROUP BY</a:t>
-            </a:r>
-          </a:p>
-        </p:txBody>
-      </p:sp>
-      <p:sp>
-        <p:nvSpPr>
-          <p:cNvPr id="62" name="Rounded Rectangle 61"/>
-          <p:cNvSpPr/>
-          <p:nvPr/>
-        </p:nvSpPr>
-        <p:spPr>
-          <a:xfrm>
-            <a:off x="7754112" y="3785615"/>
-            <a:ext cx="1481328" cy="658368"/>
-          </a:xfrm>
-          <a:prstGeom prst="roundRect">
-            <a:avLst>
-              <a:gd name="adj" fmla="val 25000"/>
-            </a:avLst>
-          </a:prstGeom>
-          <a:solidFill>
-            <a:srgbClr val="E8E6E1"/>
-          </a:solidFill>
-          <a:ln w="16510">
-            <a:solidFill>
-              <a:srgbClr val="8C8C8C"/>
-            </a:solidFill>
-          </a:ln>
-          <a:effectLst/>
-        </p:spPr>
-        <p:txBody>
-          <a:bodyPr rtlCol="0" anchor="ctr"/>
-          <a:lstStyle/>
-          <a:p>
-            <a:pPr algn="ctr"/>
-          </a:p>
-        </p:txBody>
-      </p:sp>
-      <p:sp>
-        <p:nvSpPr>
-          <p:cNvPr id="63" name="TextBox 62"/>
+              <a:t>PLOT</a:t>
+            </a:r>
+          </a:p>
+        </p:txBody>
+      </p:sp>
+      <p:sp>
+        <p:nvSpPr>
+          <p:cNvPr id="118" name="TextBox 117"/>
           <p:cNvSpPr txBox="1"/>
           <p:nvPr/>
         </p:nvSpPr>
         <p:spPr>
           <a:xfrm>
-            <a:off x="7845552" y="3840479"/>
-            <a:ext cx="1371600" cy="384048"/>
+            <a:off x="6080760" y="6272784"/>
+            <a:ext cx="1783080" cy="274320"/>
           </a:xfrm>
           <a:prstGeom prst="rect">
             <a:avLst/>
@@ -5466,27 +7230,27 @@
           <a:p>
             <a:pPr algn="l"/>
             <a:r>
-              <a:rPr sz="700" b="0" i="0">
+              <a:rPr sz="1100" b="0" i="0">
                 <a:solidFill>
                   <a:srgbClr val="1F1F1E"/>
                 </a:solidFill>
-                <a:latin typeface="Consolas"/>
+                <a:latin typeface="Times New Roman"/>
               </a:rPr>
-              <a:t>plt.plot(revenue)</a:t>
-            </a:r>
-          </a:p>
-        </p:txBody>
-      </p:sp>
-      <p:sp>
-        <p:nvSpPr>
-          <p:cNvPr id="64" name="Rounded Rectangle 63"/>
-          <p:cNvSpPr/>
-          <p:nvPr/>
-        </p:nvSpPr>
-        <p:spPr>
-          <a:xfrm>
-            <a:off x="7845552" y="4206240"/>
-            <a:ext cx="603504" cy="201168"/>
+              <a:t>= out-of-scope skill</a:t>
+            </a:r>
+          </a:p>
+        </p:txBody>
+      </p:sp>
+      <p:sp>
+        <p:nvSpPr>
+          <p:cNvPr id="119" name="Rounded Rectangle 118"/>
+          <p:cNvSpPr/>
+          <p:nvPr/>
+        </p:nvSpPr>
+        <p:spPr>
+          <a:xfrm>
+            <a:off x="7818120" y="6272784"/>
+            <a:ext cx="502920" cy="246888"/>
           </a:xfrm>
           <a:prstGeom prst="roundRect">
             <a:avLst>
@@ -5494,7 +7258,7 @@
             </a:avLst>
           </a:prstGeom>
           <a:solidFill>
-            <a:srgbClr val="DD8452"/>
+            <a:srgbClr val="E8E6E1"/>
           </a:solidFill>
           <a:ln w="9525">
             <a:solidFill>
@@ -5509,1580 +7273,7 @@
           <a:p>
             <a:pPr algn="ctr"/>
             <a:r>
-              <a:rPr sz="650" b="1" i="0">
-                <a:solidFill>
-                  <a:srgbClr val="FFFFFF"/>
-                </a:solidFill>
-                <a:latin typeface="Times New Roman"/>
-              </a:rPr>
-              <a:t>PLOT</a:t>
-            </a:r>
-          </a:p>
-        </p:txBody>
-      </p:sp>
-      <p:cxnSp>
-        <p:nvCxnSpPr>
-          <p:cNvPr id="65" name="Connector 64"/>
-          <p:cNvCxnSpPr/>
-          <p:nvPr/>
-        </p:nvCxnSpPr>
-        <p:spPr>
-          <a:xfrm flipV="1">
-            <a:off x="7699248" y="3730752"/>
-            <a:ext cx="1609344" cy="768096"/>
-          </a:xfrm>
-          <a:prstGeom prst="line">
-            <a:avLst/>
-          </a:prstGeom>
-          <a:ln w="27940">
-            <a:solidFill>
-              <a:srgbClr val="C44E52"/>
-            </a:solidFill>
-          </a:ln>
-          <a:effectLst/>
-        </p:spPr>
-      </p:cxnSp>
-      <p:sp>
-        <p:nvSpPr>
-          <p:cNvPr id="66" name="TextBox 65"/>
-          <p:cNvSpPr txBox="1"/>
-          <p:nvPr/>
-        </p:nvSpPr>
-        <p:spPr>
-          <a:xfrm>
-            <a:off x="7589520" y="4590288"/>
-            <a:ext cx="1828800" cy="548640"/>
-          </a:xfrm>
-          <a:prstGeom prst="rect">
-            <a:avLst/>
-          </a:prstGeom>
-          <a:noFill/>
-        </p:spPr>
-        <p:txBody>
-          <a:bodyPr wrap="square" lIns="0" rIns="0" tIns="0" bIns="0">
-            <a:spAutoFit/>
-          </a:bodyPr>
-          <a:lstStyle/>
-          <a:p>
-            <a:pPr algn="ctr"/>
-            <a:r>
-              <a:rPr sz="950" b="1" i="0">
-                <a:solidFill>
-                  <a:srgbClr val="C44E52"/>
-                </a:solidFill>
-                <a:latin typeface="Times New Roman"/>
-              </a:rPr>
-              <a:t>rejected: supplies PLOT,</a:t>
-            </a:r>
-          </a:p>
-          <a:p>
-            <a:pPr algn="ctr"/>
-            <a:r>
-              <a:rPr sz="950" b="1" i="0">
-                <a:solidFill>
-                  <a:srgbClr val="C44E52"/>
-                </a:solidFill>
-                <a:latin typeface="Times New Roman"/>
-              </a:rPr>
-              <a:t>not in the spec (λ)</a:t>
-            </a:r>
-          </a:p>
-        </p:txBody>
-      </p:sp>
-      <p:sp>
-        <p:nvSpPr>
-          <p:cNvPr id="67" name="Right Arrow 66"/>
-          <p:cNvSpPr/>
-          <p:nvPr/>
-        </p:nvSpPr>
-        <p:spPr>
-          <a:xfrm>
-            <a:off x="9345168" y="2596896"/>
-            <a:ext cx="548640" cy="658368"/>
-          </a:xfrm>
-          <a:prstGeom prst="rightArrow">
-            <a:avLst>
-              <a:gd name="adj1" fmla="val 62000"/>
-              <a:gd name="adj2" fmla="val 42000"/>
-            </a:avLst>
-          </a:prstGeom>
-          <a:solidFill>
-            <a:srgbClr val="8C8C8C"/>
-          </a:solidFill>
-          <a:ln>
-            <a:noFill/>
-          </a:ln>
-          <a:effectLst/>
-        </p:spPr>
-        <p:txBody>
-          <a:bodyPr rtlCol="0" anchor="ctr" lIns="9000" rIns="9000" tIns="4500" bIns="4500" wrap="square"/>
-          <a:lstStyle/>
-          <a:p>
-            <a:pPr algn="ctr"/>
-            <a:r>
-              <a:rPr sz="900" b="1" i="0">
-                <a:solidFill>
-                  <a:srgbClr val="FFFFFF"/>
-                </a:solidFill>
-                <a:latin typeface="Times New Roman"/>
-              </a:rPr>
-              <a:t>train,</a:t>
-            </a:r>
-          </a:p>
-          <a:p>
-            <a:pPr algn="ctr"/>
-            <a:r>
-              <a:rPr sz="900" b="1" i="0">
-                <a:solidFill>
-                  <a:srgbClr val="FFFFFF"/>
-                </a:solidFill>
-                <a:latin typeface="Times New Roman"/>
-              </a:rPr>
-              <a:t>stop early</a:t>
-            </a:r>
-          </a:p>
-        </p:txBody>
-      </p:sp>
-      <p:sp>
-        <p:nvSpPr>
-          <p:cNvPr id="68" name="Rounded Rectangle 67"/>
-          <p:cNvSpPr/>
-          <p:nvPr/>
-        </p:nvSpPr>
-        <p:spPr>
-          <a:xfrm>
-            <a:off x="9884664" y="1773936"/>
-            <a:ext cx="932688" cy="749808"/>
-          </a:xfrm>
-          <a:prstGeom prst="roundRect">
-            <a:avLst>
-              <a:gd name="adj" fmla="val 25000"/>
-            </a:avLst>
-          </a:prstGeom>
-          <a:solidFill>
-            <a:srgbClr val="EEF2F9"/>
-          </a:solidFill>
-          <a:ln w="20320">
-            <a:solidFill>
-              <a:srgbClr val="4C72B0"/>
-            </a:solidFill>
-          </a:ln>
-          <a:effectLst/>
-        </p:spPr>
-        <p:txBody>
-          <a:bodyPr rtlCol="0" anchor="ctr"/>
-          <a:lstStyle/>
-          <a:p>
-            <a:pPr algn="ctr"/>
-          </a:p>
-        </p:txBody>
-      </p:sp>
-      <p:sp>
-        <p:nvSpPr>
-          <p:cNvPr id="69" name="Rectangle 68"/>
-          <p:cNvSpPr/>
-          <p:nvPr/>
-        </p:nvSpPr>
-        <p:spPr>
-          <a:xfrm>
-            <a:off x="10340035" y="1645920"/>
-            <a:ext cx="21945" cy="128016"/>
-          </a:xfrm>
-          <a:prstGeom prst="rect">
-            <a:avLst/>
-          </a:prstGeom>
-          <a:solidFill>
-            <a:srgbClr val="4C72B0"/>
-          </a:solidFill>
-          <a:ln>
-            <a:noFill/>
-          </a:ln>
-          <a:effectLst/>
-        </p:spPr>
-        <p:txBody>
-          <a:bodyPr rtlCol="0" anchor="ctr"/>
-          <a:lstStyle/>
-          <a:p>
-            <a:pPr algn="ctr"/>
-          </a:p>
-        </p:txBody>
-      </p:sp>
-      <p:sp>
-        <p:nvSpPr>
-          <p:cNvPr id="70" name="Oval 69"/>
-          <p:cNvSpPr/>
-          <p:nvPr/>
-        </p:nvSpPr>
-        <p:spPr>
-          <a:xfrm>
-            <a:off x="10305288" y="1554480"/>
-            <a:ext cx="91440" cy="91440"/>
-          </a:xfrm>
-          <a:prstGeom prst="ellipse">
-            <a:avLst/>
-          </a:prstGeom>
-          <a:solidFill>
-            <a:srgbClr val="4C72B0"/>
-          </a:solidFill>
-          <a:ln>
-            <a:noFill/>
-          </a:ln>
-          <a:effectLst/>
-        </p:spPr>
-        <p:txBody>
-          <a:bodyPr rtlCol="0" anchor="ctr"/>
-          <a:lstStyle/>
-          <a:p>
-            <a:pPr algn="ctr"/>
-          </a:p>
-        </p:txBody>
-      </p:sp>
-      <p:sp>
-        <p:nvSpPr>
-          <p:cNvPr id="71" name="Oval 70"/>
-          <p:cNvSpPr/>
-          <p:nvPr/>
-        </p:nvSpPr>
-        <p:spPr>
-          <a:xfrm>
-            <a:off x="10141976" y="2032711"/>
-            <a:ext cx="82296" cy="82296"/>
-          </a:xfrm>
-          <a:prstGeom prst="ellipse">
-            <a:avLst/>
-          </a:prstGeom>
-          <a:solidFill>
-            <a:srgbClr val="4C72B0"/>
-          </a:solidFill>
-          <a:ln>
-            <a:noFill/>
-          </a:ln>
-          <a:effectLst/>
-        </p:spPr>
-        <p:txBody>
-          <a:bodyPr rtlCol="0" anchor="ctr"/>
-          <a:lstStyle/>
-          <a:p>
-            <a:pPr algn="ctr"/>
-          </a:p>
-        </p:txBody>
-      </p:sp>
-      <p:sp>
-        <p:nvSpPr>
-          <p:cNvPr id="72" name="Oval 71"/>
-          <p:cNvSpPr/>
-          <p:nvPr/>
-        </p:nvSpPr>
-        <p:spPr>
-          <a:xfrm>
-            <a:off x="10477743" y="2032711"/>
-            <a:ext cx="82296" cy="82296"/>
-          </a:xfrm>
-          <a:prstGeom prst="ellipse">
-            <a:avLst/>
-          </a:prstGeom>
-          <a:solidFill>
-            <a:srgbClr val="4C72B0"/>
-          </a:solidFill>
-          <a:ln>
-            <a:noFill/>
-          </a:ln>
-          <a:effectLst/>
-        </p:spPr>
-        <p:txBody>
-          <a:bodyPr rtlCol="0" anchor="ctr"/>
-          <a:lstStyle/>
-          <a:p>
-            <a:pPr algn="ctr"/>
-          </a:p>
-        </p:txBody>
-      </p:sp>
-      <p:sp>
-        <p:nvSpPr>
-          <p:cNvPr id="73" name="Rounded Rectangle 72"/>
-          <p:cNvSpPr/>
-          <p:nvPr/>
-        </p:nvSpPr>
-        <p:spPr>
-          <a:xfrm>
-            <a:off x="10220431" y="2238816"/>
-            <a:ext cx="261152" cy="27432"/>
-          </a:xfrm>
-          <a:prstGeom prst="roundRect">
-            <a:avLst>
-              <a:gd name="adj" fmla="val 50000"/>
-            </a:avLst>
-          </a:prstGeom>
-          <a:solidFill>
-            <a:srgbClr val="4C72B0"/>
-          </a:solidFill>
-          <a:ln>
-            <a:noFill/>
-          </a:ln>
-          <a:effectLst/>
-        </p:spPr>
-        <p:txBody>
-          <a:bodyPr rtlCol="0" anchor="ctr"/>
-          <a:lstStyle/>
-          <a:p>
-            <a:pPr algn="ctr"/>
-          </a:p>
-        </p:txBody>
-      </p:sp>
-      <p:sp>
-        <p:nvSpPr>
-          <p:cNvPr id="74" name="TextBox 73"/>
-          <p:cNvSpPr txBox="1"/>
-          <p:nvPr/>
-        </p:nvSpPr>
-        <p:spPr>
-          <a:xfrm>
-            <a:off x="9564624" y="2560320"/>
-            <a:ext cx="1572768" cy="256032"/>
-          </a:xfrm>
-          <a:prstGeom prst="rect">
-            <a:avLst/>
-          </a:prstGeom>
-          <a:noFill/>
-        </p:spPr>
-        <p:txBody>
-          <a:bodyPr wrap="square" lIns="0" rIns="0" tIns="0" bIns="0">
-            <a:spAutoFit/>
-          </a:bodyPr>
-          <a:lstStyle/>
-          <a:p>
-            <a:pPr algn="ctr"/>
-            <a:r>
-              <a:rPr sz="1050" b="1" i="0">
-                <a:solidFill>
-                  <a:srgbClr val="1F1F1E"/>
-                </a:solidFill>
-                <a:latin typeface="Times New Roman"/>
-              </a:rPr>
-              <a:t>Student LLM</a:t>
-            </a:r>
-          </a:p>
-        </p:txBody>
-      </p:sp>
-      <p:sp>
-        <p:nvSpPr>
-          <p:cNvPr id="75" name="Rounded Rectangle 74"/>
-          <p:cNvSpPr/>
-          <p:nvPr/>
-        </p:nvSpPr>
-        <p:spPr>
-          <a:xfrm>
-            <a:off x="9893808" y="3246120"/>
-            <a:ext cx="969264" cy="219456"/>
-          </a:xfrm>
-          <a:prstGeom prst="roundRect">
-            <a:avLst>
-              <a:gd name="adj" fmla="val 25000"/>
-            </a:avLst>
-          </a:prstGeom>
-          <a:solidFill>
-            <a:srgbClr val="FFFFFF"/>
-          </a:solidFill>
-          <a:ln w="13970">
-            <a:solidFill>
-              <a:srgbClr val="8C8C8C"/>
-            </a:solidFill>
-          </a:ln>
-          <a:effectLst/>
-        </p:spPr>
-        <p:txBody>
-          <a:bodyPr rtlCol="0" anchor="ctr"/>
-          <a:lstStyle/>
-          <a:p>
-            <a:pPr algn="ctr"/>
-          </a:p>
-        </p:txBody>
-      </p:sp>
-      <p:sp>
-        <p:nvSpPr>
-          <p:cNvPr id="76" name="Rounded Rectangle 75"/>
-          <p:cNvSpPr/>
-          <p:nvPr/>
-        </p:nvSpPr>
-        <p:spPr>
-          <a:xfrm>
-            <a:off x="9921240" y="3273552"/>
-            <a:ext cx="822960" cy="164592"/>
-          </a:xfrm>
-          <a:prstGeom prst="roundRect">
-            <a:avLst>
-              <a:gd name="adj" fmla="val 30000"/>
-            </a:avLst>
-          </a:prstGeom>
-          <a:solidFill>
-            <a:srgbClr val="4C72B0"/>
-          </a:solidFill>
-          <a:ln>
-            <a:noFill/>
-          </a:ln>
-          <a:effectLst/>
-        </p:spPr>
-        <p:txBody>
-          <a:bodyPr rtlCol="0" anchor="ctr"/>
-          <a:lstStyle/>
-          <a:p>
-            <a:pPr algn="ctr"/>
-          </a:p>
-        </p:txBody>
-      </p:sp>
-      <p:sp>
-        <p:nvSpPr>
-          <p:cNvPr id="77" name="Oval 76"/>
-          <p:cNvSpPr/>
-          <p:nvPr/>
-        </p:nvSpPr>
-        <p:spPr>
-          <a:xfrm>
-            <a:off x="10881360" y="3191256"/>
-            <a:ext cx="274320" cy="274320"/>
-          </a:xfrm>
-          <a:prstGeom prst="ellipse">
-            <a:avLst/>
-          </a:prstGeom>
-          <a:solidFill>
-            <a:srgbClr val="55A868"/>
-          </a:solidFill>
-          <a:ln w="16510">
-            <a:solidFill>
-              <a:srgbClr val="FFFFFF"/>
-            </a:solidFill>
-          </a:ln>
-          <a:effectLst/>
-        </p:spPr>
-        <p:txBody>
-          <a:bodyPr rtlCol="0" anchor="ctr" lIns="9000" rIns="9000" tIns="4500" bIns="4500" wrap="square"/>
-          <a:lstStyle/>
-          <a:p>
-            <a:pPr algn="ctr"/>
-            <a:r>
-              <a:rPr sz="1000" b="1" i="0">
-                <a:solidFill>
-                  <a:srgbClr val="FFFFFF"/>
-                </a:solidFill>
-                <a:latin typeface="Times New Roman"/>
-              </a:rPr>
-              <a:t>✓</a:t>
-            </a:r>
-          </a:p>
-        </p:txBody>
-      </p:sp>
-      <p:sp>
-        <p:nvSpPr>
-          <p:cNvPr id="78" name="TextBox 77"/>
-          <p:cNvSpPr txBox="1"/>
-          <p:nvPr/>
-        </p:nvSpPr>
-        <p:spPr>
-          <a:xfrm>
-            <a:off x="9710928" y="3529584"/>
-            <a:ext cx="1554480" cy="256032"/>
-          </a:xfrm>
-          <a:prstGeom prst="rect">
-            <a:avLst/>
-          </a:prstGeom>
-          <a:noFill/>
-        </p:spPr>
-        <p:txBody>
-          <a:bodyPr wrap="square" lIns="0" rIns="0" tIns="0" bIns="0">
-            <a:spAutoFit/>
-          </a:bodyPr>
-          <a:lstStyle/>
-          <a:p>
-            <a:pPr algn="ctr"/>
-            <a:r>
-              <a:rPr sz="950" b="0" i="0">
-                <a:solidFill>
-                  <a:srgbClr val="6B6A63"/>
-                </a:solidFill>
-                <a:latin typeface="Times New Roman"/>
-              </a:rPr>
-              <a:t>demand absorbed</a:t>
-            </a:r>
-          </a:p>
-        </p:txBody>
-      </p:sp>
-      <p:sp>
-        <p:nvSpPr>
-          <p:cNvPr id="79" name="TextBox 78"/>
-          <p:cNvSpPr txBox="1"/>
-          <p:nvPr/>
-        </p:nvSpPr>
-        <p:spPr>
-          <a:xfrm>
-            <a:off x="9601200" y="3950208"/>
-            <a:ext cx="1417320" cy="274320"/>
-          </a:xfrm>
-          <a:prstGeom prst="rect">
-            <a:avLst/>
-          </a:prstGeom>
-          <a:noFill/>
-        </p:spPr>
-        <p:txBody>
-          <a:bodyPr wrap="square" lIns="0" rIns="0" tIns="0" bIns="0">
-            <a:spAutoFit/>
-          </a:bodyPr>
-          <a:lstStyle/>
-          <a:p>
-            <a:pPr algn="ctr"/>
-            <a:r>
-              <a:rPr sz="1000" b="0" i="0">
-                <a:solidFill>
-                  <a:srgbClr val="6B6A63"/>
-                </a:solidFill>
-                <a:latin typeface="Times New Roman"/>
-              </a:rPr>
-              <a:t>live requests:</a:t>
-            </a:r>
-          </a:p>
-        </p:txBody>
-      </p:sp>
-      <p:sp>
-        <p:nvSpPr>
-          <p:cNvPr id="80" name="Rounded Rectangle 79"/>
-          <p:cNvSpPr/>
-          <p:nvPr/>
-        </p:nvSpPr>
-        <p:spPr>
-          <a:xfrm>
-            <a:off x="9601200" y="4224528"/>
-            <a:ext cx="1298448" cy="475488"/>
-          </a:xfrm>
-          <a:prstGeom prst="roundRect">
-            <a:avLst>
-              <a:gd name="adj" fmla="val 25000"/>
-            </a:avLst>
-          </a:prstGeom>
-          <a:solidFill>
-            <a:srgbClr val="EEF2F9"/>
-          </a:solidFill>
-          <a:ln w="15240">
-            <a:solidFill>
-              <a:srgbClr val="4C72B0"/>
-            </a:solidFill>
-          </a:ln>
-          <a:effectLst/>
-        </p:spPr>
-        <p:txBody>
-          <a:bodyPr rtlCol="0" anchor="ctr"/>
-          <a:lstStyle/>
-          <a:p>
-            <a:pPr algn="ctr"/>
-          </a:p>
-        </p:txBody>
-      </p:sp>
-      <p:sp>
-        <p:nvSpPr>
-          <p:cNvPr id="81" name="TextBox 80"/>
-          <p:cNvSpPr txBox="1"/>
-          <p:nvPr/>
-        </p:nvSpPr>
-        <p:spPr>
-          <a:xfrm>
-            <a:off x="9674352" y="4279392"/>
-            <a:ext cx="1188720" cy="384048"/>
-          </a:xfrm>
-          <a:prstGeom prst="rect">
-            <a:avLst/>
-          </a:prstGeom>
-          <a:noFill/>
-        </p:spPr>
-        <p:txBody>
-          <a:bodyPr wrap="square" lIns="0" rIns="0" tIns="0" bIns="0">
-            <a:spAutoFit/>
-          </a:bodyPr>
-          <a:lstStyle/>
-          <a:p>
-            <a:pPr algn="l"/>
-            <a:r>
-              <a:rPr sz="750" b="0" i="0">
-                <a:solidFill>
-                  <a:srgbClr val="4C72B0"/>
-                </a:solidFill>
-                <a:latin typeface="Consolas"/>
-              </a:rPr>
-              <a:t>"Avg dues</a:t>
-            </a:r>
-          </a:p>
-          <a:p>
-            <a:pPr algn="l"/>
-            <a:r>
-              <a:rPr sz="750" b="0" i="0">
-                <a:solidFill>
-                  <a:srgbClr val="4C72B0"/>
-                </a:solidFill>
-                <a:latin typeface="Consolas"/>
-              </a:rPr>
-              <a:t> per club?"</a:t>
-            </a:r>
-          </a:p>
-        </p:txBody>
-      </p:sp>
-      <p:sp>
-        <p:nvSpPr>
-          <p:cNvPr id="82" name="Rounded Rectangle 81"/>
-          <p:cNvSpPr/>
-          <p:nvPr/>
-        </p:nvSpPr>
-        <p:spPr>
-          <a:xfrm>
-            <a:off x="9601200" y="4791456"/>
-            <a:ext cx="1298448" cy="475488"/>
-          </a:xfrm>
-          <a:prstGeom prst="roundRect">
-            <a:avLst>
-              <a:gd name="adj" fmla="val 25000"/>
-            </a:avLst>
-          </a:prstGeom>
-          <a:solidFill>
-            <a:srgbClr val="FDF0E7"/>
-          </a:solidFill>
-          <a:ln w="15240">
-            <a:solidFill>
-              <a:srgbClr val="DD8452"/>
-            </a:solidFill>
-          </a:ln>
-          <a:effectLst/>
-        </p:spPr>
-        <p:txBody>
-          <a:bodyPr rtlCol="0" anchor="ctr"/>
-          <a:lstStyle/>
-          <a:p>
-            <a:pPr algn="ctr"/>
-          </a:p>
-        </p:txBody>
-      </p:sp>
-      <p:sp>
-        <p:nvSpPr>
-          <p:cNvPr id="83" name="TextBox 82"/>
-          <p:cNvSpPr txBox="1"/>
-          <p:nvPr/>
-        </p:nvSpPr>
-        <p:spPr>
-          <a:xfrm>
-            <a:off x="9674352" y="4846320"/>
-            <a:ext cx="1188720" cy="384048"/>
-          </a:xfrm>
-          <a:prstGeom prst="rect">
-            <a:avLst/>
-          </a:prstGeom>
-          <a:noFill/>
-        </p:spPr>
-        <p:txBody>
-          <a:bodyPr wrap="square" lIns="0" rIns="0" tIns="0" bIns="0">
-            <a:spAutoFit/>
-          </a:bodyPr>
-          <a:lstStyle/>
-          <a:p>
-            <a:pPr algn="l"/>
-            <a:r>
-              <a:rPr sz="750" b="0" i="0">
-                <a:solidFill>
-                  <a:srgbClr val="DD8452"/>
-                </a:solidFill>
-                <a:latin typeface="Consolas"/>
-              </a:rPr>
-              <a:t>"Plot a bar</a:t>
-            </a:r>
-          </a:p>
-          <a:p>
-            <a:pPr algn="l"/>
-            <a:r>
-              <a:rPr sz="750" b="0" i="0">
-                <a:solidFill>
-                  <a:srgbClr val="DD8452"/>
-                </a:solidFill>
-                <a:latin typeface="Consolas"/>
-              </a:rPr>
-              <a:t> chart"</a:t>
-            </a:r>
-          </a:p>
-        </p:txBody>
-      </p:sp>
-      <p:sp>
-        <p:nvSpPr>
-          <p:cNvPr id="84" name="Rounded Rectangle 83"/>
-          <p:cNvSpPr/>
-          <p:nvPr/>
-        </p:nvSpPr>
-        <p:spPr>
-          <a:xfrm>
-            <a:off x="11356848" y="3749039"/>
-            <a:ext cx="182880" cy="1783080"/>
-          </a:xfrm>
-          <a:prstGeom prst="roundRect">
-            <a:avLst>
-              <a:gd name="adj" fmla="val 25000"/>
-            </a:avLst>
-          </a:prstGeom>
-          <a:solidFill>
-            <a:srgbClr val="DFE5EF"/>
-          </a:solidFill>
-          <a:ln w="15240">
-            <a:solidFill>
-              <a:srgbClr val="4C72B0"/>
-            </a:solidFill>
-          </a:ln>
-          <a:effectLst/>
-        </p:spPr>
-        <p:txBody>
-          <a:bodyPr rtlCol="0" anchor="ctr"/>
-          <a:lstStyle/>
-          <a:p>
-            <a:pPr algn="ctr"/>
-          </a:p>
-        </p:txBody>
-      </p:sp>
-      <p:sp>
-        <p:nvSpPr>
-          <p:cNvPr id="85" name="Rounded Rectangle 84"/>
-          <p:cNvSpPr/>
-          <p:nvPr/>
-        </p:nvSpPr>
-        <p:spPr>
-          <a:xfrm>
-            <a:off x="11978640" y="3749039"/>
-            <a:ext cx="182880" cy="1783080"/>
-          </a:xfrm>
-          <a:prstGeom prst="roundRect">
-            <a:avLst>
-              <a:gd name="adj" fmla="val 25000"/>
-            </a:avLst>
-          </a:prstGeom>
-          <a:solidFill>
-            <a:srgbClr val="DFE5EF"/>
-          </a:solidFill>
-          <a:ln w="15240">
-            <a:solidFill>
-              <a:srgbClr val="4C72B0"/>
-            </a:solidFill>
-          </a:ln>
-          <a:effectLst/>
-        </p:spPr>
-        <p:txBody>
-          <a:bodyPr rtlCol="0" anchor="ctr"/>
-          <a:lstStyle/>
-          <a:p>
-            <a:pPr algn="ctr"/>
-          </a:p>
-        </p:txBody>
-      </p:sp>
-      <p:sp>
-        <p:nvSpPr>
-          <p:cNvPr id="86" name="Rounded Rectangle 85"/>
-          <p:cNvSpPr/>
-          <p:nvPr/>
-        </p:nvSpPr>
-        <p:spPr>
-          <a:xfrm>
-            <a:off x="11292840" y="3511296"/>
-            <a:ext cx="932688" cy="256032"/>
-          </a:xfrm>
-          <a:prstGeom prst="roundRect">
-            <a:avLst>
-              <a:gd name="adj" fmla="val 25000"/>
-            </a:avLst>
-          </a:prstGeom>
-          <a:solidFill>
-            <a:srgbClr val="DFE5EF"/>
-          </a:solidFill>
-          <a:ln w="15240">
-            <a:solidFill>
-              <a:srgbClr val="4C72B0"/>
-            </a:solidFill>
-          </a:ln>
-          <a:effectLst/>
-        </p:spPr>
-        <p:txBody>
-          <a:bodyPr rtlCol="0" anchor="ctr"/>
-          <a:lstStyle/>
-          <a:p>
-            <a:pPr algn="ctr"/>
-          </a:p>
-        </p:txBody>
-      </p:sp>
-      <p:sp>
-        <p:nvSpPr>
-          <p:cNvPr id="87" name="Oval 86"/>
-          <p:cNvSpPr/>
-          <p:nvPr/>
-        </p:nvSpPr>
-        <p:spPr>
-          <a:xfrm>
-            <a:off x="11430000" y="3310128"/>
-            <a:ext cx="402336" cy="402336"/>
-          </a:xfrm>
-          <a:prstGeom prst="ellipse">
-            <a:avLst/>
-          </a:prstGeom>
-          <a:solidFill>
-            <a:srgbClr val="55A868"/>
-          </a:solidFill>
-          <a:ln w="19050">
-            <a:solidFill>
-              <a:srgbClr val="FFFFFF"/>
-            </a:solidFill>
-          </a:ln>
-          <a:effectLst/>
-        </p:spPr>
-        <p:txBody>
-          <a:bodyPr rtlCol="0" anchor="ctr" lIns="9000" rIns="9000" tIns="4500" bIns="4500" wrap="square"/>
-          <a:lstStyle/>
-          <a:p>
-            <a:pPr algn="ctr"/>
-            <a:r>
-              <a:rPr sz="900" b="1" i="0">
-                <a:solidFill>
-                  <a:srgbClr val="FFFFFF"/>
-                </a:solidFill>
-                <a:latin typeface="Times New Roman"/>
-              </a:rPr>
-              <a:t>90%</a:t>
-            </a:r>
-          </a:p>
-        </p:txBody>
-      </p:sp>
-      <p:sp>
-        <p:nvSpPr>
-          <p:cNvPr id="88" name="TextBox 87"/>
-          <p:cNvSpPr txBox="1"/>
-          <p:nvPr/>
-        </p:nvSpPr>
-        <p:spPr>
-          <a:xfrm>
-            <a:off x="11064240" y="2999232"/>
-            <a:ext cx="1143000" cy="292608"/>
-          </a:xfrm>
-          <a:prstGeom prst="rect">
-            <a:avLst/>
-          </a:prstGeom>
-          <a:noFill/>
-        </p:spPr>
-        <p:txBody>
-          <a:bodyPr wrap="square" lIns="0" rIns="0" tIns="0" bIns="0">
-            <a:spAutoFit/>
-          </a:bodyPr>
-          <a:lstStyle/>
-          <a:p>
-            <a:pPr algn="ctr"/>
-            <a:r>
-              <a:rPr sz="900" b="0" i="0">
-                <a:solidFill>
-                  <a:srgbClr val="6B6A63"/>
-                </a:solidFill>
-                <a:latin typeface="Times New Roman"/>
-              </a:rPr>
-              <a:t>conformal gate</a:t>
-            </a:r>
-          </a:p>
-        </p:txBody>
-      </p:sp>
-      <p:cxnSp>
-        <p:nvCxnSpPr>
-          <p:cNvPr id="89" name="Connector 88"/>
-          <p:cNvCxnSpPr/>
-          <p:nvPr/>
-        </p:nvCxnSpPr>
-        <p:spPr>
-          <a:xfrm>
-            <a:off x="10936224" y="4462272"/>
-            <a:ext cx="402336" cy="0"/>
-          </a:xfrm>
-          <a:prstGeom prst="line">
-            <a:avLst/>
-          </a:prstGeom>
-          <a:ln w="33020">
-            <a:solidFill>
-              <a:srgbClr val="4C72B0"/>
-            </a:solidFill>
-            <a:tailEnd type="triangle" w="med" len="med"/>
-          </a:ln>
-          <a:effectLst/>
-        </p:spPr>
-      </p:cxnSp>
-      <p:cxnSp>
-        <p:nvCxnSpPr>
-          <p:cNvPr id="90" name="Connector 89"/>
-          <p:cNvCxnSpPr/>
-          <p:nvPr/>
-        </p:nvCxnSpPr>
-        <p:spPr>
-          <a:xfrm>
-            <a:off x="10936224" y="5029200"/>
-            <a:ext cx="402336" cy="256032"/>
-          </a:xfrm>
-          <a:prstGeom prst="line">
-            <a:avLst/>
-          </a:prstGeom>
-          <a:ln w="33020">
-            <a:solidFill>
-              <a:srgbClr val="DD8452"/>
-            </a:solidFill>
-            <a:tailEnd type="triangle" w="med" len="med"/>
-          </a:ln>
-          <a:effectLst/>
-        </p:spPr>
-      </p:cxnSp>
-      <p:sp>
-        <p:nvSpPr>
-          <p:cNvPr id="91" name="Rounded Rectangle 90"/>
-          <p:cNvSpPr/>
-          <p:nvPr/>
-        </p:nvSpPr>
-        <p:spPr>
-          <a:xfrm>
-            <a:off x="11265408" y="3931920"/>
-            <a:ext cx="896112" cy="457200"/>
-          </a:xfrm>
-          <a:prstGeom prst="roundRect">
-            <a:avLst>
-              <a:gd name="adj" fmla="val 25000"/>
-            </a:avLst>
-          </a:prstGeom>
-          <a:solidFill>
-            <a:srgbClr val="EEF2F9"/>
-          </a:solidFill>
-          <a:ln w="17780">
-            <a:solidFill>
-              <a:srgbClr val="4C72B0"/>
-            </a:solidFill>
-          </a:ln>
-          <a:effectLst/>
-        </p:spPr>
-        <p:txBody>
-          <a:bodyPr rtlCol="0" anchor="ctr" lIns="9000" rIns="9000" tIns="4500" bIns="4500" wrap="square"/>
-          <a:lstStyle/>
-          <a:p>
-            <a:pPr algn="ctr"/>
-            <a:r>
-              <a:rPr sz="850" b="1" i="0">
-                <a:solidFill>
-                  <a:srgbClr val="4C72B0"/>
-                </a:solidFill>
-                <a:latin typeface="Times New Roman"/>
-              </a:rPr>
-              <a:t>→ Student</a:t>
-            </a:r>
-          </a:p>
-        </p:txBody>
-      </p:sp>
-      <p:sp>
-        <p:nvSpPr>
-          <p:cNvPr id="92" name="Rounded Rectangle 91"/>
-          <p:cNvSpPr/>
-          <p:nvPr/>
-        </p:nvSpPr>
-        <p:spPr>
-          <a:xfrm>
-            <a:off x="11265408" y="5349240"/>
-            <a:ext cx="896112" cy="457200"/>
-          </a:xfrm>
-          <a:prstGeom prst="roundRect">
-            <a:avLst>
-              <a:gd name="adj" fmla="val 25000"/>
-            </a:avLst>
-          </a:prstGeom>
-          <a:solidFill>
-            <a:srgbClr val="FDF0E7"/>
-          </a:solidFill>
-          <a:ln w="17780">
-            <a:solidFill>
-              <a:srgbClr val="DD8452"/>
-            </a:solidFill>
-          </a:ln>
-          <a:effectLst/>
-        </p:spPr>
-        <p:txBody>
-          <a:bodyPr rtlCol="0" anchor="ctr" lIns="9000" rIns="9000" tIns="4500" bIns="4500" wrap="square"/>
-          <a:lstStyle/>
-          <a:p>
-            <a:pPr algn="ctr"/>
-            <a:r>
-              <a:rPr sz="850" b="1" i="0">
-                <a:solidFill>
-                  <a:srgbClr val="DD8452"/>
-                </a:solidFill>
-                <a:latin typeface="Times New Roman"/>
-              </a:rPr>
-              <a:t>refuse</a:t>
-            </a:r>
-          </a:p>
-        </p:txBody>
-      </p:sp>
-      <p:sp>
-        <p:nvSpPr>
-          <p:cNvPr id="93" name="Rounded Rectangle 92"/>
-          <p:cNvSpPr/>
-          <p:nvPr/>
-        </p:nvSpPr>
-        <p:spPr>
-          <a:xfrm>
-            <a:off x="10954512" y="1417320"/>
-            <a:ext cx="1188720" cy="1188720"/>
-          </a:xfrm>
-          <a:prstGeom prst="roundRect">
-            <a:avLst>
-              <a:gd name="adj" fmla="val 25000"/>
-            </a:avLst>
-          </a:prstGeom>
-          <a:solidFill>
-            <a:srgbClr val="FFFFFF"/>
-          </a:solidFill>
-          <a:ln w="20320">
-            <a:solidFill>
-              <a:srgbClr val="55A868"/>
-            </a:solidFill>
-          </a:ln>
-          <a:effectLst/>
-        </p:spPr>
-        <p:txBody>
-          <a:bodyPr rtlCol="0" anchor="ctr" lIns="9000" rIns="9000" tIns="4500" bIns="4500" wrap="square"/>
-          <a:lstStyle/>
-          <a:p>
-            <a:pPr algn="ctr"/>
-            <a:r>
-              <a:rPr sz="850" b="0" i="0">
-                <a:solidFill>
-                  <a:srgbClr val="1F1F1E"/>
-                </a:solidFill>
-                <a:latin typeface="Times New Roman"/>
-              </a:rPr>
-              <a:t>Certified:</a:t>
-            </a:r>
-          </a:p>
-          <a:p>
-            <a:pPr algn="ctr"/>
-            <a:r>
-              <a:rPr sz="850" b="0" i="0">
-                <a:solidFill>
-                  <a:srgbClr val="1F1F1E"/>
-                </a:solidFill>
-                <a:latin typeface="Times New Roman"/>
-              </a:rPr>
-              <a:t>in-task</a:t>
-            </a:r>
-          </a:p>
-          <a:p>
-            <a:pPr algn="ctr"/>
-            <a:r>
-              <a:rPr sz="850" b="0" i="0">
-                <a:solidFill>
-                  <a:srgbClr val="1F1F1E"/>
-                </a:solidFill>
-                <a:latin typeface="Times New Roman"/>
-              </a:rPr>
-              <a:t>≥ 0.93</a:t>
-            </a:r>
-          </a:p>
-          <a:p>
-            <a:pPr algn="ctr"/>
-            <a:r>
-              <a:rPr sz="850" b="0" i="0">
-                <a:solidFill>
-                  <a:srgbClr val="1F1F1E"/>
-                </a:solidFill>
-                <a:latin typeface="Times New Roman"/>
-              </a:rPr>
-              <a:t>off-task</a:t>
-            </a:r>
-          </a:p>
-          <a:p>
-            <a:pPr algn="ctr"/>
-            <a:r>
-              <a:rPr sz="850" b="0" i="0">
-                <a:solidFill>
-                  <a:srgbClr val="1F1F1E"/>
-                </a:solidFill>
-                <a:latin typeface="Times New Roman"/>
-              </a:rPr>
-              <a:t>≤ 0.25</a:t>
-            </a:r>
-          </a:p>
-        </p:txBody>
-      </p:sp>
-      <p:cxnSp>
-        <p:nvCxnSpPr>
-          <p:cNvPr id="94" name="Connector 93"/>
-          <p:cNvCxnSpPr/>
-          <p:nvPr/>
-        </p:nvCxnSpPr>
-        <p:spPr>
-          <a:xfrm flipV="1">
-            <a:off x="10835640" y="2011680"/>
-            <a:ext cx="137160" cy="137160"/>
-          </a:xfrm>
-          <a:prstGeom prst="line">
-            <a:avLst/>
-          </a:prstGeom>
-          <a:ln w="20320">
-            <a:solidFill>
-              <a:srgbClr val="55A868"/>
-            </a:solidFill>
-          </a:ln>
-          <a:effectLst/>
-        </p:spPr>
-      </p:cxnSp>
-      <p:sp>
-        <p:nvSpPr>
-          <p:cNvPr id="95" name="TextBox 94"/>
-          <p:cNvSpPr txBox="1"/>
-          <p:nvPr/>
-        </p:nvSpPr>
-        <p:spPr>
-          <a:xfrm>
-            <a:off x="182879" y="5349240"/>
-            <a:ext cx="1965960" cy="685800"/>
-          </a:xfrm>
-          <a:prstGeom prst="rect">
-            <a:avLst/>
-          </a:prstGeom>
-          <a:noFill/>
-        </p:spPr>
-        <p:txBody>
-          <a:bodyPr wrap="square" lIns="0" rIns="0" tIns="0" bIns="0">
-            <a:spAutoFit/>
-          </a:bodyPr>
-          <a:lstStyle/>
-          <a:p>
-            <a:pPr algn="ctr"/>
-            <a:r>
-              <a:rPr sz="950" b="0" i="0">
-                <a:solidFill>
-                  <a:srgbClr val="6B6A63"/>
-                </a:solidFill>
-                <a:latin typeface="Times New Roman"/>
-              </a:rPr>
-              <a:t>one backward pass at the</a:t>
-            </a:r>
-          </a:p>
-          <a:p>
-            <a:pPr algn="ctr"/>
-            <a:r>
-              <a:rPr sz="950" b="0" i="0">
-                <a:solidFill>
-                  <a:srgbClr val="6B6A63"/>
-                </a:solidFill>
-                <a:latin typeface="Times New Roman"/>
-              </a:rPr>
-              <a:t>student's init reads each</a:t>
-            </a:r>
-          </a:p>
-          <a:p>
-            <a:pPr algn="ctr"/>
-            <a:r>
-              <a:rPr sz="950" b="0" i="0">
-                <a:solidFill>
-                  <a:srgbClr val="6B6A63"/>
-                </a:solidFill>
-                <a:latin typeface="Times New Roman"/>
-              </a:rPr>
-              <a:t>query's missing skills</a:t>
-            </a:r>
-          </a:p>
-        </p:txBody>
-      </p:sp>
-      <p:sp>
-        <p:nvSpPr>
-          <p:cNvPr id="96" name="TextBox 95"/>
-          <p:cNvSpPr txBox="1"/>
-          <p:nvPr/>
-        </p:nvSpPr>
-        <p:spPr>
-          <a:xfrm>
-            <a:off x="2560320" y="5349240"/>
-            <a:ext cx="1965960" cy="685800"/>
-          </a:xfrm>
-          <a:prstGeom prst="rect">
-            <a:avLst/>
-          </a:prstGeom>
-          <a:noFill/>
-        </p:spPr>
-        <p:txBody>
-          <a:bodyPr wrap="square" lIns="0" rIns="0" tIns="0" bIns="0">
-            <a:spAutoFit/>
-          </a:bodyPr>
-          <a:lstStyle/>
-          <a:p>
-            <a:pPr algn="ctr"/>
-            <a:r>
-              <a:rPr sz="950" b="0" i="0">
-                <a:solidFill>
-                  <a:srgbClr val="6B6A63"/>
-                </a:solidFill>
-                <a:latin typeface="Times New Roman"/>
-              </a:rPr>
-              <a:t>a sparse dictionary over</a:t>
-            </a:r>
-          </a:p>
-          <a:p>
-            <a:pPr algn="ctr"/>
-            <a:r>
-              <a:rPr sz="950" b="0" i="0">
-                <a:solidFill>
-                  <a:srgbClr val="6B6A63"/>
-                </a:solidFill>
-                <a:latin typeface="Times New Roman"/>
-              </a:rPr>
-              <a:t>many teacher traces factors</a:t>
-            </a:r>
-          </a:p>
-          <a:p>
-            <a:pPr algn="ctr"/>
-            <a:r>
-              <a:rPr sz="950" b="0" i="0">
-                <a:solidFill>
-                  <a:srgbClr val="6B6A63"/>
-                </a:solidFill>
-                <a:latin typeface="Times New Roman"/>
-              </a:rPr>
-              <a:t>gradients into named atoms</a:t>
-            </a:r>
-          </a:p>
-        </p:txBody>
-      </p:sp>
-      <p:sp>
-        <p:nvSpPr>
-          <p:cNvPr id="97" name="TextBox 96"/>
-          <p:cNvSpPr txBox="1"/>
-          <p:nvPr/>
-        </p:nvSpPr>
-        <p:spPr>
-          <a:xfrm>
-            <a:off x="5074920" y="5349240"/>
-            <a:ext cx="1965960" cy="685800"/>
-          </a:xfrm>
-          <a:prstGeom prst="rect">
-            <a:avLst/>
-          </a:prstGeom>
-          <a:noFill/>
-        </p:spPr>
-        <p:txBody>
-          <a:bodyPr wrap="square" lIns="0" rIns="0" tIns="0" bIns="0">
-            <a:spAutoFit/>
-          </a:bodyPr>
-          <a:lstStyle/>
-          <a:p>
-            <a:pPr algn="ctr"/>
-            <a:r>
-              <a:rPr sz="950" b="0" i="0">
-                <a:solidFill>
-                  <a:srgbClr val="6B6A63"/>
-                </a:solidFill>
-                <a:latin typeface="Times New Roman"/>
-              </a:rPr>
-              <a:t>the atoms the k queries</a:t>
-            </a:r>
-          </a:p>
-          <a:p>
-            <a:pPr algn="ctr"/>
-            <a:r>
-              <a:rPr sz="950" b="0" i="0">
-                <a:solidFill>
-                  <a:srgbClr val="6B6A63"/>
-                </a:solidFill>
-                <a:latin typeface="Times New Roman"/>
-              </a:rPr>
-              <a:t>activate form the task</a:t>
-            </a:r>
-          </a:p>
-          <a:p>
-            <a:pPr algn="ctr"/>
-            <a:r>
-              <a:rPr sz="950" b="0" i="0">
-                <a:solidFill>
-                  <a:srgbClr val="6B6A63"/>
-                </a:solidFill>
-                <a:latin typeface="Times New Roman"/>
-              </a:rPr>
-              <a:t>specification</a:t>
-            </a:r>
-          </a:p>
-        </p:txBody>
-      </p:sp>
-      <p:sp>
-        <p:nvSpPr>
-          <p:cNvPr id="98" name="TextBox 97"/>
-          <p:cNvSpPr txBox="1"/>
-          <p:nvPr/>
-        </p:nvSpPr>
-        <p:spPr>
-          <a:xfrm>
-            <a:off x="7543800" y="5349240"/>
-            <a:ext cx="1965960" cy="685800"/>
-          </a:xfrm>
-          <a:prstGeom prst="rect">
-            <a:avLst/>
-          </a:prstGeom>
-          <a:noFill/>
-        </p:spPr>
-        <p:txBody>
-          <a:bodyPr wrap="square" lIns="0" rIns="0" tIns="0" bIns="0">
-            <a:spAutoFit/>
-          </a:bodyPr>
-          <a:lstStyle/>
-          <a:p>
-            <a:pPr algn="ctr"/>
-            <a:r>
-              <a:rPr sz="950" b="0" i="0">
-                <a:solidFill>
-                  <a:srgbClr val="6B6A63"/>
-                </a:solidFill>
-                <a:latin typeface="Times New Roman"/>
-              </a:rPr>
-              <a:t>traces are scored by the atoms</a:t>
-            </a:r>
-          </a:p>
-          <a:p>
-            <a:pPr algn="ctr"/>
-            <a:r>
-              <a:rPr sz="950" b="0" i="0">
-                <a:solidFill>
-                  <a:srgbClr val="6B6A63"/>
-                </a:solidFill>
-                <a:latin typeface="Times New Roman"/>
-              </a:rPr>
-              <a:t>they supply; budget filled from</a:t>
-            </a:r>
-          </a:p>
-          <a:p>
-            <a:pPr algn="ctr"/>
-            <a:r>
-              <a:rPr sz="950" b="0" i="0">
-                <a:solidFill>
-                  <a:srgbClr val="6B6A63"/>
-                </a:solidFill>
-                <a:latin typeface="Times New Roman"/>
-              </a:rPr>
-              <a:t>the top; stop once absorbed</a:t>
-            </a:r>
-          </a:p>
-        </p:txBody>
-      </p:sp>
-      <p:sp>
-        <p:nvSpPr>
-          <p:cNvPr id="99" name="Rounded Rectangle 98"/>
-          <p:cNvSpPr/>
-          <p:nvPr/>
-        </p:nvSpPr>
-        <p:spPr>
-          <a:xfrm>
-            <a:off x="2423160" y="6199632"/>
-            <a:ext cx="7498079" cy="457200"/>
-          </a:xfrm>
-          <a:prstGeom prst="roundRect">
-            <a:avLst>
-              <a:gd name="adj" fmla="val 50000"/>
-            </a:avLst>
-          </a:prstGeom>
-          <a:solidFill>
-            <a:srgbClr val="F7F6F2"/>
-          </a:solidFill>
-          <a:ln>
-            <a:noFill/>
-          </a:ln>
-          <a:effectLst/>
-        </p:spPr>
-        <p:txBody>
-          <a:bodyPr rtlCol="0" anchor="ctr"/>
-          <a:lstStyle/>
-          <a:p>
-            <a:pPr algn="ctr"/>
-          </a:p>
-        </p:txBody>
-      </p:sp>
-      <p:sp>
-        <p:nvSpPr>
-          <p:cNvPr id="100" name="Rounded Rectangle 99"/>
-          <p:cNvSpPr/>
-          <p:nvPr/>
-        </p:nvSpPr>
-        <p:spPr>
-          <a:xfrm>
-            <a:off x="2651760" y="6309360"/>
-            <a:ext cx="457200" cy="237744"/>
-          </a:xfrm>
-          <a:prstGeom prst="roundRect">
-            <a:avLst>
-              <a:gd name="adj" fmla="val 45000"/>
-            </a:avLst>
-          </a:prstGeom>
-          <a:solidFill>
-            <a:srgbClr val="4C72B0"/>
-          </a:solidFill>
-          <a:ln w="9525">
-            <a:solidFill>
-              <a:srgbClr val="FFFFFF"/>
-            </a:solidFill>
-          </a:ln>
-          <a:effectLst/>
-        </p:spPr>
-        <p:txBody>
-          <a:bodyPr rtlCol="0" anchor="ctr" lIns="9000" rIns="9000" tIns="4500" bIns="4500" wrap="square"/>
-          <a:lstStyle/>
-          <a:p>
-            <a:pPr algn="ctr"/>
-            <a:r>
-              <a:rPr sz="700" b="1" i="0">
-                <a:solidFill>
-                  <a:srgbClr val="FFFFFF"/>
-                </a:solidFill>
-                <a:latin typeface="Times New Roman"/>
-              </a:rPr>
-              <a:t>JOIN</a:t>
-            </a:r>
-          </a:p>
-        </p:txBody>
-      </p:sp>
-      <p:sp>
-        <p:nvSpPr>
-          <p:cNvPr id="101" name="TextBox 100"/>
-          <p:cNvSpPr txBox="1"/>
-          <p:nvPr/>
-        </p:nvSpPr>
-        <p:spPr>
-          <a:xfrm>
-            <a:off x="3200400" y="6309360"/>
-            <a:ext cx="1737360" cy="274320"/>
-          </a:xfrm>
-          <a:prstGeom prst="rect">
-            <a:avLst/>
-          </a:prstGeom>
-          <a:noFill/>
-        </p:spPr>
-        <p:txBody>
-          <a:bodyPr wrap="square" lIns="0" rIns="0" tIns="0" bIns="0">
-            <a:spAutoFit/>
-          </a:bodyPr>
-          <a:lstStyle/>
-          <a:p>
-            <a:pPr algn="l"/>
-            <a:r>
-              <a:rPr sz="1100" b="0" i="0">
-                <a:solidFill>
-                  <a:srgbClr val="1F1F1E"/>
-                </a:solidFill>
-                <a:latin typeface="Times New Roman"/>
-              </a:rPr>
-              <a:t>= skill the task needs</a:t>
-            </a:r>
-          </a:p>
-        </p:txBody>
-      </p:sp>
-      <p:sp>
-        <p:nvSpPr>
-          <p:cNvPr id="102" name="Rounded Rectangle 101"/>
-          <p:cNvSpPr/>
-          <p:nvPr/>
-        </p:nvSpPr>
-        <p:spPr>
-          <a:xfrm>
-            <a:off x="4983479" y="6309360"/>
-            <a:ext cx="457200" cy="237744"/>
-          </a:xfrm>
-          <a:prstGeom prst="roundRect">
-            <a:avLst>
-              <a:gd name="adj" fmla="val 45000"/>
-            </a:avLst>
-          </a:prstGeom>
-          <a:solidFill>
-            <a:srgbClr val="DD8452"/>
-          </a:solidFill>
-          <a:ln w="9525">
-            <a:solidFill>
-              <a:srgbClr val="FFFFFF"/>
-            </a:solidFill>
-          </a:ln>
-          <a:effectLst/>
-        </p:spPr>
-        <p:txBody>
-          <a:bodyPr rtlCol="0" anchor="ctr" lIns="9000" rIns="9000" tIns="4500" bIns="4500" wrap="square"/>
-          <a:lstStyle/>
-          <a:p>
-            <a:pPr algn="ctr"/>
-            <a:r>
-              <a:rPr sz="700" b="1" i="0">
-                <a:solidFill>
-                  <a:srgbClr val="FFFFFF"/>
-                </a:solidFill>
-                <a:latin typeface="Times New Roman"/>
-              </a:rPr>
-              <a:t>PLOT</a:t>
-            </a:r>
-          </a:p>
-        </p:txBody>
-      </p:sp>
-      <p:sp>
-        <p:nvSpPr>
-          <p:cNvPr id="103" name="TextBox 102"/>
-          <p:cNvSpPr txBox="1"/>
-          <p:nvPr/>
-        </p:nvSpPr>
-        <p:spPr>
-          <a:xfrm>
-            <a:off x="5532120" y="6309360"/>
-            <a:ext cx="1828800" cy="274320"/>
-          </a:xfrm>
-          <a:prstGeom prst="rect">
-            <a:avLst/>
-          </a:prstGeom>
-          <a:noFill/>
-        </p:spPr>
-        <p:txBody>
-          <a:bodyPr wrap="square" lIns="0" rIns="0" tIns="0" bIns="0">
-            <a:spAutoFit/>
-          </a:bodyPr>
-          <a:lstStyle/>
-          <a:p>
-            <a:pPr algn="l"/>
-            <a:r>
-              <a:rPr sz="1100" b="0" i="0">
-                <a:solidFill>
-                  <a:srgbClr val="1F1F1E"/>
-                </a:solidFill>
-                <a:latin typeface="Times New Roman"/>
-              </a:rPr>
-              <a:t>= out-of-scope skill</a:t>
-            </a:r>
-          </a:p>
-        </p:txBody>
-      </p:sp>
-      <p:sp>
-        <p:nvSpPr>
-          <p:cNvPr id="104" name="Rounded Rectangle 103"/>
-          <p:cNvSpPr/>
-          <p:nvPr/>
-        </p:nvSpPr>
-        <p:spPr>
-          <a:xfrm>
-            <a:off x="7269479" y="6309360"/>
-            <a:ext cx="457200" cy="237744"/>
-          </a:xfrm>
-          <a:prstGeom prst="roundRect">
-            <a:avLst>
-              <a:gd name="adj" fmla="val 45000"/>
-            </a:avLst>
-          </a:prstGeom>
-          <a:solidFill>
-            <a:srgbClr val="E8E6E1"/>
-          </a:solidFill>
-          <a:ln w="9525">
-            <a:solidFill>
-              <a:srgbClr val="FFFFFF"/>
-            </a:solidFill>
-          </a:ln>
-          <a:effectLst/>
-        </p:spPr>
-        <p:txBody>
-          <a:bodyPr rtlCol="0" anchor="ctr" lIns="9000" rIns="9000" tIns="4500" bIns="4500" wrap="square"/>
-          <a:lstStyle/>
-          <a:p>
-            <a:pPr algn="ctr"/>
-            <a:r>
-              <a:rPr sz="700" b="1" i="0">
+              <a:rPr sz="750" b="1" i="0">
                 <a:solidFill>
                   <a:srgbClr val="6B6A63"/>
                 </a:solidFill>
@@ -7095,14 +7286,14 @@
       </p:sp>
       <p:sp>
         <p:nvSpPr>
-          <p:cNvPr id="105" name="TextBox 104"/>
+          <p:cNvPr id="120" name="TextBox 119"/>
           <p:cNvSpPr txBox="1"/>
           <p:nvPr/>
         </p:nvSpPr>
         <p:spPr>
           <a:xfrm>
-            <a:off x="7818120" y="6309360"/>
-            <a:ext cx="1463040" cy="274320"/>
+            <a:off x="8412480" y="6272784"/>
+            <a:ext cx="1371600" cy="274320"/>
           </a:xfrm>
           <a:prstGeom prst="rect">
             <a:avLst/>

--- a/paper/figs/fig1_pipeline.pptx
+++ b/paper/figs/fig1_pipeline.pptx
@@ -3090,25 +3090,27 @@
       <p:grpSpPr/>
       <p:sp>
         <p:nvSpPr>
-          <p:cNvPr id="2" name="Oval 1"/>
+          <p:cNvPr id="2" name="Rounded Rectangle 1"/>
           <p:cNvSpPr/>
           <p:nvPr/>
         </p:nvSpPr>
         <p:spPr>
           <a:xfrm>
-            <a:off x="502920" y="777240"/>
-            <a:ext cx="8138160" cy="5486400"/>
-          </a:xfrm>
-          <a:prstGeom prst="ellipse">
-            <a:avLst/>
+            <a:off x="164592" y="365760"/>
+            <a:ext cx="2212848" cy="1847088"/>
+          </a:xfrm>
+          <a:prstGeom prst="roundRect">
+            <a:avLst>
+              <a:gd name="adj" fmla="val 6000"/>
+            </a:avLst>
           </a:prstGeom>
           <a:solidFill>
-            <a:srgbClr val="FDF0E7">
-              <a:alpha val="45000"/>
-            </a:srgbClr>
+            <a:srgbClr val="EDECE7"/>
           </a:solidFill>
-          <a:ln>
-            <a:noFill/>
+          <a:ln w="15240">
+            <a:solidFill>
+              <a:srgbClr val="8C8C8C"/>
+            </a:solidFill>
           </a:ln>
           <a:effectLst/>
         </p:spPr>
@@ -3122,14 +3124,178 @@
       </p:sp>
       <p:sp>
         <p:nvSpPr>
-          <p:cNvPr id="3" name="Rounded Rectangle 2"/>
+          <p:cNvPr id="3" name="TextBox 2"/>
+          <p:cNvSpPr txBox="1"/>
+          <p:nvPr/>
+        </p:nvSpPr>
+        <p:spPr>
+          <a:xfrm>
+            <a:off x="274320" y="438912"/>
+            <a:ext cx="1920240" cy="256032"/>
+          </a:xfrm>
+          <a:prstGeom prst="rect">
+            <a:avLst/>
+          </a:prstGeom>
+          <a:noFill/>
+        </p:spPr>
+        <p:txBody>
+          <a:bodyPr wrap="square" lIns="0" rIns="0" tIns="0" bIns="0">
+            <a:spAutoFit/>
+          </a:bodyPr>
+          <a:lstStyle/>
+          <a:p>
+            <a:pPr algn="l"/>
+            <a:r>
+              <a:rPr sz="950" b="1" i="0">
+                <a:solidFill>
+                  <a:srgbClr val="1F1F1E"/>
+                </a:solidFill>
+                <a:latin typeface="Times New Roman"/>
+              </a:rPr>
+              <a:t>TASK EVIDENCE</a:t>
+            </a:r>
+          </a:p>
+        </p:txBody>
+      </p:sp>
+      <p:sp>
+        <p:nvSpPr>
+          <p:cNvPr id="4" name="Rounded Rectangle 3"/>
           <p:cNvSpPr/>
           <p:nvPr/>
         </p:nvSpPr>
         <p:spPr>
           <a:xfrm>
-            <a:off x="996696" y="1280160"/>
-            <a:ext cx="841248" cy="640080"/>
+            <a:off x="292608" y="731520"/>
+            <a:ext cx="1956816" cy="438912"/>
+          </a:xfrm>
+          <a:prstGeom prst="roundRect">
+            <a:avLst>
+              <a:gd name="adj" fmla="val 15000"/>
+            </a:avLst>
+          </a:prstGeom>
+          <a:solidFill>
+            <a:srgbClr val="E3EFDA"/>
+          </a:solidFill>
+          <a:ln w="15240">
+            <a:solidFill>
+              <a:srgbClr val="779E62"/>
+            </a:solidFill>
+          </a:ln>
+          <a:effectLst/>
+        </p:spPr>
+        <p:txBody>
+          <a:bodyPr rtlCol="0" anchor="ctr" lIns="9000" rIns="9000" tIns="4500" bIns="4500" wrap="square"/>
+          <a:lstStyle/>
+          <a:p>
+            <a:pPr algn="ctr"/>
+            <a:r>
+              <a:rPr sz="850" b="1" i="0">
+                <a:solidFill>
+                  <a:srgbClr val="1F1F1E"/>
+                </a:solidFill>
+                <a:latin typeface="Times New Roman"/>
+              </a:rPr>
+              <a:t>k example queries</a:t>
+            </a:r>
+          </a:p>
+        </p:txBody>
+      </p:sp>
+      <p:sp>
+        <p:nvSpPr>
+          <p:cNvPr id="5" name="Rounded Rectangle 4"/>
+          <p:cNvSpPr/>
+          <p:nvPr/>
+        </p:nvSpPr>
+        <p:spPr>
+          <a:xfrm>
+            <a:off x="292608" y="1225296"/>
+            <a:ext cx="1956816" cy="438912"/>
+          </a:xfrm>
+          <a:prstGeom prst="roundRect">
+            <a:avLst>
+              <a:gd name="adj" fmla="val 15000"/>
+            </a:avLst>
+          </a:prstGeom>
+          <a:solidFill>
+            <a:srgbClr val="FFF0C2"/>
+          </a:solidFill>
+          <a:ln w="15240">
+            <a:solidFill>
+              <a:srgbClr val="C9A22A"/>
+            </a:solidFill>
+          </a:ln>
+          <a:effectLst/>
+        </p:spPr>
+        <p:txBody>
+          <a:bodyPr rtlCol="0" anchor="ctr" lIns="9000" rIns="9000" tIns="4500" bIns="4500" wrap="square"/>
+          <a:lstStyle/>
+          <a:p>
+            <a:pPr algn="ctr"/>
+            <a:r>
+              <a:rPr sz="850" b="1" i="0">
+                <a:solidFill>
+                  <a:srgbClr val="1F1F1E"/>
+                </a:solidFill>
+                <a:latin typeface="Times New Roman"/>
+              </a:rPr>
+              <a:t>calibration split: gate τ</a:t>
+            </a:r>
+          </a:p>
+        </p:txBody>
+      </p:sp>
+      <p:sp>
+        <p:nvSpPr>
+          <p:cNvPr id="6" name="Rounded Rectangle 5"/>
+          <p:cNvSpPr/>
+          <p:nvPr/>
+        </p:nvSpPr>
+        <p:spPr>
+          <a:xfrm>
+            <a:off x="292608" y="1719072"/>
+            <a:ext cx="1956816" cy="402336"/>
+          </a:xfrm>
+          <a:prstGeom prst="roundRect">
+            <a:avLst>
+              <a:gd name="adj" fmla="val 15000"/>
+            </a:avLst>
+          </a:prstGeom>
+          <a:solidFill>
+            <a:srgbClr val="EDECE7"/>
+          </a:solidFill>
+          <a:ln w="15240">
+            <a:solidFill>
+              <a:srgbClr val="8C8C8C"/>
+            </a:solidFill>
+          </a:ln>
+          <a:effectLst/>
+        </p:spPr>
+        <p:txBody>
+          <a:bodyPr rtlCol="0" anchor="ctr" lIns="9000" rIns="9000" tIns="4500" bIns="4500" wrap="square"/>
+          <a:lstStyle/>
+          <a:p>
+            <a:pPr algn="ctr"/>
+            <a:r>
+              <a:rPr sz="800" b="1" i="0">
+                <a:solidFill>
+                  <a:srgbClr val="6B6A63"/>
+                </a:solidFill>
+                <a:latin typeface="Times New Roman"/>
+              </a:rPr>
+              <a:t>held-out eval 🔒 locked</a:t>
+            </a:r>
+          </a:p>
+        </p:txBody>
+      </p:sp>
+      <p:sp>
+        <p:nvSpPr>
+          <p:cNvPr id="7" name="Rounded Rectangle 6"/>
+          <p:cNvSpPr/>
+          <p:nvPr/>
+        </p:nvSpPr>
+        <p:spPr>
+          <a:xfrm>
+            <a:off x="388620" y="2770632"/>
+            <a:ext cx="777240" cy="585216"/>
           </a:xfrm>
           <a:prstGeom prst="roundRect">
             <a:avLst>
@@ -3156,13 +3322,13 @@
       </p:sp>
       <p:sp>
         <p:nvSpPr>
-          <p:cNvPr id="4" name="Rectangle 3"/>
+          <p:cNvPr id="8" name="Rectangle 7"/>
           <p:cNvSpPr/>
           <p:nvPr/>
         </p:nvSpPr>
         <p:spPr>
           <a:xfrm>
-            <a:off x="1406347" y="1152143"/>
+            <a:off x="766267" y="2642616"/>
             <a:ext cx="21945" cy="128016"/>
           </a:xfrm>
           <a:prstGeom prst="rect">
@@ -3186,13 +3352,13 @@
       </p:sp>
       <p:sp>
         <p:nvSpPr>
-          <p:cNvPr id="5" name="Oval 4"/>
+          <p:cNvPr id="9" name="Oval 8"/>
           <p:cNvSpPr/>
           <p:nvPr/>
         </p:nvSpPr>
         <p:spPr>
           <a:xfrm>
-            <a:off x="1371600" y="1060704"/>
+            <a:off x="731519" y="2551176"/>
             <a:ext cx="91440" cy="91440"/>
           </a:xfrm>
           <a:prstGeom prst="ellipse">
@@ -3216,13 +3382,13 @@
       </p:sp>
       <p:sp>
         <p:nvSpPr>
-          <p:cNvPr id="6" name="Oval 5"/>
+          <p:cNvPr id="10" name="Oval 9"/>
           <p:cNvSpPr/>
           <p:nvPr/>
         </p:nvSpPr>
         <p:spPr>
           <a:xfrm>
-            <a:off x="1224747" y="1495044"/>
+            <a:off x="596188" y="2963570"/>
             <a:ext cx="82296" cy="82296"/>
           </a:xfrm>
           <a:prstGeom prst="ellipse">
@@ -3246,13 +3412,13 @@
       </p:sp>
       <p:sp>
         <p:nvSpPr>
-          <p:cNvPr id="7" name="Oval 6"/>
+          <p:cNvPr id="11" name="Oval 10"/>
           <p:cNvSpPr/>
           <p:nvPr/>
         </p:nvSpPr>
         <p:spPr>
           <a:xfrm>
-            <a:off x="1527596" y="1495044"/>
+            <a:off x="875995" y="2963570"/>
             <a:ext cx="82296" cy="82296"/>
           </a:xfrm>
           <a:prstGeom prst="ellipse">
@@ -3276,14 +3442,14 @@
       </p:sp>
       <p:sp>
         <p:nvSpPr>
-          <p:cNvPr id="8" name="Rounded Rectangle 7"/>
+          <p:cNvPr id="12" name="Rounded Rectangle 11"/>
           <p:cNvSpPr/>
           <p:nvPr/>
         </p:nvSpPr>
         <p:spPr>
           <a:xfrm>
-            <a:off x="1299545" y="1677009"/>
-            <a:ext cx="235549" cy="27432"/>
+            <a:off x="668426" y="3133465"/>
+            <a:ext cx="217627" cy="27432"/>
           </a:xfrm>
           <a:prstGeom prst="roundRect">
             <a:avLst>
@@ -3308,14 +3474,14 @@
       </p:sp>
       <p:sp>
         <p:nvSpPr>
-          <p:cNvPr id="9" name="TextBox 8"/>
+          <p:cNvPr id="13" name="TextBox 12"/>
           <p:cNvSpPr txBox="1"/>
           <p:nvPr/>
         </p:nvSpPr>
         <p:spPr>
           <a:xfrm>
-            <a:off x="676656" y="1956816"/>
-            <a:ext cx="1481328" cy="256032"/>
+            <a:off x="68580" y="3392424"/>
+            <a:ext cx="1417319" cy="256032"/>
           </a:xfrm>
           <a:prstGeom prst="rect">
             <a:avLst/>
@@ -3330,1002 +3496,53 @@
           <a:p>
             <a:pPr algn="ctr"/>
             <a:r>
-              <a:rPr sz="950" b="1" i="0">
+              <a:rPr sz="850" b="1" i="0">
                 <a:solidFill>
                   <a:srgbClr val="1F1F1E"/>
                 </a:solidFill>
                 <a:latin typeface="Times New Roman"/>
               </a:rPr>
-              <a:t>Teacher LLM  ❄</a:t>
-            </a:r>
-          </a:p>
-        </p:txBody>
-      </p:sp>
-      <p:sp>
-        <p:nvSpPr>
-          <p:cNvPr id="10" name="TextBox 9"/>
-          <p:cNvSpPr txBox="1"/>
-          <p:nvPr/>
-        </p:nvSpPr>
-        <p:spPr>
-          <a:xfrm>
-            <a:off x="960120" y="566928"/>
-            <a:ext cx="2926080" cy="274320"/>
-          </a:xfrm>
-          <a:prstGeom prst="rect">
-            <a:avLst/>
-          </a:prstGeom>
-          <a:noFill/>
-        </p:spPr>
-        <p:txBody>
-          <a:bodyPr wrap="square" lIns="0" rIns="0" tIns="0" bIns="0">
-            <a:spAutoFit/>
-          </a:bodyPr>
-          <a:lstStyle/>
-          <a:p>
-            <a:pPr algn="l"/>
-            <a:r>
-              <a:rPr sz="1050" b="1" i="0">
-                <a:solidFill>
-                  <a:srgbClr val="DD8452"/>
-                </a:solidFill>
-                <a:latin typeface="Times New Roman"/>
-              </a:rPr>
-              <a:t>teacher capability (frozen, expensive)</a:t>
-            </a:r>
-          </a:p>
-        </p:txBody>
-      </p:sp>
-      <p:sp>
-        <p:nvSpPr>
-          <p:cNvPr id="11" name="Rounded Rectangle 10"/>
-          <p:cNvSpPr/>
-          <p:nvPr/>
-        </p:nvSpPr>
-        <p:spPr>
-          <a:xfrm>
-            <a:off x="6035040" y="1554480"/>
-            <a:ext cx="566928" cy="256032"/>
-          </a:xfrm>
-          <a:prstGeom prst="roundRect">
-            <a:avLst>
-              <a:gd name="adj" fmla="val 45000"/>
-            </a:avLst>
-          </a:prstGeom>
-          <a:solidFill>
-            <a:srgbClr val="DD8452"/>
-          </a:solidFill>
-          <a:ln w="9525">
-            <a:solidFill>
-              <a:srgbClr val="FFFFFF"/>
-            </a:solidFill>
-          </a:ln>
-          <a:effectLst/>
-        </p:spPr>
-        <p:txBody>
-          <a:bodyPr rtlCol="0" anchor="ctr" lIns="9000" rIns="9000" tIns="4500" bIns="4500" wrap="square"/>
-          <a:lstStyle/>
-          <a:p>
-            <a:pPr algn="ctr"/>
-            <a:r>
-              <a:rPr sz="800" b="1" i="0">
-                <a:solidFill>
-                  <a:srgbClr val="FFFFFF"/>
-                </a:solidFill>
-                <a:latin typeface="Times New Roman"/>
-              </a:rPr>
-              <a:t>PLOT</a:t>
-            </a:r>
-          </a:p>
-        </p:txBody>
-      </p:sp>
-      <p:sp>
-        <p:nvSpPr>
-          <p:cNvPr id="12" name="Rounded Rectangle 11"/>
-          <p:cNvSpPr/>
-          <p:nvPr/>
-        </p:nvSpPr>
-        <p:spPr>
-          <a:xfrm>
-            <a:off x="6949440" y="2377440"/>
-            <a:ext cx="566928" cy="256032"/>
-          </a:xfrm>
-          <a:prstGeom prst="roundRect">
-            <a:avLst>
-              <a:gd name="adj" fmla="val 45000"/>
-            </a:avLst>
-          </a:prstGeom>
-          <a:solidFill>
-            <a:srgbClr val="DD8452"/>
-          </a:solidFill>
-          <a:ln w="9525">
-            <a:solidFill>
-              <a:srgbClr val="FFFFFF"/>
-            </a:solidFill>
-          </a:ln>
-          <a:effectLst/>
-        </p:spPr>
-        <p:txBody>
-          <a:bodyPr rtlCol="0" anchor="ctr" lIns="9000" rIns="9000" tIns="4500" bIns="4500" wrap="square"/>
-          <a:lstStyle/>
-          <a:p>
-            <a:pPr algn="ctr"/>
-            <a:r>
-              <a:rPr sz="800" b="1" i="0">
-                <a:solidFill>
-                  <a:srgbClr val="FFFFFF"/>
-                </a:solidFill>
-                <a:latin typeface="Times New Roman"/>
-              </a:rPr>
-              <a:t>REGEX</a:t>
-            </a:r>
-          </a:p>
-        </p:txBody>
-      </p:sp>
-      <p:sp>
-        <p:nvSpPr>
-          <p:cNvPr id="13" name="Rounded Rectangle 12"/>
-          <p:cNvSpPr/>
-          <p:nvPr/>
-        </p:nvSpPr>
-        <p:spPr>
-          <a:xfrm>
-            <a:off x="6309360" y="3566160"/>
-            <a:ext cx="822960" cy="256032"/>
-          </a:xfrm>
-          <a:prstGeom prst="roundRect">
-            <a:avLst>
-              <a:gd name="adj" fmla="val 45000"/>
-            </a:avLst>
-          </a:prstGeom>
-          <a:solidFill>
-            <a:srgbClr val="C44E52"/>
-          </a:solidFill>
-          <a:ln w="9525">
-            <a:solidFill>
-              <a:srgbClr val="FFFFFF"/>
-            </a:solidFill>
-          </a:ln>
-          <a:effectLst/>
-        </p:spPr>
-        <p:txBody>
-          <a:bodyPr rtlCol="0" anchor="ctr" lIns="9000" rIns="9000" tIns="4500" bIns="4500" wrap="square"/>
-          <a:lstStyle/>
-          <a:p>
-            <a:pPr algn="ctr"/>
-            <a:r>
-              <a:rPr sz="800" b="1" i="0">
-                <a:solidFill>
-                  <a:srgbClr val="FFFFFF"/>
-                </a:solidFill>
-                <a:latin typeface="Times New Roman"/>
-              </a:rPr>
-              <a:t>RECURSION</a:t>
-            </a:r>
-          </a:p>
-        </p:txBody>
-      </p:sp>
-      <p:sp>
-        <p:nvSpPr>
-          <p:cNvPr id="14" name="Rounded Rectangle 13"/>
-          <p:cNvSpPr/>
-          <p:nvPr/>
-        </p:nvSpPr>
-        <p:spPr>
-          <a:xfrm>
-            <a:off x="7040880" y="4572000"/>
-            <a:ext cx="566928" cy="256032"/>
-          </a:xfrm>
-          <a:prstGeom prst="roundRect">
-            <a:avLst>
-              <a:gd name="adj" fmla="val 45000"/>
-            </a:avLst>
-          </a:prstGeom>
-          <a:solidFill>
-            <a:srgbClr val="E8E6E1"/>
-          </a:solidFill>
-          <a:ln w="9525">
-            <a:solidFill>
-              <a:srgbClr val="FFFFFF"/>
-            </a:solidFill>
-          </a:ln>
-          <a:effectLst/>
-        </p:spPr>
-        <p:txBody>
-          <a:bodyPr rtlCol="0" anchor="ctr" lIns="9000" rIns="9000" tIns="4500" bIns="4500" wrap="square"/>
-          <a:lstStyle/>
-          <a:p>
-            <a:pPr algn="ctr"/>
-            <a:r>
-              <a:rPr sz="800" b="1" i="0">
-                <a:solidFill>
-                  <a:srgbClr val="6B6A63"/>
-                </a:solidFill>
-                <a:latin typeface="Times New Roman"/>
-              </a:rPr>
-              <a:t>…</a:t>
-            </a:r>
-          </a:p>
-        </p:txBody>
-      </p:sp>
-      <p:sp>
-        <p:nvSpPr>
-          <p:cNvPr id="15" name="Rounded Rectangle 14"/>
-          <p:cNvSpPr/>
-          <p:nvPr/>
-        </p:nvSpPr>
-        <p:spPr>
-          <a:xfrm>
-            <a:off x="5394960" y="5120640"/>
-            <a:ext cx="566928" cy="256032"/>
-          </a:xfrm>
-          <a:prstGeom prst="roundRect">
-            <a:avLst>
-              <a:gd name="adj" fmla="val 45000"/>
-            </a:avLst>
-          </a:prstGeom>
-          <a:solidFill>
-            <a:srgbClr val="E8E6E1"/>
-          </a:solidFill>
-          <a:ln w="9525">
-            <a:solidFill>
-              <a:srgbClr val="FFFFFF"/>
-            </a:solidFill>
-          </a:ln>
-          <a:effectLst/>
-        </p:spPr>
-        <p:txBody>
-          <a:bodyPr rtlCol="0" anchor="ctr" lIns="9000" rIns="9000" tIns="4500" bIns="4500" wrap="square"/>
-          <a:lstStyle/>
-          <a:p>
-            <a:pPr algn="ctr"/>
-            <a:r>
-              <a:rPr sz="800" b="1" i="0">
-                <a:solidFill>
-                  <a:srgbClr val="6B6A63"/>
-                </a:solidFill>
-                <a:latin typeface="Times New Roman"/>
-              </a:rPr>
-              <a:t>…</a:t>
-            </a:r>
-          </a:p>
-        </p:txBody>
-      </p:sp>
-      <p:sp>
-        <p:nvSpPr>
-          <p:cNvPr id="16" name="Oval 15"/>
-          <p:cNvSpPr/>
-          <p:nvPr/>
-        </p:nvSpPr>
-        <p:spPr>
-          <a:xfrm>
-            <a:off x="1234440" y="2148840"/>
-            <a:ext cx="3977639" cy="3429000"/>
-          </a:xfrm>
-          <a:prstGeom prst="ellipse">
-            <a:avLst/>
-          </a:prstGeom>
-          <a:noFill/>
-          <a:ln w="38100">
-            <a:solidFill>
-              <a:srgbClr val="4C72B0"/>
-            </a:solidFill>
-            <a:prstDash val="dash"/>
-          </a:ln>
-          <a:effectLst/>
-        </p:spPr>
-        <p:txBody>
-          <a:bodyPr rtlCol="0" anchor="ctr"/>
-          <a:lstStyle/>
-          <a:p>
-            <a:pPr algn="ctr"/>
-          </a:p>
-        </p:txBody>
-      </p:sp>
-      <p:sp>
-        <p:nvSpPr>
-          <p:cNvPr id="17" name="Oval 16"/>
-          <p:cNvSpPr/>
-          <p:nvPr/>
-        </p:nvSpPr>
-        <p:spPr>
-          <a:xfrm>
-            <a:off x="1417320" y="2331720"/>
-            <a:ext cx="3611880" cy="3063240"/>
-          </a:xfrm>
-          <a:prstGeom prst="ellipse">
-            <a:avLst/>
-          </a:prstGeom>
-          <a:solidFill>
-            <a:srgbClr val="EEF2F9">
-              <a:alpha val="80000"/>
-            </a:srgbClr>
-          </a:solidFill>
-          <a:ln>
-            <a:noFill/>
-          </a:ln>
-          <a:effectLst/>
-        </p:spPr>
-        <p:txBody>
-          <a:bodyPr rtlCol="0" anchor="ctr"/>
-          <a:lstStyle/>
-          <a:p>
-            <a:pPr algn="ctr"/>
-          </a:p>
-        </p:txBody>
-      </p:sp>
-      <p:sp>
-        <p:nvSpPr>
-          <p:cNvPr id="18" name="Rounded Rectangle 17"/>
-          <p:cNvSpPr/>
-          <p:nvPr/>
-        </p:nvSpPr>
-        <p:spPr>
-          <a:xfrm>
-            <a:off x="2011680" y="2834640"/>
-            <a:ext cx="603504" cy="256032"/>
-          </a:xfrm>
-          <a:prstGeom prst="roundRect">
-            <a:avLst>
-              <a:gd name="adj" fmla="val 45000"/>
-            </a:avLst>
-          </a:prstGeom>
-          <a:solidFill>
-            <a:srgbClr val="4C72B0"/>
-          </a:solidFill>
-          <a:ln w="9525">
-            <a:solidFill>
-              <a:srgbClr val="FFFFFF"/>
-            </a:solidFill>
-          </a:ln>
-          <a:effectLst/>
-        </p:spPr>
-        <p:txBody>
-          <a:bodyPr rtlCol="0" anchor="ctr" lIns="9000" rIns="9000" tIns="4500" bIns="4500" wrap="square"/>
-          <a:lstStyle/>
-          <a:p>
-            <a:pPr algn="ctr"/>
-            <a:r>
-              <a:rPr sz="800" b="1" i="0">
-                <a:solidFill>
-                  <a:srgbClr val="FFFFFF"/>
-                </a:solidFill>
-                <a:latin typeface="Times New Roman"/>
-              </a:rPr>
-              <a:t>JOIN</a:t>
-            </a:r>
-          </a:p>
-        </p:txBody>
-      </p:sp>
-      <p:sp>
-        <p:nvSpPr>
-          <p:cNvPr id="19" name="Rounded Rectangle 18"/>
-          <p:cNvSpPr/>
-          <p:nvPr/>
-        </p:nvSpPr>
-        <p:spPr>
-          <a:xfrm>
-            <a:off x="3108960" y="2651760"/>
-            <a:ext cx="841248" cy="256032"/>
-          </a:xfrm>
-          <a:prstGeom prst="roundRect">
-            <a:avLst>
-              <a:gd name="adj" fmla="val 45000"/>
-            </a:avLst>
-          </a:prstGeom>
-          <a:solidFill>
-            <a:srgbClr val="7BA7D7"/>
-          </a:solidFill>
-          <a:ln w="9525">
-            <a:solidFill>
-              <a:srgbClr val="FFFFFF"/>
-            </a:solidFill>
-          </a:ln>
-          <a:effectLst/>
-        </p:spPr>
-        <p:txBody>
-          <a:bodyPr rtlCol="0" anchor="ctr" lIns="9000" rIns="9000" tIns="4500" bIns="4500" wrap="square"/>
-          <a:lstStyle/>
-          <a:p>
-            <a:pPr algn="ctr"/>
-            <a:r>
-              <a:rPr sz="800" b="1" i="0">
-                <a:solidFill>
-                  <a:srgbClr val="FFFFFF"/>
-                </a:solidFill>
-                <a:latin typeface="Times New Roman"/>
-              </a:rPr>
-              <a:t>GROUP BY</a:t>
-            </a:r>
-          </a:p>
-        </p:txBody>
-      </p:sp>
-      <p:sp>
-        <p:nvSpPr>
-          <p:cNvPr id="20" name="Rounded Rectangle 19"/>
-          <p:cNvSpPr/>
-          <p:nvPr/>
-        </p:nvSpPr>
-        <p:spPr>
-          <a:xfrm>
-            <a:off x="1828800" y="3749039"/>
-            <a:ext cx="603504" cy="256032"/>
-          </a:xfrm>
-          <a:prstGeom prst="roundRect">
-            <a:avLst>
-              <a:gd name="adj" fmla="val 45000"/>
-            </a:avLst>
-          </a:prstGeom>
-          <a:solidFill>
-            <a:srgbClr val="5F9EA0"/>
-          </a:solidFill>
-          <a:ln w="9525">
-            <a:solidFill>
-              <a:srgbClr val="FFFFFF"/>
-            </a:solidFill>
-          </a:ln>
-          <a:effectLst/>
-        </p:spPr>
-        <p:txBody>
-          <a:bodyPr rtlCol="0" anchor="ctr" lIns="9000" rIns="9000" tIns="4500" bIns="4500" wrap="square"/>
-          <a:lstStyle/>
-          <a:p>
-            <a:pPr algn="ctr"/>
-            <a:r>
-              <a:rPr sz="800" b="1" i="0">
-                <a:solidFill>
-                  <a:srgbClr val="FFFFFF"/>
-                </a:solidFill>
-                <a:latin typeface="Times New Roman"/>
-              </a:rPr>
-              <a:t>FILTER</a:t>
-            </a:r>
-          </a:p>
-        </p:txBody>
-      </p:sp>
-      <p:sp>
-        <p:nvSpPr>
-          <p:cNvPr id="21" name="Rounded Rectangle 20"/>
-          <p:cNvSpPr/>
-          <p:nvPr/>
-        </p:nvSpPr>
-        <p:spPr>
-          <a:xfrm>
-            <a:off x="3017520" y="3566160"/>
-            <a:ext cx="603504" cy="256032"/>
-          </a:xfrm>
-          <a:prstGeom prst="roundRect">
-            <a:avLst>
-              <a:gd name="adj" fmla="val 45000"/>
-            </a:avLst>
-          </a:prstGeom>
-          <a:solidFill>
-            <a:srgbClr val="5F9EA0"/>
-          </a:solidFill>
-          <a:ln w="9525">
-            <a:solidFill>
-              <a:srgbClr val="FFFFFF"/>
-            </a:solidFill>
-          </a:ln>
-          <a:effectLst/>
-        </p:spPr>
-        <p:txBody>
-          <a:bodyPr rtlCol="0" anchor="ctr" lIns="9000" rIns="9000" tIns="4500" bIns="4500" wrap="square"/>
-          <a:lstStyle/>
-          <a:p>
-            <a:pPr algn="ctr"/>
-            <a:r>
-              <a:rPr sz="800" b="1" i="0">
-                <a:solidFill>
-                  <a:srgbClr val="FFFFFF"/>
-                </a:solidFill>
-                <a:latin typeface="Times New Roman"/>
-              </a:rPr>
-              <a:t>COUNT</a:t>
-            </a:r>
-          </a:p>
-        </p:txBody>
-      </p:sp>
-      <p:sp>
-        <p:nvSpPr>
-          <p:cNvPr id="22" name="Rounded Rectangle 21"/>
-          <p:cNvSpPr/>
-          <p:nvPr/>
-        </p:nvSpPr>
-        <p:spPr>
-          <a:xfrm>
-            <a:off x="2377440" y="4480560"/>
-            <a:ext cx="603504" cy="256032"/>
-          </a:xfrm>
-          <a:prstGeom prst="roundRect">
-            <a:avLst>
-              <a:gd name="adj" fmla="val 45000"/>
-            </a:avLst>
-          </a:prstGeom>
-          <a:solidFill>
-            <a:srgbClr val="7BA7D7"/>
-          </a:solidFill>
-          <a:ln w="9525">
-            <a:solidFill>
-              <a:srgbClr val="FFFFFF"/>
-            </a:solidFill>
-          </a:ln>
-          <a:effectLst/>
-        </p:spPr>
-        <p:txBody>
-          <a:bodyPr rtlCol="0" anchor="ctr" lIns="9000" rIns="9000" tIns="4500" bIns="4500" wrap="square"/>
-          <a:lstStyle/>
-          <a:p>
-            <a:pPr algn="ctr"/>
-            <a:r>
-              <a:rPr sz="800" b="1" i="0">
-                <a:solidFill>
-                  <a:srgbClr val="FFFFFF"/>
-                </a:solidFill>
-                <a:latin typeface="Times New Roman"/>
-              </a:rPr>
-              <a:t>SORT</a:t>
-            </a:r>
-          </a:p>
-        </p:txBody>
-      </p:sp>
-      <p:sp>
-        <p:nvSpPr>
-          <p:cNvPr id="23" name="Rounded Rectangle 22"/>
-          <p:cNvSpPr/>
-          <p:nvPr/>
-        </p:nvSpPr>
-        <p:spPr>
-          <a:xfrm>
-            <a:off x="3589020" y="4361688"/>
-            <a:ext cx="777240" cy="603504"/>
-          </a:xfrm>
-          <a:prstGeom prst="roundRect">
-            <a:avLst>
-              <a:gd name="adj" fmla="val 25000"/>
-            </a:avLst>
-          </a:prstGeom>
-          <a:solidFill>
-            <a:srgbClr val="EEF2F9"/>
-          </a:solidFill>
-          <a:ln w="20320">
-            <a:solidFill>
-              <a:srgbClr val="4C72B0"/>
-            </a:solidFill>
-          </a:ln>
-          <a:effectLst/>
-        </p:spPr>
-        <p:txBody>
-          <a:bodyPr rtlCol="0" anchor="ctr"/>
-          <a:lstStyle/>
-          <a:p>
-            <a:pPr algn="ctr"/>
-          </a:p>
-        </p:txBody>
-      </p:sp>
-      <p:sp>
-        <p:nvSpPr>
-          <p:cNvPr id="24" name="Rectangle 23"/>
-          <p:cNvSpPr/>
-          <p:nvPr/>
-        </p:nvSpPr>
-        <p:spPr>
-          <a:xfrm>
-            <a:off x="3966667" y="4233672"/>
-            <a:ext cx="21945" cy="128016"/>
-          </a:xfrm>
-          <a:prstGeom prst="rect">
-            <a:avLst/>
-          </a:prstGeom>
-          <a:solidFill>
-            <a:srgbClr val="4C72B0"/>
-          </a:solidFill>
-          <a:ln>
-            <a:noFill/>
-          </a:ln>
-          <a:effectLst/>
-        </p:spPr>
-        <p:txBody>
-          <a:bodyPr rtlCol="0" anchor="ctr"/>
-          <a:lstStyle/>
-          <a:p>
-            <a:pPr algn="ctr"/>
-          </a:p>
-        </p:txBody>
-      </p:sp>
-      <p:sp>
-        <p:nvSpPr>
-          <p:cNvPr id="25" name="Oval 24"/>
-          <p:cNvSpPr/>
-          <p:nvPr/>
-        </p:nvSpPr>
-        <p:spPr>
-          <a:xfrm>
-            <a:off x="3931920" y="4142231"/>
-            <a:ext cx="91440" cy="91440"/>
-          </a:xfrm>
-          <a:prstGeom prst="ellipse">
-            <a:avLst/>
-          </a:prstGeom>
-          <a:solidFill>
-            <a:srgbClr val="4C72B0"/>
-          </a:solidFill>
-          <a:ln>
-            <a:noFill/>
-          </a:ln>
-          <a:effectLst/>
-        </p:spPr>
-        <p:txBody>
-          <a:bodyPr rtlCol="0" anchor="ctr"/>
-          <a:lstStyle/>
-          <a:p>
-            <a:pPr algn="ctr"/>
-          </a:p>
-        </p:txBody>
-      </p:sp>
-      <p:sp>
-        <p:nvSpPr>
-          <p:cNvPr id="26" name="Oval 25"/>
-          <p:cNvSpPr/>
-          <p:nvPr/>
-        </p:nvSpPr>
-        <p:spPr>
-          <a:xfrm>
-            <a:off x="3796588" y="4561941"/>
-            <a:ext cx="82296" cy="82296"/>
-          </a:xfrm>
-          <a:prstGeom prst="ellipse">
-            <a:avLst/>
-          </a:prstGeom>
-          <a:solidFill>
-            <a:srgbClr val="4C72B0"/>
-          </a:solidFill>
-          <a:ln>
-            <a:noFill/>
-          </a:ln>
-          <a:effectLst/>
-        </p:spPr>
-        <p:txBody>
-          <a:bodyPr rtlCol="0" anchor="ctr"/>
-          <a:lstStyle/>
-          <a:p>
-            <a:pPr algn="ctr"/>
-          </a:p>
-        </p:txBody>
-      </p:sp>
-      <p:sp>
-        <p:nvSpPr>
-          <p:cNvPr id="27" name="Oval 26"/>
-          <p:cNvSpPr/>
-          <p:nvPr/>
-        </p:nvSpPr>
-        <p:spPr>
-          <a:xfrm>
-            <a:off x="4076395" y="4561941"/>
-            <a:ext cx="82296" cy="82296"/>
-          </a:xfrm>
-          <a:prstGeom prst="ellipse">
-            <a:avLst/>
-          </a:prstGeom>
-          <a:solidFill>
-            <a:srgbClr val="4C72B0"/>
-          </a:solidFill>
-          <a:ln>
-            <a:noFill/>
-          </a:ln>
-          <a:effectLst/>
-        </p:spPr>
-        <p:txBody>
-          <a:bodyPr rtlCol="0" anchor="ctr"/>
-          <a:lstStyle/>
-          <a:p>
-            <a:pPr algn="ctr"/>
-          </a:p>
-        </p:txBody>
-      </p:sp>
-      <p:sp>
-        <p:nvSpPr>
-          <p:cNvPr id="28" name="Rounded Rectangle 27"/>
-          <p:cNvSpPr/>
-          <p:nvPr/>
-        </p:nvSpPr>
-        <p:spPr>
-          <a:xfrm>
-            <a:off x="3868826" y="4735860"/>
-            <a:ext cx="217627" cy="27432"/>
-          </a:xfrm>
-          <a:prstGeom prst="roundRect">
-            <a:avLst>
-              <a:gd name="adj" fmla="val 50000"/>
-            </a:avLst>
-          </a:prstGeom>
-          <a:solidFill>
-            <a:srgbClr val="4C72B0"/>
-          </a:solidFill>
-          <a:ln>
-            <a:noFill/>
-          </a:ln>
-          <a:effectLst/>
-        </p:spPr>
-        <p:txBody>
-          <a:bodyPr rtlCol="0" anchor="ctr"/>
-          <a:lstStyle/>
-          <a:p>
-            <a:pPr algn="ctr"/>
-          </a:p>
-        </p:txBody>
-      </p:sp>
-      <p:sp>
-        <p:nvSpPr>
-          <p:cNvPr id="29" name="TextBox 28"/>
-          <p:cNvSpPr txBox="1"/>
-          <p:nvPr/>
-        </p:nvSpPr>
-        <p:spPr>
-          <a:xfrm>
-            <a:off x="3268979" y="5001768"/>
-            <a:ext cx="1417319" cy="256032"/>
-          </a:xfrm>
-          <a:prstGeom prst="rect">
-            <a:avLst/>
-          </a:prstGeom>
-          <a:noFill/>
-        </p:spPr>
-        <p:txBody>
-          <a:bodyPr wrap="square" lIns="0" rIns="0" tIns="0" bIns="0">
-            <a:spAutoFit/>
-          </a:bodyPr>
-          <a:lstStyle/>
-          <a:p>
-            <a:pPr algn="ctr"/>
-            <a:r>
-              <a:rPr sz="900" b="1" i="0">
-                <a:solidFill>
-                  <a:srgbClr val="1F1F1E"/>
-                </a:solidFill>
-                <a:latin typeface="Times New Roman"/>
-              </a:rPr>
-              <a:t>Student  🔥</a:t>
-            </a:r>
-          </a:p>
-        </p:txBody>
-      </p:sp>
-      <p:sp>
-        <p:nvSpPr>
-          <p:cNvPr id="30" name="Oval 29"/>
-          <p:cNvSpPr/>
-          <p:nvPr/>
-        </p:nvSpPr>
-        <p:spPr>
-          <a:xfrm>
-            <a:off x="3017520" y="1234440"/>
-            <a:ext cx="4846320" cy="3017520"/>
-          </a:xfrm>
-          <a:prstGeom prst="ellipse">
-            <a:avLst/>
-          </a:prstGeom>
-          <a:solidFill>
-            <a:srgbClr val="E8E6E1">
-              <a:alpha val="30000"/>
-            </a:srgbClr>
-          </a:solidFill>
-          <a:ln w="25400">
+              <a:t>Frozen Teacher ❄</a:t>
+            </a:r>
+          </a:p>
+        </p:txBody>
+      </p:sp>
+      <p:cxnSp>
+        <p:nvCxnSpPr>
+          <p:cNvPr id="14" name="Connector 13"/>
+          <p:cNvCxnSpPr/>
+          <p:nvPr/>
+        </p:nvCxnSpPr>
+        <p:spPr>
+          <a:xfrm>
+            <a:off x="1234440" y="3401568"/>
+            <a:ext cx="338328" cy="0"/>
+          </a:xfrm>
+          <a:prstGeom prst="line">
+            <a:avLst/>
+          </a:prstGeom>
+          <a:ln w="22860">
             <a:solidFill>
               <a:srgbClr val="8C8C8C"/>
             </a:solidFill>
-            <a:prstDash val="sysDash"/>
-          </a:ln>
-          <a:effectLst/>
-        </p:spPr>
-        <p:txBody>
-          <a:bodyPr rtlCol="0" anchor="ctr"/>
-          <a:lstStyle/>
-          <a:p>
-            <a:pPr algn="ctr"/>
-          </a:p>
-        </p:txBody>
-      </p:sp>
-      <p:sp>
-        <p:nvSpPr>
-          <p:cNvPr id="31" name="Rounded Rectangle 30"/>
+            <a:tailEnd type="triangle" w="med" len="med"/>
+          </a:ln>
+          <a:effectLst/>
+        </p:spPr>
+      </p:cxnSp>
+      <p:sp>
+        <p:nvSpPr>
+          <p:cNvPr id="15" name="Folded Corner 14"/>
           <p:cNvSpPr/>
           <p:nvPr/>
         </p:nvSpPr>
         <p:spPr>
           <a:xfrm>
-            <a:off x="777240" y="5989320"/>
-            <a:ext cx="3291840" cy="310896"/>
-          </a:xfrm>
-          <a:prstGeom prst="roundRect">
-            <a:avLst>
-              <a:gd name="adj" fmla="val 50000"/>
-            </a:avLst>
-          </a:prstGeom>
-          <a:solidFill>
-            <a:srgbClr val="EEF2F9"/>
-          </a:solidFill>
-          <a:ln>
-            <a:noFill/>
-          </a:ln>
-          <a:effectLst/>
-        </p:spPr>
-        <p:txBody>
-          <a:bodyPr rtlCol="0" anchor="ctr" lIns="9000" rIns="9000" tIns="4500" bIns="4500" wrap="square"/>
-          <a:lstStyle/>
-          <a:p>
-            <a:pPr algn="ctr"/>
-            <a:r>
-              <a:rPr sz="900" b="1" i="0">
-                <a:solidFill>
-                  <a:srgbClr val="4C72B0"/>
-                </a:solidFill>
-                <a:latin typeface="Times New Roman"/>
-              </a:rPr>
-              <a:t>our student: capability ends at the boundary</a:t>
-            </a:r>
-          </a:p>
-        </p:txBody>
-      </p:sp>
-      <p:cxnSp>
-        <p:nvCxnSpPr>
-          <p:cNvPr id="32" name="Connector 31"/>
-          <p:cNvCxnSpPr/>
-          <p:nvPr/>
-        </p:nvCxnSpPr>
-        <p:spPr>
-          <a:xfrm flipV="1">
-            <a:off x="2377440" y="5440680"/>
-            <a:ext cx="457200" cy="521208"/>
-          </a:xfrm>
-          <a:prstGeom prst="line">
-            <a:avLst/>
-          </a:prstGeom>
-          <a:ln w="20320">
-            <a:solidFill>
-              <a:srgbClr val="4C72B0"/>
-            </a:solidFill>
-            <a:tailEnd type="triangle" w="med" len="med"/>
-          </a:ln>
-          <a:effectLst/>
-        </p:spPr>
-      </p:cxnSp>
-      <p:sp>
-        <p:nvSpPr>
-          <p:cNvPr id="33" name="Rounded Rectangle 32"/>
-          <p:cNvSpPr/>
-          <p:nvPr/>
-        </p:nvSpPr>
-        <p:spPr>
-          <a:xfrm>
-            <a:off x="4709160" y="566928"/>
-            <a:ext cx="3246120" cy="310896"/>
-          </a:xfrm>
-          <a:prstGeom prst="roundRect">
-            <a:avLst>
-              <a:gd name="adj" fmla="val 50000"/>
-            </a:avLst>
-          </a:prstGeom>
-          <a:solidFill>
-            <a:srgbClr val="ECEAE4"/>
-          </a:solidFill>
-          <a:ln>
-            <a:noFill/>
-          </a:ln>
-          <a:effectLst/>
-        </p:spPr>
-        <p:txBody>
-          <a:bodyPr rtlCol="0" anchor="ctr" lIns="9000" rIns="9000" tIns="4500" bIns="4500" wrap="square"/>
-          <a:lstStyle/>
-          <a:p>
-            <a:pPr algn="ctr"/>
-            <a:r>
-              <a:rPr sz="900" b="1" i="0">
-                <a:solidFill>
-                  <a:srgbClr val="C44E52"/>
-                </a:solidFill>
-                <a:latin typeface="Times New Roman"/>
-              </a:rPr>
-              <a:t>budget-matched baseline: leaks out of scope</a:t>
-            </a:r>
-          </a:p>
-        </p:txBody>
-      </p:sp>
-      <p:cxnSp>
-        <p:nvCxnSpPr>
-          <p:cNvPr id="34" name="Connector 33"/>
-          <p:cNvCxnSpPr/>
-          <p:nvPr/>
-        </p:nvCxnSpPr>
-        <p:spPr>
-          <a:xfrm flipH="1">
-            <a:off x="6035040" y="905256"/>
-            <a:ext cx="274320" cy="512064"/>
-          </a:xfrm>
-          <a:prstGeom prst="line">
-            <a:avLst/>
-          </a:prstGeom>
-          <a:ln w="20320">
-            <a:solidFill>
-              <a:srgbClr val="C44E52"/>
-            </a:solidFill>
-            <a:tailEnd type="triangle" w="med" len="med"/>
-          </a:ln>
-          <a:effectLst/>
-        </p:spPr>
-      </p:cxnSp>
-      <p:sp>
-        <p:nvSpPr>
-          <p:cNvPr id="35" name="TextBox 34"/>
-          <p:cNvSpPr txBox="1"/>
-          <p:nvPr/>
-        </p:nvSpPr>
-        <p:spPr>
-          <a:xfrm>
-            <a:off x="4617720" y="2395728"/>
-            <a:ext cx="1188720" cy="457200"/>
-          </a:xfrm>
-          <a:prstGeom prst="rect">
-            <a:avLst/>
-          </a:prstGeom>
-          <a:noFill/>
-        </p:spPr>
-        <p:txBody>
-          <a:bodyPr wrap="square" lIns="0" rIns="0" tIns="0" bIns="0">
-            <a:spAutoFit/>
-          </a:bodyPr>
-          <a:lstStyle/>
-          <a:p>
-            <a:pPr algn="ctr"/>
-            <a:r>
-              <a:rPr sz="950" b="1" i="1">
-                <a:solidFill>
-                  <a:srgbClr val="C44E52"/>
-                </a:solidFill>
-                <a:latin typeface="Times New Roman"/>
-              </a:rPr>
-              <a:t>leakage</a:t>
-            </a:r>
-          </a:p>
-        </p:txBody>
-      </p:sp>
-      <p:cxnSp>
-        <p:nvCxnSpPr>
-          <p:cNvPr id="36" name="Connector 35"/>
-          <p:cNvCxnSpPr/>
-          <p:nvPr/>
-        </p:nvCxnSpPr>
-        <p:spPr>
-          <a:xfrm>
-            <a:off x="5120640" y="2514600"/>
-            <a:ext cx="685800" cy="0"/>
-          </a:xfrm>
-          <a:prstGeom prst="line">
-            <a:avLst/>
-          </a:prstGeom>
-          <a:ln w="25400">
-            <a:solidFill>
-              <a:srgbClr val="C44E52"/>
-            </a:solidFill>
-            <a:tailEnd type="triangle" w="med" len="med"/>
-          </a:ln>
-          <a:effectLst/>
-        </p:spPr>
-      </p:cxnSp>
-      <p:sp>
-        <p:nvSpPr>
-          <p:cNvPr id="37" name="Rounded Rectangle 36"/>
-          <p:cNvSpPr/>
-          <p:nvPr/>
-        </p:nvSpPr>
-        <p:spPr>
-          <a:xfrm>
-            <a:off x="713232" y="3776472"/>
-            <a:ext cx="960120" cy="713232"/>
-          </a:xfrm>
-          <a:prstGeom prst="roundRect">
-            <a:avLst>
-              <a:gd name="adj" fmla="val 25000"/>
-            </a:avLst>
+            <a:off x="1737360" y="3108960"/>
+            <a:ext cx="960120" cy="777240"/>
+          </a:xfrm>
+          <a:prstGeom prst="foldedCorner">
+            <a:avLst/>
           </a:prstGeom>
           <a:solidFill>
             <a:srgbClr val="F7F6F2"/>
@@ -4347,19 +3564,17 @@
       </p:sp>
       <p:sp>
         <p:nvSpPr>
-          <p:cNvPr id="38" name="Rounded Rectangle 37"/>
+          <p:cNvPr id="16" name="Folded Corner 15"/>
           <p:cNvSpPr/>
           <p:nvPr/>
         </p:nvSpPr>
         <p:spPr>
           <a:xfrm>
-            <a:off x="630936" y="3694176"/>
-            <a:ext cx="960120" cy="713232"/>
-          </a:xfrm>
-          <a:prstGeom prst="roundRect">
-            <a:avLst>
-              <a:gd name="adj" fmla="val 25000"/>
-            </a:avLst>
+            <a:off x="1691640" y="3063239"/>
+            <a:ext cx="960120" cy="777240"/>
+          </a:xfrm>
+          <a:prstGeom prst="foldedCorner">
+            <a:avLst/>
           </a:prstGeom>
           <a:solidFill>
             <a:srgbClr val="F7F6F2"/>
@@ -4381,24 +3596,22 @@
       </p:sp>
       <p:sp>
         <p:nvSpPr>
-          <p:cNvPr id="39" name="Rounded Rectangle 38"/>
+          <p:cNvPr id="17" name="Folded Corner 16"/>
           <p:cNvSpPr/>
           <p:nvPr/>
         </p:nvSpPr>
         <p:spPr>
           <a:xfrm>
-            <a:off x="548640" y="3611880"/>
-            <a:ext cx="960120" cy="713232"/>
-          </a:xfrm>
-          <a:prstGeom prst="roundRect">
-            <a:avLst>
-              <a:gd name="adj" fmla="val 25000"/>
-            </a:avLst>
+            <a:off x="1645920" y="3017520"/>
+            <a:ext cx="960120" cy="777240"/>
+          </a:xfrm>
+          <a:prstGeom prst="foldedCorner">
+            <a:avLst/>
           </a:prstGeom>
           <a:solidFill>
             <a:srgbClr val="F7F6F2"/>
           </a:solidFill>
-          <a:ln w="12700">
+          <a:ln w="15240">
             <a:solidFill>
               <a:srgbClr val="8C8C8C"/>
             </a:solidFill>
@@ -4415,14 +3628,14 @@
       </p:sp>
       <p:sp>
         <p:nvSpPr>
-          <p:cNvPr id="40" name="TextBox 39"/>
+          <p:cNvPr id="18" name="TextBox 17"/>
           <p:cNvSpPr txBox="1"/>
           <p:nvPr/>
         </p:nvSpPr>
         <p:spPr>
           <a:xfrm>
-            <a:off x="603504" y="3712463"/>
-            <a:ext cx="914400" cy="640080"/>
+            <a:off x="1664208" y="3154679"/>
+            <a:ext cx="923544" cy="548640"/>
           </a:xfrm>
           <a:prstGeom prst="rect">
             <a:avLst/>
@@ -4435,41 +3648,110 @@
           </a:bodyPr>
           <a:lstStyle/>
           <a:p>
-            <a:pPr algn="l"/>
-            <a:r>
-              <a:rPr sz="700" b="0" i="0">
+            <a:pPr algn="ctr"/>
+            <a:r>
+              <a:rPr sz="700" b="1" i="0">
                 <a:solidFill>
                   <a:srgbClr val="1F1F1E"/>
                 </a:solidFill>
                 <a:latin typeface="Times New Roman"/>
               </a:rPr>
-              <a:t>"members</a:t>
-            </a:r>
-          </a:p>
-          <a:p>
-            <a:pPr algn="l"/>
-            <a:r>
-              <a:rPr sz="700" b="0" i="0">
+              <a:t>trace pool</a:t>
+            </a:r>
+          </a:p>
+          <a:p>
+            <a:pPr algn="ctr"/>
+            <a:r>
+              <a:rPr sz="700" b="1" i="0">
                 <a:solidFill>
                   <a:srgbClr val="1F1F1E"/>
                 </a:solidFill>
                 <a:latin typeface="Times New Roman"/>
               </a:rPr>
-              <a:t>per club?"</a:t>
-            </a:r>
-          </a:p>
-        </p:txBody>
-      </p:sp>
-      <p:sp>
-        <p:nvSpPr>
-          <p:cNvPr id="41" name="TextBox 40"/>
+              <a:t>1080 exec-</a:t>
+            </a:r>
+          </a:p>
+          <a:p>
+            <a:pPr algn="ctr"/>
+            <a:r>
+              <a:rPr sz="700" b="1" i="0">
+                <a:solidFill>
+                  <a:srgbClr val="1F1F1E"/>
+                </a:solidFill>
+                <a:latin typeface="Times New Roman"/>
+              </a:rPr>
+              <a:t>verified</a:t>
+            </a:r>
+          </a:p>
+        </p:txBody>
+      </p:sp>
+      <p:cxnSp>
+        <p:nvCxnSpPr>
+          <p:cNvPr id="19" name="Connector 18"/>
+          <p:cNvCxnSpPr/>
+          <p:nvPr/>
+        </p:nvCxnSpPr>
+        <p:spPr>
+          <a:xfrm>
+            <a:off x="2395728" y="950976"/>
+            <a:ext cx="301752" cy="0"/>
+          </a:xfrm>
+          <a:prstGeom prst="line">
+            <a:avLst/>
+          </a:prstGeom>
+          <a:ln w="22860">
+            <a:solidFill>
+              <a:srgbClr val="8C8C8C"/>
+            </a:solidFill>
+            <a:tailEnd type="triangle" w="med" len="med"/>
+          </a:ln>
+          <a:effectLst/>
+        </p:spPr>
+      </p:cxnSp>
+      <p:sp>
+        <p:nvSpPr>
+          <p:cNvPr id="20" name="Rounded Rectangle 19"/>
+          <p:cNvSpPr/>
+          <p:nvPr/>
+        </p:nvSpPr>
+        <p:spPr>
+          <a:xfrm>
+            <a:off x="2724912" y="621792"/>
+            <a:ext cx="1298448" cy="713232"/>
+          </a:xfrm>
+          <a:prstGeom prst="roundRect">
+            <a:avLst>
+              <a:gd name="adj" fmla="val 12000"/>
+            </a:avLst>
+          </a:prstGeom>
+          <a:solidFill>
+            <a:srgbClr val="E6DCEF"/>
+          </a:solidFill>
+          <a:ln w="16510">
+            <a:solidFill>
+              <a:srgbClr val="8E6BAE"/>
+            </a:solidFill>
+          </a:ln>
+          <a:effectLst/>
+        </p:spPr>
+        <p:txBody>
+          <a:bodyPr rtlCol="0" anchor="ctr"/>
+          <a:lstStyle/>
+          <a:p>
+            <a:pPr algn="ctr"/>
+          </a:p>
+        </p:txBody>
+      </p:sp>
+      <p:sp>
+        <p:nvSpPr>
+          <p:cNvPr id="21" name="TextBox 20"/>
           <p:cNvSpPr txBox="1"/>
           <p:nvPr/>
         </p:nvSpPr>
         <p:spPr>
           <a:xfrm>
-            <a:off x="384048" y="3291840"/>
-            <a:ext cx="1463040" cy="274320"/>
+            <a:off x="2752344" y="667512"/>
+            <a:ext cx="1243584" cy="392277"/>
           </a:xfrm>
           <a:prstGeom prst="rect">
             <a:avLst/>
@@ -4482,134 +3764,139 @@
           </a:bodyPr>
           <a:lstStyle/>
           <a:p>
-            <a:pPr algn="l"/>
-            <a:r>
-              <a:rPr sz="950" b="0" i="1">
-                <a:solidFill>
-                  <a:srgbClr val="6B6A63"/>
+            <a:pPr algn="ctr"/>
+            <a:r>
+              <a:rPr sz="800" b="1" i="0">
+                <a:solidFill>
+                  <a:srgbClr val="1F1F1E"/>
                 </a:solidFill>
                 <a:latin typeface="Times New Roman"/>
               </a:rPr>
-              <a:t>k queries</a:t>
+              <a:t>backward pass</a:t>
+            </a:r>
+          </a:p>
+          <a:p>
+            <a:pPr algn="ctr"/>
+            <a:r>
+              <a:rPr sz="800" b="1" i="0">
+                <a:solidFill>
+                  <a:srgbClr val="1F1F1E"/>
+                </a:solidFill>
+                <a:latin typeface="Times New Roman"/>
+              </a:rPr>
+              <a:t>@ student init</a:t>
+            </a:r>
+          </a:p>
+        </p:txBody>
+      </p:sp>
+      <p:sp>
+        <p:nvSpPr>
+          <p:cNvPr id="22" name="Rounded Rectangle 21"/>
+          <p:cNvSpPr/>
+          <p:nvPr/>
+        </p:nvSpPr>
+        <p:spPr>
+          <a:xfrm>
+            <a:off x="2788920" y="1115568"/>
+            <a:ext cx="1170431" cy="164592"/>
+          </a:xfrm>
+          <a:prstGeom prst="roundRect">
+            <a:avLst>
+              <a:gd name="adj" fmla="val 30000"/>
+            </a:avLst>
+          </a:prstGeom>
+          <a:solidFill>
+            <a:srgbClr val="FFFFFF"/>
+          </a:solidFill>
+          <a:ln w="9525">
+            <a:solidFill>
+              <a:srgbClr val="8E6BAE"/>
+            </a:solidFill>
+          </a:ln>
+          <a:effectLst/>
+        </p:spPr>
+        <p:txBody>
+          <a:bodyPr rtlCol="0" anchor="ctr" lIns="9000" rIns="9000" tIns="4500" bIns="4500" wrap="square"/>
+          <a:lstStyle/>
+          <a:p>
+            <a:pPr algn="ctr"/>
+            <a:r>
+              <a:rPr sz="650" b="0" i="0">
+                <a:solidFill>
+                  <a:srgbClr val="6B6A63"/>
+                </a:solidFill>
+                <a:latin typeface="Times New Roman"/>
+              </a:rPr>
+              <a:t>LoRA-B sketch + JL</a:t>
             </a:r>
           </a:p>
         </p:txBody>
       </p:sp>
       <p:cxnSp>
         <p:nvCxnSpPr>
-          <p:cNvPr id="42" name="Connector 41"/>
+          <p:cNvPr id="23" name="Connector 22"/>
           <p:cNvCxnSpPr/>
           <p:nvPr/>
         </p:nvCxnSpPr>
         <p:spPr>
           <a:xfrm>
-            <a:off x="1234440" y="3977639"/>
-            <a:ext cx="457200" cy="0"/>
+            <a:off x="4041648" y="950976"/>
+            <a:ext cx="274320" cy="0"/>
           </a:xfrm>
           <a:prstGeom prst="line">
             <a:avLst/>
           </a:prstGeom>
-          <a:ln w="25400">
+          <a:ln w="22860">
+            <a:solidFill>
+              <a:srgbClr val="8C8C8C"/>
+            </a:solidFill>
+            <a:tailEnd type="triangle" w="med" len="med"/>
+          </a:ln>
+          <a:effectLst/>
+        </p:spPr>
+      </p:cxnSp>
+      <p:sp>
+        <p:nvSpPr>
+          <p:cNvPr id="24" name="Folded Corner 23"/>
+          <p:cNvSpPr/>
+          <p:nvPr/>
+        </p:nvSpPr>
+        <p:spPr>
+          <a:xfrm>
+            <a:off x="4343400" y="603504"/>
+            <a:ext cx="896112" cy="731520"/>
+          </a:xfrm>
+          <a:prstGeom prst="foldedCorner">
+            <a:avLst/>
+          </a:prstGeom>
+          <a:solidFill>
+            <a:srgbClr val="DDE9F7"/>
+          </a:solidFill>
+          <a:ln w="15240">
             <a:solidFill>
               <a:srgbClr val="4C72B0"/>
             </a:solidFill>
-            <a:tailEnd type="triangle" w="med" len="med"/>
-          </a:ln>
-          <a:effectLst/>
-        </p:spPr>
-      </p:cxnSp>
-      <p:sp>
-        <p:nvSpPr>
-          <p:cNvPr id="43" name="Rounded Rectangle 42"/>
-          <p:cNvSpPr/>
-          <p:nvPr/>
-        </p:nvSpPr>
-        <p:spPr>
-          <a:xfrm>
-            <a:off x="502920" y="5138928"/>
-            <a:ext cx="2651760" cy="310896"/>
-          </a:xfrm>
-          <a:prstGeom prst="roundRect">
-            <a:avLst>
-              <a:gd name="adj" fmla="val 50000"/>
-            </a:avLst>
-          </a:prstGeom>
-          <a:solidFill>
-            <a:srgbClr val="EEF2F9"/>
-          </a:solidFill>
-          <a:ln>
-            <a:noFill/>
-          </a:ln>
-          <a:effectLst/>
-        </p:spPr>
-        <p:txBody>
-          <a:bodyPr rtlCol="0" anchor="ctr" lIns="9000" rIns="9000" tIns="4500" bIns="4500" wrap="square"/>
-          <a:lstStyle/>
-          <a:p>
-            <a:pPr algn="ctr"/>
-            <a:r>
-              <a:rPr sz="850" b="1" i="0">
-                <a:solidFill>
-                  <a:srgbClr val="4C72B0"/>
-                </a:solidFill>
-                <a:latin typeface="Times New Roman"/>
-              </a:rPr>
-              <a:t>boundary read from gradients, k≈5</a:t>
-            </a:r>
-          </a:p>
-        </p:txBody>
-      </p:sp>
-      <p:sp>
-        <p:nvSpPr>
-          <p:cNvPr id="44" name="Oval 43"/>
-          <p:cNvSpPr/>
-          <p:nvPr/>
-        </p:nvSpPr>
-        <p:spPr>
-          <a:xfrm>
-            <a:off x="4828032" y="3611880"/>
-            <a:ext cx="402336" cy="402336"/>
-          </a:xfrm>
-          <a:prstGeom prst="ellipse">
-            <a:avLst/>
-          </a:prstGeom>
-          <a:solidFill>
-            <a:srgbClr val="55A868"/>
-          </a:solidFill>
-          <a:ln w="19050">
-            <a:solidFill>
-              <a:srgbClr val="FFFFFF"/>
-            </a:solidFill>
-          </a:ln>
-          <a:effectLst/>
-        </p:spPr>
-        <p:txBody>
-          <a:bodyPr rtlCol="0" anchor="ctr" lIns="9000" rIns="9000" tIns="4500" bIns="4500" wrap="square"/>
-          <a:lstStyle/>
-          <a:p>
-            <a:pPr algn="ctr"/>
-            <a:r>
-              <a:rPr sz="850" b="1" i="0">
-                <a:solidFill>
-                  <a:srgbClr val="FFFFFF"/>
-                </a:solidFill>
-                <a:latin typeface="Times New Roman"/>
-              </a:rPr>
-              <a:t>90%</a:t>
-            </a:r>
-          </a:p>
-        </p:txBody>
-      </p:sp>
-      <p:sp>
-        <p:nvSpPr>
-          <p:cNvPr id="45" name="TextBox 44"/>
+          </a:ln>
+          <a:effectLst/>
+        </p:spPr>
+        <p:txBody>
+          <a:bodyPr rtlCol="0" anchor="ctr"/>
+          <a:lstStyle/>
+          <a:p>
+            <a:pPr algn="ctr"/>
+          </a:p>
+        </p:txBody>
+      </p:sp>
+      <p:sp>
+        <p:nvSpPr>
+          <p:cNvPr id="25" name="TextBox 24"/>
           <p:cNvSpPr txBox="1"/>
           <p:nvPr/>
         </p:nvSpPr>
         <p:spPr>
           <a:xfrm>
-            <a:off x="5285232" y="3639312"/>
-            <a:ext cx="1325880" cy="502920"/>
+            <a:off x="4361688" y="717804"/>
+            <a:ext cx="859536" cy="548640"/>
           </a:xfrm>
           <a:prstGeom prst="rect">
             <a:avLst/>
@@ -4622,41 +3909,98 @@
           </a:bodyPr>
           <a:lstStyle/>
           <a:p>
-            <a:pPr algn="l"/>
-            <a:r>
-              <a:rPr sz="800" b="1" i="0">
-                <a:solidFill>
-                  <a:srgbClr val="55A868"/>
+            <a:pPr algn="ctr"/>
+            <a:r>
+              <a:rPr sz="750" b="1" i="0">
+                <a:solidFill>
+                  <a:srgbClr val="1F1F1E"/>
                 </a:solidFill>
                 <a:latin typeface="Times New Roman"/>
               </a:rPr>
-              <a:t>conformal gate</a:t>
-            </a:r>
-          </a:p>
-          <a:p>
-            <a:pPr algn="l"/>
-            <a:r>
-              <a:rPr sz="800" b="1" i="0">
-                <a:solidFill>
-                  <a:srgbClr val="55A868"/>
+              <a:t>gradient</a:t>
+            </a:r>
+          </a:p>
+          <a:p>
+            <a:pPr algn="ctr"/>
+            <a:r>
+              <a:rPr sz="750" b="1" i="0">
+                <a:solidFill>
+                  <a:srgbClr val="1F1F1E"/>
                 </a:solidFill>
                 <a:latin typeface="Times New Roman"/>
               </a:rPr>
-              <a:t>on the boundary</a:t>
-            </a:r>
-          </a:p>
-        </p:txBody>
-      </p:sp>
-      <p:sp>
-        <p:nvSpPr>
-          <p:cNvPr id="46" name="TextBox 45"/>
+              <a:t>fingerprints</a:t>
+            </a:r>
+          </a:p>
+        </p:txBody>
+      </p:sp>
+      <p:cxnSp>
+        <p:nvCxnSpPr>
+          <p:cNvPr id="26" name="Connector 25"/>
+          <p:cNvCxnSpPr/>
+          <p:nvPr/>
+        </p:nvCxnSpPr>
+        <p:spPr>
+          <a:xfrm>
+            <a:off x="5257800" y="950976"/>
+            <a:ext cx="274320" cy="0"/>
+          </a:xfrm>
+          <a:prstGeom prst="line">
+            <a:avLst/>
+          </a:prstGeom>
+          <a:ln w="22860">
+            <a:solidFill>
+              <a:srgbClr val="8C8C8C"/>
+            </a:solidFill>
+            <a:tailEnd type="triangle" w="med" len="med"/>
+          </a:ln>
+          <a:effectLst/>
+        </p:spPr>
+      </p:cxnSp>
+      <p:sp>
+        <p:nvSpPr>
+          <p:cNvPr id="27" name="Rounded Rectangle 26"/>
+          <p:cNvSpPr/>
+          <p:nvPr/>
+        </p:nvSpPr>
+        <p:spPr>
+          <a:xfrm>
+            <a:off x="5559552" y="621792"/>
+            <a:ext cx="1188720" cy="713232"/>
+          </a:xfrm>
+          <a:prstGeom prst="roundRect">
+            <a:avLst>
+              <a:gd name="adj" fmla="val 12000"/>
+            </a:avLst>
+          </a:prstGeom>
+          <a:solidFill>
+            <a:srgbClr val="E6DCEF"/>
+          </a:solidFill>
+          <a:ln w="16510">
+            <a:solidFill>
+              <a:srgbClr val="8E6BAE"/>
+            </a:solidFill>
+          </a:ln>
+          <a:effectLst/>
+        </p:spPr>
+        <p:txBody>
+          <a:bodyPr rtlCol="0" anchor="ctr"/>
+          <a:lstStyle/>
+          <a:p>
+            <a:pPr algn="ctr"/>
+          </a:p>
+        </p:txBody>
+      </p:sp>
+      <p:sp>
+        <p:nvSpPr>
+          <p:cNvPr id="28" name="TextBox 27"/>
           <p:cNvSpPr txBox="1"/>
           <p:nvPr/>
         </p:nvSpPr>
         <p:spPr>
           <a:xfrm>
-            <a:off x="2194560" y="6355080"/>
-            <a:ext cx="5486400" cy="320040"/>
+            <a:off x="5586984" y="667512"/>
+            <a:ext cx="1133856" cy="392277"/>
           </a:xfrm>
           <a:prstGeom prst="rect">
             <a:avLst/>
@@ -4671,31 +4015,109 @@
           <a:p>
             <a:pPr algn="ctr"/>
             <a:r>
-              <a:rPr sz="950" b="0" i="0">
-                <a:solidFill>
-                  <a:srgbClr val="6B6A63"/>
+              <a:rPr sz="800" b="1" i="0">
+                <a:solidFill>
+                  <a:srgbClr val="1F1F1E"/>
                 </a:solidFill>
                 <a:latin typeface="Times New Roman"/>
               </a:rPr>
-              <a:t>distill: select only traces whose atoms lie inside the boundary (λ rejects the rest) · train until absorbed, then stop</a:t>
-            </a:r>
-          </a:p>
-        </p:txBody>
-      </p:sp>
-      <p:sp>
-        <p:nvSpPr>
-          <p:cNvPr id="47" name="Rounded Rectangle 46"/>
+              <a:t>sparse</a:t>
+            </a:r>
+          </a:p>
+          <a:p>
+            <a:pPr algn="ctr"/>
+            <a:r>
+              <a:rPr sz="800" b="1" i="0">
+                <a:solidFill>
+                  <a:srgbClr val="1F1F1E"/>
+                </a:solidFill>
+                <a:latin typeface="Times New Roman"/>
+              </a:rPr>
+              <a:t>dictionary</a:t>
+            </a:r>
+          </a:p>
+        </p:txBody>
+      </p:sp>
+      <p:sp>
+        <p:nvSpPr>
+          <p:cNvPr id="29" name="Rounded Rectangle 28"/>
           <p:cNvSpPr/>
           <p:nvPr/>
         </p:nvSpPr>
         <p:spPr>
           <a:xfrm>
-            <a:off x="8915400" y="566928"/>
-            <a:ext cx="3063240" cy="1417320"/>
+            <a:off x="5623560" y="1115568"/>
+            <a:ext cx="1060704" cy="164592"/>
           </a:xfrm>
           <a:prstGeom prst="roundRect">
             <a:avLst>
-              <a:gd name="adj" fmla="val 8000"/>
+              <a:gd name="adj" fmla="val 30000"/>
+            </a:avLst>
+          </a:prstGeom>
+          <a:solidFill>
+            <a:srgbClr val="FFFFFF"/>
+          </a:solidFill>
+          <a:ln w="9525">
+            <a:solidFill>
+              <a:srgbClr val="8E6BAE"/>
+            </a:solidFill>
+          </a:ln>
+          <a:effectLst/>
+        </p:spPr>
+        <p:txBody>
+          <a:bodyPr rtlCol="0" anchor="ctr" lIns="9000" rIns="9000" tIns="4500" bIns="4500" wrap="square"/>
+          <a:lstStyle/>
+          <a:p>
+            <a:pPr algn="ctr"/>
+            <a:r>
+              <a:rPr sz="650" b="0" i="0">
+                <a:solidFill>
+                  <a:srgbClr val="6B6A63"/>
+                </a:solidFill>
+                <a:latin typeface="Times New Roman"/>
+              </a:rPr>
+              <a:t>128 atoms · lasso</a:t>
+            </a:r>
+          </a:p>
+        </p:txBody>
+      </p:sp>
+      <p:cxnSp>
+        <p:nvCxnSpPr>
+          <p:cNvPr id="30" name="Connector 29"/>
+          <p:cNvCxnSpPr/>
+          <p:nvPr/>
+        </p:nvCxnSpPr>
+        <p:spPr>
+          <a:xfrm>
+            <a:off x="6766560" y="950976"/>
+            <a:ext cx="274320" cy="0"/>
+          </a:xfrm>
+          <a:prstGeom prst="line">
+            <a:avLst/>
+          </a:prstGeom>
+          <a:ln w="22860">
+            <a:solidFill>
+              <a:srgbClr val="8C8C8C"/>
+            </a:solidFill>
+            <a:tailEnd type="triangle" w="med" len="med"/>
+          </a:ln>
+          <a:effectLst/>
+        </p:spPr>
+      </p:cxnSp>
+      <p:sp>
+        <p:nvSpPr>
+          <p:cNvPr id="31" name="Rounded Rectangle 30"/>
+          <p:cNvSpPr/>
+          <p:nvPr/>
+        </p:nvSpPr>
+        <p:spPr>
+          <a:xfrm>
+            <a:off x="7068312" y="603504"/>
+            <a:ext cx="1883664" cy="731520"/>
+          </a:xfrm>
+          <a:prstGeom prst="roundRect">
+            <a:avLst>
+              <a:gd name="adj" fmla="val 10000"/>
             </a:avLst>
           </a:prstGeom>
           <a:solidFill>
@@ -4718,27 +4140,290 @@
       </p:sp>
       <p:sp>
         <p:nvSpPr>
-          <p:cNvPr id="48" name="Rounded Rectangle 47"/>
+          <p:cNvPr id="32" name="Rounded Rectangle 31"/>
           <p:cNvSpPr/>
           <p:nvPr/>
         </p:nvSpPr>
         <p:spPr>
           <a:xfrm>
-            <a:off x="9043416" y="694944"/>
-            <a:ext cx="749808" cy="566928"/>
+            <a:off x="7159752" y="694944"/>
+            <a:ext cx="566928" cy="219456"/>
           </a:xfrm>
           <a:prstGeom prst="roundRect">
             <a:avLst>
-              <a:gd name="adj" fmla="val 25000"/>
+              <a:gd name="adj" fmla="val 45000"/>
             </a:avLst>
           </a:prstGeom>
           <a:solidFill>
-            <a:srgbClr val="F7F6F2"/>
+            <a:srgbClr val="4C72B0"/>
           </a:solidFill>
-          <a:ln w="12700">
+          <a:ln w="8890">
+            <a:solidFill>
+              <a:srgbClr val="FFFFFF"/>
+            </a:solidFill>
+          </a:ln>
+          <a:effectLst/>
+        </p:spPr>
+        <p:txBody>
+          <a:bodyPr rtlCol="0" anchor="ctr" lIns="9000" rIns="9000" tIns="4500" bIns="4500" wrap="square"/>
+          <a:lstStyle/>
+          <a:p>
+            <a:pPr algn="ctr"/>
+            <a:r>
+              <a:rPr sz="700" b="1" i="0">
+                <a:solidFill>
+                  <a:srgbClr val="FFFFFF"/>
+                </a:solidFill>
+                <a:latin typeface="Times New Roman"/>
+              </a:rPr>
+              <a:t>JOIN</a:t>
+            </a:r>
+          </a:p>
+        </p:txBody>
+      </p:sp>
+      <p:sp>
+        <p:nvSpPr>
+          <p:cNvPr id="33" name="Rounded Rectangle 32"/>
+          <p:cNvSpPr/>
+          <p:nvPr/>
+        </p:nvSpPr>
+        <p:spPr>
+          <a:xfrm>
+            <a:off x="7772400" y="694944"/>
+            <a:ext cx="786384" cy="219456"/>
+          </a:xfrm>
+          <a:prstGeom prst="roundRect">
+            <a:avLst>
+              <a:gd name="adj" fmla="val 45000"/>
+            </a:avLst>
+          </a:prstGeom>
+          <a:solidFill>
+            <a:srgbClr val="7BA7D7"/>
+          </a:solidFill>
+          <a:ln w="8890">
+            <a:solidFill>
+              <a:srgbClr val="FFFFFF"/>
+            </a:solidFill>
+          </a:ln>
+          <a:effectLst/>
+        </p:spPr>
+        <p:txBody>
+          <a:bodyPr rtlCol="0" anchor="ctr" lIns="9000" rIns="9000" tIns="4500" bIns="4500" wrap="square"/>
+          <a:lstStyle/>
+          <a:p>
+            <a:pPr algn="ctr"/>
+            <a:r>
+              <a:rPr sz="700" b="1" i="0">
+                <a:solidFill>
+                  <a:srgbClr val="FFFFFF"/>
+                </a:solidFill>
+                <a:latin typeface="Times New Roman"/>
+              </a:rPr>
+              <a:t>GROUP BY</a:t>
+            </a:r>
+          </a:p>
+        </p:txBody>
+      </p:sp>
+      <p:sp>
+        <p:nvSpPr>
+          <p:cNvPr id="34" name="Rounded Rectangle 33"/>
+          <p:cNvSpPr/>
+          <p:nvPr/>
+        </p:nvSpPr>
+        <p:spPr>
+          <a:xfrm>
+            <a:off x="7159752" y="1005840"/>
+            <a:ext cx="658368" cy="219456"/>
+          </a:xfrm>
+          <a:prstGeom prst="roundRect">
+            <a:avLst>
+              <a:gd name="adj" fmla="val 45000"/>
+            </a:avLst>
+          </a:prstGeom>
+          <a:solidFill>
+            <a:srgbClr val="5F9EA0"/>
+          </a:solidFill>
+          <a:ln w="8890">
+            <a:solidFill>
+              <a:srgbClr val="FFFFFF"/>
+            </a:solidFill>
+          </a:ln>
+          <a:effectLst/>
+        </p:spPr>
+        <p:txBody>
+          <a:bodyPr rtlCol="0" anchor="ctr" lIns="9000" rIns="9000" tIns="4500" bIns="4500" wrap="square"/>
+          <a:lstStyle/>
+          <a:p>
+            <a:pPr algn="ctr"/>
+            <a:r>
+              <a:rPr sz="700" b="1" i="0">
+                <a:solidFill>
+                  <a:srgbClr val="FFFFFF"/>
+                </a:solidFill>
+                <a:latin typeface="Times New Roman"/>
+              </a:rPr>
+              <a:t>FILTER</a:t>
+            </a:r>
+          </a:p>
+        </p:txBody>
+      </p:sp>
+      <p:sp>
+        <p:nvSpPr>
+          <p:cNvPr id="35" name="Rounded Rectangle 34"/>
+          <p:cNvSpPr/>
+          <p:nvPr/>
+        </p:nvSpPr>
+        <p:spPr>
+          <a:xfrm>
+            <a:off x="7863840" y="1005840"/>
+            <a:ext cx="530352" cy="219456"/>
+          </a:xfrm>
+          <a:prstGeom prst="roundRect">
+            <a:avLst>
+              <a:gd name="adj" fmla="val 45000"/>
+            </a:avLst>
+          </a:prstGeom>
+          <a:solidFill>
+            <a:srgbClr val="DD8452"/>
+          </a:solidFill>
+          <a:ln w="8890">
+            <a:solidFill>
+              <a:srgbClr val="FFFFFF"/>
+            </a:solidFill>
+          </a:ln>
+          <a:effectLst/>
+        </p:spPr>
+        <p:txBody>
+          <a:bodyPr rtlCol="0" anchor="ctr" lIns="9000" rIns="9000" tIns="4500" bIns="4500" wrap="square"/>
+          <a:lstStyle/>
+          <a:p>
+            <a:pPr algn="ctr"/>
+            <a:r>
+              <a:rPr sz="700" b="1" i="0">
+                <a:solidFill>
+                  <a:srgbClr val="FFFFFF"/>
+                </a:solidFill>
+                <a:latin typeface="Times New Roman"/>
+              </a:rPr>
+              <a:t>PLOT</a:t>
+            </a:r>
+          </a:p>
+        </p:txBody>
+      </p:sp>
+      <p:sp>
+        <p:nvSpPr>
+          <p:cNvPr id="36" name="TextBox 35"/>
+          <p:cNvSpPr txBox="1"/>
+          <p:nvPr/>
+        </p:nvSpPr>
+        <p:spPr>
+          <a:xfrm>
+            <a:off x="8449056" y="969264"/>
+            <a:ext cx="457200" cy="274320"/>
+          </a:xfrm>
+          <a:prstGeom prst="rect">
+            <a:avLst/>
+          </a:prstGeom>
+          <a:noFill/>
+        </p:spPr>
+        <p:txBody>
+          <a:bodyPr wrap="square" lIns="0" rIns="0" tIns="0" bIns="0">
+            <a:spAutoFit/>
+          </a:bodyPr>
+          <a:lstStyle/>
+          <a:p>
+            <a:pPr algn="ctr"/>
+            <a:r>
+              <a:rPr sz="1000" b="0" i="0">
+                <a:solidFill>
+                  <a:srgbClr val="6B6A63"/>
+                </a:solidFill>
+                <a:latin typeface="Times New Roman"/>
+              </a:rPr>
+              <a:t>…</a:t>
+            </a:r>
+          </a:p>
+        </p:txBody>
+      </p:sp>
+      <p:sp>
+        <p:nvSpPr>
+          <p:cNvPr id="37" name="TextBox 36"/>
+          <p:cNvSpPr txBox="1"/>
+          <p:nvPr/>
+        </p:nvSpPr>
+        <p:spPr>
+          <a:xfrm>
+            <a:off x="7086600" y="347472"/>
+            <a:ext cx="1828800" cy="237744"/>
+          </a:xfrm>
+          <a:prstGeom prst="rect">
+            <a:avLst/>
+          </a:prstGeom>
+          <a:noFill/>
+        </p:spPr>
+        <p:txBody>
+          <a:bodyPr wrap="square" lIns="0" rIns="0" tIns="0" bIns="0">
+            <a:spAutoFit/>
+          </a:bodyPr>
+          <a:lstStyle/>
+          <a:p>
+            <a:pPr algn="ctr"/>
+            <a:r>
+              <a:rPr sz="800" b="0" i="0">
+                <a:solidFill>
+                  <a:srgbClr val="6B6A63"/>
+                </a:solidFill>
+                <a:latin typeface="Times New Roman"/>
+              </a:rPr>
+              <a:t>named atom library</a:t>
+            </a:r>
+          </a:p>
+        </p:txBody>
+      </p:sp>
+      <p:cxnSp>
+        <p:nvCxnSpPr>
+          <p:cNvPr id="38" name="Connector 37"/>
+          <p:cNvCxnSpPr/>
+          <p:nvPr/>
+        </p:nvCxnSpPr>
+        <p:spPr>
+          <a:xfrm>
+            <a:off x="8970264" y="950976"/>
+            <a:ext cx="274320" cy="0"/>
+          </a:xfrm>
+          <a:prstGeom prst="line">
+            <a:avLst/>
+          </a:prstGeom>
+          <a:ln w="22860">
             <a:solidFill>
               <a:srgbClr val="8C8C8C"/>
             </a:solidFill>
+            <a:tailEnd type="triangle" w="med" len="med"/>
+          </a:ln>
+          <a:effectLst/>
+        </p:spPr>
+      </p:cxnSp>
+      <p:sp>
+        <p:nvSpPr>
+          <p:cNvPr id="39" name="Folded Corner 38"/>
+          <p:cNvSpPr/>
+          <p:nvPr/>
+        </p:nvSpPr>
+        <p:spPr>
+          <a:xfrm>
+            <a:off x="9272016" y="548640"/>
+            <a:ext cx="1188720" cy="841248"/>
+          </a:xfrm>
+          <a:prstGeom prst="foldedCorner">
+            <a:avLst/>
+          </a:prstGeom>
+          <a:solidFill>
+            <a:srgbClr val="DDE9F7"/>
+          </a:solidFill>
+          <a:ln w="15240">
+            <a:solidFill>
+              <a:srgbClr val="4C72B0"/>
+            </a:solidFill>
           </a:ln>
           <a:effectLst/>
         </p:spPr>
@@ -4752,14 +4437,14 @@
       </p:sp>
       <p:sp>
         <p:nvSpPr>
-          <p:cNvPr id="49" name="TextBox 48"/>
+          <p:cNvPr id="40" name="TextBox 39"/>
           <p:cNvSpPr txBox="1"/>
           <p:nvPr/>
         </p:nvSpPr>
         <p:spPr>
           <a:xfrm>
-            <a:off x="9079992" y="768096"/>
-            <a:ext cx="713232" cy="457200"/>
+            <a:off x="9290304" y="717803"/>
+            <a:ext cx="1152144" cy="548640"/>
           </a:xfrm>
           <a:prstGeom prst="rect">
             <a:avLst/>
@@ -4774,27 +4459,122 @@
           <a:p>
             <a:pPr algn="ctr"/>
             <a:r>
-              <a:rPr sz="750" b="0" i="0">
+              <a:rPr sz="750" b="1" i="0">
                 <a:solidFill>
                   <a:srgbClr val="1F1F1E"/>
                 </a:solidFill>
                 <a:latin typeface="Times New Roman"/>
               </a:rPr>
-              <a:t>"query"</a:t>
+              <a:t>TASK SPEC</a:t>
+            </a:r>
+          </a:p>
+          <a:p>
+            <a:pPr algn="ctr"/>
+            <a:r>
+              <a:rPr sz="750" b="1" i="0">
+                <a:solidFill>
+                  <a:srgbClr val="1F1F1E"/>
+                </a:solidFill>
+                <a:latin typeface="Times New Roman"/>
+              </a:rPr>
+              <a:t>atom support</a:t>
+            </a:r>
+          </a:p>
+          <a:p>
+            <a:pPr algn="ctr"/>
+            <a:r>
+              <a:rPr sz="750" b="1" i="0">
+                <a:solidFill>
+                  <a:srgbClr val="1F1F1E"/>
+                </a:solidFill>
+                <a:latin typeface="Times New Roman"/>
+              </a:rPr>
+              <a:t>+ threshold τ</a:t>
+            </a:r>
+          </a:p>
+        </p:txBody>
+      </p:sp>
+      <p:sp>
+        <p:nvSpPr>
+          <p:cNvPr id="41" name="TextBox 40"/>
+          <p:cNvSpPr txBox="1"/>
+          <p:nvPr/>
+        </p:nvSpPr>
+        <p:spPr>
+          <a:xfrm>
+            <a:off x="10515600" y="548640"/>
+            <a:ext cx="1645920" cy="822960"/>
+          </a:xfrm>
+          <a:prstGeom prst="rect">
+            <a:avLst/>
+          </a:prstGeom>
+          <a:noFill/>
+        </p:spPr>
+        <p:txBody>
+          <a:bodyPr wrap="square" lIns="0" rIns="0" tIns="0" bIns="0">
+            <a:spAutoFit/>
+          </a:bodyPr>
+          <a:lstStyle/>
+          <a:p>
+            <a:pPr algn="l"/>
+            <a:r>
+              <a:rPr sz="800" b="0" i="0">
+                <a:solidFill>
+                  <a:srgbClr val="6B6A63"/>
+                </a:solidFill>
+                <a:latin typeface="Times New Roman"/>
+              </a:rPr>
+              <a:t>the specification:</a:t>
+            </a:r>
+          </a:p>
+          <a:p>
+            <a:pPr algn="l"/>
+            <a:r>
+              <a:rPr sz="800" b="0" i="0">
+                <a:solidFill>
+                  <a:srgbClr val="6B6A63"/>
+                </a:solidFill>
+                <a:latin typeface="Times New Roman"/>
+              </a:rPr>
+              <a:t>what the task needs,</a:t>
+            </a:r>
+          </a:p>
+          <a:p>
+            <a:pPr algn="l"/>
+            <a:r>
+              <a:rPr sz="800" b="0" i="0">
+                <a:solidFill>
+                  <a:srgbClr val="6B6A63"/>
+                </a:solidFill>
+                <a:latin typeface="Times New Roman"/>
+              </a:rPr>
+              <a:t>read before any</a:t>
+            </a:r>
+          </a:p>
+          <a:p>
+            <a:pPr algn="l"/>
+            <a:r>
+              <a:rPr sz="800" b="0" i="0">
+                <a:solidFill>
+                  <a:srgbClr val="6B6A63"/>
+                </a:solidFill>
+                <a:latin typeface="Times New Roman"/>
+              </a:rPr>
+              <a:t>training</a:t>
             </a:r>
           </a:p>
         </p:txBody>
       </p:sp>
       <p:cxnSp>
         <p:nvCxnSpPr>
-          <p:cNvPr id="50" name="Connector 49"/>
+          <p:cNvPr id="42" name="Connector 41"/>
           <p:cNvCxnSpPr/>
           <p:nvPr/>
         </p:nvCxnSpPr>
         <p:spPr>
           <a:xfrm>
-            <a:off x="9848088" y="978408"/>
-            <a:ext cx="329184" cy="0"/>
+            <a:off x="9866376" y="1417320"/>
+            <a:ext cx="0" cy="1453896"/>
           </a:xfrm>
           <a:prstGeom prst="line">
             <a:avLst/>
@@ -4808,102 +4588,39 @@
           <a:effectLst/>
         </p:spPr>
       </p:cxnSp>
-      <p:sp>
-        <p:nvSpPr>
-          <p:cNvPr id="51" name="Rounded Rectangle 50"/>
-          <p:cNvSpPr/>
-          <p:nvPr/>
-        </p:nvSpPr>
-        <p:spPr>
-          <a:xfrm>
-            <a:off x="10232136" y="713232"/>
-            <a:ext cx="548640" cy="237744"/>
-          </a:xfrm>
-          <a:prstGeom prst="roundRect">
-            <a:avLst>
-              <a:gd name="adj" fmla="val 45000"/>
-            </a:avLst>
-          </a:prstGeom>
-          <a:solidFill>
-            <a:srgbClr val="4C72B0"/>
-          </a:solidFill>
-          <a:ln w="9525">
+      <p:cxnSp>
+        <p:nvCxnSpPr>
+          <p:cNvPr id="43" name="Connector 42"/>
+          <p:cNvCxnSpPr/>
+          <p:nvPr/>
+        </p:nvCxnSpPr>
+        <p:spPr>
+          <a:xfrm flipH="1">
+            <a:off x="4434840" y="1188720"/>
+            <a:ext cx="4892040" cy="1600200"/>
+          </a:xfrm>
+          <a:prstGeom prst="line">
+            <a:avLst/>
+          </a:prstGeom>
+          <a:ln w="22860">
             <a:solidFill>
-              <a:srgbClr val="FFFFFF"/>
+              <a:srgbClr val="4C72B0"/>
             </a:solidFill>
-          </a:ln>
-          <a:effectLst/>
-        </p:spPr>
-        <p:txBody>
-          <a:bodyPr rtlCol="0" anchor="ctr" lIns="9000" rIns="9000" tIns="4500" bIns="4500" wrap="square"/>
-          <a:lstStyle/>
-          <a:p>
-            <a:pPr algn="ctr"/>
-            <a:r>
-              <a:rPr sz="700" b="1" i="0">
-                <a:solidFill>
-                  <a:srgbClr val="FFFFFF"/>
-                </a:solidFill>
-                <a:latin typeface="Times New Roman"/>
-              </a:rPr>
-              <a:t>JOIN</a:t>
-            </a:r>
-          </a:p>
-        </p:txBody>
-      </p:sp>
-      <p:sp>
-        <p:nvSpPr>
-          <p:cNvPr id="52" name="Rounded Rectangle 51"/>
-          <p:cNvSpPr/>
-          <p:nvPr/>
-        </p:nvSpPr>
-        <p:spPr>
-          <a:xfrm>
-            <a:off x="10835640" y="713232"/>
-            <a:ext cx="658368" cy="237744"/>
-          </a:xfrm>
-          <a:prstGeom prst="roundRect">
-            <a:avLst>
-              <a:gd name="adj" fmla="val 45000"/>
-            </a:avLst>
-          </a:prstGeom>
-          <a:solidFill>
-            <a:srgbClr val="5F9EA0"/>
-          </a:solidFill>
-          <a:ln w="9525">
-            <a:solidFill>
-              <a:srgbClr val="FFFFFF"/>
-            </a:solidFill>
-          </a:ln>
-          <a:effectLst/>
-        </p:spPr>
-        <p:txBody>
-          <a:bodyPr rtlCol="0" anchor="ctr" lIns="9000" rIns="9000" tIns="4500" bIns="4500" wrap="square"/>
-          <a:lstStyle/>
-          <a:p>
-            <a:pPr algn="ctr"/>
-            <a:r>
-              <a:rPr sz="700" b="1" i="0">
-                <a:solidFill>
-                  <a:srgbClr val="FFFFFF"/>
-                </a:solidFill>
-                <a:latin typeface="Times New Roman"/>
-              </a:rPr>
-              <a:t>COUNT</a:t>
-            </a:r>
-          </a:p>
-        </p:txBody>
-      </p:sp>
-      <p:sp>
-        <p:nvSpPr>
-          <p:cNvPr id="53" name="TextBox 52"/>
+            <a:tailEnd type="triangle" w="med" len="med"/>
+          </a:ln>
+          <a:effectLst/>
+        </p:spPr>
+      </p:cxnSp>
+      <p:sp>
+        <p:nvSpPr>
+          <p:cNvPr id="44" name="TextBox 43"/>
           <p:cNvSpPr txBox="1"/>
           <p:nvPr/>
         </p:nvSpPr>
         <p:spPr>
           <a:xfrm>
-            <a:off x="10195560" y="1024128"/>
-            <a:ext cx="1737360" cy="274320"/>
+            <a:off x="5760720" y="2084831"/>
+            <a:ext cx="1463040" cy="237744"/>
           </a:xfrm>
           <a:prstGeom prst="rect">
             <a:avLst/>
@@ -4916,668 +4633,52 @@
           </a:bodyPr>
           <a:lstStyle/>
           <a:p>
-            <a:pPr algn="l"/>
-            <a:r>
-              <a:rPr sz="800" b="1" i="0">
+            <a:pPr algn="ctr"/>
+            <a:r>
+              <a:rPr sz="800" b="1" i="1">
                 <a:solidFill>
                   <a:srgbClr val="4C72B0"/>
                 </a:solidFill>
                 <a:latin typeface="Times New Roman"/>
               </a:rPr>
-              <a:t>one backward pass</a:t>
-            </a:r>
-          </a:p>
-        </p:txBody>
-      </p:sp>
-      <p:sp>
-        <p:nvSpPr>
-          <p:cNvPr id="54" name="TextBox 53"/>
-          <p:cNvSpPr txBox="1"/>
-          <p:nvPr/>
-        </p:nvSpPr>
-        <p:spPr>
-          <a:xfrm>
-            <a:off x="9043416" y="1481328"/>
-            <a:ext cx="2834640" cy="457200"/>
-          </a:xfrm>
-          <a:prstGeom prst="rect">
-            <a:avLst/>
-          </a:prstGeom>
-          <a:noFill/>
-        </p:spPr>
-        <p:txBody>
-          <a:bodyPr wrap="square" lIns="0" rIns="0" tIns="0" bIns="0">
-            <a:spAutoFit/>
-          </a:bodyPr>
-          <a:lstStyle/>
-          <a:p>
-            <a:pPr algn="l"/>
-            <a:r>
-              <a:rPr sz="850" b="0" i="0">
-                <a:solidFill>
-                  <a:srgbClr val="6B6A63"/>
-                </a:solidFill>
-                <a:latin typeface="Times New Roman"/>
-              </a:rPr>
-              <a:t>the gradient names the skills a query</a:t>
-            </a:r>
-          </a:p>
-          <a:p>
-            <a:pPr algn="l"/>
-            <a:r>
-              <a:rPr sz="850" b="0" i="0">
-                <a:solidFill>
-                  <a:srgbClr val="6B6A63"/>
-                </a:solidFill>
-                <a:latin typeface="Times New Roman"/>
-              </a:rPr>
-              <a:t>needs — before any training</a:t>
-            </a:r>
-          </a:p>
-        </p:txBody>
-      </p:sp>
-      <p:sp>
-        <p:nvSpPr>
-          <p:cNvPr id="55" name="Rounded Rectangle 54"/>
+              <a:t>gates the diet</a:t>
+            </a:r>
+          </a:p>
+        </p:txBody>
+      </p:sp>
+      <p:cxnSp>
+        <p:nvCxnSpPr>
+          <p:cNvPr id="45" name="Connector 44"/>
+          <p:cNvCxnSpPr/>
+          <p:nvPr/>
+        </p:nvCxnSpPr>
+        <p:spPr>
+          <a:xfrm flipV="1">
+            <a:off x="2633472" y="2944368"/>
+            <a:ext cx="365760" cy="457200"/>
+          </a:xfrm>
+          <a:prstGeom prst="line">
+            <a:avLst/>
+          </a:prstGeom>
+          <a:ln w="17780">
+            <a:solidFill>
+              <a:srgbClr val="8C8C8C"/>
+            </a:solidFill>
+            <a:tailEnd type="triangle" w="med" len="med"/>
+          </a:ln>
+          <a:effectLst/>
+        </p:spPr>
+      </p:cxnSp>
+      <p:sp>
+        <p:nvSpPr>
+          <p:cNvPr id="46" name="Rounded Rectangle 45"/>
           <p:cNvSpPr/>
           <p:nvPr/>
         </p:nvSpPr>
         <p:spPr>
           <a:xfrm>
-            <a:off x="8915400" y="2212848"/>
-            <a:ext cx="3063240" cy="2606040"/>
-          </a:xfrm>
-          <a:prstGeom prst="roundRect">
-            <a:avLst>
-              <a:gd name="adj" fmla="val 6000"/>
-            </a:avLst>
-          </a:prstGeom>
-          <a:solidFill>
-            <a:srgbClr val="F2F1EC"/>
-          </a:solidFill>
-          <a:ln>
-            <a:noFill/>
-          </a:ln>
-          <a:effectLst/>
-        </p:spPr>
-        <p:txBody>
-          <a:bodyPr rtlCol="0" anchor="ctr"/>
-          <a:lstStyle/>
-          <a:p>
-            <a:pPr algn="ctr"/>
-          </a:p>
-        </p:txBody>
-      </p:sp>
-      <p:sp>
-        <p:nvSpPr>
-          <p:cNvPr id="56" name="TextBox 55"/>
-          <p:cNvSpPr txBox="1"/>
-          <p:nvPr/>
-        </p:nvSpPr>
-        <p:spPr>
-          <a:xfrm>
-            <a:off x="9052560" y="2340864"/>
-            <a:ext cx="2788920" cy="292608"/>
-          </a:xfrm>
-          <a:prstGeom prst="rect">
-            <a:avLst/>
-          </a:prstGeom>
-          <a:noFill/>
-        </p:spPr>
-        <p:txBody>
-          <a:bodyPr wrap="square" lIns="0" rIns="0" tIns="0" bIns="0">
-            <a:spAutoFit/>
-          </a:bodyPr>
-          <a:lstStyle/>
-          <a:p>
-            <a:pPr algn="l"/>
-            <a:r>
-              <a:rPr sz="1000" b="1" i="0">
-                <a:solidFill>
-                  <a:srgbClr val="1F1F1E"/>
-                </a:solidFill>
-                <a:latin typeface="Times New Roman"/>
-              </a:rPr>
-              <a:t>Capability-matching, one representation</a:t>
-            </a:r>
-          </a:p>
-        </p:txBody>
-      </p:sp>
-      <p:sp>
-        <p:nvSpPr>
-          <p:cNvPr id="57" name="TextBox 56"/>
-          <p:cNvSpPr txBox="1"/>
-          <p:nvPr/>
-        </p:nvSpPr>
-        <p:spPr>
-          <a:xfrm>
-            <a:off x="9052560" y="2697480"/>
-            <a:ext cx="1051560" cy="365760"/>
-          </a:xfrm>
-          <a:prstGeom prst="rect">
-            <a:avLst/>
-          </a:prstGeom>
-          <a:noFill/>
-        </p:spPr>
-        <p:txBody>
-          <a:bodyPr wrap="square" lIns="0" rIns="0" tIns="0" bIns="0">
-            <a:spAutoFit/>
-          </a:bodyPr>
-          <a:lstStyle/>
-          <a:p>
-            <a:pPr algn="l"/>
-            <a:r>
-              <a:rPr sz="900" b="1" i="0">
-                <a:solidFill>
-                  <a:srgbClr val="1F1F1E"/>
-                </a:solidFill>
-                <a:latin typeface="Times New Roman"/>
-              </a:rPr>
-              <a:t>task boundary</a:t>
-            </a:r>
-          </a:p>
-        </p:txBody>
-      </p:sp>
-      <p:sp>
-        <p:nvSpPr>
-          <p:cNvPr id="58" name="TextBox 57"/>
-          <p:cNvSpPr txBox="1"/>
-          <p:nvPr/>
-        </p:nvSpPr>
-        <p:spPr>
-          <a:xfrm>
-            <a:off x="10122408" y="2697480"/>
-            <a:ext cx="228600" cy="365760"/>
-          </a:xfrm>
-          <a:prstGeom prst="rect">
-            <a:avLst/>
-          </a:prstGeom>
-          <a:noFill/>
-        </p:spPr>
-        <p:txBody>
-          <a:bodyPr wrap="square" lIns="0" rIns="0" tIns="0" bIns="0">
-            <a:spAutoFit/>
-          </a:bodyPr>
-          <a:lstStyle/>
-          <a:p>
-            <a:pPr algn="ctr"/>
-            <a:r>
-              <a:rPr sz="900" b="0" i="0">
-                <a:solidFill>
-                  <a:srgbClr val="6B6A63"/>
-                </a:solidFill>
-                <a:latin typeface="Times New Roman"/>
-              </a:rPr>
-              <a:t>→</a:t>
-            </a:r>
-          </a:p>
-        </p:txBody>
-      </p:sp>
-      <p:sp>
-        <p:nvSpPr>
-          <p:cNvPr id="59" name="TextBox 58"/>
-          <p:cNvSpPr txBox="1"/>
-          <p:nvPr/>
-        </p:nvSpPr>
-        <p:spPr>
-          <a:xfrm>
-            <a:off x="10378440" y="2697480"/>
-            <a:ext cx="1572768" cy="365760"/>
-          </a:xfrm>
-          <a:prstGeom prst="rect">
-            <a:avLst/>
-          </a:prstGeom>
-          <a:noFill/>
-        </p:spPr>
-        <p:txBody>
-          <a:bodyPr wrap="square" lIns="0" rIns="0" tIns="0" bIns="0">
-            <a:spAutoFit/>
-          </a:bodyPr>
-          <a:lstStyle/>
-          <a:p>
-            <a:pPr algn="l"/>
-            <a:r>
-              <a:rPr sz="900" b="0" i="0">
-                <a:solidFill>
-                  <a:srgbClr val="6B6A63"/>
-                </a:solidFill>
-                <a:latin typeface="Times New Roman"/>
-              </a:rPr>
-              <a:t>atom support of k queries</a:t>
-            </a:r>
-          </a:p>
-        </p:txBody>
-      </p:sp>
-      <p:sp>
-        <p:nvSpPr>
-          <p:cNvPr id="60" name="TextBox 59"/>
-          <p:cNvSpPr txBox="1"/>
-          <p:nvPr/>
-        </p:nvSpPr>
-        <p:spPr>
-          <a:xfrm>
-            <a:off x="9052560" y="3099816"/>
-            <a:ext cx="1051560" cy="365760"/>
-          </a:xfrm>
-          <a:prstGeom prst="rect">
-            <a:avLst/>
-          </a:prstGeom>
-          <a:noFill/>
-        </p:spPr>
-        <p:txBody>
-          <a:bodyPr wrap="square" lIns="0" rIns="0" tIns="0" bIns="0">
-            <a:spAutoFit/>
-          </a:bodyPr>
-          <a:lstStyle/>
-          <a:p>
-            <a:pPr algn="l"/>
-            <a:r>
-              <a:rPr sz="900" b="1" i="0">
-                <a:solidFill>
-                  <a:srgbClr val="1F1F1E"/>
-                </a:solidFill>
-                <a:latin typeface="Times New Roman"/>
-              </a:rPr>
-              <a:t>capability</a:t>
-            </a:r>
-          </a:p>
-        </p:txBody>
-      </p:sp>
-      <p:sp>
-        <p:nvSpPr>
-          <p:cNvPr id="61" name="TextBox 60"/>
-          <p:cNvSpPr txBox="1"/>
-          <p:nvPr/>
-        </p:nvSpPr>
-        <p:spPr>
-          <a:xfrm>
-            <a:off x="10122408" y="3099816"/>
-            <a:ext cx="228600" cy="365760"/>
-          </a:xfrm>
-          <a:prstGeom prst="rect">
-            <a:avLst/>
-          </a:prstGeom>
-          <a:noFill/>
-        </p:spPr>
-        <p:txBody>
-          <a:bodyPr wrap="square" lIns="0" rIns="0" tIns="0" bIns="0">
-            <a:spAutoFit/>
-          </a:bodyPr>
-          <a:lstStyle/>
-          <a:p>
-            <a:pPr algn="ctr"/>
-            <a:r>
-              <a:rPr sz="900" b="0" i="0">
-                <a:solidFill>
-                  <a:srgbClr val="6B6A63"/>
-                </a:solidFill>
-                <a:latin typeface="Times New Roman"/>
-              </a:rPr>
-              <a:t>→</a:t>
-            </a:r>
-          </a:p>
-        </p:txBody>
-      </p:sp>
-      <p:sp>
-        <p:nvSpPr>
-          <p:cNvPr id="62" name="TextBox 61"/>
-          <p:cNvSpPr txBox="1"/>
-          <p:nvPr/>
-        </p:nvSpPr>
-        <p:spPr>
-          <a:xfrm>
-            <a:off x="10378440" y="3099816"/>
-            <a:ext cx="1572768" cy="365760"/>
-          </a:xfrm>
-          <a:prstGeom prst="rect">
-            <a:avLst/>
-          </a:prstGeom>
-          <a:noFill/>
-        </p:spPr>
-        <p:txBody>
-          <a:bodyPr wrap="square" lIns="0" rIns="0" tIns="0" bIns="0">
-            <a:spAutoFit/>
-          </a:bodyPr>
-          <a:lstStyle/>
-          <a:p>
-            <a:pPr algn="l"/>
-            <a:r>
-              <a:rPr sz="900" b="0" i="0">
-                <a:solidFill>
-                  <a:srgbClr val="6B6A63"/>
-                </a:solidFill>
-                <a:latin typeface="Times New Roman"/>
-              </a:rPr>
-              <a:t>atom supply of the diet</a:t>
-            </a:r>
-          </a:p>
-        </p:txBody>
-      </p:sp>
-      <p:sp>
-        <p:nvSpPr>
-          <p:cNvPr id="63" name="TextBox 62"/>
-          <p:cNvSpPr txBox="1"/>
-          <p:nvPr/>
-        </p:nvSpPr>
-        <p:spPr>
-          <a:xfrm>
-            <a:off x="9052560" y="3502152"/>
-            <a:ext cx="1051560" cy="365760"/>
-          </a:xfrm>
-          <a:prstGeom prst="rect">
-            <a:avLst/>
-          </a:prstGeom>
-          <a:noFill/>
-        </p:spPr>
-        <p:txBody>
-          <a:bodyPr wrap="square" lIns="0" rIns="0" tIns="0" bIns="0">
-            <a:spAutoFit/>
-          </a:bodyPr>
-          <a:lstStyle/>
-          <a:p>
-            <a:pPr algn="l"/>
-            <a:r>
-              <a:rPr sz="900" b="1" i="0">
-                <a:solidFill>
-                  <a:srgbClr val="1F1F1E"/>
-                </a:solidFill>
-                <a:latin typeface="Times New Roman"/>
-              </a:rPr>
-              <a:t>selection</a:t>
-            </a:r>
-          </a:p>
-        </p:txBody>
-      </p:sp>
-      <p:sp>
-        <p:nvSpPr>
-          <p:cNvPr id="64" name="TextBox 63"/>
-          <p:cNvSpPr txBox="1"/>
-          <p:nvPr/>
-        </p:nvSpPr>
-        <p:spPr>
-          <a:xfrm>
-            <a:off x="10122408" y="3502152"/>
-            <a:ext cx="228600" cy="365760"/>
-          </a:xfrm>
-          <a:prstGeom prst="rect">
-            <a:avLst/>
-          </a:prstGeom>
-          <a:noFill/>
-        </p:spPr>
-        <p:txBody>
-          <a:bodyPr wrap="square" lIns="0" rIns="0" tIns="0" bIns="0">
-            <a:spAutoFit/>
-          </a:bodyPr>
-          <a:lstStyle/>
-          <a:p>
-            <a:pPr algn="ctr"/>
-            <a:r>
-              <a:rPr sz="900" b="0" i="0">
-                <a:solidFill>
-                  <a:srgbClr val="6B6A63"/>
-                </a:solidFill>
-                <a:latin typeface="Times New Roman"/>
-              </a:rPr>
-              <a:t>→</a:t>
-            </a:r>
-          </a:p>
-        </p:txBody>
-      </p:sp>
-      <p:sp>
-        <p:nvSpPr>
-          <p:cNvPr id="65" name="TextBox 64"/>
-          <p:cNvSpPr txBox="1"/>
-          <p:nvPr/>
-        </p:nvSpPr>
-        <p:spPr>
-          <a:xfrm>
-            <a:off x="10378440" y="3502152"/>
-            <a:ext cx="1572768" cy="365760"/>
-          </a:xfrm>
-          <a:prstGeom prst="rect">
-            <a:avLst/>
-          </a:prstGeom>
-          <a:noFill/>
-        </p:spPr>
-        <p:txBody>
-          <a:bodyPr wrap="square" lIns="0" rIns="0" tIns="0" bIns="0">
-            <a:spAutoFit/>
-          </a:bodyPr>
-          <a:lstStyle/>
-          <a:p>
-            <a:pPr algn="l"/>
-            <a:r>
-              <a:rPr sz="900" b="0" i="0">
-                <a:solidFill>
-                  <a:srgbClr val="6B6A63"/>
-                </a:solidFill>
-                <a:latin typeface="Times New Roman"/>
-              </a:rPr>
-              <a:t>budgeted coverage, λ</a:t>
-            </a:r>
-          </a:p>
-        </p:txBody>
-      </p:sp>
-      <p:sp>
-        <p:nvSpPr>
-          <p:cNvPr id="66" name="TextBox 65"/>
-          <p:cNvSpPr txBox="1"/>
-          <p:nvPr/>
-        </p:nvSpPr>
-        <p:spPr>
-          <a:xfrm>
-            <a:off x="9052560" y="3904488"/>
-            <a:ext cx="1051560" cy="365760"/>
-          </a:xfrm>
-          <a:prstGeom prst="rect">
-            <a:avLst/>
-          </a:prstGeom>
-          <a:noFill/>
-        </p:spPr>
-        <p:txBody>
-          <a:bodyPr wrap="square" lIns="0" rIns="0" tIns="0" bIns="0">
-            <a:spAutoFit/>
-          </a:bodyPr>
-          <a:lstStyle/>
-          <a:p>
-            <a:pPr algn="l"/>
-            <a:r>
-              <a:rPr sz="900" b="1" i="0">
-                <a:solidFill>
-                  <a:srgbClr val="1F1F1E"/>
-                </a:solidFill>
-                <a:latin typeface="Times New Roman"/>
-              </a:rPr>
-              <a:t>stopping</a:t>
-            </a:r>
-          </a:p>
-        </p:txBody>
-      </p:sp>
-      <p:sp>
-        <p:nvSpPr>
-          <p:cNvPr id="67" name="TextBox 66"/>
-          <p:cNvSpPr txBox="1"/>
-          <p:nvPr/>
-        </p:nvSpPr>
-        <p:spPr>
-          <a:xfrm>
-            <a:off x="10122408" y="3904488"/>
-            <a:ext cx="228600" cy="365760"/>
-          </a:xfrm>
-          <a:prstGeom prst="rect">
-            <a:avLst/>
-          </a:prstGeom>
-          <a:noFill/>
-        </p:spPr>
-        <p:txBody>
-          <a:bodyPr wrap="square" lIns="0" rIns="0" tIns="0" bIns="0">
-            <a:spAutoFit/>
-          </a:bodyPr>
-          <a:lstStyle/>
-          <a:p>
-            <a:pPr algn="ctr"/>
-            <a:r>
-              <a:rPr sz="900" b="0" i="0">
-                <a:solidFill>
-                  <a:srgbClr val="6B6A63"/>
-                </a:solidFill>
-                <a:latin typeface="Times New Roman"/>
-              </a:rPr>
-              <a:t>→</a:t>
-            </a:r>
-          </a:p>
-        </p:txBody>
-      </p:sp>
-      <p:sp>
-        <p:nvSpPr>
-          <p:cNvPr id="68" name="TextBox 67"/>
-          <p:cNvSpPr txBox="1"/>
-          <p:nvPr/>
-        </p:nvSpPr>
-        <p:spPr>
-          <a:xfrm>
-            <a:off x="10378440" y="3904488"/>
-            <a:ext cx="1572768" cy="365760"/>
-          </a:xfrm>
-          <a:prstGeom prst="rect">
-            <a:avLst/>
-          </a:prstGeom>
-          <a:noFill/>
-        </p:spPr>
-        <p:txBody>
-          <a:bodyPr wrap="square" lIns="0" rIns="0" tIns="0" bIns="0">
-            <a:spAutoFit/>
-          </a:bodyPr>
-          <a:lstStyle/>
-          <a:p>
-            <a:pPr algn="l"/>
-            <a:r>
-              <a:rPr sz="900" b="0" i="0">
-                <a:solidFill>
-                  <a:srgbClr val="6B6A63"/>
-                </a:solidFill>
-                <a:latin typeface="Times New Roman"/>
-              </a:rPr>
-              <a:t>demand absorbed</a:t>
-            </a:r>
-          </a:p>
-        </p:txBody>
-      </p:sp>
-      <p:sp>
-        <p:nvSpPr>
-          <p:cNvPr id="69" name="TextBox 68"/>
-          <p:cNvSpPr txBox="1"/>
-          <p:nvPr/>
-        </p:nvSpPr>
-        <p:spPr>
-          <a:xfrm>
-            <a:off x="9052560" y="4306824"/>
-            <a:ext cx="1051560" cy="365760"/>
-          </a:xfrm>
-          <a:prstGeom prst="rect">
-            <a:avLst/>
-          </a:prstGeom>
-          <a:noFill/>
-        </p:spPr>
-        <p:txBody>
-          <a:bodyPr wrap="square" lIns="0" rIns="0" tIns="0" bIns="0">
-            <a:spAutoFit/>
-          </a:bodyPr>
-          <a:lstStyle/>
-          <a:p>
-            <a:pPr algn="l"/>
-            <a:r>
-              <a:rPr sz="900" b="1" i="0">
-                <a:solidFill>
-                  <a:srgbClr val="1F1F1E"/>
-                </a:solidFill>
-                <a:latin typeface="Times New Roman"/>
-              </a:rPr>
-              <a:t>guarantee</a:t>
-            </a:r>
-          </a:p>
-        </p:txBody>
-      </p:sp>
-      <p:sp>
-        <p:nvSpPr>
-          <p:cNvPr id="70" name="TextBox 69"/>
-          <p:cNvSpPr txBox="1"/>
-          <p:nvPr/>
-        </p:nvSpPr>
-        <p:spPr>
-          <a:xfrm>
-            <a:off x="10122408" y="4306824"/>
-            <a:ext cx="228600" cy="365760"/>
-          </a:xfrm>
-          <a:prstGeom prst="rect">
-            <a:avLst/>
-          </a:prstGeom>
-          <a:noFill/>
-        </p:spPr>
-        <p:txBody>
-          <a:bodyPr wrap="square" lIns="0" rIns="0" tIns="0" bIns="0">
-            <a:spAutoFit/>
-          </a:bodyPr>
-          <a:lstStyle/>
-          <a:p>
-            <a:pPr algn="ctr"/>
-            <a:r>
-              <a:rPr sz="900" b="0" i="0">
-                <a:solidFill>
-                  <a:srgbClr val="6B6A63"/>
-                </a:solidFill>
-                <a:latin typeface="Times New Roman"/>
-              </a:rPr>
-              <a:t>→</a:t>
-            </a:r>
-          </a:p>
-        </p:txBody>
-      </p:sp>
-      <p:sp>
-        <p:nvSpPr>
-          <p:cNvPr id="71" name="TextBox 70"/>
-          <p:cNvSpPr txBox="1"/>
-          <p:nvPr/>
-        </p:nvSpPr>
-        <p:spPr>
-          <a:xfrm>
-            <a:off x="10378440" y="4306824"/>
-            <a:ext cx="1572768" cy="365760"/>
-          </a:xfrm>
-          <a:prstGeom prst="rect">
-            <a:avLst/>
-          </a:prstGeom>
-          <a:noFill/>
-        </p:spPr>
-        <p:txBody>
-          <a:bodyPr wrap="square" lIns="0" rIns="0" tIns="0" bIns="0">
-            <a:spAutoFit/>
-          </a:bodyPr>
-          <a:lstStyle/>
-          <a:p>
-            <a:pPr algn="l"/>
-            <a:r>
-              <a:rPr sz="900" b="0" i="0">
-                <a:solidFill>
-                  <a:srgbClr val="6B6A63"/>
-                </a:solidFill>
-                <a:latin typeface="Times New Roman"/>
-              </a:rPr>
-              <a:t>conformal + binomial</a:t>
-            </a:r>
-          </a:p>
-        </p:txBody>
-      </p:sp>
-      <p:sp>
-        <p:nvSpPr>
-          <p:cNvPr id="72" name="Rounded Rectangle 71"/>
-          <p:cNvSpPr/>
-          <p:nvPr/>
-        </p:nvSpPr>
-        <p:spPr>
-          <a:xfrm>
-            <a:off x="8961120" y="5074920"/>
-            <a:ext cx="685800" cy="777240"/>
+            <a:off x="3035808" y="2724912"/>
+            <a:ext cx="1371600" cy="475488"/>
           </a:xfrm>
           <a:prstGeom prst="roundRect">
             <a:avLst>
@@ -5585,53 +4686,1169 @@
             </a:avLst>
           </a:prstGeom>
           <a:solidFill>
-            <a:srgbClr val="EEF2F9"/>
+            <a:srgbClr val="E6DCEF"/>
+          </a:solidFill>
+          <a:ln w="16510">
+            <a:solidFill>
+              <a:srgbClr val="8E6BAE"/>
+            </a:solidFill>
+          </a:ln>
+          <a:effectLst/>
+        </p:spPr>
+        <p:txBody>
+          <a:bodyPr rtlCol="0" anchor="ctr"/>
+          <a:lstStyle/>
+          <a:p>
+            <a:pPr algn="ctr"/>
+          </a:p>
+        </p:txBody>
+      </p:sp>
+      <p:sp>
+        <p:nvSpPr>
+          <p:cNvPr id="47" name="TextBox 46"/>
+          <p:cNvSpPr txBox="1"/>
+          <p:nvPr/>
+        </p:nvSpPr>
+        <p:spPr>
+          <a:xfrm>
+            <a:off x="3063239" y="2770632"/>
+            <a:ext cx="1316736" cy="261518"/>
+          </a:xfrm>
+          <a:prstGeom prst="rect">
+            <a:avLst/>
+          </a:prstGeom>
+          <a:noFill/>
+        </p:spPr>
+        <p:txBody>
+          <a:bodyPr wrap="square" lIns="0" rIns="0" tIns="0" bIns="0">
+            <a:spAutoFit/>
+          </a:bodyPr>
+          <a:lstStyle/>
+          <a:p>
+            <a:pPr algn="ctr"/>
+            <a:r>
+              <a:rPr sz="750" b="1" i="0">
+                <a:solidFill>
+                  <a:srgbClr val="1F1F1E"/>
+                </a:solidFill>
+                <a:latin typeface="Times New Roman"/>
+              </a:rPr>
+              <a:t>score trace</a:t>
+            </a:r>
+          </a:p>
+        </p:txBody>
+      </p:sp>
+      <p:sp>
+        <p:nvSpPr>
+          <p:cNvPr id="48" name="Rounded Rectangle 47"/>
+          <p:cNvSpPr/>
+          <p:nvPr/>
+        </p:nvSpPr>
+        <p:spPr>
+          <a:xfrm>
+            <a:off x="3099815" y="2980944"/>
+            <a:ext cx="1243584" cy="164592"/>
+          </a:xfrm>
+          <a:prstGeom prst="roundRect">
+            <a:avLst>
+              <a:gd name="adj" fmla="val 30000"/>
+            </a:avLst>
+          </a:prstGeom>
+          <a:solidFill>
+            <a:srgbClr val="FFFFFF"/>
+          </a:solidFill>
+          <a:ln w="9525">
+            <a:solidFill>
+              <a:srgbClr val="8E6BAE"/>
+            </a:solidFill>
+          </a:ln>
+          <a:effectLst/>
+        </p:spPr>
+        <p:txBody>
+          <a:bodyPr rtlCol="0" anchor="ctr" lIns="9000" rIns="9000" tIns="4500" bIns="4500" wrap="square"/>
+          <a:lstStyle/>
+          <a:p>
+            <a:pPr algn="ctr"/>
+            <a:r>
+              <a:rPr sz="650" b="0" i="0">
+                <a:solidFill>
+                  <a:srgbClr val="6B6A63"/>
+                </a:solidFill>
+                <a:latin typeface="Times New Roman"/>
+              </a:rPr>
+              <a:t>in-spec − λ·out</a:t>
+            </a:r>
+          </a:p>
+        </p:txBody>
+      </p:sp>
+      <p:cxnSp>
+        <p:nvCxnSpPr>
+          <p:cNvPr id="49" name="Connector 48"/>
+          <p:cNvCxnSpPr/>
+          <p:nvPr/>
+        </p:nvCxnSpPr>
+        <p:spPr>
+          <a:xfrm>
+            <a:off x="2633472" y="3401568"/>
+            <a:ext cx="365760" cy="109728"/>
+          </a:xfrm>
+          <a:prstGeom prst="line">
+            <a:avLst/>
+          </a:prstGeom>
+          <a:ln w="17780">
+            <a:solidFill>
+              <a:srgbClr val="8C8C8C"/>
+            </a:solidFill>
+            <a:tailEnd type="triangle" w="med" len="med"/>
+          </a:ln>
+          <a:effectLst/>
+        </p:spPr>
+      </p:cxnSp>
+      <p:sp>
+        <p:nvSpPr>
+          <p:cNvPr id="50" name="Rounded Rectangle 49"/>
+          <p:cNvSpPr/>
+          <p:nvPr/>
+        </p:nvSpPr>
+        <p:spPr>
+          <a:xfrm>
+            <a:off x="3035808" y="3291840"/>
+            <a:ext cx="1371600" cy="475488"/>
+          </a:xfrm>
+          <a:prstGeom prst="roundRect">
+            <a:avLst>
+              <a:gd name="adj" fmla="val 12000"/>
+            </a:avLst>
+          </a:prstGeom>
+          <a:solidFill>
+            <a:srgbClr val="E6DCEF"/>
+          </a:solidFill>
+          <a:ln w="16510">
+            <a:solidFill>
+              <a:srgbClr val="8E6BAE"/>
+            </a:solidFill>
+          </a:ln>
+          <a:effectLst/>
+        </p:spPr>
+        <p:txBody>
+          <a:bodyPr rtlCol="0" anchor="ctr"/>
+          <a:lstStyle/>
+          <a:p>
+            <a:pPr algn="ctr"/>
+          </a:p>
+        </p:txBody>
+      </p:sp>
+      <p:sp>
+        <p:nvSpPr>
+          <p:cNvPr id="51" name="TextBox 50"/>
+          <p:cNvSpPr txBox="1"/>
+          <p:nvPr/>
+        </p:nvSpPr>
+        <p:spPr>
+          <a:xfrm>
+            <a:off x="3063239" y="3337560"/>
+            <a:ext cx="1316736" cy="261518"/>
+          </a:xfrm>
+          <a:prstGeom prst="rect">
+            <a:avLst/>
+          </a:prstGeom>
+          <a:noFill/>
+        </p:spPr>
+        <p:txBody>
+          <a:bodyPr wrap="square" lIns="0" rIns="0" tIns="0" bIns="0">
+            <a:spAutoFit/>
+          </a:bodyPr>
+          <a:lstStyle/>
+          <a:p>
+            <a:pPr algn="ctr"/>
+            <a:r>
+              <a:rPr sz="750" b="1" i="0">
+                <a:solidFill>
+                  <a:srgbClr val="1F1F1E"/>
+                </a:solidFill>
+                <a:latin typeface="Times New Roman"/>
+              </a:rPr>
+              <a:t>score trace</a:t>
+            </a:r>
+          </a:p>
+        </p:txBody>
+      </p:sp>
+      <p:sp>
+        <p:nvSpPr>
+          <p:cNvPr id="52" name="Rounded Rectangle 51"/>
+          <p:cNvSpPr/>
+          <p:nvPr/>
+        </p:nvSpPr>
+        <p:spPr>
+          <a:xfrm>
+            <a:off x="3099815" y="3547872"/>
+            <a:ext cx="1243584" cy="164592"/>
+          </a:xfrm>
+          <a:prstGeom prst="roundRect">
+            <a:avLst>
+              <a:gd name="adj" fmla="val 30000"/>
+            </a:avLst>
+          </a:prstGeom>
+          <a:solidFill>
+            <a:srgbClr val="FFFFFF"/>
+          </a:solidFill>
+          <a:ln w="9525">
+            <a:solidFill>
+              <a:srgbClr val="8E6BAE"/>
+            </a:solidFill>
+          </a:ln>
+          <a:effectLst/>
+        </p:spPr>
+        <p:txBody>
+          <a:bodyPr rtlCol="0" anchor="ctr" lIns="9000" rIns="9000" tIns="4500" bIns="4500" wrap="square"/>
+          <a:lstStyle/>
+          <a:p>
+            <a:pPr algn="ctr"/>
+            <a:r>
+              <a:rPr sz="650" b="0" i="0">
+                <a:solidFill>
+                  <a:srgbClr val="6B6A63"/>
+                </a:solidFill>
+                <a:latin typeface="Times New Roman"/>
+              </a:rPr>
+              <a:t>in-spec − λ·out</a:t>
+            </a:r>
+          </a:p>
+        </p:txBody>
+      </p:sp>
+      <p:cxnSp>
+        <p:nvCxnSpPr>
+          <p:cNvPr id="53" name="Connector 52"/>
+          <p:cNvCxnSpPr/>
+          <p:nvPr/>
+        </p:nvCxnSpPr>
+        <p:spPr>
+          <a:xfrm>
+            <a:off x="2633472" y="3401568"/>
+            <a:ext cx="365760" cy="676656"/>
+          </a:xfrm>
+          <a:prstGeom prst="line">
+            <a:avLst/>
+          </a:prstGeom>
+          <a:ln w="17780">
+            <a:solidFill>
+              <a:srgbClr val="8C8C8C"/>
+            </a:solidFill>
+            <a:tailEnd type="triangle" w="med" len="med"/>
+          </a:ln>
+          <a:effectLst/>
+        </p:spPr>
+      </p:cxnSp>
+      <p:sp>
+        <p:nvSpPr>
+          <p:cNvPr id="54" name="Rounded Rectangle 53"/>
+          <p:cNvSpPr/>
+          <p:nvPr/>
+        </p:nvSpPr>
+        <p:spPr>
+          <a:xfrm>
+            <a:off x="3035808" y="3858768"/>
+            <a:ext cx="1371600" cy="475488"/>
+          </a:xfrm>
+          <a:prstGeom prst="roundRect">
+            <a:avLst>
+              <a:gd name="adj" fmla="val 12000"/>
+            </a:avLst>
+          </a:prstGeom>
+          <a:solidFill>
+            <a:srgbClr val="E6DCEF"/>
+          </a:solidFill>
+          <a:ln w="16510">
+            <a:solidFill>
+              <a:srgbClr val="8E6BAE"/>
+            </a:solidFill>
+          </a:ln>
+          <a:effectLst/>
+        </p:spPr>
+        <p:txBody>
+          <a:bodyPr rtlCol="0" anchor="ctr"/>
+          <a:lstStyle/>
+          <a:p>
+            <a:pPr algn="ctr"/>
+          </a:p>
+        </p:txBody>
+      </p:sp>
+      <p:sp>
+        <p:nvSpPr>
+          <p:cNvPr id="55" name="TextBox 54"/>
+          <p:cNvSpPr txBox="1"/>
+          <p:nvPr/>
+        </p:nvSpPr>
+        <p:spPr>
+          <a:xfrm>
+            <a:off x="3063239" y="3904487"/>
+            <a:ext cx="1316736" cy="261518"/>
+          </a:xfrm>
+          <a:prstGeom prst="rect">
+            <a:avLst/>
+          </a:prstGeom>
+          <a:noFill/>
+        </p:spPr>
+        <p:txBody>
+          <a:bodyPr wrap="square" lIns="0" rIns="0" tIns="0" bIns="0">
+            <a:spAutoFit/>
+          </a:bodyPr>
+          <a:lstStyle/>
+          <a:p>
+            <a:pPr algn="ctr"/>
+            <a:r>
+              <a:rPr sz="750" b="1" i="0">
+                <a:solidFill>
+                  <a:srgbClr val="1F1F1E"/>
+                </a:solidFill>
+                <a:latin typeface="Times New Roman"/>
+              </a:rPr>
+              <a:t>score trace</a:t>
+            </a:r>
+          </a:p>
+        </p:txBody>
+      </p:sp>
+      <p:sp>
+        <p:nvSpPr>
+          <p:cNvPr id="56" name="Rounded Rectangle 55"/>
+          <p:cNvSpPr/>
+          <p:nvPr/>
+        </p:nvSpPr>
+        <p:spPr>
+          <a:xfrm>
+            <a:off x="3099815" y="4114800"/>
+            <a:ext cx="1243584" cy="164592"/>
+          </a:xfrm>
+          <a:prstGeom prst="roundRect">
+            <a:avLst>
+              <a:gd name="adj" fmla="val 30000"/>
+            </a:avLst>
+          </a:prstGeom>
+          <a:solidFill>
+            <a:srgbClr val="FFFFFF"/>
+          </a:solidFill>
+          <a:ln w="9525">
+            <a:solidFill>
+              <a:srgbClr val="8E6BAE"/>
+            </a:solidFill>
+          </a:ln>
+          <a:effectLst/>
+        </p:spPr>
+        <p:txBody>
+          <a:bodyPr rtlCol="0" anchor="ctr" lIns="9000" rIns="9000" tIns="4500" bIns="4500" wrap="square"/>
+          <a:lstStyle/>
+          <a:p>
+            <a:pPr algn="ctr"/>
+            <a:r>
+              <a:rPr sz="650" b="0" i="0">
+                <a:solidFill>
+                  <a:srgbClr val="6B6A63"/>
+                </a:solidFill>
+                <a:latin typeface="Times New Roman"/>
+              </a:rPr>
+              <a:t>in-spec − λ·out</a:t>
+            </a:r>
+          </a:p>
+        </p:txBody>
+      </p:sp>
+      <p:sp>
+        <p:nvSpPr>
+          <p:cNvPr id="57" name="TextBox 56"/>
+          <p:cNvSpPr txBox="1"/>
+          <p:nvPr/>
+        </p:nvSpPr>
+        <p:spPr>
+          <a:xfrm>
+            <a:off x="3611880" y="4443984"/>
+            <a:ext cx="457200" cy="274320"/>
+          </a:xfrm>
+          <a:prstGeom prst="rect">
+            <a:avLst/>
+          </a:prstGeom>
+          <a:noFill/>
+        </p:spPr>
+        <p:txBody>
+          <a:bodyPr wrap="square" lIns="0" rIns="0" tIns="0" bIns="0">
+            <a:spAutoFit/>
+          </a:bodyPr>
+          <a:lstStyle/>
+          <a:p>
+            <a:pPr algn="ctr"/>
+            <a:r>
+              <a:rPr sz="1200" b="0" i="0">
+                <a:solidFill>
+                  <a:srgbClr val="6B6A63"/>
+                </a:solidFill>
+                <a:latin typeface="Times New Roman"/>
+              </a:rPr>
+              <a:t>⋮</a:t>
+            </a:r>
+          </a:p>
+        </p:txBody>
+      </p:sp>
+      <p:cxnSp>
+        <p:nvCxnSpPr>
+          <p:cNvPr id="58" name="Connector 57"/>
+          <p:cNvCxnSpPr/>
+          <p:nvPr/>
+        </p:nvCxnSpPr>
+        <p:spPr>
+          <a:xfrm>
+            <a:off x="4425696" y="2962656"/>
+            <a:ext cx="347472" cy="283464"/>
+          </a:xfrm>
+          <a:prstGeom prst="line">
+            <a:avLst/>
+          </a:prstGeom>
+          <a:ln w="17780">
+            <a:solidFill>
+              <a:srgbClr val="8C8C8C"/>
+            </a:solidFill>
+            <a:tailEnd type="triangle" w="med" len="med"/>
+          </a:ln>
+          <a:effectLst/>
+        </p:spPr>
+      </p:cxnSp>
+      <p:cxnSp>
+        <p:nvCxnSpPr>
+          <p:cNvPr id="59" name="Connector 58"/>
+          <p:cNvCxnSpPr/>
+          <p:nvPr/>
+        </p:nvCxnSpPr>
+        <p:spPr>
+          <a:xfrm flipV="1">
+            <a:off x="4425696" y="3246120"/>
+            <a:ext cx="347472" cy="283464"/>
+          </a:xfrm>
+          <a:prstGeom prst="line">
+            <a:avLst/>
+          </a:prstGeom>
+          <a:ln w="17780">
+            <a:solidFill>
+              <a:srgbClr val="8C8C8C"/>
+            </a:solidFill>
+            <a:tailEnd type="triangle" w="med" len="med"/>
+          </a:ln>
+          <a:effectLst/>
+        </p:spPr>
+      </p:cxnSp>
+      <p:cxnSp>
+        <p:nvCxnSpPr>
+          <p:cNvPr id="60" name="Connector 59"/>
+          <p:cNvCxnSpPr/>
+          <p:nvPr/>
+        </p:nvCxnSpPr>
+        <p:spPr>
+          <a:xfrm flipV="1">
+            <a:off x="4425696" y="3246120"/>
+            <a:ext cx="347472" cy="850391"/>
+          </a:xfrm>
+          <a:prstGeom prst="line">
+            <a:avLst/>
+          </a:prstGeom>
+          <a:ln w="17780">
+            <a:solidFill>
+              <a:srgbClr val="8C8C8C"/>
+            </a:solidFill>
+            <a:tailEnd type="triangle" w="med" len="med"/>
+          </a:ln>
+          <a:effectLst/>
+        </p:spPr>
+      </p:cxnSp>
+      <p:sp>
+        <p:nvSpPr>
+          <p:cNvPr id="61" name="Rounded Rectangle 60"/>
+          <p:cNvSpPr/>
+          <p:nvPr/>
+        </p:nvSpPr>
+        <p:spPr>
+          <a:xfrm>
+            <a:off x="4809744" y="3017520"/>
+            <a:ext cx="1298448" cy="713232"/>
+          </a:xfrm>
+          <a:prstGeom prst="roundRect">
+            <a:avLst>
+              <a:gd name="adj" fmla="val 12000"/>
+            </a:avLst>
+          </a:prstGeom>
+          <a:solidFill>
+            <a:srgbClr val="E6DCEF"/>
+          </a:solidFill>
+          <a:ln w="16510">
+            <a:solidFill>
+              <a:srgbClr val="8E6BAE"/>
+            </a:solidFill>
+          </a:ln>
+          <a:effectLst/>
+        </p:spPr>
+        <p:txBody>
+          <a:bodyPr rtlCol="0" anchor="ctr"/>
+          <a:lstStyle/>
+          <a:p>
+            <a:pPr algn="ctr"/>
+          </a:p>
+        </p:txBody>
+      </p:sp>
+      <p:sp>
+        <p:nvSpPr>
+          <p:cNvPr id="62" name="TextBox 61"/>
+          <p:cNvSpPr txBox="1"/>
+          <p:nvPr/>
+        </p:nvSpPr>
+        <p:spPr>
+          <a:xfrm>
+            <a:off x="4837176" y="3063239"/>
+            <a:ext cx="1243584" cy="392277"/>
+          </a:xfrm>
+          <a:prstGeom prst="rect">
+            <a:avLst/>
+          </a:prstGeom>
+          <a:noFill/>
+        </p:spPr>
+        <p:txBody>
+          <a:bodyPr wrap="square" lIns="0" rIns="0" tIns="0" bIns="0">
+            <a:spAutoFit/>
+          </a:bodyPr>
+          <a:lstStyle/>
+          <a:p>
+            <a:pPr algn="ctr"/>
+            <a:r>
+              <a:rPr sz="800" b="1" i="0">
+                <a:solidFill>
+                  <a:srgbClr val="1F1F1E"/>
+                </a:solidFill>
+                <a:latin typeface="Times New Roman"/>
+              </a:rPr>
+              <a:t>rank · fill</a:t>
+            </a:r>
+          </a:p>
+          <a:p>
+            <a:pPr algn="ctr"/>
+            <a:r>
+              <a:rPr sz="800" b="1" i="0">
+                <a:solidFill>
+                  <a:srgbClr val="1F1F1E"/>
+                </a:solidFill>
+                <a:latin typeface="Times New Roman"/>
+              </a:rPr>
+              <a:t>token budget</a:t>
+            </a:r>
+          </a:p>
+        </p:txBody>
+      </p:sp>
+      <p:sp>
+        <p:nvSpPr>
+          <p:cNvPr id="63" name="Rounded Rectangle 62"/>
+          <p:cNvSpPr/>
+          <p:nvPr/>
+        </p:nvSpPr>
+        <p:spPr>
+          <a:xfrm>
+            <a:off x="4873752" y="3511296"/>
+            <a:ext cx="1170431" cy="164592"/>
+          </a:xfrm>
+          <a:prstGeom prst="roundRect">
+            <a:avLst>
+              <a:gd name="adj" fmla="val 30000"/>
+            </a:avLst>
+          </a:prstGeom>
+          <a:solidFill>
+            <a:srgbClr val="FFFFFF"/>
+          </a:solidFill>
+          <a:ln w="9525">
+            <a:solidFill>
+              <a:srgbClr val="8E6BAE"/>
+            </a:solidFill>
+          </a:ln>
+          <a:effectLst/>
+        </p:spPr>
+        <p:txBody>
+          <a:bodyPr rtlCol="0" anchor="ctr" lIns="9000" rIns="9000" tIns="4500" bIns="4500" wrap="square"/>
+          <a:lstStyle/>
+          <a:p>
+            <a:pPr algn="ctr"/>
+            <a:r>
+              <a:rPr sz="650" b="0" i="0">
+                <a:solidFill>
+                  <a:srgbClr val="6B6A63"/>
+                </a:solidFill>
+                <a:latin typeface="Times New Roman"/>
+              </a:rPr>
+              <a:t>greedy prefix</a:t>
+            </a:r>
+          </a:p>
+        </p:txBody>
+      </p:sp>
+      <p:cxnSp>
+        <p:nvCxnSpPr>
+          <p:cNvPr id="64" name="Connector 63"/>
+          <p:cNvCxnSpPr/>
+          <p:nvPr/>
+        </p:nvCxnSpPr>
+        <p:spPr>
+          <a:xfrm>
+            <a:off x="6126480" y="3364992"/>
+            <a:ext cx="274320" cy="0"/>
+          </a:xfrm>
+          <a:prstGeom prst="line">
+            <a:avLst/>
+          </a:prstGeom>
+          <a:ln w="22860">
+            <a:solidFill>
+              <a:srgbClr val="8C8C8C"/>
+            </a:solidFill>
+            <a:tailEnd type="triangle" w="med" len="med"/>
+          </a:ln>
+          <a:effectLst/>
+        </p:spPr>
+      </p:cxnSp>
+      <p:sp>
+        <p:nvSpPr>
+          <p:cNvPr id="65" name="Rounded Rectangle 64"/>
+          <p:cNvSpPr/>
+          <p:nvPr/>
+        </p:nvSpPr>
+        <p:spPr>
+          <a:xfrm>
+            <a:off x="6428232" y="3017520"/>
+            <a:ext cx="1335024" cy="713232"/>
+          </a:xfrm>
+          <a:prstGeom prst="roundRect">
+            <a:avLst>
+              <a:gd name="adj" fmla="val 12000"/>
+            </a:avLst>
+          </a:prstGeom>
+          <a:solidFill>
+            <a:srgbClr val="E6DCEF"/>
+          </a:solidFill>
+          <a:ln w="16510">
+            <a:solidFill>
+              <a:srgbClr val="8E6BAE"/>
+            </a:solidFill>
+          </a:ln>
+          <a:effectLst/>
+        </p:spPr>
+        <p:txBody>
+          <a:bodyPr rtlCol="0" anchor="ctr"/>
+          <a:lstStyle/>
+          <a:p>
+            <a:pPr algn="ctr"/>
+          </a:p>
+        </p:txBody>
+      </p:sp>
+      <p:sp>
+        <p:nvSpPr>
+          <p:cNvPr id="66" name="TextBox 65"/>
+          <p:cNvSpPr txBox="1"/>
+          <p:nvPr/>
+        </p:nvSpPr>
+        <p:spPr>
+          <a:xfrm>
+            <a:off x="6455664" y="3063239"/>
+            <a:ext cx="1280160" cy="392277"/>
+          </a:xfrm>
+          <a:prstGeom prst="rect">
+            <a:avLst/>
+          </a:prstGeom>
+          <a:noFill/>
+        </p:spPr>
+        <p:txBody>
+          <a:bodyPr wrap="square" lIns="0" rIns="0" tIns="0" bIns="0">
+            <a:spAutoFit/>
+          </a:bodyPr>
+          <a:lstStyle/>
+          <a:p>
+            <a:pPr algn="ctr"/>
+            <a:r>
+              <a:rPr sz="850" b="1" i="0">
+                <a:solidFill>
+                  <a:srgbClr val="1F1F1E"/>
+                </a:solidFill>
+                <a:latin typeface="Times New Roman"/>
+              </a:rPr>
+              <a:t>SFT student</a:t>
+            </a:r>
+          </a:p>
+        </p:txBody>
+      </p:sp>
+      <p:sp>
+        <p:nvSpPr>
+          <p:cNvPr id="67" name="Rounded Rectangle 66"/>
+          <p:cNvSpPr/>
+          <p:nvPr/>
+        </p:nvSpPr>
+        <p:spPr>
+          <a:xfrm>
+            <a:off x="6492240" y="3511296"/>
+            <a:ext cx="1207007" cy="164592"/>
+          </a:xfrm>
+          <a:prstGeom prst="roundRect">
+            <a:avLst>
+              <a:gd name="adj" fmla="val 30000"/>
+            </a:avLst>
+          </a:prstGeom>
+          <a:solidFill>
+            <a:srgbClr val="FFFFFF"/>
+          </a:solidFill>
+          <a:ln w="9525">
+            <a:solidFill>
+              <a:srgbClr val="8E6BAE"/>
+            </a:solidFill>
+          </a:ln>
+          <a:effectLst/>
+        </p:spPr>
+        <p:txBody>
+          <a:bodyPr rtlCol="0" anchor="ctr" lIns="9000" rIns="9000" tIns="4500" bIns="4500" wrap="square"/>
+          <a:lstStyle/>
+          <a:p>
+            <a:pPr algn="ctr"/>
+            <a:r>
+              <a:rPr sz="650" b="0" i="0">
+                <a:solidFill>
+                  <a:srgbClr val="6B6A63"/>
+                </a:solidFill>
+                <a:latin typeface="Times New Roman"/>
+              </a:rPr>
+              <a:t>stop when absorbed</a:t>
+            </a:r>
+          </a:p>
+        </p:txBody>
+      </p:sp>
+      <p:cxnSp>
+        <p:nvCxnSpPr>
+          <p:cNvPr id="68" name="Connector 67"/>
+          <p:cNvCxnSpPr/>
+          <p:nvPr/>
+        </p:nvCxnSpPr>
+        <p:spPr>
+          <a:xfrm>
+            <a:off x="7781544" y="3364992"/>
+            <a:ext cx="274320" cy="0"/>
+          </a:xfrm>
+          <a:prstGeom prst="line">
+            <a:avLst/>
+          </a:prstGeom>
+          <a:ln w="22860">
+            <a:solidFill>
+              <a:srgbClr val="8C8C8C"/>
+            </a:solidFill>
+            <a:tailEnd type="triangle" w="med" len="med"/>
+          </a:ln>
+          <a:effectLst/>
+        </p:spPr>
+      </p:cxnSp>
+      <p:sp>
+        <p:nvSpPr>
+          <p:cNvPr id="69" name="Folded Corner 68"/>
+          <p:cNvSpPr/>
+          <p:nvPr/>
+        </p:nvSpPr>
+        <p:spPr>
+          <a:xfrm>
+            <a:off x="8083296" y="3035808"/>
+            <a:ext cx="877824" cy="676656"/>
+          </a:xfrm>
+          <a:prstGeom prst="foldedCorner">
+            <a:avLst/>
+          </a:prstGeom>
+          <a:solidFill>
+            <a:srgbClr val="DDE9F7"/>
+          </a:solidFill>
+          <a:ln w="15240">
+            <a:solidFill>
+              <a:srgbClr val="4C72B0"/>
+            </a:solidFill>
+          </a:ln>
+          <a:effectLst/>
+        </p:spPr>
+        <p:txBody>
+          <a:bodyPr rtlCol="0" anchor="ctr"/>
+          <a:lstStyle/>
+          <a:p>
+            <a:pPr algn="ctr"/>
+          </a:p>
+        </p:txBody>
+      </p:sp>
+      <p:sp>
+        <p:nvSpPr>
+          <p:cNvPr id="70" name="TextBox 69"/>
+          <p:cNvSpPr txBox="1"/>
+          <p:nvPr/>
+        </p:nvSpPr>
+        <p:spPr>
+          <a:xfrm>
+            <a:off x="8101583" y="3122676"/>
+            <a:ext cx="841247" cy="548640"/>
+          </a:xfrm>
+          <a:prstGeom prst="rect">
+            <a:avLst/>
+          </a:prstGeom>
+          <a:noFill/>
+        </p:spPr>
+        <p:txBody>
+          <a:bodyPr wrap="square" lIns="0" rIns="0" tIns="0" bIns="0">
+            <a:spAutoFit/>
+          </a:bodyPr>
+          <a:lstStyle/>
+          <a:p>
+            <a:pPr algn="ctr"/>
+            <a:r>
+              <a:rPr sz="750" b="1" i="0">
+                <a:solidFill>
+                  <a:srgbClr val="1F1F1E"/>
+                </a:solidFill>
+                <a:latin typeface="Times New Roman"/>
+              </a:rPr>
+              <a:t>candidate</a:t>
+            </a:r>
+          </a:p>
+          <a:p>
+            <a:pPr algn="ctr"/>
+            <a:r>
+              <a:rPr sz="750" b="1" i="0">
+                <a:solidFill>
+                  <a:srgbClr val="1F1F1E"/>
+                </a:solidFill>
+                <a:latin typeface="Times New Roman"/>
+              </a:rPr>
+              <a:t>student S₁</a:t>
+            </a:r>
+          </a:p>
+        </p:txBody>
+      </p:sp>
+      <p:cxnSp>
+        <p:nvCxnSpPr>
+          <p:cNvPr id="71" name="Connector 70"/>
+          <p:cNvCxnSpPr/>
+          <p:nvPr/>
+        </p:nvCxnSpPr>
+        <p:spPr>
+          <a:xfrm>
+            <a:off x="8979408" y="3364992"/>
+            <a:ext cx="256032" cy="0"/>
+          </a:xfrm>
+          <a:prstGeom prst="line">
+            <a:avLst/>
+          </a:prstGeom>
+          <a:ln w="22860">
+            <a:solidFill>
+              <a:srgbClr val="8C8C8C"/>
+            </a:solidFill>
+            <a:tailEnd type="triangle" w="med" len="med"/>
+          </a:ln>
+          <a:effectLst/>
+        </p:spPr>
+      </p:cxnSp>
+      <p:sp>
+        <p:nvSpPr>
+          <p:cNvPr id="72" name="Diamond 71"/>
+          <p:cNvSpPr/>
+          <p:nvPr/>
+        </p:nvSpPr>
+        <p:spPr>
+          <a:xfrm>
+            <a:off x="9253728" y="2907792"/>
+            <a:ext cx="1225296" cy="914400"/>
+          </a:xfrm>
+          <a:prstGeom prst="diamond">
+            <a:avLst/>
+          </a:prstGeom>
+          <a:solidFill>
+            <a:srgbClr val="FFF0C2"/>
           </a:solidFill>
           <a:ln w="17780">
             <a:solidFill>
+              <a:srgbClr val="C9A22A"/>
+            </a:solidFill>
+          </a:ln>
+          <a:effectLst/>
+        </p:spPr>
+        <p:txBody>
+          <a:bodyPr rtlCol="0" anchor="ctr"/>
+          <a:lstStyle/>
+          <a:p>
+            <a:pPr algn="ctr"/>
+          </a:p>
+        </p:txBody>
+      </p:sp>
+      <p:sp>
+        <p:nvSpPr>
+          <p:cNvPr id="73" name="TextBox 72"/>
+          <p:cNvSpPr txBox="1"/>
+          <p:nvPr/>
+        </p:nvSpPr>
+        <p:spPr>
+          <a:xfrm>
+            <a:off x="9290304" y="3127248"/>
+            <a:ext cx="1152144" cy="502920"/>
+          </a:xfrm>
+          <a:prstGeom prst="rect">
+            <a:avLst/>
+          </a:prstGeom>
+          <a:noFill/>
+        </p:spPr>
+        <p:txBody>
+          <a:bodyPr wrap="square" lIns="0" rIns="0" tIns="0" bIns="0">
+            <a:spAutoFit/>
+          </a:bodyPr>
+          <a:lstStyle/>
+          <a:p>
+            <a:pPr algn="ctr"/>
+            <a:r>
+              <a:rPr sz="750" b="1" i="0">
+                <a:solidFill>
+                  <a:srgbClr val="1F1F1E"/>
+                </a:solidFill>
+                <a:latin typeface="Times New Roman"/>
+              </a:rPr>
+              <a:t>certify</a:t>
+            </a:r>
+          </a:p>
+          <a:p>
+            <a:pPr algn="ctr"/>
+            <a:r>
+              <a:rPr sz="750" b="1" i="0">
+                <a:solidFill>
+                  <a:srgbClr val="1F1F1E"/>
+                </a:solidFill>
+                <a:latin typeface="Times New Roman"/>
+              </a:rPr>
+              <a:t>two-sided?</a:t>
+            </a:r>
+          </a:p>
+        </p:txBody>
+      </p:sp>
+      <p:sp>
+        <p:nvSpPr>
+          <p:cNvPr id="74" name="TextBox 73"/>
+          <p:cNvSpPr txBox="1"/>
+          <p:nvPr/>
+        </p:nvSpPr>
+        <p:spPr>
+          <a:xfrm>
+            <a:off x="10442448" y="3108960"/>
+            <a:ext cx="457200" cy="237744"/>
+          </a:xfrm>
+          <a:prstGeom prst="rect">
+            <a:avLst/>
+          </a:prstGeom>
+          <a:noFill/>
+        </p:spPr>
+        <p:txBody>
+          <a:bodyPr wrap="square" lIns="0" rIns="0" tIns="0" bIns="0">
+            <a:spAutoFit/>
+          </a:bodyPr>
+          <a:lstStyle/>
+          <a:p>
+            <a:pPr algn="ctr"/>
+            <a:r>
+              <a:rPr sz="700" b="1" i="0">
+                <a:solidFill>
+                  <a:srgbClr val="779E62"/>
+                </a:solidFill>
+                <a:latin typeface="Times New Roman"/>
+              </a:rPr>
+              <a:t>accept</a:t>
+            </a:r>
+          </a:p>
+        </p:txBody>
+      </p:sp>
+      <p:cxnSp>
+        <p:nvCxnSpPr>
+          <p:cNvPr id="75" name="Connector 74"/>
+          <p:cNvCxnSpPr/>
+          <p:nvPr/>
+        </p:nvCxnSpPr>
+        <p:spPr>
+          <a:xfrm>
+            <a:off x="10497312" y="3364992"/>
+            <a:ext cx="292608" cy="0"/>
+          </a:xfrm>
+          <a:prstGeom prst="line">
+            <a:avLst/>
+          </a:prstGeom>
+          <a:ln w="25400">
+            <a:solidFill>
+              <a:srgbClr val="779E62"/>
+            </a:solidFill>
+            <a:tailEnd type="triangle" w="med" len="med"/>
+          </a:ln>
+          <a:effectLst/>
+        </p:spPr>
+      </p:cxnSp>
+      <p:sp>
+        <p:nvSpPr>
+          <p:cNvPr id="76" name="Folded Corner 75"/>
+          <p:cNvSpPr/>
+          <p:nvPr/>
+        </p:nvSpPr>
+        <p:spPr>
+          <a:xfrm>
+            <a:off x="10817352" y="2962656"/>
+            <a:ext cx="1188720" cy="804672"/>
+          </a:xfrm>
+          <a:prstGeom prst="foldedCorner">
+            <a:avLst/>
+          </a:prstGeom>
+          <a:solidFill>
+            <a:srgbClr val="DDE9F7"/>
+          </a:solidFill>
+          <a:ln w="15240">
+            <a:solidFill>
               <a:srgbClr val="4C72B0"/>
             </a:solidFill>
           </a:ln>
           <a:effectLst/>
         </p:spPr>
         <p:txBody>
-          <a:bodyPr rtlCol="0" anchor="ctr" lIns="9000" rIns="9000" tIns="4500" bIns="4500" wrap="square"/>
-          <a:lstStyle/>
-          <a:p>
-            <a:pPr algn="ctr"/>
-            <a:r>
-              <a:rPr sz="1600" b="0" i="0">
+          <a:bodyPr rtlCol="0" anchor="ctr"/>
+          <a:lstStyle/>
+          <a:p>
+            <a:pPr algn="ctr"/>
+          </a:p>
+        </p:txBody>
+      </p:sp>
+      <p:sp>
+        <p:nvSpPr>
+          <p:cNvPr id="77" name="TextBox 76"/>
+          <p:cNvSpPr txBox="1"/>
+          <p:nvPr/>
+        </p:nvSpPr>
+        <p:spPr>
+          <a:xfrm>
+            <a:off x="10835640" y="3113532"/>
+            <a:ext cx="1152144" cy="548640"/>
+          </a:xfrm>
+          <a:prstGeom prst="rect">
+            <a:avLst/>
+          </a:prstGeom>
+          <a:noFill/>
+        </p:spPr>
+        <p:txBody>
+          <a:bodyPr wrap="square" lIns="0" rIns="0" tIns="0" bIns="0">
+            <a:spAutoFit/>
+          </a:bodyPr>
+          <a:lstStyle/>
+          <a:p>
+            <a:pPr algn="ctr"/>
+            <a:r>
+              <a:rPr sz="750" b="1" i="0">
                 <a:solidFill>
                   <a:srgbClr val="1F1F1E"/>
                 </a:solidFill>
                 <a:latin typeface="Times New Roman"/>
               </a:rPr>
-              <a:t>🎓</a:t>
-            </a:r>
-          </a:p>
-        </p:txBody>
-      </p:sp>
-      <p:sp>
-        <p:nvSpPr>
-          <p:cNvPr id="73" name="Rounded Rectangle 72"/>
+              <a:t>deployed</a:t>
+            </a:r>
+          </a:p>
+          <a:p>
+            <a:pPr algn="ctr"/>
+            <a:r>
+              <a:rPr sz="750" b="1" i="0">
+                <a:solidFill>
+                  <a:srgbClr val="1F1F1E"/>
+                </a:solidFill>
+                <a:latin typeface="Times New Roman"/>
+              </a:rPr>
+              <a:t>student +</a:t>
+            </a:r>
+          </a:p>
+          <a:p>
+            <a:pPr algn="ctr"/>
+            <a:r>
+              <a:rPr sz="750" b="1" i="0">
+                <a:solidFill>
+                  <a:srgbClr val="1F1F1E"/>
+                </a:solidFill>
+                <a:latin typeface="Times New Roman"/>
+              </a:rPr>
+              <a:t>certificates</a:t>
+            </a:r>
+          </a:p>
+        </p:txBody>
+      </p:sp>
+      <p:sp>
+        <p:nvSpPr>
+          <p:cNvPr id="78" name="TextBox 77"/>
+          <p:cNvSpPr txBox="1"/>
+          <p:nvPr/>
+        </p:nvSpPr>
+        <p:spPr>
+          <a:xfrm>
+            <a:off x="9326880" y="3877056"/>
+            <a:ext cx="566928" cy="237744"/>
+          </a:xfrm>
+          <a:prstGeom prst="rect">
+            <a:avLst/>
+          </a:prstGeom>
+          <a:noFill/>
+        </p:spPr>
+        <p:txBody>
+          <a:bodyPr wrap="square" lIns="0" rIns="0" tIns="0" bIns="0">
+            <a:spAutoFit/>
+          </a:bodyPr>
+          <a:lstStyle/>
+          <a:p>
+            <a:pPr algn="ctr"/>
+            <a:r>
+              <a:rPr sz="750" b="1" i="0">
+                <a:solidFill>
+                  <a:srgbClr val="C0504D"/>
+                </a:solidFill>
+                <a:latin typeface="Times New Roman"/>
+              </a:rPr>
+              <a:t>reject</a:t>
+            </a:r>
+          </a:p>
+        </p:txBody>
+      </p:sp>
+      <p:cxnSp>
+        <p:nvCxnSpPr>
+          <p:cNvPr id="79" name="Connector 78"/>
+          <p:cNvCxnSpPr/>
+          <p:nvPr/>
+        </p:nvCxnSpPr>
+        <p:spPr>
+          <a:xfrm flipH="1">
+            <a:off x="8321040" y="3840480"/>
+            <a:ext cx="1325880" cy="530352"/>
+          </a:xfrm>
+          <a:prstGeom prst="line">
+            <a:avLst/>
+          </a:prstGeom>
+          <a:ln w="20320">
+            <a:solidFill>
+              <a:srgbClr val="C0504D"/>
+            </a:solidFill>
+            <a:tailEnd type="triangle" w="med" len="med"/>
+            <a:prstDash val="dash"/>
+          </a:ln>
+          <a:effectLst/>
+        </p:spPr>
+      </p:cxnSp>
+      <p:sp>
+        <p:nvSpPr>
+          <p:cNvPr id="80" name="Rounded Rectangle 79"/>
           <p:cNvSpPr/>
           <p:nvPr/>
         </p:nvSpPr>
         <p:spPr>
           <a:xfrm>
-            <a:off x="9829800" y="5010912"/>
-            <a:ext cx="2148840" cy="329184"/>
+            <a:off x="6903720" y="4224528"/>
+            <a:ext cx="1417320" cy="402336"/>
           </a:xfrm>
           <a:prstGeom prst="roundRect">
             <a:avLst>
-              <a:gd name="adj" fmla="val 50000"/>
+              <a:gd name="adj" fmla="val 15000"/>
             </a:avLst>
           </a:prstGeom>
           <a:solidFill>
-            <a:srgbClr val="DCE5EF"/>
+            <a:srgbClr val="F9D6D2"/>
           </a:solidFill>
-          <a:ln>
-            <a:noFill/>
+          <a:ln w="15240">
+            <a:solidFill>
+              <a:srgbClr val="C0504D"/>
+            </a:solidFill>
           </a:ln>
           <a:effectLst/>
         </p:spPr>
@@ -5641,161 +5858,910 @@
           <a:p>
             <a:pPr algn="ctr"/>
             <a:r>
-              <a:rPr sz="850" b="1" i="0">
-                <a:solidFill>
-                  <a:srgbClr val="1F1F1E"/>
+              <a:rPr sz="800" b="1" i="0">
+                <a:solidFill>
+                  <a:srgbClr val="C0504D"/>
                 </a:solidFill>
                 <a:latin typeface="Times New Roman"/>
               </a:rPr>
-              <a:t>exact in-task ability, tied to spec</a:t>
+              <a:t>tighten λ · re-select</a:t>
             </a:r>
           </a:p>
         </p:txBody>
       </p:sp>
       <p:cxnSp>
         <p:nvCxnSpPr>
-          <p:cNvPr id="74" name="Connector 73"/>
+          <p:cNvPr id="81" name="Connector 80"/>
           <p:cNvCxnSpPr/>
           <p:nvPr/>
         </p:nvCxnSpPr>
         <p:spPr>
-          <a:xfrm flipV="1">
-            <a:off x="9665208" y="5175504"/>
-            <a:ext cx="146304" cy="265176"/>
+          <a:xfrm flipH="1" flipV="1">
+            <a:off x="3749039" y="3931920"/>
+            <a:ext cx="3127249" cy="475488"/>
           </a:xfrm>
           <a:prstGeom prst="line">
             <a:avLst/>
           </a:prstGeom>
-          <a:ln w="15240">
+          <a:ln w="20320">
+            <a:solidFill>
+              <a:srgbClr val="C0504D"/>
+            </a:solidFill>
+            <a:tailEnd type="triangle" w="med" len="med"/>
+            <a:prstDash val="dash"/>
+          </a:ln>
+          <a:effectLst/>
+        </p:spPr>
+      </p:cxnSp>
+      <p:sp>
+        <p:nvSpPr>
+          <p:cNvPr id="82" name="TextBox 81"/>
+          <p:cNvSpPr txBox="1"/>
+          <p:nvPr/>
+        </p:nvSpPr>
+        <p:spPr>
+          <a:xfrm>
+            <a:off x="3931920" y="6144768"/>
+            <a:ext cx="1234440" cy="256032"/>
+          </a:xfrm>
+          <a:prstGeom prst="rect">
+            <a:avLst/>
+          </a:prstGeom>
+          <a:noFill/>
+        </p:spPr>
+        <p:txBody>
+          <a:bodyPr wrap="square" lIns="0" rIns="0" tIns="0" bIns="0">
+            <a:spAutoFit/>
+          </a:bodyPr>
+          <a:lstStyle/>
+          <a:p>
+            <a:pPr algn="ctr"/>
+            <a:r>
+              <a:rPr sz="700" b="1" i="0">
+                <a:solidFill>
+                  <a:srgbClr val="C9A22A"/>
+                </a:solidFill>
+                <a:latin typeface="Times New Roman"/>
+              </a:rPr>
+              <a:t>τ from calibration</a:t>
+            </a:r>
+          </a:p>
+        </p:txBody>
+      </p:sp>
+      <p:sp>
+        <p:nvSpPr>
+          <p:cNvPr id="83" name="Rounded Rectangle 82"/>
+          <p:cNvSpPr/>
+          <p:nvPr/>
+        </p:nvSpPr>
+        <p:spPr>
+          <a:xfrm>
+            <a:off x="274320" y="4846320"/>
+            <a:ext cx="11777472" cy="1572768"/>
+          </a:xfrm>
+          <a:prstGeom prst="roundRect">
+            <a:avLst>
+              <a:gd name="adj" fmla="val 5000"/>
+            </a:avLst>
+          </a:prstGeom>
+          <a:solidFill>
+            <a:srgbClr val="ECF6F5"/>
+          </a:solidFill>
+          <a:ln w="20320">
+            <a:solidFill>
+              <a:srgbClr val="2E9E97"/>
+            </a:solidFill>
+            <a:prstDash val="dash"/>
+          </a:ln>
+          <a:effectLst/>
+        </p:spPr>
+        <p:txBody>
+          <a:bodyPr rtlCol="0" anchor="ctr"/>
+          <a:lstStyle/>
+          <a:p>
+            <a:pPr algn="ctr"/>
+          </a:p>
+        </p:txBody>
+      </p:sp>
+      <p:sp>
+        <p:nvSpPr>
+          <p:cNvPr id="84" name="TextBox 83"/>
+          <p:cNvSpPr txBox="1"/>
+          <p:nvPr/>
+        </p:nvSpPr>
+        <p:spPr>
+          <a:xfrm>
+            <a:off x="438912" y="4937760"/>
+            <a:ext cx="3657600" cy="274320"/>
+          </a:xfrm>
+          <a:prstGeom prst="rect">
+            <a:avLst/>
+          </a:prstGeom>
+          <a:noFill/>
+        </p:spPr>
+        <p:txBody>
+          <a:bodyPr wrap="square" lIns="0" rIns="0" tIns="0" bIns="0">
+            <a:spAutoFit/>
+          </a:bodyPr>
+          <a:lstStyle/>
+          <a:p>
+            <a:pPr algn="l"/>
+            <a:r>
+              <a:rPr sz="950" b="1" i="0">
+                <a:solidFill>
+                  <a:srgbClr val="2E9E97"/>
+                </a:solidFill>
+                <a:latin typeface="Times New Roman"/>
+              </a:rPr>
+              <a:t>DEPLOYMENT-TIME ROUTING</a:t>
+            </a:r>
+          </a:p>
+        </p:txBody>
+      </p:sp>
+      <p:sp>
+        <p:nvSpPr>
+          <p:cNvPr id="85" name="Rounded Rectangle 84"/>
+          <p:cNvSpPr/>
+          <p:nvPr/>
+        </p:nvSpPr>
+        <p:spPr>
+          <a:xfrm>
+            <a:off x="502920" y="5349240"/>
+            <a:ext cx="1188720" cy="502920"/>
+          </a:xfrm>
+          <a:prstGeom prst="roundRect">
+            <a:avLst>
+              <a:gd name="adj" fmla="val 25000"/>
+            </a:avLst>
+          </a:prstGeom>
+          <a:solidFill>
+            <a:srgbClr val="DDE9F7"/>
+          </a:solidFill>
+          <a:ln w="13970">
+            <a:solidFill>
+              <a:srgbClr val="4C72B0"/>
+            </a:solidFill>
+          </a:ln>
+          <a:effectLst/>
+        </p:spPr>
+        <p:txBody>
+          <a:bodyPr rtlCol="0" anchor="ctr"/>
+          <a:lstStyle/>
+          <a:p>
+            <a:pPr algn="ctr"/>
+          </a:p>
+        </p:txBody>
+      </p:sp>
+      <p:sp>
+        <p:nvSpPr>
+          <p:cNvPr id="86" name="TextBox 85"/>
+          <p:cNvSpPr txBox="1"/>
+          <p:nvPr/>
+        </p:nvSpPr>
+        <p:spPr>
+          <a:xfrm>
+            <a:off x="566928" y="5394960"/>
+            <a:ext cx="1097280" cy="457200"/>
+          </a:xfrm>
+          <a:prstGeom prst="rect">
+            <a:avLst/>
+          </a:prstGeom>
+          <a:noFill/>
+        </p:spPr>
+        <p:txBody>
+          <a:bodyPr wrap="square" lIns="0" rIns="0" tIns="0" bIns="0">
+            <a:spAutoFit/>
+          </a:bodyPr>
+          <a:lstStyle/>
+          <a:p>
+            <a:pPr algn="l"/>
+            <a:r>
+              <a:rPr sz="700" b="0" i="0">
+                <a:solidFill>
+                  <a:srgbClr val="4C72B0"/>
+                </a:solidFill>
+                <a:latin typeface="Times New Roman"/>
+              </a:rPr>
+              <a:t>"Avg dues</a:t>
+            </a:r>
+          </a:p>
+          <a:p>
+            <a:pPr algn="l"/>
+            <a:r>
+              <a:rPr sz="700" b="0" i="0">
+                <a:solidFill>
+                  <a:srgbClr val="4C72B0"/>
+                </a:solidFill>
+                <a:latin typeface="Times New Roman"/>
+              </a:rPr>
+              <a:t>per club?"</a:t>
+            </a:r>
+          </a:p>
+        </p:txBody>
+      </p:sp>
+      <p:sp>
+        <p:nvSpPr>
+          <p:cNvPr id="87" name="Rounded Rectangle 86"/>
+          <p:cNvSpPr/>
+          <p:nvPr/>
+        </p:nvSpPr>
+        <p:spPr>
+          <a:xfrm>
+            <a:off x="502920" y="5925312"/>
+            <a:ext cx="1188720" cy="438912"/>
+          </a:xfrm>
+          <a:prstGeom prst="roundRect">
+            <a:avLst>
+              <a:gd name="adj" fmla="val 25000"/>
+            </a:avLst>
+          </a:prstGeom>
+          <a:solidFill>
+            <a:srgbClr val="FDF0E7"/>
+          </a:solidFill>
+          <a:ln w="13970">
+            <a:solidFill>
+              <a:srgbClr val="DD8452"/>
+            </a:solidFill>
+          </a:ln>
+          <a:effectLst/>
+        </p:spPr>
+        <p:txBody>
+          <a:bodyPr rtlCol="0" anchor="ctr"/>
+          <a:lstStyle/>
+          <a:p>
+            <a:pPr algn="ctr"/>
+          </a:p>
+        </p:txBody>
+      </p:sp>
+      <p:sp>
+        <p:nvSpPr>
+          <p:cNvPr id="88" name="TextBox 87"/>
+          <p:cNvSpPr txBox="1"/>
+          <p:nvPr/>
+        </p:nvSpPr>
+        <p:spPr>
+          <a:xfrm>
+            <a:off x="566928" y="5961888"/>
+            <a:ext cx="1097280" cy="384048"/>
+          </a:xfrm>
+          <a:prstGeom prst="rect">
+            <a:avLst/>
+          </a:prstGeom>
+          <a:noFill/>
+        </p:spPr>
+        <p:txBody>
+          <a:bodyPr wrap="square" lIns="0" rIns="0" tIns="0" bIns="0">
+            <a:spAutoFit/>
+          </a:bodyPr>
+          <a:lstStyle/>
+          <a:p>
+            <a:pPr algn="l"/>
+            <a:r>
+              <a:rPr sz="700" b="0" i="0">
+                <a:solidFill>
+                  <a:srgbClr val="DD8452"/>
+                </a:solidFill>
+                <a:latin typeface="Times New Roman"/>
+              </a:rPr>
+              <a:t>"Plot a chart"</a:t>
+            </a:r>
+          </a:p>
+        </p:txBody>
+      </p:sp>
+      <p:cxnSp>
+        <p:nvCxnSpPr>
+          <p:cNvPr id="89" name="Connector 88"/>
+          <p:cNvCxnSpPr/>
+          <p:nvPr/>
+        </p:nvCxnSpPr>
+        <p:spPr>
+          <a:xfrm>
+            <a:off x="1719072" y="5596128"/>
+            <a:ext cx="384048" cy="0"/>
+          </a:xfrm>
+          <a:prstGeom prst="line">
+            <a:avLst/>
+          </a:prstGeom>
+          <a:ln w="20320">
             <a:solidFill>
               <a:srgbClr val="8C8C8C"/>
             </a:solidFill>
+            <a:tailEnd type="triangle" w="med" len="med"/>
           </a:ln>
           <a:effectLst/>
         </p:spPr>
       </p:cxnSp>
-      <p:sp>
-        <p:nvSpPr>
-          <p:cNvPr id="75" name="Rounded Rectangle 74"/>
-          <p:cNvSpPr/>
-          <p:nvPr/>
-        </p:nvSpPr>
-        <p:spPr>
-          <a:xfrm>
-            <a:off x="9829800" y="5449824"/>
-            <a:ext cx="2148840" cy="329184"/>
-          </a:xfrm>
-          <a:prstGeom prst="roundRect">
-            <a:avLst>
-              <a:gd name="adj" fmla="val 50000"/>
-            </a:avLst>
-          </a:prstGeom>
-          <a:solidFill>
-            <a:srgbClr val="DCE5EF"/>
-          </a:solidFill>
-          <a:ln>
-            <a:noFill/>
-          </a:ln>
-          <a:effectLst/>
-        </p:spPr>
-        <p:txBody>
-          <a:bodyPr rtlCol="0" anchor="ctr" lIns="9000" rIns="9000" tIns="4500" bIns="4500" wrap="square"/>
-          <a:lstStyle/>
-          <a:p>
-            <a:pPr algn="ctr"/>
-            <a:r>
-              <a:rPr sz="850" b="1" i="0">
-                <a:solidFill>
-                  <a:srgbClr val="1F1F1E"/>
-                </a:solidFill>
-                <a:latin typeface="Times New Roman"/>
-              </a:rPr>
-              <a:t>certified leakage ≤ 0.25</a:t>
-            </a:r>
-          </a:p>
-        </p:txBody>
-      </p:sp>
       <p:cxnSp>
         <p:nvCxnSpPr>
-          <p:cNvPr id="76" name="Connector 75"/>
+          <p:cNvPr id="90" name="Connector 89"/>
           <p:cNvCxnSpPr/>
           <p:nvPr/>
         </p:nvCxnSpPr>
         <p:spPr>
           <a:xfrm>
-            <a:off x="9665208" y="5440680"/>
-            <a:ext cx="146304" cy="173736"/>
+            <a:off x="1719072" y="6126480"/>
+            <a:ext cx="384048" cy="0"/>
           </a:xfrm>
           <a:prstGeom prst="line">
             <a:avLst/>
           </a:prstGeom>
-          <a:ln w="15240">
+          <a:ln w="20320">
             <a:solidFill>
               <a:srgbClr val="8C8C8C"/>
             </a:solidFill>
+            <a:tailEnd type="triangle" w="med" len="med"/>
           </a:ln>
           <a:effectLst/>
         </p:spPr>
       </p:cxnSp>
       <p:sp>
         <p:nvSpPr>
-          <p:cNvPr id="77" name="Rounded Rectangle 76"/>
+          <p:cNvPr id="91" name="Rounded Rectangle 90"/>
           <p:cNvSpPr/>
           <p:nvPr/>
         </p:nvSpPr>
         <p:spPr>
           <a:xfrm>
-            <a:off x="9829800" y="5888736"/>
-            <a:ext cx="2148840" cy="329184"/>
+            <a:off x="2139696" y="5440680"/>
+            <a:ext cx="1463040" cy="621792"/>
           </a:xfrm>
           <a:prstGeom prst="roundRect">
             <a:avLst>
-              <a:gd name="adj" fmla="val 50000"/>
+              <a:gd name="adj" fmla="val 12000"/>
             </a:avLst>
           </a:prstGeom>
           <a:solidFill>
-            <a:srgbClr val="DCE5EF"/>
+            <a:srgbClr val="E6DCEF"/>
           </a:solidFill>
-          <a:ln>
-            <a:noFill/>
-          </a:ln>
-          <a:effectLst/>
-        </p:spPr>
-        <p:txBody>
-          <a:bodyPr rtlCol="0" anchor="ctr" lIns="9000" rIns="9000" tIns="4500" bIns="4500" wrap="square"/>
-          <a:lstStyle/>
-          <a:p>
-            <a:pPr algn="ctr"/>
-            <a:r>
-              <a:rPr sz="850" b="1" i="0">
+          <a:ln w="16510">
+            <a:solidFill>
+              <a:srgbClr val="8E6BAE"/>
+            </a:solidFill>
+          </a:ln>
+          <a:effectLst/>
+        </p:spPr>
+        <p:txBody>
+          <a:bodyPr rtlCol="0" anchor="ctr"/>
+          <a:lstStyle/>
+          <a:p>
+            <a:pPr algn="ctr"/>
+          </a:p>
+        </p:txBody>
+      </p:sp>
+      <p:sp>
+        <p:nvSpPr>
+          <p:cNvPr id="92" name="TextBox 91"/>
+          <p:cNvSpPr txBox="1"/>
+          <p:nvPr/>
+        </p:nvSpPr>
+        <p:spPr>
+          <a:xfrm>
+            <a:off x="2167127" y="5486400"/>
+            <a:ext cx="1408176" cy="341985"/>
+          </a:xfrm>
+          <a:prstGeom prst="rect">
+            <a:avLst/>
+          </a:prstGeom>
+          <a:noFill/>
+        </p:spPr>
+        <p:txBody>
+          <a:bodyPr wrap="square" lIns="0" rIns="0" tIns="0" bIns="0">
+            <a:spAutoFit/>
+          </a:bodyPr>
+          <a:lstStyle/>
+          <a:p>
+            <a:pPr algn="ctr"/>
+            <a:r>
+              <a:rPr sz="800" b="1" i="0">
                 <a:solidFill>
                   <a:srgbClr val="1F1F1E"/>
                 </a:solidFill>
                 <a:latin typeface="Times New Roman"/>
               </a:rPr>
-              <a:t>same performance at ¼ budget</a:t>
+              <a:t>conformal score</a:t>
+            </a:r>
+          </a:p>
+        </p:txBody>
+      </p:sp>
+      <p:sp>
+        <p:nvSpPr>
+          <p:cNvPr id="93" name="Rounded Rectangle 92"/>
+          <p:cNvSpPr/>
+          <p:nvPr/>
+        </p:nvSpPr>
+        <p:spPr>
+          <a:xfrm>
+            <a:off x="2203703" y="5843016"/>
+            <a:ext cx="1335024" cy="164592"/>
+          </a:xfrm>
+          <a:prstGeom prst="roundRect">
+            <a:avLst>
+              <a:gd name="adj" fmla="val 30000"/>
+            </a:avLst>
+          </a:prstGeom>
+          <a:solidFill>
+            <a:srgbClr val="FFFFFF"/>
+          </a:solidFill>
+          <a:ln w="9525">
+            <a:solidFill>
+              <a:srgbClr val="8E6BAE"/>
+            </a:solidFill>
+          </a:ln>
+          <a:effectLst/>
+        </p:spPr>
+        <p:txBody>
+          <a:bodyPr rtlCol="0" anchor="ctr" lIns="9000" rIns="9000" tIns="4500" bIns="4500" wrap="square"/>
+          <a:lstStyle/>
+          <a:p>
+            <a:pPr algn="ctr"/>
+            <a:r>
+              <a:rPr sz="650" b="0" i="0">
+                <a:solidFill>
+                  <a:srgbClr val="6B6A63"/>
+                </a:solidFill>
+                <a:latin typeface="Times New Roman"/>
+              </a:rPr>
+              <a:t>one backward pass</a:t>
             </a:r>
           </a:p>
         </p:txBody>
       </p:sp>
       <p:cxnSp>
         <p:nvCxnSpPr>
-          <p:cNvPr id="78" name="Connector 77"/>
+          <p:cNvPr id="94" name="Connector 93"/>
           <p:cNvCxnSpPr/>
           <p:nvPr/>
         </p:nvCxnSpPr>
         <p:spPr>
           <a:xfrm>
-            <a:off x="9665208" y="5440680"/>
-            <a:ext cx="146304" cy="612648"/>
+            <a:off x="3621024" y="5742432"/>
+            <a:ext cx="356615" cy="0"/>
           </a:xfrm>
           <a:prstGeom prst="line">
             <a:avLst/>
           </a:prstGeom>
-          <a:ln w="15240">
+          <a:ln w="20320">
             <a:solidFill>
               <a:srgbClr val="8C8C8C"/>
             </a:solidFill>
+            <a:tailEnd type="triangle" w="med" len="med"/>
+          </a:ln>
+          <a:effectLst/>
+        </p:spPr>
+      </p:cxnSp>
+      <p:sp>
+        <p:nvSpPr>
+          <p:cNvPr id="95" name="Diamond 94"/>
+          <p:cNvSpPr/>
+          <p:nvPr/>
+        </p:nvSpPr>
+        <p:spPr>
+          <a:xfrm>
+            <a:off x="4005072" y="5413248"/>
+            <a:ext cx="1051560" cy="713232"/>
+          </a:xfrm>
+          <a:prstGeom prst="diamond">
+            <a:avLst/>
+          </a:prstGeom>
+          <a:solidFill>
+            <a:srgbClr val="FFF0C2"/>
+          </a:solidFill>
+          <a:ln w="16510">
+            <a:solidFill>
+              <a:srgbClr val="C9A22A"/>
+            </a:solidFill>
+          </a:ln>
+          <a:effectLst/>
+        </p:spPr>
+        <p:txBody>
+          <a:bodyPr rtlCol="0" anchor="ctr"/>
+          <a:lstStyle/>
+          <a:p>
+            <a:pPr algn="ctr"/>
+          </a:p>
+        </p:txBody>
+      </p:sp>
+      <p:sp>
+        <p:nvSpPr>
+          <p:cNvPr id="96" name="TextBox 95"/>
+          <p:cNvSpPr txBox="1"/>
+          <p:nvPr/>
+        </p:nvSpPr>
+        <p:spPr>
+          <a:xfrm>
+            <a:off x="4023360" y="5632704"/>
+            <a:ext cx="1005840" cy="365760"/>
+          </a:xfrm>
+          <a:prstGeom prst="rect">
+            <a:avLst/>
+          </a:prstGeom>
+          <a:noFill/>
+        </p:spPr>
+        <p:txBody>
+          <a:bodyPr wrap="square" lIns="0" rIns="0" tIns="0" bIns="0">
+            <a:spAutoFit/>
+          </a:bodyPr>
+          <a:lstStyle/>
+          <a:p>
+            <a:pPr algn="ctr"/>
+            <a:r>
+              <a:rPr sz="850" b="1" i="0">
+                <a:solidFill>
+                  <a:srgbClr val="1F1F1E"/>
+                </a:solidFill>
+                <a:latin typeface="Times New Roman"/>
+              </a:rPr>
+              <a:t>≤ τ ?</a:t>
+            </a:r>
+          </a:p>
+        </p:txBody>
+      </p:sp>
+      <p:sp>
+        <p:nvSpPr>
+          <p:cNvPr id="97" name="TextBox 96"/>
+          <p:cNvSpPr txBox="1"/>
+          <p:nvPr/>
+        </p:nvSpPr>
+        <p:spPr>
+          <a:xfrm>
+            <a:off x="5120640" y="5358384"/>
+            <a:ext cx="457200" cy="237744"/>
+          </a:xfrm>
+          <a:prstGeom prst="rect">
+            <a:avLst/>
+          </a:prstGeom>
+          <a:noFill/>
+        </p:spPr>
+        <p:txBody>
+          <a:bodyPr wrap="square" lIns="0" rIns="0" tIns="0" bIns="0">
+            <a:spAutoFit/>
+          </a:bodyPr>
+          <a:lstStyle/>
+          <a:p>
+            <a:pPr algn="ctr"/>
+            <a:r>
+              <a:rPr sz="750" b="1" i="0">
+                <a:solidFill>
+                  <a:srgbClr val="779E62"/>
+                </a:solidFill>
+                <a:latin typeface="Times New Roman"/>
+              </a:rPr>
+              <a:t>yes</a:t>
+            </a:r>
+          </a:p>
+        </p:txBody>
+      </p:sp>
+      <p:cxnSp>
+        <p:nvCxnSpPr>
+          <p:cNvPr id="98" name="Connector 97"/>
+          <p:cNvCxnSpPr/>
+          <p:nvPr/>
+        </p:nvCxnSpPr>
+        <p:spPr>
+          <a:xfrm>
+            <a:off x="5074920" y="5596128"/>
+            <a:ext cx="365760" cy="0"/>
+          </a:xfrm>
+          <a:prstGeom prst="line">
+            <a:avLst/>
+          </a:prstGeom>
+          <a:ln w="25400">
+            <a:solidFill>
+              <a:srgbClr val="779E62"/>
+            </a:solidFill>
+            <a:tailEnd type="triangle" w="med" len="med"/>
+          </a:ln>
+          <a:effectLst/>
+        </p:spPr>
+      </p:cxnSp>
+      <p:sp>
+        <p:nvSpPr>
+          <p:cNvPr id="99" name="Rounded Rectangle 98"/>
+          <p:cNvSpPr/>
+          <p:nvPr/>
+        </p:nvSpPr>
+        <p:spPr>
+          <a:xfrm>
+            <a:off x="5468112" y="5349240"/>
+            <a:ext cx="1417320" cy="502920"/>
+          </a:xfrm>
+          <a:prstGeom prst="roundRect">
+            <a:avLst>
+              <a:gd name="adj" fmla="val 15000"/>
+            </a:avLst>
+          </a:prstGeom>
+          <a:solidFill>
+            <a:srgbClr val="E3EFDA"/>
+          </a:solidFill>
+          <a:ln w="16510">
+            <a:solidFill>
+              <a:srgbClr val="779E62"/>
+            </a:solidFill>
+          </a:ln>
+          <a:effectLst/>
+        </p:spPr>
+        <p:txBody>
+          <a:bodyPr rtlCol="0" anchor="ctr" lIns="9000" rIns="9000" tIns="4500" bIns="4500" wrap="square"/>
+          <a:lstStyle/>
+          <a:p>
+            <a:pPr algn="ctr"/>
+            <a:r>
+              <a:rPr sz="850" b="1" i="0">
+                <a:solidFill>
+                  <a:srgbClr val="1F1F1E"/>
+                </a:solidFill>
+                <a:latin typeface="Times New Roman"/>
+              </a:rPr>
+              <a:t>→ student agent</a:t>
+            </a:r>
+          </a:p>
+        </p:txBody>
+      </p:sp>
+      <p:sp>
+        <p:nvSpPr>
+          <p:cNvPr id="100" name="TextBox 99"/>
+          <p:cNvSpPr txBox="1"/>
+          <p:nvPr/>
+        </p:nvSpPr>
+        <p:spPr>
+          <a:xfrm>
+            <a:off x="5010912" y="6163056"/>
+            <a:ext cx="365760" cy="237744"/>
+          </a:xfrm>
+          <a:prstGeom prst="rect">
+            <a:avLst/>
+          </a:prstGeom>
+          <a:noFill/>
+        </p:spPr>
+        <p:txBody>
+          <a:bodyPr wrap="square" lIns="0" rIns="0" tIns="0" bIns="0">
+            <a:spAutoFit/>
+          </a:bodyPr>
+          <a:lstStyle/>
+          <a:p>
+            <a:pPr algn="ctr"/>
+            <a:r>
+              <a:rPr sz="750" b="1" i="0">
+                <a:solidFill>
+                  <a:srgbClr val="C0504D"/>
+                </a:solidFill>
+                <a:latin typeface="Times New Roman"/>
+              </a:rPr>
+              <a:t>no</a:t>
+            </a:r>
+          </a:p>
+        </p:txBody>
+      </p:sp>
+      <p:cxnSp>
+        <p:nvCxnSpPr>
+          <p:cNvPr id="101" name="Connector 100"/>
+          <p:cNvCxnSpPr/>
+          <p:nvPr/>
+        </p:nvCxnSpPr>
+        <p:spPr>
+          <a:xfrm>
+            <a:off x="5074920" y="5989320"/>
+            <a:ext cx="365760" cy="118872"/>
+          </a:xfrm>
+          <a:prstGeom prst="line">
+            <a:avLst/>
+          </a:prstGeom>
+          <a:ln w="25400">
+            <a:solidFill>
+              <a:srgbClr val="C0504D"/>
+            </a:solidFill>
+            <a:tailEnd type="triangle" w="med" len="med"/>
+          </a:ln>
+          <a:effectLst/>
+        </p:spPr>
+      </p:cxnSp>
+      <p:sp>
+        <p:nvSpPr>
+          <p:cNvPr id="102" name="Rounded Rectangle 101"/>
+          <p:cNvSpPr/>
+          <p:nvPr/>
+        </p:nvSpPr>
+        <p:spPr>
+          <a:xfrm>
+            <a:off x="5468112" y="5907024"/>
+            <a:ext cx="1691640" cy="457200"/>
+          </a:xfrm>
+          <a:prstGeom prst="roundRect">
+            <a:avLst>
+              <a:gd name="adj" fmla="val 15000"/>
+            </a:avLst>
+          </a:prstGeom>
+          <a:solidFill>
+            <a:srgbClr val="F9D6D2"/>
+          </a:solidFill>
+          <a:ln w="16510">
+            <a:solidFill>
+              <a:srgbClr val="C0504D"/>
+            </a:solidFill>
+          </a:ln>
+          <a:effectLst/>
+        </p:spPr>
+        <p:txBody>
+          <a:bodyPr rtlCol="0" anchor="ctr" lIns="9000" rIns="9000" tIns="4500" bIns="4500" wrap="square"/>
+          <a:lstStyle/>
+          <a:p>
+            <a:pPr algn="ctr"/>
+            <a:r>
+              <a:rPr sz="750" b="1" i="0">
+                <a:solidFill>
+                  <a:srgbClr val="C0504D"/>
+                </a:solidFill>
+                <a:latin typeface="Times New Roman"/>
+              </a:rPr>
+              <a:t>refuse · escalate to teacher</a:t>
+            </a:r>
+          </a:p>
+        </p:txBody>
+      </p:sp>
+      <p:sp>
+        <p:nvSpPr>
+          <p:cNvPr id="103" name="Rounded Rectangle 102"/>
+          <p:cNvSpPr/>
+          <p:nvPr/>
+        </p:nvSpPr>
+        <p:spPr>
+          <a:xfrm>
+            <a:off x="7589520" y="5349240"/>
+            <a:ext cx="2011680" cy="475488"/>
+          </a:xfrm>
+          <a:prstGeom prst="roundRect">
+            <a:avLst>
+              <a:gd name="adj" fmla="val 15000"/>
+            </a:avLst>
+          </a:prstGeom>
+          <a:solidFill>
+            <a:srgbClr val="FFFFFF"/>
+          </a:solidFill>
+          <a:ln w="17780">
+            <a:solidFill>
+              <a:srgbClr val="55A868"/>
+            </a:solidFill>
+          </a:ln>
+          <a:effectLst/>
+        </p:spPr>
+        <p:txBody>
+          <a:bodyPr rtlCol="0" anchor="ctr" lIns="9000" rIns="9000" tIns="4500" bIns="4500" wrap="square"/>
+          <a:lstStyle/>
+          <a:p>
+            <a:pPr algn="ctr"/>
+            <a:r>
+              <a:rPr sz="800" b="1" i="0">
+                <a:solidFill>
+                  <a:srgbClr val="1F1F1E"/>
+                </a:solidFill>
+                <a:latin typeface="Times New Roman"/>
+              </a:rPr>
+              <a:t>coverage LB 0.93 (in-task)</a:t>
+            </a:r>
+          </a:p>
+        </p:txBody>
+      </p:sp>
+      <p:sp>
+        <p:nvSpPr>
+          <p:cNvPr id="104" name="Rounded Rectangle 103"/>
+          <p:cNvSpPr/>
+          <p:nvPr/>
+        </p:nvSpPr>
+        <p:spPr>
+          <a:xfrm>
+            <a:off x="7589520" y="5888736"/>
+            <a:ext cx="2011680" cy="475488"/>
+          </a:xfrm>
+          <a:prstGeom prst="roundRect">
+            <a:avLst>
+              <a:gd name="adj" fmla="val 15000"/>
+            </a:avLst>
+          </a:prstGeom>
+          <a:solidFill>
+            <a:srgbClr val="FFFFFF"/>
+          </a:solidFill>
+          <a:ln w="17780">
+            <a:solidFill>
+              <a:srgbClr val="55A868"/>
+            </a:solidFill>
+          </a:ln>
+          <a:effectLst/>
+        </p:spPr>
+        <p:txBody>
+          <a:bodyPr rtlCol="0" anchor="ctr" lIns="9000" rIns="9000" tIns="4500" bIns="4500" wrap="square"/>
+          <a:lstStyle/>
+          <a:p>
+            <a:pPr algn="ctr"/>
+            <a:r>
+              <a:rPr sz="800" b="1" i="0">
+                <a:solidFill>
+                  <a:srgbClr val="1F1F1E"/>
+                </a:solidFill>
+                <a:latin typeface="Times New Roman"/>
+              </a:rPr>
+              <a:t>leakage UB 0.25 (off-task)</a:t>
+            </a:r>
+          </a:p>
+        </p:txBody>
+      </p:sp>
+      <p:sp>
+        <p:nvSpPr>
+          <p:cNvPr id="105" name="TextBox 104"/>
+          <p:cNvSpPr txBox="1"/>
+          <p:nvPr/>
+        </p:nvSpPr>
+        <p:spPr>
+          <a:xfrm>
+            <a:off x="9692640" y="5394960"/>
+            <a:ext cx="2286000" cy="914400"/>
+          </a:xfrm>
+          <a:prstGeom prst="rect">
+            <a:avLst/>
+          </a:prstGeom>
+          <a:noFill/>
+        </p:spPr>
+        <p:txBody>
+          <a:bodyPr wrap="square" lIns="0" rIns="0" tIns="0" bIns="0">
+            <a:spAutoFit/>
+          </a:bodyPr>
+          <a:lstStyle/>
+          <a:p>
+            <a:pPr algn="l"/>
+            <a:r>
+              <a:rPr sz="800" b="0" i="0">
+                <a:solidFill>
+                  <a:srgbClr val="6B6A63"/>
+                </a:solidFill>
+                <a:latin typeface="Times New Roman"/>
+              </a:rPr>
+              <a:t>Clopper-Pearson bounds from</a:t>
+            </a:r>
+          </a:p>
+          <a:p>
+            <a:pPr algn="l"/>
+            <a:r>
+              <a:rPr sz="800" b="0" i="0">
+                <a:solidFill>
+                  <a:srgbClr val="6B6A63"/>
+                </a:solidFill>
+                <a:latin typeface="Times New Roman"/>
+              </a:rPr>
+              <a:t>behavioral evaluation only —</a:t>
+            </a:r>
+          </a:p>
+          <a:p>
+            <a:pPr algn="l"/>
+            <a:r>
+              <a:rPr sz="800" b="0" i="0">
+                <a:solidFill>
+                  <a:srgbClr val="6B6A63"/>
+                </a:solidFill>
+                <a:latin typeface="Times New Roman"/>
+              </a:rPr>
+              <a:t>no benchmark-specific tuning</a:t>
+            </a:r>
+          </a:p>
+        </p:txBody>
+      </p:sp>
+      <p:cxnSp>
+        <p:nvCxnSpPr>
+          <p:cNvPr id="106" name="Connector 105"/>
+          <p:cNvCxnSpPr/>
+          <p:nvPr/>
+        </p:nvCxnSpPr>
+        <p:spPr>
+          <a:xfrm>
+            <a:off x="11292840" y="3785615"/>
+            <a:ext cx="64008" cy="1042417"/>
+          </a:xfrm>
+          <a:prstGeom prst="line">
+            <a:avLst/>
+          </a:prstGeom>
+          <a:ln w="20320">
+            <a:solidFill>
+              <a:srgbClr val="8C8C8C"/>
+            </a:solidFill>
+            <a:tailEnd type="triangle" w="med" len="med"/>
           </a:ln>
           <a:effectLst/>
         </p:spPr>

--- a/paper/figs/fig1_pipeline.pptx
+++ b/paper/figs/fig1_pipeline.pptx
@@ -3096,8 +3096,8 @@
         </p:nvSpPr>
         <p:spPr>
           <a:xfrm>
-            <a:off x="164592" y="365760"/>
-            <a:ext cx="2212848" cy="1847088"/>
+            <a:off x="137160" y="384048"/>
+            <a:ext cx="2423160" cy="6035040"/>
           </a:xfrm>
           <a:prstGeom prst="roundRect">
             <a:avLst>
@@ -3105,9 +3105,9 @@
             </a:avLst>
           </a:prstGeom>
           <a:solidFill>
-            <a:srgbClr val="EDECE7"/>
-          </a:solidFill>
-          <a:ln w="15240">
+            <a:srgbClr val="FCFBF9"/>
+          </a:solidFill>
+          <a:ln w="17780">
             <a:solidFill>
               <a:srgbClr val="8C8C8C"/>
             </a:solidFill>
@@ -3124,14 +3124,413 @@
       </p:sp>
       <p:sp>
         <p:nvSpPr>
-          <p:cNvPr id="3" name="TextBox 2"/>
+          <p:cNvPr id="3" name="Rounded Rectangle 2"/>
+          <p:cNvSpPr/>
+          <p:nvPr/>
+        </p:nvSpPr>
+        <p:spPr>
+          <a:xfrm>
+            <a:off x="265176" y="512064"/>
+            <a:ext cx="2167128" cy="512064"/>
+          </a:xfrm>
+          <a:prstGeom prst="roundRect">
+            <a:avLst>
+              <a:gd name="adj" fmla="val 30000"/>
+            </a:avLst>
+          </a:prstGeom>
+          <a:solidFill>
+            <a:srgbClr val="1F1F1E"/>
+          </a:solidFill>
+          <a:ln>
+            <a:noFill/>
+          </a:ln>
+          <a:effectLst/>
+        </p:spPr>
+        <p:txBody>
+          <a:bodyPr rtlCol="0" anchor="ctr" lIns="9000" rIns="9000" tIns="4500" bIns="4500" wrap="square"/>
+          <a:lstStyle/>
+          <a:p>
+            <a:pPr algn="ctr"/>
+            <a:r>
+              <a:rPr sz="1400" b="1" i="0">
+                <a:solidFill>
+                  <a:srgbClr val="FFFFFF"/>
+                </a:solidFill>
+                <a:latin typeface="Times New Roman"/>
+              </a:rPr>
+              <a:t>Gradient Fingerprints</a:t>
+            </a:r>
+          </a:p>
+        </p:txBody>
+      </p:sp>
+      <p:sp>
+        <p:nvSpPr>
+          <p:cNvPr id="4" name="Rounded Rectangle 3"/>
+          <p:cNvSpPr/>
+          <p:nvPr/>
+        </p:nvSpPr>
+        <p:spPr>
+          <a:xfrm>
+            <a:off x="2761488" y="384048"/>
+            <a:ext cx="2423160" cy="6035040"/>
+          </a:xfrm>
+          <a:prstGeom prst="roundRect">
+            <a:avLst>
+              <a:gd name="adj" fmla="val 6000"/>
+            </a:avLst>
+          </a:prstGeom>
+          <a:solidFill>
+            <a:srgbClr val="FCFBF9"/>
+          </a:solidFill>
+          <a:ln w="17780">
+            <a:solidFill>
+              <a:srgbClr val="8C8C8C"/>
+            </a:solidFill>
+          </a:ln>
+          <a:effectLst/>
+        </p:spPr>
+        <p:txBody>
+          <a:bodyPr rtlCol="0" anchor="ctr"/>
+          <a:lstStyle/>
+          <a:p>
+            <a:pPr algn="ctr"/>
+          </a:p>
+        </p:txBody>
+      </p:sp>
+      <p:sp>
+        <p:nvSpPr>
+          <p:cNvPr id="5" name="Rounded Rectangle 4"/>
+          <p:cNvSpPr/>
+          <p:nvPr/>
+        </p:nvSpPr>
+        <p:spPr>
+          <a:xfrm>
+            <a:off x="2889504" y="512064"/>
+            <a:ext cx="2167128" cy="512064"/>
+          </a:xfrm>
+          <a:prstGeom prst="roundRect">
+            <a:avLst>
+              <a:gd name="adj" fmla="val 30000"/>
+            </a:avLst>
+          </a:prstGeom>
+          <a:solidFill>
+            <a:srgbClr val="1F1F1E"/>
+          </a:solidFill>
+          <a:ln>
+            <a:noFill/>
+          </a:ln>
+          <a:effectLst/>
+        </p:spPr>
+        <p:txBody>
+          <a:bodyPr rtlCol="0" anchor="ctr" lIns="9000" rIns="9000" tIns="4500" bIns="4500" wrap="square"/>
+          <a:lstStyle/>
+          <a:p>
+            <a:pPr algn="ctr"/>
+            <a:r>
+              <a:rPr sz="1400" b="1" i="0">
+                <a:solidFill>
+                  <a:srgbClr val="FFFFFF"/>
+                </a:solidFill>
+                <a:latin typeface="Times New Roman"/>
+              </a:rPr>
+              <a:t>Capability Atoms</a:t>
+            </a:r>
+          </a:p>
+        </p:txBody>
+      </p:sp>
+      <p:sp>
+        <p:nvSpPr>
+          <p:cNvPr id="6" name="Rounded Rectangle 5"/>
+          <p:cNvSpPr/>
+          <p:nvPr/>
+        </p:nvSpPr>
+        <p:spPr>
+          <a:xfrm>
+            <a:off x="5385816" y="384048"/>
+            <a:ext cx="3840480" cy="6035040"/>
+          </a:xfrm>
+          <a:prstGeom prst="roundRect">
+            <a:avLst>
+              <a:gd name="adj" fmla="val 6000"/>
+            </a:avLst>
+          </a:prstGeom>
+          <a:solidFill>
+            <a:srgbClr val="FCFBF9"/>
+          </a:solidFill>
+          <a:ln w="17780">
+            <a:solidFill>
+              <a:srgbClr val="8C8C8C"/>
+            </a:solidFill>
+          </a:ln>
+          <a:effectLst/>
+        </p:spPr>
+        <p:txBody>
+          <a:bodyPr rtlCol="0" anchor="ctr"/>
+          <a:lstStyle/>
+          <a:p>
+            <a:pPr algn="ctr"/>
+          </a:p>
+        </p:txBody>
+      </p:sp>
+      <p:sp>
+        <p:nvSpPr>
+          <p:cNvPr id="7" name="Rounded Rectangle 6"/>
+          <p:cNvSpPr/>
+          <p:nvPr/>
+        </p:nvSpPr>
+        <p:spPr>
+          <a:xfrm>
+            <a:off x="5513831" y="512064"/>
+            <a:ext cx="3584448" cy="512064"/>
+          </a:xfrm>
+          <a:prstGeom prst="roundRect">
+            <a:avLst>
+              <a:gd name="adj" fmla="val 30000"/>
+            </a:avLst>
+          </a:prstGeom>
+          <a:solidFill>
+            <a:srgbClr val="1F1F1E"/>
+          </a:solidFill>
+          <a:ln>
+            <a:noFill/>
+          </a:ln>
+          <a:effectLst/>
+        </p:spPr>
+        <p:txBody>
+          <a:bodyPr rtlCol="0" anchor="ctr" lIns="9000" rIns="9000" tIns="4500" bIns="4500" wrap="square"/>
+          <a:lstStyle/>
+          <a:p>
+            <a:pPr algn="ctr"/>
+            <a:r>
+              <a:rPr sz="1400" b="1" i="0">
+                <a:solidFill>
+                  <a:srgbClr val="FFFFFF"/>
+                </a:solidFill>
+                <a:latin typeface="Times New Roman"/>
+              </a:rPr>
+              <a:t>Market-Clearing Selection</a:t>
+            </a:r>
+          </a:p>
+        </p:txBody>
+      </p:sp>
+      <p:sp>
+        <p:nvSpPr>
+          <p:cNvPr id="8" name="Rounded Rectangle 7"/>
+          <p:cNvSpPr/>
+          <p:nvPr/>
+        </p:nvSpPr>
+        <p:spPr>
+          <a:xfrm>
+            <a:off x="9427464" y="384048"/>
+            <a:ext cx="2651760" cy="6035040"/>
+          </a:xfrm>
+          <a:prstGeom prst="roundRect">
+            <a:avLst>
+              <a:gd name="adj" fmla="val 6000"/>
+            </a:avLst>
+          </a:prstGeom>
+          <a:solidFill>
+            <a:srgbClr val="FCFBF9"/>
+          </a:solidFill>
+          <a:ln w="17780">
+            <a:solidFill>
+              <a:srgbClr val="8C8C8C"/>
+            </a:solidFill>
+          </a:ln>
+          <a:effectLst/>
+        </p:spPr>
+        <p:txBody>
+          <a:bodyPr rtlCol="0" anchor="ctr"/>
+          <a:lstStyle/>
+          <a:p>
+            <a:pPr algn="ctr"/>
+          </a:p>
+        </p:txBody>
+      </p:sp>
+      <p:sp>
+        <p:nvSpPr>
+          <p:cNvPr id="9" name="Rounded Rectangle 8"/>
+          <p:cNvSpPr/>
+          <p:nvPr/>
+        </p:nvSpPr>
+        <p:spPr>
+          <a:xfrm>
+            <a:off x="9555480" y="512064"/>
+            <a:ext cx="2395728" cy="512064"/>
+          </a:xfrm>
+          <a:prstGeom prst="roundRect">
+            <a:avLst>
+              <a:gd name="adj" fmla="val 30000"/>
+            </a:avLst>
+          </a:prstGeom>
+          <a:solidFill>
+            <a:srgbClr val="1F1F1E"/>
+          </a:solidFill>
+          <a:ln>
+            <a:noFill/>
+          </a:ln>
+          <a:effectLst/>
+        </p:spPr>
+        <p:txBody>
+          <a:bodyPr rtlCol="0" anchor="ctr" lIns="9000" rIns="9000" tIns="4500" bIns="4500" wrap="square"/>
+          <a:lstStyle/>
+          <a:p>
+            <a:pPr algn="ctr"/>
+            <a:r>
+              <a:rPr sz="1400" b="1" i="0">
+                <a:solidFill>
+                  <a:srgbClr val="FFFFFF"/>
+                </a:solidFill>
+                <a:latin typeface="Times New Roman"/>
+              </a:rPr>
+              <a:t>Certified Agent</a:t>
+            </a:r>
+          </a:p>
+        </p:txBody>
+      </p:sp>
+      <p:sp>
+        <p:nvSpPr>
+          <p:cNvPr id="10" name="Right Arrow 9"/>
+          <p:cNvSpPr/>
+          <p:nvPr/>
+        </p:nvSpPr>
+        <p:spPr>
+          <a:xfrm>
+            <a:off x="2532888" y="3063240"/>
+            <a:ext cx="329184" cy="566928"/>
+          </a:xfrm>
+          <a:prstGeom prst="rightArrow">
+            <a:avLst>
+              <a:gd name="adj1" fmla="val 55000"/>
+              <a:gd name="adj2" fmla="val 55000"/>
+            </a:avLst>
+          </a:prstGeom>
+          <a:solidFill>
+            <a:srgbClr val="8C8C8C"/>
+          </a:solidFill>
+          <a:ln>
+            <a:noFill/>
+          </a:ln>
+          <a:effectLst/>
+        </p:spPr>
+        <p:txBody>
+          <a:bodyPr rtlCol="0" anchor="ctr"/>
+          <a:lstStyle/>
+          <a:p>
+            <a:pPr algn="ctr"/>
+          </a:p>
+        </p:txBody>
+      </p:sp>
+      <p:sp>
+        <p:nvSpPr>
+          <p:cNvPr id="11" name="Right Arrow 10"/>
+          <p:cNvSpPr/>
+          <p:nvPr/>
+        </p:nvSpPr>
+        <p:spPr>
+          <a:xfrm>
+            <a:off x="5157216" y="3063240"/>
+            <a:ext cx="329184" cy="566928"/>
+          </a:xfrm>
+          <a:prstGeom prst="rightArrow">
+            <a:avLst>
+              <a:gd name="adj1" fmla="val 55000"/>
+              <a:gd name="adj2" fmla="val 55000"/>
+            </a:avLst>
+          </a:prstGeom>
+          <a:solidFill>
+            <a:srgbClr val="8C8C8C"/>
+          </a:solidFill>
+          <a:ln>
+            <a:noFill/>
+          </a:ln>
+          <a:effectLst/>
+        </p:spPr>
+        <p:txBody>
+          <a:bodyPr rtlCol="0" anchor="ctr"/>
+          <a:lstStyle/>
+          <a:p>
+            <a:pPr algn="ctr"/>
+          </a:p>
+        </p:txBody>
+      </p:sp>
+      <p:sp>
+        <p:nvSpPr>
+          <p:cNvPr id="12" name="Right Arrow 11"/>
+          <p:cNvSpPr/>
+          <p:nvPr/>
+        </p:nvSpPr>
+        <p:spPr>
+          <a:xfrm>
+            <a:off x="9198864" y="3063240"/>
+            <a:ext cx="329184" cy="566928"/>
+          </a:xfrm>
+          <a:prstGeom prst="rightArrow">
+            <a:avLst>
+              <a:gd name="adj1" fmla="val 55000"/>
+              <a:gd name="adj2" fmla="val 55000"/>
+            </a:avLst>
+          </a:prstGeom>
+          <a:solidFill>
+            <a:srgbClr val="8C8C8C"/>
+          </a:solidFill>
+          <a:ln>
+            <a:noFill/>
+          </a:ln>
+          <a:effectLst/>
+        </p:spPr>
+        <p:txBody>
+          <a:bodyPr rtlCol="0" anchor="ctr"/>
+          <a:lstStyle/>
+          <a:p>
+            <a:pPr algn="ctr"/>
+          </a:p>
+        </p:txBody>
+      </p:sp>
+      <p:sp>
+        <p:nvSpPr>
+          <p:cNvPr id="13" name="Rounded Rectangle 12"/>
+          <p:cNvSpPr/>
+          <p:nvPr/>
+        </p:nvSpPr>
+        <p:spPr>
+          <a:xfrm>
+            <a:off x="502920" y="1463040"/>
+            <a:ext cx="1691640" cy="1188720"/>
+          </a:xfrm>
+          <a:prstGeom prst="roundRect">
+            <a:avLst>
+              <a:gd name="adj" fmla="val 25000"/>
+            </a:avLst>
+          </a:prstGeom>
+          <a:solidFill>
+            <a:srgbClr val="F7F6F2"/>
+          </a:solidFill>
+          <a:ln w="16510">
+            <a:solidFill>
+              <a:srgbClr val="8C8C8C"/>
+            </a:solidFill>
+          </a:ln>
+          <a:effectLst/>
+        </p:spPr>
+        <p:txBody>
+          <a:bodyPr rtlCol="0" anchor="ctr"/>
+          <a:lstStyle/>
+          <a:p>
+            <a:pPr algn="ctr"/>
+          </a:p>
+        </p:txBody>
+      </p:sp>
+      <p:sp>
+        <p:nvSpPr>
+          <p:cNvPr id="14" name="TextBox 13"/>
           <p:cNvSpPr txBox="1"/>
           <p:nvPr/>
         </p:nvSpPr>
         <p:spPr>
           <a:xfrm>
-            <a:off x="274320" y="438912"/>
-            <a:ext cx="1920240" cy="256032"/>
+            <a:off x="640080" y="1645920"/>
+            <a:ext cx="1463040" cy="868680"/>
           </a:xfrm>
           <a:prstGeom prst="rect">
             <a:avLst/>
@@ -3146,122 +3545,507 @@
           <a:p>
             <a:pPr algn="l"/>
             <a:r>
-              <a:rPr sz="950" b="1" i="0">
+              <a:rPr sz="1000" b="0" i="0">
                 <a:solidFill>
                   <a:srgbClr val="1F1F1E"/>
                 </a:solidFill>
                 <a:latin typeface="Times New Roman"/>
               </a:rPr>
-              <a:t>TASK EVIDENCE</a:t>
-            </a:r>
-          </a:p>
-        </p:txBody>
-      </p:sp>
-      <p:sp>
-        <p:nvSpPr>
-          <p:cNvPr id="4" name="Rounded Rectangle 3"/>
-          <p:cNvSpPr/>
-          <p:nvPr/>
-        </p:nvSpPr>
-        <p:spPr>
-          <a:xfrm>
-            <a:off x="292608" y="731520"/>
-            <a:ext cx="1956816" cy="438912"/>
-          </a:xfrm>
-          <a:prstGeom prst="roundRect">
-            <a:avLst>
-              <a:gd name="adj" fmla="val 15000"/>
-            </a:avLst>
-          </a:prstGeom>
-          <a:solidFill>
-            <a:srgbClr val="E3EFDA"/>
-          </a:solidFill>
-          <a:ln w="15240">
-            <a:solidFill>
-              <a:srgbClr val="779E62"/>
-            </a:solidFill>
-          </a:ln>
-          <a:effectLst/>
-        </p:spPr>
-        <p:txBody>
-          <a:bodyPr rtlCol="0" anchor="ctr" lIns="9000" rIns="9000" tIns="4500" bIns="4500" wrap="square"/>
-          <a:lstStyle/>
-          <a:p>
-            <a:pPr algn="ctr"/>
-            <a:r>
-              <a:rPr sz="850" b="1" i="0">
+              <a:t>"How many members</a:t>
+            </a:r>
+          </a:p>
+          <a:p>
+            <a:pPr algn="l"/>
+            <a:r>
+              <a:rPr sz="1000" b="0" i="0">
                 <a:solidFill>
                   <a:srgbClr val="1F1F1E"/>
                 </a:solidFill>
                 <a:latin typeface="Times New Roman"/>
               </a:rPr>
-              <a:t>k example queries</a:t>
-            </a:r>
-          </a:p>
-        </p:txBody>
-      </p:sp>
-      <p:sp>
-        <p:nvSpPr>
-          <p:cNvPr id="5" name="Rounded Rectangle 4"/>
-          <p:cNvSpPr/>
-          <p:nvPr/>
-        </p:nvSpPr>
-        <p:spPr>
-          <a:xfrm>
-            <a:off x="292608" y="1225296"/>
-            <a:ext cx="1956816" cy="438912"/>
-          </a:xfrm>
-          <a:prstGeom prst="roundRect">
-            <a:avLst>
-              <a:gd name="adj" fmla="val 15000"/>
-            </a:avLst>
-          </a:prstGeom>
-          <a:solidFill>
-            <a:srgbClr val="FFF0C2"/>
-          </a:solidFill>
-          <a:ln w="15240">
-            <a:solidFill>
-              <a:srgbClr val="C9A22A"/>
-            </a:solidFill>
-          </a:ln>
-          <a:effectLst/>
-        </p:spPr>
-        <p:txBody>
-          <a:bodyPr rtlCol="0" anchor="ctr" lIns="9000" rIns="9000" tIns="4500" bIns="4500" wrap="square"/>
-          <a:lstStyle/>
-          <a:p>
-            <a:pPr algn="ctr"/>
-            <a:r>
-              <a:rPr sz="850" b="1" i="0">
+              <a:t>does each club</a:t>
+            </a:r>
+          </a:p>
+          <a:p>
+            <a:pPr algn="l"/>
+            <a:r>
+              <a:rPr sz="1000" b="0" i="0">
                 <a:solidFill>
                   <a:srgbClr val="1F1F1E"/>
                 </a:solidFill>
                 <a:latin typeface="Times New Roman"/>
               </a:rPr>
-              <a:t>calibration split: gate τ</a:t>
-            </a:r>
-          </a:p>
-        </p:txBody>
-      </p:sp>
-      <p:sp>
-        <p:nvSpPr>
-          <p:cNvPr id="6" name="Rounded Rectangle 5"/>
+              <a:t>have?"</a:t>
+            </a:r>
+          </a:p>
+        </p:txBody>
+      </p:sp>
+      <p:sp>
+        <p:nvSpPr>
+          <p:cNvPr id="15" name="Down Arrow 14"/>
           <p:cNvSpPr/>
           <p:nvPr/>
         </p:nvSpPr>
         <p:spPr>
           <a:xfrm>
-            <a:off x="292608" y="1719072"/>
-            <a:ext cx="1956816" cy="402336"/>
+            <a:off x="1261872" y="2834640"/>
+            <a:ext cx="164592" cy="502920"/>
+          </a:xfrm>
+          <a:prstGeom prst="downArrow">
+            <a:avLst/>
+          </a:prstGeom>
+          <a:solidFill>
+            <a:srgbClr val="4C72B0"/>
+          </a:solidFill>
+          <a:ln>
+            <a:noFill/>
+          </a:ln>
+          <a:effectLst/>
+        </p:spPr>
+        <p:txBody>
+          <a:bodyPr rtlCol="0" anchor="ctr"/>
+          <a:lstStyle/>
+          <a:p>
+            <a:pPr algn="ctr"/>
+          </a:p>
+        </p:txBody>
+      </p:sp>
+      <p:sp>
+        <p:nvSpPr>
+          <p:cNvPr id="16" name="TextBox 15"/>
+          <p:cNvSpPr txBox="1"/>
+          <p:nvPr/>
+        </p:nvSpPr>
+        <p:spPr>
+          <a:xfrm>
+            <a:off x="320040" y="3401568"/>
+            <a:ext cx="2103120" cy="274320"/>
+          </a:xfrm>
+          <a:prstGeom prst="rect">
+            <a:avLst/>
+          </a:prstGeom>
+          <a:noFill/>
+        </p:spPr>
+        <p:txBody>
+          <a:bodyPr wrap="square" lIns="0" rIns="0" tIns="0" bIns="0">
+            <a:spAutoFit/>
+          </a:bodyPr>
+          <a:lstStyle/>
+          <a:p>
+            <a:pPr algn="ctr"/>
+            <a:r>
+              <a:rPr sz="1100" b="1" i="0">
+                <a:solidFill>
+                  <a:srgbClr val="4C72B0"/>
+                </a:solidFill>
+                <a:latin typeface="Times New Roman"/>
+              </a:rPr>
+              <a:t>one backward pass</a:t>
+            </a:r>
+          </a:p>
+        </p:txBody>
+      </p:sp>
+      <p:sp>
+        <p:nvSpPr>
+          <p:cNvPr id="17" name="Rounded Rectangle 16"/>
+          <p:cNvSpPr/>
+          <p:nvPr/>
+        </p:nvSpPr>
+        <p:spPr>
+          <a:xfrm>
+            <a:off x="603504" y="3977639"/>
+            <a:ext cx="100584" cy="1005840"/>
           </a:xfrm>
           <a:prstGeom prst="roundRect">
             <a:avLst>
-              <a:gd name="adj" fmla="val 15000"/>
+              <a:gd name="adj" fmla="val 30000"/>
             </a:avLst>
           </a:prstGeom>
           <a:solidFill>
-            <a:srgbClr val="EDECE7"/>
-          </a:solidFill>
+            <a:srgbClr val="4C72B0"/>
+          </a:solidFill>
+          <a:ln>
+            <a:noFill/>
+          </a:ln>
+          <a:effectLst/>
+        </p:spPr>
+        <p:txBody>
+          <a:bodyPr rtlCol="0" anchor="ctr"/>
+          <a:lstStyle/>
+          <a:p>
+            <a:pPr algn="ctr"/>
+          </a:p>
+        </p:txBody>
+      </p:sp>
+      <p:sp>
+        <p:nvSpPr>
+          <p:cNvPr id="18" name="Rounded Rectangle 17"/>
+          <p:cNvSpPr/>
+          <p:nvPr/>
+        </p:nvSpPr>
+        <p:spPr>
+          <a:xfrm>
+            <a:off x="736092" y="3977639"/>
+            <a:ext cx="100584" cy="1005840"/>
+          </a:xfrm>
+          <a:prstGeom prst="roundRect">
+            <a:avLst>
+              <a:gd name="adj" fmla="val 30000"/>
+            </a:avLst>
+          </a:prstGeom>
+          <a:solidFill>
+            <a:srgbClr val="E8E6E1"/>
+          </a:solidFill>
+          <a:ln>
+            <a:noFill/>
+          </a:ln>
+          <a:effectLst/>
+        </p:spPr>
+        <p:txBody>
+          <a:bodyPr rtlCol="0" anchor="ctr"/>
+          <a:lstStyle/>
+          <a:p>
+            <a:pPr algn="ctr"/>
+          </a:p>
+        </p:txBody>
+      </p:sp>
+      <p:sp>
+        <p:nvSpPr>
+          <p:cNvPr id="19" name="Rounded Rectangle 18"/>
+          <p:cNvSpPr/>
+          <p:nvPr/>
+        </p:nvSpPr>
+        <p:spPr>
+          <a:xfrm>
+            <a:off x="868680" y="3977639"/>
+            <a:ext cx="100584" cy="1005840"/>
+          </a:xfrm>
+          <a:prstGeom prst="roundRect">
+            <a:avLst>
+              <a:gd name="adj" fmla="val 30000"/>
+            </a:avLst>
+          </a:prstGeom>
+          <a:solidFill>
+            <a:srgbClr val="7BA7D7"/>
+          </a:solidFill>
+          <a:ln>
+            <a:noFill/>
+          </a:ln>
+          <a:effectLst/>
+        </p:spPr>
+        <p:txBody>
+          <a:bodyPr rtlCol="0" anchor="ctr"/>
+          <a:lstStyle/>
+          <a:p>
+            <a:pPr algn="ctr"/>
+          </a:p>
+        </p:txBody>
+      </p:sp>
+      <p:sp>
+        <p:nvSpPr>
+          <p:cNvPr id="20" name="Rounded Rectangle 19"/>
+          <p:cNvSpPr/>
+          <p:nvPr/>
+        </p:nvSpPr>
+        <p:spPr>
+          <a:xfrm>
+            <a:off x="1001268" y="3977639"/>
+            <a:ext cx="100584" cy="1005840"/>
+          </a:xfrm>
+          <a:prstGeom prst="roundRect">
+            <a:avLst>
+              <a:gd name="adj" fmla="val 30000"/>
+            </a:avLst>
+          </a:prstGeom>
+          <a:solidFill>
+            <a:srgbClr val="5F9EA0"/>
+          </a:solidFill>
+          <a:ln>
+            <a:noFill/>
+          </a:ln>
+          <a:effectLst/>
+        </p:spPr>
+        <p:txBody>
+          <a:bodyPr rtlCol="0" anchor="ctr"/>
+          <a:lstStyle/>
+          <a:p>
+            <a:pPr algn="ctr"/>
+          </a:p>
+        </p:txBody>
+      </p:sp>
+      <p:sp>
+        <p:nvSpPr>
+          <p:cNvPr id="21" name="Rounded Rectangle 20"/>
+          <p:cNvSpPr/>
+          <p:nvPr/>
+        </p:nvSpPr>
+        <p:spPr>
+          <a:xfrm>
+            <a:off x="1133856" y="3977639"/>
+            <a:ext cx="100584" cy="1005840"/>
+          </a:xfrm>
+          <a:prstGeom prst="roundRect">
+            <a:avLst>
+              <a:gd name="adj" fmla="val 30000"/>
+            </a:avLst>
+          </a:prstGeom>
+          <a:solidFill>
+            <a:srgbClr val="E8E6E1"/>
+          </a:solidFill>
+          <a:ln>
+            <a:noFill/>
+          </a:ln>
+          <a:effectLst/>
+        </p:spPr>
+        <p:txBody>
+          <a:bodyPr rtlCol="0" anchor="ctr"/>
+          <a:lstStyle/>
+          <a:p>
+            <a:pPr algn="ctr"/>
+          </a:p>
+        </p:txBody>
+      </p:sp>
+      <p:sp>
+        <p:nvSpPr>
+          <p:cNvPr id="22" name="Rounded Rectangle 21"/>
+          <p:cNvSpPr/>
+          <p:nvPr/>
+        </p:nvSpPr>
+        <p:spPr>
+          <a:xfrm>
+            <a:off x="1266444" y="3977639"/>
+            <a:ext cx="100584" cy="1005840"/>
+          </a:xfrm>
+          <a:prstGeom prst="roundRect">
+            <a:avLst>
+              <a:gd name="adj" fmla="val 30000"/>
+            </a:avLst>
+          </a:prstGeom>
+          <a:solidFill>
+            <a:srgbClr val="4C72B0"/>
+          </a:solidFill>
+          <a:ln>
+            <a:noFill/>
+          </a:ln>
+          <a:effectLst/>
+        </p:spPr>
+        <p:txBody>
+          <a:bodyPr rtlCol="0" anchor="ctr"/>
+          <a:lstStyle/>
+          <a:p>
+            <a:pPr algn="ctr"/>
+          </a:p>
+        </p:txBody>
+      </p:sp>
+      <p:sp>
+        <p:nvSpPr>
+          <p:cNvPr id="23" name="Rounded Rectangle 22"/>
+          <p:cNvSpPr/>
+          <p:nvPr/>
+        </p:nvSpPr>
+        <p:spPr>
+          <a:xfrm>
+            <a:off x="1399031" y="3977639"/>
+            <a:ext cx="100584" cy="1005840"/>
+          </a:xfrm>
+          <a:prstGeom prst="roundRect">
+            <a:avLst>
+              <a:gd name="adj" fmla="val 30000"/>
+            </a:avLst>
+          </a:prstGeom>
+          <a:solidFill>
+            <a:srgbClr val="E8E6E1"/>
+          </a:solidFill>
+          <a:ln>
+            <a:noFill/>
+          </a:ln>
+          <a:effectLst/>
+        </p:spPr>
+        <p:txBody>
+          <a:bodyPr rtlCol="0" anchor="ctr"/>
+          <a:lstStyle/>
+          <a:p>
+            <a:pPr algn="ctr"/>
+          </a:p>
+        </p:txBody>
+      </p:sp>
+      <p:sp>
+        <p:nvSpPr>
+          <p:cNvPr id="24" name="Rounded Rectangle 23"/>
+          <p:cNvSpPr/>
+          <p:nvPr/>
+        </p:nvSpPr>
+        <p:spPr>
+          <a:xfrm>
+            <a:off x="1531619" y="3977639"/>
+            <a:ext cx="100584" cy="1005840"/>
+          </a:xfrm>
+          <a:prstGeom prst="roundRect">
+            <a:avLst>
+              <a:gd name="adj" fmla="val 30000"/>
+            </a:avLst>
+          </a:prstGeom>
+          <a:solidFill>
+            <a:srgbClr val="5F9EA0"/>
+          </a:solidFill>
+          <a:ln>
+            <a:noFill/>
+          </a:ln>
+          <a:effectLst/>
+        </p:spPr>
+        <p:txBody>
+          <a:bodyPr rtlCol="0" anchor="ctr"/>
+          <a:lstStyle/>
+          <a:p>
+            <a:pPr algn="ctr"/>
+          </a:p>
+        </p:txBody>
+      </p:sp>
+      <p:sp>
+        <p:nvSpPr>
+          <p:cNvPr id="25" name="Rounded Rectangle 24"/>
+          <p:cNvSpPr/>
+          <p:nvPr/>
+        </p:nvSpPr>
+        <p:spPr>
+          <a:xfrm>
+            <a:off x="1664207" y="3977639"/>
+            <a:ext cx="100584" cy="1005840"/>
+          </a:xfrm>
+          <a:prstGeom prst="roundRect">
+            <a:avLst>
+              <a:gd name="adj" fmla="val 30000"/>
+            </a:avLst>
+          </a:prstGeom>
+          <a:solidFill>
+            <a:srgbClr val="7BA7D7"/>
+          </a:solidFill>
+          <a:ln>
+            <a:noFill/>
+          </a:ln>
+          <a:effectLst/>
+        </p:spPr>
+        <p:txBody>
+          <a:bodyPr rtlCol="0" anchor="ctr"/>
+          <a:lstStyle/>
+          <a:p>
+            <a:pPr algn="ctr"/>
+          </a:p>
+        </p:txBody>
+      </p:sp>
+      <p:sp>
+        <p:nvSpPr>
+          <p:cNvPr id="26" name="Rounded Rectangle 25"/>
+          <p:cNvSpPr/>
+          <p:nvPr/>
+        </p:nvSpPr>
+        <p:spPr>
+          <a:xfrm>
+            <a:off x="1796795" y="3977639"/>
+            <a:ext cx="100584" cy="1005840"/>
+          </a:xfrm>
+          <a:prstGeom prst="roundRect">
+            <a:avLst>
+              <a:gd name="adj" fmla="val 30000"/>
+            </a:avLst>
+          </a:prstGeom>
+          <a:solidFill>
+            <a:srgbClr val="E8E6E1"/>
+          </a:solidFill>
+          <a:ln>
+            <a:noFill/>
+          </a:ln>
+          <a:effectLst/>
+        </p:spPr>
+        <p:txBody>
+          <a:bodyPr rtlCol="0" anchor="ctr"/>
+          <a:lstStyle/>
+          <a:p>
+            <a:pPr algn="ctr"/>
+          </a:p>
+        </p:txBody>
+      </p:sp>
+      <p:sp>
+        <p:nvSpPr>
+          <p:cNvPr id="27" name="Rounded Rectangle 26"/>
+          <p:cNvSpPr/>
+          <p:nvPr/>
+        </p:nvSpPr>
+        <p:spPr>
+          <a:xfrm>
+            <a:off x="1929384" y="3977639"/>
+            <a:ext cx="100584" cy="1005840"/>
+          </a:xfrm>
+          <a:prstGeom prst="roundRect">
+            <a:avLst>
+              <a:gd name="adj" fmla="val 30000"/>
+            </a:avLst>
+          </a:prstGeom>
+          <a:solidFill>
+            <a:srgbClr val="4C72B0"/>
+          </a:solidFill>
+          <a:ln>
+            <a:noFill/>
+          </a:ln>
+          <a:effectLst/>
+        </p:spPr>
+        <p:txBody>
+          <a:bodyPr rtlCol="0" anchor="ctr"/>
+          <a:lstStyle/>
+          <a:p>
+            <a:pPr algn="ctr"/>
+          </a:p>
+        </p:txBody>
+      </p:sp>
+      <p:sp>
+        <p:nvSpPr>
+          <p:cNvPr id="28" name="Rounded Rectangle 27"/>
+          <p:cNvSpPr/>
+          <p:nvPr/>
+        </p:nvSpPr>
+        <p:spPr>
+          <a:xfrm>
+            <a:off x="2061972" y="3977639"/>
+            <a:ext cx="100584" cy="1005840"/>
+          </a:xfrm>
+          <a:prstGeom prst="roundRect">
+            <a:avLst>
+              <a:gd name="adj" fmla="val 30000"/>
+            </a:avLst>
+          </a:prstGeom>
+          <a:solidFill>
+            <a:srgbClr val="E8E6E1"/>
+          </a:solidFill>
+          <a:ln>
+            <a:noFill/>
+          </a:ln>
+          <a:effectLst/>
+        </p:spPr>
+        <p:txBody>
+          <a:bodyPr rtlCol="0" anchor="ctr"/>
+          <a:lstStyle/>
+          <a:p>
+            <a:pPr algn="ctr"/>
+          </a:p>
+        </p:txBody>
+      </p:sp>
+      <p:sp>
+        <p:nvSpPr>
+          <p:cNvPr id="29" name="Rounded Rectangle 28"/>
+          <p:cNvSpPr/>
+          <p:nvPr/>
+        </p:nvSpPr>
+        <p:spPr>
+          <a:xfrm>
+            <a:off x="502920" y="3858768"/>
+            <a:ext cx="1755648" cy="1261872"/>
+          </a:xfrm>
+          <a:prstGeom prst="roundRect">
+            <a:avLst>
+              <a:gd name="adj" fmla="val 8000"/>
+            </a:avLst>
+          </a:prstGeom>
+          <a:noFill/>
           <a:ln w="15240">
             <a:solidFill>
               <a:srgbClr val="8C8C8C"/>
@@ -3270,218 +4054,58 @@
           <a:effectLst/>
         </p:spPr>
         <p:txBody>
-          <a:bodyPr rtlCol="0" anchor="ctr" lIns="9000" rIns="9000" tIns="4500" bIns="4500" wrap="square"/>
-          <a:lstStyle/>
-          <a:p>
-            <a:pPr algn="ctr"/>
-            <a:r>
-              <a:rPr sz="800" b="1" i="0">
+          <a:bodyPr rtlCol="0" anchor="ctr"/>
+          <a:lstStyle/>
+          <a:p>
+            <a:pPr algn="ctr"/>
+          </a:p>
+        </p:txBody>
+      </p:sp>
+      <p:sp>
+        <p:nvSpPr>
+          <p:cNvPr id="30" name="TextBox 29"/>
+          <p:cNvSpPr txBox="1"/>
+          <p:nvPr/>
+        </p:nvSpPr>
+        <p:spPr>
+          <a:xfrm>
+            <a:off x="320040" y="5303520"/>
+            <a:ext cx="2103120" cy="320040"/>
+          </a:xfrm>
+          <a:prstGeom prst="rect">
+            <a:avLst/>
+          </a:prstGeom>
+          <a:noFill/>
+        </p:spPr>
+        <p:txBody>
+          <a:bodyPr wrap="square" lIns="0" rIns="0" tIns="0" bIns="0">
+            <a:spAutoFit/>
+          </a:bodyPr>
+          <a:lstStyle/>
+          <a:p>
+            <a:pPr algn="ctr"/>
+            <a:r>
+              <a:rPr sz="1100" b="0" i="1">
                 <a:solidFill>
                   <a:srgbClr val="6B6A63"/>
                 </a:solidFill>
                 <a:latin typeface="Times New Roman"/>
               </a:rPr>
-              <a:t>held-out eval 🔒 locked</a:t>
-            </a:r>
-          </a:p>
-        </p:txBody>
-      </p:sp>
-      <p:sp>
-        <p:nvSpPr>
-          <p:cNvPr id="7" name="Rounded Rectangle 6"/>
-          <p:cNvSpPr/>
-          <p:nvPr/>
-        </p:nvSpPr>
-        <p:spPr>
-          <a:xfrm>
-            <a:off x="388620" y="2770632"/>
-            <a:ext cx="777240" cy="585216"/>
-          </a:xfrm>
-          <a:prstGeom prst="roundRect">
-            <a:avLst>
-              <a:gd name="adj" fmla="val 25000"/>
-            </a:avLst>
-          </a:prstGeom>
-          <a:solidFill>
-            <a:srgbClr val="EEF2F9"/>
-          </a:solidFill>
-          <a:ln w="20320">
-            <a:solidFill>
-              <a:srgbClr val="DD8452"/>
-            </a:solidFill>
-          </a:ln>
-          <a:effectLst/>
-        </p:spPr>
-        <p:txBody>
-          <a:bodyPr rtlCol="0" anchor="ctr"/>
-          <a:lstStyle/>
-          <a:p>
-            <a:pPr algn="ctr"/>
-          </a:p>
-        </p:txBody>
-      </p:sp>
-      <p:sp>
-        <p:nvSpPr>
-          <p:cNvPr id="8" name="Rectangle 7"/>
-          <p:cNvSpPr/>
-          <p:nvPr/>
-        </p:nvSpPr>
-        <p:spPr>
-          <a:xfrm>
-            <a:off x="766267" y="2642616"/>
-            <a:ext cx="21945" cy="128016"/>
-          </a:xfrm>
-          <a:prstGeom prst="rect">
-            <a:avLst/>
-          </a:prstGeom>
-          <a:solidFill>
-            <a:srgbClr val="DD8452"/>
-          </a:solidFill>
-          <a:ln>
-            <a:noFill/>
-          </a:ln>
-          <a:effectLst/>
-        </p:spPr>
-        <p:txBody>
-          <a:bodyPr rtlCol="0" anchor="ctr"/>
-          <a:lstStyle/>
-          <a:p>
-            <a:pPr algn="ctr"/>
-          </a:p>
-        </p:txBody>
-      </p:sp>
-      <p:sp>
-        <p:nvSpPr>
-          <p:cNvPr id="9" name="Oval 8"/>
-          <p:cNvSpPr/>
-          <p:nvPr/>
-        </p:nvSpPr>
-        <p:spPr>
-          <a:xfrm>
-            <a:off x="731519" y="2551176"/>
-            <a:ext cx="91440" cy="91440"/>
-          </a:xfrm>
-          <a:prstGeom prst="ellipse">
-            <a:avLst/>
-          </a:prstGeom>
-          <a:solidFill>
-            <a:srgbClr val="DD8452"/>
-          </a:solidFill>
-          <a:ln>
-            <a:noFill/>
-          </a:ln>
-          <a:effectLst/>
-        </p:spPr>
-        <p:txBody>
-          <a:bodyPr rtlCol="0" anchor="ctr"/>
-          <a:lstStyle/>
-          <a:p>
-            <a:pPr algn="ctr"/>
-          </a:p>
-        </p:txBody>
-      </p:sp>
-      <p:sp>
-        <p:nvSpPr>
-          <p:cNvPr id="10" name="Oval 9"/>
-          <p:cNvSpPr/>
-          <p:nvPr/>
-        </p:nvSpPr>
-        <p:spPr>
-          <a:xfrm>
-            <a:off x="596188" y="2963570"/>
-            <a:ext cx="82296" cy="82296"/>
-          </a:xfrm>
-          <a:prstGeom prst="ellipse">
-            <a:avLst/>
-          </a:prstGeom>
-          <a:solidFill>
-            <a:srgbClr val="DD8452"/>
-          </a:solidFill>
-          <a:ln>
-            <a:noFill/>
-          </a:ln>
-          <a:effectLst/>
-        </p:spPr>
-        <p:txBody>
-          <a:bodyPr rtlCol="0" anchor="ctr"/>
-          <a:lstStyle/>
-          <a:p>
-            <a:pPr algn="ctr"/>
-          </a:p>
-        </p:txBody>
-      </p:sp>
-      <p:sp>
-        <p:nvSpPr>
-          <p:cNvPr id="11" name="Oval 10"/>
-          <p:cNvSpPr/>
-          <p:nvPr/>
-        </p:nvSpPr>
-        <p:spPr>
-          <a:xfrm>
-            <a:off x="875995" y="2963570"/>
-            <a:ext cx="82296" cy="82296"/>
-          </a:xfrm>
-          <a:prstGeom prst="ellipse">
-            <a:avLst/>
-          </a:prstGeom>
-          <a:solidFill>
-            <a:srgbClr val="DD8452"/>
-          </a:solidFill>
-          <a:ln>
-            <a:noFill/>
-          </a:ln>
-          <a:effectLst/>
-        </p:spPr>
-        <p:txBody>
-          <a:bodyPr rtlCol="0" anchor="ctr"/>
-          <a:lstStyle/>
-          <a:p>
-            <a:pPr algn="ctr"/>
-          </a:p>
-        </p:txBody>
-      </p:sp>
-      <p:sp>
-        <p:nvSpPr>
-          <p:cNvPr id="12" name="Rounded Rectangle 11"/>
-          <p:cNvSpPr/>
-          <p:nvPr/>
-        </p:nvSpPr>
-        <p:spPr>
-          <a:xfrm>
-            <a:off x="668426" y="3133465"/>
-            <a:ext cx="217627" cy="27432"/>
-          </a:xfrm>
-          <a:prstGeom prst="roundRect">
-            <a:avLst>
-              <a:gd name="adj" fmla="val 50000"/>
-            </a:avLst>
-          </a:prstGeom>
-          <a:solidFill>
-            <a:srgbClr val="DD8452"/>
-          </a:solidFill>
-          <a:ln>
-            <a:noFill/>
-          </a:ln>
-          <a:effectLst/>
-        </p:spPr>
-        <p:txBody>
-          <a:bodyPr rtlCol="0" anchor="ctr"/>
-          <a:lstStyle/>
-          <a:p>
-            <a:pPr algn="ctr"/>
-          </a:p>
-        </p:txBody>
-      </p:sp>
-      <p:sp>
-        <p:nvSpPr>
-          <p:cNvPr id="13" name="TextBox 12"/>
+              <a:t>what must be learned</a:t>
+            </a:r>
+          </a:p>
+        </p:txBody>
+      </p:sp>
+      <p:sp>
+        <p:nvSpPr>
+          <p:cNvPr id="31" name="TextBox 30"/>
           <p:cNvSpPr txBox="1"/>
           <p:nvPr/>
         </p:nvSpPr>
         <p:spPr>
           <a:xfrm>
-            <a:off x="68580" y="3392424"/>
-            <a:ext cx="1417319" cy="256032"/>
+            <a:off x="2871216" y="1170432"/>
+            <a:ext cx="2194560" cy="274320"/>
           </a:xfrm>
           <a:prstGeom prst="rect">
             <a:avLst/>
@@ -3496,645 +4120,14 @@
           <a:p>
             <a:pPr algn="ctr"/>
             <a:r>
-              <a:rPr sz="850" b="1" i="0">
-                <a:solidFill>
-                  <a:srgbClr val="1F1F1E"/>
-                </a:solidFill>
-                <a:latin typeface="Times New Roman"/>
-              </a:rPr>
-              <a:t>Frozen Teacher ❄</a:t>
-            </a:r>
-          </a:p>
-        </p:txBody>
-      </p:sp>
-      <p:cxnSp>
-        <p:nvCxnSpPr>
-          <p:cNvPr id="14" name="Connector 13"/>
-          <p:cNvCxnSpPr/>
-          <p:nvPr/>
-        </p:nvCxnSpPr>
-        <p:spPr>
-          <a:xfrm>
-            <a:off x="1234440" y="3401568"/>
-            <a:ext cx="338328" cy="0"/>
-          </a:xfrm>
-          <a:prstGeom prst="line">
-            <a:avLst/>
-          </a:prstGeom>
-          <a:ln w="22860">
-            <a:solidFill>
-              <a:srgbClr val="8C8C8C"/>
-            </a:solidFill>
-            <a:tailEnd type="triangle" w="med" len="med"/>
-          </a:ln>
-          <a:effectLst/>
-        </p:spPr>
-      </p:cxnSp>
-      <p:sp>
-        <p:nvSpPr>
-          <p:cNvPr id="15" name="Folded Corner 14"/>
-          <p:cNvSpPr/>
-          <p:nvPr/>
-        </p:nvSpPr>
-        <p:spPr>
-          <a:xfrm>
-            <a:off x="1737360" y="3108960"/>
-            <a:ext cx="960120" cy="777240"/>
-          </a:xfrm>
-          <a:prstGeom prst="foldedCorner">
-            <a:avLst/>
-          </a:prstGeom>
-          <a:solidFill>
-            <a:srgbClr val="F7F6F2"/>
-          </a:solidFill>
-          <a:ln w="12700">
-            <a:solidFill>
-              <a:srgbClr val="8C8C8C"/>
-            </a:solidFill>
-          </a:ln>
-          <a:effectLst/>
-        </p:spPr>
-        <p:txBody>
-          <a:bodyPr rtlCol="0" anchor="ctr"/>
-          <a:lstStyle/>
-          <a:p>
-            <a:pPr algn="ctr"/>
-          </a:p>
-        </p:txBody>
-      </p:sp>
-      <p:sp>
-        <p:nvSpPr>
-          <p:cNvPr id="16" name="Folded Corner 15"/>
-          <p:cNvSpPr/>
-          <p:nvPr/>
-        </p:nvSpPr>
-        <p:spPr>
-          <a:xfrm>
-            <a:off x="1691640" y="3063239"/>
-            <a:ext cx="960120" cy="777240"/>
-          </a:xfrm>
-          <a:prstGeom prst="foldedCorner">
-            <a:avLst/>
-          </a:prstGeom>
-          <a:solidFill>
-            <a:srgbClr val="F7F6F2"/>
-          </a:solidFill>
-          <a:ln w="12700">
-            <a:solidFill>
-              <a:srgbClr val="8C8C8C"/>
-            </a:solidFill>
-          </a:ln>
-          <a:effectLst/>
-        </p:spPr>
-        <p:txBody>
-          <a:bodyPr rtlCol="0" anchor="ctr"/>
-          <a:lstStyle/>
-          <a:p>
-            <a:pPr algn="ctr"/>
-          </a:p>
-        </p:txBody>
-      </p:sp>
-      <p:sp>
-        <p:nvSpPr>
-          <p:cNvPr id="17" name="Folded Corner 16"/>
-          <p:cNvSpPr/>
-          <p:nvPr/>
-        </p:nvSpPr>
-        <p:spPr>
-          <a:xfrm>
-            <a:off x="1645920" y="3017520"/>
-            <a:ext cx="960120" cy="777240"/>
-          </a:xfrm>
-          <a:prstGeom prst="foldedCorner">
-            <a:avLst/>
-          </a:prstGeom>
-          <a:solidFill>
-            <a:srgbClr val="F7F6F2"/>
-          </a:solidFill>
-          <a:ln w="15240">
-            <a:solidFill>
-              <a:srgbClr val="8C8C8C"/>
-            </a:solidFill>
-          </a:ln>
-          <a:effectLst/>
-        </p:spPr>
-        <p:txBody>
-          <a:bodyPr rtlCol="0" anchor="ctr"/>
-          <a:lstStyle/>
-          <a:p>
-            <a:pPr algn="ctr"/>
-          </a:p>
-        </p:txBody>
-      </p:sp>
-      <p:sp>
-        <p:nvSpPr>
-          <p:cNvPr id="18" name="TextBox 17"/>
-          <p:cNvSpPr txBox="1"/>
-          <p:nvPr/>
-        </p:nvSpPr>
-        <p:spPr>
-          <a:xfrm>
-            <a:off x="1664208" y="3154679"/>
-            <a:ext cx="923544" cy="548640"/>
-          </a:xfrm>
-          <a:prstGeom prst="rect">
-            <a:avLst/>
-          </a:prstGeom>
-          <a:noFill/>
-        </p:spPr>
-        <p:txBody>
-          <a:bodyPr wrap="square" lIns="0" rIns="0" tIns="0" bIns="0">
-            <a:spAutoFit/>
-          </a:bodyPr>
-          <a:lstStyle/>
-          <a:p>
-            <a:pPr algn="ctr"/>
-            <a:r>
-              <a:rPr sz="700" b="1" i="0">
-                <a:solidFill>
-                  <a:srgbClr val="1F1F1E"/>
-                </a:solidFill>
-                <a:latin typeface="Times New Roman"/>
-              </a:rPr>
-              <a:t>trace pool</a:t>
-            </a:r>
-          </a:p>
-          <a:p>
-            <a:pPr algn="ctr"/>
-            <a:r>
-              <a:rPr sz="700" b="1" i="0">
-                <a:solidFill>
-                  <a:srgbClr val="1F1F1E"/>
-                </a:solidFill>
-                <a:latin typeface="Times New Roman"/>
-              </a:rPr>
-              <a:t>1080 exec-</a:t>
-            </a:r>
-          </a:p>
-          <a:p>
-            <a:pPr algn="ctr"/>
-            <a:r>
-              <a:rPr sz="700" b="1" i="0">
-                <a:solidFill>
-                  <a:srgbClr val="1F1F1E"/>
-                </a:solidFill>
-                <a:latin typeface="Times New Roman"/>
-              </a:rPr>
-              <a:t>verified</a:t>
-            </a:r>
-          </a:p>
-        </p:txBody>
-      </p:sp>
-      <p:cxnSp>
-        <p:nvCxnSpPr>
-          <p:cNvPr id="19" name="Connector 18"/>
-          <p:cNvCxnSpPr/>
-          <p:nvPr/>
-        </p:nvCxnSpPr>
-        <p:spPr>
-          <a:xfrm>
-            <a:off x="2395728" y="950976"/>
-            <a:ext cx="301752" cy="0"/>
-          </a:xfrm>
-          <a:prstGeom prst="line">
-            <a:avLst/>
-          </a:prstGeom>
-          <a:ln w="22860">
-            <a:solidFill>
-              <a:srgbClr val="8C8C8C"/>
-            </a:solidFill>
-            <a:tailEnd type="triangle" w="med" len="med"/>
-          </a:ln>
-          <a:effectLst/>
-        </p:spPr>
-      </p:cxnSp>
-      <p:sp>
-        <p:nvSpPr>
-          <p:cNvPr id="20" name="Rounded Rectangle 19"/>
-          <p:cNvSpPr/>
-          <p:nvPr/>
-        </p:nvSpPr>
-        <p:spPr>
-          <a:xfrm>
-            <a:off x="2724912" y="621792"/>
-            <a:ext cx="1298448" cy="713232"/>
-          </a:xfrm>
-          <a:prstGeom prst="roundRect">
-            <a:avLst>
-              <a:gd name="adj" fmla="val 12000"/>
-            </a:avLst>
-          </a:prstGeom>
-          <a:solidFill>
-            <a:srgbClr val="E6DCEF"/>
-          </a:solidFill>
-          <a:ln w="16510">
-            <a:solidFill>
-              <a:srgbClr val="8E6BAE"/>
-            </a:solidFill>
-          </a:ln>
-          <a:effectLst/>
-        </p:spPr>
-        <p:txBody>
-          <a:bodyPr rtlCol="0" anchor="ctr"/>
-          <a:lstStyle/>
-          <a:p>
-            <a:pPr algn="ctr"/>
-          </a:p>
-        </p:txBody>
-      </p:sp>
-      <p:sp>
-        <p:nvSpPr>
-          <p:cNvPr id="21" name="TextBox 20"/>
-          <p:cNvSpPr txBox="1"/>
-          <p:nvPr/>
-        </p:nvSpPr>
-        <p:spPr>
-          <a:xfrm>
-            <a:off x="2752344" y="667512"/>
-            <a:ext cx="1243584" cy="392277"/>
-          </a:xfrm>
-          <a:prstGeom prst="rect">
-            <a:avLst/>
-          </a:prstGeom>
-          <a:noFill/>
-        </p:spPr>
-        <p:txBody>
-          <a:bodyPr wrap="square" lIns="0" rIns="0" tIns="0" bIns="0">
-            <a:spAutoFit/>
-          </a:bodyPr>
-          <a:lstStyle/>
-          <a:p>
-            <a:pPr algn="ctr"/>
-            <a:r>
-              <a:rPr sz="800" b="1" i="0">
-                <a:solidFill>
-                  <a:srgbClr val="1F1F1E"/>
-                </a:solidFill>
-                <a:latin typeface="Times New Roman"/>
-              </a:rPr>
-              <a:t>backward pass</a:t>
-            </a:r>
-          </a:p>
-          <a:p>
-            <a:pPr algn="ctr"/>
-            <a:r>
-              <a:rPr sz="800" b="1" i="0">
-                <a:solidFill>
-                  <a:srgbClr val="1F1F1E"/>
-                </a:solidFill>
-                <a:latin typeface="Times New Roman"/>
-              </a:rPr>
-              <a:t>@ student init</a:t>
-            </a:r>
-          </a:p>
-        </p:txBody>
-      </p:sp>
-      <p:sp>
-        <p:nvSpPr>
-          <p:cNvPr id="22" name="Rounded Rectangle 21"/>
-          <p:cNvSpPr/>
-          <p:nvPr/>
-        </p:nvSpPr>
-        <p:spPr>
-          <a:xfrm>
-            <a:off x="2788920" y="1115568"/>
-            <a:ext cx="1170431" cy="164592"/>
-          </a:xfrm>
-          <a:prstGeom prst="roundRect">
-            <a:avLst>
-              <a:gd name="adj" fmla="val 30000"/>
-            </a:avLst>
-          </a:prstGeom>
-          <a:solidFill>
-            <a:srgbClr val="FFFFFF"/>
-          </a:solidFill>
-          <a:ln w="9525">
-            <a:solidFill>
-              <a:srgbClr val="8E6BAE"/>
-            </a:solidFill>
-          </a:ln>
-          <a:effectLst/>
-        </p:spPr>
-        <p:txBody>
-          <a:bodyPr rtlCol="0" anchor="ctr" lIns="9000" rIns="9000" tIns="4500" bIns="4500" wrap="square"/>
-          <a:lstStyle/>
-          <a:p>
-            <a:pPr algn="ctr"/>
-            <a:r>
-              <a:rPr sz="650" b="0" i="0">
+              <a:rPr sz="1100" b="0" i="1">
                 <a:solidFill>
                   <a:srgbClr val="6B6A63"/>
                 </a:solidFill>
                 <a:latin typeface="Times New Roman"/>
               </a:rPr>
-              <a:t>LoRA-B sketch + JL</a:t>
-            </a:r>
-          </a:p>
-        </p:txBody>
-      </p:sp>
-      <p:cxnSp>
-        <p:nvCxnSpPr>
-          <p:cNvPr id="23" name="Connector 22"/>
-          <p:cNvCxnSpPr/>
-          <p:nvPr/>
-        </p:nvCxnSpPr>
-        <p:spPr>
-          <a:xfrm>
-            <a:off x="4041648" y="950976"/>
-            <a:ext cx="274320" cy="0"/>
-          </a:xfrm>
-          <a:prstGeom prst="line">
-            <a:avLst/>
-          </a:prstGeom>
-          <a:ln w="22860">
-            <a:solidFill>
-              <a:srgbClr val="8C8C8C"/>
-            </a:solidFill>
-            <a:tailEnd type="triangle" w="med" len="med"/>
-          </a:ln>
-          <a:effectLst/>
-        </p:spPr>
-      </p:cxnSp>
-      <p:sp>
-        <p:nvSpPr>
-          <p:cNvPr id="24" name="Folded Corner 23"/>
-          <p:cNvSpPr/>
-          <p:nvPr/>
-        </p:nvSpPr>
-        <p:spPr>
-          <a:xfrm>
-            <a:off x="4343400" y="603504"/>
-            <a:ext cx="896112" cy="731520"/>
-          </a:xfrm>
-          <a:prstGeom prst="foldedCorner">
-            <a:avLst/>
-          </a:prstGeom>
-          <a:solidFill>
-            <a:srgbClr val="DDE9F7"/>
-          </a:solidFill>
-          <a:ln w="15240">
-            <a:solidFill>
-              <a:srgbClr val="4C72B0"/>
-            </a:solidFill>
-          </a:ln>
-          <a:effectLst/>
-        </p:spPr>
-        <p:txBody>
-          <a:bodyPr rtlCol="0" anchor="ctr"/>
-          <a:lstStyle/>
-          <a:p>
-            <a:pPr algn="ctr"/>
-          </a:p>
-        </p:txBody>
-      </p:sp>
-      <p:sp>
-        <p:nvSpPr>
-          <p:cNvPr id="25" name="TextBox 24"/>
-          <p:cNvSpPr txBox="1"/>
-          <p:nvPr/>
-        </p:nvSpPr>
-        <p:spPr>
-          <a:xfrm>
-            <a:off x="4361688" y="717804"/>
-            <a:ext cx="859536" cy="548640"/>
-          </a:xfrm>
-          <a:prstGeom prst="rect">
-            <a:avLst/>
-          </a:prstGeom>
-          <a:noFill/>
-        </p:spPr>
-        <p:txBody>
-          <a:bodyPr wrap="square" lIns="0" rIns="0" tIns="0" bIns="0">
-            <a:spAutoFit/>
-          </a:bodyPr>
-          <a:lstStyle/>
-          <a:p>
-            <a:pPr algn="ctr"/>
-            <a:r>
-              <a:rPr sz="750" b="1" i="0">
-                <a:solidFill>
-                  <a:srgbClr val="1F1F1E"/>
-                </a:solidFill>
-                <a:latin typeface="Times New Roman"/>
-              </a:rPr>
-              <a:t>gradient</a:t>
-            </a:r>
-          </a:p>
-          <a:p>
-            <a:pPr algn="ctr"/>
-            <a:r>
-              <a:rPr sz="750" b="1" i="0">
-                <a:solidFill>
-                  <a:srgbClr val="1F1F1E"/>
-                </a:solidFill>
-                <a:latin typeface="Times New Roman"/>
-              </a:rPr>
-              <a:t>fingerprints</a:t>
-            </a:r>
-          </a:p>
-        </p:txBody>
-      </p:sp>
-      <p:cxnSp>
-        <p:nvCxnSpPr>
-          <p:cNvPr id="26" name="Connector 25"/>
-          <p:cNvCxnSpPr/>
-          <p:nvPr/>
-        </p:nvCxnSpPr>
-        <p:spPr>
-          <a:xfrm>
-            <a:off x="5257800" y="950976"/>
-            <a:ext cx="274320" cy="0"/>
-          </a:xfrm>
-          <a:prstGeom prst="line">
-            <a:avLst/>
-          </a:prstGeom>
-          <a:ln w="22860">
-            <a:solidFill>
-              <a:srgbClr val="8C8C8C"/>
-            </a:solidFill>
-            <a:tailEnd type="triangle" w="med" len="med"/>
-          </a:ln>
-          <a:effectLst/>
-        </p:spPr>
-      </p:cxnSp>
-      <p:sp>
-        <p:nvSpPr>
-          <p:cNvPr id="27" name="Rounded Rectangle 26"/>
-          <p:cNvSpPr/>
-          <p:nvPr/>
-        </p:nvSpPr>
-        <p:spPr>
-          <a:xfrm>
-            <a:off x="5559552" y="621792"/>
-            <a:ext cx="1188720" cy="713232"/>
-          </a:xfrm>
-          <a:prstGeom prst="roundRect">
-            <a:avLst>
-              <a:gd name="adj" fmla="val 12000"/>
-            </a:avLst>
-          </a:prstGeom>
-          <a:solidFill>
-            <a:srgbClr val="E6DCEF"/>
-          </a:solidFill>
-          <a:ln w="16510">
-            <a:solidFill>
-              <a:srgbClr val="8E6BAE"/>
-            </a:solidFill>
-          </a:ln>
-          <a:effectLst/>
-        </p:spPr>
-        <p:txBody>
-          <a:bodyPr rtlCol="0" anchor="ctr"/>
-          <a:lstStyle/>
-          <a:p>
-            <a:pPr algn="ctr"/>
-          </a:p>
-        </p:txBody>
-      </p:sp>
-      <p:sp>
-        <p:nvSpPr>
-          <p:cNvPr id="28" name="TextBox 27"/>
-          <p:cNvSpPr txBox="1"/>
-          <p:nvPr/>
-        </p:nvSpPr>
-        <p:spPr>
-          <a:xfrm>
-            <a:off x="5586984" y="667512"/>
-            <a:ext cx="1133856" cy="392277"/>
-          </a:xfrm>
-          <a:prstGeom prst="rect">
-            <a:avLst/>
-          </a:prstGeom>
-          <a:noFill/>
-        </p:spPr>
-        <p:txBody>
-          <a:bodyPr wrap="square" lIns="0" rIns="0" tIns="0" bIns="0">
-            <a:spAutoFit/>
-          </a:bodyPr>
-          <a:lstStyle/>
-          <a:p>
-            <a:pPr algn="ctr"/>
-            <a:r>
-              <a:rPr sz="800" b="1" i="0">
-                <a:solidFill>
-                  <a:srgbClr val="1F1F1E"/>
-                </a:solidFill>
-                <a:latin typeface="Times New Roman"/>
-              </a:rPr>
-              <a:t>sparse</a:t>
-            </a:r>
-          </a:p>
-          <a:p>
-            <a:pPr algn="ctr"/>
-            <a:r>
-              <a:rPr sz="800" b="1" i="0">
-                <a:solidFill>
-                  <a:srgbClr val="1F1F1E"/>
-                </a:solidFill>
-                <a:latin typeface="Times New Roman"/>
-              </a:rPr>
-              <a:t>dictionary</a:t>
-            </a:r>
-          </a:p>
-        </p:txBody>
-      </p:sp>
-      <p:sp>
-        <p:nvSpPr>
-          <p:cNvPr id="29" name="Rounded Rectangle 28"/>
-          <p:cNvSpPr/>
-          <p:nvPr/>
-        </p:nvSpPr>
-        <p:spPr>
-          <a:xfrm>
-            <a:off x="5623560" y="1115568"/>
-            <a:ext cx="1060704" cy="164592"/>
-          </a:xfrm>
-          <a:prstGeom prst="roundRect">
-            <a:avLst>
-              <a:gd name="adj" fmla="val 30000"/>
-            </a:avLst>
-          </a:prstGeom>
-          <a:solidFill>
-            <a:srgbClr val="FFFFFF"/>
-          </a:solidFill>
-          <a:ln w="9525">
-            <a:solidFill>
-              <a:srgbClr val="8E6BAE"/>
-            </a:solidFill>
-          </a:ln>
-          <a:effectLst/>
-        </p:spPr>
-        <p:txBody>
-          <a:bodyPr rtlCol="0" anchor="ctr" lIns="9000" rIns="9000" tIns="4500" bIns="4500" wrap="square"/>
-          <a:lstStyle/>
-          <a:p>
-            <a:pPr algn="ctr"/>
-            <a:r>
-              <a:rPr sz="650" b="0" i="0">
-                <a:solidFill>
-                  <a:srgbClr val="6B6A63"/>
-                </a:solidFill>
-                <a:latin typeface="Times New Roman"/>
-              </a:rPr>
-              <a:t>128 atoms · lasso</a:t>
-            </a:r>
-          </a:p>
-        </p:txBody>
-      </p:sp>
-      <p:cxnSp>
-        <p:nvCxnSpPr>
-          <p:cNvPr id="30" name="Connector 29"/>
-          <p:cNvCxnSpPr/>
-          <p:nvPr/>
-        </p:nvCxnSpPr>
-        <p:spPr>
-          <a:xfrm>
-            <a:off x="6766560" y="950976"/>
-            <a:ext cx="274320" cy="0"/>
-          </a:xfrm>
-          <a:prstGeom prst="line">
-            <a:avLst/>
-          </a:prstGeom>
-          <a:ln w="22860">
-            <a:solidFill>
-              <a:srgbClr val="8C8C8C"/>
-            </a:solidFill>
-            <a:tailEnd type="triangle" w="med" len="med"/>
-          </a:ln>
-          <a:effectLst/>
-        </p:spPr>
-      </p:cxnSp>
-      <p:sp>
-        <p:nvSpPr>
-          <p:cNvPr id="31" name="Rounded Rectangle 30"/>
-          <p:cNvSpPr/>
-          <p:nvPr/>
-        </p:nvSpPr>
-        <p:spPr>
-          <a:xfrm>
-            <a:off x="7068312" y="603504"/>
-            <a:ext cx="1883664" cy="731520"/>
-          </a:xfrm>
-          <a:prstGeom prst="roundRect">
-            <a:avLst>
-              <a:gd name="adj" fmla="val 10000"/>
-            </a:avLst>
-          </a:prstGeom>
-          <a:solidFill>
-            <a:srgbClr val="FFFFFF"/>
-          </a:solidFill>
-          <a:ln w="15240">
-            <a:solidFill>
-              <a:srgbClr val="8C8C8C"/>
-            </a:solidFill>
-          </a:ln>
-          <a:effectLst/>
-        </p:spPr>
-        <p:txBody>
-          <a:bodyPr rtlCol="0" anchor="ctr"/>
-          <a:lstStyle/>
-          <a:p>
-            <a:pPr algn="ctr"/>
+              <a:t>recurring skills</a:t>
+            </a:r>
           </a:p>
         </p:txBody>
       </p:sp>
@@ -4146,8 +4139,8 @@
         </p:nvSpPr>
         <p:spPr>
           <a:xfrm>
-            <a:off x="7159752" y="694944"/>
-            <a:ext cx="566928" cy="219456"/>
+            <a:off x="2944368" y="1572768"/>
+            <a:ext cx="1078992" cy="420624"/>
           </a:xfrm>
           <a:prstGeom prst="roundRect">
             <a:avLst>
@@ -4157,7 +4150,7 @@
           <a:solidFill>
             <a:srgbClr val="4C72B0"/>
           </a:solidFill>
-          <a:ln w="8890">
+          <a:ln w="12700">
             <a:solidFill>
               <a:srgbClr val="FFFFFF"/>
             </a:solidFill>
@@ -4170,7 +4163,7 @@
           <a:p>
             <a:pPr algn="ctr"/>
             <a:r>
-              <a:rPr sz="700" b="1" i="0">
+              <a:rPr sz="1100" b="1" i="0">
                 <a:solidFill>
                   <a:srgbClr val="FFFFFF"/>
                 </a:solidFill>
@@ -4189,8 +4182,74 @@
         </p:nvSpPr>
         <p:spPr>
           <a:xfrm>
-            <a:off x="7772400" y="694944"/>
-            <a:ext cx="786384" cy="219456"/>
+            <a:off x="4133087" y="1627632"/>
+            <a:ext cx="914400" cy="310896"/>
+          </a:xfrm>
+          <a:prstGeom prst="roundRect">
+            <a:avLst>
+              <a:gd name="adj" fmla="val 20000"/>
+            </a:avLst>
+          </a:prstGeom>
+          <a:solidFill>
+            <a:srgbClr val="FFFFFF"/>
+          </a:solidFill>
+          <a:ln w="12700">
+            <a:solidFill>
+              <a:srgbClr val="8C8C8C"/>
+            </a:solidFill>
+          </a:ln>
+          <a:effectLst/>
+        </p:spPr>
+        <p:txBody>
+          <a:bodyPr rtlCol="0" anchor="ctr"/>
+          <a:lstStyle/>
+          <a:p>
+            <a:pPr algn="ctr"/>
+          </a:p>
+        </p:txBody>
+      </p:sp>
+      <p:sp>
+        <p:nvSpPr>
+          <p:cNvPr id="34" name="Rounded Rectangle 33"/>
+          <p:cNvSpPr/>
+          <p:nvPr/>
+        </p:nvSpPr>
+        <p:spPr>
+          <a:xfrm>
+            <a:off x="4160520" y="1655064"/>
+            <a:ext cx="790773" cy="256032"/>
+          </a:xfrm>
+          <a:prstGeom prst="roundRect">
+            <a:avLst>
+              <a:gd name="adj" fmla="val 20000"/>
+            </a:avLst>
+          </a:prstGeom>
+          <a:solidFill>
+            <a:srgbClr val="4C72B0"/>
+          </a:solidFill>
+          <a:ln>
+            <a:noFill/>
+          </a:ln>
+          <a:effectLst/>
+        </p:spPr>
+        <p:txBody>
+          <a:bodyPr rtlCol="0" anchor="ctr"/>
+          <a:lstStyle/>
+          <a:p>
+            <a:pPr algn="ctr"/>
+          </a:p>
+        </p:txBody>
+      </p:sp>
+      <p:sp>
+        <p:nvSpPr>
+          <p:cNvPr id="35" name="Rounded Rectangle 34"/>
+          <p:cNvSpPr/>
+          <p:nvPr/>
+        </p:nvSpPr>
+        <p:spPr>
+          <a:xfrm>
+            <a:off x="2944368" y="2532888"/>
+            <a:ext cx="1078992" cy="420624"/>
           </a:xfrm>
           <a:prstGeom prst="roundRect">
             <a:avLst>
@@ -4200,7 +4259,7 @@
           <a:solidFill>
             <a:srgbClr val="7BA7D7"/>
           </a:solidFill>
-          <a:ln w="8890">
+          <a:ln w="12700">
             <a:solidFill>
               <a:srgbClr val="FFFFFF"/>
             </a:solidFill>
@@ -4213,7 +4272,7 @@
           <a:p>
             <a:pPr algn="ctr"/>
             <a:r>
-              <a:rPr sz="700" b="1" i="0">
+              <a:rPr sz="1100" b="1" i="0">
                 <a:solidFill>
                   <a:srgbClr val="FFFFFF"/>
                 </a:solidFill>
@@ -4226,14 +4285,80 @@
       </p:sp>
       <p:sp>
         <p:nvSpPr>
-          <p:cNvPr id="34" name="Rounded Rectangle 33"/>
+          <p:cNvPr id="36" name="Rounded Rectangle 35"/>
           <p:cNvSpPr/>
           <p:nvPr/>
         </p:nvSpPr>
         <p:spPr>
           <a:xfrm>
-            <a:off x="7159752" y="1005840"/>
-            <a:ext cx="658368" cy="219456"/>
+            <a:off x="4133087" y="2587752"/>
+            <a:ext cx="914400" cy="310896"/>
+          </a:xfrm>
+          <a:prstGeom prst="roundRect">
+            <a:avLst>
+              <a:gd name="adj" fmla="val 20000"/>
+            </a:avLst>
+          </a:prstGeom>
+          <a:solidFill>
+            <a:srgbClr val="FFFFFF"/>
+          </a:solidFill>
+          <a:ln w="12700">
+            <a:solidFill>
+              <a:srgbClr val="8C8C8C"/>
+            </a:solidFill>
+          </a:ln>
+          <a:effectLst/>
+        </p:spPr>
+        <p:txBody>
+          <a:bodyPr rtlCol="0" anchor="ctr"/>
+          <a:lstStyle/>
+          <a:p>
+            <a:pPr algn="ctr"/>
+          </a:p>
+        </p:txBody>
+      </p:sp>
+      <p:sp>
+        <p:nvSpPr>
+          <p:cNvPr id="37" name="Rounded Rectangle 36"/>
+          <p:cNvSpPr/>
+          <p:nvPr/>
+        </p:nvSpPr>
+        <p:spPr>
+          <a:xfrm>
+            <a:off x="4160520" y="2615184"/>
+            <a:ext cx="515721" cy="256032"/>
+          </a:xfrm>
+          <a:prstGeom prst="roundRect">
+            <a:avLst>
+              <a:gd name="adj" fmla="val 20000"/>
+            </a:avLst>
+          </a:prstGeom>
+          <a:solidFill>
+            <a:srgbClr val="7BA7D7"/>
+          </a:solidFill>
+          <a:ln>
+            <a:noFill/>
+          </a:ln>
+          <a:effectLst/>
+        </p:spPr>
+        <p:txBody>
+          <a:bodyPr rtlCol="0" anchor="ctr"/>
+          <a:lstStyle/>
+          <a:p>
+            <a:pPr algn="ctr"/>
+          </a:p>
+        </p:txBody>
+      </p:sp>
+      <p:sp>
+        <p:nvSpPr>
+          <p:cNvPr id="38" name="Rounded Rectangle 37"/>
+          <p:cNvSpPr/>
+          <p:nvPr/>
+        </p:nvSpPr>
+        <p:spPr>
+          <a:xfrm>
+            <a:off x="2944368" y="3493008"/>
+            <a:ext cx="1078992" cy="420624"/>
           </a:xfrm>
           <a:prstGeom prst="roundRect">
             <a:avLst>
@@ -4243,7 +4368,7 @@
           <a:solidFill>
             <a:srgbClr val="5F9EA0"/>
           </a:solidFill>
-          <a:ln w="8890">
+          <a:ln w="12700">
             <a:solidFill>
               <a:srgbClr val="FFFFFF"/>
             </a:solidFill>
@@ -4256,27 +4381,93 @@
           <a:p>
             <a:pPr algn="ctr"/>
             <a:r>
-              <a:rPr sz="700" b="1" i="0">
+              <a:rPr sz="1100" b="1" i="0">
                 <a:solidFill>
                   <a:srgbClr val="FFFFFF"/>
                 </a:solidFill>
                 <a:latin typeface="Times New Roman"/>
               </a:rPr>
-              <a:t>FILTER</a:t>
-            </a:r>
-          </a:p>
-        </p:txBody>
-      </p:sp>
-      <p:sp>
-        <p:nvSpPr>
-          <p:cNvPr id="35" name="Rounded Rectangle 34"/>
+              <a:t>COUNT</a:t>
+            </a:r>
+          </a:p>
+        </p:txBody>
+      </p:sp>
+      <p:sp>
+        <p:nvSpPr>
+          <p:cNvPr id="39" name="Rounded Rectangle 38"/>
           <p:cNvSpPr/>
           <p:nvPr/>
         </p:nvSpPr>
         <p:spPr>
           <a:xfrm>
-            <a:off x="7863840" y="1005840"/>
-            <a:ext cx="530352" cy="219456"/>
+            <a:off x="4133087" y="3547872"/>
+            <a:ext cx="914400" cy="310896"/>
+          </a:xfrm>
+          <a:prstGeom prst="roundRect">
+            <a:avLst>
+              <a:gd name="adj" fmla="val 20000"/>
+            </a:avLst>
+          </a:prstGeom>
+          <a:solidFill>
+            <a:srgbClr val="FFFFFF"/>
+          </a:solidFill>
+          <a:ln w="12700">
+            <a:solidFill>
+              <a:srgbClr val="8C8C8C"/>
+            </a:solidFill>
+          </a:ln>
+          <a:effectLst/>
+        </p:spPr>
+        <p:txBody>
+          <a:bodyPr rtlCol="0" anchor="ctr"/>
+          <a:lstStyle/>
+          <a:p>
+            <a:pPr algn="ctr"/>
+          </a:p>
+        </p:txBody>
+      </p:sp>
+      <p:sp>
+        <p:nvSpPr>
+          <p:cNvPr id="40" name="Rounded Rectangle 39"/>
+          <p:cNvSpPr/>
+          <p:nvPr/>
+        </p:nvSpPr>
+        <p:spPr>
+          <a:xfrm>
+            <a:off x="4160520" y="3575304"/>
+            <a:ext cx="300837" cy="256032"/>
+          </a:xfrm>
+          <a:prstGeom prst="roundRect">
+            <a:avLst>
+              <a:gd name="adj" fmla="val 20000"/>
+            </a:avLst>
+          </a:prstGeom>
+          <a:solidFill>
+            <a:srgbClr val="5F9EA0"/>
+          </a:solidFill>
+          <a:ln>
+            <a:noFill/>
+          </a:ln>
+          <a:effectLst/>
+        </p:spPr>
+        <p:txBody>
+          <a:bodyPr rtlCol="0" anchor="ctr"/>
+          <a:lstStyle/>
+          <a:p>
+            <a:pPr algn="ctr"/>
+          </a:p>
+        </p:txBody>
+      </p:sp>
+      <p:sp>
+        <p:nvSpPr>
+          <p:cNvPr id="41" name="Rounded Rectangle 40"/>
+          <p:cNvSpPr/>
+          <p:nvPr/>
+        </p:nvSpPr>
+        <p:spPr>
+          <a:xfrm>
+            <a:off x="2944368" y="4453128"/>
+            <a:ext cx="1078992" cy="420624"/>
           </a:xfrm>
           <a:prstGeom prst="roundRect">
             <a:avLst>
@@ -4286,7 +4477,7 @@
           <a:solidFill>
             <a:srgbClr val="DD8452"/>
           </a:solidFill>
-          <a:ln w="8890">
+          <a:ln w="12700">
             <a:solidFill>
               <a:srgbClr val="FFFFFF"/>
             </a:solidFill>
@@ -4299,7 +4490,7 @@
           <a:p>
             <a:pPr algn="ctr"/>
             <a:r>
-              <a:rPr sz="700" b="1" i="0">
+              <a:rPr sz="1100" b="1" i="0">
                 <a:solidFill>
                   <a:srgbClr val="FFFFFF"/>
                 </a:solidFill>
@@ -4312,14 +4503,48 @@
       </p:sp>
       <p:sp>
         <p:nvSpPr>
-          <p:cNvPr id="36" name="TextBox 35"/>
+          <p:cNvPr id="42" name="Rounded Rectangle 41"/>
+          <p:cNvSpPr/>
+          <p:nvPr/>
+        </p:nvSpPr>
+        <p:spPr>
+          <a:xfrm>
+            <a:off x="4133087" y="4507992"/>
+            <a:ext cx="914400" cy="310896"/>
+          </a:xfrm>
+          <a:prstGeom prst="roundRect">
+            <a:avLst>
+              <a:gd name="adj" fmla="val 20000"/>
+            </a:avLst>
+          </a:prstGeom>
+          <a:solidFill>
+            <a:srgbClr val="FFFFFF"/>
+          </a:solidFill>
+          <a:ln w="12700">
+            <a:solidFill>
+              <a:srgbClr val="8C8C8C"/>
+            </a:solidFill>
+          </a:ln>
+          <a:effectLst/>
+        </p:spPr>
+        <p:txBody>
+          <a:bodyPr rtlCol="0" anchor="ctr"/>
+          <a:lstStyle/>
+          <a:p>
+            <a:pPr algn="ctr"/>
+          </a:p>
+        </p:txBody>
+      </p:sp>
+      <p:sp>
+        <p:nvSpPr>
+          <p:cNvPr id="43" name="TextBox 42"/>
           <p:cNvSpPr txBox="1"/>
           <p:nvPr/>
         </p:nvSpPr>
         <p:spPr>
           <a:xfrm>
-            <a:off x="8449056" y="969264"/>
-            <a:ext cx="457200" cy="274320"/>
+            <a:off x="4133087" y="4507992"/>
+            <a:ext cx="914400" cy="310896"/>
           </a:xfrm>
           <a:prstGeom prst="rect">
             <a:avLst/>
@@ -4334,27 +4559,27 @@
           <a:p>
             <a:pPr algn="ctr"/>
             <a:r>
-              <a:rPr sz="1000" b="0" i="0">
+              <a:rPr sz="850" b="0" i="0">
                 <a:solidFill>
                   <a:srgbClr val="6B6A63"/>
                 </a:solidFill>
                 <a:latin typeface="Times New Roman"/>
               </a:rPr>
-              <a:t>…</a:t>
-            </a:r>
-          </a:p>
-        </p:txBody>
-      </p:sp>
-      <p:sp>
-        <p:nvSpPr>
-          <p:cNvPr id="37" name="TextBox 36"/>
+              <a:t>not needed</a:t>
+            </a:r>
+          </a:p>
+        </p:txBody>
+      </p:sp>
+      <p:sp>
+        <p:nvSpPr>
+          <p:cNvPr id="44" name="TextBox 43"/>
           <p:cNvSpPr txBox="1"/>
           <p:nvPr/>
         </p:nvSpPr>
         <p:spPr>
           <a:xfrm>
-            <a:off x="7086600" y="347472"/>
-            <a:ext cx="1828800" cy="237744"/>
+            <a:off x="2971800" y="5486400"/>
+            <a:ext cx="2011680" cy="502920"/>
           </a:xfrm>
           <a:prstGeom prst="rect">
             <a:avLst/>
@@ -4369,58 +4594,1102 @@
           <a:p>
             <a:pPr algn="ctr"/>
             <a:r>
-              <a:rPr sz="800" b="0" i="0">
+              <a:rPr sz="1100" b="1" i="0">
+                <a:solidFill>
+                  <a:srgbClr val="4C72B0"/>
+                </a:solidFill>
+                <a:latin typeface="Times New Roman"/>
+              </a:rPr>
+              <a:t>demand ledger</a:t>
+            </a:r>
+          </a:p>
+          <a:p>
+            <a:pPr algn="ctr"/>
+            <a:r>
+              <a:rPr sz="1100" b="1" i="0">
+                <a:solidFill>
+                  <a:srgbClr val="4C72B0"/>
+                </a:solidFill>
+                <a:latin typeface="Times New Roman"/>
+              </a:rPr>
+              <a:t>(read from the k queries)</a:t>
+            </a:r>
+          </a:p>
+        </p:txBody>
+      </p:sp>
+      <p:sp>
+        <p:nvSpPr>
+          <p:cNvPr id="45" name="TextBox 44"/>
+          <p:cNvSpPr txBox="1"/>
+          <p:nvPr/>
+        </p:nvSpPr>
+        <p:spPr>
+          <a:xfrm>
+            <a:off x="5532120" y="1152144"/>
+            <a:ext cx="3566160" cy="310896"/>
+          </a:xfrm>
+          <a:prstGeom prst="rect">
+            <a:avLst/>
+          </a:prstGeom>
+          <a:noFill/>
+        </p:spPr>
+        <p:txBody>
+          <a:bodyPr wrap="square" lIns="0" rIns="0" tIns="0" bIns="0">
+            <a:spAutoFit/>
+          </a:bodyPr>
+          <a:lstStyle/>
+          <a:p>
+            <a:pPr algn="ctr"/>
+            <a:r>
+              <a:rPr sz="1050" b="1" i="0">
+                <a:solidFill>
+                  <a:srgbClr val="1F1F1E"/>
+                </a:solidFill>
+                <a:latin typeface="Times New Roman"/>
+              </a:rPr>
+              <a:t>each pick satisfies the most remaining demand per token</a:t>
+            </a:r>
+          </a:p>
+        </p:txBody>
+      </p:sp>
+      <p:sp>
+        <p:nvSpPr>
+          <p:cNvPr id="46" name="Rounded Rectangle 45"/>
+          <p:cNvSpPr/>
+          <p:nvPr/>
+        </p:nvSpPr>
+        <p:spPr>
+          <a:xfrm>
+            <a:off x="5577840" y="1627632"/>
+            <a:ext cx="1463040" cy="749808"/>
+          </a:xfrm>
+          <a:prstGeom prst="roundRect">
+            <a:avLst>
+              <a:gd name="adj" fmla="val 25000"/>
+            </a:avLst>
+          </a:prstGeom>
+          <a:solidFill>
+            <a:srgbClr val="F7F6F2"/>
+          </a:solidFill>
+          <a:ln w="16510">
+            <a:solidFill>
+              <a:srgbClr val="4C72B0"/>
+            </a:solidFill>
+          </a:ln>
+          <a:effectLst/>
+        </p:spPr>
+        <p:txBody>
+          <a:bodyPr rtlCol="0" anchor="ctr"/>
+          <a:lstStyle/>
+          <a:p>
+            <a:pPr algn="ctr"/>
+          </a:p>
+        </p:txBody>
+      </p:sp>
+      <p:sp>
+        <p:nvSpPr>
+          <p:cNvPr id="47" name="TextBox 46"/>
+          <p:cNvSpPr txBox="1"/>
+          <p:nvPr/>
+        </p:nvSpPr>
+        <p:spPr>
+          <a:xfrm>
+            <a:off x="5669280" y="1700784"/>
+            <a:ext cx="1325880" cy="320040"/>
+          </a:xfrm>
+          <a:prstGeom prst="rect">
+            <a:avLst/>
+          </a:prstGeom>
+          <a:noFill/>
+        </p:spPr>
+        <p:txBody>
+          <a:bodyPr wrap="square" lIns="0" rIns="0" tIns="0" bIns="0">
+            <a:spAutoFit/>
+          </a:bodyPr>
+          <a:lstStyle/>
+          <a:p>
+            <a:pPr algn="l"/>
+            <a:r>
+              <a:rPr sz="900" b="0" i="0">
+                <a:solidFill>
+                  <a:srgbClr val="1F1F1E"/>
+                </a:solidFill>
+                <a:latin typeface="Times New Roman"/>
+              </a:rPr>
+              <a:t>SELECT … JOIN …</a:t>
+            </a:r>
+          </a:p>
+        </p:txBody>
+      </p:sp>
+      <p:sp>
+        <p:nvSpPr>
+          <p:cNvPr id="48" name="Rounded Rectangle 47"/>
+          <p:cNvSpPr/>
+          <p:nvPr/>
+        </p:nvSpPr>
+        <p:spPr>
+          <a:xfrm>
+            <a:off x="5669280" y="2029968"/>
+            <a:ext cx="804672" cy="256032"/>
+          </a:xfrm>
+          <a:prstGeom prst="roundRect">
+            <a:avLst>
+              <a:gd name="adj" fmla="val 45000"/>
+            </a:avLst>
+          </a:prstGeom>
+          <a:solidFill>
+            <a:srgbClr val="4C72B0"/>
+          </a:solidFill>
+          <a:ln w="12700">
+            <a:solidFill>
+              <a:srgbClr val="FFFFFF"/>
+            </a:solidFill>
+          </a:ln>
+          <a:effectLst/>
+        </p:spPr>
+        <p:txBody>
+          <a:bodyPr rtlCol="0" anchor="ctr" lIns="9000" rIns="9000" tIns="4500" bIns="4500" wrap="square"/>
+          <a:lstStyle/>
+          <a:p>
+            <a:pPr algn="ctr"/>
+            <a:r>
+              <a:rPr sz="800" b="1" i="0">
+                <a:solidFill>
+                  <a:srgbClr val="FFFFFF"/>
+                </a:solidFill>
+                <a:latin typeface="Times New Roman"/>
+              </a:rPr>
+              <a:t>JOIN</a:t>
+            </a:r>
+          </a:p>
+        </p:txBody>
+      </p:sp>
+      <p:cxnSp>
+        <p:nvCxnSpPr>
+          <p:cNvPr id="49" name="Connector 48"/>
+          <p:cNvCxnSpPr/>
+          <p:nvPr/>
+        </p:nvCxnSpPr>
+        <p:spPr>
+          <a:xfrm>
+            <a:off x="7077456" y="1993392"/>
+            <a:ext cx="493775" cy="384048"/>
+          </a:xfrm>
+          <a:prstGeom prst="line">
+            <a:avLst/>
+          </a:prstGeom>
+          <a:ln w="33020">
+            <a:solidFill>
+              <a:srgbClr val="4C72B0"/>
+            </a:solidFill>
+            <a:tailEnd type="triangle" w="med" len="med"/>
+          </a:ln>
+          <a:effectLst/>
+        </p:spPr>
+      </p:cxnSp>
+      <p:sp>
+        <p:nvSpPr>
+          <p:cNvPr id="50" name="Rounded Rectangle 49"/>
+          <p:cNvSpPr/>
+          <p:nvPr/>
+        </p:nvSpPr>
+        <p:spPr>
+          <a:xfrm>
+            <a:off x="5577840" y="2560320"/>
+            <a:ext cx="1463040" cy="749808"/>
+          </a:xfrm>
+          <a:prstGeom prst="roundRect">
+            <a:avLst>
+              <a:gd name="adj" fmla="val 25000"/>
+            </a:avLst>
+          </a:prstGeom>
+          <a:solidFill>
+            <a:srgbClr val="F7F6F2"/>
+          </a:solidFill>
+          <a:ln w="16510">
+            <a:solidFill>
+              <a:srgbClr val="4C72B0"/>
+            </a:solidFill>
+          </a:ln>
+          <a:effectLst/>
+        </p:spPr>
+        <p:txBody>
+          <a:bodyPr rtlCol="0" anchor="ctr"/>
+          <a:lstStyle/>
+          <a:p>
+            <a:pPr algn="ctr"/>
+          </a:p>
+        </p:txBody>
+      </p:sp>
+      <p:sp>
+        <p:nvSpPr>
+          <p:cNvPr id="51" name="TextBox 50"/>
+          <p:cNvSpPr txBox="1"/>
+          <p:nvPr/>
+        </p:nvSpPr>
+        <p:spPr>
+          <a:xfrm>
+            <a:off x="5669280" y="2633472"/>
+            <a:ext cx="1325880" cy="320040"/>
+          </a:xfrm>
+          <a:prstGeom prst="rect">
+            <a:avLst/>
+          </a:prstGeom>
+          <a:noFill/>
+        </p:spPr>
+        <p:txBody>
+          <a:bodyPr wrap="square" lIns="0" rIns="0" tIns="0" bIns="0">
+            <a:spAutoFit/>
+          </a:bodyPr>
+          <a:lstStyle/>
+          <a:p>
+            <a:pPr algn="l"/>
+            <a:r>
+              <a:rPr sz="900" b="0" i="0">
+                <a:solidFill>
+                  <a:srgbClr val="1F1F1E"/>
+                </a:solidFill>
+                <a:latin typeface="Times New Roman"/>
+              </a:rPr>
+              <a:t>df.groupby(…)</a:t>
+            </a:r>
+          </a:p>
+        </p:txBody>
+      </p:sp>
+      <p:sp>
+        <p:nvSpPr>
+          <p:cNvPr id="52" name="Rounded Rectangle 51"/>
+          <p:cNvSpPr/>
+          <p:nvPr/>
+        </p:nvSpPr>
+        <p:spPr>
+          <a:xfrm>
+            <a:off x="5669280" y="2962656"/>
+            <a:ext cx="804672" cy="256032"/>
+          </a:xfrm>
+          <a:prstGeom prst="roundRect">
+            <a:avLst>
+              <a:gd name="adj" fmla="val 45000"/>
+            </a:avLst>
+          </a:prstGeom>
+          <a:solidFill>
+            <a:srgbClr val="7BA7D7"/>
+          </a:solidFill>
+          <a:ln w="12700">
+            <a:solidFill>
+              <a:srgbClr val="FFFFFF"/>
+            </a:solidFill>
+          </a:ln>
+          <a:effectLst/>
+        </p:spPr>
+        <p:txBody>
+          <a:bodyPr rtlCol="0" anchor="ctr" lIns="9000" rIns="9000" tIns="4500" bIns="4500" wrap="square"/>
+          <a:lstStyle/>
+          <a:p>
+            <a:pPr algn="ctr"/>
+            <a:r>
+              <a:rPr sz="800" b="1" i="0">
+                <a:solidFill>
+                  <a:srgbClr val="FFFFFF"/>
+                </a:solidFill>
+                <a:latin typeface="Times New Roman"/>
+              </a:rPr>
+              <a:t>GROUP BY</a:t>
+            </a:r>
+          </a:p>
+        </p:txBody>
+      </p:sp>
+      <p:cxnSp>
+        <p:nvCxnSpPr>
+          <p:cNvPr id="53" name="Connector 52"/>
+          <p:cNvCxnSpPr/>
+          <p:nvPr/>
+        </p:nvCxnSpPr>
+        <p:spPr>
+          <a:xfrm flipV="1">
+            <a:off x="7077456" y="2697480"/>
+            <a:ext cx="493775" cy="228599"/>
+          </a:xfrm>
+          <a:prstGeom prst="line">
+            <a:avLst/>
+          </a:prstGeom>
+          <a:ln w="33020">
+            <a:solidFill>
+              <a:srgbClr val="4C72B0"/>
+            </a:solidFill>
+            <a:tailEnd type="triangle" w="med" len="med"/>
+          </a:ln>
+          <a:effectLst/>
+        </p:spPr>
+      </p:cxnSp>
+      <p:sp>
+        <p:nvSpPr>
+          <p:cNvPr id="54" name="Rounded Rectangle 53"/>
+          <p:cNvSpPr/>
+          <p:nvPr/>
+        </p:nvSpPr>
+        <p:spPr>
+          <a:xfrm>
+            <a:off x="5577840" y="3493008"/>
+            <a:ext cx="1463040" cy="749808"/>
+          </a:xfrm>
+          <a:prstGeom prst="roundRect">
+            <a:avLst>
+              <a:gd name="adj" fmla="val 25000"/>
+            </a:avLst>
+          </a:prstGeom>
+          <a:solidFill>
+            <a:srgbClr val="E8E6E1"/>
+          </a:solidFill>
+          <a:ln w="16510">
+            <a:solidFill>
+              <a:srgbClr val="8C8C8C"/>
+            </a:solidFill>
+          </a:ln>
+          <a:effectLst/>
+        </p:spPr>
+        <p:txBody>
+          <a:bodyPr rtlCol="0" anchor="ctr"/>
+          <a:lstStyle/>
+          <a:p>
+            <a:pPr algn="ctr"/>
+          </a:p>
+        </p:txBody>
+      </p:sp>
+      <p:sp>
+        <p:nvSpPr>
+          <p:cNvPr id="55" name="TextBox 54"/>
+          <p:cNvSpPr txBox="1"/>
+          <p:nvPr/>
+        </p:nvSpPr>
+        <p:spPr>
+          <a:xfrm>
+            <a:off x="5669280" y="3566160"/>
+            <a:ext cx="1325880" cy="320040"/>
+          </a:xfrm>
+          <a:prstGeom prst="rect">
+            <a:avLst/>
+          </a:prstGeom>
+          <a:noFill/>
+        </p:spPr>
+        <p:txBody>
+          <a:bodyPr wrap="square" lIns="0" rIns="0" tIns="0" bIns="0">
+            <a:spAutoFit/>
+          </a:bodyPr>
+          <a:lstStyle/>
+          <a:p>
+            <a:pPr algn="l"/>
+            <a:r>
+              <a:rPr sz="900" b="0" i="0">
+                <a:solidFill>
+                  <a:srgbClr val="1F1F1E"/>
+                </a:solidFill>
+                <a:latin typeface="Times New Roman"/>
+              </a:rPr>
+              <a:t>plt.plot(…)</a:t>
+            </a:r>
+          </a:p>
+        </p:txBody>
+      </p:sp>
+      <p:sp>
+        <p:nvSpPr>
+          <p:cNvPr id="56" name="Rounded Rectangle 55"/>
+          <p:cNvSpPr/>
+          <p:nvPr/>
+        </p:nvSpPr>
+        <p:spPr>
+          <a:xfrm>
+            <a:off x="5669280" y="3895344"/>
+            <a:ext cx="804672" cy="256032"/>
+          </a:xfrm>
+          <a:prstGeom prst="roundRect">
+            <a:avLst>
+              <a:gd name="adj" fmla="val 45000"/>
+            </a:avLst>
+          </a:prstGeom>
+          <a:solidFill>
+            <a:srgbClr val="DD8452"/>
+          </a:solidFill>
+          <a:ln w="12700">
+            <a:solidFill>
+              <a:srgbClr val="FFFFFF"/>
+            </a:solidFill>
+          </a:ln>
+          <a:effectLst/>
+        </p:spPr>
+        <p:txBody>
+          <a:bodyPr rtlCol="0" anchor="ctr" lIns="9000" rIns="9000" tIns="4500" bIns="4500" wrap="square"/>
+          <a:lstStyle/>
+          <a:p>
+            <a:pPr algn="ctr"/>
+            <a:r>
+              <a:rPr sz="800" b="1" i="0">
+                <a:solidFill>
+                  <a:srgbClr val="FFFFFF"/>
+                </a:solidFill>
+                <a:latin typeface="Times New Roman"/>
+              </a:rPr>
+              <a:t>PLOT</a:t>
+            </a:r>
+          </a:p>
+        </p:txBody>
+      </p:sp>
+      <p:cxnSp>
+        <p:nvCxnSpPr>
+          <p:cNvPr id="57" name="Connector 56"/>
+          <p:cNvCxnSpPr/>
+          <p:nvPr/>
+        </p:nvCxnSpPr>
+        <p:spPr>
+          <a:xfrm flipV="1">
+            <a:off x="5522976" y="3447288"/>
+            <a:ext cx="1591056" cy="850392"/>
+          </a:xfrm>
+          <a:prstGeom prst="line">
+            <a:avLst/>
+          </a:prstGeom>
+          <a:ln w="30480">
+            <a:solidFill>
+              <a:srgbClr val="C44E52"/>
+            </a:solidFill>
+          </a:ln>
+          <a:effectLst/>
+        </p:spPr>
+      </p:cxnSp>
+      <p:sp>
+        <p:nvSpPr>
+          <p:cNvPr id="58" name="TextBox 57"/>
+          <p:cNvSpPr txBox="1"/>
+          <p:nvPr/>
+        </p:nvSpPr>
+        <p:spPr>
+          <a:xfrm>
+            <a:off x="5577840" y="4480560"/>
+            <a:ext cx="1737360" cy="502920"/>
+          </a:xfrm>
+          <a:prstGeom prst="rect">
+            <a:avLst/>
+          </a:prstGeom>
+          <a:noFill/>
+        </p:spPr>
+        <p:txBody>
+          <a:bodyPr wrap="square" lIns="0" rIns="0" tIns="0" bIns="0">
+            <a:spAutoFit/>
+          </a:bodyPr>
+          <a:lstStyle/>
+          <a:p>
+            <a:pPr algn="ctr"/>
+            <a:r>
+              <a:rPr sz="900" b="1" i="0">
+                <a:solidFill>
+                  <a:srgbClr val="C44E52"/>
+                </a:solidFill>
+                <a:latin typeface="Times New Roman"/>
+              </a:rPr>
+              <a:t>zero remaining demand</a:t>
+            </a:r>
+          </a:p>
+          <a:p>
+            <a:pPr algn="ctr"/>
+            <a:r>
+              <a:rPr sz="900" b="1" i="0">
+                <a:solidFill>
+                  <a:srgbClr val="C44E52"/>
+                </a:solidFill>
+                <a:latin typeface="Times New Roman"/>
+              </a:rPr>
+              <a:t>= zero value</a:t>
+            </a:r>
+          </a:p>
+        </p:txBody>
+      </p:sp>
+      <p:sp>
+        <p:nvSpPr>
+          <p:cNvPr id="59" name="TextBox 58"/>
+          <p:cNvSpPr txBox="1"/>
+          <p:nvPr/>
+        </p:nvSpPr>
+        <p:spPr>
+          <a:xfrm>
+            <a:off x="7635240" y="1481328"/>
+            <a:ext cx="1463040" cy="274320"/>
+          </a:xfrm>
+          <a:prstGeom prst="rect">
+            <a:avLst/>
+          </a:prstGeom>
+          <a:noFill/>
+        </p:spPr>
+        <p:txBody>
+          <a:bodyPr wrap="square" lIns="0" rIns="0" tIns="0" bIns="0">
+            <a:spAutoFit/>
+          </a:bodyPr>
+          <a:lstStyle/>
+          <a:p>
+            <a:pPr algn="ctr"/>
+            <a:r>
+              <a:rPr sz="1100" b="1" i="0">
+                <a:solidFill>
+                  <a:srgbClr val="4C72B0"/>
+                </a:solidFill>
+                <a:latin typeface="Times New Roman"/>
+              </a:rPr>
+              <a:t>ledger drains</a:t>
+            </a:r>
+          </a:p>
+        </p:txBody>
+      </p:sp>
+      <p:sp>
+        <p:nvSpPr>
+          <p:cNvPr id="60" name="Rounded Rectangle 59"/>
+          <p:cNvSpPr/>
+          <p:nvPr/>
+        </p:nvSpPr>
+        <p:spPr>
+          <a:xfrm>
+            <a:off x="7635240" y="1828800"/>
+            <a:ext cx="1325880" cy="274320"/>
+          </a:xfrm>
+          <a:prstGeom prst="roundRect">
+            <a:avLst>
+              <a:gd name="adj" fmla="val 20000"/>
+            </a:avLst>
+          </a:prstGeom>
+          <a:solidFill>
+            <a:srgbClr val="FFFFFF"/>
+          </a:solidFill>
+          <a:ln w="12700">
+            <a:solidFill>
+              <a:srgbClr val="8C8C8C"/>
+            </a:solidFill>
+          </a:ln>
+          <a:effectLst/>
+        </p:spPr>
+        <p:txBody>
+          <a:bodyPr rtlCol="0" anchor="ctr"/>
+          <a:lstStyle/>
+          <a:p>
+            <a:pPr algn="ctr"/>
+          </a:p>
+        </p:txBody>
+      </p:sp>
+      <p:sp>
+        <p:nvSpPr>
+          <p:cNvPr id="61" name="Rounded Rectangle 60"/>
+          <p:cNvSpPr/>
+          <p:nvPr/>
+        </p:nvSpPr>
+        <p:spPr>
+          <a:xfrm>
+            <a:off x="7662672" y="1856231"/>
+            <a:ext cx="1169334" cy="219456"/>
+          </a:xfrm>
+          <a:prstGeom prst="roundRect">
+            <a:avLst>
+              <a:gd name="adj" fmla="val 20000"/>
+            </a:avLst>
+          </a:prstGeom>
+          <a:solidFill>
+            <a:srgbClr val="4C72B0"/>
+          </a:solidFill>
+          <a:ln>
+            <a:noFill/>
+          </a:ln>
+          <a:effectLst/>
+        </p:spPr>
+        <p:txBody>
+          <a:bodyPr rtlCol="0" anchor="ctr"/>
+          <a:lstStyle/>
+          <a:p>
+            <a:pPr algn="ctr"/>
+          </a:p>
+        </p:txBody>
+      </p:sp>
+      <p:sp>
+        <p:nvSpPr>
+          <p:cNvPr id="62" name="Rounded Rectangle 61"/>
+          <p:cNvSpPr/>
+          <p:nvPr/>
+        </p:nvSpPr>
+        <p:spPr>
+          <a:xfrm>
+            <a:off x="7635240" y="2212848"/>
+            <a:ext cx="1325880" cy="274320"/>
+          </a:xfrm>
+          <a:prstGeom prst="roundRect">
+            <a:avLst>
+              <a:gd name="adj" fmla="val 20000"/>
+            </a:avLst>
+          </a:prstGeom>
+          <a:solidFill>
+            <a:srgbClr val="FFFFFF"/>
+          </a:solidFill>
+          <a:ln w="12700">
+            <a:solidFill>
+              <a:srgbClr val="8C8C8C"/>
+            </a:solidFill>
+          </a:ln>
+          <a:effectLst/>
+        </p:spPr>
+        <p:txBody>
+          <a:bodyPr rtlCol="0" anchor="ctr"/>
+          <a:lstStyle/>
+          <a:p>
+            <a:pPr algn="ctr"/>
+          </a:p>
+        </p:txBody>
+      </p:sp>
+      <p:sp>
+        <p:nvSpPr>
+          <p:cNvPr id="63" name="Rounded Rectangle 62"/>
+          <p:cNvSpPr/>
+          <p:nvPr/>
+        </p:nvSpPr>
+        <p:spPr>
+          <a:xfrm>
+            <a:off x="7662672" y="2240280"/>
+            <a:ext cx="190652" cy="219456"/>
+          </a:xfrm>
+          <a:prstGeom prst="roundRect">
+            <a:avLst>
+              <a:gd name="adj" fmla="val 20000"/>
+            </a:avLst>
+          </a:prstGeom>
+          <a:solidFill>
+            <a:srgbClr val="4C72B0"/>
+          </a:solidFill>
+          <a:ln>
+            <a:noFill/>
+          </a:ln>
+          <a:effectLst/>
+        </p:spPr>
+        <p:txBody>
+          <a:bodyPr rtlCol="0" anchor="ctr"/>
+          <a:lstStyle/>
+          <a:p>
+            <a:pPr algn="ctr"/>
+          </a:p>
+        </p:txBody>
+      </p:sp>
+      <p:sp>
+        <p:nvSpPr>
+          <p:cNvPr id="64" name="Rounded Rectangle 63"/>
+          <p:cNvSpPr/>
+          <p:nvPr/>
+        </p:nvSpPr>
+        <p:spPr>
+          <a:xfrm>
+            <a:off x="7635240" y="2724912"/>
+            <a:ext cx="1325880" cy="274320"/>
+          </a:xfrm>
+          <a:prstGeom prst="roundRect">
+            <a:avLst>
+              <a:gd name="adj" fmla="val 20000"/>
+            </a:avLst>
+          </a:prstGeom>
+          <a:solidFill>
+            <a:srgbClr val="FFFFFF"/>
+          </a:solidFill>
+          <a:ln w="12700">
+            <a:solidFill>
+              <a:srgbClr val="8C8C8C"/>
+            </a:solidFill>
+          </a:ln>
+          <a:effectLst/>
+        </p:spPr>
+        <p:txBody>
+          <a:bodyPr rtlCol="0" anchor="ctr"/>
+          <a:lstStyle/>
+          <a:p>
+            <a:pPr algn="ctr"/>
+          </a:p>
+        </p:txBody>
+      </p:sp>
+      <p:sp>
+        <p:nvSpPr>
+          <p:cNvPr id="65" name="Rounded Rectangle 64"/>
+          <p:cNvSpPr/>
+          <p:nvPr/>
+        </p:nvSpPr>
+        <p:spPr>
+          <a:xfrm>
+            <a:off x="7662672" y="2752344"/>
+            <a:ext cx="762609" cy="219456"/>
+          </a:xfrm>
+          <a:prstGeom prst="roundRect">
+            <a:avLst>
+              <a:gd name="adj" fmla="val 20000"/>
+            </a:avLst>
+          </a:prstGeom>
+          <a:solidFill>
+            <a:srgbClr val="7BA7D7"/>
+          </a:solidFill>
+          <a:ln>
+            <a:noFill/>
+          </a:ln>
+          <a:effectLst/>
+        </p:spPr>
+        <p:txBody>
+          <a:bodyPr rtlCol="0" anchor="ctr"/>
+          <a:lstStyle/>
+          <a:p>
+            <a:pPr algn="ctr"/>
+          </a:p>
+        </p:txBody>
+      </p:sp>
+      <p:sp>
+        <p:nvSpPr>
+          <p:cNvPr id="66" name="Rounded Rectangle 65"/>
+          <p:cNvSpPr/>
+          <p:nvPr/>
+        </p:nvSpPr>
+        <p:spPr>
+          <a:xfrm>
+            <a:off x="7635240" y="3108960"/>
+            <a:ext cx="1325880" cy="274320"/>
+          </a:xfrm>
+          <a:prstGeom prst="roundRect">
+            <a:avLst>
+              <a:gd name="adj" fmla="val 20000"/>
+            </a:avLst>
+          </a:prstGeom>
+          <a:solidFill>
+            <a:srgbClr val="FFFFFF"/>
+          </a:solidFill>
+          <a:ln w="12700">
+            <a:solidFill>
+              <a:srgbClr val="8C8C8C"/>
+            </a:solidFill>
+          </a:ln>
+          <a:effectLst/>
+        </p:spPr>
+        <p:txBody>
+          <a:bodyPr rtlCol="0" anchor="ctr"/>
+          <a:lstStyle/>
+          <a:p>
+            <a:pPr algn="ctr"/>
+          </a:p>
+        </p:txBody>
+      </p:sp>
+      <p:sp>
+        <p:nvSpPr>
+          <p:cNvPr id="67" name="Rounded Rectangle 66"/>
+          <p:cNvSpPr/>
+          <p:nvPr/>
+        </p:nvSpPr>
+        <p:spPr>
+          <a:xfrm>
+            <a:off x="7662672" y="3136392"/>
+            <a:ext cx="127101" cy="219456"/>
+          </a:xfrm>
+          <a:prstGeom prst="roundRect">
+            <a:avLst>
+              <a:gd name="adj" fmla="val 20000"/>
+            </a:avLst>
+          </a:prstGeom>
+          <a:solidFill>
+            <a:srgbClr val="7BA7D7"/>
+          </a:solidFill>
+          <a:ln>
+            <a:noFill/>
+          </a:ln>
+          <a:effectLst/>
+        </p:spPr>
+        <p:txBody>
+          <a:bodyPr rtlCol="0" anchor="ctr"/>
+          <a:lstStyle/>
+          <a:p>
+            <a:pPr algn="ctr"/>
+          </a:p>
+        </p:txBody>
+      </p:sp>
+      <p:sp>
+        <p:nvSpPr>
+          <p:cNvPr id="68" name="Rounded Rectangle 67"/>
+          <p:cNvSpPr/>
+          <p:nvPr/>
+        </p:nvSpPr>
+        <p:spPr>
+          <a:xfrm>
+            <a:off x="7635240" y="3621024"/>
+            <a:ext cx="1325880" cy="274320"/>
+          </a:xfrm>
+          <a:prstGeom prst="roundRect">
+            <a:avLst>
+              <a:gd name="adj" fmla="val 20000"/>
+            </a:avLst>
+          </a:prstGeom>
+          <a:solidFill>
+            <a:srgbClr val="FFFFFF"/>
+          </a:solidFill>
+          <a:ln w="12700">
+            <a:solidFill>
+              <a:srgbClr val="8C8C8C"/>
+            </a:solidFill>
+          </a:ln>
+          <a:effectLst/>
+        </p:spPr>
+        <p:txBody>
+          <a:bodyPr rtlCol="0" anchor="ctr"/>
+          <a:lstStyle/>
+          <a:p>
+            <a:pPr algn="ctr"/>
+          </a:p>
+        </p:txBody>
+      </p:sp>
+      <p:sp>
+        <p:nvSpPr>
+          <p:cNvPr id="69" name="Rounded Rectangle 68"/>
+          <p:cNvSpPr/>
+          <p:nvPr/>
+        </p:nvSpPr>
+        <p:spPr>
+          <a:xfrm>
+            <a:off x="7662672" y="3648456"/>
+            <a:ext cx="444855" cy="219456"/>
+          </a:xfrm>
+          <a:prstGeom prst="roundRect">
+            <a:avLst>
+              <a:gd name="adj" fmla="val 20000"/>
+            </a:avLst>
+          </a:prstGeom>
+          <a:solidFill>
+            <a:srgbClr val="5F9EA0"/>
+          </a:solidFill>
+          <a:ln>
+            <a:noFill/>
+          </a:ln>
+          <a:effectLst/>
+        </p:spPr>
+        <p:txBody>
+          <a:bodyPr rtlCol="0" anchor="ctr"/>
+          <a:lstStyle/>
+          <a:p>
+            <a:pPr algn="ctr"/>
+          </a:p>
+        </p:txBody>
+      </p:sp>
+      <p:sp>
+        <p:nvSpPr>
+          <p:cNvPr id="70" name="Rounded Rectangle 69"/>
+          <p:cNvSpPr/>
+          <p:nvPr/>
+        </p:nvSpPr>
+        <p:spPr>
+          <a:xfrm>
+            <a:off x="7635240" y="4005072"/>
+            <a:ext cx="1325880" cy="274320"/>
+          </a:xfrm>
+          <a:prstGeom prst="roundRect">
+            <a:avLst>
+              <a:gd name="adj" fmla="val 20000"/>
+            </a:avLst>
+          </a:prstGeom>
+          <a:solidFill>
+            <a:srgbClr val="FFFFFF"/>
+          </a:solidFill>
+          <a:ln w="12700">
+            <a:solidFill>
+              <a:srgbClr val="8C8C8C"/>
+            </a:solidFill>
+          </a:ln>
+          <a:effectLst/>
+        </p:spPr>
+        <p:txBody>
+          <a:bodyPr rtlCol="0" anchor="ctr"/>
+          <a:lstStyle/>
+          <a:p>
+            <a:pPr algn="ctr"/>
+          </a:p>
+        </p:txBody>
+      </p:sp>
+      <p:sp>
+        <p:nvSpPr>
+          <p:cNvPr id="71" name="Rounded Rectangle 70"/>
+          <p:cNvSpPr/>
+          <p:nvPr/>
+        </p:nvSpPr>
+        <p:spPr>
+          <a:xfrm>
+            <a:off x="7662672" y="4032504"/>
+            <a:ext cx="63550" cy="219456"/>
+          </a:xfrm>
+          <a:prstGeom prst="roundRect">
+            <a:avLst>
+              <a:gd name="adj" fmla="val 20000"/>
+            </a:avLst>
+          </a:prstGeom>
+          <a:solidFill>
+            <a:srgbClr val="5F9EA0"/>
+          </a:solidFill>
+          <a:ln>
+            <a:noFill/>
+          </a:ln>
+          <a:effectLst/>
+        </p:spPr>
+        <p:txBody>
+          <a:bodyPr rtlCol="0" anchor="ctr"/>
+          <a:lstStyle/>
+          <a:p>
+            <a:pPr algn="ctr"/>
+          </a:p>
+        </p:txBody>
+      </p:sp>
+      <p:sp>
+        <p:nvSpPr>
+          <p:cNvPr id="72" name="TextBox 71"/>
+          <p:cNvSpPr txBox="1"/>
+          <p:nvPr/>
+        </p:nvSpPr>
+        <p:spPr>
+          <a:xfrm>
+            <a:off x="7635240" y="4480560"/>
+            <a:ext cx="1463040" cy="274320"/>
+          </a:xfrm>
+          <a:prstGeom prst="rect">
+            <a:avLst/>
+          </a:prstGeom>
+          <a:noFill/>
+        </p:spPr>
+        <p:txBody>
+          <a:bodyPr wrap="square" lIns="0" rIns="0" tIns="0" bIns="0">
+            <a:spAutoFit/>
+          </a:bodyPr>
+          <a:lstStyle/>
+          <a:p>
+            <a:pPr algn="ctr"/>
+            <a:r>
+              <a:rPr sz="950" b="0" i="0">
                 <a:solidFill>
                   <a:srgbClr val="6B6A63"/>
                 </a:solidFill>
                 <a:latin typeface="Times New Roman"/>
               </a:rPr>
-              <a:t>named atom library</a:t>
-            </a:r>
-          </a:p>
-        </p:txBody>
-      </p:sp>
-      <p:cxnSp>
-        <p:nvCxnSpPr>
-          <p:cNvPr id="38" name="Connector 37"/>
-          <p:cNvCxnSpPr/>
-          <p:nvPr/>
-        </p:nvCxnSpPr>
-        <p:spPr>
-          <a:xfrm>
-            <a:off x="8970264" y="950976"/>
-            <a:ext cx="274320" cy="0"/>
-          </a:xfrm>
-          <a:prstGeom prst="line">
-            <a:avLst/>
-          </a:prstGeom>
-          <a:ln w="22860">
+              <a:t>before / after</a:t>
+            </a:r>
+          </a:p>
+        </p:txBody>
+      </p:sp>
+      <p:sp>
+        <p:nvSpPr>
+          <p:cNvPr id="73" name="Rounded Rectangle 72"/>
+          <p:cNvSpPr/>
+          <p:nvPr/>
+        </p:nvSpPr>
+        <p:spPr>
+          <a:xfrm>
+            <a:off x="5623560" y="5074920"/>
+            <a:ext cx="3337560" cy="384048"/>
+          </a:xfrm>
+          <a:prstGeom prst="roundRect">
+            <a:avLst>
+              <a:gd name="adj" fmla="val 25000"/>
+            </a:avLst>
+          </a:prstGeom>
+          <a:solidFill>
+            <a:srgbClr val="FFFFFF"/>
+          </a:solidFill>
+          <a:ln w="15240">
             <a:solidFill>
               <a:srgbClr val="8C8C8C"/>
             </a:solidFill>
-            <a:tailEnd type="triangle" w="med" len="med"/>
-          </a:ln>
-          <a:effectLst/>
-        </p:spPr>
-      </p:cxnSp>
-      <p:sp>
-        <p:nvSpPr>
-          <p:cNvPr id="39" name="Folded Corner 38"/>
+          </a:ln>
+          <a:effectLst/>
+        </p:spPr>
+        <p:txBody>
+          <a:bodyPr rtlCol="0" anchor="ctr"/>
+          <a:lstStyle/>
+          <a:p>
+            <a:pPr algn="ctr"/>
+          </a:p>
+        </p:txBody>
+      </p:sp>
+      <p:sp>
+        <p:nvSpPr>
+          <p:cNvPr id="74" name="Rounded Rectangle 73"/>
           <p:cNvSpPr/>
           <p:nvPr/>
         </p:nvSpPr>
         <p:spPr>
           <a:xfrm>
-            <a:off x="9272016" y="548640"/>
-            <a:ext cx="1188720" cy="841248"/>
-          </a:xfrm>
-          <a:prstGeom prst="foldedCorner">
+            <a:off x="5660136" y="5120640"/>
+            <a:ext cx="3017520" cy="292608"/>
+          </a:xfrm>
+          <a:prstGeom prst="roundRect">
+            <a:avLst>
+              <a:gd name="adj" fmla="val 25000"/>
+            </a:avLst>
+          </a:prstGeom>
+          <a:solidFill>
+            <a:srgbClr val="4C72B0"/>
+          </a:solidFill>
+          <a:ln>
+            <a:noFill/>
+          </a:ln>
+          <a:effectLst/>
+        </p:spPr>
+        <p:txBody>
+          <a:bodyPr rtlCol="0" anchor="ctr"/>
+          <a:lstStyle/>
+          <a:p>
+            <a:pPr algn="ctr"/>
+          </a:p>
+        </p:txBody>
+      </p:sp>
+      <p:sp>
+        <p:nvSpPr>
+          <p:cNvPr id="75" name="TextBox 74"/>
+          <p:cNvSpPr txBox="1"/>
+          <p:nvPr/>
+        </p:nvSpPr>
+        <p:spPr>
+          <a:xfrm>
+            <a:off x="5623560" y="5541264"/>
+            <a:ext cx="3383280" cy="320040"/>
+          </a:xfrm>
+          <a:prstGeom prst="rect">
             <a:avLst/>
           </a:prstGeom>
-          <a:solidFill>
-            <a:srgbClr val="DDE9F7"/>
-          </a:solidFill>
-          <a:ln w="15240">
+          <a:noFill/>
+        </p:spPr>
+        <p:txBody>
+          <a:bodyPr wrap="square" lIns="0" rIns="0" tIns="0" bIns="0">
+            <a:spAutoFit/>
+          </a:bodyPr>
+          <a:lstStyle/>
+          <a:p>
+            <a:pPr algn="ctr"/>
+            <a:r>
+              <a:rPr sz="1050" b="1" i="0">
+                <a:solidFill>
+                  <a:srgbClr val="4C72B0"/>
+                </a:solidFill>
+                <a:latin typeface="Times New Roman"/>
+              </a:rPr>
+              <a:t>budget spent only inside the ledger</a:t>
+            </a:r>
+          </a:p>
+        </p:txBody>
+      </p:sp>
+      <p:sp>
+        <p:nvSpPr>
+          <p:cNvPr id="76" name="Rounded Rectangle 75"/>
+          <p:cNvSpPr/>
+          <p:nvPr/>
+        </p:nvSpPr>
+        <p:spPr>
+          <a:xfrm>
+            <a:off x="9966960" y="1691640"/>
+            <a:ext cx="1188720" cy="914400"/>
+          </a:xfrm>
+          <a:prstGeom prst="roundRect">
+            <a:avLst>
+              <a:gd name="adj" fmla="val 25000"/>
+            </a:avLst>
+          </a:prstGeom>
+          <a:solidFill>
+            <a:srgbClr val="EEF2F9"/>
+          </a:solidFill>
+          <a:ln w="20320">
             <a:solidFill>
               <a:srgbClr val="4C72B0"/>
             </a:solidFill>
@@ -4437,14 +5706,166 @@
       </p:sp>
       <p:sp>
         <p:nvSpPr>
-          <p:cNvPr id="40" name="TextBox 39"/>
+          <p:cNvPr id="77" name="Rectangle 76"/>
+          <p:cNvSpPr/>
+          <p:nvPr/>
+        </p:nvSpPr>
+        <p:spPr>
+          <a:xfrm>
+            <a:off x="10550347" y="1563624"/>
+            <a:ext cx="21945" cy="128016"/>
+          </a:xfrm>
+          <a:prstGeom prst="rect">
+            <a:avLst/>
+          </a:prstGeom>
+          <a:solidFill>
+            <a:srgbClr val="4C72B0"/>
+          </a:solidFill>
+          <a:ln>
+            <a:noFill/>
+          </a:ln>
+          <a:effectLst/>
+        </p:spPr>
+        <p:txBody>
+          <a:bodyPr rtlCol="0" anchor="ctr"/>
+          <a:lstStyle/>
+          <a:p>
+            <a:pPr algn="ctr"/>
+          </a:p>
+        </p:txBody>
+      </p:sp>
+      <p:sp>
+        <p:nvSpPr>
+          <p:cNvPr id="78" name="Oval 77"/>
+          <p:cNvSpPr/>
+          <p:nvPr/>
+        </p:nvSpPr>
+        <p:spPr>
+          <a:xfrm>
+            <a:off x="10515600" y="1472184"/>
+            <a:ext cx="91440" cy="91440"/>
+          </a:xfrm>
+          <a:prstGeom prst="ellipse">
+            <a:avLst/>
+          </a:prstGeom>
+          <a:solidFill>
+            <a:srgbClr val="4C72B0"/>
+          </a:solidFill>
+          <a:ln>
+            <a:noFill/>
+          </a:ln>
+          <a:effectLst/>
+        </p:spPr>
+        <p:txBody>
+          <a:bodyPr rtlCol="0" anchor="ctr"/>
+          <a:lstStyle/>
+          <a:p>
+            <a:pPr algn="ctr"/>
+          </a:p>
+        </p:txBody>
+      </p:sp>
+      <p:sp>
+        <p:nvSpPr>
+          <p:cNvPr id="79" name="Oval 78"/>
+          <p:cNvSpPr/>
+          <p:nvPr/>
+        </p:nvSpPr>
+        <p:spPr>
+          <a:xfrm>
+            <a:off x="10306202" y="2016252"/>
+            <a:ext cx="82296" cy="82296"/>
+          </a:xfrm>
+          <a:prstGeom prst="ellipse">
+            <a:avLst/>
+          </a:prstGeom>
+          <a:solidFill>
+            <a:srgbClr val="4C72B0"/>
+          </a:solidFill>
+          <a:ln>
+            <a:noFill/>
+          </a:ln>
+          <a:effectLst/>
+        </p:spPr>
+        <p:txBody>
+          <a:bodyPr rtlCol="0" anchor="ctr"/>
+          <a:lstStyle/>
+          <a:p>
+            <a:pPr algn="ctr"/>
+          </a:p>
+        </p:txBody>
+      </p:sp>
+      <p:sp>
+        <p:nvSpPr>
+          <p:cNvPr id="80" name="Oval 79"/>
+          <p:cNvSpPr/>
+          <p:nvPr/>
+        </p:nvSpPr>
+        <p:spPr>
+          <a:xfrm>
+            <a:off x="10734141" y="2016252"/>
+            <a:ext cx="82296" cy="82296"/>
+          </a:xfrm>
+          <a:prstGeom prst="ellipse">
+            <a:avLst/>
+          </a:prstGeom>
+          <a:solidFill>
+            <a:srgbClr val="4C72B0"/>
+          </a:solidFill>
+          <a:ln>
+            <a:noFill/>
+          </a:ln>
+          <a:effectLst/>
+        </p:spPr>
+        <p:txBody>
+          <a:bodyPr rtlCol="0" anchor="ctr"/>
+          <a:lstStyle/>
+          <a:p>
+            <a:pPr algn="ctr"/>
+          </a:p>
+        </p:txBody>
+      </p:sp>
+      <p:sp>
+        <p:nvSpPr>
+          <p:cNvPr id="81" name="Rounded Rectangle 80"/>
+          <p:cNvSpPr/>
+          <p:nvPr/>
+        </p:nvSpPr>
+        <p:spPr>
+          <a:xfrm>
+            <a:off x="10394899" y="2258568"/>
+            <a:ext cx="332841" cy="27432"/>
+          </a:xfrm>
+          <a:prstGeom prst="roundRect">
+            <a:avLst>
+              <a:gd name="adj" fmla="val 50000"/>
+            </a:avLst>
+          </a:prstGeom>
+          <a:solidFill>
+            <a:srgbClr val="4C72B0"/>
+          </a:solidFill>
+          <a:ln>
+            <a:noFill/>
+          </a:ln>
+          <a:effectLst/>
+        </p:spPr>
+        <p:txBody>
+          <a:bodyPr rtlCol="0" anchor="ctr"/>
+          <a:lstStyle/>
+          <a:p>
+            <a:pPr algn="ctr"/>
+          </a:p>
+        </p:txBody>
+      </p:sp>
+      <p:sp>
+        <p:nvSpPr>
+          <p:cNvPr id="82" name="TextBox 81"/>
           <p:cNvSpPr txBox="1"/>
           <p:nvPr/>
         </p:nvSpPr>
         <p:spPr>
           <a:xfrm>
-            <a:off x="9290304" y="717803"/>
-            <a:ext cx="1152144" cy="548640"/>
+            <a:off x="9646920" y="2642616"/>
+            <a:ext cx="1828800" cy="256032"/>
           </a:xfrm>
           <a:prstGeom prst="rect">
             <a:avLst/>
@@ -4459,51 +5880,176 @@
           <a:p>
             <a:pPr algn="ctr"/>
             <a:r>
-              <a:rPr sz="750" b="1" i="0">
+              <a:rPr sz="1200" b="1" i="0">
                 <a:solidFill>
                   <a:srgbClr val="1F1F1E"/>
                 </a:solidFill>
                 <a:latin typeface="Times New Roman"/>
               </a:rPr>
-              <a:t>TASK SPEC</a:t>
-            </a:r>
-          </a:p>
-          <a:p>
-            <a:pPr algn="ctr"/>
-            <a:r>
-              <a:rPr sz="750" b="1" i="0">
+              <a:t>Student Agent</a:t>
+            </a:r>
+          </a:p>
+        </p:txBody>
+      </p:sp>
+      <p:sp>
+        <p:nvSpPr>
+          <p:cNvPr id="83" name="Oval 82"/>
+          <p:cNvSpPr/>
+          <p:nvPr/>
+        </p:nvSpPr>
+        <p:spPr>
+          <a:xfrm>
+            <a:off x="10058400" y="3429000"/>
+            <a:ext cx="1234440" cy="1234440"/>
+          </a:xfrm>
+          <a:prstGeom prst="ellipse">
+            <a:avLst/>
+          </a:prstGeom>
+          <a:solidFill>
+            <a:srgbClr val="55A868"/>
+          </a:solidFill>
+          <a:ln w="27940">
+            <a:solidFill>
+              <a:srgbClr val="FFFFFF"/>
+            </a:solidFill>
+          </a:ln>
+          <a:effectLst/>
+        </p:spPr>
+        <p:txBody>
+          <a:bodyPr rtlCol="0" anchor="ctr"/>
+          <a:lstStyle/>
+          <a:p>
+            <a:pPr algn="ctr"/>
+          </a:p>
+        </p:txBody>
+      </p:sp>
+      <p:sp>
+        <p:nvSpPr>
+          <p:cNvPr id="84" name="TextBox 83"/>
+          <p:cNvSpPr txBox="1"/>
+          <p:nvPr/>
+        </p:nvSpPr>
+        <p:spPr>
+          <a:xfrm>
+            <a:off x="10058400" y="3749039"/>
+            <a:ext cx="1234440" cy="365760"/>
+          </a:xfrm>
+          <a:prstGeom prst="rect">
+            <a:avLst/>
+          </a:prstGeom>
+          <a:noFill/>
+        </p:spPr>
+        <p:txBody>
+          <a:bodyPr wrap="square" lIns="0" rIns="0" tIns="0" bIns="0">
+            <a:spAutoFit/>
+          </a:bodyPr>
+          <a:lstStyle/>
+          <a:p>
+            <a:pPr algn="ctr"/>
+            <a:r>
+              <a:rPr sz="950" b="1" i="0">
+                <a:solidFill>
+                  <a:srgbClr val="FFFFFF"/>
+                </a:solidFill>
+                <a:latin typeface="Times New Roman"/>
+              </a:rPr>
+              <a:t>CERTIFIED</a:t>
+            </a:r>
+          </a:p>
+        </p:txBody>
+      </p:sp>
+      <p:sp>
+        <p:nvSpPr>
+          <p:cNvPr id="85" name="TextBox 84"/>
+          <p:cNvSpPr txBox="1"/>
+          <p:nvPr/>
+        </p:nvSpPr>
+        <p:spPr>
+          <a:xfrm>
+            <a:off x="10058400" y="4041648"/>
+            <a:ext cx="1234440" cy="320040"/>
+          </a:xfrm>
+          <a:prstGeom prst="rect">
+            <a:avLst/>
+          </a:prstGeom>
+          <a:noFill/>
+        </p:spPr>
+        <p:txBody>
+          <a:bodyPr wrap="square" lIns="0" rIns="0" tIns="0" bIns="0">
+            <a:spAutoFit/>
+          </a:bodyPr>
+          <a:lstStyle/>
+          <a:p>
+            <a:pPr algn="ctr"/>
+            <a:r>
+              <a:rPr sz="1400" b="1" i="0">
+                <a:solidFill>
+                  <a:srgbClr val="FFFFFF"/>
+                </a:solidFill>
+                <a:latin typeface="Times New Roman"/>
+              </a:rPr>
+              <a:t>✓</a:t>
+            </a:r>
+          </a:p>
+        </p:txBody>
+      </p:sp>
+      <p:sp>
+        <p:nvSpPr>
+          <p:cNvPr id="86" name="TextBox 85"/>
+          <p:cNvSpPr txBox="1"/>
+          <p:nvPr/>
+        </p:nvSpPr>
+        <p:spPr>
+          <a:xfrm>
+            <a:off x="9555480" y="4846320"/>
+            <a:ext cx="2468880" cy="594360"/>
+          </a:xfrm>
+          <a:prstGeom prst="rect">
+            <a:avLst/>
+          </a:prstGeom>
+          <a:noFill/>
+        </p:spPr>
+        <p:txBody>
+          <a:bodyPr wrap="square" lIns="0" rIns="0" tIns="0" bIns="0">
+            <a:spAutoFit/>
+          </a:bodyPr>
+          <a:lstStyle/>
+          <a:p>
+            <a:pPr algn="ctr"/>
+            <a:r>
+              <a:rPr sz="1250" b="1" i="0">
                 <a:solidFill>
                   <a:srgbClr val="1F1F1E"/>
                 </a:solidFill>
                 <a:latin typeface="Times New Roman"/>
               </a:rPr>
-              <a:t>atom support</a:t>
-            </a:r>
-          </a:p>
-          <a:p>
-            <a:pPr algn="ctr"/>
-            <a:r>
-              <a:rPr sz="750" b="1" i="0">
+              <a:t>in-task ≥ 0.93</a:t>
+            </a:r>
+          </a:p>
+          <a:p>
+            <a:pPr algn="ctr"/>
+            <a:r>
+              <a:rPr sz="1250" b="1" i="0">
                 <a:solidFill>
                   <a:srgbClr val="1F1F1E"/>
                 </a:solidFill>
                 <a:latin typeface="Times New Roman"/>
               </a:rPr>
-              <a:t>+ threshold τ</a:t>
-            </a:r>
-          </a:p>
-        </p:txBody>
-      </p:sp>
-      <p:sp>
-        <p:nvSpPr>
-          <p:cNvPr id="41" name="TextBox 40"/>
+              <a:t>off-task ≤ 0.25</a:t>
+            </a:r>
+          </a:p>
+        </p:txBody>
+      </p:sp>
+      <p:sp>
+        <p:nvSpPr>
+          <p:cNvPr id="87" name="TextBox 86"/>
           <p:cNvSpPr txBox="1"/>
           <p:nvPr/>
         </p:nvSpPr>
         <p:spPr>
           <a:xfrm>
-            <a:off x="10515600" y="548640"/>
-            <a:ext cx="1645920" cy="822960"/>
+            <a:off x="9528048" y="5596128"/>
+            <a:ext cx="2514600" cy="457200"/>
           </a:xfrm>
           <a:prstGeom prst="rect">
             <a:avLst/>
@@ -4516,2256 +6062,19 @@
           </a:bodyPr>
           <a:lstStyle/>
           <a:p>
-            <a:pPr algn="l"/>
-            <a:r>
-              <a:rPr sz="800" b="0" i="0">
+            <a:pPr algn="ctr"/>
+            <a:r>
+              <a:rPr sz="950" b="0" i="0">
                 <a:solidFill>
                   <a:srgbClr val="6B6A63"/>
                 </a:solidFill>
                 <a:latin typeface="Times New Roman"/>
               </a:rPr>
-              <a:t>the specification:</a:t>
-            </a:r>
-          </a:p>
-          <a:p>
-            <a:pPr algn="l"/>
-            <a:r>
-              <a:rPr sz="800" b="0" i="0">
-                <a:solidFill>
-                  <a:srgbClr val="6B6A63"/>
-                </a:solidFill>
-                <a:latin typeface="Times New Roman"/>
-              </a:rPr>
-              <a:t>what the task needs,</a:t>
-            </a:r>
-          </a:p>
-          <a:p>
-            <a:pPr algn="l"/>
-            <a:r>
-              <a:rPr sz="800" b="0" i="0">
-                <a:solidFill>
-                  <a:srgbClr val="6B6A63"/>
-                </a:solidFill>
-                <a:latin typeface="Times New Roman"/>
-              </a:rPr>
-              <a:t>read before any</a:t>
-            </a:r>
-          </a:p>
-          <a:p>
-            <a:pPr algn="l"/>
-            <a:r>
-              <a:rPr sz="800" b="0" i="0">
-                <a:solidFill>
-                  <a:srgbClr val="6B6A63"/>
-                </a:solidFill>
-                <a:latin typeface="Times New Roman"/>
-              </a:rPr>
-              <a:t>training</a:t>
-            </a:r>
-          </a:p>
-        </p:txBody>
-      </p:sp>
-      <p:cxnSp>
-        <p:nvCxnSpPr>
-          <p:cNvPr id="42" name="Connector 41"/>
-          <p:cNvCxnSpPr/>
-          <p:nvPr/>
-        </p:nvCxnSpPr>
-        <p:spPr>
-          <a:xfrm>
-            <a:off x="9866376" y="1417320"/>
-            <a:ext cx="0" cy="1453896"/>
-          </a:xfrm>
-          <a:prstGeom prst="line">
-            <a:avLst/>
-          </a:prstGeom>
-          <a:ln w="22860">
-            <a:solidFill>
-              <a:srgbClr val="4C72B0"/>
-            </a:solidFill>
-            <a:tailEnd type="triangle" w="med" len="med"/>
-          </a:ln>
-          <a:effectLst/>
-        </p:spPr>
-      </p:cxnSp>
-      <p:cxnSp>
-        <p:nvCxnSpPr>
-          <p:cNvPr id="43" name="Connector 42"/>
-          <p:cNvCxnSpPr/>
-          <p:nvPr/>
-        </p:nvCxnSpPr>
-        <p:spPr>
-          <a:xfrm flipH="1">
-            <a:off x="4434840" y="1188720"/>
-            <a:ext cx="4892040" cy="1600200"/>
-          </a:xfrm>
-          <a:prstGeom prst="line">
-            <a:avLst/>
-          </a:prstGeom>
-          <a:ln w="22860">
-            <a:solidFill>
-              <a:srgbClr val="4C72B0"/>
-            </a:solidFill>
-            <a:tailEnd type="triangle" w="med" len="med"/>
-          </a:ln>
-          <a:effectLst/>
-        </p:spPr>
-      </p:cxnSp>
-      <p:sp>
-        <p:nvSpPr>
-          <p:cNvPr id="44" name="TextBox 43"/>
-          <p:cNvSpPr txBox="1"/>
-          <p:nvPr/>
-        </p:nvSpPr>
-        <p:spPr>
-          <a:xfrm>
-            <a:off x="5760720" y="2084831"/>
-            <a:ext cx="1463040" cy="237744"/>
-          </a:xfrm>
-          <a:prstGeom prst="rect">
-            <a:avLst/>
-          </a:prstGeom>
-          <a:noFill/>
-        </p:spPr>
-        <p:txBody>
-          <a:bodyPr wrap="square" lIns="0" rIns="0" tIns="0" bIns="0">
-            <a:spAutoFit/>
-          </a:bodyPr>
-          <a:lstStyle/>
-          <a:p>
-            <a:pPr algn="ctr"/>
-            <a:r>
-              <a:rPr sz="800" b="1" i="1">
-                <a:solidFill>
-                  <a:srgbClr val="4C72B0"/>
-                </a:solidFill>
-                <a:latin typeface="Times New Roman"/>
-              </a:rPr>
-              <a:t>gates the diet</a:t>
-            </a:r>
-          </a:p>
-        </p:txBody>
-      </p:sp>
-      <p:cxnSp>
-        <p:nvCxnSpPr>
-          <p:cNvPr id="45" name="Connector 44"/>
-          <p:cNvCxnSpPr/>
-          <p:nvPr/>
-        </p:nvCxnSpPr>
-        <p:spPr>
-          <a:xfrm flipV="1">
-            <a:off x="2633472" y="2944368"/>
-            <a:ext cx="365760" cy="457200"/>
-          </a:xfrm>
-          <a:prstGeom prst="line">
-            <a:avLst/>
-          </a:prstGeom>
-          <a:ln w="17780">
-            <a:solidFill>
-              <a:srgbClr val="8C8C8C"/>
-            </a:solidFill>
-            <a:tailEnd type="triangle" w="med" len="med"/>
-          </a:ln>
-          <a:effectLst/>
-        </p:spPr>
-      </p:cxnSp>
-      <p:sp>
-        <p:nvSpPr>
-          <p:cNvPr id="46" name="Rounded Rectangle 45"/>
-          <p:cNvSpPr/>
-          <p:nvPr/>
-        </p:nvSpPr>
-        <p:spPr>
-          <a:xfrm>
-            <a:off x="3035808" y="2724912"/>
-            <a:ext cx="1371600" cy="475488"/>
-          </a:xfrm>
-          <a:prstGeom prst="roundRect">
-            <a:avLst>
-              <a:gd name="adj" fmla="val 12000"/>
-            </a:avLst>
-          </a:prstGeom>
-          <a:solidFill>
-            <a:srgbClr val="E6DCEF"/>
-          </a:solidFill>
-          <a:ln w="16510">
-            <a:solidFill>
-              <a:srgbClr val="8E6BAE"/>
-            </a:solidFill>
-          </a:ln>
-          <a:effectLst/>
-        </p:spPr>
-        <p:txBody>
-          <a:bodyPr rtlCol="0" anchor="ctr"/>
-          <a:lstStyle/>
-          <a:p>
-            <a:pPr algn="ctr"/>
-          </a:p>
-        </p:txBody>
-      </p:sp>
-      <p:sp>
-        <p:nvSpPr>
-          <p:cNvPr id="47" name="TextBox 46"/>
-          <p:cNvSpPr txBox="1"/>
-          <p:nvPr/>
-        </p:nvSpPr>
-        <p:spPr>
-          <a:xfrm>
-            <a:off x="3063239" y="2770632"/>
-            <a:ext cx="1316736" cy="261518"/>
-          </a:xfrm>
-          <a:prstGeom prst="rect">
-            <a:avLst/>
-          </a:prstGeom>
-          <a:noFill/>
-        </p:spPr>
-        <p:txBody>
-          <a:bodyPr wrap="square" lIns="0" rIns="0" tIns="0" bIns="0">
-            <a:spAutoFit/>
-          </a:bodyPr>
-          <a:lstStyle/>
-          <a:p>
-            <a:pPr algn="ctr"/>
-            <a:r>
-              <a:rPr sz="750" b="1" i="0">
-                <a:solidFill>
-                  <a:srgbClr val="1F1F1E"/>
-                </a:solidFill>
-                <a:latin typeface="Times New Roman"/>
-              </a:rPr>
-              <a:t>score trace</a:t>
-            </a:r>
-          </a:p>
-        </p:txBody>
-      </p:sp>
-      <p:sp>
-        <p:nvSpPr>
-          <p:cNvPr id="48" name="Rounded Rectangle 47"/>
-          <p:cNvSpPr/>
-          <p:nvPr/>
-        </p:nvSpPr>
-        <p:spPr>
-          <a:xfrm>
-            <a:off x="3099815" y="2980944"/>
-            <a:ext cx="1243584" cy="164592"/>
-          </a:xfrm>
-          <a:prstGeom prst="roundRect">
-            <a:avLst>
-              <a:gd name="adj" fmla="val 30000"/>
-            </a:avLst>
-          </a:prstGeom>
-          <a:solidFill>
-            <a:srgbClr val="FFFFFF"/>
-          </a:solidFill>
-          <a:ln w="9525">
-            <a:solidFill>
-              <a:srgbClr val="8E6BAE"/>
-            </a:solidFill>
-          </a:ln>
-          <a:effectLst/>
-        </p:spPr>
-        <p:txBody>
-          <a:bodyPr rtlCol="0" anchor="ctr" lIns="9000" rIns="9000" tIns="4500" bIns="4500" wrap="square"/>
-          <a:lstStyle/>
-          <a:p>
-            <a:pPr algn="ctr"/>
-            <a:r>
-              <a:rPr sz="650" b="0" i="0">
-                <a:solidFill>
-                  <a:srgbClr val="6B6A63"/>
-                </a:solidFill>
-                <a:latin typeface="Times New Roman"/>
-              </a:rPr>
-              <a:t>in-spec − λ·out</a:t>
-            </a:r>
-          </a:p>
-        </p:txBody>
-      </p:sp>
-      <p:cxnSp>
-        <p:nvCxnSpPr>
-          <p:cNvPr id="49" name="Connector 48"/>
-          <p:cNvCxnSpPr/>
-          <p:nvPr/>
-        </p:nvCxnSpPr>
-        <p:spPr>
-          <a:xfrm>
-            <a:off x="2633472" y="3401568"/>
-            <a:ext cx="365760" cy="109728"/>
-          </a:xfrm>
-          <a:prstGeom prst="line">
-            <a:avLst/>
-          </a:prstGeom>
-          <a:ln w="17780">
-            <a:solidFill>
-              <a:srgbClr val="8C8C8C"/>
-            </a:solidFill>
-            <a:tailEnd type="triangle" w="med" len="med"/>
-          </a:ln>
-          <a:effectLst/>
-        </p:spPr>
-      </p:cxnSp>
-      <p:sp>
-        <p:nvSpPr>
-          <p:cNvPr id="50" name="Rounded Rectangle 49"/>
-          <p:cNvSpPr/>
-          <p:nvPr/>
-        </p:nvSpPr>
-        <p:spPr>
-          <a:xfrm>
-            <a:off x="3035808" y="3291840"/>
-            <a:ext cx="1371600" cy="475488"/>
-          </a:xfrm>
-          <a:prstGeom prst="roundRect">
-            <a:avLst>
-              <a:gd name="adj" fmla="val 12000"/>
-            </a:avLst>
-          </a:prstGeom>
-          <a:solidFill>
-            <a:srgbClr val="E6DCEF"/>
-          </a:solidFill>
-          <a:ln w="16510">
-            <a:solidFill>
-              <a:srgbClr val="8E6BAE"/>
-            </a:solidFill>
-          </a:ln>
-          <a:effectLst/>
-        </p:spPr>
-        <p:txBody>
-          <a:bodyPr rtlCol="0" anchor="ctr"/>
-          <a:lstStyle/>
-          <a:p>
-            <a:pPr algn="ctr"/>
-          </a:p>
-        </p:txBody>
-      </p:sp>
-      <p:sp>
-        <p:nvSpPr>
-          <p:cNvPr id="51" name="TextBox 50"/>
-          <p:cNvSpPr txBox="1"/>
-          <p:nvPr/>
-        </p:nvSpPr>
-        <p:spPr>
-          <a:xfrm>
-            <a:off x="3063239" y="3337560"/>
-            <a:ext cx="1316736" cy="261518"/>
-          </a:xfrm>
-          <a:prstGeom prst="rect">
-            <a:avLst/>
-          </a:prstGeom>
-          <a:noFill/>
-        </p:spPr>
-        <p:txBody>
-          <a:bodyPr wrap="square" lIns="0" rIns="0" tIns="0" bIns="0">
-            <a:spAutoFit/>
-          </a:bodyPr>
-          <a:lstStyle/>
-          <a:p>
-            <a:pPr algn="ctr"/>
-            <a:r>
-              <a:rPr sz="750" b="1" i="0">
-                <a:solidFill>
-                  <a:srgbClr val="1F1F1E"/>
-                </a:solidFill>
-                <a:latin typeface="Times New Roman"/>
-              </a:rPr>
-              <a:t>score trace</a:t>
-            </a:r>
-          </a:p>
-        </p:txBody>
-      </p:sp>
-      <p:sp>
-        <p:nvSpPr>
-          <p:cNvPr id="52" name="Rounded Rectangle 51"/>
-          <p:cNvSpPr/>
-          <p:nvPr/>
-        </p:nvSpPr>
-        <p:spPr>
-          <a:xfrm>
-            <a:off x="3099815" y="3547872"/>
-            <a:ext cx="1243584" cy="164592"/>
-          </a:xfrm>
-          <a:prstGeom prst="roundRect">
-            <a:avLst>
-              <a:gd name="adj" fmla="val 30000"/>
-            </a:avLst>
-          </a:prstGeom>
-          <a:solidFill>
-            <a:srgbClr val="FFFFFF"/>
-          </a:solidFill>
-          <a:ln w="9525">
-            <a:solidFill>
-              <a:srgbClr val="8E6BAE"/>
-            </a:solidFill>
-          </a:ln>
-          <a:effectLst/>
-        </p:spPr>
-        <p:txBody>
-          <a:bodyPr rtlCol="0" anchor="ctr" lIns="9000" rIns="9000" tIns="4500" bIns="4500" wrap="square"/>
-          <a:lstStyle/>
-          <a:p>
-            <a:pPr algn="ctr"/>
-            <a:r>
-              <a:rPr sz="650" b="0" i="0">
-                <a:solidFill>
-                  <a:srgbClr val="6B6A63"/>
-                </a:solidFill>
-                <a:latin typeface="Times New Roman"/>
-              </a:rPr>
-              <a:t>in-spec − λ·out</a:t>
-            </a:r>
-          </a:p>
-        </p:txBody>
-      </p:sp>
-      <p:cxnSp>
-        <p:nvCxnSpPr>
-          <p:cNvPr id="53" name="Connector 52"/>
-          <p:cNvCxnSpPr/>
-          <p:nvPr/>
-        </p:nvCxnSpPr>
-        <p:spPr>
-          <a:xfrm>
-            <a:off x="2633472" y="3401568"/>
-            <a:ext cx="365760" cy="676656"/>
-          </a:xfrm>
-          <a:prstGeom prst="line">
-            <a:avLst/>
-          </a:prstGeom>
-          <a:ln w="17780">
-            <a:solidFill>
-              <a:srgbClr val="8C8C8C"/>
-            </a:solidFill>
-            <a:tailEnd type="triangle" w="med" len="med"/>
-          </a:ln>
-          <a:effectLst/>
-        </p:spPr>
-      </p:cxnSp>
-      <p:sp>
-        <p:nvSpPr>
-          <p:cNvPr id="54" name="Rounded Rectangle 53"/>
-          <p:cNvSpPr/>
-          <p:nvPr/>
-        </p:nvSpPr>
-        <p:spPr>
-          <a:xfrm>
-            <a:off x="3035808" y="3858768"/>
-            <a:ext cx="1371600" cy="475488"/>
-          </a:xfrm>
-          <a:prstGeom prst="roundRect">
-            <a:avLst>
-              <a:gd name="adj" fmla="val 12000"/>
-            </a:avLst>
-          </a:prstGeom>
-          <a:solidFill>
-            <a:srgbClr val="E6DCEF"/>
-          </a:solidFill>
-          <a:ln w="16510">
-            <a:solidFill>
-              <a:srgbClr val="8E6BAE"/>
-            </a:solidFill>
-          </a:ln>
-          <a:effectLst/>
-        </p:spPr>
-        <p:txBody>
-          <a:bodyPr rtlCol="0" anchor="ctr"/>
-          <a:lstStyle/>
-          <a:p>
-            <a:pPr algn="ctr"/>
-          </a:p>
-        </p:txBody>
-      </p:sp>
-      <p:sp>
-        <p:nvSpPr>
-          <p:cNvPr id="55" name="TextBox 54"/>
-          <p:cNvSpPr txBox="1"/>
-          <p:nvPr/>
-        </p:nvSpPr>
-        <p:spPr>
-          <a:xfrm>
-            <a:off x="3063239" y="3904487"/>
-            <a:ext cx="1316736" cy="261518"/>
-          </a:xfrm>
-          <a:prstGeom prst="rect">
-            <a:avLst/>
-          </a:prstGeom>
-          <a:noFill/>
-        </p:spPr>
-        <p:txBody>
-          <a:bodyPr wrap="square" lIns="0" rIns="0" tIns="0" bIns="0">
-            <a:spAutoFit/>
-          </a:bodyPr>
-          <a:lstStyle/>
-          <a:p>
-            <a:pPr algn="ctr"/>
-            <a:r>
-              <a:rPr sz="750" b="1" i="0">
-                <a:solidFill>
-                  <a:srgbClr val="1F1F1E"/>
-                </a:solidFill>
-                <a:latin typeface="Times New Roman"/>
-              </a:rPr>
-              <a:t>score trace</a:t>
-            </a:r>
-          </a:p>
-        </p:txBody>
-      </p:sp>
-      <p:sp>
-        <p:nvSpPr>
-          <p:cNvPr id="56" name="Rounded Rectangle 55"/>
-          <p:cNvSpPr/>
-          <p:nvPr/>
-        </p:nvSpPr>
-        <p:spPr>
-          <a:xfrm>
-            <a:off x="3099815" y="4114800"/>
-            <a:ext cx="1243584" cy="164592"/>
-          </a:xfrm>
-          <a:prstGeom prst="roundRect">
-            <a:avLst>
-              <a:gd name="adj" fmla="val 30000"/>
-            </a:avLst>
-          </a:prstGeom>
-          <a:solidFill>
-            <a:srgbClr val="FFFFFF"/>
-          </a:solidFill>
-          <a:ln w="9525">
-            <a:solidFill>
-              <a:srgbClr val="8E6BAE"/>
-            </a:solidFill>
-          </a:ln>
-          <a:effectLst/>
-        </p:spPr>
-        <p:txBody>
-          <a:bodyPr rtlCol="0" anchor="ctr" lIns="9000" rIns="9000" tIns="4500" bIns="4500" wrap="square"/>
-          <a:lstStyle/>
-          <a:p>
-            <a:pPr algn="ctr"/>
-            <a:r>
-              <a:rPr sz="650" b="0" i="0">
-                <a:solidFill>
-                  <a:srgbClr val="6B6A63"/>
-                </a:solidFill>
-                <a:latin typeface="Times New Roman"/>
-              </a:rPr>
-              <a:t>in-spec − λ·out</a:t>
-            </a:r>
-          </a:p>
-        </p:txBody>
-      </p:sp>
-      <p:sp>
-        <p:nvSpPr>
-          <p:cNvPr id="57" name="TextBox 56"/>
-          <p:cNvSpPr txBox="1"/>
-          <p:nvPr/>
-        </p:nvSpPr>
-        <p:spPr>
-          <a:xfrm>
-            <a:off x="3611880" y="4443984"/>
-            <a:ext cx="457200" cy="274320"/>
-          </a:xfrm>
-          <a:prstGeom prst="rect">
-            <a:avLst/>
-          </a:prstGeom>
-          <a:noFill/>
-        </p:spPr>
-        <p:txBody>
-          <a:bodyPr wrap="square" lIns="0" rIns="0" tIns="0" bIns="0">
-            <a:spAutoFit/>
-          </a:bodyPr>
-          <a:lstStyle/>
-          <a:p>
-            <a:pPr algn="ctr"/>
-            <a:r>
-              <a:rPr sz="1200" b="0" i="0">
-                <a:solidFill>
-                  <a:srgbClr val="6B6A63"/>
-                </a:solidFill>
-                <a:latin typeface="Times New Roman"/>
-              </a:rPr>
-              <a:t>⋮</a:t>
-            </a:r>
-          </a:p>
-        </p:txBody>
-      </p:sp>
-      <p:cxnSp>
-        <p:nvCxnSpPr>
-          <p:cNvPr id="58" name="Connector 57"/>
-          <p:cNvCxnSpPr/>
-          <p:nvPr/>
-        </p:nvCxnSpPr>
-        <p:spPr>
-          <a:xfrm>
-            <a:off x="4425696" y="2962656"/>
-            <a:ext cx="347472" cy="283464"/>
-          </a:xfrm>
-          <a:prstGeom prst="line">
-            <a:avLst/>
-          </a:prstGeom>
-          <a:ln w="17780">
-            <a:solidFill>
-              <a:srgbClr val="8C8C8C"/>
-            </a:solidFill>
-            <a:tailEnd type="triangle" w="med" len="med"/>
-          </a:ln>
-          <a:effectLst/>
-        </p:spPr>
-      </p:cxnSp>
-      <p:cxnSp>
-        <p:nvCxnSpPr>
-          <p:cNvPr id="59" name="Connector 58"/>
-          <p:cNvCxnSpPr/>
-          <p:nvPr/>
-        </p:nvCxnSpPr>
-        <p:spPr>
-          <a:xfrm flipV="1">
-            <a:off x="4425696" y="3246120"/>
-            <a:ext cx="347472" cy="283464"/>
-          </a:xfrm>
-          <a:prstGeom prst="line">
-            <a:avLst/>
-          </a:prstGeom>
-          <a:ln w="17780">
-            <a:solidFill>
-              <a:srgbClr val="8C8C8C"/>
-            </a:solidFill>
-            <a:tailEnd type="triangle" w="med" len="med"/>
-          </a:ln>
-          <a:effectLst/>
-        </p:spPr>
-      </p:cxnSp>
-      <p:cxnSp>
-        <p:nvCxnSpPr>
-          <p:cNvPr id="60" name="Connector 59"/>
-          <p:cNvCxnSpPr/>
-          <p:nvPr/>
-        </p:nvCxnSpPr>
-        <p:spPr>
-          <a:xfrm flipV="1">
-            <a:off x="4425696" y="3246120"/>
-            <a:ext cx="347472" cy="850391"/>
-          </a:xfrm>
-          <a:prstGeom prst="line">
-            <a:avLst/>
-          </a:prstGeom>
-          <a:ln w="17780">
-            <a:solidFill>
-              <a:srgbClr val="8C8C8C"/>
-            </a:solidFill>
-            <a:tailEnd type="triangle" w="med" len="med"/>
-          </a:ln>
-          <a:effectLst/>
-        </p:spPr>
-      </p:cxnSp>
-      <p:sp>
-        <p:nvSpPr>
-          <p:cNvPr id="61" name="Rounded Rectangle 60"/>
-          <p:cNvSpPr/>
-          <p:nvPr/>
-        </p:nvSpPr>
-        <p:spPr>
-          <a:xfrm>
-            <a:off x="4809744" y="3017520"/>
-            <a:ext cx="1298448" cy="713232"/>
-          </a:xfrm>
-          <a:prstGeom prst="roundRect">
-            <a:avLst>
-              <a:gd name="adj" fmla="val 12000"/>
-            </a:avLst>
-          </a:prstGeom>
-          <a:solidFill>
-            <a:srgbClr val="E6DCEF"/>
-          </a:solidFill>
-          <a:ln w="16510">
-            <a:solidFill>
-              <a:srgbClr val="8E6BAE"/>
-            </a:solidFill>
-          </a:ln>
-          <a:effectLst/>
-        </p:spPr>
-        <p:txBody>
-          <a:bodyPr rtlCol="0" anchor="ctr"/>
-          <a:lstStyle/>
-          <a:p>
-            <a:pPr algn="ctr"/>
-          </a:p>
-        </p:txBody>
-      </p:sp>
-      <p:sp>
-        <p:nvSpPr>
-          <p:cNvPr id="62" name="TextBox 61"/>
-          <p:cNvSpPr txBox="1"/>
-          <p:nvPr/>
-        </p:nvSpPr>
-        <p:spPr>
-          <a:xfrm>
-            <a:off x="4837176" y="3063239"/>
-            <a:ext cx="1243584" cy="392277"/>
-          </a:xfrm>
-          <a:prstGeom prst="rect">
-            <a:avLst/>
-          </a:prstGeom>
-          <a:noFill/>
-        </p:spPr>
-        <p:txBody>
-          <a:bodyPr wrap="square" lIns="0" rIns="0" tIns="0" bIns="0">
-            <a:spAutoFit/>
-          </a:bodyPr>
-          <a:lstStyle/>
-          <a:p>
-            <a:pPr algn="ctr"/>
-            <a:r>
-              <a:rPr sz="800" b="1" i="0">
-                <a:solidFill>
-                  <a:srgbClr val="1F1F1E"/>
-                </a:solidFill>
-                <a:latin typeface="Times New Roman"/>
-              </a:rPr>
-              <a:t>rank · fill</a:t>
-            </a:r>
-          </a:p>
-          <a:p>
-            <a:pPr algn="ctr"/>
-            <a:r>
-              <a:rPr sz="800" b="1" i="0">
-                <a:solidFill>
-                  <a:srgbClr val="1F1F1E"/>
-                </a:solidFill>
-                <a:latin typeface="Times New Roman"/>
-              </a:rPr>
-              <a:t>token budget</a:t>
-            </a:r>
-          </a:p>
-        </p:txBody>
-      </p:sp>
-      <p:sp>
-        <p:nvSpPr>
-          <p:cNvPr id="63" name="Rounded Rectangle 62"/>
-          <p:cNvSpPr/>
-          <p:nvPr/>
-        </p:nvSpPr>
-        <p:spPr>
-          <a:xfrm>
-            <a:off x="4873752" y="3511296"/>
-            <a:ext cx="1170431" cy="164592"/>
-          </a:xfrm>
-          <a:prstGeom prst="roundRect">
-            <a:avLst>
-              <a:gd name="adj" fmla="val 30000"/>
-            </a:avLst>
-          </a:prstGeom>
-          <a:solidFill>
-            <a:srgbClr val="FFFFFF"/>
-          </a:solidFill>
-          <a:ln w="9525">
-            <a:solidFill>
-              <a:srgbClr val="8E6BAE"/>
-            </a:solidFill>
-          </a:ln>
-          <a:effectLst/>
-        </p:spPr>
-        <p:txBody>
-          <a:bodyPr rtlCol="0" anchor="ctr" lIns="9000" rIns="9000" tIns="4500" bIns="4500" wrap="square"/>
-          <a:lstStyle/>
-          <a:p>
-            <a:pPr algn="ctr"/>
-            <a:r>
-              <a:rPr sz="650" b="0" i="0">
-                <a:solidFill>
-                  <a:srgbClr val="6B6A63"/>
-                </a:solidFill>
-                <a:latin typeface="Times New Roman"/>
-              </a:rPr>
-              <a:t>greedy prefix</a:t>
-            </a:r>
-          </a:p>
-        </p:txBody>
-      </p:sp>
-      <p:cxnSp>
-        <p:nvCxnSpPr>
-          <p:cNvPr id="64" name="Connector 63"/>
-          <p:cNvCxnSpPr/>
-          <p:nvPr/>
-        </p:nvCxnSpPr>
-        <p:spPr>
-          <a:xfrm>
-            <a:off x="6126480" y="3364992"/>
-            <a:ext cx="274320" cy="0"/>
-          </a:xfrm>
-          <a:prstGeom prst="line">
-            <a:avLst/>
-          </a:prstGeom>
-          <a:ln w="22860">
-            <a:solidFill>
-              <a:srgbClr val="8C8C8C"/>
-            </a:solidFill>
-            <a:tailEnd type="triangle" w="med" len="med"/>
-          </a:ln>
-          <a:effectLst/>
-        </p:spPr>
-      </p:cxnSp>
-      <p:sp>
-        <p:nvSpPr>
-          <p:cNvPr id="65" name="Rounded Rectangle 64"/>
-          <p:cNvSpPr/>
-          <p:nvPr/>
-        </p:nvSpPr>
-        <p:spPr>
-          <a:xfrm>
-            <a:off x="6428232" y="3017520"/>
-            <a:ext cx="1335024" cy="713232"/>
-          </a:xfrm>
-          <a:prstGeom prst="roundRect">
-            <a:avLst>
-              <a:gd name="adj" fmla="val 12000"/>
-            </a:avLst>
-          </a:prstGeom>
-          <a:solidFill>
-            <a:srgbClr val="E6DCEF"/>
-          </a:solidFill>
-          <a:ln w="16510">
-            <a:solidFill>
-              <a:srgbClr val="8E6BAE"/>
-            </a:solidFill>
-          </a:ln>
-          <a:effectLst/>
-        </p:spPr>
-        <p:txBody>
-          <a:bodyPr rtlCol="0" anchor="ctr"/>
-          <a:lstStyle/>
-          <a:p>
-            <a:pPr algn="ctr"/>
-          </a:p>
-        </p:txBody>
-      </p:sp>
-      <p:sp>
-        <p:nvSpPr>
-          <p:cNvPr id="66" name="TextBox 65"/>
-          <p:cNvSpPr txBox="1"/>
-          <p:nvPr/>
-        </p:nvSpPr>
-        <p:spPr>
-          <a:xfrm>
-            <a:off x="6455664" y="3063239"/>
-            <a:ext cx="1280160" cy="392277"/>
-          </a:xfrm>
-          <a:prstGeom prst="rect">
-            <a:avLst/>
-          </a:prstGeom>
-          <a:noFill/>
-        </p:spPr>
-        <p:txBody>
-          <a:bodyPr wrap="square" lIns="0" rIns="0" tIns="0" bIns="0">
-            <a:spAutoFit/>
-          </a:bodyPr>
-          <a:lstStyle/>
-          <a:p>
-            <a:pPr algn="ctr"/>
-            <a:r>
-              <a:rPr sz="850" b="1" i="0">
-                <a:solidFill>
-                  <a:srgbClr val="1F1F1E"/>
-                </a:solidFill>
-                <a:latin typeface="Times New Roman"/>
-              </a:rPr>
-              <a:t>SFT student</a:t>
-            </a:r>
-          </a:p>
-        </p:txBody>
-      </p:sp>
-      <p:sp>
-        <p:nvSpPr>
-          <p:cNvPr id="67" name="Rounded Rectangle 66"/>
-          <p:cNvSpPr/>
-          <p:nvPr/>
-        </p:nvSpPr>
-        <p:spPr>
-          <a:xfrm>
-            <a:off x="6492240" y="3511296"/>
-            <a:ext cx="1207007" cy="164592"/>
-          </a:xfrm>
-          <a:prstGeom prst="roundRect">
-            <a:avLst>
-              <a:gd name="adj" fmla="val 30000"/>
-            </a:avLst>
-          </a:prstGeom>
-          <a:solidFill>
-            <a:srgbClr val="FFFFFF"/>
-          </a:solidFill>
-          <a:ln w="9525">
-            <a:solidFill>
-              <a:srgbClr val="8E6BAE"/>
-            </a:solidFill>
-          </a:ln>
-          <a:effectLst/>
-        </p:spPr>
-        <p:txBody>
-          <a:bodyPr rtlCol="0" anchor="ctr" lIns="9000" rIns="9000" tIns="4500" bIns="4500" wrap="square"/>
-          <a:lstStyle/>
-          <a:p>
-            <a:pPr algn="ctr"/>
-            <a:r>
-              <a:rPr sz="650" b="0" i="0">
-                <a:solidFill>
-                  <a:srgbClr val="6B6A63"/>
-                </a:solidFill>
-                <a:latin typeface="Times New Roman"/>
-              </a:rPr>
-              <a:t>stop when absorbed</a:t>
-            </a:r>
-          </a:p>
-        </p:txBody>
-      </p:sp>
-      <p:cxnSp>
-        <p:nvCxnSpPr>
-          <p:cNvPr id="68" name="Connector 67"/>
-          <p:cNvCxnSpPr/>
-          <p:nvPr/>
-        </p:nvCxnSpPr>
-        <p:spPr>
-          <a:xfrm>
-            <a:off x="7781544" y="3364992"/>
-            <a:ext cx="274320" cy="0"/>
-          </a:xfrm>
-          <a:prstGeom prst="line">
-            <a:avLst/>
-          </a:prstGeom>
-          <a:ln w="22860">
-            <a:solidFill>
-              <a:srgbClr val="8C8C8C"/>
-            </a:solidFill>
-            <a:tailEnd type="triangle" w="med" len="med"/>
-          </a:ln>
-          <a:effectLst/>
-        </p:spPr>
-      </p:cxnSp>
-      <p:sp>
-        <p:nvSpPr>
-          <p:cNvPr id="69" name="Folded Corner 68"/>
-          <p:cNvSpPr/>
-          <p:nvPr/>
-        </p:nvSpPr>
-        <p:spPr>
-          <a:xfrm>
-            <a:off x="8083296" y="3035808"/>
-            <a:ext cx="877824" cy="676656"/>
-          </a:xfrm>
-          <a:prstGeom prst="foldedCorner">
-            <a:avLst/>
-          </a:prstGeom>
-          <a:solidFill>
-            <a:srgbClr val="DDE9F7"/>
-          </a:solidFill>
-          <a:ln w="15240">
-            <a:solidFill>
-              <a:srgbClr val="4C72B0"/>
-            </a:solidFill>
-          </a:ln>
-          <a:effectLst/>
-        </p:spPr>
-        <p:txBody>
-          <a:bodyPr rtlCol="0" anchor="ctr"/>
-          <a:lstStyle/>
-          <a:p>
-            <a:pPr algn="ctr"/>
-          </a:p>
-        </p:txBody>
-      </p:sp>
-      <p:sp>
-        <p:nvSpPr>
-          <p:cNvPr id="70" name="TextBox 69"/>
-          <p:cNvSpPr txBox="1"/>
-          <p:nvPr/>
-        </p:nvSpPr>
-        <p:spPr>
-          <a:xfrm>
-            <a:off x="8101583" y="3122676"/>
-            <a:ext cx="841247" cy="548640"/>
-          </a:xfrm>
-          <a:prstGeom prst="rect">
-            <a:avLst/>
-          </a:prstGeom>
-          <a:noFill/>
-        </p:spPr>
-        <p:txBody>
-          <a:bodyPr wrap="square" lIns="0" rIns="0" tIns="0" bIns="0">
-            <a:spAutoFit/>
-          </a:bodyPr>
-          <a:lstStyle/>
-          <a:p>
-            <a:pPr algn="ctr"/>
-            <a:r>
-              <a:rPr sz="750" b="1" i="0">
-                <a:solidFill>
-                  <a:srgbClr val="1F1F1E"/>
-                </a:solidFill>
-                <a:latin typeface="Times New Roman"/>
-              </a:rPr>
-              <a:t>candidate</a:t>
-            </a:r>
-          </a:p>
-          <a:p>
-            <a:pPr algn="ctr"/>
-            <a:r>
-              <a:rPr sz="750" b="1" i="0">
-                <a:solidFill>
-                  <a:srgbClr val="1F1F1E"/>
-                </a:solidFill>
-                <a:latin typeface="Times New Roman"/>
-              </a:rPr>
-              <a:t>student S₁</a:t>
-            </a:r>
-          </a:p>
-        </p:txBody>
-      </p:sp>
-      <p:cxnSp>
-        <p:nvCxnSpPr>
-          <p:cNvPr id="71" name="Connector 70"/>
-          <p:cNvCxnSpPr/>
-          <p:nvPr/>
-        </p:nvCxnSpPr>
-        <p:spPr>
-          <a:xfrm>
-            <a:off x="8979408" y="3364992"/>
-            <a:ext cx="256032" cy="0"/>
-          </a:xfrm>
-          <a:prstGeom prst="line">
-            <a:avLst/>
-          </a:prstGeom>
-          <a:ln w="22860">
-            <a:solidFill>
-              <a:srgbClr val="8C8C8C"/>
-            </a:solidFill>
-            <a:tailEnd type="triangle" w="med" len="med"/>
-          </a:ln>
-          <a:effectLst/>
-        </p:spPr>
-      </p:cxnSp>
-      <p:sp>
-        <p:nvSpPr>
-          <p:cNvPr id="72" name="Diamond 71"/>
-          <p:cNvSpPr/>
-          <p:nvPr/>
-        </p:nvSpPr>
-        <p:spPr>
-          <a:xfrm>
-            <a:off x="9253728" y="2907792"/>
-            <a:ext cx="1225296" cy="914400"/>
-          </a:xfrm>
-          <a:prstGeom prst="diamond">
-            <a:avLst/>
-          </a:prstGeom>
-          <a:solidFill>
-            <a:srgbClr val="FFF0C2"/>
-          </a:solidFill>
-          <a:ln w="17780">
-            <a:solidFill>
-              <a:srgbClr val="C9A22A"/>
-            </a:solidFill>
-          </a:ln>
-          <a:effectLst/>
-        </p:spPr>
-        <p:txBody>
-          <a:bodyPr rtlCol="0" anchor="ctr"/>
-          <a:lstStyle/>
-          <a:p>
-            <a:pPr algn="ctr"/>
-          </a:p>
-        </p:txBody>
-      </p:sp>
-      <p:sp>
-        <p:nvSpPr>
-          <p:cNvPr id="73" name="TextBox 72"/>
-          <p:cNvSpPr txBox="1"/>
-          <p:nvPr/>
-        </p:nvSpPr>
-        <p:spPr>
-          <a:xfrm>
-            <a:off x="9290304" y="3127248"/>
-            <a:ext cx="1152144" cy="502920"/>
-          </a:xfrm>
-          <a:prstGeom prst="rect">
-            <a:avLst/>
-          </a:prstGeom>
-          <a:noFill/>
-        </p:spPr>
-        <p:txBody>
-          <a:bodyPr wrap="square" lIns="0" rIns="0" tIns="0" bIns="0">
-            <a:spAutoFit/>
-          </a:bodyPr>
-          <a:lstStyle/>
-          <a:p>
-            <a:pPr algn="ctr"/>
-            <a:r>
-              <a:rPr sz="750" b="1" i="0">
-                <a:solidFill>
-                  <a:srgbClr val="1F1F1E"/>
-                </a:solidFill>
-                <a:latin typeface="Times New Roman"/>
-              </a:rPr>
-              <a:t>certify</a:t>
-            </a:r>
-          </a:p>
-          <a:p>
-            <a:pPr algn="ctr"/>
-            <a:r>
-              <a:rPr sz="750" b="1" i="0">
-                <a:solidFill>
-                  <a:srgbClr val="1F1F1E"/>
-                </a:solidFill>
-                <a:latin typeface="Times New Roman"/>
-              </a:rPr>
-              <a:t>two-sided?</a:t>
-            </a:r>
-          </a:p>
-        </p:txBody>
-      </p:sp>
-      <p:sp>
-        <p:nvSpPr>
-          <p:cNvPr id="74" name="TextBox 73"/>
-          <p:cNvSpPr txBox="1"/>
-          <p:nvPr/>
-        </p:nvSpPr>
-        <p:spPr>
-          <a:xfrm>
-            <a:off x="10442448" y="3108960"/>
-            <a:ext cx="457200" cy="237744"/>
-          </a:xfrm>
-          <a:prstGeom prst="rect">
-            <a:avLst/>
-          </a:prstGeom>
-          <a:noFill/>
-        </p:spPr>
-        <p:txBody>
-          <a:bodyPr wrap="square" lIns="0" rIns="0" tIns="0" bIns="0">
-            <a:spAutoFit/>
-          </a:bodyPr>
-          <a:lstStyle/>
-          <a:p>
-            <a:pPr algn="ctr"/>
-            <a:r>
-              <a:rPr sz="700" b="1" i="0">
-                <a:solidFill>
-                  <a:srgbClr val="779E62"/>
-                </a:solidFill>
-                <a:latin typeface="Times New Roman"/>
-              </a:rPr>
-              <a:t>accept</a:t>
-            </a:r>
-          </a:p>
-        </p:txBody>
-      </p:sp>
-      <p:cxnSp>
-        <p:nvCxnSpPr>
-          <p:cNvPr id="75" name="Connector 74"/>
-          <p:cNvCxnSpPr/>
-          <p:nvPr/>
-        </p:nvCxnSpPr>
-        <p:spPr>
-          <a:xfrm>
-            <a:off x="10497312" y="3364992"/>
-            <a:ext cx="292608" cy="0"/>
-          </a:xfrm>
-          <a:prstGeom prst="line">
-            <a:avLst/>
-          </a:prstGeom>
-          <a:ln w="25400">
-            <a:solidFill>
-              <a:srgbClr val="779E62"/>
-            </a:solidFill>
-            <a:tailEnd type="triangle" w="med" len="med"/>
-          </a:ln>
-          <a:effectLst/>
-        </p:spPr>
-      </p:cxnSp>
-      <p:sp>
-        <p:nvSpPr>
-          <p:cNvPr id="76" name="Folded Corner 75"/>
-          <p:cNvSpPr/>
-          <p:nvPr/>
-        </p:nvSpPr>
-        <p:spPr>
-          <a:xfrm>
-            <a:off x="10817352" y="2962656"/>
-            <a:ext cx="1188720" cy="804672"/>
-          </a:xfrm>
-          <a:prstGeom prst="foldedCorner">
-            <a:avLst/>
-          </a:prstGeom>
-          <a:solidFill>
-            <a:srgbClr val="DDE9F7"/>
-          </a:solidFill>
-          <a:ln w="15240">
-            <a:solidFill>
-              <a:srgbClr val="4C72B0"/>
-            </a:solidFill>
-          </a:ln>
-          <a:effectLst/>
-        </p:spPr>
-        <p:txBody>
-          <a:bodyPr rtlCol="0" anchor="ctr"/>
-          <a:lstStyle/>
-          <a:p>
-            <a:pPr algn="ctr"/>
-          </a:p>
-        </p:txBody>
-      </p:sp>
-      <p:sp>
-        <p:nvSpPr>
-          <p:cNvPr id="77" name="TextBox 76"/>
-          <p:cNvSpPr txBox="1"/>
-          <p:nvPr/>
-        </p:nvSpPr>
-        <p:spPr>
-          <a:xfrm>
-            <a:off x="10835640" y="3113532"/>
-            <a:ext cx="1152144" cy="548640"/>
-          </a:xfrm>
-          <a:prstGeom prst="rect">
-            <a:avLst/>
-          </a:prstGeom>
-          <a:noFill/>
-        </p:spPr>
-        <p:txBody>
-          <a:bodyPr wrap="square" lIns="0" rIns="0" tIns="0" bIns="0">
-            <a:spAutoFit/>
-          </a:bodyPr>
-          <a:lstStyle/>
-          <a:p>
-            <a:pPr algn="ctr"/>
-            <a:r>
-              <a:rPr sz="750" b="1" i="0">
-                <a:solidFill>
-                  <a:srgbClr val="1F1F1E"/>
-                </a:solidFill>
-                <a:latin typeface="Times New Roman"/>
-              </a:rPr>
-              <a:t>deployed</a:t>
-            </a:r>
-          </a:p>
-          <a:p>
-            <a:pPr algn="ctr"/>
-            <a:r>
-              <a:rPr sz="750" b="1" i="0">
-                <a:solidFill>
-                  <a:srgbClr val="1F1F1E"/>
-                </a:solidFill>
-                <a:latin typeface="Times New Roman"/>
-              </a:rPr>
-              <a:t>student +</a:t>
-            </a:r>
-          </a:p>
-          <a:p>
-            <a:pPr algn="ctr"/>
-            <a:r>
-              <a:rPr sz="750" b="1" i="0">
-                <a:solidFill>
-                  <a:srgbClr val="1F1F1E"/>
-                </a:solidFill>
-                <a:latin typeface="Times New Roman"/>
-              </a:rPr>
-              <a:t>certificates</a:t>
-            </a:r>
-          </a:p>
-        </p:txBody>
-      </p:sp>
-      <p:sp>
-        <p:nvSpPr>
-          <p:cNvPr id="78" name="TextBox 77"/>
-          <p:cNvSpPr txBox="1"/>
-          <p:nvPr/>
-        </p:nvSpPr>
-        <p:spPr>
-          <a:xfrm>
-            <a:off x="9326880" y="3877056"/>
-            <a:ext cx="566928" cy="237744"/>
-          </a:xfrm>
-          <a:prstGeom prst="rect">
-            <a:avLst/>
-          </a:prstGeom>
-          <a:noFill/>
-        </p:spPr>
-        <p:txBody>
-          <a:bodyPr wrap="square" lIns="0" rIns="0" tIns="0" bIns="0">
-            <a:spAutoFit/>
-          </a:bodyPr>
-          <a:lstStyle/>
-          <a:p>
-            <a:pPr algn="ctr"/>
-            <a:r>
-              <a:rPr sz="750" b="1" i="0">
-                <a:solidFill>
-                  <a:srgbClr val="C0504D"/>
-                </a:solidFill>
-                <a:latin typeface="Times New Roman"/>
-              </a:rPr>
-              <a:t>reject</a:t>
-            </a:r>
-          </a:p>
-        </p:txBody>
-      </p:sp>
-      <p:cxnSp>
-        <p:nvCxnSpPr>
-          <p:cNvPr id="79" name="Connector 78"/>
-          <p:cNvCxnSpPr/>
-          <p:nvPr/>
-        </p:nvCxnSpPr>
-        <p:spPr>
-          <a:xfrm flipH="1">
-            <a:off x="8321040" y="3840480"/>
-            <a:ext cx="1325880" cy="530352"/>
-          </a:xfrm>
-          <a:prstGeom prst="line">
-            <a:avLst/>
-          </a:prstGeom>
-          <a:ln w="20320">
-            <a:solidFill>
-              <a:srgbClr val="C0504D"/>
-            </a:solidFill>
-            <a:tailEnd type="triangle" w="med" len="med"/>
-            <a:prstDash val="dash"/>
-          </a:ln>
-          <a:effectLst/>
-        </p:spPr>
-      </p:cxnSp>
-      <p:sp>
-        <p:nvSpPr>
-          <p:cNvPr id="80" name="Rounded Rectangle 79"/>
-          <p:cNvSpPr/>
-          <p:nvPr/>
-        </p:nvSpPr>
-        <p:spPr>
-          <a:xfrm>
-            <a:off x="6903720" y="4224528"/>
-            <a:ext cx="1417320" cy="402336"/>
-          </a:xfrm>
-          <a:prstGeom prst="roundRect">
-            <a:avLst>
-              <a:gd name="adj" fmla="val 15000"/>
-            </a:avLst>
-          </a:prstGeom>
-          <a:solidFill>
-            <a:srgbClr val="F9D6D2"/>
-          </a:solidFill>
-          <a:ln w="15240">
-            <a:solidFill>
-              <a:srgbClr val="C0504D"/>
-            </a:solidFill>
-          </a:ln>
-          <a:effectLst/>
-        </p:spPr>
-        <p:txBody>
-          <a:bodyPr rtlCol="0" anchor="ctr" lIns="9000" rIns="9000" tIns="4500" bIns="4500" wrap="square"/>
-          <a:lstStyle/>
-          <a:p>
-            <a:pPr algn="ctr"/>
-            <a:r>
-              <a:rPr sz="800" b="1" i="0">
-                <a:solidFill>
-                  <a:srgbClr val="C0504D"/>
-                </a:solidFill>
-                <a:latin typeface="Times New Roman"/>
-              </a:rPr>
-              <a:t>tighten λ · re-select</a:t>
-            </a:r>
-          </a:p>
-        </p:txBody>
-      </p:sp>
-      <p:cxnSp>
-        <p:nvCxnSpPr>
-          <p:cNvPr id="81" name="Connector 80"/>
-          <p:cNvCxnSpPr/>
-          <p:nvPr/>
-        </p:nvCxnSpPr>
-        <p:spPr>
-          <a:xfrm flipH="1" flipV="1">
-            <a:off x="3749039" y="3931920"/>
-            <a:ext cx="3127249" cy="475488"/>
-          </a:xfrm>
-          <a:prstGeom prst="line">
-            <a:avLst/>
-          </a:prstGeom>
-          <a:ln w="20320">
-            <a:solidFill>
-              <a:srgbClr val="C0504D"/>
-            </a:solidFill>
-            <a:tailEnd type="triangle" w="med" len="med"/>
-            <a:prstDash val="dash"/>
-          </a:ln>
-          <a:effectLst/>
-        </p:spPr>
-      </p:cxnSp>
-      <p:sp>
-        <p:nvSpPr>
-          <p:cNvPr id="82" name="TextBox 81"/>
-          <p:cNvSpPr txBox="1"/>
-          <p:nvPr/>
-        </p:nvSpPr>
-        <p:spPr>
-          <a:xfrm>
-            <a:off x="3931920" y="6144768"/>
-            <a:ext cx="1234440" cy="256032"/>
-          </a:xfrm>
-          <a:prstGeom prst="rect">
-            <a:avLst/>
-          </a:prstGeom>
-          <a:noFill/>
-        </p:spPr>
-        <p:txBody>
-          <a:bodyPr wrap="square" lIns="0" rIns="0" tIns="0" bIns="0">
-            <a:spAutoFit/>
-          </a:bodyPr>
-          <a:lstStyle/>
-          <a:p>
-            <a:pPr algn="ctr"/>
-            <a:r>
-              <a:rPr sz="700" b="1" i="0">
-                <a:solidFill>
-                  <a:srgbClr val="C9A22A"/>
-                </a:solidFill>
-                <a:latin typeface="Times New Roman"/>
-              </a:rPr>
-              <a:t>τ from calibration</a:t>
-            </a:r>
-          </a:p>
-        </p:txBody>
-      </p:sp>
-      <p:sp>
-        <p:nvSpPr>
-          <p:cNvPr id="83" name="Rounded Rectangle 82"/>
-          <p:cNvSpPr/>
-          <p:nvPr/>
-        </p:nvSpPr>
-        <p:spPr>
-          <a:xfrm>
-            <a:off x="274320" y="4846320"/>
-            <a:ext cx="11777472" cy="1572768"/>
-          </a:xfrm>
-          <a:prstGeom prst="roundRect">
-            <a:avLst>
-              <a:gd name="adj" fmla="val 5000"/>
-            </a:avLst>
-          </a:prstGeom>
-          <a:solidFill>
-            <a:srgbClr val="ECF6F5"/>
-          </a:solidFill>
-          <a:ln w="20320">
-            <a:solidFill>
-              <a:srgbClr val="2E9E97"/>
-            </a:solidFill>
-            <a:prstDash val="dash"/>
-          </a:ln>
-          <a:effectLst/>
-        </p:spPr>
-        <p:txBody>
-          <a:bodyPr rtlCol="0" anchor="ctr"/>
-          <a:lstStyle/>
-          <a:p>
-            <a:pPr algn="ctr"/>
-          </a:p>
-        </p:txBody>
-      </p:sp>
-      <p:sp>
-        <p:nvSpPr>
-          <p:cNvPr id="84" name="TextBox 83"/>
-          <p:cNvSpPr txBox="1"/>
-          <p:nvPr/>
-        </p:nvSpPr>
-        <p:spPr>
-          <a:xfrm>
-            <a:off x="438912" y="4937760"/>
-            <a:ext cx="3657600" cy="274320"/>
-          </a:xfrm>
-          <a:prstGeom prst="rect">
-            <a:avLst/>
-          </a:prstGeom>
-          <a:noFill/>
-        </p:spPr>
-        <p:txBody>
-          <a:bodyPr wrap="square" lIns="0" rIns="0" tIns="0" bIns="0">
-            <a:spAutoFit/>
-          </a:bodyPr>
-          <a:lstStyle/>
-          <a:p>
-            <a:pPr algn="l"/>
-            <a:r>
-              <a:rPr sz="950" b="1" i="0">
-                <a:solidFill>
-                  <a:srgbClr val="2E9E97"/>
-                </a:solidFill>
-                <a:latin typeface="Times New Roman"/>
-              </a:rPr>
-              <a:t>DEPLOYMENT-TIME ROUTING</a:t>
-            </a:r>
-          </a:p>
-        </p:txBody>
-      </p:sp>
-      <p:sp>
-        <p:nvSpPr>
-          <p:cNvPr id="85" name="Rounded Rectangle 84"/>
-          <p:cNvSpPr/>
-          <p:nvPr/>
-        </p:nvSpPr>
-        <p:spPr>
-          <a:xfrm>
-            <a:off x="502920" y="5349240"/>
-            <a:ext cx="1188720" cy="502920"/>
-          </a:xfrm>
-          <a:prstGeom prst="roundRect">
-            <a:avLst>
-              <a:gd name="adj" fmla="val 25000"/>
-            </a:avLst>
-          </a:prstGeom>
-          <a:solidFill>
-            <a:srgbClr val="DDE9F7"/>
-          </a:solidFill>
-          <a:ln w="13970">
-            <a:solidFill>
-              <a:srgbClr val="4C72B0"/>
-            </a:solidFill>
-          </a:ln>
-          <a:effectLst/>
-        </p:spPr>
-        <p:txBody>
-          <a:bodyPr rtlCol="0" anchor="ctr"/>
-          <a:lstStyle/>
-          <a:p>
-            <a:pPr algn="ctr"/>
-          </a:p>
-        </p:txBody>
-      </p:sp>
-      <p:sp>
-        <p:nvSpPr>
-          <p:cNvPr id="86" name="TextBox 85"/>
-          <p:cNvSpPr txBox="1"/>
-          <p:nvPr/>
-        </p:nvSpPr>
-        <p:spPr>
-          <a:xfrm>
-            <a:off x="566928" y="5394960"/>
-            <a:ext cx="1097280" cy="457200"/>
-          </a:xfrm>
-          <a:prstGeom prst="rect">
-            <a:avLst/>
-          </a:prstGeom>
-          <a:noFill/>
-        </p:spPr>
-        <p:txBody>
-          <a:bodyPr wrap="square" lIns="0" rIns="0" tIns="0" bIns="0">
-            <a:spAutoFit/>
-          </a:bodyPr>
-          <a:lstStyle/>
-          <a:p>
-            <a:pPr algn="l"/>
-            <a:r>
-              <a:rPr sz="700" b="0" i="0">
-                <a:solidFill>
-                  <a:srgbClr val="4C72B0"/>
-                </a:solidFill>
-                <a:latin typeface="Times New Roman"/>
-              </a:rPr>
-              <a:t>"Avg dues</a:t>
-            </a:r>
-          </a:p>
-          <a:p>
-            <a:pPr algn="l"/>
-            <a:r>
-              <a:rPr sz="700" b="0" i="0">
-                <a:solidFill>
-                  <a:srgbClr val="4C72B0"/>
-                </a:solidFill>
-                <a:latin typeface="Times New Roman"/>
-              </a:rPr>
-              <a:t>per club?"</a:t>
-            </a:r>
-          </a:p>
-        </p:txBody>
-      </p:sp>
-      <p:sp>
-        <p:nvSpPr>
-          <p:cNvPr id="87" name="Rounded Rectangle 86"/>
-          <p:cNvSpPr/>
-          <p:nvPr/>
-        </p:nvSpPr>
-        <p:spPr>
-          <a:xfrm>
-            <a:off x="502920" y="5925312"/>
-            <a:ext cx="1188720" cy="438912"/>
-          </a:xfrm>
-          <a:prstGeom prst="roundRect">
-            <a:avLst>
-              <a:gd name="adj" fmla="val 25000"/>
-            </a:avLst>
-          </a:prstGeom>
-          <a:solidFill>
-            <a:srgbClr val="FDF0E7"/>
-          </a:solidFill>
-          <a:ln w="13970">
-            <a:solidFill>
-              <a:srgbClr val="DD8452"/>
-            </a:solidFill>
-          </a:ln>
-          <a:effectLst/>
-        </p:spPr>
-        <p:txBody>
-          <a:bodyPr rtlCol="0" anchor="ctr"/>
-          <a:lstStyle/>
-          <a:p>
-            <a:pPr algn="ctr"/>
-          </a:p>
-        </p:txBody>
-      </p:sp>
-      <p:sp>
-        <p:nvSpPr>
-          <p:cNvPr id="88" name="TextBox 87"/>
-          <p:cNvSpPr txBox="1"/>
-          <p:nvPr/>
-        </p:nvSpPr>
-        <p:spPr>
-          <a:xfrm>
-            <a:off x="566928" y="5961888"/>
-            <a:ext cx="1097280" cy="384048"/>
-          </a:xfrm>
-          <a:prstGeom prst="rect">
-            <a:avLst/>
-          </a:prstGeom>
-          <a:noFill/>
-        </p:spPr>
-        <p:txBody>
-          <a:bodyPr wrap="square" lIns="0" rIns="0" tIns="0" bIns="0">
-            <a:spAutoFit/>
-          </a:bodyPr>
-          <a:lstStyle/>
-          <a:p>
-            <a:pPr algn="l"/>
-            <a:r>
-              <a:rPr sz="700" b="0" i="0">
-                <a:solidFill>
-                  <a:srgbClr val="DD8452"/>
-                </a:solidFill>
-                <a:latin typeface="Times New Roman"/>
-              </a:rPr>
-              <a:t>"Plot a chart"</a:t>
-            </a:r>
-          </a:p>
-        </p:txBody>
-      </p:sp>
-      <p:cxnSp>
-        <p:nvCxnSpPr>
-          <p:cNvPr id="89" name="Connector 88"/>
-          <p:cNvCxnSpPr/>
-          <p:nvPr/>
-        </p:nvCxnSpPr>
-        <p:spPr>
-          <a:xfrm>
-            <a:off x="1719072" y="5596128"/>
-            <a:ext cx="384048" cy="0"/>
-          </a:xfrm>
-          <a:prstGeom prst="line">
-            <a:avLst/>
-          </a:prstGeom>
-          <a:ln w="20320">
-            <a:solidFill>
-              <a:srgbClr val="8C8C8C"/>
-            </a:solidFill>
-            <a:tailEnd type="triangle" w="med" len="med"/>
-          </a:ln>
-          <a:effectLst/>
-        </p:spPr>
-      </p:cxnSp>
-      <p:cxnSp>
-        <p:nvCxnSpPr>
-          <p:cNvPr id="90" name="Connector 89"/>
-          <p:cNvCxnSpPr/>
-          <p:nvPr/>
-        </p:nvCxnSpPr>
-        <p:spPr>
-          <a:xfrm>
-            <a:off x="1719072" y="6126480"/>
-            <a:ext cx="384048" cy="0"/>
-          </a:xfrm>
-          <a:prstGeom prst="line">
-            <a:avLst/>
-          </a:prstGeom>
-          <a:ln w="20320">
-            <a:solidFill>
-              <a:srgbClr val="8C8C8C"/>
-            </a:solidFill>
-            <a:tailEnd type="triangle" w="med" len="med"/>
-          </a:ln>
-          <a:effectLst/>
-        </p:spPr>
-      </p:cxnSp>
-      <p:sp>
-        <p:nvSpPr>
-          <p:cNvPr id="91" name="Rounded Rectangle 90"/>
-          <p:cNvSpPr/>
-          <p:nvPr/>
-        </p:nvSpPr>
-        <p:spPr>
-          <a:xfrm>
-            <a:off x="2139696" y="5440680"/>
-            <a:ext cx="1463040" cy="621792"/>
-          </a:xfrm>
-          <a:prstGeom prst="roundRect">
-            <a:avLst>
-              <a:gd name="adj" fmla="val 12000"/>
-            </a:avLst>
-          </a:prstGeom>
-          <a:solidFill>
-            <a:srgbClr val="E6DCEF"/>
-          </a:solidFill>
-          <a:ln w="16510">
-            <a:solidFill>
-              <a:srgbClr val="8E6BAE"/>
-            </a:solidFill>
-          </a:ln>
-          <a:effectLst/>
-        </p:spPr>
-        <p:txBody>
-          <a:bodyPr rtlCol="0" anchor="ctr"/>
-          <a:lstStyle/>
-          <a:p>
-            <a:pPr algn="ctr"/>
-          </a:p>
-        </p:txBody>
-      </p:sp>
-      <p:sp>
-        <p:nvSpPr>
-          <p:cNvPr id="92" name="TextBox 91"/>
-          <p:cNvSpPr txBox="1"/>
-          <p:nvPr/>
-        </p:nvSpPr>
-        <p:spPr>
-          <a:xfrm>
-            <a:off x="2167127" y="5486400"/>
-            <a:ext cx="1408176" cy="341985"/>
-          </a:xfrm>
-          <a:prstGeom prst="rect">
-            <a:avLst/>
-          </a:prstGeom>
-          <a:noFill/>
-        </p:spPr>
-        <p:txBody>
-          <a:bodyPr wrap="square" lIns="0" rIns="0" tIns="0" bIns="0">
-            <a:spAutoFit/>
-          </a:bodyPr>
-          <a:lstStyle/>
-          <a:p>
-            <a:pPr algn="ctr"/>
-            <a:r>
-              <a:rPr sz="800" b="1" i="0">
-                <a:solidFill>
-                  <a:srgbClr val="1F1F1E"/>
-                </a:solidFill>
-                <a:latin typeface="Times New Roman"/>
-              </a:rPr>
-              <a:t>conformal score</a:t>
-            </a:r>
-          </a:p>
-        </p:txBody>
-      </p:sp>
-      <p:sp>
-        <p:nvSpPr>
-          <p:cNvPr id="93" name="Rounded Rectangle 92"/>
-          <p:cNvSpPr/>
-          <p:nvPr/>
-        </p:nvSpPr>
-        <p:spPr>
-          <a:xfrm>
-            <a:off x="2203703" y="5843016"/>
-            <a:ext cx="1335024" cy="164592"/>
-          </a:xfrm>
-          <a:prstGeom prst="roundRect">
-            <a:avLst>
-              <a:gd name="adj" fmla="val 30000"/>
-            </a:avLst>
-          </a:prstGeom>
-          <a:solidFill>
-            <a:srgbClr val="FFFFFF"/>
-          </a:solidFill>
-          <a:ln w="9525">
-            <a:solidFill>
-              <a:srgbClr val="8E6BAE"/>
-            </a:solidFill>
-          </a:ln>
-          <a:effectLst/>
-        </p:spPr>
-        <p:txBody>
-          <a:bodyPr rtlCol="0" anchor="ctr" lIns="9000" rIns="9000" tIns="4500" bIns="4500" wrap="square"/>
-          <a:lstStyle/>
-          <a:p>
-            <a:pPr algn="ctr"/>
-            <a:r>
-              <a:rPr sz="650" b="0" i="0">
-                <a:solidFill>
-                  <a:srgbClr val="6B6A63"/>
-                </a:solidFill>
-                <a:latin typeface="Times New Roman"/>
-              </a:rPr>
-              <a:t>one backward pass</a:t>
-            </a:r>
-          </a:p>
-        </p:txBody>
-      </p:sp>
-      <p:cxnSp>
-        <p:nvCxnSpPr>
-          <p:cNvPr id="94" name="Connector 93"/>
-          <p:cNvCxnSpPr/>
-          <p:nvPr/>
-        </p:nvCxnSpPr>
-        <p:spPr>
-          <a:xfrm>
-            <a:off x="3621024" y="5742432"/>
-            <a:ext cx="356615" cy="0"/>
-          </a:xfrm>
-          <a:prstGeom prst="line">
-            <a:avLst/>
-          </a:prstGeom>
-          <a:ln w="20320">
-            <a:solidFill>
-              <a:srgbClr val="8C8C8C"/>
-            </a:solidFill>
-            <a:tailEnd type="triangle" w="med" len="med"/>
-          </a:ln>
-          <a:effectLst/>
-        </p:spPr>
-      </p:cxnSp>
-      <p:sp>
-        <p:nvSpPr>
-          <p:cNvPr id="95" name="Diamond 94"/>
-          <p:cNvSpPr/>
-          <p:nvPr/>
-        </p:nvSpPr>
-        <p:spPr>
-          <a:xfrm>
-            <a:off x="4005072" y="5413248"/>
-            <a:ext cx="1051560" cy="713232"/>
-          </a:xfrm>
-          <a:prstGeom prst="diamond">
-            <a:avLst/>
-          </a:prstGeom>
-          <a:solidFill>
-            <a:srgbClr val="FFF0C2"/>
-          </a:solidFill>
-          <a:ln w="16510">
-            <a:solidFill>
-              <a:srgbClr val="C9A22A"/>
-            </a:solidFill>
-          </a:ln>
-          <a:effectLst/>
-        </p:spPr>
-        <p:txBody>
-          <a:bodyPr rtlCol="0" anchor="ctr"/>
-          <a:lstStyle/>
-          <a:p>
-            <a:pPr algn="ctr"/>
-          </a:p>
-        </p:txBody>
-      </p:sp>
-      <p:sp>
-        <p:nvSpPr>
-          <p:cNvPr id="96" name="TextBox 95"/>
-          <p:cNvSpPr txBox="1"/>
-          <p:nvPr/>
-        </p:nvSpPr>
-        <p:spPr>
-          <a:xfrm>
-            <a:off x="4023360" y="5632704"/>
-            <a:ext cx="1005840" cy="365760"/>
-          </a:xfrm>
-          <a:prstGeom prst="rect">
-            <a:avLst/>
-          </a:prstGeom>
-          <a:noFill/>
-        </p:spPr>
-        <p:txBody>
-          <a:bodyPr wrap="square" lIns="0" rIns="0" tIns="0" bIns="0">
-            <a:spAutoFit/>
-          </a:bodyPr>
-          <a:lstStyle/>
-          <a:p>
-            <a:pPr algn="ctr"/>
-            <a:r>
-              <a:rPr sz="850" b="1" i="0">
-                <a:solidFill>
-                  <a:srgbClr val="1F1F1E"/>
-                </a:solidFill>
-                <a:latin typeface="Times New Roman"/>
-              </a:rPr>
-              <a:t>≤ τ ?</a:t>
-            </a:r>
-          </a:p>
-        </p:txBody>
-      </p:sp>
-      <p:sp>
-        <p:nvSpPr>
-          <p:cNvPr id="97" name="TextBox 96"/>
-          <p:cNvSpPr txBox="1"/>
-          <p:nvPr/>
-        </p:nvSpPr>
-        <p:spPr>
-          <a:xfrm>
-            <a:off x="5120640" y="5358384"/>
-            <a:ext cx="457200" cy="237744"/>
-          </a:xfrm>
-          <a:prstGeom prst="rect">
-            <a:avLst/>
-          </a:prstGeom>
-          <a:noFill/>
-        </p:spPr>
-        <p:txBody>
-          <a:bodyPr wrap="square" lIns="0" rIns="0" tIns="0" bIns="0">
-            <a:spAutoFit/>
-          </a:bodyPr>
-          <a:lstStyle/>
-          <a:p>
-            <a:pPr algn="ctr"/>
-            <a:r>
-              <a:rPr sz="750" b="1" i="0">
-                <a:solidFill>
-                  <a:srgbClr val="779E62"/>
-                </a:solidFill>
-                <a:latin typeface="Times New Roman"/>
-              </a:rPr>
-              <a:t>yes</a:t>
-            </a:r>
-          </a:p>
-        </p:txBody>
-      </p:sp>
-      <p:cxnSp>
-        <p:nvCxnSpPr>
-          <p:cNvPr id="98" name="Connector 97"/>
-          <p:cNvCxnSpPr/>
-          <p:nvPr/>
-        </p:nvCxnSpPr>
-        <p:spPr>
-          <a:xfrm>
-            <a:off x="5074920" y="5596128"/>
-            <a:ext cx="365760" cy="0"/>
-          </a:xfrm>
-          <a:prstGeom prst="line">
-            <a:avLst/>
-          </a:prstGeom>
-          <a:ln w="25400">
-            <a:solidFill>
-              <a:srgbClr val="779E62"/>
-            </a:solidFill>
-            <a:tailEnd type="triangle" w="med" len="med"/>
-          </a:ln>
-          <a:effectLst/>
-        </p:spPr>
-      </p:cxnSp>
-      <p:sp>
-        <p:nvSpPr>
-          <p:cNvPr id="99" name="Rounded Rectangle 98"/>
-          <p:cNvSpPr/>
-          <p:nvPr/>
-        </p:nvSpPr>
-        <p:spPr>
-          <a:xfrm>
-            <a:off x="5468112" y="5349240"/>
-            <a:ext cx="1417320" cy="502920"/>
-          </a:xfrm>
-          <a:prstGeom prst="roundRect">
-            <a:avLst>
-              <a:gd name="adj" fmla="val 15000"/>
-            </a:avLst>
-          </a:prstGeom>
-          <a:solidFill>
-            <a:srgbClr val="E3EFDA"/>
-          </a:solidFill>
-          <a:ln w="16510">
-            <a:solidFill>
-              <a:srgbClr val="779E62"/>
-            </a:solidFill>
-          </a:ln>
-          <a:effectLst/>
-        </p:spPr>
-        <p:txBody>
-          <a:bodyPr rtlCol="0" anchor="ctr" lIns="9000" rIns="9000" tIns="4500" bIns="4500" wrap="square"/>
-          <a:lstStyle/>
-          <a:p>
-            <a:pPr algn="ctr"/>
-            <a:r>
-              <a:rPr sz="850" b="1" i="0">
-                <a:solidFill>
-                  <a:srgbClr val="1F1F1E"/>
-                </a:solidFill>
-                <a:latin typeface="Times New Roman"/>
-              </a:rPr>
-              <a:t>→ student agent</a:t>
-            </a:r>
-          </a:p>
-        </p:txBody>
-      </p:sp>
-      <p:sp>
-        <p:nvSpPr>
-          <p:cNvPr id="100" name="TextBox 99"/>
-          <p:cNvSpPr txBox="1"/>
-          <p:nvPr/>
-        </p:nvSpPr>
-        <p:spPr>
-          <a:xfrm>
-            <a:off x="5010912" y="6163056"/>
-            <a:ext cx="365760" cy="237744"/>
-          </a:xfrm>
-          <a:prstGeom prst="rect">
-            <a:avLst/>
-          </a:prstGeom>
-          <a:noFill/>
-        </p:spPr>
-        <p:txBody>
-          <a:bodyPr wrap="square" lIns="0" rIns="0" tIns="0" bIns="0">
-            <a:spAutoFit/>
-          </a:bodyPr>
-          <a:lstStyle/>
-          <a:p>
-            <a:pPr algn="ctr"/>
-            <a:r>
-              <a:rPr sz="750" b="1" i="0">
-                <a:solidFill>
-                  <a:srgbClr val="C0504D"/>
-                </a:solidFill>
-                <a:latin typeface="Times New Roman"/>
-              </a:rPr>
-              <a:t>no</a:t>
-            </a:r>
-          </a:p>
-        </p:txBody>
-      </p:sp>
-      <p:cxnSp>
-        <p:nvCxnSpPr>
-          <p:cNvPr id="101" name="Connector 100"/>
-          <p:cNvCxnSpPr/>
-          <p:nvPr/>
-        </p:nvCxnSpPr>
-        <p:spPr>
-          <a:xfrm>
-            <a:off x="5074920" y="5989320"/>
-            <a:ext cx="365760" cy="118872"/>
-          </a:xfrm>
-          <a:prstGeom prst="line">
-            <a:avLst/>
-          </a:prstGeom>
-          <a:ln w="25400">
-            <a:solidFill>
-              <a:srgbClr val="C0504D"/>
-            </a:solidFill>
-            <a:tailEnd type="triangle" w="med" len="med"/>
-          </a:ln>
-          <a:effectLst/>
-        </p:spPr>
-      </p:cxnSp>
-      <p:sp>
-        <p:nvSpPr>
-          <p:cNvPr id="102" name="Rounded Rectangle 101"/>
-          <p:cNvSpPr/>
-          <p:nvPr/>
-        </p:nvSpPr>
-        <p:spPr>
-          <a:xfrm>
-            <a:off x="5468112" y="5907024"/>
-            <a:ext cx="1691640" cy="457200"/>
-          </a:xfrm>
-          <a:prstGeom prst="roundRect">
-            <a:avLst>
-              <a:gd name="adj" fmla="val 15000"/>
-            </a:avLst>
-          </a:prstGeom>
-          <a:solidFill>
-            <a:srgbClr val="F9D6D2"/>
-          </a:solidFill>
-          <a:ln w="16510">
-            <a:solidFill>
-              <a:srgbClr val="C0504D"/>
-            </a:solidFill>
-          </a:ln>
-          <a:effectLst/>
-        </p:spPr>
-        <p:txBody>
-          <a:bodyPr rtlCol="0" anchor="ctr" lIns="9000" rIns="9000" tIns="4500" bIns="4500" wrap="square"/>
-          <a:lstStyle/>
-          <a:p>
-            <a:pPr algn="ctr"/>
-            <a:r>
-              <a:rPr sz="750" b="1" i="0">
-                <a:solidFill>
-                  <a:srgbClr val="C0504D"/>
-                </a:solidFill>
-                <a:latin typeface="Times New Roman"/>
-              </a:rPr>
-              <a:t>refuse · escalate to teacher</a:t>
-            </a:r>
-          </a:p>
-        </p:txBody>
-      </p:sp>
-      <p:sp>
-        <p:nvSpPr>
-          <p:cNvPr id="103" name="Rounded Rectangle 102"/>
-          <p:cNvSpPr/>
-          <p:nvPr/>
-        </p:nvSpPr>
-        <p:spPr>
-          <a:xfrm>
-            <a:off x="7589520" y="5349240"/>
-            <a:ext cx="2011680" cy="475488"/>
-          </a:xfrm>
-          <a:prstGeom prst="roundRect">
-            <a:avLst>
-              <a:gd name="adj" fmla="val 15000"/>
-            </a:avLst>
-          </a:prstGeom>
-          <a:solidFill>
-            <a:srgbClr val="FFFFFF"/>
-          </a:solidFill>
-          <a:ln w="17780">
-            <a:solidFill>
-              <a:srgbClr val="55A868"/>
-            </a:solidFill>
-          </a:ln>
-          <a:effectLst/>
-        </p:spPr>
-        <p:txBody>
-          <a:bodyPr rtlCol="0" anchor="ctr" lIns="9000" rIns="9000" tIns="4500" bIns="4500" wrap="square"/>
-          <a:lstStyle/>
-          <a:p>
-            <a:pPr algn="ctr"/>
-            <a:r>
-              <a:rPr sz="800" b="1" i="0">
-                <a:solidFill>
-                  <a:srgbClr val="1F1F1E"/>
-                </a:solidFill>
-                <a:latin typeface="Times New Roman"/>
-              </a:rPr>
-              <a:t>coverage LB 0.93 (in-task)</a:t>
-            </a:r>
-          </a:p>
-        </p:txBody>
-      </p:sp>
-      <p:sp>
-        <p:nvSpPr>
-          <p:cNvPr id="104" name="Rounded Rectangle 103"/>
-          <p:cNvSpPr/>
-          <p:nvPr/>
-        </p:nvSpPr>
-        <p:spPr>
-          <a:xfrm>
-            <a:off x="7589520" y="5888736"/>
-            <a:ext cx="2011680" cy="475488"/>
-          </a:xfrm>
-          <a:prstGeom prst="roundRect">
-            <a:avLst>
-              <a:gd name="adj" fmla="val 15000"/>
-            </a:avLst>
-          </a:prstGeom>
-          <a:solidFill>
-            <a:srgbClr val="FFFFFF"/>
-          </a:solidFill>
-          <a:ln w="17780">
-            <a:solidFill>
-              <a:srgbClr val="55A868"/>
-            </a:solidFill>
-          </a:ln>
-          <a:effectLst/>
-        </p:spPr>
-        <p:txBody>
-          <a:bodyPr rtlCol="0" anchor="ctr" lIns="9000" rIns="9000" tIns="4500" bIns="4500" wrap="square"/>
-          <a:lstStyle/>
-          <a:p>
-            <a:pPr algn="ctr"/>
-            <a:r>
-              <a:rPr sz="800" b="1" i="0">
-                <a:solidFill>
-                  <a:srgbClr val="1F1F1E"/>
-                </a:solidFill>
-                <a:latin typeface="Times New Roman"/>
-              </a:rPr>
-              <a:t>leakage UB 0.25 (off-task)</a:t>
-            </a:r>
-          </a:p>
-        </p:txBody>
-      </p:sp>
-      <p:sp>
-        <p:nvSpPr>
-          <p:cNvPr id="105" name="TextBox 104"/>
-          <p:cNvSpPr txBox="1"/>
-          <p:nvPr/>
-        </p:nvSpPr>
-        <p:spPr>
-          <a:xfrm>
-            <a:off x="9692640" y="5394960"/>
-            <a:ext cx="2286000" cy="914400"/>
-          </a:xfrm>
-          <a:prstGeom prst="rect">
-            <a:avLst/>
-          </a:prstGeom>
-          <a:noFill/>
-        </p:spPr>
-        <p:txBody>
-          <a:bodyPr wrap="square" lIns="0" rIns="0" tIns="0" bIns="0">
-            <a:spAutoFit/>
-          </a:bodyPr>
-          <a:lstStyle/>
-          <a:p>
-            <a:pPr algn="l"/>
-            <a:r>
-              <a:rPr sz="800" b="0" i="0">
-                <a:solidFill>
-                  <a:srgbClr val="6B6A63"/>
-                </a:solidFill>
-                <a:latin typeface="Times New Roman"/>
-              </a:rPr>
-              <a:t>Clopper-Pearson bounds from</a:t>
-            </a:r>
-          </a:p>
-          <a:p>
-            <a:pPr algn="l"/>
-            <a:r>
-              <a:rPr sz="800" b="0" i="0">
-                <a:solidFill>
-                  <a:srgbClr val="6B6A63"/>
-                </a:solidFill>
-                <a:latin typeface="Times New Roman"/>
-              </a:rPr>
-              <a:t>behavioral evaluation only —</a:t>
-            </a:r>
-          </a:p>
-          <a:p>
-            <a:pPr algn="l"/>
-            <a:r>
-              <a:rPr sz="800" b="0" i="0">
-                <a:solidFill>
-                  <a:srgbClr val="6B6A63"/>
-                </a:solidFill>
-                <a:latin typeface="Times New Roman"/>
-              </a:rPr>
-              <a:t>no benchmark-specific tuning</a:t>
-            </a:r>
-          </a:p>
-        </p:txBody>
-      </p:sp>
-      <p:cxnSp>
-        <p:nvCxnSpPr>
-          <p:cNvPr id="106" name="Connector 105"/>
-          <p:cNvCxnSpPr/>
-          <p:nvPr/>
-        </p:nvCxnSpPr>
-        <p:spPr>
-          <a:xfrm>
-            <a:off x="11292840" y="3785615"/>
-            <a:ext cx="64008" cy="1042417"/>
-          </a:xfrm>
-          <a:prstGeom prst="line">
-            <a:avLst/>
-          </a:prstGeom>
-          <a:ln w="20320">
-            <a:solidFill>
-              <a:srgbClr val="8C8C8C"/>
-            </a:solidFill>
-            <a:tailEnd type="triangle" w="med" len="med"/>
-          </a:ln>
-          <a:effectLst/>
-        </p:spPr>
-      </p:cxnSp>
+              <a:t>conformal gate routes live requests</a:t>
+            </a:r>
+          </a:p>
+        </p:txBody>
+      </p:sp>
     </p:spTree>
   </p:cSld>
   <p:clrMapOvr>

--- a/paper/figs/fig1_pipeline.pptx
+++ b/paper/figs/fig1_pipeline.pptx
@@ -3192,239 +3192,239 @@
           <a:p>
             <a:pPr algn="l"/>
             <a:r>
+              <a:rPr sz="1900" b="1" i="1">
+                <a:solidFill>
+                  <a:srgbClr val="1F1F1E"/>
+                </a:solidFill>
+                <a:latin typeface="Times New Roman"/>
+              </a:rPr>
+              <a:t>Reading the task as skill demand</a:t>
+            </a:r>
+          </a:p>
+        </p:txBody>
+      </p:sp>
+      <p:sp>
+        <p:nvSpPr>
+          <p:cNvPr id="6" name="Rounded Rectangle 5"/>
+          <p:cNvSpPr/>
+          <p:nvPr/>
+        </p:nvSpPr>
+        <p:spPr>
+          <a:xfrm>
+            <a:off x="457200" y="749808"/>
+            <a:ext cx="914400" cy="1097280"/>
+          </a:xfrm>
+          <a:prstGeom prst="roundRect">
+            <a:avLst>
+              <a:gd name="adj" fmla="val 6000"/>
+            </a:avLst>
+          </a:prstGeom>
+          <a:solidFill>
+            <a:srgbClr val="FFFFFF"/>
+          </a:solidFill>
+          <a:ln w="15240">
+            <a:solidFill>
+              <a:srgbClr val="777777"/>
+            </a:solidFill>
+          </a:ln>
+          <a:effectLst/>
+        </p:spPr>
+        <p:txBody>
+          <a:bodyPr rtlCol="0" anchor="ctr"/>
+          <a:lstStyle/>
+          <a:p>
+            <a:pPr algn="ctr"/>
+          </a:p>
+        </p:txBody>
+      </p:sp>
+      <p:sp>
+        <p:nvSpPr>
+          <p:cNvPr id="7" name="Rounded Rectangle 6"/>
+          <p:cNvSpPr/>
+          <p:nvPr/>
+        </p:nvSpPr>
+        <p:spPr>
+          <a:xfrm>
+            <a:off x="621792" y="815644"/>
+            <a:ext cx="914400" cy="1097280"/>
+          </a:xfrm>
+          <a:prstGeom prst="roundRect">
+            <a:avLst>
+              <a:gd name="adj" fmla="val 6000"/>
+            </a:avLst>
+          </a:prstGeom>
+          <a:solidFill>
+            <a:srgbClr val="FFFFFF"/>
+          </a:solidFill>
+          <a:ln w="15240">
+            <a:solidFill>
+              <a:srgbClr val="777777"/>
+            </a:solidFill>
+          </a:ln>
+          <a:effectLst/>
+        </p:spPr>
+        <p:txBody>
+          <a:bodyPr rtlCol="0" anchor="ctr"/>
+          <a:lstStyle/>
+          <a:p>
+            <a:pPr algn="ctr"/>
+          </a:p>
+        </p:txBody>
+      </p:sp>
+      <p:sp>
+        <p:nvSpPr>
+          <p:cNvPr id="8" name="Rounded Rectangle 7"/>
+          <p:cNvSpPr/>
+          <p:nvPr/>
+        </p:nvSpPr>
+        <p:spPr>
+          <a:xfrm>
+            <a:off x="786384" y="881481"/>
+            <a:ext cx="914400" cy="1097280"/>
+          </a:xfrm>
+          <a:prstGeom prst="roundRect">
+            <a:avLst>
+              <a:gd name="adj" fmla="val 6000"/>
+            </a:avLst>
+          </a:prstGeom>
+          <a:solidFill>
+            <a:srgbClr val="FFFFFF"/>
+          </a:solidFill>
+          <a:ln w="15240">
+            <a:solidFill>
+              <a:srgbClr val="777777"/>
+            </a:solidFill>
+          </a:ln>
+          <a:effectLst/>
+        </p:spPr>
+        <p:txBody>
+          <a:bodyPr rtlCol="0" anchor="ctr"/>
+          <a:lstStyle/>
+          <a:p>
+            <a:pPr algn="ctr"/>
+          </a:p>
+        </p:txBody>
+      </p:sp>
+      <p:sp>
+        <p:nvSpPr>
+          <p:cNvPr id="9" name="Rectangle 8"/>
+          <p:cNvSpPr/>
+          <p:nvPr/>
+        </p:nvSpPr>
+        <p:spPr>
+          <a:xfrm>
+            <a:off x="932688" y="1170432"/>
+            <a:ext cx="566928" cy="50292"/>
+          </a:xfrm>
+          <a:prstGeom prst="rect">
+            <a:avLst/>
+          </a:prstGeom>
+          <a:solidFill>
+            <a:srgbClr val="C9C9C9"/>
+          </a:solidFill>
+          <a:ln>
+            <a:noFill/>
+          </a:ln>
+          <a:effectLst/>
+        </p:spPr>
+        <p:txBody>
+          <a:bodyPr rtlCol="0" anchor="ctr"/>
+          <a:lstStyle/>
+          <a:p>
+            <a:pPr algn="ctr"/>
+          </a:p>
+        </p:txBody>
+      </p:sp>
+      <p:sp>
+        <p:nvSpPr>
+          <p:cNvPr id="10" name="Rectangle 9"/>
+          <p:cNvSpPr/>
+          <p:nvPr/>
+        </p:nvSpPr>
+        <p:spPr>
+          <a:xfrm>
+            <a:off x="932688" y="1371600"/>
+            <a:ext cx="566928" cy="50292"/>
+          </a:xfrm>
+          <a:prstGeom prst="rect">
+            <a:avLst/>
+          </a:prstGeom>
+          <a:solidFill>
+            <a:srgbClr val="C9C9C9"/>
+          </a:solidFill>
+          <a:ln>
+            <a:noFill/>
+          </a:ln>
+          <a:effectLst/>
+        </p:spPr>
+        <p:txBody>
+          <a:bodyPr rtlCol="0" anchor="ctr"/>
+          <a:lstStyle/>
+          <a:p>
+            <a:pPr algn="ctr"/>
+          </a:p>
+        </p:txBody>
+      </p:sp>
+      <p:sp>
+        <p:nvSpPr>
+          <p:cNvPr id="11" name="Rectangle 10"/>
+          <p:cNvSpPr/>
+          <p:nvPr/>
+        </p:nvSpPr>
+        <p:spPr>
+          <a:xfrm>
+            <a:off x="932688" y="1572768"/>
+            <a:ext cx="566928" cy="50292"/>
+          </a:xfrm>
+          <a:prstGeom prst="rect">
+            <a:avLst/>
+          </a:prstGeom>
+          <a:solidFill>
+            <a:srgbClr val="C9C9C9"/>
+          </a:solidFill>
+          <a:ln>
+            <a:noFill/>
+          </a:ln>
+          <a:effectLst/>
+        </p:spPr>
+        <p:txBody>
+          <a:bodyPr rtlCol="0" anchor="ctr"/>
+          <a:lstStyle/>
+          <a:p>
+            <a:pPr algn="ctr"/>
+          </a:p>
+        </p:txBody>
+      </p:sp>
+      <p:sp>
+        <p:nvSpPr>
+          <p:cNvPr id="12" name="TextBox 11"/>
+          <p:cNvSpPr txBox="1"/>
+          <p:nvPr/>
+        </p:nvSpPr>
+        <p:spPr>
+          <a:xfrm>
+            <a:off x="320040" y="2011680"/>
+            <a:ext cx="1737360" cy="274320"/>
+          </a:xfrm>
+          <a:prstGeom prst="rect">
+            <a:avLst/>
+          </a:prstGeom>
+          <a:noFill/>
+        </p:spPr>
+        <p:txBody>
+          <a:bodyPr wrap="square" lIns="0" rIns="0" tIns="0" bIns="0">
+            <a:spAutoFit/>
+          </a:bodyPr>
+          <a:lstStyle/>
+          <a:p>
+            <a:pPr algn="ctr"/>
+            <a:r>
               <a:rPr sz="1400" b="1" i="1">
                 <a:solidFill>
                   <a:srgbClr val="1F1F1E"/>
                 </a:solidFill>
                 <a:latin typeface="Times New Roman"/>
               </a:rPr>
-              <a:t>Reading the task as skill demand</a:t>
-            </a:r>
-          </a:p>
-        </p:txBody>
-      </p:sp>
-      <p:sp>
-        <p:nvSpPr>
-          <p:cNvPr id="6" name="Rounded Rectangle 5"/>
-          <p:cNvSpPr/>
-          <p:nvPr/>
-        </p:nvSpPr>
-        <p:spPr>
-          <a:xfrm>
-            <a:off x="502920" y="822960"/>
-            <a:ext cx="786384" cy="932688"/>
-          </a:xfrm>
-          <a:prstGeom prst="roundRect">
-            <a:avLst>
-              <a:gd name="adj" fmla="val 6000"/>
-            </a:avLst>
-          </a:prstGeom>
-          <a:solidFill>
-            <a:srgbClr val="FFFFFF"/>
-          </a:solidFill>
-          <a:ln w="15240">
-            <a:solidFill>
-              <a:srgbClr val="777777"/>
-            </a:solidFill>
-          </a:ln>
-          <a:effectLst/>
-        </p:spPr>
-        <p:txBody>
-          <a:bodyPr rtlCol="0" anchor="ctr"/>
-          <a:lstStyle/>
-          <a:p>
-            <a:pPr algn="ctr"/>
-          </a:p>
-        </p:txBody>
-      </p:sp>
-      <p:sp>
-        <p:nvSpPr>
-          <p:cNvPr id="7" name="Rounded Rectangle 6"/>
-          <p:cNvSpPr/>
-          <p:nvPr/>
-        </p:nvSpPr>
-        <p:spPr>
-          <a:xfrm>
-            <a:off x="649224" y="881481"/>
-            <a:ext cx="786384" cy="932688"/>
-          </a:xfrm>
-          <a:prstGeom prst="roundRect">
-            <a:avLst>
-              <a:gd name="adj" fmla="val 6000"/>
-            </a:avLst>
-          </a:prstGeom>
-          <a:solidFill>
-            <a:srgbClr val="FFFFFF"/>
-          </a:solidFill>
-          <a:ln w="15240">
-            <a:solidFill>
-              <a:srgbClr val="777777"/>
-            </a:solidFill>
-          </a:ln>
-          <a:effectLst/>
-        </p:spPr>
-        <p:txBody>
-          <a:bodyPr rtlCol="0" anchor="ctr"/>
-          <a:lstStyle/>
-          <a:p>
-            <a:pPr algn="ctr"/>
-          </a:p>
-        </p:txBody>
-      </p:sp>
-      <p:sp>
-        <p:nvSpPr>
-          <p:cNvPr id="8" name="Rounded Rectangle 7"/>
-          <p:cNvSpPr/>
-          <p:nvPr/>
-        </p:nvSpPr>
-        <p:spPr>
-          <a:xfrm>
-            <a:off x="795528" y="940003"/>
-            <a:ext cx="786384" cy="932688"/>
-          </a:xfrm>
-          <a:prstGeom prst="roundRect">
-            <a:avLst>
-              <a:gd name="adj" fmla="val 6000"/>
-            </a:avLst>
-          </a:prstGeom>
-          <a:solidFill>
-            <a:srgbClr val="FFFFFF"/>
-          </a:solidFill>
-          <a:ln w="15240">
-            <a:solidFill>
-              <a:srgbClr val="777777"/>
-            </a:solidFill>
-          </a:ln>
-          <a:effectLst/>
-        </p:spPr>
-        <p:txBody>
-          <a:bodyPr rtlCol="0" anchor="ctr"/>
-          <a:lstStyle/>
-          <a:p>
-            <a:pPr algn="ctr"/>
-          </a:p>
-        </p:txBody>
-      </p:sp>
-      <p:sp>
-        <p:nvSpPr>
-          <p:cNvPr id="9" name="Rectangle 8"/>
-          <p:cNvSpPr/>
-          <p:nvPr/>
-        </p:nvSpPr>
-        <p:spPr>
-          <a:xfrm>
-            <a:off x="932688" y="1188720"/>
-            <a:ext cx="475488" cy="41148"/>
-          </a:xfrm>
-          <a:prstGeom prst="rect">
-            <a:avLst/>
-          </a:prstGeom>
-          <a:solidFill>
-            <a:srgbClr val="C9C9C9"/>
-          </a:solidFill>
-          <a:ln>
-            <a:noFill/>
-          </a:ln>
-          <a:effectLst/>
-        </p:spPr>
-        <p:txBody>
-          <a:bodyPr rtlCol="0" anchor="ctr"/>
-          <a:lstStyle/>
-          <a:p>
-            <a:pPr algn="ctr"/>
-          </a:p>
-        </p:txBody>
-      </p:sp>
-      <p:sp>
-        <p:nvSpPr>
-          <p:cNvPr id="10" name="Rectangle 9"/>
-          <p:cNvSpPr/>
-          <p:nvPr/>
-        </p:nvSpPr>
-        <p:spPr>
-          <a:xfrm>
-            <a:off x="932688" y="1353312"/>
-            <a:ext cx="475488" cy="41148"/>
-          </a:xfrm>
-          <a:prstGeom prst="rect">
-            <a:avLst/>
-          </a:prstGeom>
-          <a:solidFill>
-            <a:srgbClr val="C9C9C9"/>
-          </a:solidFill>
-          <a:ln>
-            <a:noFill/>
-          </a:ln>
-          <a:effectLst/>
-        </p:spPr>
-        <p:txBody>
-          <a:bodyPr rtlCol="0" anchor="ctr"/>
-          <a:lstStyle/>
-          <a:p>
-            <a:pPr algn="ctr"/>
-          </a:p>
-        </p:txBody>
-      </p:sp>
-      <p:sp>
-        <p:nvSpPr>
-          <p:cNvPr id="11" name="Rectangle 10"/>
-          <p:cNvSpPr/>
-          <p:nvPr/>
-        </p:nvSpPr>
-        <p:spPr>
-          <a:xfrm>
-            <a:off x="932688" y="1517904"/>
-            <a:ext cx="475488" cy="41148"/>
-          </a:xfrm>
-          <a:prstGeom prst="rect">
-            <a:avLst/>
-          </a:prstGeom>
-          <a:solidFill>
-            <a:srgbClr val="C9C9C9"/>
-          </a:solidFill>
-          <a:ln>
-            <a:noFill/>
-          </a:ln>
-          <a:effectLst/>
-        </p:spPr>
-        <p:txBody>
-          <a:bodyPr rtlCol="0" anchor="ctr"/>
-          <a:lstStyle/>
-          <a:p>
-            <a:pPr algn="ctr"/>
-          </a:p>
-        </p:txBody>
-      </p:sp>
-      <p:sp>
-        <p:nvSpPr>
-          <p:cNvPr id="12" name="TextBox 11"/>
-          <p:cNvSpPr txBox="1"/>
-          <p:nvPr/>
-        </p:nvSpPr>
-        <p:spPr>
-          <a:xfrm>
-            <a:off x="384048" y="1975104"/>
-            <a:ext cx="1554480" cy="274320"/>
-          </a:xfrm>
-          <a:prstGeom prst="rect">
-            <a:avLst/>
-          </a:prstGeom>
-          <a:noFill/>
-        </p:spPr>
-        <p:txBody>
-          <a:bodyPr wrap="square" lIns="0" rIns="0" tIns="0" bIns="0">
-            <a:spAutoFit/>
-          </a:bodyPr>
-          <a:lstStyle/>
-          <a:p>
-            <a:pPr algn="ctr"/>
-            <a:r>
-              <a:rPr sz="1100" b="1" i="1">
-                <a:solidFill>
-                  <a:srgbClr val="1F1F1E"/>
-                </a:solidFill>
-                <a:latin typeface="Times New Roman"/>
-              </a:rPr>
               <a:t>Support Set S</a:t>
             </a:r>
           </a:p>
@@ -3461,8 +3461,8 @@
         </p:nvSpPr>
         <p:spPr>
           <a:xfrm>
-            <a:off x="2400300" y="891540"/>
-            <a:ext cx="960120" cy="868680"/>
+            <a:off x="2286000" y="772668"/>
+            <a:ext cx="1188720" cy="1051560"/>
           </a:xfrm>
           <a:prstGeom prst="roundRect">
             <a:avLst>
@@ -3495,7 +3495,7 @@
         </p:nvSpPr>
         <p:spPr>
           <a:xfrm>
-            <a:off x="2869387" y="763524"/>
+            <a:off x="2869387" y="644652"/>
             <a:ext cx="21945" cy="128016"/>
           </a:xfrm>
           <a:prstGeom prst="rect">
@@ -3525,7 +3525,7 @@
         </p:nvSpPr>
         <p:spPr>
           <a:xfrm>
-            <a:off x="2834640" y="672084"/>
+            <a:off x="2834640" y="553212"/>
             <a:ext cx="91440" cy="91440"/>
           </a:xfrm>
           <a:prstGeom prst="ellipse">
@@ -3555,7 +3555,7 @@
         </p:nvSpPr>
         <p:spPr>
           <a:xfrm>
-            <a:off x="2666390" y="1197864"/>
+            <a:off x="2625242" y="1152144"/>
             <a:ext cx="82296" cy="82296"/>
           </a:xfrm>
           <a:prstGeom prst="ellipse">
@@ -3585,7 +3585,7 @@
         </p:nvSpPr>
         <p:spPr>
           <a:xfrm>
-            <a:off x="3012033" y="1197864"/>
+            <a:off x="3053181" y="1152144"/>
             <a:ext cx="82296" cy="82296"/>
           </a:xfrm>
           <a:prstGeom prst="ellipse">
@@ -3615,8 +3615,8 @@
         </p:nvSpPr>
         <p:spPr>
           <a:xfrm>
-            <a:off x="2745943" y="1430121"/>
-            <a:ext cx="268833" cy="27432"/>
+            <a:off x="2713939" y="1424635"/>
+            <a:ext cx="332841" cy="27432"/>
           </a:xfrm>
           <a:prstGeom prst="roundRect">
             <a:avLst>
@@ -3647,8 +3647,8 @@
         </p:nvSpPr>
         <p:spPr>
           <a:xfrm>
-            <a:off x="2080260" y="1796795"/>
-            <a:ext cx="1600200" cy="256032"/>
+            <a:off x="1965960" y="1860803"/>
+            <a:ext cx="1828800" cy="256032"/>
           </a:xfrm>
           <a:prstGeom prst="rect">
             <a:avLst/>
@@ -3663,7 +3663,7 @@
           <a:p>
             <a:pPr algn="ctr"/>
             <a:r>
-              <a:rPr sz="950" b="1" i="0">
+              <a:rPr sz="1300" b="1" i="0">
                 <a:solidFill>
                   <a:srgbClr val="1F1F1E"/>
                 </a:solidFill>
@@ -3741,7 +3741,7 @@
         <p:spPr>
           <a:xfrm>
             <a:off x="4178808" y="1764792"/>
-            <a:ext cx="690372" cy="0"/>
+            <a:ext cx="864108" cy="0"/>
           </a:xfrm>
           <a:prstGeom prst="line">
             <a:avLst/>
@@ -3763,7 +3763,7 @@
         <p:spPr>
           <a:xfrm>
             <a:off x="4178808" y="1618488"/>
-            <a:ext cx="690372" cy="0"/>
+            <a:ext cx="864108" cy="0"/>
           </a:xfrm>
           <a:prstGeom prst="line">
             <a:avLst/>
@@ -3785,7 +3785,7 @@
         <p:spPr>
           <a:xfrm>
             <a:off x="4178808" y="1472184"/>
-            <a:ext cx="690372" cy="0"/>
+            <a:ext cx="864108" cy="0"/>
           </a:xfrm>
           <a:prstGeom prst="line">
             <a:avLst/>
@@ -3807,7 +3807,7 @@
         <p:spPr>
           <a:xfrm>
             <a:off x="4178808" y="1325880"/>
-            <a:ext cx="690372" cy="0"/>
+            <a:ext cx="864108" cy="0"/>
           </a:xfrm>
           <a:prstGeom prst="line">
             <a:avLst/>
@@ -3829,7 +3829,7 @@
         <p:spPr>
           <a:xfrm>
             <a:off x="4178808" y="1783080"/>
-            <a:ext cx="690372" cy="0"/>
+            <a:ext cx="864108" cy="0"/>
           </a:xfrm>
           <a:prstGeom prst="line">
             <a:avLst/>
@@ -3851,7 +3851,7 @@
         <p:spPr>
           <a:xfrm>
             <a:off x="4224528" y="1216152"/>
-            <a:ext cx="118872" cy="566928"/>
+            <a:ext cx="155448" cy="566928"/>
           </a:xfrm>
           <a:prstGeom prst="rect">
             <a:avLst/>
@@ -3882,8 +3882,8 @@
         </p:nvSpPr>
         <p:spPr>
           <a:xfrm>
-            <a:off x="4384548" y="1508760"/>
-            <a:ext cx="118872" cy="274320"/>
+            <a:off x="4430268" y="1508760"/>
+            <a:ext cx="155448" cy="274320"/>
           </a:xfrm>
           <a:prstGeom prst="rect">
             <a:avLst/>
@@ -3914,8 +3914,8 @@
         </p:nvSpPr>
         <p:spPr>
           <a:xfrm>
-            <a:off x="4544568" y="1325880"/>
-            <a:ext cx="118872" cy="457200"/>
+            <a:off x="4636008" y="1325880"/>
+            <a:ext cx="155448" cy="457200"/>
           </a:xfrm>
           <a:prstGeom prst="rect">
             <a:avLst/>
@@ -3946,8 +3946,8 @@
         </p:nvSpPr>
         <p:spPr>
           <a:xfrm>
-            <a:off x="4704588" y="1581912"/>
-            <a:ext cx="118872" cy="201168"/>
+            <a:off x="4841748" y="1581912"/>
+            <a:ext cx="155448" cy="201168"/>
           </a:xfrm>
           <a:prstGeom prst="rect">
             <a:avLst/>
@@ -3978,8 +3978,8 @@
         </p:nvSpPr>
         <p:spPr>
           <a:xfrm>
-            <a:off x="3977639" y="1920240"/>
-            <a:ext cx="1463040" cy="274320"/>
+            <a:off x="3840480" y="1956816"/>
+            <a:ext cx="1920240" cy="274320"/>
           </a:xfrm>
           <a:prstGeom prst="rect">
             <a:avLst/>
@@ -3994,7 +3994,7 @@
           <a:p>
             <a:pPr algn="ctr"/>
             <a:r>
-              <a:rPr sz="1100" b="1" i="1">
+              <a:rPr sz="1400" b="1" i="1">
                 <a:solidFill>
                   <a:srgbClr val="1F1F1E"/>
                 </a:solidFill>
@@ -4029,2105 +4029,2105 @@
           <a:p>
             <a:pPr algn="ctr"/>
             <a:r>
+              <a:rPr sz="1900" b="0" i="0">
+                <a:solidFill>
+                  <a:srgbClr val="1F1F1E"/>
+                </a:solidFill>
+                <a:latin typeface="Times New Roman"/>
+              </a:rPr>
+              <a:t>min‖X − CD‖²  +  λ‖C‖₁</a:t>
+            </a:r>
+          </a:p>
+        </p:txBody>
+      </p:sp>
+      <p:cxnSp>
+        <p:nvCxnSpPr>
+          <p:cNvPr id="34" name="Connector 33"/>
+          <p:cNvCxnSpPr/>
+          <p:nvPr/>
+        </p:nvCxnSpPr>
+        <p:spPr>
+          <a:xfrm>
+            <a:off x="4206240" y="2331720"/>
+            <a:ext cx="0" cy="685800"/>
+          </a:xfrm>
+          <a:prstGeom prst="line">
+            <a:avLst/>
+          </a:prstGeom>
+          <a:ln w="30480">
+            <a:solidFill>
+              <a:srgbClr val="333333"/>
+            </a:solidFill>
+            <a:tailEnd type="triangle" w="med" len="med"/>
+          </a:ln>
+          <a:effectLst/>
+        </p:spPr>
+      </p:cxnSp>
+      <p:sp>
+        <p:nvSpPr>
+          <p:cNvPr id="35" name="Rounded Rectangle 34"/>
+          <p:cNvSpPr/>
+          <p:nvPr/>
+        </p:nvSpPr>
+        <p:spPr>
+          <a:xfrm>
+            <a:off x="731520" y="3127248"/>
+            <a:ext cx="457200" cy="457200"/>
+          </a:xfrm>
+          <a:prstGeom prst="roundRect">
+            <a:avLst>
+              <a:gd name="adj" fmla="val 18000"/>
+            </a:avLst>
+          </a:prstGeom>
+          <a:solidFill>
+            <a:srgbClr val="4C72B0"/>
+          </a:solidFill>
+          <a:ln w="15240">
+            <a:solidFill>
+              <a:srgbClr val="FFFFFF"/>
+            </a:solidFill>
+          </a:ln>
+          <a:effectLst/>
+        </p:spPr>
+        <p:txBody>
+          <a:bodyPr rtlCol="0" anchor="ctr"/>
+          <a:lstStyle/>
+          <a:p>
+            <a:pPr algn="ctr"/>
+          </a:p>
+        </p:txBody>
+      </p:sp>
+      <p:sp>
+        <p:nvSpPr>
+          <p:cNvPr id="36" name="Rounded Rectangle 35"/>
+          <p:cNvSpPr/>
+          <p:nvPr/>
+        </p:nvSpPr>
+        <p:spPr>
+          <a:xfrm>
+            <a:off x="1298448" y="3127248"/>
+            <a:ext cx="457200" cy="457200"/>
+          </a:xfrm>
+          <a:prstGeom prst="roundRect">
+            <a:avLst>
+              <a:gd name="adj" fmla="val 18000"/>
+            </a:avLst>
+          </a:prstGeom>
+          <a:solidFill>
+            <a:srgbClr val="5F9EA0"/>
+          </a:solidFill>
+          <a:ln w="15240">
+            <a:solidFill>
+              <a:srgbClr val="FFFFFF"/>
+            </a:solidFill>
+          </a:ln>
+          <a:effectLst/>
+        </p:spPr>
+        <p:txBody>
+          <a:bodyPr rtlCol="0" anchor="ctr"/>
+          <a:lstStyle/>
+          <a:p>
+            <a:pPr algn="ctr"/>
+          </a:p>
+        </p:txBody>
+      </p:sp>
+      <p:sp>
+        <p:nvSpPr>
+          <p:cNvPr id="37" name="Rounded Rectangle 36"/>
+          <p:cNvSpPr/>
+          <p:nvPr/>
+        </p:nvSpPr>
+        <p:spPr>
+          <a:xfrm>
+            <a:off x="1865376" y="3127248"/>
+            <a:ext cx="457200" cy="457200"/>
+          </a:xfrm>
+          <a:prstGeom prst="roundRect">
+            <a:avLst>
+              <a:gd name="adj" fmla="val 18000"/>
+            </a:avLst>
+          </a:prstGeom>
+          <a:solidFill>
+            <a:srgbClr val="7BA7D7"/>
+          </a:solidFill>
+          <a:ln w="15240">
+            <a:solidFill>
+              <a:srgbClr val="FFFFFF"/>
+            </a:solidFill>
+          </a:ln>
+          <a:effectLst/>
+        </p:spPr>
+        <p:txBody>
+          <a:bodyPr rtlCol="0" anchor="ctr"/>
+          <a:lstStyle/>
+          <a:p>
+            <a:pPr algn="ctr"/>
+          </a:p>
+        </p:txBody>
+      </p:sp>
+      <p:sp>
+        <p:nvSpPr>
+          <p:cNvPr id="38" name="Rounded Rectangle 37"/>
+          <p:cNvSpPr/>
+          <p:nvPr/>
+        </p:nvSpPr>
+        <p:spPr>
+          <a:xfrm>
+            <a:off x="2432304" y="3127248"/>
+            <a:ext cx="457200" cy="457200"/>
+          </a:xfrm>
+          <a:prstGeom prst="roundRect">
+            <a:avLst>
+              <a:gd name="adj" fmla="val 18000"/>
+            </a:avLst>
+          </a:prstGeom>
+          <a:solidFill>
+            <a:srgbClr val="F2B98F"/>
+          </a:solidFill>
+          <a:ln w="15240">
+            <a:solidFill>
+              <a:srgbClr val="FFFFFF"/>
+            </a:solidFill>
+          </a:ln>
+          <a:effectLst/>
+        </p:spPr>
+        <p:txBody>
+          <a:bodyPr rtlCol="0" anchor="ctr"/>
+          <a:lstStyle/>
+          <a:p>
+            <a:pPr algn="ctr"/>
+          </a:p>
+        </p:txBody>
+      </p:sp>
+      <p:sp>
+        <p:nvSpPr>
+          <p:cNvPr id="39" name="Rounded Rectangle 38"/>
+          <p:cNvSpPr/>
+          <p:nvPr/>
+        </p:nvSpPr>
+        <p:spPr>
+          <a:xfrm>
+            <a:off x="2999232" y="3127248"/>
+            <a:ext cx="457200" cy="457200"/>
+          </a:xfrm>
+          <a:prstGeom prst="roundRect">
+            <a:avLst>
+              <a:gd name="adj" fmla="val 18000"/>
+            </a:avLst>
+          </a:prstGeom>
+          <a:solidFill>
+            <a:srgbClr val="E29A9A"/>
+          </a:solidFill>
+          <a:ln w="15240">
+            <a:solidFill>
+              <a:srgbClr val="FFFFFF"/>
+            </a:solidFill>
+          </a:ln>
+          <a:effectLst/>
+        </p:spPr>
+        <p:txBody>
+          <a:bodyPr rtlCol="0" anchor="ctr"/>
+          <a:lstStyle/>
+          <a:p>
+            <a:pPr algn="ctr"/>
+          </a:p>
+        </p:txBody>
+      </p:sp>
+      <p:sp>
+        <p:nvSpPr>
+          <p:cNvPr id="40" name="TextBox 39"/>
+          <p:cNvSpPr txBox="1"/>
+          <p:nvPr/>
+        </p:nvSpPr>
+        <p:spPr>
+          <a:xfrm>
+            <a:off x="411480" y="3657600"/>
+            <a:ext cx="3291840" cy="274320"/>
+          </a:xfrm>
+          <a:prstGeom prst="rect">
+            <a:avLst/>
+          </a:prstGeom>
+          <a:noFill/>
+        </p:spPr>
+        <p:txBody>
+          <a:bodyPr wrap="square" lIns="0" rIns="0" tIns="0" bIns="0">
+            <a:spAutoFit/>
+          </a:bodyPr>
+          <a:lstStyle/>
+          <a:p>
+            <a:pPr algn="ctr"/>
+            <a:r>
+              <a:rPr sz="1400" b="1" i="1">
+                <a:solidFill>
+                  <a:srgbClr val="1F1F1E"/>
+                </a:solidFill>
+                <a:latin typeface="Times New Roman"/>
+              </a:rPr>
+              <a:t>Capability Atoms (dictionary D)</a:t>
+            </a:r>
+          </a:p>
+        </p:txBody>
+      </p:sp>
+      <p:cxnSp>
+        <p:nvCxnSpPr>
+          <p:cNvPr id="41" name="Connector 40"/>
+          <p:cNvCxnSpPr/>
+          <p:nvPr/>
+        </p:nvCxnSpPr>
+        <p:spPr>
+          <a:xfrm>
+            <a:off x="3639312" y="3355848"/>
+            <a:ext cx="365760" cy="0"/>
+          </a:xfrm>
+          <a:prstGeom prst="line">
+            <a:avLst/>
+          </a:prstGeom>
+          <a:ln w="30480">
+            <a:solidFill>
+              <a:srgbClr val="333333"/>
+            </a:solidFill>
+            <a:tailEnd type="triangle" w="med" len="med"/>
+          </a:ln>
+          <a:effectLst/>
+        </p:spPr>
+      </p:cxnSp>
+      <p:cxnSp>
+        <p:nvCxnSpPr>
+          <p:cNvPr id="42" name="Connector 41"/>
+          <p:cNvCxnSpPr/>
+          <p:nvPr/>
+        </p:nvCxnSpPr>
+        <p:spPr>
+          <a:xfrm>
+            <a:off x="4087368" y="3730752"/>
+            <a:ext cx="864108" cy="0"/>
+          </a:xfrm>
+          <a:prstGeom prst="line">
+            <a:avLst/>
+          </a:prstGeom>
+          <a:ln w="11430">
+            <a:solidFill>
+              <a:srgbClr val="E4E4E4"/>
+            </a:solidFill>
+          </a:ln>
+          <a:effectLst/>
+        </p:spPr>
+      </p:cxnSp>
+      <p:cxnSp>
+        <p:nvCxnSpPr>
+          <p:cNvPr id="43" name="Connector 42"/>
+          <p:cNvCxnSpPr/>
+          <p:nvPr/>
+        </p:nvCxnSpPr>
+        <p:spPr>
+          <a:xfrm>
+            <a:off x="4087368" y="3584448"/>
+            <a:ext cx="864108" cy="0"/>
+          </a:xfrm>
+          <a:prstGeom prst="line">
+            <a:avLst/>
+          </a:prstGeom>
+          <a:ln w="11430">
+            <a:solidFill>
+              <a:srgbClr val="E4E4E4"/>
+            </a:solidFill>
+          </a:ln>
+          <a:effectLst/>
+        </p:spPr>
+      </p:cxnSp>
+      <p:cxnSp>
+        <p:nvCxnSpPr>
+          <p:cNvPr id="44" name="Connector 43"/>
+          <p:cNvCxnSpPr/>
+          <p:nvPr/>
+        </p:nvCxnSpPr>
+        <p:spPr>
+          <a:xfrm>
+            <a:off x="4087368" y="3438144"/>
+            <a:ext cx="864108" cy="0"/>
+          </a:xfrm>
+          <a:prstGeom prst="line">
+            <a:avLst/>
+          </a:prstGeom>
+          <a:ln w="11430">
+            <a:solidFill>
+              <a:srgbClr val="E4E4E4"/>
+            </a:solidFill>
+          </a:ln>
+          <a:effectLst/>
+        </p:spPr>
+      </p:cxnSp>
+      <p:cxnSp>
+        <p:nvCxnSpPr>
+          <p:cNvPr id="45" name="Connector 44"/>
+          <p:cNvCxnSpPr/>
+          <p:nvPr/>
+        </p:nvCxnSpPr>
+        <p:spPr>
+          <a:xfrm>
+            <a:off x="4087368" y="3291840"/>
+            <a:ext cx="864108" cy="0"/>
+          </a:xfrm>
+          <a:prstGeom prst="line">
+            <a:avLst/>
+          </a:prstGeom>
+          <a:ln w="11430">
+            <a:solidFill>
+              <a:srgbClr val="E4E4E4"/>
+            </a:solidFill>
+          </a:ln>
+          <a:effectLst/>
+        </p:spPr>
+      </p:cxnSp>
+      <p:cxnSp>
+        <p:nvCxnSpPr>
+          <p:cNvPr id="46" name="Connector 45"/>
+          <p:cNvCxnSpPr/>
+          <p:nvPr/>
+        </p:nvCxnSpPr>
+        <p:spPr>
+          <a:xfrm>
+            <a:off x="4087368" y="3749039"/>
+            <a:ext cx="864107" cy="0"/>
+          </a:xfrm>
+          <a:prstGeom prst="line">
+            <a:avLst/>
+          </a:prstGeom>
+          <a:ln w="17780">
+            <a:solidFill>
+              <a:srgbClr val="555555"/>
+            </a:solidFill>
+          </a:ln>
+          <a:effectLst/>
+        </p:spPr>
+      </p:cxnSp>
+      <p:sp>
+        <p:nvSpPr>
+          <p:cNvPr id="47" name="Rectangle 46"/>
+          <p:cNvSpPr/>
+          <p:nvPr/>
+        </p:nvSpPr>
+        <p:spPr>
+          <a:xfrm>
+            <a:off x="4133087" y="3145535"/>
+            <a:ext cx="155448" cy="603504"/>
+          </a:xfrm>
+          <a:prstGeom prst="rect">
+            <a:avLst/>
+          </a:prstGeom>
+          <a:solidFill>
+            <a:srgbClr val="4C72B0"/>
+          </a:solidFill>
+          <a:ln w="12700">
+            <a:solidFill>
+              <a:srgbClr val="666666"/>
+            </a:solidFill>
+          </a:ln>
+          <a:effectLst/>
+        </p:spPr>
+        <p:txBody>
+          <a:bodyPr rtlCol="0" anchor="ctr"/>
+          <a:lstStyle/>
+          <a:p>
+            <a:pPr algn="ctr"/>
+          </a:p>
+        </p:txBody>
+      </p:sp>
+      <p:sp>
+        <p:nvSpPr>
+          <p:cNvPr id="48" name="Rectangle 47"/>
+          <p:cNvSpPr/>
+          <p:nvPr/>
+        </p:nvSpPr>
+        <p:spPr>
+          <a:xfrm>
+            <a:off x="4338827" y="3346703"/>
+            <a:ext cx="155448" cy="402336"/>
+          </a:xfrm>
+          <a:prstGeom prst="rect">
+            <a:avLst/>
+          </a:prstGeom>
+          <a:solidFill>
+            <a:srgbClr val="5F9EA0"/>
+          </a:solidFill>
+          <a:ln w="12700">
+            <a:solidFill>
+              <a:srgbClr val="666666"/>
+            </a:solidFill>
+          </a:ln>
+          <a:effectLst/>
+        </p:spPr>
+        <p:txBody>
+          <a:bodyPr rtlCol="0" anchor="ctr"/>
+          <a:lstStyle/>
+          <a:p>
+            <a:pPr algn="ctr"/>
+          </a:p>
+        </p:txBody>
+      </p:sp>
+      <p:sp>
+        <p:nvSpPr>
+          <p:cNvPr id="49" name="Rectangle 48"/>
+          <p:cNvSpPr/>
+          <p:nvPr/>
+        </p:nvSpPr>
+        <p:spPr>
+          <a:xfrm>
+            <a:off x="4544568" y="3493007"/>
+            <a:ext cx="155448" cy="256032"/>
+          </a:xfrm>
+          <a:prstGeom prst="rect">
+            <a:avLst/>
+          </a:prstGeom>
+          <a:solidFill>
+            <a:srgbClr val="7BA7D7"/>
+          </a:solidFill>
+          <a:ln w="12700">
+            <a:solidFill>
+              <a:srgbClr val="666666"/>
+            </a:solidFill>
+          </a:ln>
+          <a:effectLst/>
+        </p:spPr>
+        <p:txBody>
+          <a:bodyPr rtlCol="0" anchor="ctr"/>
+          <a:lstStyle/>
+          <a:p>
+            <a:pPr algn="ctr"/>
+          </a:p>
+        </p:txBody>
+      </p:sp>
+      <p:sp>
+        <p:nvSpPr>
+          <p:cNvPr id="50" name="Rectangle 49"/>
+          <p:cNvSpPr/>
+          <p:nvPr/>
+        </p:nvSpPr>
+        <p:spPr>
+          <a:xfrm>
+            <a:off x="4750307" y="3657599"/>
+            <a:ext cx="155448" cy="91440"/>
+          </a:xfrm>
+          <a:prstGeom prst="rect">
+            <a:avLst/>
+          </a:prstGeom>
+          <a:solidFill>
+            <a:srgbClr val="C9C9C9"/>
+          </a:solidFill>
+          <a:ln w="12700">
+            <a:solidFill>
+              <a:srgbClr val="666666"/>
+            </a:solidFill>
+          </a:ln>
+          <a:effectLst/>
+        </p:spPr>
+        <p:txBody>
+          <a:bodyPr rtlCol="0" anchor="ctr"/>
+          <a:lstStyle/>
+          <a:p>
+            <a:pPr algn="ctr"/>
+          </a:p>
+        </p:txBody>
+      </p:sp>
+      <p:sp>
+        <p:nvSpPr>
+          <p:cNvPr id="51" name="TextBox 50"/>
+          <p:cNvSpPr txBox="1"/>
+          <p:nvPr/>
+        </p:nvSpPr>
+        <p:spPr>
+          <a:xfrm>
+            <a:off x="3703320" y="3931920"/>
+            <a:ext cx="2011680" cy="274320"/>
+          </a:xfrm>
+          <a:prstGeom prst="rect">
+            <a:avLst/>
+          </a:prstGeom>
+          <a:noFill/>
+        </p:spPr>
+        <p:txBody>
+          <a:bodyPr wrap="square" lIns="0" rIns="0" tIns="0" bIns="0">
+            <a:spAutoFit/>
+          </a:bodyPr>
+          <a:lstStyle/>
+          <a:p>
+            <a:pPr algn="ctr"/>
+            <a:r>
+              <a:rPr sz="1400" b="1" i="1">
+                <a:solidFill>
+                  <a:srgbClr val="1F1F1E"/>
+                </a:solidFill>
+                <a:latin typeface="Times New Roman"/>
+              </a:rPr>
+              <a:t>Task Demand w</a:t>
+            </a:r>
+          </a:p>
+        </p:txBody>
+      </p:sp>
+      <p:sp>
+        <p:nvSpPr>
+          <p:cNvPr id="52" name="TextBox 51"/>
+          <p:cNvSpPr txBox="1"/>
+          <p:nvPr/>
+        </p:nvSpPr>
+        <p:spPr>
+          <a:xfrm>
+            <a:off x="457200" y="4297680"/>
+            <a:ext cx="5303520" cy="329184"/>
+          </a:xfrm>
+          <a:prstGeom prst="rect">
+            <a:avLst/>
+          </a:prstGeom>
+          <a:noFill/>
+        </p:spPr>
+        <p:txBody>
+          <a:bodyPr wrap="square" lIns="0" rIns="0" tIns="0" bIns="0">
+            <a:spAutoFit/>
+          </a:bodyPr>
+          <a:lstStyle/>
+          <a:p>
+            <a:pPr algn="ctr"/>
+            <a:r>
+              <a:rPr sz="1700" b="0" i="0">
+                <a:solidFill>
+                  <a:srgbClr val="1F1F1E"/>
+                </a:solidFill>
+                <a:latin typeface="Times New Roman"/>
+              </a:rPr>
+              <a:t>per-skill token quota  =  w · b</a:t>
+            </a:r>
+          </a:p>
+        </p:txBody>
+      </p:sp>
+      <p:sp>
+        <p:nvSpPr>
+          <p:cNvPr id="53" name="TextBox 52"/>
+          <p:cNvSpPr txBox="1"/>
+          <p:nvPr/>
+        </p:nvSpPr>
+        <p:spPr>
+          <a:xfrm>
+            <a:off x="320040" y="4754880"/>
+            <a:ext cx="5394960" cy="274320"/>
+          </a:xfrm>
+          <a:prstGeom prst="rect">
+            <a:avLst/>
+          </a:prstGeom>
+          <a:noFill/>
+        </p:spPr>
+        <p:txBody>
+          <a:bodyPr wrap="square" lIns="0" rIns="0" tIns="0" bIns="0">
+            <a:spAutoFit/>
+          </a:bodyPr>
+          <a:lstStyle/>
+          <a:p>
+            <a:pPr algn="l"/>
+            <a:r>
+              <a:rPr sz="1500" b="1" i="1">
+                <a:solidFill>
+                  <a:srgbClr val="1F1F1E"/>
+                </a:solidFill>
+                <a:latin typeface="Times New Roman"/>
+              </a:rPr>
+              <a:t>Cross-modal bridge (fit on paid pairs)</a:t>
+            </a:r>
+          </a:p>
+        </p:txBody>
+      </p:sp>
+      <p:cxnSp>
+        <p:nvCxnSpPr>
+          <p:cNvPr id="54" name="Connector 53"/>
+          <p:cNvCxnSpPr/>
+          <p:nvPr/>
+        </p:nvCxnSpPr>
+        <p:spPr>
+          <a:xfrm>
+            <a:off x="640080" y="5897880"/>
+            <a:ext cx="658368" cy="0"/>
+          </a:xfrm>
+          <a:prstGeom prst="line">
+            <a:avLst/>
+          </a:prstGeom>
+          <a:ln w="17780">
+            <a:solidFill>
+              <a:srgbClr val="555555"/>
+            </a:solidFill>
+          </a:ln>
+          <a:effectLst/>
+        </p:spPr>
+      </p:cxnSp>
+      <p:sp>
+        <p:nvSpPr>
+          <p:cNvPr id="55" name="Rectangle 54"/>
+          <p:cNvSpPr/>
+          <p:nvPr/>
+        </p:nvSpPr>
+        <p:spPr>
+          <a:xfrm>
+            <a:off x="685800" y="5623560"/>
+            <a:ext cx="155448" cy="274320"/>
+          </a:xfrm>
+          <a:prstGeom prst="rect">
+            <a:avLst/>
+          </a:prstGeom>
+          <a:solidFill>
+            <a:srgbClr val="C9C9C9"/>
+          </a:solidFill>
+          <a:ln w="12700">
+            <a:solidFill>
+              <a:srgbClr val="666666"/>
+            </a:solidFill>
+          </a:ln>
+          <a:effectLst/>
+        </p:spPr>
+        <p:txBody>
+          <a:bodyPr rtlCol="0" anchor="ctr"/>
+          <a:lstStyle/>
+          <a:p>
+            <a:pPr algn="ctr"/>
+          </a:p>
+        </p:txBody>
+      </p:sp>
+      <p:sp>
+        <p:nvSpPr>
+          <p:cNvPr id="56" name="Rectangle 55"/>
+          <p:cNvSpPr/>
+          <p:nvPr/>
+        </p:nvSpPr>
+        <p:spPr>
+          <a:xfrm>
+            <a:off x="891540" y="5458968"/>
+            <a:ext cx="155448" cy="438912"/>
+          </a:xfrm>
+          <a:prstGeom prst="rect">
+            <a:avLst/>
+          </a:prstGeom>
+          <a:solidFill>
+            <a:srgbClr val="C9C9C9"/>
+          </a:solidFill>
+          <a:ln w="12700">
+            <a:solidFill>
+              <a:srgbClr val="666666"/>
+            </a:solidFill>
+          </a:ln>
+          <a:effectLst/>
+        </p:spPr>
+        <p:txBody>
+          <a:bodyPr rtlCol="0" anchor="ctr"/>
+          <a:lstStyle/>
+          <a:p>
+            <a:pPr algn="ctr"/>
+          </a:p>
+        </p:txBody>
+      </p:sp>
+      <p:sp>
+        <p:nvSpPr>
+          <p:cNvPr id="57" name="Rectangle 56"/>
+          <p:cNvSpPr/>
+          <p:nvPr/>
+        </p:nvSpPr>
+        <p:spPr>
+          <a:xfrm>
+            <a:off x="1097280" y="5696712"/>
+            <a:ext cx="155448" cy="201168"/>
+          </a:xfrm>
+          <a:prstGeom prst="rect">
+            <a:avLst/>
+          </a:prstGeom>
+          <a:solidFill>
+            <a:srgbClr val="C9C9C9"/>
+          </a:solidFill>
+          <a:ln w="12700">
+            <a:solidFill>
+              <a:srgbClr val="666666"/>
+            </a:solidFill>
+          </a:ln>
+          <a:effectLst/>
+        </p:spPr>
+        <p:txBody>
+          <a:bodyPr rtlCol="0" anchor="ctr"/>
+          <a:lstStyle/>
+          <a:p>
+            <a:pPr algn="ctr"/>
+          </a:p>
+        </p:txBody>
+      </p:sp>
+      <p:sp>
+        <p:nvSpPr>
+          <p:cNvPr id="58" name="TextBox 57"/>
+          <p:cNvSpPr txBox="1"/>
+          <p:nvPr/>
+        </p:nvSpPr>
+        <p:spPr>
+          <a:xfrm>
+            <a:off x="365760" y="6053328"/>
+            <a:ext cx="1463040" cy="274320"/>
+          </a:xfrm>
+          <a:prstGeom prst="rect">
+            <a:avLst/>
+          </a:prstGeom>
+          <a:noFill/>
+        </p:spPr>
+        <p:txBody>
+          <a:bodyPr wrap="square" lIns="0" rIns="0" tIns="0" bIns="0">
+            <a:spAutoFit/>
+          </a:bodyPr>
+          <a:lstStyle/>
+          <a:p>
+            <a:pPr algn="ctr"/>
+            <a:r>
+              <a:rPr sz="1300" b="1" i="1">
+                <a:solidFill>
+                  <a:srgbClr val="1F1F1E"/>
+                </a:solidFill>
+                <a:latin typeface="Times New Roman"/>
+              </a:rPr>
+              <a:t>Prompt g</a:t>
+            </a:r>
+          </a:p>
+        </p:txBody>
+      </p:sp>
+      <p:cxnSp>
+        <p:nvCxnSpPr>
+          <p:cNvPr id="59" name="Connector 58"/>
+          <p:cNvCxnSpPr/>
+          <p:nvPr/>
+        </p:nvCxnSpPr>
+        <p:spPr>
+          <a:xfrm>
+            <a:off x="1417320" y="5669280"/>
+            <a:ext cx="685800" cy="0"/>
+          </a:xfrm>
+          <a:prstGeom prst="line">
+            <a:avLst/>
+          </a:prstGeom>
+          <a:ln w="30480">
+            <a:solidFill>
+              <a:srgbClr val="333333"/>
+            </a:solidFill>
+            <a:tailEnd type="triangle" w="med" len="med"/>
+          </a:ln>
+          <a:effectLst/>
+        </p:spPr>
+      </p:cxnSp>
+      <p:sp>
+        <p:nvSpPr>
+          <p:cNvPr id="60" name="Rounded Rectangle 59"/>
+          <p:cNvSpPr/>
+          <p:nvPr/>
+        </p:nvSpPr>
+        <p:spPr>
+          <a:xfrm>
+            <a:off x="2194560" y="5349240"/>
+            <a:ext cx="841248" cy="841248"/>
+          </a:xfrm>
+          <a:prstGeom prst="roundRect">
+            <a:avLst>
+              <a:gd name="adj" fmla="val 12000"/>
+            </a:avLst>
+          </a:prstGeom>
+          <a:solidFill>
+            <a:srgbClr val="FFFFFF"/>
+          </a:solidFill>
+          <a:ln w="17780">
+            <a:solidFill>
+              <a:srgbClr val="555555"/>
+            </a:solidFill>
+          </a:ln>
+          <a:effectLst/>
+        </p:spPr>
+        <p:txBody>
+          <a:bodyPr rtlCol="0" anchor="ctr"/>
+          <a:lstStyle/>
+          <a:p>
+            <a:pPr algn="ctr"/>
+          </a:p>
+        </p:txBody>
+      </p:sp>
+      <p:sp>
+        <p:nvSpPr>
+          <p:cNvPr id="61" name="Rectangle 60"/>
+          <p:cNvSpPr/>
+          <p:nvPr/>
+        </p:nvSpPr>
+        <p:spPr>
+          <a:xfrm>
+            <a:off x="2258568" y="5413248"/>
+            <a:ext cx="186944" cy="186944"/>
+          </a:xfrm>
+          <a:prstGeom prst="rect">
+            <a:avLst/>
+          </a:prstGeom>
+          <a:solidFill>
+            <a:srgbClr val="4C72B0"/>
+          </a:solidFill>
+          <a:ln w="7620">
+            <a:solidFill>
+              <a:srgbClr val="FFFFFF"/>
+            </a:solidFill>
+          </a:ln>
+          <a:effectLst/>
+        </p:spPr>
+        <p:txBody>
+          <a:bodyPr rtlCol="0" anchor="ctr"/>
+          <a:lstStyle/>
+          <a:p>
+            <a:pPr algn="ctr"/>
+          </a:p>
+        </p:txBody>
+      </p:sp>
+      <p:sp>
+        <p:nvSpPr>
+          <p:cNvPr id="62" name="Rectangle 61"/>
+          <p:cNvSpPr/>
+          <p:nvPr/>
+        </p:nvSpPr>
+        <p:spPr>
+          <a:xfrm>
+            <a:off x="2492247" y="5413248"/>
+            <a:ext cx="186944" cy="186944"/>
+          </a:xfrm>
+          <a:prstGeom prst="rect">
+            <a:avLst/>
+          </a:prstGeom>
+          <a:solidFill>
+            <a:srgbClr val="9EC99A"/>
+          </a:solidFill>
+          <a:ln w="7620">
+            <a:solidFill>
+              <a:srgbClr val="FFFFFF"/>
+            </a:solidFill>
+          </a:ln>
+          <a:effectLst/>
+        </p:spPr>
+        <p:txBody>
+          <a:bodyPr rtlCol="0" anchor="ctr"/>
+          <a:lstStyle/>
+          <a:p>
+            <a:pPr algn="ctr"/>
+          </a:p>
+        </p:txBody>
+      </p:sp>
+      <p:sp>
+        <p:nvSpPr>
+          <p:cNvPr id="63" name="Rectangle 62"/>
+          <p:cNvSpPr/>
+          <p:nvPr/>
+        </p:nvSpPr>
+        <p:spPr>
+          <a:xfrm>
+            <a:off x="2725927" y="5413248"/>
+            <a:ext cx="186944" cy="186944"/>
+          </a:xfrm>
+          <a:prstGeom prst="rect">
+            <a:avLst/>
+          </a:prstGeom>
+          <a:solidFill>
+            <a:srgbClr val="F2B98F"/>
+          </a:solidFill>
+          <a:ln w="7620">
+            <a:solidFill>
+              <a:srgbClr val="FFFFFF"/>
+            </a:solidFill>
+          </a:ln>
+          <a:effectLst/>
+        </p:spPr>
+        <p:txBody>
+          <a:bodyPr rtlCol="0" anchor="ctr"/>
+          <a:lstStyle/>
+          <a:p>
+            <a:pPr algn="ctr"/>
+          </a:p>
+        </p:txBody>
+      </p:sp>
+      <p:sp>
+        <p:nvSpPr>
+          <p:cNvPr id="64" name="Rectangle 63"/>
+          <p:cNvSpPr/>
+          <p:nvPr/>
+        </p:nvSpPr>
+        <p:spPr>
+          <a:xfrm>
+            <a:off x="2258568" y="5646928"/>
+            <a:ext cx="186944" cy="186944"/>
+          </a:xfrm>
+          <a:prstGeom prst="rect">
+            <a:avLst/>
+          </a:prstGeom>
+          <a:solidFill>
+            <a:srgbClr val="9EC99A"/>
+          </a:solidFill>
+          <a:ln w="7620">
+            <a:solidFill>
+              <a:srgbClr val="FFFFFF"/>
+            </a:solidFill>
+          </a:ln>
+          <a:effectLst/>
+        </p:spPr>
+        <p:txBody>
+          <a:bodyPr rtlCol="0" anchor="ctr"/>
+          <a:lstStyle/>
+          <a:p>
+            <a:pPr algn="ctr"/>
+          </a:p>
+        </p:txBody>
+      </p:sp>
+      <p:sp>
+        <p:nvSpPr>
+          <p:cNvPr id="65" name="Rectangle 64"/>
+          <p:cNvSpPr/>
+          <p:nvPr/>
+        </p:nvSpPr>
+        <p:spPr>
+          <a:xfrm>
+            <a:off x="2492247" y="5646928"/>
+            <a:ext cx="186944" cy="186944"/>
+          </a:xfrm>
+          <a:prstGeom prst="rect">
+            <a:avLst/>
+          </a:prstGeom>
+          <a:solidFill>
+            <a:srgbClr val="F2B98F"/>
+          </a:solidFill>
+          <a:ln w="7620">
+            <a:solidFill>
+              <a:srgbClr val="FFFFFF"/>
+            </a:solidFill>
+          </a:ln>
+          <a:effectLst/>
+        </p:spPr>
+        <p:txBody>
+          <a:bodyPr rtlCol="0" anchor="ctr"/>
+          <a:lstStyle/>
+          <a:p>
+            <a:pPr algn="ctr"/>
+          </a:p>
+        </p:txBody>
+      </p:sp>
+      <p:sp>
+        <p:nvSpPr>
+          <p:cNvPr id="66" name="Rectangle 65"/>
+          <p:cNvSpPr/>
+          <p:nvPr/>
+        </p:nvSpPr>
+        <p:spPr>
+          <a:xfrm>
+            <a:off x="2725927" y="5646928"/>
+            <a:ext cx="186944" cy="186944"/>
+          </a:xfrm>
+          <a:prstGeom prst="rect">
+            <a:avLst/>
+          </a:prstGeom>
+          <a:solidFill>
+            <a:srgbClr val="4C72B0"/>
+          </a:solidFill>
+          <a:ln w="7620">
+            <a:solidFill>
+              <a:srgbClr val="FFFFFF"/>
+            </a:solidFill>
+          </a:ln>
+          <a:effectLst/>
+        </p:spPr>
+        <p:txBody>
+          <a:bodyPr rtlCol="0" anchor="ctr"/>
+          <a:lstStyle/>
+          <a:p>
+            <a:pPr algn="ctr"/>
+          </a:p>
+        </p:txBody>
+      </p:sp>
+      <p:sp>
+        <p:nvSpPr>
+          <p:cNvPr id="67" name="Rectangle 66"/>
+          <p:cNvSpPr/>
+          <p:nvPr/>
+        </p:nvSpPr>
+        <p:spPr>
+          <a:xfrm>
+            <a:off x="2258568" y="5880608"/>
+            <a:ext cx="186944" cy="186944"/>
+          </a:xfrm>
+          <a:prstGeom prst="rect">
+            <a:avLst/>
+          </a:prstGeom>
+          <a:solidFill>
+            <a:srgbClr val="F2B98F"/>
+          </a:solidFill>
+          <a:ln w="7620">
+            <a:solidFill>
+              <a:srgbClr val="FFFFFF"/>
+            </a:solidFill>
+          </a:ln>
+          <a:effectLst/>
+        </p:spPr>
+        <p:txBody>
+          <a:bodyPr rtlCol="0" anchor="ctr"/>
+          <a:lstStyle/>
+          <a:p>
+            <a:pPr algn="ctr"/>
+          </a:p>
+        </p:txBody>
+      </p:sp>
+      <p:sp>
+        <p:nvSpPr>
+          <p:cNvPr id="68" name="Rectangle 67"/>
+          <p:cNvSpPr/>
+          <p:nvPr/>
+        </p:nvSpPr>
+        <p:spPr>
+          <a:xfrm>
+            <a:off x="2492247" y="5880608"/>
+            <a:ext cx="186944" cy="186944"/>
+          </a:xfrm>
+          <a:prstGeom prst="rect">
+            <a:avLst/>
+          </a:prstGeom>
+          <a:solidFill>
+            <a:srgbClr val="4C72B0"/>
+          </a:solidFill>
+          <a:ln w="7620">
+            <a:solidFill>
+              <a:srgbClr val="FFFFFF"/>
+            </a:solidFill>
+          </a:ln>
+          <a:effectLst/>
+        </p:spPr>
+        <p:txBody>
+          <a:bodyPr rtlCol="0" anchor="ctr"/>
+          <a:lstStyle/>
+          <a:p>
+            <a:pPr algn="ctr"/>
+          </a:p>
+        </p:txBody>
+      </p:sp>
+      <p:sp>
+        <p:nvSpPr>
+          <p:cNvPr id="69" name="Rectangle 68"/>
+          <p:cNvSpPr/>
+          <p:nvPr/>
+        </p:nvSpPr>
+        <p:spPr>
+          <a:xfrm>
+            <a:off x="2725927" y="5880608"/>
+            <a:ext cx="186944" cy="186944"/>
+          </a:xfrm>
+          <a:prstGeom prst="rect">
+            <a:avLst/>
+          </a:prstGeom>
+          <a:solidFill>
+            <a:srgbClr val="9EC99A"/>
+          </a:solidFill>
+          <a:ln w="7620">
+            <a:solidFill>
+              <a:srgbClr val="FFFFFF"/>
+            </a:solidFill>
+          </a:ln>
+          <a:effectLst/>
+        </p:spPr>
+        <p:txBody>
+          <a:bodyPr rtlCol="0" anchor="ctr"/>
+          <a:lstStyle/>
+          <a:p>
+            <a:pPr algn="ctr"/>
+          </a:p>
+        </p:txBody>
+      </p:sp>
+      <p:sp>
+        <p:nvSpPr>
+          <p:cNvPr id="70" name="TextBox 69"/>
+          <p:cNvSpPr txBox="1"/>
+          <p:nvPr/>
+        </p:nvSpPr>
+        <p:spPr>
+          <a:xfrm>
+            <a:off x="1874519" y="6144768"/>
+            <a:ext cx="1554480" cy="274320"/>
+          </a:xfrm>
+          <a:prstGeom prst="rect">
+            <a:avLst/>
+          </a:prstGeom>
+          <a:noFill/>
+        </p:spPr>
+        <p:txBody>
+          <a:bodyPr wrap="square" lIns="0" rIns="0" tIns="0" bIns="0">
+            <a:spAutoFit/>
+          </a:bodyPr>
+          <a:lstStyle/>
+          <a:p>
+            <a:pPr algn="ctr"/>
+            <a:r>
+              <a:rPr sz="1300" b="1" i="1">
+                <a:solidFill>
+                  <a:srgbClr val="1F1F1E"/>
+                </a:solidFill>
+                <a:latin typeface="Times New Roman"/>
+              </a:rPr>
+              <a:t>Ridge Map</a:t>
+            </a:r>
+          </a:p>
+        </p:txBody>
+      </p:sp>
+      <p:cxnSp>
+        <p:nvCxnSpPr>
+          <p:cNvPr id="71" name="Connector 70"/>
+          <p:cNvCxnSpPr/>
+          <p:nvPr/>
+        </p:nvCxnSpPr>
+        <p:spPr>
+          <a:xfrm>
+            <a:off x="2971800" y="5669280"/>
+            <a:ext cx="685800" cy="0"/>
+          </a:xfrm>
+          <a:prstGeom prst="line">
+            <a:avLst/>
+          </a:prstGeom>
+          <a:ln w="30480">
+            <a:solidFill>
+              <a:srgbClr val="333333"/>
+            </a:solidFill>
+            <a:tailEnd type="triangle" w="med" len="med"/>
+          </a:ln>
+          <a:effectLst/>
+        </p:spPr>
+      </p:cxnSp>
+      <p:cxnSp>
+        <p:nvCxnSpPr>
+          <p:cNvPr id="72" name="Connector 71"/>
+          <p:cNvCxnSpPr/>
+          <p:nvPr/>
+        </p:nvCxnSpPr>
+        <p:spPr>
+          <a:xfrm>
+            <a:off x="3794760" y="5897880"/>
+            <a:ext cx="658368" cy="0"/>
+          </a:xfrm>
+          <a:prstGeom prst="line">
+            <a:avLst/>
+          </a:prstGeom>
+          <a:ln w="17780">
+            <a:solidFill>
+              <a:srgbClr val="555555"/>
+            </a:solidFill>
+          </a:ln>
+          <a:effectLst/>
+        </p:spPr>
+      </p:cxnSp>
+      <p:sp>
+        <p:nvSpPr>
+          <p:cNvPr id="73" name="Rectangle 72"/>
+          <p:cNvSpPr/>
+          <p:nvPr/>
+        </p:nvSpPr>
+        <p:spPr>
+          <a:xfrm>
+            <a:off x="3840480" y="5394960"/>
+            <a:ext cx="155448" cy="502920"/>
+          </a:xfrm>
+          <a:prstGeom prst="rect">
+            <a:avLst/>
+          </a:prstGeom>
+          <a:solidFill>
+            <a:srgbClr val="9EC99A"/>
+          </a:solidFill>
+          <a:ln w="12700">
+            <a:solidFill>
+              <a:srgbClr val="666666"/>
+            </a:solidFill>
+          </a:ln>
+          <a:effectLst/>
+        </p:spPr>
+        <p:txBody>
+          <a:bodyPr rtlCol="0" anchor="ctr"/>
+          <a:lstStyle/>
+          <a:p>
+            <a:pPr algn="ctr"/>
+          </a:p>
+        </p:txBody>
+      </p:sp>
+      <p:sp>
+        <p:nvSpPr>
+          <p:cNvPr id="74" name="Rectangle 73"/>
+          <p:cNvSpPr/>
+          <p:nvPr/>
+        </p:nvSpPr>
+        <p:spPr>
+          <a:xfrm>
+            <a:off x="4046220" y="5669280"/>
+            <a:ext cx="155448" cy="228600"/>
+          </a:xfrm>
+          <a:prstGeom prst="rect">
+            <a:avLst/>
+          </a:prstGeom>
+          <a:solidFill>
+            <a:srgbClr val="9EC99A"/>
+          </a:solidFill>
+          <a:ln w="12700">
+            <a:solidFill>
+              <a:srgbClr val="666666"/>
+            </a:solidFill>
+          </a:ln>
+          <a:effectLst/>
+        </p:spPr>
+        <p:txBody>
+          <a:bodyPr rtlCol="0" anchor="ctr"/>
+          <a:lstStyle/>
+          <a:p>
+            <a:pPr algn="ctr"/>
+          </a:p>
+        </p:txBody>
+      </p:sp>
+      <p:sp>
+        <p:nvSpPr>
+          <p:cNvPr id="75" name="Rectangle 74"/>
+          <p:cNvSpPr/>
+          <p:nvPr/>
+        </p:nvSpPr>
+        <p:spPr>
+          <a:xfrm>
+            <a:off x="4251960" y="5513832"/>
+            <a:ext cx="155448" cy="384048"/>
+          </a:xfrm>
+          <a:prstGeom prst="rect">
+            <a:avLst/>
+          </a:prstGeom>
+          <a:solidFill>
+            <a:srgbClr val="9EC99A"/>
+          </a:solidFill>
+          <a:ln w="12700">
+            <a:solidFill>
+              <a:srgbClr val="666666"/>
+            </a:solidFill>
+          </a:ln>
+          <a:effectLst/>
+        </p:spPr>
+        <p:txBody>
+          <a:bodyPr rtlCol="0" anchor="ctr"/>
+          <a:lstStyle/>
+          <a:p>
+            <a:pPr algn="ctr"/>
+          </a:p>
+        </p:txBody>
+      </p:sp>
+      <p:sp>
+        <p:nvSpPr>
+          <p:cNvPr id="76" name="TextBox 75"/>
+          <p:cNvSpPr txBox="1"/>
+          <p:nvPr/>
+        </p:nvSpPr>
+        <p:spPr>
+          <a:xfrm>
+            <a:off x="3520440" y="6053328"/>
+            <a:ext cx="1920240" cy="274320"/>
+          </a:xfrm>
+          <a:prstGeom prst="rect">
+            <a:avLst/>
+          </a:prstGeom>
+          <a:noFill/>
+        </p:spPr>
+        <p:txBody>
+          <a:bodyPr wrap="square" lIns="0" rIns="0" tIns="0" bIns="0">
+            <a:spAutoFit/>
+          </a:bodyPr>
+          <a:lstStyle/>
+          <a:p>
+            <a:pPr algn="ctr"/>
+            <a:r>
+              <a:rPr sz="1300" b="1" i="1">
+                <a:solidFill>
+                  <a:srgbClr val="1F1F1E"/>
+                </a:solidFill>
+                <a:latin typeface="Times New Roman"/>
+              </a:rPr>
+              <a:t>Predicted Skills</a:t>
+            </a:r>
+          </a:p>
+        </p:txBody>
+      </p:sp>
+      <p:sp>
+        <p:nvSpPr>
+          <p:cNvPr id="77" name="TextBox 76"/>
+          <p:cNvSpPr txBox="1"/>
+          <p:nvPr/>
+        </p:nvSpPr>
+        <p:spPr>
+          <a:xfrm>
+            <a:off x="6217920" y="219456"/>
+            <a:ext cx="5669280" cy="274320"/>
+          </a:xfrm>
+          <a:prstGeom prst="rect">
+            <a:avLst/>
+          </a:prstGeom>
+          <a:noFill/>
+        </p:spPr>
+        <p:txBody>
+          <a:bodyPr wrap="square" lIns="0" rIns="0" tIns="0" bIns="0">
+            <a:spAutoFit/>
+          </a:bodyPr>
+          <a:lstStyle/>
+          <a:p>
+            <a:pPr algn="l"/>
+            <a:r>
+              <a:rPr sz="1900" b="1" i="1">
+                <a:solidFill>
+                  <a:srgbClr val="1F1F1E"/>
+                </a:solidFill>
+                <a:latin typeface="Times New Roman"/>
+              </a:rPr>
+              <a:t>Spending the budget where demand is unmet</a:t>
+            </a:r>
+          </a:p>
+        </p:txBody>
+      </p:sp>
+      <p:sp>
+        <p:nvSpPr>
+          <p:cNvPr id="78" name="Rounded Rectangle 77"/>
+          <p:cNvSpPr/>
+          <p:nvPr/>
+        </p:nvSpPr>
+        <p:spPr>
+          <a:xfrm>
+            <a:off x="6263640" y="681228"/>
+            <a:ext cx="1188720" cy="1051560"/>
+          </a:xfrm>
+          <a:prstGeom prst="roundRect">
+            <a:avLst>
+              <a:gd name="adj" fmla="val 25000"/>
+            </a:avLst>
+          </a:prstGeom>
+          <a:solidFill>
+            <a:srgbClr val="EEF2F9"/>
+          </a:solidFill>
+          <a:ln w="20320">
+            <a:solidFill>
+              <a:srgbClr val="8A5AA8"/>
+            </a:solidFill>
+          </a:ln>
+          <a:effectLst/>
+        </p:spPr>
+        <p:txBody>
+          <a:bodyPr rtlCol="0" anchor="ctr"/>
+          <a:lstStyle/>
+          <a:p>
+            <a:pPr algn="ctr"/>
+          </a:p>
+        </p:txBody>
+      </p:sp>
+      <p:sp>
+        <p:nvSpPr>
+          <p:cNvPr id="79" name="Rectangle 78"/>
+          <p:cNvSpPr/>
+          <p:nvPr/>
+        </p:nvSpPr>
+        <p:spPr>
+          <a:xfrm>
+            <a:off x="6847027" y="553212"/>
+            <a:ext cx="21945" cy="128016"/>
+          </a:xfrm>
+          <a:prstGeom prst="rect">
+            <a:avLst/>
+          </a:prstGeom>
+          <a:solidFill>
+            <a:srgbClr val="8A5AA8"/>
+          </a:solidFill>
+          <a:ln>
+            <a:noFill/>
+          </a:ln>
+          <a:effectLst/>
+        </p:spPr>
+        <p:txBody>
+          <a:bodyPr rtlCol="0" anchor="ctr"/>
+          <a:lstStyle/>
+          <a:p>
+            <a:pPr algn="ctr"/>
+          </a:p>
+        </p:txBody>
+      </p:sp>
+      <p:sp>
+        <p:nvSpPr>
+          <p:cNvPr id="80" name="Oval 79"/>
+          <p:cNvSpPr/>
+          <p:nvPr/>
+        </p:nvSpPr>
+        <p:spPr>
+          <a:xfrm>
+            <a:off x="6812280" y="461772"/>
+            <a:ext cx="91440" cy="91440"/>
+          </a:xfrm>
+          <a:prstGeom prst="ellipse">
+            <a:avLst/>
+          </a:prstGeom>
+          <a:solidFill>
+            <a:srgbClr val="8A5AA8"/>
+          </a:solidFill>
+          <a:ln>
+            <a:noFill/>
+          </a:ln>
+          <a:effectLst/>
+        </p:spPr>
+        <p:txBody>
+          <a:bodyPr rtlCol="0" anchor="ctr"/>
+          <a:lstStyle/>
+          <a:p>
+            <a:pPr algn="ctr"/>
+          </a:p>
+        </p:txBody>
+      </p:sp>
+      <p:sp>
+        <p:nvSpPr>
+          <p:cNvPr id="81" name="Oval 80"/>
+          <p:cNvSpPr/>
+          <p:nvPr/>
+        </p:nvSpPr>
+        <p:spPr>
+          <a:xfrm>
+            <a:off x="6602882" y="1060704"/>
+            <a:ext cx="82296" cy="82296"/>
+          </a:xfrm>
+          <a:prstGeom prst="ellipse">
+            <a:avLst/>
+          </a:prstGeom>
+          <a:solidFill>
+            <a:srgbClr val="8A5AA8"/>
+          </a:solidFill>
+          <a:ln>
+            <a:noFill/>
+          </a:ln>
+          <a:effectLst/>
+        </p:spPr>
+        <p:txBody>
+          <a:bodyPr rtlCol="0" anchor="ctr"/>
+          <a:lstStyle/>
+          <a:p>
+            <a:pPr algn="ctr"/>
+          </a:p>
+        </p:txBody>
+      </p:sp>
+      <p:sp>
+        <p:nvSpPr>
+          <p:cNvPr id="82" name="Oval 81"/>
+          <p:cNvSpPr/>
+          <p:nvPr/>
+        </p:nvSpPr>
+        <p:spPr>
+          <a:xfrm>
+            <a:off x="7030821" y="1060704"/>
+            <a:ext cx="82296" cy="82296"/>
+          </a:xfrm>
+          <a:prstGeom prst="ellipse">
+            <a:avLst/>
+          </a:prstGeom>
+          <a:solidFill>
+            <a:srgbClr val="8A5AA8"/>
+          </a:solidFill>
+          <a:ln>
+            <a:noFill/>
+          </a:ln>
+          <a:effectLst/>
+        </p:spPr>
+        <p:txBody>
+          <a:bodyPr rtlCol="0" anchor="ctr"/>
+          <a:lstStyle/>
+          <a:p>
+            <a:pPr algn="ctr"/>
+          </a:p>
+        </p:txBody>
+      </p:sp>
+      <p:sp>
+        <p:nvSpPr>
+          <p:cNvPr id="83" name="Rounded Rectangle 82"/>
+          <p:cNvSpPr/>
+          <p:nvPr/>
+        </p:nvSpPr>
+        <p:spPr>
+          <a:xfrm>
+            <a:off x="6691579" y="1333195"/>
+            <a:ext cx="332841" cy="27432"/>
+          </a:xfrm>
+          <a:prstGeom prst="roundRect">
+            <a:avLst>
+              <a:gd name="adj" fmla="val 50000"/>
+            </a:avLst>
+          </a:prstGeom>
+          <a:solidFill>
+            <a:srgbClr val="8A5AA8"/>
+          </a:solidFill>
+          <a:ln>
+            <a:noFill/>
+          </a:ln>
+          <a:effectLst/>
+        </p:spPr>
+        <p:txBody>
+          <a:bodyPr rtlCol="0" anchor="ctr"/>
+          <a:lstStyle/>
+          <a:p>
+            <a:pPr algn="ctr"/>
+          </a:p>
+        </p:txBody>
+      </p:sp>
+      <p:sp>
+        <p:nvSpPr>
+          <p:cNvPr id="84" name="TextBox 83"/>
+          <p:cNvSpPr txBox="1"/>
+          <p:nvPr/>
+        </p:nvSpPr>
+        <p:spPr>
+          <a:xfrm>
+            <a:off x="5943600" y="1769364"/>
+            <a:ext cx="1828800" cy="256032"/>
+          </a:xfrm>
+          <a:prstGeom prst="rect">
+            <a:avLst/>
+          </a:prstGeom>
+          <a:noFill/>
+        </p:spPr>
+        <p:txBody>
+          <a:bodyPr wrap="square" lIns="0" rIns="0" tIns="0" bIns="0">
+            <a:spAutoFit/>
+          </a:bodyPr>
+          <a:lstStyle/>
+          <a:p>
+            <a:pPr algn="ctr"/>
+            <a:r>
+              <a:rPr sz="1300" b="1" i="0">
+                <a:solidFill>
+                  <a:srgbClr val="1F1F1E"/>
+                </a:solidFill>
+                <a:latin typeface="Times New Roman"/>
+              </a:rPr>
+              <a:t>Teacher API</a:t>
+            </a:r>
+          </a:p>
+        </p:txBody>
+      </p:sp>
+      <p:sp>
+        <p:nvSpPr>
+          <p:cNvPr id="85" name="Oval 84"/>
+          <p:cNvSpPr/>
+          <p:nvPr/>
+        </p:nvSpPr>
+        <p:spPr>
+          <a:xfrm>
+            <a:off x="7543800" y="1188720"/>
+            <a:ext cx="310896" cy="77724"/>
+          </a:xfrm>
+          <a:prstGeom prst="ellipse">
+            <a:avLst/>
+          </a:prstGeom>
+          <a:solidFill>
+            <a:srgbClr val="E8C56A"/>
+          </a:solidFill>
+          <a:ln w="12700">
+            <a:solidFill>
+              <a:srgbClr val="9A7B2E"/>
+            </a:solidFill>
+          </a:ln>
+          <a:effectLst/>
+        </p:spPr>
+        <p:txBody>
+          <a:bodyPr rtlCol="0" anchor="ctr"/>
+          <a:lstStyle/>
+          <a:p>
+            <a:pPr algn="ctr"/>
+          </a:p>
+        </p:txBody>
+      </p:sp>
+      <p:sp>
+        <p:nvSpPr>
+          <p:cNvPr id="86" name="Oval 85"/>
+          <p:cNvSpPr/>
+          <p:nvPr/>
+        </p:nvSpPr>
+        <p:spPr>
+          <a:xfrm>
+            <a:off x="7543800" y="1078992"/>
+            <a:ext cx="310896" cy="77724"/>
+          </a:xfrm>
+          <a:prstGeom prst="ellipse">
+            <a:avLst/>
+          </a:prstGeom>
+          <a:solidFill>
+            <a:srgbClr val="E8C56A"/>
+          </a:solidFill>
+          <a:ln w="12700">
+            <a:solidFill>
+              <a:srgbClr val="9A7B2E"/>
+            </a:solidFill>
+          </a:ln>
+          <a:effectLst/>
+        </p:spPr>
+        <p:txBody>
+          <a:bodyPr rtlCol="0" anchor="ctr"/>
+          <a:lstStyle/>
+          <a:p>
+            <a:pPr algn="ctr"/>
+          </a:p>
+        </p:txBody>
+      </p:sp>
+      <p:sp>
+        <p:nvSpPr>
+          <p:cNvPr id="87" name="Oval 86"/>
+          <p:cNvSpPr/>
+          <p:nvPr/>
+        </p:nvSpPr>
+        <p:spPr>
+          <a:xfrm>
+            <a:off x="7543800" y="969264"/>
+            <a:ext cx="310896" cy="77724"/>
+          </a:xfrm>
+          <a:prstGeom prst="ellipse">
+            <a:avLst/>
+          </a:prstGeom>
+          <a:solidFill>
+            <a:srgbClr val="E8C56A"/>
+          </a:solidFill>
+          <a:ln w="12700">
+            <a:solidFill>
+              <a:srgbClr val="9A7B2E"/>
+            </a:solidFill>
+          </a:ln>
+          <a:effectLst/>
+        </p:spPr>
+        <p:txBody>
+          <a:bodyPr rtlCol="0" anchor="ctr"/>
+          <a:lstStyle/>
+          <a:p>
+            <a:pPr algn="ctr"/>
+          </a:p>
+        </p:txBody>
+      </p:sp>
+      <p:sp>
+        <p:nvSpPr>
+          <p:cNvPr id="88" name="Oval 87"/>
+          <p:cNvSpPr/>
+          <p:nvPr/>
+        </p:nvSpPr>
+        <p:spPr>
+          <a:xfrm>
+            <a:off x="7543800" y="859536"/>
+            <a:ext cx="310896" cy="77724"/>
+          </a:xfrm>
+          <a:prstGeom prst="ellipse">
+            <a:avLst/>
+          </a:prstGeom>
+          <a:solidFill>
+            <a:srgbClr val="E8C56A"/>
+          </a:solidFill>
+          <a:ln w="12700">
+            <a:solidFill>
+              <a:srgbClr val="9A7B2E"/>
+            </a:solidFill>
+          </a:ln>
+          <a:effectLst/>
+        </p:spPr>
+        <p:txBody>
+          <a:bodyPr rtlCol="0" anchor="ctr"/>
+          <a:lstStyle/>
+          <a:p>
+            <a:pPr algn="ctr"/>
+          </a:p>
+        </p:txBody>
+      </p:sp>
+      <p:sp>
+        <p:nvSpPr>
+          <p:cNvPr id="89" name="TextBox 88"/>
+          <p:cNvSpPr txBox="1"/>
+          <p:nvPr/>
+        </p:nvSpPr>
+        <p:spPr>
+          <a:xfrm>
+            <a:off x="7360920" y="1371600"/>
+            <a:ext cx="822960" cy="274320"/>
+          </a:xfrm>
+          <a:prstGeom prst="rect">
+            <a:avLst/>
+          </a:prstGeom>
+          <a:noFill/>
+        </p:spPr>
+        <p:txBody>
+          <a:bodyPr wrap="square" lIns="0" rIns="0" tIns="0" bIns="0">
+            <a:spAutoFit/>
+          </a:bodyPr>
+          <a:lstStyle/>
+          <a:p>
+            <a:pPr algn="ctr"/>
+            <a:r>
+              <a:rPr sz="1500" b="1" i="1">
+                <a:solidFill>
+                  <a:srgbClr val="1F1F1E"/>
+                </a:solidFill>
+                <a:latin typeface="Times New Roman"/>
+              </a:rPr>
+              <a:t>b</a:t>
+            </a:r>
+          </a:p>
+        </p:txBody>
+      </p:sp>
+      <p:cxnSp>
+        <p:nvCxnSpPr>
+          <p:cNvPr id="90" name="Connector 89"/>
+          <p:cNvCxnSpPr/>
+          <p:nvPr/>
+        </p:nvCxnSpPr>
+        <p:spPr>
+          <a:xfrm>
+            <a:off x="7635240" y="1234440"/>
+            <a:ext cx="502920" cy="0"/>
+          </a:xfrm>
+          <a:prstGeom prst="line">
+            <a:avLst/>
+          </a:prstGeom>
+          <a:ln w="30480">
+            <a:solidFill>
+              <a:srgbClr val="333333"/>
+            </a:solidFill>
+            <a:tailEnd type="triangle" w="med" len="med"/>
+          </a:ln>
+          <a:effectLst/>
+        </p:spPr>
+      </p:cxnSp>
+      <p:cxnSp>
+        <p:nvCxnSpPr>
+          <p:cNvPr id="91" name="Connector 90"/>
+          <p:cNvCxnSpPr/>
+          <p:nvPr/>
+        </p:nvCxnSpPr>
+        <p:spPr>
+          <a:xfrm>
+            <a:off x="8229600" y="1600200"/>
+            <a:ext cx="658368" cy="0"/>
+          </a:xfrm>
+          <a:prstGeom prst="line">
+            <a:avLst/>
+          </a:prstGeom>
+          <a:ln w="17780">
+            <a:solidFill>
+              <a:srgbClr val="555555"/>
+            </a:solidFill>
+          </a:ln>
+          <a:effectLst/>
+        </p:spPr>
+      </p:cxnSp>
+      <p:sp>
+        <p:nvSpPr>
+          <p:cNvPr id="92" name="Rectangle 91"/>
+          <p:cNvSpPr/>
+          <p:nvPr/>
+        </p:nvSpPr>
+        <p:spPr>
+          <a:xfrm>
+            <a:off x="8275320" y="1216152"/>
+            <a:ext cx="155448" cy="384048"/>
+          </a:xfrm>
+          <a:prstGeom prst="rect">
+            <a:avLst/>
+          </a:prstGeom>
+          <a:solidFill>
+            <a:srgbClr val="9EC99A"/>
+          </a:solidFill>
+          <a:ln w="12700">
+            <a:solidFill>
+              <a:srgbClr val="666666"/>
+            </a:solidFill>
+          </a:ln>
+          <a:effectLst/>
+        </p:spPr>
+        <p:txBody>
+          <a:bodyPr rtlCol="0" anchor="ctr"/>
+          <a:lstStyle/>
+          <a:p>
+            <a:pPr algn="ctr"/>
+          </a:p>
+        </p:txBody>
+      </p:sp>
+      <p:sp>
+        <p:nvSpPr>
+          <p:cNvPr id="93" name="Rectangle 92"/>
+          <p:cNvSpPr/>
+          <p:nvPr/>
+        </p:nvSpPr>
+        <p:spPr>
+          <a:xfrm>
+            <a:off x="8481060" y="1417320"/>
+            <a:ext cx="155448" cy="182880"/>
+          </a:xfrm>
+          <a:prstGeom prst="rect">
+            <a:avLst/>
+          </a:prstGeom>
+          <a:solidFill>
+            <a:srgbClr val="9EC99A"/>
+          </a:solidFill>
+          <a:ln w="12700">
+            <a:solidFill>
+              <a:srgbClr val="666666"/>
+            </a:solidFill>
+          </a:ln>
+          <a:effectLst/>
+        </p:spPr>
+        <p:txBody>
+          <a:bodyPr rtlCol="0" anchor="ctr"/>
+          <a:lstStyle/>
+          <a:p>
+            <a:pPr algn="ctr"/>
+          </a:p>
+        </p:txBody>
+      </p:sp>
+      <p:sp>
+        <p:nvSpPr>
+          <p:cNvPr id="94" name="Rectangle 93"/>
+          <p:cNvSpPr/>
+          <p:nvPr/>
+        </p:nvSpPr>
+        <p:spPr>
+          <a:xfrm>
+            <a:off x="8686800" y="1289304"/>
+            <a:ext cx="155448" cy="310896"/>
+          </a:xfrm>
+          <a:prstGeom prst="rect">
+            <a:avLst/>
+          </a:prstGeom>
+          <a:solidFill>
+            <a:srgbClr val="9EC99A"/>
+          </a:solidFill>
+          <a:ln w="12700">
+            <a:solidFill>
+              <a:srgbClr val="666666"/>
+            </a:solidFill>
+          </a:ln>
+          <a:effectLst/>
+        </p:spPr>
+        <p:txBody>
+          <a:bodyPr rtlCol="0" anchor="ctr"/>
+          <a:lstStyle/>
+          <a:p>
+            <a:pPr algn="ctr"/>
+          </a:p>
+        </p:txBody>
+      </p:sp>
+      <p:sp>
+        <p:nvSpPr>
+          <p:cNvPr id="95" name="TextBox 94"/>
+          <p:cNvSpPr txBox="1"/>
+          <p:nvPr/>
+        </p:nvSpPr>
+        <p:spPr>
+          <a:xfrm>
+            <a:off x="7909560" y="1755648"/>
+            <a:ext cx="1645920" cy="274320"/>
+          </a:xfrm>
+          <a:prstGeom prst="rect">
+            <a:avLst/>
+          </a:prstGeom>
+          <a:noFill/>
+        </p:spPr>
+        <p:txBody>
+          <a:bodyPr wrap="square" lIns="0" rIns="0" tIns="0" bIns="0">
+            <a:spAutoFit/>
+          </a:bodyPr>
+          <a:lstStyle/>
+          <a:p>
+            <a:pPr algn="ctr"/>
+            <a:r>
+              <a:rPr sz="1300" b="1" i="1">
+                <a:solidFill>
+                  <a:srgbClr val="1F1F1E"/>
+                </a:solidFill>
+                <a:latin typeface="Times New Roman"/>
+              </a:rPr>
+              <a:t>ŝ(x) predicted</a:t>
+            </a:r>
+          </a:p>
+        </p:txBody>
+      </p:sp>
+      <p:cxnSp>
+        <p:nvCxnSpPr>
+          <p:cNvPr id="96" name="Connector 95"/>
+          <p:cNvCxnSpPr/>
+          <p:nvPr/>
+        </p:nvCxnSpPr>
+        <p:spPr>
+          <a:xfrm>
+            <a:off x="9601200" y="1600200"/>
+            <a:ext cx="658368" cy="0"/>
+          </a:xfrm>
+          <a:prstGeom prst="line">
+            <a:avLst/>
+          </a:prstGeom>
+          <a:ln w="17780">
+            <a:solidFill>
+              <a:srgbClr val="555555"/>
+            </a:solidFill>
+          </a:ln>
+          <a:effectLst/>
+        </p:spPr>
+      </p:cxnSp>
+      <p:sp>
+        <p:nvSpPr>
+          <p:cNvPr id="97" name="Rectangle 96"/>
+          <p:cNvSpPr/>
+          <p:nvPr/>
+        </p:nvSpPr>
+        <p:spPr>
+          <a:xfrm>
+            <a:off x="9646920" y="1097280"/>
+            <a:ext cx="155448" cy="502920"/>
+          </a:xfrm>
+          <a:prstGeom prst="rect">
+            <a:avLst/>
+          </a:prstGeom>
+          <a:solidFill>
+            <a:srgbClr val="4C72B0"/>
+          </a:solidFill>
+          <a:ln w="12700">
+            <a:solidFill>
+              <a:srgbClr val="666666"/>
+            </a:solidFill>
+          </a:ln>
+          <a:effectLst/>
+        </p:spPr>
+        <p:txBody>
+          <a:bodyPr rtlCol="0" anchor="ctr"/>
+          <a:lstStyle/>
+          <a:p>
+            <a:pPr algn="ctr"/>
+          </a:p>
+        </p:txBody>
+      </p:sp>
+      <p:sp>
+        <p:nvSpPr>
+          <p:cNvPr id="98" name="Rectangle 97"/>
+          <p:cNvSpPr/>
+          <p:nvPr/>
+        </p:nvSpPr>
+        <p:spPr>
+          <a:xfrm>
+            <a:off x="9852660" y="1463040"/>
+            <a:ext cx="155448" cy="137160"/>
+          </a:xfrm>
+          <a:prstGeom prst="rect">
+            <a:avLst/>
+          </a:prstGeom>
+          <a:solidFill>
+            <a:srgbClr val="C9C9C9"/>
+          </a:solidFill>
+          <a:ln w="12700">
+            <a:solidFill>
+              <a:srgbClr val="666666"/>
+            </a:solidFill>
+          </a:ln>
+          <a:effectLst/>
+        </p:spPr>
+        <p:txBody>
+          <a:bodyPr rtlCol="0" anchor="ctr"/>
+          <a:lstStyle/>
+          <a:p>
+            <a:pPr algn="ctr"/>
+          </a:p>
+        </p:txBody>
+      </p:sp>
+      <p:sp>
+        <p:nvSpPr>
+          <p:cNvPr id="99" name="Rectangle 98"/>
+          <p:cNvSpPr/>
+          <p:nvPr/>
+        </p:nvSpPr>
+        <p:spPr>
+          <a:xfrm>
+            <a:off x="10058400" y="1325880"/>
+            <a:ext cx="155448" cy="274320"/>
+          </a:xfrm>
+          <a:prstGeom prst="rect">
+            <a:avLst/>
+          </a:prstGeom>
+          <a:solidFill>
+            <a:srgbClr val="5F9EA0"/>
+          </a:solidFill>
+          <a:ln w="12700">
+            <a:solidFill>
+              <a:srgbClr val="666666"/>
+            </a:solidFill>
+          </a:ln>
+          <a:effectLst/>
+        </p:spPr>
+        <p:txBody>
+          <a:bodyPr rtlCol="0" anchor="ctr"/>
+          <a:lstStyle/>
+          <a:p>
+            <a:pPr algn="ctr"/>
+          </a:p>
+        </p:txBody>
+      </p:sp>
+      <p:sp>
+        <p:nvSpPr>
+          <p:cNvPr id="100" name="TextBox 99"/>
+          <p:cNvSpPr txBox="1"/>
+          <p:nvPr/>
+        </p:nvSpPr>
+        <p:spPr>
+          <a:xfrm>
+            <a:off x="9235440" y="1755648"/>
+            <a:ext cx="1920240" cy="274320"/>
+          </a:xfrm>
+          <a:prstGeom prst="rect">
+            <a:avLst/>
+          </a:prstGeom>
+          <a:noFill/>
+        </p:spPr>
+        <p:txBody>
+          <a:bodyPr wrap="square" lIns="0" rIns="0" tIns="0" bIns="0">
+            <a:spAutoFit/>
+          </a:bodyPr>
+          <a:lstStyle/>
+          <a:p>
+            <a:pPr algn="ctr"/>
+            <a:r>
+              <a:rPr sz="1300" b="1" i="1">
+                <a:solidFill>
+                  <a:srgbClr val="1F1F1E"/>
+                </a:solidFill>
+                <a:latin typeface="Times New Roman"/>
+              </a:rPr>
+              <a:t>r  remaining quota</a:t>
+            </a:r>
+          </a:p>
+        </p:txBody>
+      </p:sp>
+      <p:sp>
+        <p:nvSpPr>
+          <p:cNvPr id="101" name="TextBox 100"/>
+          <p:cNvSpPr txBox="1"/>
+          <p:nvPr/>
+        </p:nvSpPr>
+        <p:spPr>
+          <a:xfrm>
+            <a:off x="10744200" y="960120"/>
+            <a:ext cx="1371600" cy="822960"/>
+          </a:xfrm>
+          <a:prstGeom prst="rect">
+            <a:avLst/>
+          </a:prstGeom>
+          <a:noFill/>
+        </p:spPr>
+        <p:txBody>
+          <a:bodyPr wrap="square" lIns="0" rIns="0" tIns="0" bIns="0">
+            <a:spAutoFit/>
+          </a:bodyPr>
+          <a:lstStyle/>
+          <a:p>
+            <a:pPr algn="ctr"/>
+            <a:r>
               <a:rPr sz="1500" b="0" i="0">
                 <a:solidFill>
                   <a:srgbClr val="1F1F1E"/>
                 </a:solidFill>
                 <a:latin typeface="Times New Roman"/>
               </a:rPr>
-              <a:t>min‖X − CD‖²  +  λ‖C‖₁</a:t>
-            </a:r>
-          </a:p>
-        </p:txBody>
-      </p:sp>
-      <p:cxnSp>
-        <p:nvCxnSpPr>
-          <p:cNvPr id="34" name="Connector 33"/>
-          <p:cNvCxnSpPr/>
-          <p:nvPr/>
-        </p:nvCxnSpPr>
-        <p:spPr>
-          <a:xfrm>
-            <a:off x="4206240" y="2331720"/>
-            <a:ext cx="0" cy="685800"/>
-          </a:xfrm>
-          <a:prstGeom prst="line">
-            <a:avLst/>
-          </a:prstGeom>
-          <a:ln w="30480">
-            <a:solidFill>
-              <a:srgbClr val="333333"/>
-            </a:solidFill>
-            <a:tailEnd type="triangle" w="med" len="med"/>
-          </a:ln>
-          <a:effectLst/>
-        </p:spPr>
-      </p:cxnSp>
-      <p:sp>
-        <p:nvSpPr>
-          <p:cNvPr id="35" name="Rounded Rectangle 34"/>
-          <p:cNvSpPr/>
-          <p:nvPr/>
-        </p:nvSpPr>
-        <p:spPr>
-          <a:xfrm>
-            <a:off x="777240" y="3154680"/>
-            <a:ext cx="365760" cy="365760"/>
-          </a:xfrm>
-          <a:prstGeom prst="roundRect">
-            <a:avLst>
-              <a:gd name="adj" fmla="val 18000"/>
-            </a:avLst>
-          </a:prstGeom>
-          <a:solidFill>
-            <a:srgbClr val="4C72B0"/>
-          </a:solidFill>
-          <a:ln w="15240">
-            <a:solidFill>
-              <a:srgbClr val="FFFFFF"/>
-            </a:solidFill>
-          </a:ln>
-          <a:effectLst/>
-        </p:spPr>
-        <p:txBody>
-          <a:bodyPr rtlCol="0" anchor="ctr"/>
-          <a:lstStyle/>
-          <a:p>
-            <a:pPr algn="ctr"/>
-          </a:p>
-        </p:txBody>
-      </p:sp>
-      <p:sp>
-        <p:nvSpPr>
-          <p:cNvPr id="36" name="Rounded Rectangle 35"/>
-          <p:cNvSpPr/>
-          <p:nvPr/>
-        </p:nvSpPr>
-        <p:spPr>
-          <a:xfrm>
-            <a:off x="1252728" y="3154680"/>
-            <a:ext cx="365760" cy="365760"/>
-          </a:xfrm>
-          <a:prstGeom prst="roundRect">
-            <a:avLst>
-              <a:gd name="adj" fmla="val 18000"/>
-            </a:avLst>
-          </a:prstGeom>
-          <a:solidFill>
-            <a:srgbClr val="5F9EA0"/>
-          </a:solidFill>
-          <a:ln w="15240">
-            <a:solidFill>
-              <a:srgbClr val="FFFFFF"/>
-            </a:solidFill>
-          </a:ln>
-          <a:effectLst/>
-        </p:spPr>
-        <p:txBody>
-          <a:bodyPr rtlCol="0" anchor="ctr"/>
-          <a:lstStyle/>
-          <a:p>
-            <a:pPr algn="ctr"/>
-          </a:p>
-        </p:txBody>
-      </p:sp>
-      <p:sp>
-        <p:nvSpPr>
-          <p:cNvPr id="37" name="Rounded Rectangle 36"/>
-          <p:cNvSpPr/>
-          <p:nvPr/>
-        </p:nvSpPr>
-        <p:spPr>
-          <a:xfrm>
-            <a:off x="1728216" y="3154680"/>
-            <a:ext cx="365760" cy="365760"/>
-          </a:xfrm>
-          <a:prstGeom prst="roundRect">
-            <a:avLst>
-              <a:gd name="adj" fmla="val 18000"/>
-            </a:avLst>
-          </a:prstGeom>
-          <a:solidFill>
-            <a:srgbClr val="7BA7D7"/>
-          </a:solidFill>
-          <a:ln w="15240">
-            <a:solidFill>
-              <a:srgbClr val="FFFFFF"/>
-            </a:solidFill>
-          </a:ln>
-          <a:effectLst/>
-        </p:spPr>
-        <p:txBody>
-          <a:bodyPr rtlCol="0" anchor="ctr"/>
-          <a:lstStyle/>
-          <a:p>
-            <a:pPr algn="ctr"/>
-          </a:p>
-        </p:txBody>
-      </p:sp>
-      <p:sp>
-        <p:nvSpPr>
-          <p:cNvPr id="38" name="Rounded Rectangle 37"/>
-          <p:cNvSpPr/>
-          <p:nvPr/>
-        </p:nvSpPr>
-        <p:spPr>
-          <a:xfrm>
-            <a:off x="2203704" y="3154680"/>
-            <a:ext cx="365760" cy="365760"/>
-          </a:xfrm>
-          <a:prstGeom prst="roundRect">
-            <a:avLst>
-              <a:gd name="adj" fmla="val 18000"/>
-            </a:avLst>
-          </a:prstGeom>
-          <a:solidFill>
-            <a:srgbClr val="F2B98F"/>
-          </a:solidFill>
-          <a:ln w="15240">
-            <a:solidFill>
-              <a:srgbClr val="FFFFFF"/>
-            </a:solidFill>
-          </a:ln>
-          <a:effectLst/>
-        </p:spPr>
-        <p:txBody>
-          <a:bodyPr rtlCol="0" anchor="ctr"/>
-          <a:lstStyle/>
-          <a:p>
-            <a:pPr algn="ctr"/>
-          </a:p>
-        </p:txBody>
-      </p:sp>
-      <p:sp>
-        <p:nvSpPr>
-          <p:cNvPr id="39" name="Rounded Rectangle 38"/>
-          <p:cNvSpPr/>
-          <p:nvPr/>
-        </p:nvSpPr>
-        <p:spPr>
-          <a:xfrm>
-            <a:off x="2679192" y="3154680"/>
-            <a:ext cx="365760" cy="365760"/>
-          </a:xfrm>
-          <a:prstGeom prst="roundRect">
-            <a:avLst>
-              <a:gd name="adj" fmla="val 18000"/>
-            </a:avLst>
-          </a:prstGeom>
-          <a:solidFill>
-            <a:srgbClr val="E29A9A"/>
-          </a:solidFill>
-          <a:ln w="15240">
-            <a:solidFill>
-              <a:srgbClr val="FFFFFF"/>
-            </a:solidFill>
-          </a:ln>
-          <a:effectLst/>
-        </p:spPr>
-        <p:txBody>
-          <a:bodyPr rtlCol="0" anchor="ctr"/>
-          <a:lstStyle/>
-          <a:p>
-            <a:pPr algn="ctr"/>
-          </a:p>
-        </p:txBody>
-      </p:sp>
-      <p:sp>
-        <p:nvSpPr>
-          <p:cNvPr id="40" name="TextBox 39"/>
-          <p:cNvSpPr txBox="1"/>
-          <p:nvPr/>
-        </p:nvSpPr>
-        <p:spPr>
-          <a:xfrm>
-            <a:off x="566928" y="3611880"/>
-            <a:ext cx="2926080" cy="274320"/>
-          </a:xfrm>
-          <a:prstGeom prst="rect">
-            <a:avLst/>
-          </a:prstGeom>
-          <a:noFill/>
-        </p:spPr>
-        <p:txBody>
-          <a:bodyPr wrap="square" lIns="0" rIns="0" tIns="0" bIns="0">
-            <a:spAutoFit/>
-          </a:bodyPr>
-          <a:lstStyle/>
-          <a:p>
-            <a:pPr algn="ctr"/>
-            <a:r>
-              <a:rPr sz="1100" b="1" i="1">
-                <a:solidFill>
-                  <a:srgbClr val="1F1F1E"/>
-                </a:solidFill>
-                <a:latin typeface="Times New Roman"/>
-              </a:rPr>
-              <a:t>Capability Atoms (dictionary D)</a:t>
-            </a:r>
-          </a:p>
-        </p:txBody>
-      </p:sp>
-      <p:cxnSp>
-        <p:nvCxnSpPr>
-          <p:cNvPr id="41" name="Connector 40"/>
-          <p:cNvCxnSpPr/>
-          <p:nvPr/>
-        </p:nvCxnSpPr>
-        <p:spPr>
-          <a:xfrm>
-            <a:off x="3291840" y="3337560"/>
-            <a:ext cx="594360" cy="0"/>
-          </a:xfrm>
-          <a:prstGeom prst="line">
-            <a:avLst/>
-          </a:prstGeom>
-          <a:ln w="30480">
-            <a:solidFill>
-              <a:srgbClr val="333333"/>
-            </a:solidFill>
-            <a:tailEnd type="triangle" w="med" len="med"/>
-          </a:ln>
-          <a:effectLst/>
-        </p:spPr>
-      </p:cxnSp>
-      <p:cxnSp>
-        <p:nvCxnSpPr>
-          <p:cNvPr id="42" name="Connector 41"/>
-          <p:cNvCxnSpPr/>
-          <p:nvPr/>
-        </p:nvCxnSpPr>
-        <p:spPr>
-          <a:xfrm>
-            <a:off x="3977640" y="3730752"/>
-            <a:ext cx="690372" cy="0"/>
-          </a:xfrm>
-          <a:prstGeom prst="line">
-            <a:avLst/>
-          </a:prstGeom>
-          <a:ln w="11430">
-            <a:solidFill>
-              <a:srgbClr val="E4E4E4"/>
-            </a:solidFill>
-          </a:ln>
-          <a:effectLst/>
-        </p:spPr>
-      </p:cxnSp>
-      <p:cxnSp>
-        <p:nvCxnSpPr>
-          <p:cNvPr id="43" name="Connector 42"/>
-          <p:cNvCxnSpPr/>
-          <p:nvPr/>
-        </p:nvCxnSpPr>
-        <p:spPr>
-          <a:xfrm>
-            <a:off x="3977640" y="3584448"/>
-            <a:ext cx="690372" cy="0"/>
-          </a:xfrm>
-          <a:prstGeom prst="line">
-            <a:avLst/>
-          </a:prstGeom>
-          <a:ln w="11430">
-            <a:solidFill>
-              <a:srgbClr val="E4E4E4"/>
-            </a:solidFill>
-          </a:ln>
-          <a:effectLst/>
-        </p:spPr>
-      </p:cxnSp>
-      <p:cxnSp>
-        <p:nvCxnSpPr>
-          <p:cNvPr id="44" name="Connector 43"/>
-          <p:cNvCxnSpPr/>
-          <p:nvPr/>
-        </p:nvCxnSpPr>
-        <p:spPr>
-          <a:xfrm>
-            <a:off x="3977640" y="3438144"/>
-            <a:ext cx="690372" cy="0"/>
-          </a:xfrm>
-          <a:prstGeom prst="line">
-            <a:avLst/>
-          </a:prstGeom>
-          <a:ln w="11430">
-            <a:solidFill>
-              <a:srgbClr val="E4E4E4"/>
-            </a:solidFill>
-          </a:ln>
-          <a:effectLst/>
-        </p:spPr>
-      </p:cxnSp>
-      <p:cxnSp>
-        <p:nvCxnSpPr>
-          <p:cNvPr id="45" name="Connector 44"/>
-          <p:cNvCxnSpPr/>
-          <p:nvPr/>
-        </p:nvCxnSpPr>
-        <p:spPr>
-          <a:xfrm>
-            <a:off x="3977640" y="3291840"/>
-            <a:ext cx="690372" cy="0"/>
-          </a:xfrm>
-          <a:prstGeom prst="line">
-            <a:avLst/>
-          </a:prstGeom>
-          <a:ln w="11430">
-            <a:solidFill>
-              <a:srgbClr val="E4E4E4"/>
-            </a:solidFill>
-          </a:ln>
-          <a:effectLst/>
-        </p:spPr>
-      </p:cxnSp>
-      <p:cxnSp>
-        <p:nvCxnSpPr>
-          <p:cNvPr id="46" name="Connector 45"/>
-          <p:cNvCxnSpPr/>
-          <p:nvPr/>
-        </p:nvCxnSpPr>
-        <p:spPr>
-          <a:xfrm>
-            <a:off x="3977640" y="3749039"/>
-            <a:ext cx="690372" cy="0"/>
-          </a:xfrm>
-          <a:prstGeom prst="line">
-            <a:avLst/>
-          </a:prstGeom>
-          <a:ln w="17780">
-            <a:solidFill>
-              <a:srgbClr val="555555"/>
-            </a:solidFill>
-          </a:ln>
-          <a:effectLst/>
-        </p:spPr>
-      </p:cxnSp>
-      <p:sp>
-        <p:nvSpPr>
-          <p:cNvPr id="47" name="Rectangle 46"/>
-          <p:cNvSpPr/>
-          <p:nvPr/>
-        </p:nvSpPr>
-        <p:spPr>
-          <a:xfrm>
-            <a:off x="4023360" y="3145535"/>
-            <a:ext cx="118872" cy="603504"/>
-          </a:xfrm>
-          <a:prstGeom prst="rect">
-            <a:avLst/>
-          </a:prstGeom>
-          <a:solidFill>
-            <a:srgbClr val="4C72B0"/>
-          </a:solidFill>
-          <a:ln w="12700">
-            <a:solidFill>
-              <a:srgbClr val="666666"/>
-            </a:solidFill>
-          </a:ln>
-          <a:effectLst/>
-        </p:spPr>
-        <p:txBody>
-          <a:bodyPr rtlCol="0" anchor="ctr"/>
-          <a:lstStyle/>
-          <a:p>
-            <a:pPr algn="ctr"/>
-          </a:p>
-        </p:txBody>
-      </p:sp>
-      <p:sp>
-        <p:nvSpPr>
-          <p:cNvPr id="48" name="Rectangle 47"/>
-          <p:cNvSpPr/>
-          <p:nvPr/>
-        </p:nvSpPr>
-        <p:spPr>
-          <a:xfrm>
-            <a:off x="4183380" y="3346703"/>
-            <a:ext cx="118872" cy="402336"/>
-          </a:xfrm>
-          <a:prstGeom prst="rect">
-            <a:avLst/>
-          </a:prstGeom>
-          <a:solidFill>
-            <a:srgbClr val="5F9EA0"/>
-          </a:solidFill>
-          <a:ln w="12700">
-            <a:solidFill>
-              <a:srgbClr val="666666"/>
-            </a:solidFill>
-          </a:ln>
-          <a:effectLst/>
-        </p:spPr>
-        <p:txBody>
-          <a:bodyPr rtlCol="0" anchor="ctr"/>
-          <a:lstStyle/>
-          <a:p>
-            <a:pPr algn="ctr"/>
-          </a:p>
-        </p:txBody>
-      </p:sp>
-      <p:sp>
-        <p:nvSpPr>
-          <p:cNvPr id="49" name="Rectangle 48"/>
-          <p:cNvSpPr/>
-          <p:nvPr/>
-        </p:nvSpPr>
-        <p:spPr>
-          <a:xfrm>
-            <a:off x="4343400" y="3493007"/>
-            <a:ext cx="118872" cy="256032"/>
-          </a:xfrm>
-          <a:prstGeom prst="rect">
-            <a:avLst/>
-          </a:prstGeom>
-          <a:solidFill>
-            <a:srgbClr val="7BA7D7"/>
-          </a:solidFill>
-          <a:ln w="12700">
-            <a:solidFill>
-              <a:srgbClr val="666666"/>
-            </a:solidFill>
-          </a:ln>
-          <a:effectLst/>
-        </p:spPr>
-        <p:txBody>
-          <a:bodyPr rtlCol="0" anchor="ctr"/>
-          <a:lstStyle/>
-          <a:p>
-            <a:pPr algn="ctr"/>
-          </a:p>
-        </p:txBody>
-      </p:sp>
-      <p:sp>
-        <p:nvSpPr>
-          <p:cNvPr id="50" name="Rectangle 49"/>
-          <p:cNvSpPr/>
-          <p:nvPr/>
-        </p:nvSpPr>
-        <p:spPr>
-          <a:xfrm>
-            <a:off x="4503420" y="3657599"/>
-            <a:ext cx="118872" cy="91440"/>
-          </a:xfrm>
-          <a:prstGeom prst="rect">
-            <a:avLst/>
-          </a:prstGeom>
-          <a:solidFill>
-            <a:srgbClr val="C9C9C9"/>
-          </a:solidFill>
-          <a:ln w="12700">
-            <a:solidFill>
-              <a:srgbClr val="666666"/>
-            </a:solidFill>
-          </a:ln>
-          <a:effectLst/>
-        </p:spPr>
-        <p:txBody>
-          <a:bodyPr rtlCol="0" anchor="ctr"/>
-          <a:lstStyle/>
-          <a:p>
-            <a:pPr algn="ctr"/>
-          </a:p>
-        </p:txBody>
-      </p:sp>
-      <p:sp>
-        <p:nvSpPr>
-          <p:cNvPr id="51" name="TextBox 50"/>
-          <p:cNvSpPr txBox="1"/>
-          <p:nvPr/>
-        </p:nvSpPr>
-        <p:spPr>
-          <a:xfrm>
-            <a:off x="3794760" y="3886200"/>
-            <a:ext cx="1737360" cy="274320"/>
-          </a:xfrm>
-          <a:prstGeom prst="rect">
-            <a:avLst/>
-          </a:prstGeom>
-          <a:noFill/>
-        </p:spPr>
-        <p:txBody>
-          <a:bodyPr wrap="square" lIns="0" rIns="0" tIns="0" bIns="0">
-            <a:spAutoFit/>
-          </a:bodyPr>
-          <a:lstStyle/>
-          <a:p>
-            <a:pPr algn="ctr"/>
-            <a:r>
-              <a:rPr sz="1100" b="1" i="1">
-                <a:solidFill>
-                  <a:srgbClr val="1F1F1E"/>
-                </a:solidFill>
-                <a:latin typeface="Times New Roman"/>
-              </a:rPr>
-              <a:t>Task Demand w</a:t>
-            </a:r>
-          </a:p>
-        </p:txBody>
-      </p:sp>
-      <p:sp>
-        <p:nvSpPr>
-          <p:cNvPr id="52" name="TextBox 51"/>
-          <p:cNvSpPr txBox="1"/>
-          <p:nvPr/>
-        </p:nvSpPr>
-        <p:spPr>
-          <a:xfrm>
-            <a:off x="457200" y="4297680"/>
-            <a:ext cx="5303520" cy="329184"/>
-          </a:xfrm>
-          <a:prstGeom prst="rect">
-            <a:avLst/>
-          </a:prstGeom>
-          <a:noFill/>
-        </p:spPr>
-        <p:txBody>
-          <a:bodyPr wrap="square" lIns="0" rIns="0" tIns="0" bIns="0">
-            <a:spAutoFit/>
-          </a:bodyPr>
-          <a:lstStyle/>
-          <a:p>
-            <a:pPr algn="ctr"/>
-            <a:r>
-              <a:rPr sz="1400" b="0" i="0">
-                <a:solidFill>
-                  <a:srgbClr val="1F1F1E"/>
-                </a:solidFill>
-                <a:latin typeface="Times New Roman"/>
-              </a:rPr>
-              <a:t>per-skill token quota  =  w · b</a:t>
-            </a:r>
-          </a:p>
-        </p:txBody>
-      </p:sp>
-      <p:sp>
-        <p:nvSpPr>
-          <p:cNvPr id="53" name="TextBox 52"/>
-          <p:cNvSpPr txBox="1"/>
-          <p:nvPr/>
-        </p:nvSpPr>
-        <p:spPr>
-          <a:xfrm>
-            <a:off x="320040" y="4754880"/>
-            <a:ext cx="5394960" cy="274320"/>
-          </a:xfrm>
-          <a:prstGeom prst="rect">
-            <a:avLst/>
-          </a:prstGeom>
-          <a:noFill/>
-        </p:spPr>
-        <p:txBody>
-          <a:bodyPr wrap="square" lIns="0" rIns="0" tIns="0" bIns="0">
-            <a:spAutoFit/>
-          </a:bodyPr>
-          <a:lstStyle/>
-          <a:p>
-            <a:pPr algn="l"/>
-            <a:r>
-              <a:rPr sz="1200" b="1" i="1">
-                <a:solidFill>
-                  <a:srgbClr val="1F1F1E"/>
-                </a:solidFill>
-                <a:latin typeface="Times New Roman"/>
-              </a:rPr>
-              <a:t>Cross-modal bridge (fit on paid pairs)</a:t>
-            </a:r>
-          </a:p>
-        </p:txBody>
-      </p:sp>
-      <p:cxnSp>
-        <p:nvCxnSpPr>
-          <p:cNvPr id="54" name="Connector 53"/>
-          <p:cNvCxnSpPr/>
-          <p:nvPr/>
-        </p:nvCxnSpPr>
-        <p:spPr>
-          <a:xfrm>
-            <a:off x="640080" y="5897880"/>
-            <a:ext cx="530352" cy="0"/>
-          </a:xfrm>
-          <a:prstGeom prst="line">
-            <a:avLst/>
-          </a:prstGeom>
-          <a:ln w="17780">
-            <a:solidFill>
-              <a:srgbClr val="555555"/>
-            </a:solidFill>
-          </a:ln>
-          <a:effectLst/>
-        </p:spPr>
-      </p:cxnSp>
-      <p:sp>
-        <p:nvSpPr>
-          <p:cNvPr id="55" name="Rectangle 54"/>
-          <p:cNvSpPr/>
-          <p:nvPr/>
-        </p:nvSpPr>
-        <p:spPr>
-          <a:xfrm>
-            <a:off x="685800" y="5623560"/>
-            <a:ext cx="118872" cy="274320"/>
-          </a:xfrm>
-          <a:prstGeom prst="rect">
-            <a:avLst/>
-          </a:prstGeom>
-          <a:solidFill>
-            <a:srgbClr val="C9C9C9"/>
-          </a:solidFill>
-          <a:ln w="12700">
-            <a:solidFill>
-              <a:srgbClr val="666666"/>
-            </a:solidFill>
-          </a:ln>
-          <a:effectLst/>
-        </p:spPr>
-        <p:txBody>
-          <a:bodyPr rtlCol="0" anchor="ctr"/>
-          <a:lstStyle/>
-          <a:p>
-            <a:pPr algn="ctr"/>
-          </a:p>
-        </p:txBody>
-      </p:sp>
-      <p:sp>
-        <p:nvSpPr>
-          <p:cNvPr id="56" name="Rectangle 55"/>
-          <p:cNvSpPr/>
-          <p:nvPr/>
-        </p:nvSpPr>
-        <p:spPr>
-          <a:xfrm>
-            <a:off x="845820" y="5458968"/>
-            <a:ext cx="118872" cy="438912"/>
-          </a:xfrm>
-          <a:prstGeom prst="rect">
-            <a:avLst/>
-          </a:prstGeom>
-          <a:solidFill>
-            <a:srgbClr val="C9C9C9"/>
-          </a:solidFill>
-          <a:ln w="12700">
-            <a:solidFill>
-              <a:srgbClr val="666666"/>
-            </a:solidFill>
-          </a:ln>
-          <a:effectLst/>
-        </p:spPr>
-        <p:txBody>
-          <a:bodyPr rtlCol="0" anchor="ctr"/>
-          <a:lstStyle/>
-          <a:p>
-            <a:pPr algn="ctr"/>
-          </a:p>
-        </p:txBody>
-      </p:sp>
-      <p:sp>
-        <p:nvSpPr>
-          <p:cNvPr id="57" name="Rectangle 56"/>
-          <p:cNvSpPr/>
-          <p:nvPr/>
-        </p:nvSpPr>
-        <p:spPr>
-          <a:xfrm>
-            <a:off x="1005840" y="5696712"/>
-            <a:ext cx="118872" cy="201168"/>
-          </a:xfrm>
-          <a:prstGeom prst="rect">
-            <a:avLst/>
-          </a:prstGeom>
-          <a:solidFill>
-            <a:srgbClr val="C9C9C9"/>
-          </a:solidFill>
-          <a:ln w="12700">
-            <a:solidFill>
-              <a:srgbClr val="666666"/>
-            </a:solidFill>
-          </a:ln>
-          <a:effectLst/>
-        </p:spPr>
-        <p:txBody>
-          <a:bodyPr rtlCol="0" anchor="ctr"/>
-          <a:lstStyle/>
-          <a:p>
-            <a:pPr algn="ctr"/>
-          </a:p>
-        </p:txBody>
-      </p:sp>
-      <p:sp>
-        <p:nvSpPr>
-          <p:cNvPr id="58" name="TextBox 57"/>
-          <p:cNvSpPr txBox="1"/>
-          <p:nvPr/>
-        </p:nvSpPr>
-        <p:spPr>
-          <a:xfrm>
-            <a:off x="438912" y="6016752"/>
-            <a:ext cx="1280160" cy="274320"/>
-          </a:xfrm>
-          <a:prstGeom prst="rect">
-            <a:avLst/>
-          </a:prstGeom>
-          <a:noFill/>
-        </p:spPr>
-        <p:txBody>
-          <a:bodyPr wrap="square" lIns="0" rIns="0" tIns="0" bIns="0">
-            <a:spAutoFit/>
-          </a:bodyPr>
-          <a:lstStyle/>
-          <a:p>
-            <a:pPr algn="ctr"/>
-            <a:r>
-              <a:rPr sz="1000" b="1" i="1">
-                <a:solidFill>
-                  <a:srgbClr val="1F1F1E"/>
-                </a:solidFill>
-                <a:latin typeface="Times New Roman"/>
-              </a:rPr>
-              <a:t>Prompt g</a:t>
-            </a:r>
-          </a:p>
-        </p:txBody>
-      </p:sp>
-      <p:cxnSp>
-        <p:nvCxnSpPr>
-          <p:cNvPr id="59" name="Connector 58"/>
-          <p:cNvCxnSpPr/>
-          <p:nvPr/>
-        </p:nvCxnSpPr>
-        <p:spPr>
-          <a:xfrm>
-            <a:off x="1417320" y="5669280"/>
-            <a:ext cx="685800" cy="0"/>
-          </a:xfrm>
-          <a:prstGeom prst="line">
-            <a:avLst/>
-          </a:prstGeom>
-          <a:ln w="30480">
-            <a:solidFill>
-              <a:srgbClr val="333333"/>
-            </a:solidFill>
-            <a:tailEnd type="triangle" w="med" len="med"/>
-          </a:ln>
-          <a:effectLst/>
-        </p:spPr>
-      </p:cxnSp>
-      <p:sp>
-        <p:nvSpPr>
-          <p:cNvPr id="60" name="Rounded Rectangle 59"/>
-          <p:cNvSpPr/>
-          <p:nvPr/>
-        </p:nvSpPr>
-        <p:spPr>
-          <a:xfrm>
-            <a:off x="2194560" y="5349240"/>
-            <a:ext cx="658368" cy="658368"/>
-          </a:xfrm>
-          <a:prstGeom prst="roundRect">
-            <a:avLst>
-              <a:gd name="adj" fmla="val 12000"/>
-            </a:avLst>
-          </a:prstGeom>
-          <a:solidFill>
-            <a:srgbClr val="FFFFFF"/>
-          </a:solidFill>
-          <a:ln w="17780">
-            <a:solidFill>
-              <a:srgbClr val="555555"/>
-            </a:solidFill>
-          </a:ln>
-          <a:effectLst/>
-        </p:spPr>
-        <p:txBody>
-          <a:bodyPr rtlCol="0" anchor="ctr"/>
-          <a:lstStyle/>
-          <a:p>
-            <a:pPr algn="ctr"/>
-          </a:p>
-        </p:txBody>
-      </p:sp>
-      <p:sp>
-        <p:nvSpPr>
-          <p:cNvPr id="61" name="Rectangle 60"/>
-          <p:cNvSpPr/>
-          <p:nvPr/>
-        </p:nvSpPr>
-        <p:spPr>
-          <a:xfrm>
-            <a:off x="2258568" y="5413248"/>
-            <a:ext cx="146304" cy="146304"/>
-          </a:xfrm>
-          <a:prstGeom prst="rect">
-            <a:avLst/>
-          </a:prstGeom>
-          <a:solidFill>
-            <a:srgbClr val="4C72B0"/>
-          </a:solidFill>
-          <a:ln w="7620">
-            <a:solidFill>
-              <a:srgbClr val="FFFFFF"/>
-            </a:solidFill>
-          </a:ln>
-          <a:effectLst/>
-        </p:spPr>
-        <p:txBody>
-          <a:bodyPr rtlCol="0" anchor="ctr"/>
-          <a:lstStyle/>
-          <a:p>
-            <a:pPr algn="ctr"/>
-          </a:p>
-        </p:txBody>
-      </p:sp>
-      <p:sp>
-        <p:nvSpPr>
-          <p:cNvPr id="62" name="Rectangle 61"/>
-          <p:cNvSpPr/>
-          <p:nvPr/>
-        </p:nvSpPr>
-        <p:spPr>
-          <a:xfrm>
-            <a:off x="2441448" y="5413248"/>
-            <a:ext cx="146304" cy="146304"/>
-          </a:xfrm>
-          <a:prstGeom prst="rect">
-            <a:avLst/>
-          </a:prstGeom>
-          <a:solidFill>
-            <a:srgbClr val="9EC99A"/>
-          </a:solidFill>
-          <a:ln w="7620">
-            <a:solidFill>
-              <a:srgbClr val="FFFFFF"/>
-            </a:solidFill>
-          </a:ln>
-          <a:effectLst/>
-        </p:spPr>
-        <p:txBody>
-          <a:bodyPr rtlCol="0" anchor="ctr"/>
-          <a:lstStyle/>
-          <a:p>
-            <a:pPr algn="ctr"/>
-          </a:p>
-        </p:txBody>
-      </p:sp>
-      <p:sp>
-        <p:nvSpPr>
-          <p:cNvPr id="63" name="Rectangle 62"/>
-          <p:cNvSpPr/>
-          <p:nvPr/>
-        </p:nvSpPr>
-        <p:spPr>
-          <a:xfrm>
-            <a:off x="2624327" y="5413248"/>
-            <a:ext cx="146304" cy="146304"/>
-          </a:xfrm>
-          <a:prstGeom prst="rect">
-            <a:avLst/>
-          </a:prstGeom>
-          <a:solidFill>
-            <a:srgbClr val="F2B98F"/>
-          </a:solidFill>
-          <a:ln w="7620">
-            <a:solidFill>
-              <a:srgbClr val="FFFFFF"/>
-            </a:solidFill>
-          </a:ln>
-          <a:effectLst/>
-        </p:spPr>
-        <p:txBody>
-          <a:bodyPr rtlCol="0" anchor="ctr"/>
-          <a:lstStyle/>
-          <a:p>
-            <a:pPr algn="ctr"/>
-          </a:p>
-        </p:txBody>
-      </p:sp>
-      <p:sp>
-        <p:nvSpPr>
-          <p:cNvPr id="64" name="Rectangle 63"/>
-          <p:cNvSpPr/>
-          <p:nvPr/>
-        </p:nvSpPr>
-        <p:spPr>
-          <a:xfrm>
-            <a:off x="2258568" y="5596128"/>
-            <a:ext cx="146304" cy="146304"/>
-          </a:xfrm>
-          <a:prstGeom prst="rect">
-            <a:avLst/>
-          </a:prstGeom>
-          <a:solidFill>
-            <a:srgbClr val="9EC99A"/>
-          </a:solidFill>
-          <a:ln w="7620">
-            <a:solidFill>
-              <a:srgbClr val="FFFFFF"/>
-            </a:solidFill>
-          </a:ln>
-          <a:effectLst/>
-        </p:spPr>
-        <p:txBody>
-          <a:bodyPr rtlCol="0" anchor="ctr"/>
-          <a:lstStyle/>
-          <a:p>
-            <a:pPr algn="ctr"/>
-          </a:p>
-        </p:txBody>
-      </p:sp>
-      <p:sp>
-        <p:nvSpPr>
-          <p:cNvPr id="65" name="Rectangle 64"/>
-          <p:cNvSpPr/>
-          <p:nvPr/>
-        </p:nvSpPr>
-        <p:spPr>
-          <a:xfrm>
-            <a:off x="2441448" y="5596128"/>
-            <a:ext cx="146304" cy="146304"/>
-          </a:xfrm>
-          <a:prstGeom prst="rect">
-            <a:avLst/>
-          </a:prstGeom>
-          <a:solidFill>
-            <a:srgbClr val="F2B98F"/>
-          </a:solidFill>
-          <a:ln w="7620">
-            <a:solidFill>
-              <a:srgbClr val="FFFFFF"/>
-            </a:solidFill>
-          </a:ln>
-          <a:effectLst/>
-        </p:spPr>
-        <p:txBody>
-          <a:bodyPr rtlCol="0" anchor="ctr"/>
-          <a:lstStyle/>
-          <a:p>
-            <a:pPr algn="ctr"/>
-          </a:p>
-        </p:txBody>
-      </p:sp>
-      <p:sp>
-        <p:nvSpPr>
-          <p:cNvPr id="66" name="Rectangle 65"/>
-          <p:cNvSpPr/>
-          <p:nvPr/>
-        </p:nvSpPr>
-        <p:spPr>
-          <a:xfrm>
-            <a:off x="2624327" y="5596128"/>
-            <a:ext cx="146304" cy="146304"/>
-          </a:xfrm>
-          <a:prstGeom prst="rect">
-            <a:avLst/>
-          </a:prstGeom>
-          <a:solidFill>
-            <a:srgbClr val="4C72B0"/>
-          </a:solidFill>
-          <a:ln w="7620">
-            <a:solidFill>
-              <a:srgbClr val="FFFFFF"/>
-            </a:solidFill>
-          </a:ln>
-          <a:effectLst/>
-        </p:spPr>
-        <p:txBody>
-          <a:bodyPr rtlCol="0" anchor="ctr"/>
-          <a:lstStyle/>
-          <a:p>
-            <a:pPr algn="ctr"/>
-          </a:p>
-        </p:txBody>
-      </p:sp>
-      <p:sp>
-        <p:nvSpPr>
-          <p:cNvPr id="67" name="Rectangle 66"/>
-          <p:cNvSpPr/>
-          <p:nvPr/>
-        </p:nvSpPr>
-        <p:spPr>
-          <a:xfrm>
-            <a:off x="2258568" y="5779008"/>
-            <a:ext cx="146304" cy="146304"/>
-          </a:xfrm>
-          <a:prstGeom prst="rect">
-            <a:avLst/>
-          </a:prstGeom>
-          <a:solidFill>
-            <a:srgbClr val="F2B98F"/>
-          </a:solidFill>
-          <a:ln w="7620">
-            <a:solidFill>
-              <a:srgbClr val="FFFFFF"/>
-            </a:solidFill>
-          </a:ln>
-          <a:effectLst/>
-        </p:spPr>
-        <p:txBody>
-          <a:bodyPr rtlCol="0" anchor="ctr"/>
-          <a:lstStyle/>
-          <a:p>
-            <a:pPr algn="ctr"/>
-          </a:p>
-        </p:txBody>
-      </p:sp>
-      <p:sp>
-        <p:nvSpPr>
-          <p:cNvPr id="68" name="Rectangle 67"/>
-          <p:cNvSpPr/>
-          <p:nvPr/>
-        </p:nvSpPr>
-        <p:spPr>
-          <a:xfrm>
-            <a:off x="2441448" y="5779008"/>
-            <a:ext cx="146304" cy="146304"/>
-          </a:xfrm>
-          <a:prstGeom prst="rect">
-            <a:avLst/>
-          </a:prstGeom>
-          <a:solidFill>
-            <a:srgbClr val="4C72B0"/>
-          </a:solidFill>
-          <a:ln w="7620">
-            <a:solidFill>
-              <a:srgbClr val="FFFFFF"/>
-            </a:solidFill>
-          </a:ln>
-          <a:effectLst/>
-        </p:spPr>
-        <p:txBody>
-          <a:bodyPr rtlCol="0" anchor="ctr"/>
-          <a:lstStyle/>
-          <a:p>
-            <a:pPr algn="ctr"/>
-          </a:p>
-        </p:txBody>
-      </p:sp>
-      <p:sp>
-        <p:nvSpPr>
-          <p:cNvPr id="69" name="Rectangle 68"/>
-          <p:cNvSpPr/>
-          <p:nvPr/>
-        </p:nvSpPr>
-        <p:spPr>
-          <a:xfrm>
-            <a:off x="2624327" y="5779008"/>
-            <a:ext cx="146304" cy="146304"/>
-          </a:xfrm>
-          <a:prstGeom prst="rect">
-            <a:avLst/>
-          </a:prstGeom>
-          <a:solidFill>
-            <a:srgbClr val="9EC99A"/>
-          </a:solidFill>
-          <a:ln w="7620">
-            <a:solidFill>
-              <a:srgbClr val="FFFFFF"/>
-            </a:solidFill>
-          </a:ln>
-          <a:effectLst/>
-        </p:spPr>
-        <p:txBody>
-          <a:bodyPr rtlCol="0" anchor="ctr"/>
-          <a:lstStyle/>
-          <a:p>
-            <a:pPr algn="ctr"/>
-          </a:p>
-        </p:txBody>
-      </p:sp>
-      <p:sp>
-        <p:nvSpPr>
-          <p:cNvPr id="70" name="TextBox 69"/>
-          <p:cNvSpPr txBox="1"/>
-          <p:nvPr/>
-        </p:nvSpPr>
-        <p:spPr>
-          <a:xfrm>
-            <a:off x="1965960" y="6108192"/>
-            <a:ext cx="1188720" cy="274320"/>
-          </a:xfrm>
-          <a:prstGeom prst="rect">
-            <a:avLst/>
-          </a:prstGeom>
-          <a:noFill/>
-        </p:spPr>
-        <p:txBody>
-          <a:bodyPr wrap="square" lIns="0" rIns="0" tIns="0" bIns="0">
-            <a:spAutoFit/>
-          </a:bodyPr>
-          <a:lstStyle/>
-          <a:p>
-            <a:pPr algn="ctr"/>
-            <a:r>
-              <a:rPr sz="1000" b="1" i="1">
-                <a:solidFill>
-                  <a:srgbClr val="1F1F1E"/>
-                </a:solidFill>
-                <a:latin typeface="Times New Roman"/>
-              </a:rPr>
-              <a:t>Ridge Map</a:t>
-            </a:r>
-          </a:p>
-        </p:txBody>
-      </p:sp>
-      <p:cxnSp>
-        <p:nvCxnSpPr>
-          <p:cNvPr id="71" name="Connector 70"/>
-          <p:cNvCxnSpPr/>
-          <p:nvPr/>
-        </p:nvCxnSpPr>
-        <p:spPr>
-          <a:xfrm>
-            <a:off x="2971800" y="5669280"/>
-            <a:ext cx="685800" cy="0"/>
-          </a:xfrm>
-          <a:prstGeom prst="line">
-            <a:avLst/>
-          </a:prstGeom>
-          <a:ln w="30480">
-            <a:solidFill>
-              <a:srgbClr val="333333"/>
-            </a:solidFill>
-            <a:tailEnd type="triangle" w="med" len="med"/>
-          </a:ln>
-          <a:effectLst/>
-        </p:spPr>
-      </p:cxnSp>
-      <p:cxnSp>
-        <p:nvCxnSpPr>
-          <p:cNvPr id="72" name="Connector 71"/>
-          <p:cNvCxnSpPr/>
-          <p:nvPr/>
-        </p:nvCxnSpPr>
-        <p:spPr>
-          <a:xfrm>
-            <a:off x="3794760" y="5897880"/>
-            <a:ext cx="530352" cy="0"/>
-          </a:xfrm>
-          <a:prstGeom prst="line">
-            <a:avLst/>
-          </a:prstGeom>
-          <a:ln w="17780">
-            <a:solidFill>
-              <a:srgbClr val="555555"/>
-            </a:solidFill>
-          </a:ln>
-          <a:effectLst/>
-        </p:spPr>
-      </p:cxnSp>
-      <p:sp>
-        <p:nvSpPr>
-          <p:cNvPr id="73" name="Rectangle 72"/>
-          <p:cNvSpPr/>
-          <p:nvPr/>
-        </p:nvSpPr>
-        <p:spPr>
-          <a:xfrm>
-            <a:off x="3840480" y="5394960"/>
-            <a:ext cx="118872" cy="502920"/>
-          </a:xfrm>
-          <a:prstGeom prst="rect">
-            <a:avLst/>
-          </a:prstGeom>
-          <a:solidFill>
-            <a:srgbClr val="9EC99A"/>
-          </a:solidFill>
-          <a:ln w="12700">
-            <a:solidFill>
-              <a:srgbClr val="666666"/>
-            </a:solidFill>
-          </a:ln>
-          <a:effectLst/>
-        </p:spPr>
-        <p:txBody>
-          <a:bodyPr rtlCol="0" anchor="ctr"/>
-          <a:lstStyle/>
-          <a:p>
-            <a:pPr algn="ctr"/>
-          </a:p>
-        </p:txBody>
-      </p:sp>
-      <p:sp>
-        <p:nvSpPr>
-          <p:cNvPr id="74" name="Rectangle 73"/>
-          <p:cNvSpPr/>
-          <p:nvPr/>
-        </p:nvSpPr>
-        <p:spPr>
-          <a:xfrm>
-            <a:off x="4000500" y="5669280"/>
-            <a:ext cx="118872" cy="228600"/>
-          </a:xfrm>
-          <a:prstGeom prst="rect">
-            <a:avLst/>
-          </a:prstGeom>
-          <a:solidFill>
-            <a:srgbClr val="9EC99A"/>
-          </a:solidFill>
-          <a:ln w="12700">
-            <a:solidFill>
-              <a:srgbClr val="666666"/>
-            </a:solidFill>
-          </a:ln>
-          <a:effectLst/>
-        </p:spPr>
-        <p:txBody>
-          <a:bodyPr rtlCol="0" anchor="ctr"/>
-          <a:lstStyle/>
-          <a:p>
-            <a:pPr algn="ctr"/>
-          </a:p>
-        </p:txBody>
-      </p:sp>
-      <p:sp>
-        <p:nvSpPr>
-          <p:cNvPr id="75" name="Rectangle 74"/>
-          <p:cNvSpPr/>
-          <p:nvPr/>
-        </p:nvSpPr>
-        <p:spPr>
-          <a:xfrm>
-            <a:off x="4160520" y="5513832"/>
-            <a:ext cx="118872" cy="384048"/>
-          </a:xfrm>
-          <a:prstGeom prst="rect">
-            <a:avLst/>
-          </a:prstGeom>
-          <a:solidFill>
-            <a:srgbClr val="9EC99A"/>
-          </a:solidFill>
-          <a:ln w="12700">
-            <a:solidFill>
-              <a:srgbClr val="666666"/>
-            </a:solidFill>
-          </a:ln>
-          <a:effectLst/>
-        </p:spPr>
-        <p:txBody>
-          <a:bodyPr rtlCol="0" anchor="ctr"/>
-          <a:lstStyle/>
-          <a:p>
-            <a:pPr algn="ctr"/>
-          </a:p>
-        </p:txBody>
-      </p:sp>
-      <p:sp>
-        <p:nvSpPr>
-          <p:cNvPr id="76" name="TextBox 75"/>
-          <p:cNvSpPr txBox="1"/>
-          <p:nvPr/>
-        </p:nvSpPr>
-        <p:spPr>
-          <a:xfrm>
-            <a:off x="3611880" y="6016752"/>
-            <a:ext cx="1463040" cy="274320"/>
-          </a:xfrm>
-          <a:prstGeom prst="rect">
-            <a:avLst/>
-          </a:prstGeom>
-          <a:noFill/>
-        </p:spPr>
-        <p:txBody>
-          <a:bodyPr wrap="square" lIns="0" rIns="0" tIns="0" bIns="0">
-            <a:spAutoFit/>
-          </a:bodyPr>
-          <a:lstStyle/>
-          <a:p>
-            <a:pPr algn="ctr"/>
-            <a:r>
-              <a:rPr sz="1000" b="1" i="1">
-                <a:solidFill>
-                  <a:srgbClr val="1F1F1E"/>
-                </a:solidFill>
-                <a:latin typeface="Times New Roman"/>
-              </a:rPr>
-              <a:t>Predicted Skills</a:t>
-            </a:r>
-          </a:p>
-        </p:txBody>
-      </p:sp>
-      <p:sp>
-        <p:nvSpPr>
-          <p:cNvPr id="77" name="TextBox 76"/>
-          <p:cNvSpPr txBox="1"/>
-          <p:nvPr/>
-        </p:nvSpPr>
-        <p:spPr>
-          <a:xfrm>
-            <a:off x="6217920" y="219456"/>
-            <a:ext cx="5669280" cy="274320"/>
-          </a:xfrm>
-          <a:prstGeom prst="rect">
-            <a:avLst/>
-          </a:prstGeom>
-          <a:noFill/>
-        </p:spPr>
-        <p:txBody>
-          <a:bodyPr wrap="square" lIns="0" rIns="0" tIns="0" bIns="0">
-            <a:spAutoFit/>
-          </a:bodyPr>
-          <a:lstStyle/>
-          <a:p>
-            <a:pPr algn="l"/>
-            <a:r>
-              <a:rPr sz="1400" b="1" i="1">
-                <a:solidFill>
-                  <a:srgbClr val="1F1F1E"/>
-                </a:solidFill>
-                <a:latin typeface="Times New Roman"/>
-              </a:rPr>
-              <a:t>Spending the budget where demand is unmet</a:t>
-            </a:r>
-          </a:p>
-        </p:txBody>
-      </p:sp>
-      <p:sp>
-        <p:nvSpPr>
-          <p:cNvPr id="78" name="Rounded Rectangle 77"/>
-          <p:cNvSpPr/>
-          <p:nvPr/>
-        </p:nvSpPr>
-        <p:spPr>
-          <a:xfrm>
-            <a:off x="6423659" y="800100"/>
-            <a:ext cx="960120" cy="868680"/>
-          </a:xfrm>
-          <a:prstGeom prst="roundRect">
-            <a:avLst>
-              <a:gd name="adj" fmla="val 25000"/>
-            </a:avLst>
-          </a:prstGeom>
-          <a:solidFill>
-            <a:srgbClr val="EEF2F9"/>
-          </a:solidFill>
-          <a:ln w="20320">
-            <a:solidFill>
-              <a:srgbClr val="8A5AA8"/>
-            </a:solidFill>
-          </a:ln>
-          <a:effectLst/>
-        </p:spPr>
-        <p:txBody>
-          <a:bodyPr rtlCol="0" anchor="ctr"/>
-          <a:lstStyle/>
-          <a:p>
-            <a:pPr algn="ctr"/>
-          </a:p>
-        </p:txBody>
-      </p:sp>
-      <p:sp>
-        <p:nvSpPr>
-          <p:cNvPr id="79" name="Rectangle 78"/>
-          <p:cNvSpPr/>
-          <p:nvPr/>
-        </p:nvSpPr>
-        <p:spPr>
-          <a:xfrm>
-            <a:off x="6892747" y="672084"/>
-            <a:ext cx="21945" cy="128016"/>
-          </a:xfrm>
-          <a:prstGeom prst="rect">
-            <a:avLst/>
-          </a:prstGeom>
-          <a:solidFill>
-            <a:srgbClr val="8A5AA8"/>
-          </a:solidFill>
-          <a:ln>
-            <a:noFill/>
-          </a:ln>
-          <a:effectLst/>
-        </p:spPr>
-        <p:txBody>
-          <a:bodyPr rtlCol="0" anchor="ctr"/>
-          <a:lstStyle/>
-          <a:p>
-            <a:pPr algn="ctr"/>
-          </a:p>
-        </p:txBody>
-      </p:sp>
-      <p:sp>
-        <p:nvSpPr>
-          <p:cNvPr id="80" name="Oval 79"/>
-          <p:cNvSpPr/>
-          <p:nvPr/>
-        </p:nvSpPr>
-        <p:spPr>
-          <a:xfrm>
-            <a:off x="6858000" y="580644"/>
-            <a:ext cx="91440" cy="91440"/>
-          </a:xfrm>
-          <a:prstGeom prst="ellipse">
-            <a:avLst/>
-          </a:prstGeom>
-          <a:solidFill>
-            <a:srgbClr val="8A5AA8"/>
-          </a:solidFill>
-          <a:ln>
-            <a:noFill/>
-          </a:ln>
-          <a:effectLst/>
-        </p:spPr>
-        <p:txBody>
-          <a:bodyPr rtlCol="0" anchor="ctr"/>
-          <a:lstStyle/>
-          <a:p>
-            <a:pPr algn="ctr"/>
-          </a:p>
-        </p:txBody>
-      </p:sp>
-      <p:sp>
-        <p:nvSpPr>
-          <p:cNvPr id="81" name="Oval 80"/>
-          <p:cNvSpPr/>
-          <p:nvPr/>
-        </p:nvSpPr>
-        <p:spPr>
-          <a:xfrm>
-            <a:off x="6689750" y="1106424"/>
-            <a:ext cx="82296" cy="82296"/>
-          </a:xfrm>
-          <a:prstGeom prst="ellipse">
-            <a:avLst/>
-          </a:prstGeom>
-          <a:solidFill>
-            <a:srgbClr val="8A5AA8"/>
-          </a:solidFill>
-          <a:ln>
-            <a:noFill/>
-          </a:ln>
-          <a:effectLst/>
-        </p:spPr>
-        <p:txBody>
-          <a:bodyPr rtlCol="0" anchor="ctr"/>
-          <a:lstStyle/>
-          <a:p>
-            <a:pPr algn="ctr"/>
-          </a:p>
-        </p:txBody>
-      </p:sp>
-      <p:sp>
-        <p:nvSpPr>
-          <p:cNvPr id="82" name="Oval 81"/>
-          <p:cNvSpPr/>
-          <p:nvPr/>
-        </p:nvSpPr>
-        <p:spPr>
-          <a:xfrm>
-            <a:off x="7035393" y="1106424"/>
-            <a:ext cx="82296" cy="82296"/>
-          </a:xfrm>
-          <a:prstGeom prst="ellipse">
-            <a:avLst/>
-          </a:prstGeom>
-          <a:solidFill>
-            <a:srgbClr val="8A5AA8"/>
-          </a:solidFill>
-          <a:ln>
-            <a:noFill/>
-          </a:ln>
-          <a:effectLst/>
-        </p:spPr>
-        <p:txBody>
-          <a:bodyPr rtlCol="0" anchor="ctr"/>
-          <a:lstStyle/>
-          <a:p>
-            <a:pPr algn="ctr"/>
-          </a:p>
-        </p:txBody>
-      </p:sp>
-      <p:sp>
-        <p:nvSpPr>
-          <p:cNvPr id="83" name="Rounded Rectangle 82"/>
-          <p:cNvSpPr/>
-          <p:nvPr/>
-        </p:nvSpPr>
-        <p:spPr>
-          <a:xfrm>
-            <a:off x="6769303" y="1338681"/>
-            <a:ext cx="268833" cy="27432"/>
-          </a:xfrm>
-          <a:prstGeom prst="roundRect">
-            <a:avLst>
-              <a:gd name="adj" fmla="val 50000"/>
-            </a:avLst>
-          </a:prstGeom>
-          <a:solidFill>
-            <a:srgbClr val="8A5AA8"/>
-          </a:solidFill>
-          <a:ln>
-            <a:noFill/>
-          </a:ln>
-          <a:effectLst/>
-        </p:spPr>
-        <p:txBody>
-          <a:bodyPr rtlCol="0" anchor="ctr"/>
-          <a:lstStyle/>
-          <a:p>
-            <a:pPr algn="ctr"/>
-          </a:p>
-        </p:txBody>
-      </p:sp>
-      <p:sp>
-        <p:nvSpPr>
-          <p:cNvPr id="84" name="TextBox 83"/>
-          <p:cNvSpPr txBox="1"/>
-          <p:nvPr/>
-        </p:nvSpPr>
-        <p:spPr>
-          <a:xfrm>
-            <a:off x="6103620" y="1705356"/>
-            <a:ext cx="1600200" cy="256032"/>
-          </a:xfrm>
-          <a:prstGeom prst="rect">
-            <a:avLst/>
-          </a:prstGeom>
-          <a:noFill/>
-        </p:spPr>
-        <p:txBody>
-          <a:bodyPr wrap="square" lIns="0" rIns="0" tIns="0" bIns="0">
-            <a:spAutoFit/>
-          </a:bodyPr>
-          <a:lstStyle/>
-          <a:p>
-            <a:pPr algn="ctr"/>
-            <a:r>
-              <a:rPr sz="950" b="1" i="0">
-                <a:solidFill>
-                  <a:srgbClr val="1F1F1E"/>
-                </a:solidFill>
-                <a:latin typeface="Times New Roman"/>
-              </a:rPr>
-              <a:t>Teacher API</a:t>
-            </a:r>
-          </a:p>
-        </p:txBody>
-      </p:sp>
-      <p:sp>
-        <p:nvSpPr>
-          <p:cNvPr id="85" name="Oval 84"/>
-          <p:cNvSpPr/>
-          <p:nvPr/>
-        </p:nvSpPr>
-        <p:spPr>
-          <a:xfrm>
-            <a:off x="7543800" y="1188720"/>
-            <a:ext cx="310896" cy="77724"/>
-          </a:xfrm>
-          <a:prstGeom prst="ellipse">
-            <a:avLst/>
-          </a:prstGeom>
-          <a:solidFill>
-            <a:srgbClr val="E8C56A"/>
-          </a:solidFill>
-          <a:ln w="12700">
-            <a:solidFill>
-              <a:srgbClr val="9A7B2E"/>
-            </a:solidFill>
-          </a:ln>
-          <a:effectLst/>
-        </p:spPr>
-        <p:txBody>
-          <a:bodyPr rtlCol="0" anchor="ctr"/>
-          <a:lstStyle/>
-          <a:p>
-            <a:pPr algn="ctr"/>
-          </a:p>
-        </p:txBody>
-      </p:sp>
-      <p:sp>
-        <p:nvSpPr>
-          <p:cNvPr id="86" name="Oval 85"/>
-          <p:cNvSpPr/>
-          <p:nvPr/>
-        </p:nvSpPr>
-        <p:spPr>
-          <a:xfrm>
-            <a:off x="7543800" y="1097280"/>
-            <a:ext cx="310896" cy="77724"/>
-          </a:xfrm>
-          <a:prstGeom prst="ellipse">
-            <a:avLst/>
-          </a:prstGeom>
-          <a:solidFill>
-            <a:srgbClr val="E8C56A"/>
-          </a:solidFill>
-          <a:ln w="12700">
-            <a:solidFill>
-              <a:srgbClr val="9A7B2E"/>
-            </a:solidFill>
-          </a:ln>
-          <a:effectLst/>
-        </p:spPr>
-        <p:txBody>
-          <a:bodyPr rtlCol="0" anchor="ctr"/>
-          <a:lstStyle/>
-          <a:p>
-            <a:pPr algn="ctr"/>
-          </a:p>
-        </p:txBody>
-      </p:sp>
-      <p:sp>
-        <p:nvSpPr>
-          <p:cNvPr id="87" name="Oval 86"/>
-          <p:cNvSpPr/>
-          <p:nvPr/>
-        </p:nvSpPr>
-        <p:spPr>
-          <a:xfrm>
-            <a:off x="7543800" y="1005840"/>
-            <a:ext cx="310896" cy="77724"/>
-          </a:xfrm>
-          <a:prstGeom prst="ellipse">
-            <a:avLst/>
-          </a:prstGeom>
-          <a:solidFill>
-            <a:srgbClr val="E8C56A"/>
-          </a:solidFill>
-          <a:ln w="12700">
-            <a:solidFill>
-              <a:srgbClr val="9A7B2E"/>
-            </a:solidFill>
-          </a:ln>
-          <a:effectLst/>
-        </p:spPr>
-        <p:txBody>
-          <a:bodyPr rtlCol="0" anchor="ctr"/>
-          <a:lstStyle/>
-          <a:p>
-            <a:pPr algn="ctr"/>
-          </a:p>
-        </p:txBody>
-      </p:sp>
-      <p:sp>
-        <p:nvSpPr>
-          <p:cNvPr id="88" name="Oval 87"/>
-          <p:cNvSpPr/>
-          <p:nvPr/>
-        </p:nvSpPr>
-        <p:spPr>
-          <a:xfrm>
-            <a:off x="7543800" y="914400"/>
-            <a:ext cx="310896" cy="77724"/>
-          </a:xfrm>
-          <a:prstGeom prst="ellipse">
-            <a:avLst/>
-          </a:prstGeom>
-          <a:solidFill>
-            <a:srgbClr val="E8C56A"/>
-          </a:solidFill>
-          <a:ln w="12700">
-            <a:solidFill>
-              <a:srgbClr val="9A7B2E"/>
-            </a:solidFill>
-          </a:ln>
-          <a:effectLst/>
-        </p:spPr>
-        <p:txBody>
-          <a:bodyPr rtlCol="0" anchor="ctr"/>
-          <a:lstStyle/>
-          <a:p>
-            <a:pPr algn="ctr"/>
-          </a:p>
-        </p:txBody>
-      </p:sp>
-      <p:sp>
-        <p:nvSpPr>
-          <p:cNvPr id="89" name="TextBox 88"/>
-          <p:cNvSpPr txBox="1"/>
-          <p:nvPr/>
-        </p:nvSpPr>
-        <p:spPr>
-          <a:xfrm>
-            <a:off x="7360920" y="1353312"/>
-            <a:ext cx="822960" cy="274320"/>
-          </a:xfrm>
-          <a:prstGeom prst="rect">
-            <a:avLst/>
-          </a:prstGeom>
-          <a:noFill/>
-        </p:spPr>
-        <p:txBody>
-          <a:bodyPr wrap="square" lIns="0" rIns="0" tIns="0" bIns="0">
-            <a:spAutoFit/>
-          </a:bodyPr>
-          <a:lstStyle/>
-          <a:p>
-            <a:pPr algn="ctr"/>
-            <a:r>
-              <a:rPr sz="1200" b="1" i="1">
-                <a:solidFill>
-                  <a:srgbClr val="1F1F1E"/>
-                </a:solidFill>
-                <a:latin typeface="Times New Roman"/>
-              </a:rPr>
-              <a:t>b</a:t>
-            </a:r>
-          </a:p>
-        </p:txBody>
-      </p:sp>
-      <p:cxnSp>
-        <p:nvCxnSpPr>
-          <p:cNvPr id="90" name="Connector 89"/>
-          <p:cNvCxnSpPr/>
-          <p:nvPr/>
-        </p:nvCxnSpPr>
-        <p:spPr>
-          <a:xfrm>
-            <a:off x="7635240" y="1234440"/>
-            <a:ext cx="502920" cy="0"/>
-          </a:xfrm>
-          <a:prstGeom prst="line">
-            <a:avLst/>
-          </a:prstGeom>
-          <a:ln w="30480">
-            <a:solidFill>
-              <a:srgbClr val="333333"/>
-            </a:solidFill>
-            <a:tailEnd type="triangle" w="med" len="med"/>
-          </a:ln>
-          <a:effectLst/>
-        </p:spPr>
-      </p:cxnSp>
-      <p:cxnSp>
-        <p:nvCxnSpPr>
-          <p:cNvPr id="91" name="Connector 90"/>
-          <p:cNvCxnSpPr/>
-          <p:nvPr/>
-        </p:nvCxnSpPr>
-        <p:spPr>
-          <a:xfrm>
-            <a:off x="8229600" y="1600200"/>
-            <a:ext cx="530352" cy="0"/>
-          </a:xfrm>
-          <a:prstGeom prst="line">
-            <a:avLst/>
-          </a:prstGeom>
-          <a:ln w="17780">
-            <a:solidFill>
-              <a:srgbClr val="555555"/>
-            </a:solidFill>
-          </a:ln>
-          <a:effectLst/>
-        </p:spPr>
-      </p:cxnSp>
-      <p:sp>
-        <p:nvSpPr>
-          <p:cNvPr id="92" name="Rectangle 91"/>
-          <p:cNvSpPr/>
-          <p:nvPr/>
-        </p:nvSpPr>
-        <p:spPr>
-          <a:xfrm>
-            <a:off x="8275320" y="1216152"/>
-            <a:ext cx="118872" cy="384048"/>
-          </a:xfrm>
-          <a:prstGeom prst="rect">
-            <a:avLst/>
-          </a:prstGeom>
-          <a:solidFill>
-            <a:srgbClr val="9EC99A"/>
-          </a:solidFill>
-          <a:ln w="12700">
-            <a:solidFill>
-              <a:srgbClr val="666666"/>
-            </a:solidFill>
-          </a:ln>
-          <a:effectLst/>
-        </p:spPr>
-        <p:txBody>
-          <a:bodyPr rtlCol="0" anchor="ctr"/>
-          <a:lstStyle/>
-          <a:p>
-            <a:pPr algn="ctr"/>
-          </a:p>
-        </p:txBody>
-      </p:sp>
-      <p:sp>
-        <p:nvSpPr>
-          <p:cNvPr id="93" name="Rectangle 92"/>
-          <p:cNvSpPr/>
-          <p:nvPr/>
-        </p:nvSpPr>
-        <p:spPr>
-          <a:xfrm>
-            <a:off x="8435340" y="1417320"/>
-            <a:ext cx="118872" cy="182880"/>
-          </a:xfrm>
-          <a:prstGeom prst="rect">
-            <a:avLst/>
-          </a:prstGeom>
-          <a:solidFill>
-            <a:srgbClr val="9EC99A"/>
-          </a:solidFill>
-          <a:ln w="12700">
-            <a:solidFill>
-              <a:srgbClr val="666666"/>
-            </a:solidFill>
-          </a:ln>
-          <a:effectLst/>
-        </p:spPr>
-        <p:txBody>
-          <a:bodyPr rtlCol="0" anchor="ctr"/>
-          <a:lstStyle/>
-          <a:p>
-            <a:pPr algn="ctr"/>
-          </a:p>
-        </p:txBody>
-      </p:sp>
-      <p:sp>
-        <p:nvSpPr>
-          <p:cNvPr id="94" name="Rectangle 93"/>
-          <p:cNvSpPr/>
-          <p:nvPr/>
-        </p:nvSpPr>
-        <p:spPr>
-          <a:xfrm>
-            <a:off x="8595360" y="1289304"/>
-            <a:ext cx="118872" cy="310896"/>
-          </a:xfrm>
-          <a:prstGeom prst="rect">
-            <a:avLst/>
-          </a:prstGeom>
-          <a:solidFill>
-            <a:srgbClr val="9EC99A"/>
-          </a:solidFill>
-          <a:ln w="12700">
-            <a:solidFill>
-              <a:srgbClr val="666666"/>
-            </a:solidFill>
-          </a:ln>
-          <a:effectLst/>
-        </p:spPr>
-        <p:txBody>
-          <a:bodyPr rtlCol="0" anchor="ctr"/>
-          <a:lstStyle/>
-          <a:p>
-            <a:pPr algn="ctr"/>
-          </a:p>
-        </p:txBody>
-      </p:sp>
-      <p:sp>
-        <p:nvSpPr>
-          <p:cNvPr id="95" name="TextBox 94"/>
-          <p:cNvSpPr txBox="1"/>
-          <p:nvPr/>
-        </p:nvSpPr>
-        <p:spPr>
-          <a:xfrm>
-            <a:off x="8046720" y="1719072"/>
-            <a:ext cx="1371600" cy="274320"/>
-          </a:xfrm>
-          <a:prstGeom prst="rect">
-            <a:avLst/>
-          </a:prstGeom>
-          <a:noFill/>
-        </p:spPr>
-        <p:txBody>
-          <a:bodyPr wrap="square" lIns="0" rIns="0" tIns="0" bIns="0">
-            <a:spAutoFit/>
-          </a:bodyPr>
-          <a:lstStyle/>
-          <a:p>
-            <a:pPr algn="ctr"/>
-            <a:r>
-              <a:rPr sz="1000" b="1" i="1">
-                <a:solidFill>
-                  <a:srgbClr val="1F1F1E"/>
-                </a:solidFill>
-                <a:latin typeface="Times New Roman"/>
-              </a:rPr>
-              <a:t>ŝ(x)  predicted</a:t>
-            </a:r>
-          </a:p>
-        </p:txBody>
-      </p:sp>
-      <p:cxnSp>
-        <p:nvCxnSpPr>
-          <p:cNvPr id="96" name="Connector 95"/>
-          <p:cNvCxnSpPr/>
-          <p:nvPr/>
-        </p:nvCxnSpPr>
-        <p:spPr>
-          <a:xfrm>
-            <a:off x="9601200" y="1600200"/>
-            <a:ext cx="530352" cy="0"/>
-          </a:xfrm>
-          <a:prstGeom prst="line">
-            <a:avLst/>
-          </a:prstGeom>
-          <a:ln w="17780">
-            <a:solidFill>
-              <a:srgbClr val="555555"/>
-            </a:solidFill>
-          </a:ln>
-          <a:effectLst/>
-        </p:spPr>
-      </p:cxnSp>
-      <p:sp>
-        <p:nvSpPr>
-          <p:cNvPr id="97" name="Rectangle 96"/>
-          <p:cNvSpPr/>
-          <p:nvPr/>
-        </p:nvSpPr>
-        <p:spPr>
-          <a:xfrm>
-            <a:off x="9646920" y="1097280"/>
-            <a:ext cx="118872" cy="502920"/>
-          </a:xfrm>
-          <a:prstGeom prst="rect">
-            <a:avLst/>
-          </a:prstGeom>
-          <a:solidFill>
-            <a:srgbClr val="4C72B0"/>
-          </a:solidFill>
-          <a:ln w="12700">
-            <a:solidFill>
-              <a:srgbClr val="666666"/>
-            </a:solidFill>
-          </a:ln>
-          <a:effectLst/>
-        </p:spPr>
-        <p:txBody>
-          <a:bodyPr rtlCol="0" anchor="ctr"/>
-          <a:lstStyle/>
-          <a:p>
-            <a:pPr algn="ctr"/>
-          </a:p>
-        </p:txBody>
-      </p:sp>
-      <p:sp>
-        <p:nvSpPr>
-          <p:cNvPr id="98" name="Rectangle 97"/>
-          <p:cNvSpPr/>
-          <p:nvPr/>
-        </p:nvSpPr>
-        <p:spPr>
-          <a:xfrm>
-            <a:off x="9806940" y="1463040"/>
-            <a:ext cx="118872" cy="137160"/>
-          </a:xfrm>
-          <a:prstGeom prst="rect">
-            <a:avLst/>
-          </a:prstGeom>
-          <a:solidFill>
-            <a:srgbClr val="C9C9C9"/>
-          </a:solidFill>
-          <a:ln w="12700">
-            <a:solidFill>
-              <a:srgbClr val="666666"/>
-            </a:solidFill>
-          </a:ln>
-          <a:effectLst/>
-        </p:spPr>
-        <p:txBody>
-          <a:bodyPr rtlCol="0" anchor="ctr"/>
-          <a:lstStyle/>
-          <a:p>
-            <a:pPr algn="ctr"/>
-          </a:p>
-        </p:txBody>
-      </p:sp>
-      <p:sp>
-        <p:nvSpPr>
-          <p:cNvPr id="99" name="Rectangle 98"/>
-          <p:cNvSpPr/>
-          <p:nvPr/>
-        </p:nvSpPr>
-        <p:spPr>
-          <a:xfrm>
-            <a:off x="9966960" y="1325880"/>
-            <a:ext cx="118872" cy="274320"/>
-          </a:xfrm>
-          <a:prstGeom prst="rect">
-            <a:avLst/>
-          </a:prstGeom>
-          <a:solidFill>
-            <a:srgbClr val="5F9EA0"/>
-          </a:solidFill>
-          <a:ln w="12700">
-            <a:solidFill>
-              <a:srgbClr val="666666"/>
-            </a:solidFill>
-          </a:ln>
-          <a:effectLst/>
-        </p:spPr>
-        <p:txBody>
-          <a:bodyPr rtlCol="0" anchor="ctr"/>
-          <a:lstStyle/>
-          <a:p>
-            <a:pPr algn="ctr"/>
-          </a:p>
-        </p:txBody>
-      </p:sp>
-      <p:sp>
-        <p:nvSpPr>
-          <p:cNvPr id="100" name="TextBox 99"/>
-          <p:cNvSpPr txBox="1"/>
-          <p:nvPr/>
-        </p:nvSpPr>
-        <p:spPr>
-          <a:xfrm>
-            <a:off x="9418320" y="1719072"/>
-            <a:ext cx="1463040" cy="274320"/>
-          </a:xfrm>
-          <a:prstGeom prst="rect">
-            <a:avLst/>
-          </a:prstGeom>
-          <a:noFill/>
-        </p:spPr>
-        <p:txBody>
-          <a:bodyPr wrap="square" lIns="0" rIns="0" tIns="0" bIns="0">
-            <a:spAutoFit/>
-          </a:bodyPr>
-          <a:lstStyle/>
-          <a:p>
-            <a:pPr algn="ctr"/>
-            <a:r>
-              <a:rPr sz="1000" b="1" i="1">
-                <a:solidFill>
-                  <a:srgbClr val="1F1F1E"/>
-                </a:solidFill>
-                <a:latin typeface="Times New Roman"/>
-              </a:rPr>
-              <a:t>r  remaining quota</a:t>
-            </a:r>
-          </a:p>
-        </p:txBody>
-      </p:sp>
-      <p:sp>
-        <p:nvSpPr>
-          <p:cNvPr id="101" name="TextBox 100"/>
-          <p:cNvSpPr txBox="1"/>
-          <p:nvPr/>
-        </p:nvSpPr>
-        <p:spPr>
-          <a:xfrm>
-            <a:off x="10744200" y="960120"/>
-            <a:ext cx="1371600" cy="822960"/>
-          </a:xfrm>
-          <a:prstGeom prst="rect">
-            <a:avLst/>
-          </a:prstGeom>
-          <a:noFill/>
-        </p:spPr>
-        <p:txBody>
-          <a:bodyPr wrap="square" lIns="0" rIns="0" tIns="0" bIns="0">
-            <a:spAutoFit/>
-          </a:bodyPr>
-          <a:lstStyle/>
-          <a:p>
-            <a:pPr algn="ctr"/>
-            <a:r>
-              <a:rPr sz="1300" b="0" i="0">
-                <a:solidFill>
-                  <a:srgbClr val="1F1F1E"/>
-                </a:solidFill>
-                <a:latin typeface="Times New Roman"/>
-              </a:rPr>
               <a:t>u(x) =</a:t>
             </a:r>
           </a:p>
           <a:p>
             <a:pPr algn="ctr"/>
             <a:r>
-              <a:rPr sz="1300" b="0" i="0">
+              <a:rPr sz="1500" b="0" i="0">
                 <a:solidFill>
                   <a:srgbClr val="1F1F1E"/>
                 </a:solidFill>
@@ -6185,7 +6185,7 @@
           <a:p>
             <a:pPr algn="l"/>
             <a:r>
-              <a:rPr sz="1100" b="0" i="0">
+              <a:rPr sz="1400" b="0" i="0">
                 <a:solidFill>
                   <a:srgbClr val="6B6A63"/>
                 </a:solidFill>
@@ -6204,8 +6204,8 @@
         </p:nvSpPr>
         <p:spPr>
           <a:xfrm>
-            <a:off x="9418320" y="2240280"/>
-            <a:ext cx="310896" cy="310896"/>
+            <a:off x="9418320" y="2194560"/>
+            <a:ext cx="402336" cy="402336"/>
           </a:xfrm>
           <a:prstGeom prst="ellipse">
             <a:avLst/>
@@ -6245,8 +6245,8 @@
         </p:nvSpPr>
         <p:spPr>
           <a:xfrm>
-            <a:off x="9829800" y="2240280"/>
-            <a:ext cx="310896" cy="310896"/>
+            <a:off x="9921240" y="2194560"/>
+            <a:ext cx="402336" cy="402336"/>
           </a:xfrm>
           <a:prstGeom prst="ellipse">
             <a:avLst/>
@@ -6286,8 +6286,8 @@
         </p:nvSpPr>
         <p:spPr>
           <a:xfrm>
-            <a:off x="10241280" y="2249424"/>
-            <a:ext cx="1737360" cy="292608"/>
+            <a:off x="10241280" y="2212848"/>
+            <a:ext cx="1828800" cy="329184"/>
           </a:xfrm>
           <a:prstGeom prst="rect">
             <a:avLst/>
@@ -6302,7 +6302,7 @@
           <a:p>
             <a:pPr algn="l"/>
             <a:r>
-              <a:rPr sz="1100" b="0" i="0">
+              <a:rPr sz="1400" b="0" i="0">
                 <a:solidFill>
                   <a:srgbClr val="6B6A63"/>
                 </a:solidFill>
@@ -6322,7 +6322,7 @@
         <p:spPr>
           <a:xfrm>
             <a:off x="6629400" y="3547872"/>
-            <a:ext cx="530352" cy="0"/>
+            <a:ext cx="658368" cy="0"/>
           </a:xfrm>
           <a:prstGeom prst="line">
             <a:avLst/>
@@ -6344,7 +6344,7 @@
         <p:spPr>
           <a:xfrm>
             <a:off x="6629400" y="3401568"/>
-            <a:ext cx="530352" cy="0"/>
+            <a:ext cx="658368" cy="0"/>
           </a:xfrm>
           <a:prstGeom prst="line">
             <a:avLst/>
@@ -6366,7 +6366,7 @@
         <p:spPr>
           <a:xfrm>
             <a:off x="6629400" y="3255264"/>
-            <a:ext cx="530352" cy="0"/>
+            <a:ext cx="658368" cy="0"/>
           </a:xfrm>
           <a:prstGeom prst="line">
             <a:avLst/>
@@ -6388,7 +6388,7 @@
         <p:spPr>
           <a:xfrm>
             <a:off x="6629400" y="3108960"/>
-            <a:ext cx="530352" cy="0"/>
+            <a:ext cx="658368" cy="0"/>
           </a:xfrm>
           <a:prstGeom prst="line">
             <a:avLst/>
@@ -6410,7 +6410,7 @@
         <p:spPr>
           <a:xfrm>
             <a:off x="6629400" y="3566160"/>
-            <a:ext cx="530351" cy="0"/>
+            <a:ext cx="658368" cy="0"/>
           </a:xfrm>
           <a:prstGeom prst="line">
             <a:avLst/>
@@ -6432,7 +6432,7 @@
         <p:spPr>
           <a:xfrm>
             <a:off x="6675120" y="2999232"/>
-            <a:ext cx="118872" cy="566928"/>
+            <a:ext cx="155448" cy="566928"/>
           </a:xfrm>
           <a:prstGeom prst="rect">
             <a:avLst/>
@@ -6463,8 +6463,8 @@
         </p:nvSpPr>
         <p:spPr>
           <a:xfrm>
-            <a:off x="6835140" y="3200400"/>
-            <a:ext cx="118872" cy="365760"/>
+            <a:off x="6880859" y="3200400"/>
+            <a:ext cx="155448" cy="365760"/>
           </a:xfrm>
           <a:prstGeom prst="rect">
             <a:avLst/>
@@ -6495,8 +6495,8 @@
         </p:nvSpPr>
         <p:spPr>
           <a:xfrm>
-            <a:off x="6995159" y="3328415"/>
-            <a:ext cx="118872" cy="237744"/>
+            <a:off x="7086600" y="3328415"/>
+            <a:ext cx="155448" cy="237744"/>
           </a:xfrm>
           <a:prstGeom prst="rect">
             <a:avLst/>
@@ -6551,7 +6551,7 @@
         <p:spPr>
           <a:xfrm>
             <a:off x="8412480" y="3547872"/>
-            <a:ext cx="530352" cy="0"/>
+            <a:ext cx="658368" cy="0"/>
           </a:xfrm>
           <a:prstGeom prst="line">
             <a:avLst/>
@@ -6573,7 +6573,7 @@
         <p:spPr>
           <a:xfrm>
             <a:off x="8412480" y="3401568"/>
-            <a:ext cx="530352" cy="0"/>
+            <a:ext cx="658368" cy="0"/>
           </a:xfrm>
           <a:prstGeom prst="line">
             <a:avLst/>
@@ -6595,7 +6595,7 @@
         <p:spPr>
           <a:xfrm>
             <a:off x="8412480" y="3255264"/>
-            <a:ext cx="530352" cy="0"/>
+            <a:ext cx="658368" cy="0"/>
           </a:xfrm>
           <a:prstGeom prst="line">
             <a:avLst/>
@@ -6617,7 +6617,7 @@
         <p:spPr>
           <a:xfrm>
             <a:off x="8412480" y="3108960"/>
-            <a:ext cx="530352" cy="0"/>
+            <a:ext cx="658368" cy="0"/>
           </a:xfrm>
           <a:prstGeom prst="line">
             <a:avLst/>
@@ -6639,7 +6639,7 @@
         <p:spPr>
           <a:xfrm>
             <a:off x="8412480" y="3566160"/>
-            <a:ext cx="530352" cy="0"/>
+            <a:ext cx="658368" cy="0"/>
           </a:xfrm>
           <a:prstGeom prst="line">
             <a:avLst/>
@@ -6661,7 +6661,7 @@
         <p:spPr>
           <a:xfrm>
             <a:off x="8458200" y="3419856"/>
-            <a:ext cx="118872" cy="146304"/>
+            <a:ext cx="155448" cy="146304"/>
           </a:xfrm>
           <a:prstGeom prst="rect">
             <a:avLst/>
@@ -6692,8 +6692,8 @@
         </p:nvSpPr>
         <p:spPr>
           <a:xfrm>
-            <a:off x="8618220" y="3474720"/>
-            <a:ext cx="118872" cy="91440"/>
+            <a:off x="8663940" y="3474720"/>
+            <a:ext cx="155448" cy="91440"/>
           </a:xfrm>
           <a:prstGeom prst="rect">
             <a:avLst/>
@@ -6724,8 +6724,8 @@
         </p:nvSpPr>
         <p:spPr>
           <a:xfrm>
-            <a:off x="8778240" y="3511296"/>
-            <a:ext cx="118872" cy="54864"/>
+            <a:off x="8869680" y="3511296"/>
+            <a:ext cx="155448" cy="54864"/>
           </a:xfrm>
           <a:prstGeom prst="rect">
             <a:avLst/>
@@ -6756,8 +6756,8 @@
         </p:nvSpPr>
         <p:spPr>
           <a:xfrm>
-            <a:off x="6492240" y="3657600"/>
-            <a:ext cx="3017520" cy="274320"/>
+            <a:off x="6355080" y="3675887"/>
+            <a:ext cx="3474720" cy="274320"/>
           </a:xfrm>
           <a:prstGeom prst="rect">
             <a:avLst/>
@@ -6772,7 +6772,7 @@
           <a:p>
             <a:pPr algn="ctr"/>
             <a:r>
-              <a:rPr sz="1000" b="1" i="1">
+              <a:rPr sz="1250" b="1" i="1">
                 <a:solidFill>
                   <a:srgbClr val="1F1F1E"/>
                 </a:solidFill>
@@ -6807,7 +6807,7 @@
           <a:p>
             <a:pPr algn="l"/>
             <a:r>
-              <a:rPr sz="1400" b="1" i="1">
+              <a:rPr sz="1900" b="1" i="1">
                 <a:solidFill>
                   <a:srgbClr val="1F1F1E"/>
                 </a:solidFill>
@@ -7114,8 +7114,8 @@
         </p:nvSpPr>
         <p:spPr>
           <a:xfrm>
-            <a:off x="6217920" y="5897880"/>
-            <a:ext cx="1463040" cy="274320"/>
+            <a:off x="6126480" y="5943600"/>
+            <a:ext cx="2011680" cy="274320"/>
           </a:xfrm>
           <a:prstGeom prst="rect">
             <a:avLst/>
@@ -7130,7 +7130,7 @@
           <a:p>
             <a:pPr algn="ctr"/>
             <a:r>
-              <a:rPr sz="950" b="1" i="1">
+              <a:rPr sz="1200" b="1" i="1">
                 <a:solidFill>
                   <a:srgbClr val="1F1F1E"/>
                 </a:solidFill>
@@ -7357,8 +7357,8 @@
         </p:nvSpPr>
         <p:spPr>
           <a:xfrm>
-            <a:off x="7818120" y="5760720"/>
-            <a:ext cx="2011680" cy="274320"/>
+            <a:off x="7726679" y="5833872"/>
+            <a:ext cx="2286000" cy="274320"/>
           </a:xfrm>
           <a:prstGeom prst="rect">
             <a:avLst/>
@@ -7373,7 +7373,7 @@
           <a:p>
             <a:pPr algn="ctr"/>
             <a:r>
-              <a:rPr sz="950" b="1" i="1">
+              <a:rPr sz="1200" b="1" i="1">
                 <a:solidFill>
                   <a:srgbClr val="1F1F1E"/>
                 </a:solidFill>
@@ -7392,8 +7392,8 @@
         </p:nvSpPr>
         <p:spPr>
           <a:xfrm>
-            <a:off x="10104120" y="4480560"/>
-            <a:ext cx="1691640" cy="960120"/>
+            <a:off x="9966960" y="4462272"/>
+            <a:ext cx="2029968" cy="1005840"/>
           </a:xfrm>
           <a:prstGeom prst="roundRect">
             <a:avLst>
@@ -7426,8 +7426,8 @@
         </p:nvSpPr>
         <p:spPr>
           <a:xfrm>
-            <a:off x="10241280" y="4617720"/>
-            <a:ext cx="502920" cy="502920"/>
+            <a:off x="10195560" y="4572000"/>
+            <a:ext cx="603504" cy="603504"/>
           </a:xfrm>
           <a:prstGeom prst="ellipse">
             <a:avLst/>
@@ -7467,8 +7467,8 @@
         </p:nvSpPr>
         <p:spPr>
           <a:xfrm>
-            <a:off x="10789920" y="4590288"/>
-            <a:ext cx="960120" cy="640080"/>
+            <a:off x="10835640" y="4626864"/>
+            <a:ext cx="1188720" cy="640080"/>
           </a:xfrm>
           <a:prstGeom prst="rect">
             <a:avLst/>
@@ -7483,7 +7483,7 @@
           <a:p>
             <a:pPr algn="l"/>
             <a:r>
-              <a:rPr sz="1000" b="0" i="0">
+              <a:rPr sz="1250" b="0" i="0">
                 <a:solidFill>
                   <a:srgbClr val="1F1F1E"/>
                 </a:solidFill>
@@ -7495,7 +7495,7 @@
           <a:p>
             <a:pPr algn="l"/>
             <a:r>
-              <a:rPr sz="1000" b="0" i="0">
+              <a:rPr sz="1250" b="0" i="0">
                 <a:solidFill>
                   <a:srgbClr val="1F1F1E"/>
                 </a:solidFill>
@@ -7514,7 +7514,7 @@
         </p:nvSpPr>
         <p:spPr>
           <a:xfrm>
-            <a:off x="10058400" y="5504688"/>
+            <a:off x="10058400" y="5541264"/>
             <a:ext cx="1828800" cy="274320"/>
           </a:xfrm>
           <a:prstGeom prst="rect">
@@ -7530,7 +7530,7 @@
           <a:p>
             <a:pPr algn="ctr"/>
             <a:r>
-              <a:rPr sz="1100" b="1" i="1">
+              <a:rPr sz="1400" b="1" i="1">
                 <a:solidFill>
                   <a:srgbClr val="1F1F1E"/>
                 </a:solidFill>
@@ -7565,7 +7565,7 @@
           <a:p>
             <a:pPr algn="ctr"/>
             <a:r>
-              <a:rPr sz="1000" b="0" i="0">
+              <a:rPr sz="1300" b="0" i="0">
                 <a:solidFill>
                   <a:srgbClr val="6B6A63"/>
                 </a:solidFill>

--- a/paper/figs/fig1_pipeline.pptx
+++ b/paper/figs/fig1_pipeline.pptx
@@ -3196,7 +3196,7 @@
           <a:p>
             <a:pPr algn="ctr"/>
             <a:r>
-              <a:rPr sz="1600" b="1" i="0">
+              <a:rPr sz="1950" b="1" i="0">
                 <a:solidFill>
                   <a:srgbClr val="FFFFFF"/>
                 </a:solidFill>
@@ -3231,7 +3231,7 @@
           <a:p>
             <a:pPr algn="l"/>
             <a:r>
-              <a:rPr sz="1800" b="1" i="1">
+              <a:rPr sz="2200" b="1" i="1">
                 <a:solidFill>
                   <a:srgbClr val="111111"/>
                 </a:solidFill>
@@ -3442,8 +3442,8 @@
         </p:nvSpPr>
         <p:spPr>
           <a:xfrm>
-            <a:off x="274320" y="2084831"/>
-            <a:ext cx="1828800" cy="292608"/>
+            <a:off x="182880" y="2103120"/>
+            <a:ext cx="2103120" cy="292608"/>
           </a:xfrm>
           <a:prstGeom prst="rect">
             <a:avLst/>
@@ -3458,13 +3458,13 @@
           <a:p>
             <a:pPr algn="ctr"/>
             <a:r>
-              <a:rPr sz="1200" b="1" i="1">
+              <a:rPr sz="1460" b="1" i="1">
                 <a:solidFill>
                   <a:srgbClr val="111111"/>
                 </a:solidFill>
                 <a:latin typeface="Times New Roman"/>
               </a:rPr>
-              <a:t>Support Set S (k queries)</a:t>
+              <a:t>Support Set S</a:t>
             </a:r>
           </a:p>
         </p:txBody>
@@ -3516,7 +3516,7 @@
           <a:p>
             <a:pPr algn="ctr"/>
             <a:r>
-              <a:rPr sz="2000" b="1" i="0">
+              <a:rPr sz="2440" b="1" i="0">
                 <a:solidFill>
                   <a:srgbClr val="111111"/>
                 </a:solidFill>
@@ -3737,7 +3737,7 @@
           <a:p>
             <a:pPr algn="ctr"/>
             <a:r>
-              <a:rPr sz="1300" b="1" i="0">
+              <a:rPr sz="1590" b="1" i="0">
                 <a:solidFill>
                   <a:srgbClr val="1F1F1E"/>
                 </a:solidFill>
@@ -4033,7 +4033,7 @@
           <a:p>
             <a:pPr algn="ctr"/>
             <a:r>
-              <a:rPr sz="1200" b="1" i="1">
+              <a:rPr sz="1460" b="1" i="1">
                 <a:solidFill>
                   <a:srgbClr val="111111"/>
                 </a:solidFill>
@@ -4076,7 +4076,7 @@
           <a:p>
             <a:pPr algn="ctr"/>
             <a:r>
-              <a:rPr sz="1700" b="1" i="0">
+              <a:rPr sz="2070" b="1" i="0">
                 <a:solidFill>
                   <a:srgbClr val="111111"/>
                 </a:solidFill>
@@ -4111,7 +4111,7 @@
           <a:p>
             <a:pPr algn="ctr"/>
             <a:r>
-              <a:rPr sz="1200" b="1" i="1">
+              <a:rPr sz="1460" b="1" i="1">
                 <a:solidFill>
                   <a:srgbClr val="111111"/>
                 </a:solidFill>
@@ -4203,7 +4203,7 @@
           <a:p>
             <a:pPr algn="ctr"/>
             <a:r>
-              <a:rPr sz="1050" b="1" i="1">
+              <a:rPr sz="1280" b="1" i="1">
                 <a:solidFill>
                   <a:srgbClr val="111111"/>
                 </a:solidFill>
@@ -4272,7 +4272,7 @@
           <a:p>
             <a:pPr algn="ctr"/>
             <a:r>
-              <a:rPr sz="1050" b="1" i="1">
+              <a:rPr sz="1280" b="1" i="1">
                 <a:solidFill>
                   <a:srgbClr val="111111"/>
                 </a:solidFill>
@@ -4341,7 +4341,7 @@
           <a:p>
             <a:pPr algn="ctr"/>
             <a:r>
-              <a:rPr sz="1050" b="1" i="1">
+              <a:rPr sz="1280" b="1" i="1">
                 <a:solidFill>
                   <a:srgbClr val="111111"/>
                 </a:solidFill>
@@ -4410,7 +4410,7 @@
           <a:p>
             <a:pPr algn="ctr"/>
             <a:r>
-              <a:rPr sz="1050" b="1" i="1">
+              <a:rPr sz="1280" b="1" i="1">
                 <a:solidFill>
                   <a:srgbClr val="111111"/>
                 </a:solidFill>
@@ -4479,7 +4479,7 @@
           <a:p>
             <a:pPr algn="ctr"/>
             <a:r>
-              <a:rPr sz="1050" b="1" i="1">
+              <a:rPr sz="1280" b="1" i="1">
                 <a:solidFill>
                   <a:srgbClr val="111111"/>
                 </a:solidFill>
@@ -4514,7 +4514,7 @@
           <a:p>
             <a:pPr algn="ctr"/>
             <a:r>
-              <a:rPr sz="1300" b="1" i="1">
+              <a:rPr sz="1590" b="1" i="1">
                 <a:solidFill>
                   <a:srgbClr val="111111"/>
                 </a:solidFill>
@@ -4810,7 +4810,7 @@
           <a:p>
             <a:pPr algn="ctr"/>
             <a:r>
-              <a:rPr sz="1300" b="1" i="1">
+              <a:rPr sz="1590" b="1" i="1">
                 <a:solidFill>
                   <a:srgbClr val="111111"/>
                 </a:solidFill>
@@ -4853,7 +4853,7 @@
           <a:p>
             <a:pPr algn="ctr"/>
             <a:r>
-              <a:rPr sz="1600" b="1" i="0">
+              <a:rPr sz="1950" b="1" i="0">
                 <a:solidFill>
                   <a:srgbClr val="111111"/>
                 </a:solidFill>
@@ -5018,7 +5018,7 @@
           <a:p>
             <a:pPr algn="l"/>
             <a:r>
-              <a:rPr sz="1300" b="1" i="1">
+              <a:rPr sz="1590" b="1" i="1">
                 <a:solidFill>
                   <a:srgbClr val="111111"/>
                 </a:solidFill>
@@ -5171,7 +5171,7 @@
           <a:p>
             <a:pPr algn="ctr"/>
             <a:r>
-              <a:rPr sz="1100" b="1" i="1">
+              <a:rPr sz="1340" b="1" i="1">
                 <a:solidFill>
                   <a:srgbClr val="111111"/>
                 </a:solidFill>
@@ -5551,7 +5551,7 @@
           <a:p>
             <a:pPr algn="ctr"/>
             <a:r>
-              <a:rPr sz="1100" b="1" i="1">
+              <a:rPr sz="1340" b="1" i="1">
                 <a:solidFill>
                   <a:srgbClr val="111111"/>
                 </a:solidFill>
@@ -5727,7 +5727,7 @@
           <a:p>
             <a:pPr algn="ctr"/>
             <a:r>
-              <a:rPr sz="1100" b="1" i="1">
+              <a:rPr sz="1340" b="1" i="1">
                 <a:solidFill>
                   <a:srgbClr val="111111"/>
                 </a:solidFill>
@@ -5762,7 +5762,7 @@
           <a:p>
             <a:pPr algn="ctr"/>
             <a:r>
-              <a:rPr sz="1050" b="1" i="1">
+              <a:rPr sz="1280" b="1" i="1">
                 <a:solidFill>
                   <a:srgbClr val="111111"/>
                 </a:solidFill>
@@ -5774,7 +5774,7 @@
           <a:p>
             <a:pPr algn="ctr"/>
             <a:r>
-              <a:rPr sz="1050" b="1" i="1">
+              <a:rPr sz="1280" b="1" i="1">
                 <a:solidFill>
                   <a:srgbClr val="111111"/>
                 </a:solidFill>
@@ -5813,7 +5813,7 @@
           <a:p>
             <a:pPr algn="ctr"/>
             <a:r>
-              <a:rPr sz="1600" b="1" i="0">
+              <a:rPr sz="1950" b="1" i="0">
                 <a:solidFill>
                   <a:srgbClr val="FFFFFF"/>
                 </a:solidFill>
@@ -5848,7 +5848,7 @@
           <a:p>
             <a:pPr algn="l"/>
             <a:r>
-              <a:rPr sz="1800" b="1" i="1">
+              <a:rPr sz="2200" b="1" i="1">
                 <a:solidFill>
                   <a:srgbClr val="111111"/>
                 </a:solidFill>
@@ -6069,7 +6069,7 @@
           <a:p>
             <a:pPr algn="ctr"/>
             <a:r>
-              <a:rPr sz="1300" b="1" i="0">
+              <a:rPr sz="1590" b="1" i="0">
                 <a:solidFill>
                   <a:srgbClr val="1F1F1E"/>
                 </a:solidFill>
@@ -6232,7 +6232,7 @@
           <a:p>
             <a:pPr algn="ctr"/>
             <a:r>
-              <a:rPr sz="1500" b="1" i="1">
+              <a:rPr sz="1830" b="1" i="1">
                 <a:solidFill>
                   <a:srgbClr val="111111"/>
                 </a:solidFill>
@@ -6414,7 +6414,7 @@
           <a:p>
             <a:pPr algn="ctr"/>
             <a:r>
-              <a:rPr sz="1150" b="1" i="1">
+              <a:rPr sz="1400" b="1" i="1">
                 <a:solidFill>
                   <a:srgbClr val="111111"/>
                 </a:solidFill>
@@ -6590,7 +6590,7 @@
           <a:p>
             <a:pPr algn="ctr"/>
             <a:r>
-              <a:rPr sz="1150" b="1" i="1">
+              <a:rPr sz="1400" b="1" i="1">
                 <a:solidFill>
                   <a:srgbClr val="111111"/>
                 </a:solidFill>
@@ -6632,7 +6632,7 @@
         </p:nvCxnSpPr>
         <p:spPr>
           <a:xfrm>
-            <a:off x="11109959" y="1645920"/>
+            <a:off x="11036807" y="1645920"/>
             <a:ext cx="658369" cy="0"/>
           </a:xfrm>
           <a:prstGeom prst="line">
@@ -6654,7 +6654,7 @@
         </p:nvSpPr>
         <p:spPr>
           <a:xfrm>
-            <a:off x="11155680" y="1143000"/>
+            <a:off x="11082528" y="1143000"/>
             <a:ext cx="155448" cy="502920"/>
           </a:xfrm>
           <a:prstGeom prst="rect">
@@ -6686,7 +6686,7 @@
         </p:nvSpPr>
         <p:spPr>
           <a:xfrm>
-            <a:off x="11361419" y="1508760"/>
+            <a:off x="11288267" y="1508760"/>
             <a:ext cx="155448" cy="137160"/>
           </a:xfrm>
           <a:prstGeom prst="rect">
@@ -6718,7 +6718,7 @@
         </p:nvSpPr>
         <p:spPr>
           <a:xfrm>
-            <a:off x="11567159" y="1371600"/>
+            <a:off x="11494007" y="1371600"/>
             <a:ext cx="155448" cy="274320"/>
           </a:xfrm>
           <a:prstGeom prst="rect">
@@ -6750,8 +6750,8 @@
         </p:nvSpPr>
         <p:spPr>
           <a:xfrm>
-            <a:off x="10927080" y="1828800"/>
-            <a:ext cx="1463040" cy="292608"/>
+            <a:off x="10835640" y="1828800"/>
+            <a:ext cx="1371600" cy="292608"/>
           </a:xfrm>
           <a:prstGeom prst="rect">
             <a:avLst/>
@@ -6766,7 +6766,7 @@
           <a:p>
             <a:pPr algn="ctr"/>
             <a:r>
-              <a:rPr sz="1150" b="1" i="1">
+              <a:rPr sz="1350" b="1" i="1">
                 <a:solidFill>
                   <a:srgbClr val="111111"/>
                 </a:solidFill>
@@ -6809,7 +6809,7 @@
           <a:p>
             <a:pPr algn="ctr"/>
             <a:r>
-              <a:rPr sz="1600" b="1" i="0">
+              <a:rPr sz="1950" b="1" i="0">
                 <a:solidFill>
                   <a:srgbClr val="111111"/>
                 </a:solidFill>
@@ -6911,7 +6911,7 @@
           <a:p>
             <a:pPr algn="ctr"/>
             <a:r>
-              <a:rPr sz="1150" b="1" i="1">
+              <a:rPr sz="1400" b="1" i="1">
                 <a:solidFill>
                   <a:srgbClr val="111111"/>
                 </a:solidFill>
@@ -6946,13 +6946,13 @@
           <a:p>
             <a:pPr algn="l"/>
             <a:r>
-              <a:rPr sz="1300" b="1" i="0">
+              <a:rPr sz="1500" b="1" i="0">
                 <a:solidFill>
                   <a:srgbClr val="111111"/>
                 </a:solidFill>
                 <a:latin typeface="Times New Roman"/>
               </a:rPr>
-              <a:t>returns → execution ✓ + prompt gate</a:t>
+              <a:t>returns → exec ✓ + gate</a:t>
             </a:r>
           </a:p>
         </p:txBody>
@@ -6987,7 +6987,7 @@
           <a:p>
             <a:pPr algn="ctr"/>
             <a:r>
-              <a:rPr sz="1500" b="1" i="0">
+              <a:rPr sz="1830" b="1" i="0">
                 <a:solidFill>
                   <a:srgbClr val="FFFFFF"/>
                 </a:solidFill>
@@ -7028,7 +7028,7 @@
           <a:p>
             <a:pPr algn="ctr"/>
             <a:r>
-              <a:rPr sz="1500" b="1" i="0">
+              <a:rPr sz="1830" b="1" i="0">
                 <a:solidFill>
                   <a:srgbClr val="FFFFFF"/>
                 </a:solidFill>
@@ -7063,7 +7063,7 @@
           <a:p>
             <a:pPr algn="l"/>
             <a:r>
-              <a:rPr sz="1300" b="1" i="0">
+              <a:rPr sz="1590" b="1" i="0">
                 <a:solidFill>
                   <a:srgbClr val="111111"/>
                 </a:solidFill>
@@ -7533,7 +7533,7 @@
           <a:p>
             <a:pPr algn="ctr"/>
             <a:r>
-              <a:rPr sz="1200" b="1" i="1">
+              <a:rPr sz="1460" b="1" i="1">
                 <a:solidFill>
                   <a:srgbClr val="111111"/>
                 </a:solidFill>
@@ -7568,7 +7568,7 @@
           <a:p>
             <a:pPr algn="ctr"/>
             <a:r>
-              <a:rPr sz="1200" b="1" i="1">
+              <a:rPr sz="1460" b="1" i="1">
                 <a:solidFill>
                   <a:srgbClr val="111111"/>
                 </a:solidFill>
@@ -7607,7 +7607,7 @@
           <a:p>
             <a:pPr algn="ctr"/>
             <a:r>
-              <a:rPr sz="1600" b="1" i="0">
+              <a:rPr sz="1950" b="1" i="0">
                 <a:solidFill>
                   <a:srgbClr val="FFFFFF"/>
                 </a:solidFill>
@@ -7626,8 +7626,8 @@
         </p:nvSpPr>
         <p:spPr>
           <a:xfrm>
-            <a:off x="6629400" y="4206240"/>
-            <a:ext cx="3291840" cy="292608"/>
+            <a:off x="6601968" y="4224528"/>
+            <a:ext cx="2926080" cy="292608"/>
           </a:xfrm>
           <a:prstGeom prst="rect">
             <a:avLst/>
@@ -7642,13 +7642,13 @@
           <a:p>
             <a:pPr algn="l"/>
             <a:r>
-              <a:rPr sz="1700" b="1" i="1">
+              <a:rPr sz="1900" b="1" i="1">
                 <a:solidFill>
                   <a:srgbClr val="111111"/>
                 </a:solidFill>
                 <a:latin typeface="Times New Roman"/>
               </a:rPr>
-              <a:t>Demand-weighted distillation</a:t>
+              <a:t>Weighted distillation</a:t>
             </a:r>
           </a:p>
         </p:txBody>
@@ -7661,7 +7661,7 @@
         </p:nvSpPr>
         <p:spPr>
           <a:xfrm>
-            <a:off x="9646920" y="4169663"/>
+            <a:off x="9528048" y="4169663"/>
             <a:ext cx="365760" cy="365760"/>
           </a:xfrm>
           <a:prstGeom prst="ellipse">
@@ -7681,7 +7681,7 @@
           <a:p>
             <a:pPr algn="ctr"/>
             <a:r>
-              <a:rPr sz="1600" b="1" i="0">
+              <a:rPr sz="1950" b="1" i="0">
                 <a:solidFill>
                   <a:srgbClr val="FFFFFF"/>
                 </a:solidFill>
@@ -7700,8 +7700,8 @@
         </p:nvSpPr>
         <p:spPr>
           <a:xfrm>
-            <a:off x="10104120" y="4206240"/>
-            <a:ext cx="2011680" cy="292608"/>
+            <a:off x="9985248" y="4224528"/>
+            <a:ext cx="2103120" cy="292608"/>
           </a:xfrm>
           <a:prstGeom prst="rect">
             <a:avLst/>
@@ -7716,7 +7716,7 @@
           <a:p>
             <a:pPr algn="l"/>
             <a:r>
-              <a:rPr sz="1700" b="1" i="1">
+              <a:rPr sz="1900" b="1" i="1">
                 <a:solidFill>
                   <a:srgbClr val="111111"/>
                 </a:solidFill>
@@ -8039,7 +8039,7 @@
           <a:p>
             <a:pPr algn="ctr"/>
             <a:r>
-              <a:rPr sz="1150" b="1" i="1">
+              <a:rPr sz="1400" b="1" i="1">
                 <a:solidFill>
                   <a:srgbClr val="111111"/>
                 </a:solidFill>
@@ -8283,7 +8283,7 @@
           <a:p>
             <a:pPr algn="ctr"/>
             <a:r>
-              <a:rPr sz="1200" b="1" i="0">
+              <a:rPr sz="1460" b="1" i="0">
                 <a:solidFill>
                   <a:srgbClr val="1F1F1E"/>
                 </a:solidFill>
@@ -8504,7 +8504,7 @@
           <a:p>
             <a:pPr algn="ctr"/>
             <a:r>
-              <a:rPr sz="1100" b="1" i="1">
+              <a:rPr sz="1340" b="1" i="1">
                 <a:solidFill>
                   <a:srgbClr val="111111"/>
                 </a:solidFill>
@@ -8579,7 +8579,7 @@
           <a:p>
             <a:pPr algn="ctr"/>
             <a:r>
-              <a:rPr sz="1800" b="1" i="0">
+              <a:rPr sz="2200" b="1" i="0">
                 <a:solidFill>
                   <a:srgbClr val="FFFFFF"/>
                 </a:solidFill>
@@ -8614,7 +8614,7 @@
           <a:p>
             <a:pPr algn="l"/>
             <a:r>
-              <a:rPr sz="1300" b="1" i="0">
+              <a:rPr sz="1590" b="1" i="0">
                 <a:solidFill>
                   <a:srgbClr val="111111"/>
                 </a:solidFill>
@@ -8626,7 +8626,7 @@
           <a:p>
             <a:pPr algn="l"/>
             <a:r>
-              <a:rPr sz="1300" b="1" i="0">
+              <a:rPr sz="1590" b="1" i="0">
                 <a:solidFill>
                   <a:srgbClr val="111111"/>
                 </a:solidFill>
@@ -8661,7 +8661,7 @@
           <a:p>
             <a:pPr algn="ctr"/>
             <a:r>
-              <a:rPr sz="1300" b="1" i="1">
+              <a:rPr sz="1590" b="1" i="1">
                 <a:solidFill>
                   <a:srgbClr val="111111"/>
                 </a:solidFill>
@@ -8728,7 +8728,7 @@
           <a:p>
             <a:pPr algn="l"/>
             <a:r>
-              <a:rPr sz="1200" b="1" i="0">
+              <a:rPr sz="1460" b="1" i="0">
                 <a:solidFill>
                   <a:srgbClr val="3E7A3A"/>
                 </a:solidFill>
@@ -8763,7 +8763,7 @@
           <a:p>
             <a:pPr algn="l"/>
             <a:r>
-              <a:rPr sz="1200" b="1" i="0">
+              <a:rPr sz="1460" b="1" i="0">
                 <a:solidFill>
                   <a:srgbClr val="8A5AA8"/>
                 </a:solidFill>

--- a/paper/figs/fig1_pipeline.pptx
+++ b/paper/figs/fig1_pipeline.pptx
@@ -4209,7 +4209,7 @@
                 </a:solidFill>
                 <a:latin typeface="Times New Roman"/>
               </a:rPr>
-              <a:t>JOIN</a:t>
+              <a:t>a₁</a:t>
             </a:r>
           </a:p>
         </p:txBody>
@@ -4278,7 +4278,7 @@
                 </a:solidFill>
                 <a:latin typeface="Times New Roman"/>
               </a:rPr>
-              <a:t>AGG</a:t>
+              <a:t>a₂</a:t>
             </a:r>
           </a:p>
         </p:txBody>
@@ -4347,7 +4347,7 @@
                 </a:solidFill>
                 <a:latin typeface="Times New Roman"/>
               </a:rPr>
-              <a:t>LOOP</a:t>
+              <a:t>a₃</a:t>
             </a:r>
           </a:p>
         </p:txBody>
@@ -4416,7 +4416,7 @@
                 </a:solidFill>
                 <a:latin typeface="Times New Roman"/>
               </a:rPr>
-              <a:t>PLOT</a:t>
+              <a:t>a₄</a:t>
             </a:r>
           </a:p>
         </p:txBody>
@@ -4485,7 +4485,7 @@
                 </a:solidFill>
                 <a:latin typeface="Times New Roman"/>
               </a:rPr>
-              <a:t>REGEX</a:t>
+              <a:t>a₅</a:t>
             </a:r>
           </a:p>
         </p:txBody>

--- a/paper/figs/fig1_pipeline.pptx
+++ b/paper/figs/fig1_pipeline.pptx
@@ -3177,7 +3177,7 @@
         <p:spPr>
           <a:xfrm>
             <a:off x="292608" y="237744"/>
-            <a:ext cx="365760" cy="365760"/>
+            <a:ext cx="457200" cy="457200"/>
           </a:xfrm>
           <a:prstGeom prst="ellipse">
             <a:avLst/>
@@ -3196,7 +3196,7 @@
           <a:p>
             <a:pPr algn="ctr"/>
             <a:r>
-              <a:rPr sz="1950" b="1" i="0">
+              <a:rPr sz="2200" b="1" i="0">
                 <a:solidFill>
                   <a:srgbClr val="FFFFFF"/>
                 </a:solidFill>
@@ -3215,7 +3215,7 @@
         </p:nvSpPr>
         <p:spPr>
           <a:xfrm>
-            <a:off x="749808" y="274320"/>
+            <a:off x="868680" y="292608"/>
             <a:ext cx="4937760" cy="292608"/>
           </a:xfrm>
           <a:prstGeom prst="rect">
@@ -3231,7 +3231,7 @@
           <a:p>
             <a:pPr algn="l"/>
             <a:r>
-              <a:rPr sz="2200" b="1" i="1">
+              <a:rPr sz="2000" b="1" i="1">
                 <a:solidFill>
                   <a:srgbClr val="111111"/>
                 </a:solidFill>
@@ -3251,7 +3251,7 @@
         <p:spPr>
           <a:xfrm>
             <a:off x="457200" y="841248"/>
-            <a:ext cx="914400" cy="1097280"/>
+            <a:ext cx="1078992" cy="1280160"/>
           </a:xfrm>
           <a:prstGeom prst="roundRect">
             <a:avLst>
@@ -3285,7 +3285,7 @@
         <p:spPr>
           <a:xfrm>
             <a:off x="621792" y="907084"/>
-            <a:ext cx="914400" cy="1097280"/>
+            <a:ext cx="1078992" cy="1280160"/>
           </a:xfrm>
           <a:prstGeom prst="roundRect">
             <a:avLst>
@@ -3319,7 +3319,7 @@
         <p:spPr>
           <a:xfrm>
             <a:off x="786384" y="972921"/>
-            <a:ext cx="914400" cy="1097280"/>
+            <a:ext cx="1078992" cy="1280160"/>
           </a:xfrm>
           <a:prstGeom prst="roundRect">
             <a:avLst>
@@ -3352,8 +3352,8 @@
         </p:nvSpPr>
         <p:spPr>
           <a:xfrm>
-            <a:off x="914400" y="1225296"/>
-            <a:ext cx="566928" cy="50292"/>
+            <a:off x="932688" y="1261872"/>
+            <a:ext cx="676656" cy="59436"/>
           </a:xfrm>
           <a:prstGeom prst="rect">
             <a:avLst/>
@@ -3382,8 +3382,8 @@
         </p:nvSpPr>
         <p:spPr>
           <a:xfrm>
-            <a:off x="914400" y="1426464"/>
-            <a:ext cx="566928" cy="50292"/>
+            <a:off x="932688" y="1499616"/>
+            <a:ext cx="676656" cy="59436"/>
           </a:xfrm>
           <a:prstGeom prst="rect">
             <a:avLst/>
@@ -3412,8 +3412,8 @@
         </p:nvSpPr>
         <p:spPr>
           <a:xfrm>
-            <a:off x="914400" y="1627632"/>
-            <a:ext cx="566928" cy="50292"/>
+            <a:off x="932688" y="1737360"/>
+            <a:ext cx="676656" cy="59436"/>
           </a:xfrm>
           <a:prstGeom prst="rect">
             <a:avLst/>
@@ -3442,7 +3442,7 @@
         </p:nvSpPr>
         <p:spPr>
           <a:xfrm>
-            <a:off x="182880" y="2103120"/>
+            <a:off x="228600" y="2304288"/>
             <a:ext cx="2103120" cy="292608"/>
           </a:xfrm>
           <a:prstGeom prst="rect">
@@ -3477,8 +3477,8 @@
         </p:nvCxnSpPr>
         <p:spPr>
           <a:xfrm>
-            <a:off x="1847088" y="1417320"/>
-            <a:ext cx="484632" cy="0"/>
+            <a:off x="1975104" y="1481328"/>
+            <a:ext cx="402336" cy="0"/>
           </a:xfrm>
           <a:prstGeom prst="line">
             <a:avLst/>
@@ -3500,8 +3500,8 @@
         </p:nvSpPr>
         <p:spPr>
           <a:xfrm>
-            <a:off x="1783080" y="1005840"/>
-            <a:ext cx="822960" cy="274320"/>
+            <a:off x="2212848" y="896112"/>
+            <a:ext cx="822960" cy="310896"/>
           </a:xfrm>
           <a:prstGeom prst="rect">
             <a:avLst/>
@@ -3516,7 +3516,7 @@
           <a:p>
             <a:pPr algn="ctr"/>
             <a:r>
-              <a:rPr sz="2440" b="1" i="0">
+              <a:rPr sz="2700" b="1" i="0">
                 <a:solidFill>
                   <a:srgbClr val="111111"/>
                 </a:solidFill>
@@ -3535,8 +3535,8 @@
         </p:nvSpPr>
         <p:spPr>
           <a:xfrm>
-            <a:off x="2350008" y="827532"/>
-            <a:ext cx="1188720" cy="1051560"/>
+            <a:off x="2308860" y="800100"/>
+            <a:ext cx="1417320" cy="1234440"/>
           </a:xfrm>
           <a:prstGeom prst="roundRect">
             <a:avLst>
@@ -3569,7 +3569,7 @@
         </p:nvSpPr>
         <p:spPr>
           <a:xfrm>
-            <a:off x="2933395" y="699516"/>
+            <a:off x="3006547" y="672084"/>
             <a:ext cx="21945" cy="128016"/>
           </a:xfrm>
           <a:prstGeom prst="rect">
@@ -3599,7 +3599,7 @@
         </p:nvSpPr>
         <p:spPr>
           <a:xfrm>
-            <a:off x="2898648" y="608076"/>
+            <a:off x="2971800" y="580644"/>
             <a:ext cx="91440" cy="91440"/>
           </a:xfrm>
           <a:prstGeom prst="ellipse">
@@ -3629,7 +3629,7 @@
         </p:nvSpPr>
         <p:spPr>
           <a:xfrm>
-            <a:off x="2689250" y="1207008"/>
+            <a:off x="2721254" y="1252728"/>
             <a:ext cx="82296" cy="82296"/>
           </a:xfrm>
           <a:prstGeom prst="ellipse">
@@ -3659,7 +3659,7 @@
         </p:nvSpPr>
         <p:spPr>
           <a:xfrm>
-            <a:off x="3117189" y="1207008"/>
+            <a:off x="3231489" y="1252728"/>
             <a:ext cx="82296" cy="82296"/>
           </a:xfrm>
           <a:prstGeom prst="ellipse">
@@ -3689,8 +3689,8 @@
         </p:nvSpPr>
         <p:spPr>
           <a:xfrm>
-            <a:off x="2777947" y="1479499"/>
-            <a:ext cx="332841" cy="27432"/>
+            <a:off x="2819095" y="1565452"/>
+            <a:ext cx="396849" cy="27432"/>
           </a:xfrm>
           <a:prstGeom prst="roundRect">
             <a:avLst>
@@ -3721,8 +3721,8 @@
         </p:nvSpPr>
         <p:spPr>
           <a:xfrm>
-            <a:off x="2029968" y="1915667"/>
-            <a:ext cx="1828800" cy="256032"/>
+            <a:off x="1988819" y="2071116"/>
+            <a:ext cx="2057400" cy="256032"/>
           </a:xfrm>
           <a:prstGeom prst="rect">
             <a:avLst/>
@@ -3737,7 +3737,7 @@
           <a:p>
             <a:pPr algn="ctr"/>
             <a:r>
-              <a:rPr sz="1590" b="1" i="0">
+              <a:rPr sz="1600" b="1" i="0">
                 <a:solidFill>
                   <a:srgbClr val="1F1F1E"/>
                 </a:solidFill>
@@ -3756,8 +3756,8 @@
         </p:nvCxnSpPr>
         <p:spPr>
           <a:xfrm>
-            <a:off x="3611880" y="1353312"/>
-            <a:ext cx="484632" cy="0"/>
+            <a:off x="3767328" y="1417320"/>
+            <a:ext cx="393192" cy="0"/>
           </a:xfrm>
           <a:prstGeom prst="line">
             <a:avLst/>
@@ -3779,8 +3779,8 @@
         </p:nvCxnSpPr>
         <p:spPr>
           <a:xfrm>
-            <a:off x="4178808" y="1792224"/>
-            <a:ext cx="864108" cy="0"/>
+            <a:off x="4233672" y="1901952"/>
+            <a:ext cx="1088136" cy="0"/>
           </a:xfrm>
           <a:prstGeom prst="line">
             <a:avLst/>
@@ -3801,8 +3801,8 @@
         </p:nvCxnSpPr>
         <p:spPr>
           <a:xfrm>
-            <a:off x="4178808" y="1645920"/>
-            <a:ext cx="864108" cy="0"/>
+            <a:off x="4233672" y="1755648"/>
+            <a:ext cx="1088136" cy="0"/>
           </a:xfrm>
           <a:prstGeom prst="line">
             <a:avLst/>
@@ -3823,8 +3823,8 @@
         </p:nvCxnSpPr>
         <p:spPr>
           <a:xfrm>
-            <a:off x="4178808" y="1499616"/>
-            <a:ext cx="864108" cy="0"/>
+            <a:off x="4233672" y="1609344"/>
+            <a:ext cx="1088136" cy="0"/>
           </a:xfrm>
           <a:prstGeom prst="line">
             <a:avLst/>
@@ -3845,8 +3845,8 @@
         </p:nvCxnSpPr>
         <p:spPr>
           <a:xfrm>
-            <a:off x="4178808" y="1353312"/>
-            <a:ext cx="864108" cy="0"/>
+            <a:off x="4233672" y="1463040"/>
+            <a:ext cx="1088136" cy="0"/>
           </a:xfrm>
           <a:prstGeom prst="line">
             <a:avLst/>
@@ -3867,8 +3867,8 @@
         </p:nvCxnSpPr>
         <p:spPr>
           <a:xfrm>
-            <a:off x="4178808" y="1810512"/>
-            <a:ext cx="864108" cy="0"/>
+            <a:off x="4233672" y="1920240"/>
+            <a:ext cx="1088135" cy="0"/>
           </a:xfrm>
           <a:prstGeom prst="line">
             <a:avLst/>
@@ -3889,8 +3889,8 @@
         </p:nvSpPr>
         <p:spPr>
           <a:xfrm>
-            <a:off x="4224528" y="1243584"/>
-            <a:ext cx="155448" cy="566928"/>
+            <a:off x="4279392" y="1243584"/>
+            <a:ext cx="201168" cy="676656"/>
           </a:xfrm>
           <a:prstGeom prst="rect">
             <a:avLst/>
@@ -3921,8 +3921,8 @@
         </p:nvSpPr>
         <p:spPr>
           <a:xfrm>
-            <a:off x="4430268" y="1536192"/>
-            <a:ext cx="155448" cy="274320"/>
+            <a:off x="4544568" y="1591056"/>
+            <a:ext cx="201168" cy="329184"/>
           </a:xfrm>
           <a:prstGeom prst="rect">
             <a:avLst/>
@@ -3953,8 +3953,8 @@
         </p:nvSpPr>
         <p:spPr>
           <a:xfrm>
-            <a:off x="4636008" y="1353312"/>
-            <a:ext cx="155448" cy="457200"/>
+            <a:off x="4809744" y="1371600"/>
+            <a:ext cx="201168" cy="548640"/>
           </a:xfrm>
           <a:prstGeom prst="rect">
             <a:avLst/>
@@ -3985,8 +3985,8 @@
         </p:nvSpPr>
         <p:spPr>
           <a:xfrm>
-            <a:off x="4841748" y="1609344"/>
-            <a:ext cx="155448" cy="201168"/>
+            <a:off x="5074920" y="1673352"/>
+            <a:ext cx="201168" cy="246888"/>
           </a:xfrm>
           <a:prstGeom prst="rect">
             <a:avLst/>
@@ -4017,8 +4017,8 @@
         </p:nvSpPr>
         <p:spPr>
           <a:xfrm>
-            <a:off x="3931920" y="2084831"/>
-            <a:ext cx="1737360" cy="292608"/>
+            <a:off x="3977639" y="2212848"/>
+            <a:ext cx="1828800" cy="292608"/>
           </a:xfrm>
           <a:prstGeom prst="rect">
             <a:avLst/>
@@ -4052,8 +4052,8 @@
         </p:nvSpPr>
         <p:spPr>
           <a:xfrm>
-            <a:off x="411480" y="2487168"/>
-            <a:ext cx="3520440" cy="512064"/>
+            <a:off x="411480" y="2670048"/>
+            <a:ext cx="3611880" cy="548640"/>
           </a:xfrm>
           <a:prstGeom prst="roundRect">
             <a:avLst>
@@ -4095,7 +4095,7 @@
         </p:nvSpPr>
         <p:spPr>
           <a:xfrm>
-            <a:off x="4023360" y="2596896"/>
+            <a:off x="4114800" y="2798064"/>
             <a:ext cx="1828800" cy="292608"/>
           </a:xfrm>
           <a:prstGeom prst="rect">
@@ -4130,8 +4130,8 @@
         </p:nvCxnSpPr>
         <p:spPr>
           <a:xfrm>
-            <a:off x="2148840" y="3017520"/>
-            <a:ext cx="0" cy="228600"/>
+            <a:off x="2194560" y="3236976"/>
+            <a:ext cx="0" cy="201168"/>
           </a:xfrm>
           <a:prstGeom prst="line">
             <a:avLst/>
@@ -4153,8 +4153,8 @@
         </p:nvSpPr>
         <p:spPr>
           <a:xfrm>
-            <a:off x="566928" y="3310128"/>
-            <a:ext cx="493776" cy="493776"/>
+            <a:off x="502920" y="3511296"/>
+            <a:ext cx="603504" cy="603504"/>
           </a:xfrm>
           <a:prstGeom prst="roundRect">
             <a:avLst>
@@ -4187,8 +4187,8 @@
         </p:nvSpPr>
         <p:spPr>
           <a:xfrm>
-            <a:off x="356616" y="3840480"/>
-            <a:ext cx="914400" cy="292608"/>
+            <a:off x="320040" y="4151376"/>
+            <a:ext cx="960120" cy="292608"/>
           </a:xfrm>
           <a:prstGeom prst="rect">
             <a:avLst/>
@@ -4203,7 +4203,7 @@
           <a:p>
             <a:pPr algn="ctr"/>
             <a:r>
-              <a:rPr sz="1280" b="1" i="1">
+              <a:rPr sz="1350" b="1" i="1">
                 <a:solidFill>
                   <a:srgbClr val="111111"/>
                 </a:solidFill>
@@ -4222,8 +4222,8 @@
         </p:nvSpPr>
         <p:spPr>
           <a:xfrm>
-            <a:off x="1225295" y="3310128"/>
-            <a:ext cx="493776" cy="493776"/>
+            <a:off x="1289304" y="3511296"/>
+            <a:ext cx="603504" cy="603504"/>
           </a:xfrm>
           <a:prstGeom prst="roundRect">
             <a:avLst>
@@ -4256,8 +4256,8 @@
         </p:nvSpPr>
         <p:spPr>
           <a:xfrm>
-            <a:off x="1014983" y="3840480"/>
-            <a:ext cx="914400" cy="292608"/>
+            <a:off x="1106424" y="4151376"/>
+            <a:ext cx="960120" cy="292608"/>
           </a:xfrm>
           <a:prstGeom prst="rect">
             <a:avLst/>
@@ -4272,7 +4272,7 @@
           <a:p>
             <a:pPr algn="ctr"/>
             <a:r>
-              <a:rPr sz="1280" b="1" i="1">
+              <a:rPr sz="1350" b="1" i="1">
                 <a:solidFill>
                   <a:srgbClr val="111111"/>
                 </a:solidFill>
@@ -4291,8 +4291,8 @@
         </p:nvSpPr>
         <p:spPr>
           <a:xfrm>
-            <a:off x="1883664" y="3310128"/>
-            <a:ext cx="493776" cy="493776"/>
+            <a:off x="2075688" y="3511296"/>
+            <a:ext cx="603504" cy="603504"/>
           </a:xfrm>
           <a:prstGeom prst="roundRect">
             <a:avLst>
@@ -4325,8 +4325,8 @@
         </p:nvSpPr>
         <p:spPr>
           <a:xfrm>
-            <a:off x="1673352" y="3840480"/>
-            <a:ext cx="914400" cy="292608"/>
+            <a:off x="1892807" y="4151376"/>
+            <a:ext cx="960120" cy="292608"/>
           </a:xfrm>
           <a:prstGeom prst="rect">
             <a:avLst/>
@@ -4341,7 +4341,7 @@
           <a:p>
             <a:pPr algn="ctr"/>
             <a:r>
-              <a:rPr sz="1280" b="1" i="1">
+              <a:rPr sz="1350" b="1" i="1">
                 <a:solidFill>
                   <a:srgbClr val="111111"/>
                 </a:solidFill>
@@ -4360,8 +4360,8 @@
         </p:nvSpPr>
         <p:spPr>
           <a:xfrm>
-            <a:off x="2542032" y="3310128"/>
-            <a:ext cx="493776" cy="493776"/>
+            <a:off x="2862072" y="3511296"/>
+            <a:ext cx="603504" cy="603504"/>
           </a:xfrm>
           <a:prstGeom prst="roundRect">
             <a:avLst>
@@ -4394,8 +4394,8 @@
         </p:nvSpPr>
         <p:spPr>
           <a:xfrm>
-            <a:off x="2331720" y="3840480"/>
-            <a:ext cx="914400" cy="292608"/>
+            <a:off x="2679191" y="4151376"/>
+            <a:ext cx="960120" cy="292608"/>
           </a:xfrm>
           <a:prstGeom prst="rect">
             <a:avLst/>
@@ -4410,7 +4410,7 @@
           <a:p>
             <a:pPr algn="ctr"/>
             <a:r>
-              <a:rPr sz="1280" b="1" i="1">
+              <a:rPr sz="1350" b="1" i="1">
                 <a:solidFill>
                   <a:srgbClr val="111111"/>
                 </a:solidFill>
@@ -4429,8 +4429,8 @@
         </p:nvSpPr>
         <p:spPr>
           <a:xfrm>
-            <a:off x="3200400" y="3310128"/>
-            <a:ext cx="493776" cy="493776"/>
+            <a:off x="3648456" y="3511296"/>
+            <a:ext cx="603504" cy="603504"/>
           </a:xfrm>
           <a:prstGeom prst="roundRect">
             <a:avLst>
@@ -4463,8 +4463,8 @@
         </p:nvSpPr>
         <p:spPr>
           <a:xfrm>
-            <a:off x="2990088" y="3840480"/>
-            <a:ext cx="914400" cy="292608"/>
+            <a:off x="3465576" y="4151376"/>
+            <a:ext cx="960120" cy="292608"/>
           </a:xfrm>
           <a:prstGeom prst="rect">
             <a:avLst/>
@@ -4479,7 +4479,7 @@
           <a:p>
             <a:pPr algn="ctr"/>
             <a:r>
-              <a:rPr sz="1280" b="1" i="1">
+              <a:rPr sz="1350" b="1" i="1">
                 <a:solidFill>
                   <a:srgbClr val="111111"/>
                 </a:solidFill>
@@ -4498,8 +4498,8 @@
         </p:nvSpPr>
         <p:spPr>
           <a:xfrm>
-            <a:off x="502920" y="4114800"/>
-            <a:ext cx="3291840" cy="292608"/>
+            <a:off x="548640" y="4462272"/>
+            <a:ext cx="3474720" cy="292608"/>
           </a:xfrm>
           <a:prstGeom prst="rect">
             <a:avLst/>
@@ -4533,8 +4533,8 @@
         </p:nvCxnSpPr>
         <p:spPr>
           <a:xfrm>
-            <a:off x="3977639" y="3566160"/>
-            <a:ext cx="338329" cy="0"/>
+            <a:off x="4480560" y="3803904"/>
+            <a:ext cx="256032" cy="0"/>
           </a:xfrm>
           <a:prstGeom prst="line">
             <a:avLst/>
@@ -4556,8 +4556,8 @@
         </p:nvCxnSpPr>
         <p:spPr>
           <a:xfrm>
-            <a:off x="4398264" y="3895344"/>
-            <a:ext cx="864108" cy="0"/>
+            <a:off x="4782312" y="4142232"/>
+            <a:ext cx="1088136" cy="0"/>
           </a:xfrm>
           <a:prstGeom prst="line">
             <a:avLst/>
@@ -4578,8 +4578,8 @@
         </p:nvCxnSpPr>
         <p:spPr>
           <a:xfrm>
-            <a:off x="4398264" y="3749040"/>
-            <a:ext cx="864108" cy="0"/>
+            <a:off x="4782312" y="3995928"/>
+            <a:ext cx="1088136" cy="0"/>
           </a:xfrm>
           <a:prstGeom prst="line">
             <a:avLst/>
@@ -4600,8 +4600,8 @@
         </p:nvCxnSpPr>
         <p:spPr>
           <a:xfrm>
-            <a:off x="4398264" y="3602736"/>
-            <a:ext cx="864108" cy="0"/>
+            <a:off x="4782312" y="3849624"/>
+            <a:ext cx="1088136" cy="0"/>
           </a:xfrm>
           <a:prstGeom prst="line">
             <a:avLst/>
@@ -4622,8 +4622,8 @@
         </p:nvCxnSpPr>
         <p:spPr>
           <a:xfrm>
-            <a:off x="4398264" y="3456432"/>
-            <a:ext cx="864108" cy="0"/>
+            <a:off x="4782312" y="3703320"/>
+            <a:ext cx="1088136" cy="0"/>
           </a:xfrm>
           <a:prstGeom prst="line">
             <a:avLst/>
@@ -4644,8 +4644,8 @@
         </p:nvCxnSpPr>
         <p:spPr>
           <a:xfrm>
-            <a:off x="4398264" y="3913632"/>
-            <a:ext cx="864108" cy="0"/>
+            <a:off x="4782312" y="4160520"/>
+            <a:ext cx="1088136" cy="0"/>
           </a:xfrm>
           <a:prstGeom prst="line">
             <a:avLst/>
@@ -4666,8 +4666,8 @@
         </p:nvSpPr>
         <p:spPr>
           <a:xfrm>
-            <a:off x="4443984" y="3310128"/>
-            <a:ext cx="155448" cy="603504"/>
+            <a:off x="4828032" y="3447287"/>
+            <a:ext cx="201168" cy="713232"/>
           </a:xfrm>
           <a:prstGeom prst="rect">
             <a:avLst/>
@@ -4698,8 +4698,8 @@
         </p:nvSpPr>
         <p:spPr>
           <a:xfrm>
-            <a:off x="4649724" y="3511296"/>
-            <a:ext cx="155448" cy="402336"/>
+            <a:off x="5093208" y="3685031"/>
+            <a:ext cx="201168" cy="475488"/>
           </a:xfrm>
           <a:prstGeom prst="rect">
             <a:avLst/>
@@ -4730,8 +4730,8 @@
         </p:nvSpPr>
         <p:spPr>
           <a:xfrm>
-            <a:off x="4855464" y="3657600"/>
-            <a:ext cx="155448" cy="256032"/>
+            <a:off x="5358384" y="3858768"/>
+            <a:ext cx="201168" cy="301752"/>
           </a:xfrm>
           <a:prstGeom prst="rect">
             <a:avLst/>
@@ -4762,8 +4762,8 @@
         </p:nvSpPr>
         <p:spPr>
           <a:xfrm>
-            <a:off x="5061204" y="3822192"/>
-            <a:ext cx="155448" cy="91440"/>
+            <a:off x="5623560" y="4050791"/>
+            <a:ext cx="201168" cy="109728"/>
           </a:xfrm>
           <a:prstGeom prst="rect">
             <a:avLst/>
@@ -4794,8 +4794,8 @@
         </p:nvSpPr>
         <p:spPr>
           <a:xfrm>
-            <a:off x="4160520" y="4160520"/>
-            <a:ext cx="1920240" cy="292608"/>
+            <a:off x="4773168" y="4526280"/>
+            <a:ext cx="1188720" cy="292608"/>
           </a:xfrm>
           <a:prstGeom prst="rect">
             <a:avLst/>
@@ -4810,7 +4810,7 @@
           <a:p>
             <a:pPr algn="ctr"/>
             <a:r>
-              <a:rPr sz="1590" b="1" i="1">
+              <a:rPr sz="1350" b="1" i="1">
                 <a:solidFill>
                   <a:srgbClr val="111111"/>
                 </a:solidFill>
@@ -4829,8 +4829,8 @@
         </p:nvSpPr>
         <p:spPr>
           <a:xfrm>
-            <a:off x="685800" y="4553712"/>
-            <a:ext cx="3931920" cy="475488"/>
+            <a:off x="548640" y="4828032"/>
+            <a:ext cx="4023360" cy="530352"/>
           </a:xfrm>
           <a:prstGeom prst="roundRect">
             <a:avLst>
@@ -4872,8 +4872,8 @@
         </p:nvSpPr>
         <p:spPr>
           <a:xfrm>
-            <a:off x="4800600" y="4892040"/>
-            <a:ext cx="384048" cy="96012"/>
+            <a:off x="4800600" y="5212080"/>
+            <a:ext cx="475488" cy="114300"/>
           </a:xfrm>
           <a:prstGeom prst="ellipse">
             <a:avLst/>
@@ -4904,8 +4904,8 @@
         </p:nvSpPr>
         <p:spPr>
           <a:xfrm>
-            <a:off x="4800600" y="4782312"/>
-            <a:ext cx="384048" cy="96012"/>
+            <a:off x="4800600" y="5084064"/>
+            <a:ext cx="475488" cy="114300"/>
           </a:xfrm>
           <a:prstGeom prst="ellipse">
             <a:avLst/>
@@ -4936,8 +4936,8 @@
         </p:nvSpPr>
         <p:spPr>
           <a:xfrm>
-            <a:off x="4800600" y="4672583"/>
-            <a:ext cx="384048" cy="96012"/>
+            <a:off x="4800600" y="4956048"/>
+            <a:ext cx="475488" cy="114300"/>
           </a:xfrm>
           <a:prstGeom prst="ellipse">
             <a:avLst/>
@@ -4968,8 +4968,8 @@
         </p:nvSpPr>
         <p:spPr>
           <a:xfrm>
-            <a:off x="365760" y="5257800"/>
-            <a:ext cx="5349240" cy="1325880"/>
+            <a:off x="365760" y="5504688"/>
+            <a:ext cx="5394960" cy="1188720"/>
           </a:xfrm>
           <a:prstGeom prst="roundRect">
             <a:avLst>
@@ -5002,7 +5002,7 @@
         </p:nvSpPr>
         <p:spPr>
           <a:xfrm>
-            <a:off x="502920" y="5321808"/>
+            <a:off x="502920" y="5541264"/>
             <a:ext cx="5029200" cy="292608"/>
           </a:xfrm>
           <a:prstGeom prst="rect">
@@ -5018,13 +5018,13 @@
           <a:p>
             <a:pPr algn="l"/>
             <a:r>
-              <a:rPr sz="1590" b="1" i="1">
+              <a:rPr sz="1500" b="1" i="1">
                 <a:solidFill>
                   <a:srgbClr val="111111"/>
                 </a:solidFill>
                 <a:latin typeface="Times New Roman"/>
               </a:rPr>
-              <a:t>Cross-modal bridge  (fit on paid pairs)</a:t>
+              <a:t>Cross-modal bridge (fit on paid pairs)</a:t>
             </a:r>
           </a:p>
         </p:txBody>
@@ -5037,8 +5037,8 @@
         </p:nvCxnSpPr>
         <p:spPr>
           <a:xfrm>
-            <a:off x="777240" y="6355080"/>
-            <a:ext cx="658368" cy="0"/>
+            <a:off x="731519" y="6419088"/>
+            <a:ext cx="822961" cy="0"/>
           </a:xfrm>
           <a:prstGeom prst="line">
             <a:avLst/>
@@ -5059,8 +5059,8 @@
         </p:nvSpPr>
         <p:spPr>
           <a:xfrm>
-            <a:off x="822960" y="6080760"/>
-            <a:ext cx="155448" cy="274320"/>
+            <a:off x="777240" y="6144768"/>
+            <a:ext cx="201168" cy="274320"/>
           </a:xfrm>
           <a:prstGeom prst="rect">
             <a:avLst/>
@@ -5091,8 +5091,8 @@
         </p:nvSpPr>
         <p:spPr>
           <a:xfrm>
-            <a:off x="1028700" y="5916168"/>
-            <a:ext cx="155448" cy="438912"/>
+            <a:off x="1042416" y="5980175"/>
+            <a:ext cx="201168" cy="438912"/>
           </a:xfrm>
           <a:prstGeom prst="rect">
             <a:avLst/>
@@ -5123,8 +5123,8 @@
         </p:nvSpPr>
         <p:spPr>
           <a:xfrm>
-            <a:off x="1234440" y="6153912"/>
-            <a:ext cx="155448" cy="201168"/>
+            <a:off x="1307592" y="6217920"/>
+            <a:ext cx="201168" cy="201168"/>
           </a:xfrm>
           <a:prstGeom prst="rect">
             <a:avLst/>
@@ -5155,8 +5155,8 @@
         </p:nvSpPr>
         <p:spPr>
           <a:xfrm>
-            <a:off x="502920" y="6400800"/>
-            <a:ext cx="1463040" cy="292608"/>
+            <a:off x="457200" y="6455664"/>
+            <a:ext cx="1554480" cy="292608"/>
           </a:xfrm>
           <a:prstGeom prst="rect">
             <a:avLst/>
@@ -5171,7 +5171,7 @@
           <a:p>
             <a:pPr algn="ctr"/>
             <a:r>
-              <a:rPr sz="1340" b="1" i="1">
+              <a:rPr sz="1200" b="1" i="1">
                 <a:solidFill>
                   <a:srgbClr val="111111"/>
                 </a:solidFill>
@@ -5190,8 +5190,8 @@
         </p:nvCxnSpPr>
         <p:spPr>
           <a:xfrm>
-            <a:off x="1645920" y="6126480"/>
-            <a:ext cx="502920" cy="0"/>
+            <a:off x="1783080" y="6172200"/>
+            <a:ext cx="411480" cy="0"/>
           </a:xfrm>
           <a:prstGeom prst="line">
             <a:avLst/>
@@ -5213,8 +5213,8 @@
         </p:nvSpPr>
         <p:spPr>
           <a:xfrm>
-            <a:off x="2240280" y="5742432"/>
-            <a:ext cx="713232" cy="713232"/>
+            <a:off x="2286000" y="5806440"/>
+            <a:ext cx="731520" cy="731520"/>
           </a:xfrm>
           <a:prstGeom prst="roundRect">
             <a:avLst>
@@ -5247,8 +5247,8 @@
         </p:nvSpPr>
         <p:spPr>
           <a:xfrm>
-            <a:off x="2313432" y="5815584"/>
-            <a:ext cx="158496" cy="158496"/>
+            <a:off x="2359152" y="5879592"/>
+            <a:ext cx="162560" cy="162560"/>
           </a:xfrm>
           <a:prstGeom prst="rect">
             <a:avLst/>
@@ -5279,8 +5279,8 @@
         </p:nvSpPr>
         <p:spPr>
           <a:xfrm>
-            <a:off x="2511552" y="5815584"/>
-            <a:ext cx="158496" cy="158496"/>
+            <a:off x="2562352" y="5879592"/>
+            <a:ext cx="162560" cy="162560"/>
           </a:xfrm>
           <a:prstGeom prst="rect">
             <a:avLst/>
@@ -5311,8 +5311,8 @@
         </p:nvSpPr>
         <p:spPr>
           <a:xfrm>
-            <a:off x="2709672" y="5815584"/>
-            <a:ext cx="158496" cy="158496"/>
+            <a:off x="2765552" y="5879592"/>
+            <a:ext cx="162560" cy="162560"/>
           </a:xfrm>
           <a:prstGeom prst="rect">
             <a:avLst/>
@@ -5343,8 +5343,8 @@
         </p:nvSpPr>
         <p:spPr>
           <a:xfrm>
-            <a:off x="2313432" y="6013704"/>
-            <a:ext cx="158496" cy="158496"/>
+            <a:off x="2359152" y="6082792"/>
+            <a:ext cx="162560" cy="162560"/>
           </a:xfrm>
           <a:prstGeom prst="rect">
             <a:avLst/>
@@ -5375,8 +5375,8 @@
         </p:nvSpPr>
         <p:spPr>
           <a:xfrm>
-            <a:off x="2511552" y="6013704"/>
-            <a:ext cx="158496" cy="158496"/>
+            <a:off x="2562352" y="6082792"/>
+            <a:ext cx="162560" cy="162560"/>
           </a:xfrm>
           <a:prstGeom prst="rect">
             <a:avLst/>
@@ -5407,8 +5407,8 @@
         </p:nvSpPr>
         <p:spPr>
           <a:xfrm>
-            <a:off x="2709672" y="6013704"/>
-            <a:ext cx="158496" cy="158496"/>
+            <a:off x="2765552" y="6082792"/>
+            <a:ext cx="162560" cy="162560"/>
           </a:xfrm>
           <a:prstGeom prst="rect">
             <a:avLst/>
@@ -5439,8 +5439,8 @@
         </p:nvSpPr>
         <p:spPr>
           <a:xfrm>
-            <a:off x="2313432" y="6211824"/>
-            <a:ext cx="158496" cy="158496"/>
+            <a:off x="2359152" y="6285992"/>
+            <a:ext cx="162560" cy="162560"/>
           </a:xfrm>
           <a:prstGeom prst="rect">
             <a:avLst/>
@@ -5471,8 +5471,8 @@
         </p:nvSpPr>
         <p:spPr>
           <a:xfrm>
-            <a:off x="2511552" y="6211824"/>
-            <a:ext cx="158496" cy="158496"/>
+            <a:off x="2562352" y="6285992"/>
+            <a:ext cx="162560" cy="162560"/>
           </a:xfrm>
           <a:prstGeom prst="rect">
             <a:avLst/>
@@ -5503,8 +5503,8 @@
         </p:nvSpPr>
         <p:spPr>
           <a:xfrm>
-            <a:off x="2709672" y="6211824"/>
-            <a:ext cx="158496" cy="158496"/>
+            <a:off x="2765552" y="6285992"/>
+            <a:ext cx="162560" cy="162560"/>
           </a:xfrm>
           <a:prstGeom prst="rect">
             <a:avLst/>
@@ -5535,8 +5535,8 @@
         </p:nvSpPr>
         <p:spPr>
           <a:xfrm>
-            <a:off x="2011680" y="6455664"/>
-            <a:ext cx="1188720" cy="292608"/>
+            <a:off x="2029968" y="6455664"/>
+            <a:ext cx="1280160" cy="292608"/>
           </a:xfrm>
           <a:prstGeom prst="rect">
             <a:avLst/>
@@ -5551,7 +5551,7 @@
           <a:p>
             <a:pPr algn="ctr"/>
             <a:r>
-              <a:rPr sz="1340" b="1" i="1">
+              <a:rPr sz="1200" b="1" i="1">
                 <a:solidFill>
                   <a:srgbClr val="111111"/>
                 </a:solidFill>
@@ -5570,8 +5570,8 @@
         </p:nvCxnSpPr>
         <p:spPr>
           <a:xfrm>
-            <a:off x="3108960" y="6126480"/>
-            <a:ext cx="502920" cy="0"/>
+            <a:off x="3200400" y="6172200"/>
+            <a:ext cx="411480" cy="0"/>
           </a:xfrm>
           <a:prstGeom prst="line">
             <a:avLst/>
@@ -5593,8 +5593,8 @@
         </p:nvCxnSpPr>
         <p:spPr>
           <a:xfrm>
-            <a:off x="3749040" y="6355080"/>
-            <a:ext cx="658368" cy="0"/>
+            <a:off x="3703320" y="6419088"/>
+            <a:ext cx="822959" cy="0"/>
           </a:xfrm>
           <a:prstGeom prst="line">
             <a:avLst/>
@@ -5615,8 +5615,8 @@
         </p:nvSpPr>
         <p:spPr>
           <a:xfrm>
-            <a:off x="3794760" y="5852160"/>
-            <a:ext cx="155448" cy="502920"/>
+            <a:off x="3749039" y="5916168"/>
+            <a:ext cx="201168" cy="502920"/>
           </a:xfrm>
           <a:prstGeom prst="rect">
             <a:avLst/>
@@ -5647,8 +5647,8 @@
         </p:nvSpPr>
         <p:spPr>
           <a:xfrm>
-            <a:off x="4000500" y="6126480"/>
-            <a:ext cx="155448" cy="228600"/>
+            <a:off x="4014215" y="6190488"/>
+            <a:ext cx="201168" cy="228600"/>
           </a:xfrm>
           <a:prstGeom prst="rect">
             <a:avLst/>
@@ -5679,8 +5679,8 @@
         </p:nvSpPr>
         <p:spPr>
           <a:xfrm>
-            <a:off x="4206240" y="5971032"/>
-            <a:ext cx="155448" cy="384048"/>
+            <a:off x="4279392" y="6035040"/>
+            <a:ext cx="201168" cy="384048"/>
           </a:xfrm>
           <a:prstGeom prst="rect">
             <a:avLst/>
@@ -5711,8 +5711,8 @@
         </p:nvSpPr>
         <p:spPr>
           <a:xfrm>
-            <a:off x="3520440" y="6400800"/>
-            <a:ext cx="1554480" cy="292608"/>
+            <a:off x="3566160" y="6455664"/>
+            <a:ext cx="1645920" cy="292608"/>
           </a:xfrm>
           <a:prstGeom prst="rect">
             <a:avLst/>
@@ -5727,7 +5727,7 @@
           <a:p>
             <a:pPr algn="ctr"/>
             <a:r>
-              <a:rPr sz="1340" b="1" i="1">
+              <a:rPr sz="1200" b="1" i="1">
                 <a:solidFill>
                   <a:srgbClr val="111111"/>
                 </a:solidFill>
@@ -5746,7 +5746,7 @@
         </p:nvSpPr>
         <p:spPr>
           <a:xfrm>
-            <a:off x="4892040" y="5806440"/>
+            <a:off x="4956048" y="5925312"/>
             <a:ext cx="868680" cy="548640"/>
           </a:xfrm>
           <a:prstGeom prst="rect">
@@ -5762,7 +5762,7 @@
           <a:p>
             <a:pPr algn="ctr"/>
             <a:r>
-              <a:rPr sz="1280" b="1" i="1">
+              <a:rPr sz="1200" b="1" i="1">
                 <a:solidFill>
                   <a:srgbClr val="111111"/>
                 </a:solidFill>
@@ -5774,7 +5774,7 @@
           <a:p>
             <a:pPr algn="ctr"/>
             <a:r>
-              <a:rPr sz="1280" b="1" i="1">
+              <a:rPr sz="1200" b="1" i="1">
                 <a:solidFill>
                   <a:srgbClr val="111111"/>
                 </a:solidFill>
@@ -5794,7 +5794,7 @@
         <p:spPr>
           <a:xfrm>
             <a:off x="6172200" y="237744"/>
-            <a:ext cx="365760" cy="365760"/>
+            <a:ext cx="457200" cy="457200"/>
           </a:xfrm>
           <a:prstGeom prst="ellipse">
             <a:avLst/>
@@ -5813,7 +5813,7 @@
           <a:p>
             <a:pPr algn="ctr"/>
             <a:r>
-              <a:rPr sz="1950" b="1" i="0">
+              <a:rPr sz="2200" b="1" i="0">
                 <a:solidFill>
                   <a:srgbClr val="FFFFFF"/>
                 </a:solidFill>
@@ -5832,8 +5832,8 @@
         </p:nvSpPr>
         <p:spPr>
           <a:xfrm>
-            <a:off x="6629400" y="274320"/>
-            <a:ext cx="5577840" cy="292608"/>
+            <a:off x="6766560" y="292608"/>
+            <a:ext cx="5394960" cy="292608"/>
           </a:xfrm>
           <a:prstGeom prst="rect">
             <a:avLst/>
@@ -5867,8 +5867,8 @@
         </p:nvSpPr>
         <p:spPr>
           <a:xfrm>
-            <a:off x="6309359" y="772668"/>
-            <a:ext cx="1188720" cy="1051560"/>
+            <a:off x="6240779" y="754380"/>
+            <a:ext cx="1417320" cy="1234440"/>
           </a:xfrm>
           <a:prstGeom prst="roundRect">
             <a:avLst>
@@ -5901,7 +5901,7 @@
         </p:nvSpPr>
         <p:spPr>
           <a:xfrm>
-            <a:off x="6892747" y="644652"/>
+            <a:off x="6938467" y="626364"/>
             <a:ext cx="21945" cy="128016"/>
           </a:xfrm>
           <a:prstGeom prst="rect">
@@ -5931,7 +5931,7 @@
         </p:nvSpPr>
         <p:spPr>
           <a:xfrm>
-            <a:off x="6858000" y="553212"/>
+            <a:off x="6903720" y="534924"/>
             <a:ext cx="91440" cy="91440"/>
           </a:xfrm>
           <a:prstGeom prst="ellipse">
@@ -5961,7 +5961,7 @@
         </p:nvSpPr>
         <p:spPr>
           <a:xfrm>
-            <a:off x="6648602" y="1152144"/>
+            <a:off x="6653174" y="1207008"/>
             <a:ext cx="82296" cy="82296"/>
           </a:xfrm>
           <a:prstGeom prst="ellipse">
@@ -5991,7 +5991,7 @@
         </p:nvSpPr>
         <p:spPr>
           <a:xfrm>
-            <a:off x="7076541" y="1152144"/>
+            <a:off x="7163409" y="1207008"/>
             <a:ext cx="82296" cy="82296"/>
           </a:xfrm>
           <a:prstGeom prst="ellipse">
@@ -6021,8 +6021,8 @@
         </p:nvSpPr>
         <p:spPr>
           <a:xfrm>
-            <a:off x="6737299" y="1424635"/>
-            <a:ext cx="332841" cy="27432"/>
+            <a:off x="6751015" y="1519732"/>
+            <a:ext cx="396849" cy="27432"/>
           </a:xfrm>
           <a:prstGeom prst="roundRect">
             <a:avLst>
@@ -6053,8 +6053,8 @@
         </p:nvSpPr>
         <p:spPr>
           <a:xfrm>
-            <a:off x="5989320" y="1860803"/>
-            <a:ext cx="1828800" cy="256032"/>
+            <a:off x="5920740" y="2025395"/>
+            <a:ext cx="2057400" cy="256032"/>
           </a:xfrm>
           <a:prstGeom prst="rect">
             <a:avLst/>
@@ -6069,7 +6069,7 @@
           <a:p>
             <a:pPr algn="ctr"/>
             <a:r>
-              <a:rPr sz="1590" b="1" i="0">
+              <a:rPr sz="1600" b="1" i="0">
                 <a:solidFill>
                   <a:srgbClr val="1F1F1E"/>
                 </a:solidFill>
@@ -6088,8 +6088,8 @@
         </p:nvSpPr>
         <p:spPr>
           <a:xfrm>
-            <a:off x="7589520" y="1188720"/>
-            <a:ext cx="384048" cy="96012"/>
+            <a:off x="7754112" y="1234440"/>
+            <a:ext cx="475488" cy="114300"/>
           </a:xfrm>
           <a:prstGeom prst="ellipse">
             <a:avLst/>
@@ -6120,8 +6120,8 @@
         </p:nvSpPr>
         <p:spPr>
           <a:xfrm>
-            <a:off x="7589520" y="1078992"/>
-            <a:ext cx="384048" cy="96012"/>
+            <a:off x="7754112" y="1106424"/>
+            <a:ext cx="475488" cy="114300"/>
           </a:xfrm>
           <a:prstGeom prst="ellipse">
             <a:avLst/>
@@ -6152,8 +6152,8 @@
         </p:nvSpPr>
         <p:spPr>
           <a:xfrm>
-            <a:off x="7589520" y="969264"/>
-            <a:ext cx="384048" cy="96012"/>
+            <a:off x="7754112" y="978408"/>
+            <a:ext cx="475488" cy="114300"/>
           </a:xfrm>
           <a:prstGeom prst="ellipse">
             <a:avLst/>
@@ -6184,8 +6184,8 @@
         </p:nvSpPr>
         <p:spPr>
           <a:xfrm>
-            <a:off x="7589520" y="859536"/>
-            <a:ext cx="384048" cy="96012"/>
+            <a:off x="7754112" y="850392"/>
+            <a:ext cx="475488" cy="114300"/>
           </a:xfrm>
           <a:prstGeom prst="ellipse">
             <a:avLst/>
@@ -6216,7 +6216,7 @@
         </p:nvSpPr>
         <p:spPr>
           <a:xfrm>
-            <a:off x="7571231" y="1353312"/>
+            <a:off x="7772400" y="1444752"/>
             <a:ext cx="822960" cy="292608"/>
           </a:xfrm>
           <a:prstGeom prst="rect">
@@ -6232,7 +6232,7 @@
           <a:p>
             <a:pPr algn="ctr"/>
             <a:r>
-              <a:rPr sz="1830" b="1" i="1">
+              <a:rPr sz="1900" b="1" i="1">
                 <a:solidFill>
                   <a:srgbClr val="111111"/>
                 </a:solidFill>
@@ -6251,8 +6251,8 @@
         </p:nvCxnSpPr>
         <p:spPr>
           <a:xfrm>
-            <a:off x="8092440" y="1298448"/>
-            <a:ext cx="411480" cy="0"/>
+            <a:off x="8321040" y="1371600"/>
+            <a:ext cx="292608" cy="0"/>
           </a:xfrm>
           <a:prstGeom prst="line">
             <a:avLst/>
@@ -6274,8 +6274,8 @@
         </p:nvSpPr>
         <p:spPr>
           <a:xfrm>
-            <a:off x="8577072" y="932688"/>
-            <a:ext cx="713232" cy="841248"/>
+            <a:off x="8686800" y="914400"/>
+            <a:ext cx="841248" cy="987552"/>
           </a:xfrm>
           <a:prstGeom prst="roundRect">
             <a:avLst>
@@ -6308,8 +6308,8 @@
         </p:nvSpPr>
         <p:spPr>
           <a:xfrm>
-            <a:off x="8686800" y="1115568"/>
-            <a:ext cx="475488" cy="45720"/>
+            <a:off x="8814816" y="1133856"/>
+            <a:ext cx="566928" cy="54864"/>
           </a:xfrm>
           <a:prstGeom prst="rect">
             <a:avLst/>
@@ -6338,8 +6338,8 @@
         </p:nvSpPr>
         <p:spPr>
           <a:xfrm>
-            <a:off x="8686800" y="1298448"/>
-            <a:ext cx="475488" cy="45720"/>
+            <a:off x="8814816" y="1353312"/>
+            <a:ext cx="566928" cy="54864"/>
           </a:xfrm>
           <a:prstGeom prst="rect">
             <a:avLst/>
@@ -6368,8 +6368,8 @@
         </p:nvSpPr>
         <p:spPr>
           <a:xfrm>
-            <a:off x="8686800" y="1481328"/>
-            <a:ext cx="475488" cy="45720"/>
+            <a:off x="8814816" y="1572768"/>
+            <a:ext cx="566928" cy="54864"/>
           </a:xfrm>
           <a:prstGeom prst="rect">
             <a:avLst/>
@@ -6398,8 +6398,8 @@
         </p:nvSpPr>
         <p:spPr>
           <a:xfrm>
-            <a:off x="8366760" y="1828800"/>
-            <a:ext cx="1188720" cy="292608"/>
+            <a:off x="8458200" y="1975104"/>
+            <a:ext cx="1280160" cy="292608"/>
           </a:xfrm>
           <a:prstGeom prst="rect">
             <a:avLst/>
@@ -6433,8 +6433,8 @@
         </p:nvCxnSpPr>
         <p:spPr>
           <a:xfrm>
-            <a:off x="9345168" y="1298448"/>
-            <a:ext cx="365760" cy="0"/>
+            <a:off x="9582912" y="1371600"/>
+            <a:ext cx="274320" cy="0"/>
           </a:xfrm>
           <a:prstGeom prst="line">
             <a:avLst/>
@@ -6456,8 +6456,8 @@
         </p:nvCxnSpPr>
         <p:spPr>
           <a:xfrm>
-            <a:off x="9784080" y="1645920"/>
-            <a:ext cx="658368" cy="0"/>
+            <a:off x="9902952" y="1783080"/>
+            <a:ext cx="822960" cy="0"/>
           </a:xfrm>
           <a:prstGeom prst="line">
             <a:avLst/>
@@ -6478,8 +6478,8 @@
         </p:nvSpPr>
         <p:spPr>
           <a:xfrm>
-            <a:off x="9829800" y="1261872"/>
-            <a:ext cx="155448" cy="384048"/>
+            <a:off x="9948672" y="1325880"/>
+            <a:ext cx="201168" cy="457200"/>
           </a:xfrm>
           <a:prstGeom prst="rect">
             <a:avLst/>
@@ -6510,8 +6510,8 @@
         </p:nvSpPr>
         <p:spPr>
           <a:xfrm>
-            <a:off x="10035540" y="1463040"/>
-            <a:ext cx="155448" cy="182880"/>
+            <a:off x="10213848" y="1563624"/>
+            <a:ext cx="201168" cy="219456"/>
           </a:xfrm>
           <a:prstGeom prst="rect">
             <a:avLst/>
@@ -6542,8 +6542,8 @@
         </p:nvSpPr>
         <p:spPr>
           <a:xfrm>
-            <a:off x="10241280" y="1335024"/>
-            <a:ext cx="155448" cy="310896"/>
+            <a:off x="10479024" y="1417319"/>
+            <a:ext cx="201168" cy="365760"/>
           </a:xfrm>
           <a:prstGeom prst="rect">
             <a:avLst/>
@@ -6574,8 +6574,8 @@
         </p:nvSpPr>
         <p:spPr>
           <a:xfrm>
-            <a:off x="9601200" y="1828800"/>
-            <a:ext cx="1463040" cy="292608"/>
+            <a:off x="9710928" y="1975104"/>
+            <a:ext cx="1554480" cy="292608"/>
           </a:xfrm>
           <a:prstGeom prst="rect">
             <a:avLst/>
@@ -6609,8 +6609,8 @@
         </p:nvCxnSpPr>
         <p:spPr>
           <a:xfrm>
-            <a:off x="10716768" y="1298448"/>
-            <a:ext cx="347472" cy="0"/>
+            <a:off x="10835640" y="1371600"/>
+            <a:ext cx="228600" cy="0"/>
           </a:xfrm>
           <a:prstGeom prst="line">
             <a:avLst/>
@@ -6632,8 +6632,8 @@
         </p:nvCxnSpPr>
         <p:spPr>
           <a:xfrm>
-            <a:off x="11036807" y="1645920"/>
-            <a:ext cx="658369" cy="0"/>
+            <a:off x="11091672" y="1783080"/>
+            <a:ext cx="822960" cy="0"/>
           </a:xfrm>
           <a:prstGeom prst="line">
             <a:avLst/>
@@ -6654,8 +6654,8 @@
         </p:nvSpPr>
         <p:spPr>
           <a:xfrm>
-            <a:off x="11082528" y="1143000"/>
-            <a:ext cx="155448" cy="502920"/>
+            <a:off x="11137392" y="1216152"/>
+            <a:ext cx="201168" cy="566928"/>
           </a:xfrm>
           <a:prstGeom prst="rect">
             <a:avLst/>
@@ -6686,8 +6686,8 @@
         </p:nvSpPr>
         <p:spPr>
           <a:xfrm>
-            <a:off x="11288267" y="1508760"/>
-            <a:ext cx="155448" cy="137160"/>
+            <a:off x="11402567" y="1618488"/>
+            <a:ext cx="201168" cy="164592"/>
           </a:xfrm>
           <a:prstGeom prst="rect">
             <a:avLst/>
@@ -6718,8 +6718,8 @@
         </p:nvSpPr>
         <p:spPr>
           <a:xfrm>
-            <a:off x="11494007" y="1371600"/>
-            <a:ext cx="155448" cy="274320"/>
+            <a:off x="11667744" y="1453895"/>
+            <a:ext cx="201168" cy="329184"/>
           </a:xfrm>
           <a:prstGeom prst="rect">
             <a:avLst/>
@@ -6750,7 +6750,7 @@
         </p:nvSpPr>
         <p:spPr>
           <a:xfrm>
-            <a:off x="10835640" y="1828800"/>
+            <a:off x="10927080" y="1975104"/>
             <a:ext cx="1371600" cy="292608"/>
           </a:xfrm>
           <a:prstGeom prst="rect">
@@ -6965,8 +6965,8 @@
         </p:nvSpPr>
         <p:spPr>
           <a:xfrm>
-            <a:off x="9464040" y="2871216"/>
-            <a:ext cx="402336" cy="402336"/>
+            <a:off x="9509760" y="2834640"/>
+            <a:ext cx="493776" cy="493776"/>
           </a:xfrm>
           <a:prstGeom prst="ellipse">
             <a:avLst/>
@@ -7006,8 +7006,8 @@
         </p:nvSpPr>
         <p:spPr>
           <a:xfrm>
-            <a:off x="9966960" y="2871216"/>
-            <a:ext cx="402336" cy="402336"/>
+            <a:off x="10104120" y="2834640"/>
+            <a:ext cx="493776" cy="493776"/>
           </a:xfrm>
           <a:prstGeom prst="ellipse">
             <a:avLst/>
@@ -7047,8 +7047,8 @@
         </p:nvSpPr>
         <p:spPr>
           <a:xfrm>
-            <a:off x="10469880" y="2907792"/>
-            <a:ext cx="1645920" cy="329184"/>
+            <a:off x="10716768" y="2907792"/>
+            <a:ext cx="1463040" cy="329184"/>
           </a:xfrm>
           <a:prstGeom prst="rect">
             <a:avLst/>
@@ -7063,7 +7063,7 @@
           <a:p>
             <a:pPr algn="l"/>
             <a:r>
-              <a:rPr sz="1590" b="1" i="0">
+              <a:rPr sz="1450" b="1" i="0">
                 <a:solidFill>
                   <a:srgbClr val="111111"/>
                 </a:solidFill>
@@ -7082,8 +7082,8 @@
         </p:nvCxnSpPr>
         <p:spPr>
           <a:xfrm>
-            <a:off x="6903720" y="3822192"/>
-            <a:ext cx="658368" cy="0"/>
+            <a:off x="6903720" y="3867912"/>
+            <a:ext cx="822959" cy="0"/>
           </a:xfrm>
           <a:prstGeom prst="line">
             <a:avLst/>
@@ -7104,8 +7104,8 @@
         </p:nvCxnSpPr>
         <p:spPr>
           <a:xfrm>
-            <a:off x="6903720" y="3675888"/>
-            <a:ext cx="658368" cy="0"/>
+            <a:off x="6903720" y="3721608"/>
+            <a:ext cx="822959" cy="0"/>
           </a:xfrm>
           <a:prstGeom prst="line">
             <a:avLst/>
@@ -7126,8 +7126,8 @@
         </p:nvCxnSpPr>
         <p:spPr>
           <a:xfrm>
-            <a:off x="6903720" y="3529584"/>
-            <a:ext cx="658368" cy="0"/>
+            <a:off x="6903720" y="3575304"/>
+            <a:ext cx="822959" cy="0"/>
           </a:xfrm>
           <a:prstGeom prst="line">
             <a:avLst/>
@@ -7148,8 +7148,8 @@
         </p:nvCxnSpPr>
         <p:spPr>
           <a:xfrm>
-            <a:off x="6903720" y="3383280"/>
-            <a:ext cx="658368" cy="0"/>
+            <a:off x="6903720" y="3429000"/>
+            <a:ext cx="822959" cy="0"/>
           </a:xfrm>
           <a:prstGeom prst="line">
             <a:avLst/>
@@ -7170,8 +7170,8 @@
         </p:nvCxnSpPr>
         <p:spPr>
           <a:xfrm>
-            <a:off x="6903720" y="3840480"/>
-            <a:ext cx="658368" cy="0"/>
+            <a:off x="6903720" y="3886200"/>
+            <a:ext cx="822960" cy="0"/>
           </a:xfrm>
           <a:prstGeom prst="line">
             <a:avLst/>
@@ -7193,7 +7193,7 @@
         <p:spPr>
           <a:xfrm>
             <a:off x="6949440" y="3337560"/>
-            <a:ext cx="155448" cy="502920"/>
+            <a:ext cx="201168" cy="548640"/>
           </a:xfrm>
           <a:prstGeom prst="rect">
             <a:avLst/>
@@ -7224,8 +7224,8 @@
         </p:nvSpPr>
         <p:spPr>
           <a:xfrm>
-            <a:off x="7155179" y="3511296"/>
-            <a:ext cx="155448" cy="329184"/>
+            <a:off x="7214616" y="3520440"/>
+            <a:ext cx="201168" cy="365760"/>
           </a:xfrm>
           <a:prstGeom prst="rect">
             <a:avLst/>
@@ -7256,8 +7256,8 @@
         </p:nvSpPr>
         <p:spPr>
           <a:xfrm>
-            <a:off x="7360919" y="3639312"/>
-            <a:ext cx="155448" cy="201168"/>
+            <a:off x="7479792" y="3657600"/>
+            <a:ext cx="201168" cy="228600"/>
           </a:xfrm>
           <a:prstGeom prst="rect">
             <a:avLst/>
@@ -7288,8 +7288,8 @@
         </p:nvCxnSpPr>
         <p:spPr>
           <a:xfrm>
-            <a:off x="7955279" y="3611880"/>
-            <a:ext cx="548641" cy="0"/>
+            <a:off x="8092440" y="3657600"/>
+            <a:ext cx="457200" cy="0"/>
           </a:xfrm>
           <a:prstGeom prst="line">
             <a:avLst/>
@@ -7311,8 +7311,8 @@
         </p:nvCxnSpPr>
         <p:spPr>
           <a:xfrm>
-            <a:off x="8595359" y="3822192"/>
-            <a:ext cx="658369" cy="0"/>
+            <a:off x="8641080" y="3867912"/>
+            <a:ext cx="822960" cy="0"/>
           </a:xfrm>
           <a:prstGeom prst="line">
             <a:avLst/>
@@ -7333,8 +7333,8 @@
         </p:nvCxnSpPr>
         <p:spPr>
           <a:xfrm>
-            <a:off x="8595359" y="3675888"/>
-            <a:ext cx="658369" cy="0"/>
+            <a:off x="8641080" y="3721608"/>
+            <a:ext cx="822960" cy="0"/>
           </a:xfrm>
           <a:prstGeom prst="line">
             <a:avLst/>
@@ -7355,8 +7355,8 @@
         </p:nvCxnSpPr>
         <p:spPr>
           <a:xfrm>
-            <a:off x="8595359" y="3529584"/>
-            <a:ext cx="658369" cy="0"/>
+            <a:off x="8641080" y="3575304"/>
+            <a:ext cx="822960" cy="0"/>
           </a:xfrm>
           <a:prstGeom prst="line">
             <a:avLst/>
@@ -7377,8 +7377,8 @@
         </p:nvCxnSpPr>
         <p:spPr>
           <a:xfrm>
-            <a:off x="8595359" y="3383280"/>
-            <a:ext cx="658369" cy="0"/>
+            <a:off x="8641080" y="3429000"/>
+            <a:ext cx="822960" cy="0"/>
           </a:xfrm>
           <a:prstGeom prst="line">
             <a:avLst/>
@@ -7399,8 +7399,8 @@
         </p:nvCxnSpPr>
         <p:spPr>
           <a:xfrm>
-            <a:off x="8595359" y="3840480"/>
-            <a:ext cx="658369" cy="0"/>
+            <a:off x="8641080" y="3886200"/>
+            <a:ext cx="822960" cy="0"/>
           </a:xfrm>
           <a:prstGeom prst="line">
             <a:avLst/>
@@ -7421,8 +7421,8 @@
         </p:nvSpPr>
         <p:spPr>
           <a:xfrm>
-            <a:off x="8641080" y="3712464"/>
-            <a:ext cx="155448" cy="128016"/>
+            <a:off x="8686800" y="3749039"/>
+            <a:ext cx="201168" cy="137160"/>
           </a:xfrm>
           <a:prstGeom prst="rect">
             <a:avLst/>
@@ -7453,8 +7453,8 @@
         </p:nvSpPr>
         <p:spPr>
           <a:xfrm>
-            <a:off x="8846819" y="3758184"/>
-            <a:ext cx="155448" cy="82296"/>
+            <a:off x="8951976" y="3794760"/>
+            <a:ext cx="201168" cy="91440"/>
           </a:xfrm>
           <a:prstGeom prst="rect">
             <a:avLst/>
@@ -7485,8 +7485,8 @@
         </p:nvSpPr>
         <p:spPr>
           <a:xfrm>
-            <a:off x="9052559" y="3794760"/>
-            <a:ext cx="155448" cy="45720"/>
+            <a:off x="9217152" y="3831336"/>
+            <a:ext cx="201168" cy="54864"/>
           </a:xfrm>
           <a:prstGeom prst="rect">
             <a:avLst/>
@@ -7588,7 +7588,7 @@
         <p:spPr>
           <a:xfrm>
             <a:off x="6172200" y="4169663"/>
-            <a:ext cx="365760" cy="365760"/>
+            <a:ext cx="457200" cy="457200"/>
           </a:xfrm>
           <a:prstGeom prst="ellipse">
             <a:avLst/>
@@ -7607,7 +7607,7 @@
           <a:p>
             <a:pPr algn="ctr"/>
             <a:r>
-              <a:rPr sz="1950" b="1" i="0">
+              <a:rPr sz="2200" b="1" i="0">
                 <a:solidFill>
                   <a:srgbClr val="FFFFFF"/>
                 </a:solidFill>
@@ -7626,8 +7626,8 @@
         </p:nvSpPr>
         <p:spPr>
           <a:xfrm>
-            <a:off x="6601968" y="4224528"/>
-            <a:ext cx="2926080" cy="292608"/>
+            <a:off x="6748272" y="4242816"/>
+            <a:ext cx="2834640" cy="292608"/>
           </a:xfrm>
           <a:prstGeom prst="rect">
             <a:avLst/>
@@ -7642,7 +7642,7 @@
           <a:p>
             <a:pPr algn="l"/>
             <a:r>
-              <a:rPr sz="1900" b="1" i="1">
+              <a:rPr sz="1800" b="1" i="1">
                 <a:solidFill>
                   <a:srgbClr val="111111"/>
                 </a:solidFill>
@@ -7662,7 +7662,7 @@
         <p:spPr>
           <a:xfrm>
             <a:off x="9528048" y="4169663"/>
-            <a:ext cx="365760" cy="365760"/>
+            <a:ext cx="457200" cy="457200"/>
           </a:xfrm>
           <a:prstGeom prst="ellipse">
             <a:avLst/>
@@ -7681,7 +7681,7 @@
           <a:p>
             <a:pPr algn="ctr"/>
             <a:r>
-              <a:rPr sz="1950" b="1" i="0">
+              <a:rPr sz="2200" b="1" i="0">
                 <a:solidFill>
                   <a:srgbClr val="FFFFFF"/>
                 </a:solidFill>
@@ -7700,8 +7700,8 @@
         </p:nvSpPr>
         <p:spPr>
           <a:xfrm>
-            <a:off x="9985248" y="4224528"/>
-            <a:ext cx="2103120" cy="292608"/>
+            <a:off x="10058400" y="4242816"/>
+            <a:ext cx="2057400" cy="292608"/>
           </a:xfrm>
           <a:prstGeom prst="rect">
             <a:avLst/>
@@ -7716,7 +7716,7 @@
           <a:p>
             <a:pPr algn="l"/>
             <a:r>
-              <a:rPr sz="1900" b="1" i="1">
+              <a:rPr sz="1650" b="1" i="1">
                 <a:solidFill>
                   <a:srgbClr val="111111"/>
                 </a:solidFill>
@@ -7735,8 +7735,8 @@
         </p:nvSpPr>
         <p:spPr>
           <a:xfrm>
-            <a:off x="6355080" y="4709160"/>
-            <a:ext cx="694944" cy="365760"/>
+            <a:off x="6309360" y="4709160"/>
+            <a:ext cx="822960" cy="420624"/>
           </a:xfrm>
           <a:prstGeom prst="roundRect">
             <a:avLst>
@@ -7769,8 +7769,8 @@
         </p:nvSpPr>
         <p:spPr>
           <a:xfrm>
-            <a:off x="6428232" y="4809744"/>
-            <a:ext cx="402336" cy="45720"/>
+            <a:off x="6400800" y="4828032"/>
+            <a:ext cx="493776" cy="54864"/>
           </a:xfrm>
           <a:prstGeom prst="rect">
             <a:avLst/>
@@ -7799,8 +7799,8 @@
         </p:nvSpPr>
         <p:spPr>
           <a:xfrm>
-            <a:off x="7150608" y="4636008"/>
-            <a:ext cx="164592" cy="402336"/>
+            <a:off x="7242048" y="4636008"/>
+            <a:ext cx="201168" cy="457200"/>
           </a:xfrm>
           <a:prstGeom prst="rect">
             <a:avLst/>
@@ -7831,8 +7831,8 @@
         </p:nvSpPr>
         <p:spPr>
           <a:xfrm>
-            <a:off x="6355080" y="5166360"/>
-            <a:ext cx="694944" cy="365760"/>
+            <a:off x="6309360" y="5212080"/>
+            <a:ext cx="822960" cy="420624"/>
           </a:xfrm>
           <a:prstGeom prst="roundRect">
             <a:avLst>
@@ -7865,8 +7865,8 @@
         </p:nvSpPr>
         <p:spPr>
           <a:xfrm>
-            <a:off x="6428232" y="5266944"/>
-            <a:ext cx="402336" cy="45720"/>
+            <a:off x="6400800" y="5330952"/>
+            <a:ext cx="493776" cy="54864"/>
           </a:xfrm>
           <a:prstGeom prst="rect">
             <a:avLst/>
@@ -7895,8 +7895,8 @@
         </p:nvSpPr>
         <p:spPr>
           <a:xfrm>
-            <a:off x="7150608" y="5294376"/>
-            <a:ext cx="164592" cy="201168"/>
+            <a:off x="7242048" y="5358384"/>
+            <a:ext cx="201168" cy="237744"/>
           </a:xfrm>
           <a:prstGeom prst="rect">
             <a:avLst/>
@@ -7927,8 +7927,8 @@
         </p:nvSpPr>
         <p:spPr>
           <a:xfrm>
-            <a:off x="6355080" y="5623560"/>
-            <a:ext cx="694944" cy="365760"/>
+            <a:off x="6309360" y="5715000"/>
+            <a:ext cx="822960" cy="420624"/>
           </a:xfrm>
           <a:prstGeom prst="roundRect">
             <a:avLst>
@@ -7961,8 +7961,8 @@
         </p:nvSpPr>
         <p:spPr>
           <a:xfrm>
-            <a:off x="6428232" y="5724144"/>
-            <a:ext cx="402336" cy="45720"/>
+            <a:off x="6400800" y="5833872"/>
+            <a:ext cx="493776" cy="54864"/>
           </a:xfrm>
           <a:prstGeom prst="rect">
             <a:avLst/>
@@ -7991,8 +7991,8 @@
         </p:nvSpPr>
         <p:spPr>
           <a:xfrm>
-            <a:off x="7150608" y="5623560"/>
-            <a:ext cx="164592" cy="329184"/>
+            <a:off x="7242048" y="5715000"/>
+            <a:ext cx="201168" cy="384048"/>
           </a:xfrm>
           <a:prstGeom prst="rect">
             <a:avLst/>
@@ -8023,8 +8023,8 @@
         </p:nvSpPr>
         <p:spPr>
           <a:xfrm>
-            <a:off x="6126480" y="6144768"/>
-            <a:ext cx="1828800" cy="292608"/>
+            <a:off x="6144768" y="6291072"/>
+            <a:ext cx="2011680" cy="292608"/>
           </a:xfrm>
           <a:prstGeom prst="rect">
             <a:avLst/>
@@ -8039,13 +8039,13 @@
           <a:p>
             <a:pPr algn="ctr"/>
             <a:r>
-              <a:rPr sz="1400" b="1" i="1">
+              <a:rPr sz="1250" b="1" i="1">
                 <a:solidFill>
                   <a:srgbClr val="111111"/>
                 </a:solidFill>
                 <a:latin typeface="Times New Roman"/>
               </a:rPr>
-              <a:t>loss ∝ demand served</a:t>
+              <a:t>loss ∝ demand</a:t>
             </a:r>
           </a:p>
         </p:txBody>
@@ -8058,8 +8058,8 @@
         </p:nvCxnSpPr>
         <p:spPr>
           <a:xfrm>
-            <a:off x="7452360" y="5257800"/>
-            <a:ext cx="411480" cy="0"/>
+            <a:off x="7589520" y="5349240"/>
+            <a:ext cx="384048" cy="0"/>
           </a:xfrm>
           <a:prstGeom prst="line">
             <a:avLst/>
@@ -8081,8 +8081,8 @@
         </p:nvSpPr>
         <p:spPr>
           <a:xfrm>
-            <a:off x="7772400" y="4764024"/>
-            <a:ext cx="1005840" cy="896112"/>
+            <a:off x="8023859" y="4809744"/>
+            <a:ext cx="1234440" cy="1078992"/>
           </a:xfrm>
           <a:prstGeom prst="roundRect">
             <a:avLst>
@@ -8115,7 +8115,7 @@
         </p:nvSpPr>
         <p:spPr>
           <a:xfrm>
-            <a:off x="8264347" y="4636008"/>
+            <a:off x="8630107" y="4681728"/>
             <a:ext cx="21945" cy="128016"/>
           </a:xfrm>
           <a:prstGeom prst="rect">
@@ -8145,7 +8145,7 @@
         </p:nvSpPr>
         <p:spPr>
           <a:xfrm>
-            <a:off x="8229600" y="4544568"/>
+            <a:off x="8595359" y="4590288"/>
             <a:ext cx="91440" cy="91440"/>
           </a:xfrm>
           <a:prstGeom prst="ellipse">
@@ -8175,7 +8175,7 @@
         </p:nvSpPr>
         <p:spPr>
           <a:xfrm>
-            <a:off x="8053120" y="5081320"/>
+            <a:off x="8377732" y="5200192"/>
             <a:ext cx="82296" cy="82296"/>
           </a:xfrm>
           <a:prstGeom prst="ellipse">
@@ -8205,7 +8205,7 @@
         </p:nvSpPr>
         <p:spPr>
           <a:xfrm>
-            <a:off x="8415223" y="5081320"/>
+            <a:off x="8822131" y="5200192"/>
             <a:ext cx="82296" cy="82296"/>
           </a:xfrm>
           <a:prstGeom prst="ellipse">
@@ -8235,8 +8235,8 @@
         </p:nvSpPr>
         <p:spPr>
           <a:xfrm>
-            <a:off x="8134502" y="5319613"/>
-            <a:ext cx="281635" cy="27432"/>
+            <a:off x="8468258" y="5478719"/>
+            <a:ext cx="345643" cy="27432"/>
           </a:xfrm>
           <a:prstGeom prst="roundRect">
             <a:avLst>
@@ -8267,8 +8267,8 @@
         </p:nvSpPr>
         <p:spPr>
           <a:xfrm>
-            <a:off x="7452360" y="5696712"/>
-            <a:ext cx="1645920" cy="256032"/>
+            <a:off x="7703819" y="5925312"/>
+            <a:ext cx="1874519" cy="256032"/>
           </a:xfrm>
           <a:prstGeom prst="rect">
             <a:avLst/>
@@ -8283,7 +8283,7 @@
           <a:p>
             <a:pPr algn="ctr"/>
             <a:r>
-              <a:rPr sz="1460" b="1" i="0">
+              <a:rPr sz="1500" b="1" i="0">
                 <a:solidFill>
                   <a:srgbClr val="1F1F1E"/>
                 </a:solidFill>
@@ -8302,7 +8302,7 @@
         </p:nvCxnSpPr>
         <p:spPr>
           <a:xfrm>
-            <a:off x="7818120" y="6419088"/>
+            <a:off x="6720840" y="6492240"/>
             <a:ext cx="1417320" cy="0"/>
           </a:xfrm>
           <a:prstGeom prst="line">
@@ -8324,7 +8324,7 @@
         </p:nvCxnSpPr>
         <p:spPr>
           <a:xfrm>
-            <a:off x="7818120" y="6272783"/>
+            <a:off x="6720840" y="6345936"/>
             <a:ext cx="1417320" cy="0"/>
           </a:xfrm>
           <a:prstGeom prst="line">
@@ -8346,7 +8346,7 @@
         </p:nvCxnSpPr>
         <p:spPr>
           <a:xfrm>
-            <a:off x="7818120" y="6126479"/>
+            <a:off x="6720840" y="6199631"/>
             <a:ext cx="1417320" cy="0"/>
           </a:xfrm>
           <a:prstGeom prst="line">
@@ -8368,8 +8368,8 @@
         </p:nvCxnSpPr>
         <p:spPr>
           <a:xfrm flipV="1">
-            <a:off x="7845552" y="6126480"/>
-            <a:ext cx="292608" cy="228600"/>
+            <a:off x="6748272" y="6236208"/>
+            <a:ext cx="292608" cy="192024"/>
           </a:xfrm>
           <a:prstGeom prst="line">
             <a:avLst/>
@@ -8390,8 +8390,8 @@
         </p:nvCxnSpPr>
         <p:spPr>
           <a:xfrm flipV="1">
-            <a:off x="8138160" y="5925312"/>
-            <a:ext cx="320040" cy="201168"/>
+            <a:off x="7040880" y="6053328"/>
+            <a:ext cx="320040" cy="182880"/>
           </a:xfrm>
           <a:prstGeom prst="line">
             <a:avLst/>
@@ -8412,7 +8412,7 @@
         </p:nvCxnSpPr>
         <p:spPr>
           <a:xfrm flipV="1">
-            <a:off x="8458200" y="5870448"/>
+            <a:off x="7360920" y="5998464"/>
             <a:ext cx="274320" cy="54864"/>
           </a:xfrm>
           <a:prstGeom prst="line">
@@ -8434,8 +8434,8 @@
         </p:nvCxnSpPr>
         <p:spPr>
           <a:xfrm>
-            <a:off x="8732520" y="5870448"/>
-            <a:ext cx="274320" cy="118872"/>
+            <a:off x="7635240" y="5998464"/>
+            <a:ext cx="274320" cy="109728"/>
           </a:xfrm>
           <a:prstGeom prst="line">
             <a:avLst/>
@@ -8456,7 +8456,7 @@
         </p:nvSpPr>
         <p:spPr>
           <a:xfrm>
-            <a:off x="8659368" y="5797296"/>
+            <a:off x="7562088" y="5925312"/>
             <a:ext cx="155448" cy="155448"/>
           </a:xfrm>
           <a:prstGeom prst="ellipse">
@@ -8488,7 +8488,7 @@
         </p:nvSpPr>
         <p:spPr>
           <a:xfrm>
-            <a:off x="7589520" y="6455664"/>
+            <a:off x="6537960" y="6510528"/>
             <a:ext cx="2011680" cy="292608"/>
           </a:xfrm>
           <a:prstGeom prst="rect">
@@ -8504,7 +8504,7 @@
           <a:p>
             <a:pPr algn="ctr"/>
             <a:r>
-              <a:rPr sz="1340" b="1" i="1">
+              <a:rPr sz="1200" b="1" i="1">
                 <a:solidFill>
                   <a:srgbClr val="111111"/>
                 </a:solidFill>
@@ -8557,8 +8557,8 @@
         </p:nvSpPr>
         <p:spPr>
           <a:xfrm>
-            <a:off x="9802368" y="4773168"/>
-            <a:ext cx="603504" cy="603504"/>
+            <a:off x="9784080" y="4736592"/>
+            <a:ext cx="713232" cy="713232"/>
           </a:xfrm>
           <a:prstGeom prst="ellipse">
             <a:avLst/>
@@ -8680,8 +8680,8 @@
         </p:nvSpPr>
         <p:spPr>
           <a:xfrm>
-            <a:off x="9829800" y="5989320"/>
-            <a:ext cx="457200" cy="457200"/>
+            <a:off x="9784080" y="5961888"/>
+            <a:ext cx="548640" cy="548640"/>
           </a:xfrm>
           <a:prstGeom prst="diamond">
             <a:avLst/>
@@ -8782,8 +8782,8 @@
         </p:nvCxnSpPr>
         <p:spPr>
           <a:xfrm>
-            <a:off x="9326880" y="6217920"/>
-            <a:ext cx="438912" cy="0"/>
+            <a:off x="9281160" y="6236208"/>
+            <a:ext cx="429768" cy="0"/>
           </a:xfrm>
           <a:prstGeom prst="line">
             <a:avLst/>
